--- a/slides/ws4-pattern-c-hybrid-editable-slides.pptx
+++ b/slides/ws4-pattern-c-hybrid-editable-slides.pptx
@@ -16635,6 +16635,7 @@
               <a:srgbClr val="5F6368"/>
             </a:solidFill>
             <a:prstDash val="solid"/>
+            <a:headEnd type="triangle" w="sm" len="sm"/>
           </a:ln>
         </p:spPr>
       </p:sp>
@@ -17202,6 +17203,7 @@
               <a:srgbClr val="5F6368"/>
             </a:solidFill>
             <a:prstDash val="solid"/>
+            <a:headEnd type="triangle" w="sm" len="sm"/>
           </a:ln>
         </p:spPr>
       </p:sp>
@@ -17249,6 +17251,7 @@
               <a:srgbClr val="5F6368"/>
             </a:solidFill>
             <a:prstDash val="solid"/>
+            <a:headEnd type="triangle" w="sm" len="sm"/>
           </a:ln>
         </p:spPr>
       </p:sp>
@@ -17438,6 +17441,7 @@
               <a:srgbClr val="5F6368"/>
             </a:solidFill>
             <a:prstDash val="solid"/>
+            <a:headEnd type="triangle" w="sm" len="sm"/>
           </a:ln>
         </p:spPr>
       </p:sp>
@@ -17485,6 +17489,7 @@
               <a:srgbClr val="5F6368"/>
             </a:solidFill>
             <a:prstDash val="solid"/>
+            <a:headEnd type="triangle" w="sm" len="sm"/>
           </a:ln>
         </p:spPr>
       </p:sp>
@@ -19326,7 +19331,7 @@
                 <a:ea typeface="Arial" pitchFamily="34" charset="-122"/>
                 <a:cs typeface="Arial" pitchFamily="34" charset="-120"/>
               </a:rPr>
-              <a:t>Gemini &amp; Claude 3.7</a:t>
+              <a:t>Gemini 2.5 Pro PT</a:t>
             </a:r>
             <a:endParaRPr lang="en-US" sz="500" dirty="0"/>
           </a:p>

--- a/slides/ws4-pattern-c-hybrid-editable-slides.pptx
+++ b/slides/ws4-pattern-c-hybrid-editable-slides.pptx
@@ -19704,975 +19704,7 @@
       </p:sp>
       <p:sp>
         <p:nvSpPr>
-          <p:cNvPr id="185" name="Text 163"/>
-          <p:cNvSpPr/>
-          <p:nvPr/>
-        </p:nvSpPr>
-        <p:spPr>
-          <a:xfrm>
-            <a:off x="5339182" y="3352190"/>
-            <a:ext cx="760781" cy="219456"/>
-          </a:xfrm>
-          <a:prstGeom prst="rect">
-            <a:avLst/>
-          </a:prstGeom>
-          <a:noFill/>
-          <a:ln/>
-        </p:spPr>
-        <p:txBody>
-          <a:bodyPr wrap="square" lIns="0" tIns="0" rIns="0" bIns="0" rtlCol="0" anchor="ctr">
-            <a:normAutofit/>
-          </a:bodyPr>
-          <a:lstStyle/>
-          <a:p>
-            <a:pPr algn="l" indent="0" marL="0">
-              <a:lnSpc>
-                <a:spcPct val="88000"/>
-              </a:lnSpc>
-              <a:buNone/>
-            </a:pPr>
-            <a:r>
-              <a:rPr lang="en-US" sz="500" b="1" dirty="0">
-                <a:solidFill>
-                  <a:srgbClr val="202124"/>
-                </a:solidFill>
-                <a:latin typeface="Arial" pitchFamily="34" charset="0"/>
-                <a:ea typeface="Arial" pitchFamily="34" charset="-122"/>
-                <a:cs typeface="Arial" pitchFamily="34" charset="-120"/>
-              </a:rPr>
-              <a:t>Live promotion:</a:t>
-            </a:r>
-            <a:endParaRPr lang="en-US" sz="500" dirty="0"/>
-          </a:p>
-          <a:p>
-            <a:pPr algn="l" indent="0" marL="0">
-              <a:lnSpc>
-                <a:spcPct val="88000"/>
-              </a:lnSpc>
-              <a:buNone/>
-            </a:pPr>
-            <a:r>
-              <a:rPr lang="en-US" sz="440" dirty="0">
-                <a:solidFill>
-                  <a:srgbClr val="202124"/>
-                </a:solidFill>
-                <a:latin typeface="Arial" pitchFamily="34" charset="0"/>
-                <a:ea typeface="Arial" pitchFamily="34" charset="-122"/>
-                <a:cs typeface="Arial" pitchFamily="34" charset="-120"/>
-              </a:rPr>
-              <a:t>Pool -&gt; PSC Spoke</a:t>
-            </a:r>
-            <a:endParaRPr lang="en-US" sz="500" dirty="0"/>
-          </a:p>
-        </p:txBody>
-      </p:sp>
-      <p:sp>
-        <p:nvSpPr>
-          <p:cNvPr id="186" name="Text 164"/>
-          <p:cNvSpPr/>
-          <p:nvPr/>
-        </p:nvSpPr>
-        <p:spPr>
-          <a:xfrm>
-            <a:off x="2691994" y="4813402"/>
-            <a:ext cx="782726" cy="219456"/>
-          </a:xfrm>
-          <a:prstGeom prst="rect">
-            <a:avLst/>
-          </a:prstGeom>
-          <a:noFill/>
-          <a:ln/>
-        </p:spPr>
-        <p:txBody>
-          <a:bodyPr wrap="square" lIns="0" tIns="0" rIns="0" bIns="0" rtlCol="0" anchor="ctr">
-            <a:normAutofit/>
-          </a:bodyPr>
-          <a:lstStyle/>
-          <a:p>
-            <a:pPr algn="ctr" indent="0" marL="0">
-              <a:lnSpc>
-                <a:spcPct val="88000"/>
-              </a:lnSpc>
-              <a:buNone/>
-            </a:pPr>
-            <a:r>
-              <a:rPr lang="en-US" sz="500" b="1" dirty="0">
-                <a:solidFill>
-                  <a:srgbClr val="202124"/>
-                </a:solidFill>
-                <a:latin typeface="Arial" pitchFamily="34" charset="0"/>
-                <a:ea typeface="Arial" pitchFamily="34" charset="-122"/>
-                <a:cs typeface="Arial" pitchFamily="34" charset="-120"/>
-              </a:rPr>
-              <a:t>Shared Pool</a:t>
-            </a:r>
-            <a:endParaRPr lang="en-US" sz="500" dirty="0"/>
-          </a:p>
-          <a:p>
-            <a:pPr algn="ctr" indent="0" marL="0">
-              <a:lnSpc>
-                <a:spcPct val="88000"/>
-              </a:lnSpc>
-              <a:buNone/>
-            </a:pPr>
-            <a:r>
-              <a:rPr lang="en-US" sz="440" dirty="0">
-                <a:solidFill>
-                  <a:srgbClr val="202124"/>
-                </a:solidFill>
-                <a:latin typeface="Arial" pitchFamily="34" charset="0"/>
-                <a:ea typeface="Arial" pitchFamily="34" charset="-122"/>
-                <a:cs typeface="Arial" pitchFamily="34" charset="-120"/>
-              </a:rPr>
-              <a:t>RAG</a:t>
-            </a:r>
-            <a:endParaRPr lang="en-US" sz="500" dirty="0"/>
-          </a:p>
-        </p:txBody>
-      </p:sp>
-      <p:sp>
-        <p:nvSpPr>
-          <p:cNvPr id="187" name="Text 165"/>
-          <p:cNvSpPr/>
-          <p:nvPr/>
-        </p:nvSpPr>
-        <p:spPr>
-          <a:xfrm>
-            <a:off x="2691994" y="5447995"/>
-            <a:ext cx="782726" cy="219456"/>
-          </a:xfrm>
-          <a:prstGeom prst="rect">
-            <a:avLst/>
-          </a:prstGeom>
-          <a:noFill/>
-          <a:ln/>
-        </p:spPr>
-        <p:txBody>
-          <a:bodyPr wrap="square" lIns="0" tIns="0" rIns="0" bIns="0" rtlCol="0" anchor="ctr">
-            <a:normAutofit/>
-          </a:bodyPr>
-          <a:lstStyle/>
-          <a:p>
-            <a:pPr algn="ctr" indent="0" marL="0">
-              <a:lnSpc>
-                <a:spcPct val="88000"/>
-              </a:lnSpc>
-              <a:buNone/>
-            </a:pPr>
-            <a:r>
-              <a:rPr lang="en-US" sz="500" b="1" dirty="0">
-                <a:solidFill>
-                  <a:srgbClr val="202124"/>
-                </a:solidFill>
-                <a:latin typeface="Arial" pitchFamily="34" charset="0"/>
-                <a:ea typeface="Arial" pitchFamily="34" charset="-122"/>
-                <a:cs typeface="Arial" pitchFamily="34" charset="-120"/>
-              </a:rPr>
-              <a:t>Streams State to</a:t>
-            </a:r>
-            <a:endParaRPr lang="en-US" sz="500" dirty="0"/>
-          </a:p>
-          <a:p>
-            <a:pPr algn="ctr" indent="0" marL="0">
-              <a:lnSpc>
-                <a:spcPct val="88000"/>
-              </a:lnSpc>
-              <a:buNone/>
-            </a:pPr>
-            <a:r>
-              <a:rPr lang="en-US" sz="440" dirty="0">
-                <a:solidFill>
-                  <a:srgbClr val="202124"/>
-                </a:solidFill>
-                <a:latin typeface="Arial" pitchFamily="34" charset="0"/>
-                <a:ea typeface="Arial" pitchFamily="34" charset="-122"/>
-                <a:cs typeface="Arial" pitchFamily="34" charset="-120"/>
-              </a:rPr>
-              <a:t>PSC Spoke</a:t>
-            </a:r>
-            <a:endParaRPr lang="en-US" sz="500" dirty="0"/>
-          </a:p>
-        </p:txBody>
-      </p:sp>
-      <p:sp>
-        <p:nvSpPr>
-          <p:cNvPr id="188" name="Text 166"/>
-          <p:cNvSpPr/>
-          <p:nvPr/>
-        </p:nvSpPr>
-        <p:spPr>
-          <a:xfrm>
-            <a:off x="5056632" y="4813402"/>
-            <a:ext cx="782726" cy="219456"/>
-          </a:xfrm>
-          <a:prstGeom prst="rect">
-            <a:avLst/>
-          </a:prstGeom>
-          <a:noFill/>
-          <a:ln/>
-        </p:spPr>
-        <p:txBody>
-          <a:bodyPr wrap="square" lIns="0" tIns="0" rIns="0" bIns="0" rtlCol="0" anchor="ctr">
-            <a:normAutofit/>
-          </a:bodyPr>
-          <a:lstStyle/>
-          <a:p>
-            <a:pPr algn="ctr" indent="0" marL="0">
-              <a:lnSpc>
-                <a:spcPct val="88000"/>
-              </a:lnSpc>
-              <a:buNone/>
-            </a:pPr>
-            <a:r>
-              <a:rPr lang="en-US" sz="500" b="1" dirty="0">
-                <a:solidFill>
-                  <a:srgbClr val="202124"/>
-                </a:solidFill>
-                <a:latin typeface="Arial" pitchFamily="34" charset="0"/>
-                <a:ea typeface="Arial" pitchFamily="34" charset="-122"/>
-                <a:cs typeface="Arial" pitchFamily="34" charset="-120"/>
-              </a:rPr>
-              <a:t>Unidirectional</a:t>
-            </a:r>
-            <a:endParaRPr lang="en-US" sz="500" dirty="0"/>
-          </a:p>
-          <a:p>
-            <a:pPr algn="ctr" indent="0" marL="0">
-              <a:lnSpc>
-                <a:spcPct val="88000"/>
-              </a:lnSpc>
-              <a:buNone/>
-            </a:pPr>
-            <a:r>
-              <a:rPr lang="en-US" sz="440" dirty="0">
-                <a:solidFill>
-                  <a:srgbClr val="202124"/>
-                </a:solidFill>
-                <a:latin typeface="Arial" pitchFamily="34" charset="0"/>
-                <a:ea typeface="Arial" pitchFamily="34" charset="-122"/>
-                <a:cs typeface="Arial" pitchFamily="34" charset="-120"/>
-              </a:rPr>
-              <a:t>PSC Bridge</a:t>
-            </a:r>
-            <a:endParaRPr lang="en-US" sz="500" dirty="0"/>
-          </a:p>
-        </p:txBody>
-      </p:sp>
-      <p:sp>
-        <p:nvSpPr>
-          <p:cNvPr id="189" name="Text 167"/>
-          <p:cNvSpPr/>
-          <p:nvPr/>
-        </p:nvSpPr>
-        <p:spPr>
-          <a:xfrm>
-            <a:off x="5056632" y="5447995"/>
-            <a:ext cx="782726" cy="219456"/>
-          </a:xfrm>
-          <a:prstGeom prst="rect">
-            <a:avLst/>
-          </a:prstGeom>
-          <a:noFill/>
-          <a:ln/>
-        </p:spPr>
-        <p:txBody>
-          <a:bodyPr wrap="square" lIns="0" tIns="0" rIns="0" bIns="0" rtlCol="0" anchor="ctr">
-            <a:normAutofit/>
-          </a:bodyPr>
-          <a:lstStyle/>
-          <a:p>
-            <a:pPr algn="ctr" indent="0" marL="0">
-              <a:lnSpc>
-                <a:spcPct val="88000"/>
-              </a:lnSpc>
-              <a:buNone/>
-            </a:pPr>
-            <a:r>
-              <a:rPr lang="en-US" sz="500" b="1" dirty="0">
-                <a:solidFill>
-                  <a:srgbClr val="202124"/>
-                </a:solidFill>
-                <a:latin typeface="Arial" pitchFamily="34" charset="0"/>
-                <a:ea typeface="Arial" pitchFamily="34" charset="-122"/>
-                <a:cs typeface="Arial" pitchFamily="34" charset="-120"/>
-              </a:rPr>
-              <a:t>CMEK-Encrypted</a:t>
-            </a:r>
-            <a:endParaRPr lang="en-US" sz="500" dirty="0"/>
-          </a:p>
-          <a:p>
-            <a:pPr algn="ctr" indent="0" marL="0">
-              <a:lnSpc>
-                <a:spcPct val="88000"/>
-              </a:lnSpc>
-              <a:buNone/>
-            </a:pPr>
-            <a:r>
-              <a:rPr lang="en-US" sz="440" dirty="0">
-                <a:solidFill>
-                  <a:srgbClr val="202124"/>
-                </a:solidFill>
-                <a:latin typeface="Arial" pitchFamily="34" charset="0"/>
-                <a:ea typeface="Arial" pitchFamily="34" charset="-122"/>
-                <a:cs typeface="Arial" pitchFamily="34" charset="-120"/>
-              </a:rPr>
-              <a:t>Spoke Storage</a:t>
-            </a:r>
-            <a:endParaRPr lang="en-US" sz="500" dirty="0"/>
-          </a:p>
-        </p:txBody>
-      </p:sp>
-      <p:sp>
-        <p:nvSpPr>
-          <p:cNvPr id="190" name="Text 168"/>
-          <p:cNvSpPr/>
-          <p:nvPr/>
-        </p:nvSpPr>
-        <p:spPr>
-          <a:xfrm>
-            <a:off x="1757477" y="5598871"/>
-            <a:ext cx="686714" cy="219456"/>
-          </a:xfrm>
-          <a:prstGeom prst="rect">
-            <a:avLst/>
-          </a:prstGeom>
-          <a:noFill/>
-          <a:ln/>
-        </p:spPr>
-        <p:txBody>
-          <a:bodyPr wrap="square" lIns="0" tIns="0" rIns="0" bIns="0" rtlCol="0" anchor="ctr">
-            <a:normAutofit/>
-          </a:bodyPr>
-          <a:lstStyle/>
-          <a:p>
-            <a:pPr algn="l" indent="0" marL="0">
-              <a:lnSpc>
-                <a:spcPct val="88000"/>
-              </a:lnSpc>
-              <a:buNone/>
-            </a:pPr>
-            <a:r>
-              <a:rPr lang="en-US" sz="500" b="1" dirty="0">
-                <a:solidFill>
-                  <a:srgbClr val="202124"/>
-                </a:solidFill>
-                <a:latin typeface="Arial" pitchFamily="34" charset="0"/>
-                <a:ea typeface="Arial" pitchFamily="34" charset="-122"/>
-                <a:cs typeface="Arial" pitchFamily="34" charset="-120"/>
-              </a:rPr>
-              <a:t>Pooled</a:t>
-            </a:r>
-            <a:endParaRPr lang="en-US" sz="500" dirty="0"/>
-          </a:p>
-          <a:p>
-            <a:pPr algn="l" indent="0" marL="0">
-              <a:lnSpc>
-                <a:spcPct val="88000"/>
-              </a:lnSpc>
-              <a:buNone/>
-            </a:pPr>
-            <a:r>
-              <a:rPr lang="en-US" sz="440" dirty="0">
-                <a:solidFill>
-                  <a:srgbClr val="202124"/>
-                </a:solidFill>
-                <a:latin typeface="Arial" pitchFamily="34" charset="0"/>
-                <a:ea typeface="Arial" pitchFamily="34" charset="-122"/>
-                <a:cs typeface="Arial" pitchFamily="34" charset="-120"/>
-              </a:rPr>
-              <a:t>inference</a:t>
-            </a:r>
-            <a:endParaRPr lang="en-US" sz="500" dirty="0"/>
-          </a:p>
-        </p:txBody>
-      </p:sp>
-      <p:sp>
-        <p:nvSpPr>
-          <p:cNvPr id="191" name="Text 169"/>
-          <p:cNvSpPr/>
-          <p:nvPr/>
-        </p:nvSpPr>
-        <p:spPr>
-          <a:xfrm>
-            <a:off x="3905402" y="3348533"/>
-            <a:ext cx="738835" cy="219456"/>
-          </a:xfrm>
-          <a:prstGeom prst="rect">
-            <a:avLst/>
-          </a:prstGeom>
-          <a:noFill/>
-          <a:ln/>
-        </p:spPr>
-        <p:txBody>
-          <a:bodyPr wrap="square" lIns="0" tIns="0" rIns="0" bIns="0" rtlCol="0" anchor="ctr">
-            <a:normAutofit/>
-          </a:bodyPr>
-          <a:lstStyle/>
-          <a:p>
-            <a:pPr algn="l" indent="0" marL="0">
-              <a:lnSpc>
-                <a:spcPct val="88000"/>
-              </a:lnSpc>
-              <a:buNone/>
-            </a:pPr>
-            <a:r>
-              <a:rPr lang="en-US" sz="500" b="1" dirty="0">
-                <a:solidFill>
-                  <a:srgbClr val="202124"/>
-                </a:solidFill>
-                <a:latin typeface="Arial" pitchFamily="34" charset="0"/>
-                <a:ea typeface="Arial" pitchFamily="34" charset="-122"/>
-                <a:cs typeface="Arial" pitchFamily="34" charset="-120"/>
-              </a:rPr>
-              <a:t>Seamless response</a:t>
-            </a:r>
-            <a:endParaRPr lang="en-US" sz="500" dirty="0"/>
-          </a:p>
-          <a:p>
-            <a:pPr algn="l" indent="0" marL="0">
-              <a:lnSpc>
-                <a:spcPct val="88000"/>
-              </a:lnSpc>
-              <a:buNone/>
-            </a:pPr>
-            <a:r>
-              <a:rPr lang="en-US" sz="440" dirty="0">
-                <a:solidFill>
-                  <a:srgbClr val="202124"/>
-                </a:solidFill>
-                <a:latin typeface="Arial" pitchFamily="34" charset="0"/>
-                <a:ea typeface="Arial" pitchFamily="34" charset="-122"/>
-                <a:cs typeface="Arial" pitchFamily="34" charset="-120"/>
-              </a:rPr>
-              <a:t>(0 dropped sessions)</a:t>
-            </a:r>
-            <a:endParaRPr lang="en-US" sz="500" dirty="0"/>
-          </a:p>
-        </p:txBody>
-      </p:sp>
-      <p:sp>
-        <p:nvSpPr>
-          <p:cNvPr id="192" name="Text 170"/>
-          <p:cNvSpPr/>
-          <p:nvPr/>
-        </p:nvSpPr>
-        <p:spPr>
-          <a:xfrm>
-            <a:off x="2983687" y="3348533"/>
-            <a:ext cx="669341" cy="219456"/>
-          </a:xfrm>
-          <a:prstGeom prst="rect">
-            <a:avLst/>
-          </a:prstGeom>
-          <a:noFill/>
-          <a:ln/>
-        </p:spPr>
-        <p:txBody>
-          <a:bodyPr wrap="square" lIns="0" tIns="0" rIns="0" bIns="0" rtlCol="0" anchor="ctr">
-            <a:normAutofit/>
-          </a:bodyPr>
-          <a:lstStyle/>
-          <a:p>
-            <a:pPr algn="l" indent="0" marL="0">
-              <a:lnSpc>
-                <a:spcPct val="88000"/>
-              </a:lnSpc>
-              <a:buNone/>
-            </a:pPr>
-            <a:r>
-              <a:rPr lang="en-US" sz="500" b="1" dirty="0">
-                <a:solidFill>
-                  <a:srgbClr val="202124"/>
-                </a:solidFill>
-                <a:latin typeface="Arial" pitchFamily="34" charset="0"/>
-                <a:ea typeface="Arial" pitchFamily="34" charset="-122"/>
-                <a:cs typeface="Arial" pitchFamily="34" charset="-120"/>
-              </a:rPr>
-              <a:t>Route Standard to Pool</a:t>
-            </a:r>
-            <a:endParaRPr lang="en-US" sz="500" dirty="0"/>
-          </a:p>
-          <a:p>
-            <a:pPr algn="l" indent="0" marL="0">
-              <a:lnSpc>
-                <a:spcPct val="88000"/>
-              </a:lnSpc>
-              <a:buNone/>
-            </a:pPr>
-            <a:r>
-              <a:rPr lang="en-US" sz="440" dirty="0">
-                <a:solidFill>
-                  <a:srgbClr val="202124"/>
-                </a:solidFill>
-                <a:latin typeface="Arial" pitchFamily="34" charset="0"/>
-                <a:ea typeface="Arial" pitchFamily="34" charset="-122"/>
-                <a:cs typeface="Arial" pitchFamily="34" charset="-120"/>
-              </a:rPr>
-              <a:t>or Enterprise via PSC</a:t>
-            </a:r>
-            <a:endParaRPr lang="en-US" sz="500" dirty="0"/>
-          </a:p>
-        </p:txBody>
-      </p:sp>
-      <p:sp>
-        <p:nvSpPr>
-          <p:cNvPr id="193" name="Text 171"/>
-          <p:cNvSpPr/>
-          <p:nvPr/>
-        </p:nvSpPr>
-        <p:spPr>
-          <a:xfrm>
-            <a:off x="2462479" y="2865730"/>
-            <a:ext cx="678485" cy="219456"/>
-          </a:xfrm>
-          <a:prstGeom prst="rect">
-            <a:avLst/>
-          </a:prstGeom>
-          <a:noFill/>
-          <a:ln/>
-        </p:spPr>
-        <p:txBody>
-          <a:bodyPr wrap="square" lIns="0" tIns="0" rIns="0" bIns="0" rtlCol="0" anchor="ctr">
-            <a:normAutofit/>
-          </a:bodyPr>
-          <a:lstStyle/>
-          <a:p>
-            <a:pPr algn="ctr" indent="0" marL="0">
-              <a:lnSpc>
-                <a:spcPct val="88000"/>
-              </a:lnSpc>
-              <a:buNone/>
-            </a:pPr>
-            <a:r>
-              <a:rPr lang="en-US" sz="500" b="1" dirty="0">
-                <a:solidFill>
-                  <a:srgbClr val="202124"/>
-                </a:solidFill>
-                <a:latin typeface="Arial" pitchFamily="34" charset="0"/>
-                <a:ea typeface="Arial" pitchFamily="34" charset="-122"/>
-                <a:cs typeface="Arial" pitchFamily="34" charset="-120"/>
-              </a:rPr>
-              <a:t>Atomic route</a:t>
-            </a:r>
-            <a:endParaRPr lang="en-US" sz="500" dirty="0"/>
-          </a:p>
-          <a:p>
-            <a:pPr algn="ctr" indent="0" marL="0">
-              <a:lnSpc>
-                <a:spcPct val="88000"/>
-              </a:lnSpc>
-              <a:buNone/>
-            </a:pPr>
-            <a:r>
-              <a:rPr lang="en-US" sz="440" dirty="0">
-                <a:solidFill>
-                  <a:srgbClr val="202124"/>
-                </a:solidFill>
-                <a:latin typeface="Arial" pitchFamily="34" charset="0"/>
-                <a:ea typeface="Arial" pitchFamily="34" charset="-122"/>
-                <a:cs typeface="Arial" pitchFamily="34" charset="-120"/>
-              </a:rPr>
-              <a:t>lookup</a:t>
-            </a:r>
-            <a:endParaRPr lang="en-US" sz="500" dirty="0"/>
-          </a:p>
-        </p:txBody>
-      </p:sp>
-      <p:sp>
-        <p:nvSpPr>
-          <p:cNvPr id="194" name="Text 172"/>
-          <p:cNvSpPr/>
-          <p:nvPr/>
-        </p:nvSpPr>
-        <p:spPr>
-          <a:xfrm>
-            <a:off x="1757477" y="4614062"/>
-            <a:ext cx="686714" cy="121615"/>
-          </a:xfrm>
-          <a:prstGeom prst="rect">
-            <a:avLst/>
-          </a:prstGeom>
-          <a:noFill/>
-          <a:ln/>
-        </p:spPr>
-        <p:txBody>
-          <a:bodyPr wrap="square" lIns="0" tIns="0" rIns="0" bIns="0" rtlCol="0" anchor="ctr">
-            <a:normAutofit/>
-          </a:bodyPr>
-          <a:lstStyle/>
-          <a:p>
-            <a:pPr algn="l" indent="0" marL="0">
-              <a:lnSpc>
-                <a:spcPct val="88000"/>
-              </a:lnSpc>
-              <a:buNone/>
-            </a:pPr>
-            <a:r>
-              <a:rPr lang="en-US" sz="500" b="1" dirty="0">
-                <a:solidFill>
-                  <a:srgbClr val="202124"/>
-                </a:solidFill>
-                <a:latin typeface="Arial" pitchFamily="34" charset="0"/>
-                <a:ea typeface="Arial" pitchFamily="34" charset="-122"/>
-                <a:cs typeface="Arial" pitchFamily="34" charset="-120"/>
-              </a:rPr>
-              <a:t>Sanitize request</a:t>
-            </a:r>
-            <a:endParaRPr lang="en-US" sz="500" dirty="0"/>
-          </a:p>
-        </p:txBody>
-      </p:sp>
-      <p:sp>
-        <p:nvSpPr>
-          <p:cNvPr id="195" name="Text 173"/>
-          <p:cNvSpPr/>
-          <p:nvPr/>
-        </p:nvSpPr>
-        <p:spPr>
-          <a:xfrm>
-            <a:off x="1757477" y="4822546"/>
-            <a:ext cx="686714" cy="121615"/>
-          </a:xfrm>
-          <a:prstGeom prst="rect">
-            <a:avLst/>
-          </a:prstGeom>
-          <a:noFill/>
-          <a:ln/>
-        </p:spPr>
-        <p:txBody>
-          <a:bodyPr wrap="square" lIns="0" tIns="0" rIns="0" bIns="0" rtlCol="0" anchor="ctr">
-            <a:normAutofit/>
-          </a:bodyPr>
-          <a:lstStyle/>
-          <a:p>
-            <a:pPr algn="l" indent="0" marL="0">
-              <a:lnSpc>
-                <a:spcPct val="88000"/>
-              </a:lnSpc>
-              <a:buNone/>
-            </a:pPr>
-            <a:r>
-              <a:rPr lang="en-US" sz="500" b="1" dirty="0">
-                <a:solidFill>
-                  <a:srgbClr val="202124"/>
-                </a:solidFill>
-                <a:latin typeface="Arial" pitchFamily="34" charset="0"/>
-                <a:ea typeface="Arial" pitchFamily="34" charset="-122"/>
-                <a:cs typeface="Arial" pitchFamily="34" charset="-120"/>
-              </a:rPr>
-              <a:t>Sanitize response</a:t>
-            </a:r>
-            <a:endParaRPr lang="en-US" sz="500" dirty="0"/>
-          </a:p>
-        </p:txBody>
-      </p:sp>
-      <p:sp>
-        <p:nvSpPr>
-          <p:cNvPr id="196" name="Text 174"/>
-          <p:cNvSpPr/>
-          <p:nvPr/>
-        </p:nvSpPr>
-        <p:spPr>
-          <a:xfrm>
-            <a:off x="2435962" y="2074774"/>
-            <a:ext cx="495605" cy="219456"/>
-          </a:xfrm>
-          <a:prstGeom prst="rect">
-            <a:avLst/>
-          </a:prstGeom>
-          <a:noFill/>
-          <a:ln/>
-        </p:spPr>
-        <p:txBody>
-          <a:bodyPr wrap="square" lIns="0" tIns="0" rIns="0" bIns="0" rtlCol="0" anchor="ctr">
-            <a:normAutofit/>
-          </a:bodyPr>
-          <a:lstStyle/>
-          <a:p>
-            <a:pPr algn="ctr" indent="0" marL="0">
-              <a:lnSpc>
-                <a:spcPct val="88000"/>
-              </a:lnSpc>
-              <a:buNone/>
-            </a:pPr>
-            <a:r>
-              <a:rPr lang="en-US" sz="500" b="1" dirty="0">
-                <a:solidFill>
-                  <a:srgbClr val="202124"/>
-                </a:solidFill>
-                <a:latin typeface="Arial" pitchFamily="34" charset="0"/>
-                <a:ea typeface="Arial" pitchFamily="34" charset="-122"/>
-                <a:cs typeface="Arial" pitchFamily="34" charset="-120"/>
-              </a:rPr>
-              <a:t>Security</a:t>
-            </a:r>
-            <a:endParaRPr lang="en-US" sz="500" dirty="0"/>
-          </a:p>
-          <a:p>
-            <a:pPr algn="ctr" indent="0" marL="0">
-              <a:lnSpc>
-                <a:spcPct val="88000"/>
-              </a:lnSpc>
-              <a:buNone/>
-            </a:pPr>
-            <a:r>
-              <a:rPr lang="en-US" sz="440" dirty="0">
-                <a:solidFill>
-                  <a:srgbClr val="202124"/>
-                </a:solidFill>
-                <a:latin typeface="Arial" pitchFamily="34" charset="0"/>
-                <a:ea typeface="Arial" pitchFamily="34" charset="-122"/>
-                <a:cs typeface="Arial" pitchFamily="34" charset="-120"/>
-              </a:rPr>
-              <a:t>policies</a:t>
-            </a:r>
-            <a:endParaRPr lang="en-US" sz="500" dirty="0"/>
-          </a:p>
-        </p:txBody>
-      </p:sp>
-      <p:sp>
-        <p:nvSpPr>
-          <p:cNvPr id="197" name="Text 175"/>
-          <p:cNvSpPr/>
-          <p:nvPr/>
-        </p:nvSpPr>
-        <p:spPr>
-          <a:xfrm>
-            <a:off x="2435962" y="2674620"/>
-            <a:ext cx="495605" cy="219456"/>
-          </a:xfrm>
-          <a:prstGeom prst="rect">
-            <a:avLst/>
-          </a:prstGeom>
-          <a:noFill/>
-          <a:ln/>
-        </p:spPr>
-        <p:txBody>
-          <a:bodyPr wrap="square" lIns="0" tIns="0" rIns="0" bIns="0" rtlCol="0" anchor="ctr">
-            <a:normAutofit/>
-          </a:bodyPr>
-          <a:lstStyle/>
-          <a:p>
-            <a:pPr algn="ctr" indent="0" marL="0">
-              <a:lnSpc>
-                <a:spcPct val="88000"/>
-              </a:lnSpc>
-              <a:buNone/>
-            </a:pPr>
-            <a:r>
-              <a:rPr lang="en-US" sz="500" b="1" dirty="0">
-                <a:solidFill>
-                  <a:srgbClr val="202124"/>
-                </a:solidFill>
-                <a:latin typeface="Arial" pitchFamily="34" charset="0"/>
-                <a:ea typeface="Arial" pitchFamily="34" charset="-122"/>
-                <a:cs typeface="Arial" pitchFamily="34" charset="-120"/>
-              </a:rPr>
-              <a:t>Resolve</a:t>
-            </a:r>
-            <a:endParaRPr lang="en-US" sz="500" dirty="0"/>
-          </a:p>
-          <a:p>
-            <a:pPr algn="ctr" indent="0" marL="0">
-              <a:lnSpc>
-                <a:spcPct val="88000"/>
-              </a:lnSpc>
-              <a:buNone/>
-            </a:pPr>
-            <a:r>
-              <a:rPr lang="en-US" sz="440" dirty="0">
-                <a:solidFill>
-                  <a:srgbClr val="202124"/>
-                </a:solidFill>
-                <a:latin typeface="Arial" pitchFamily="34" charset="0"/>
-                <a:ea typeface="Arial" pitchFamily="34" charset="-122"/>
-                <a:cs typeface="Arial" pitchFamily="34" charset="-120"/>
-              </a:rPr>
-              <a:t>agent route</a:t>
-            </a:r>
-            <a:endParaRPr lang="en-US" sz="500" dirty="0"/>
-          </a:p>
-        </p:txBody>
-      </p:sp>
-      <p:sp>
-        <p:nvSpPr>
-          <p:cNvPr id="198" name="Text 176"/>
-          <p:cNvSpPr/>
-          <p:nvPr/>
-        </p:nvSpPr>
-        <p:spPr>
-          <a:xfrm>
-            <a:off x="3888029" y="1153973"/>
-            <a:ext cx="443484" cy="121615"/>
-          </a:xfrm>
-          <a:prstGeom prst="rect">
-            <a:avLst/>
-          </a:prstGeom>
-          <a:noFill/>
-          <a:ln/>
-        </p:spPr>
-        <p:txBody>
-          <a:bodyPr wrap="square" lIns="0" tIns="0" rIns="0" bIns="0" rtlCol="0" anchor="ctr">
-            <a:normAutofit/>
-          </a:bodyPr>
-          <a:lstStyle/>
-          <a:p>
-            <a:pPr algn="l" indent="0" marL="0">
-              <a:lnSpc>
-                <a:spcPct val="88000"/>
-              </a:lnSpc>
-              <a:buNone/>
-            </a:pPr>
-            <a:r>
-              <a:rPr lang="en-US" sz="500" b="1" dirty="0">
-                <a:solidFill>
-                  <a:srgbClr val="202124"/>
-                </a:solidFill>
-                <a:latin typeface="Arial" pitchFamily="34" charset="0"/>
-                <a:ea typeface="Arial" pitchFamily="34" charset="-122"/>
-                <a:cs typeface="Arial" pitchFamily="34" charset="-120"/>
-              </a:rPr>
-              <a:t>Response</a:t>
-            </a:r>
-            <a:endParaRPr lang="en-US" sz="500" dirty="0"/>
-          </a:p>
-        </p:txBody>
-      </p:sp>
-      <p:sp>
-        <p:nvSpPr>
-          <p:cNvPr id="199" name="Text 177"/>
-          <p:cNvSpPr/>
-          <p:nvPr/>
-        </p:nvSpPr>
-        <p:spPr>
-          <a:xfrm>
-            <a:off x="3888029" y="2731313"/>
-            <a:ext cx="443484" cy="121615"/>
-          </a:xfrm>
-          <a:prstGeom prst="rect">
-            <a:avLst/>
-          </a:prstGeom>
-          <a:noFill/>
-          <a:ln/>
-        </p:spPr>
-        <p:txBody>
-          <a:bodyPr wrap="square" lIns="0" tIns="0" rIns="0" bIns="0" rtlCol="0" anchor="ctr">
-            <a:normAutofit/>
-          </a:bodyPr>
-          <a:lstStyle/>
-          <a:p>
-            <a:pPr algn="l" indent="0" marL="0">
-              <a:lnSpc>
-                <a:spcPct val="88000"/>
-              </a:lnSpc>
-              <a:buNone/>
-            </a:pPr>
-            <a:r>
-              <a:rPr lang="en-US" sz="500" b="1" dirty="0">
-                <a:solidFill>
-                  <a:srgbClr val="202124"/>
-                </a:solidFill>
-                <a:latin typeface="Arial" pitchFamily="34" charset="0"/>
-                <a:ea typeface="Arial" pitchFamily="34" charset="-122"/>
-                <a:cs typeface="Arial" pitchFamily="34" charset="-120"/>
-              </a:rPr>
-              <a:t>Response</a:t>
-            </a:r>
-            <a:endParaRPr lang="en-US" sz="500" dirty="0"/>
-          </a:p>
-        </p:txBody>
-      </p:sp>
-      <p:sp>
-        <p:nvSpPr>
-          <p:cNvPr id="200" name="Text 178"/>
-          <p:cNvSpPr/>
-          <p:nvPr/>
-        </p:nvSpPr>
-        <p:spPr>
-          <a:xfrm>
-            <a:off x="3087929" y="1153973"/>
-            <a:ext cx="399593" cy="121615"/>
-          </a:xfrm>
-          <a:prstGeom prst="rect">
-            <a:avLst/>
-          </a:prstGeom>
-          <a:noFill/>
-          <a:ln/>
-        </p:spPr>
-        <p:txBody>
-          <a:bodyPr wrap="square" lIns="0" tIns="0" rIns="0" bIns="0" rtlCol="0" anchor="ctr">
-            <a:normAutofit/>
-          </a:bodyPr>
-          <a:lstStyle/>
-          <a:p>
-            <a:pPr algn="r" indent="0" marL="0">
-              <a:lnSpc>
-                <a:spcPct val="88000"/>
-              </a:lnSpc>
-              <a:buNone/>
-            </a:pPr>
-            <a:r>
-              <a:rPr lang="en-US" sz="500" b="1" dirty="0">
-                <a:solidFill>
-                  <a:srgbClr val="202124"/>
-                </a:solidFill>
-                <a:latin typeface="Arial" pitchFamily="34" charset="0"/>
-                <a:ea typeface="Arial" pitchFamily="34" charset="-122"/>
-                <a:cs typeface="Arial" pitchFamily="34" charset="-120"/>
-              </a:rPr>
-              <a:t>Request</a:t>
-            </a:r>
-            <a:endParaRPr lang="en-US" sz="500" dirty="0"/>
-          </a:p>
-        </p:txBody>
-      </p:sp>
-      <p:sp>
-        <p:nvSpPr>
-          <p:cNvPr id="201" name="Text 179"/>
-          <p:cNvSpPr/>
-          <p:nvPr/>
-        </p:nvSpPr>
-        <p:spPr>
-          <a:xfrm>
-            <a:off x="3087929" y="2731313"/>
-            <a:ext cx="399593" cy="121615"/>
-          </a:xfrm>
-          <a:prstGeom prst="rect">
-            <a:avLst/>
-          </a:prstGeom>
-          <a:noFill/>
-          <a:ln/>
-        </p:spPr>
-        <p:txBody>
-          <a:bodyPr wrap="square" lIns="0" tIns="0" rIns="0" bIns="0" rtlCol="0" anchor="ctr">
-            <a:normAutofit/>
-          </a:bodyPr>
-          <a:lstStyle/>
-          <a:p>
-            <a:pPr algn="r" indent="0" marL="0">
-              <a:lnSpc>
-                <a:spcPct val="88000"/>
-              </a:lnSpc>
-              <a:buNone/>
-            </a:pPr>
-            <a:r>
-              <a:rPr lang="en-US" sz="500" b="1" dirty="0">
-                <a:solidFill>
-                  <a:srgbClr val="202124"/>
-                </a:solidFill>
-                <a:latin typeface="Arial" pitchFamily="34" charset="0"/>
-                <a:ea typeface="Arial" pitchFamily="34" charset="-122"/>
-                <a:cs typeface="Arial" pitchFamily="34" charset="-120"/>
-              </a:rPr>
-              <a:t>Request</a:t>
-            </a:r>
-            <a:endParaRPr lang="en-US" sz="500" dirty="0"/>
-          </a:p>
-        </p:txBody>
-      </p:sp>
-      <p:sp>
-        <p:nvSpPr>
-          <p:cNvPr id="202" name="Shape 180"/>
+          <p:cNvPr id="185" name="Shape 163"/>
           <p:cNvSpPr/>
           <p:nvPr/>
         </p:nvSpPr>
@@ -20697,7 +19729,7 @@
       </p:sp>
       <p:sp>
         <p:nvSpPr>
-          <p:cNvPr id="203" name="Text 181"/>
+          <p:cNvPr id="186" name="Text 164"/>
           <p:cNvSpPr/>
           <p:nvPr/>
         </p:nvSpPr>
@@ -20736,7 +19768,7 @@
       </p:sp>
       <p:sp>
         <p:nvSpPr>
-          <p:cNvPr id="204" name="Shape 182"/>
+          <p:cNvPr id="187" name="Shape 165"/>
           <p:cNvSpPr/>
           <p:nvPr/>
         </p:nvSpPr>
@@ -20761,7 +19793,7 @@
       </p:sp>
       <p:sp>
         <p:nvSpPr>
-          <p:cNvPr id="205" name="Text 183"/>
+          <p:cNvPr id="188" name="Text 166"/>
           <p:cNvSpPr/>
           <p:nvPr/>
         </p:nvSpPr>
@@ -20800,7 +19832,7 @@
       </p:sp>
       <p:sp>
         <p:nvSpPr>
-          <p:cNvPr id="206" name="Shape 184"/>
+          <p:cNvPr id="189" name="Shape 167"/>
           <p:cNvSpPr/>
           <p:nvPr/>
         </p:nvSpPr>
@@ -20825,7 +19857,7 @@
       </p:sp>
       <p:sp>
         <p:nvSpPr>
-          <p:cNvPr id="207" name="Text 185"/>
+          <p:cNvPr id="190" name="Text 168"/>
           <p:cNvSpPr/>
           <p:nvPr/>
         </p:nvSpPr>
@@ -20864,7 +19896,7 @@
       </p:sp>
       <p:sp>
         <p:nvSpPr>
-          <p:cNvPr id="208" name="Shape 186"/>
+          <p:cNvPr id="191" name="Shape 169"/>
           <p:cNvSpPr/>
           <p:nvPr/>
         </p:nvSpPr>
@@ -20889,7 +19921,7 @@
       </p:sp>
       <p:sp>
         <p:nvSpPr>
-          <p:cNvPr id="209" name="Text 187"/>
+          <p:cNvPr id="192" name="Text 170"/>
           <p:cNvSpPr/>
           <p:nvPr/>
         </p:nvSpPr>
@@ -20928,7 +19960,7 @@
       </p:sp>
       <p:sp>
         <p:nvSpPr>
-          <p:cNvPr id="210" name="Shape 188"/>
+          <p:cNvPr id="193" name="Shape 171"/>
           <p:cNvSpPr/>
           <p:nvPr/>
         </p:nvSpPr>
@@ -20953,7 +19985,7 @@
       </p:sp>
       <p:sp>
         <p:nvSpPr>
-          <p:cNvPr id="211" name="Text 189"/>
+          <p:cNvPr id="194" name="Text 172"/>
           <p:cNvSpPr/>
           <p:nvPr/>
         </p:nvSpPr>
@@ -20992,7 +20024,7 @@
       </p:sp>
       <p:sp>
         <p:nvSpPr>
-          <p:cNvPr id="212" name="Shape 190"/>
+          <p:cNvPr id="195" name="Shape 173"/>
           <p:cNvSpPr/>
           <p:nvPr/>
         </p:nvSpPr>
@@ -21017,7 +20049,7 @@
       </p:sp>
       <p:sp>
         <p:nvSpPr>
-          <p:cNvPr id="213" name="Text 191"/>
+          <p:cNvPr id="196" name="Text 174"/>
           <p:cNvSpPr/>
           <p:nvPr/>
         </p:nvSpPr>
@@ -21056,7 +20088,7 @@
       </p:sp>
       <p:sp>
         <p:nvSpPr>
-          <p:cNvPr id="214" name="Shape 192"/>
+          <p:cNvPr id="197" name="Shape 175"/>
           <p:cNvSpPr/>
           <p:nvPr/>
         </p:nvSpPr>
@@ -21081,7 +20113,7 @@
       </p:sp>
       <p:sp>
         <p:nvSpPr>
-          <p:cNvPr id="215" name="Text 193"/>
+          <p:cNvPr id="198" name="Text 176"/>
           <p:cNvSpPr/>
           <p:nvPr/>
         </p:nvSpPr>
@@ -21120,7 +20152,7 @@
       </p:sp>
       <p:sp>
         <p:nvSpPr>
-          <p:cNvPr id="216" name="Shape 194"/>
+          <p:cNvPr id="199" name="Shape 177"/>
           <p:cNvSpPr/>
           <p:nvPr/>
         </p:nvSpPr>
@@ -21145,7 +20177,7 @@
       </p:sp>
       <p:sp>
         <p:nvSpPr>
-          <p:cNvPr id="217" name="Text 195"/>
+          <p:cNvPr id="200" name="Text 178"/>
           <p:cNvSpPr/>
           <p:nvPr/>
         </p:nvSpPr>
@@ -21184,7 +20216,7 @@
       </p:sp>
       <p:sp>
         <p:nvSpPr>
-          <p:cNvPr id="218" name="Shape 196"/>
+          <p:cNvPr id="201" name="Shape 179"/>
           <p:cNvSpPr/>
           <p:nvPr/>
         </p:nvSpPr>
@@ -21209,7 +20241,7 @@
       </p:sp>
       <p:sp>
         <p:nvSpPr>
-          <p:cNvPr id="219" name="Text 197"/>
+          <p:cNvPr id="202" name="Text 180"/>
           <p:cNvSpPr/>
           <p:nvPr/>
         </p:nvSpPr>
@@ -21248,7 +20280,1434 @@
       </p:sp>
       <p:sp>
         <p:nvSpPr>
+          <p:cNvPr id="203" name="Shape 181"/>
+          <p:cNvSpPr/>
+          <p:nvPr/>
+        </p:nvSpPr>
+        <p:spPr>
+          <a:xfrm>
+            <a:off x="5339182" y="3353105"/>
+            <a:ext cx="760781" cy="217627"/>
+          </a:xfrm>
+          <a:prstGeom prst="roundRect">
+            <a:avLst>
+              <a:gd name="adj" fmla="val 21008"/>
+            </a:avLst>
+          </a:prstGeom>
+          <a:solidFill>
+            <a:srgbClr val="FFFFFF"/>
+          </a:solidFill>
+          <a:ln w="5715">
+            <a:solidFill>
+              <a:srgbClr val="DADCE0"/>
+            </a:solidFill>
+            <a:prstDash val="solid"/>
+          </a:ln>
+        </p:spPr>
+      </p:sp>
+      <p:sp>
+        <p:nvSpPr>
+          <p:cNvPr id="204" name="Text 182"/>
+          <p:cNvSpPr/>
+          <p:nvPr/>
+        </p:nvSpPr>
+        <p:spPr>
+          <a:xfrm>
+            <a:off x="5357470" y="3362249"/>
+            <a:ext cx="724205" cy="199339"/>
+          </a:xfrm>
+          <a:prstGeom prst="rect">
+            <a:avLst/>
+          </a:prstGeom>
+          <a:noFill/>
+          <a:ln/>
+        </p:spPr>
+        <p:txBody>
+          <a:bodyPr wrap="square" lIns="0" tIns="0" rIns="0" bIns="0" rtlCol="0" anchor="ctr">
+            <a:normAutofit/>
+          </a:bodyPr>
+          <a:lstStyle/>
+          <a:p>
+            <a:pPr algn="ctr" indent="0" marL="0">
+              <a:lnSpc>
+                <a:spcPct val="86000"/>
+              </a:lnSpc>
+              <a:buNone/>
+            </a:pPr>
+            <a:r>
+              <a:rPr lang="en-US" sz="480" b="1" dirty="0">
+                <a:solidFill>
+                  <a:srgbClr val="202124"/>
+                </a:solidFill>
+                <a:latin typeface="Arial" pitchFamily="34" charset="0"/>
+                <a:ea typeface="Arial" pitchFamily="34" charset="-122"/>
+                <a:cs typeface="Arial" pitchFamily="34" charset="-120"/>
+              </a:rPr>
+              <a:t>Live promotion:</a:t>
+            </a:r>
+            <a:endParaRPr lang="en-US" sz="480" dirty="0"/>
+          </a:p>
+          <a:p>
+            <a:pPr algn="ctr" indent="0" marL="0">
+              <a:lnSpc>
+                <a:spcPct val="86000"/>
+              </a:lnSpc>
+              <a:buNone/>
+            </a:pPr>
+            <a:r>
+              <a:rPr lang="en-US" sz="420" dirty="0">
+                <a:solidFill>
+                  <a:srgbClr val="202124"/>
+                </a:solidFill>
+                <a:latin typeface="Arial" pitchFamily="34" charset="0"/>
+                <a:ea typeface="Arial" pitchFamily="34" charset="-122"/>
+                <a:cs typeface="Arial" pitchFamily="34" charset="-120"/>
+              </a:rPr>
+              <a:t>Pool -&gt; PSC Spoke</a:t>
+            </a:r>
+            <a:endParaRPr lang="en-US" sz="480" dirty="0"/>
+          </a:p>
+        </p:txBody>
+      </p:sp>
+      <p:sp>
+        <p:nvSpPr>
+          <p:cNvPr id="205" name="Shape 183"/>
+          <p:cNvSpPr/>
+          <p:nvPr/>
+        </p:nvSpPr>
+        <p:spPr>
+          <a:xfrm>
+            <a:off x="2803550" y="4817059"/>
+            <a:ext cx="560527" cy="210312"/>
+          </a:xfrm>
+          <a:prstGeom prst="roundRect">
+            <a:avLst>
+              <a:gd name="adj" fmla="val 21739"/>
+            </a:avLst>
+          </a:prstGeom>
+          <a:solidFill>
+            <a:srgbClr val="FFFFFF"/>
+          </a:solidFill>
+          <a:ln w="5715">
+            <a:solidFill>
+              <a:srgbClr val="DADCE0"/>
+            </a:solidFill>
+            <a:prstDash val="solid"/>
+          </a:ln>
+        </p:spPr>
+      </p:sp>
+      <p:sp>
+        <p:nvSpPr>
+          <p:cNvPr id="206" name="Text 184"/>
+          <p:cNvSpPr/>
+          <p:nvPr/>
+        </p:nvSpPr>
+        <p:spPr>
+          <a:xfrm>
+            <a:off x="2821838" y="4826203"/>
+            <a:ext cx="523951" cy="192024"/>
+          </a:xfrm>
+          <a:prstGeom prst="rect">
+            <a:avLst/>
+          </a:prstGeom>
+          <a:noFill/>
+          <a:ln/>
+        </p:spPr>
+        <p:txBody>
+          <a:bodyPr wrap="square" lIns="0" tIns="0" rIns="0" bIns="0" rtlCol="0" anchor="ctr">
+            <a:normAutofit/>
+          </a:bodyPr>
+          <a:lstStyle/>
+          <a:p>
+            <a:pPr algn="ctr" indent="0" marL="0">
+              <a:lnSpc>
+                <a:spcPct val="86000"/>
+              </a:lnSpc>
+              <a:buNone/>
+            </a:pPr>
+            <a:r>
+              <a:rPr lang="en-US" sz="480" b="1" dirty="0">
+                <a:solidFill>
+                  <a:srgbClr val="202124"/>
+                </a:solidFill>
+                <a:latin typeface="Arial" pitchFamily="34" charset="0"/>
+                <a:ea typeface="Arial" pitchFamily="34" charset="-122"/>
+                <a:cs typeface="Arial" pitchFamily="34" charset="-120"/>
+              </a:rPr>
+              <a:t>Shared Pool</a:t>
+            </a:r>
+            <a:endParaRPr lang="en-US" sz="480" dirty="0"/>
+          </a:p>
+          <a:p>
+            <a:pPr algn="ctr" indent="0" marL="0">
+              <a:lnSpc>
+                <a:spcPct val="86000"/>
+              </a:lnSpc>
+              <a:buNone/>
+            </a:pPr>
+            <a:r>
+              <a:rPr lang="en-US" sz="420" dirty="0">
+                <a:solidFill>
+                  <a:srgbClr val="202124"/>
+                </a:solidFill>
+                <a:latin typeface="Arial" pitchFamily="34" charset="0"/>
+                <a:ea typeface="Arial" pitchFamily="34" charset="-122"/>
+                <a:cs typeface="Arial" pitchFamily="34" charset="-120"/>
+              </a:rPr>
+              <a:t>RAG</a:t>
+            </a:r>
+            <a:endParaRPr lang="en-US" sz="480" dirty="0"/>
+          </a:p>
+        </p:txBody>
+      </p:sp>
+      <p:sp>
+        <p:nvSpPr>
+          <p:cNvPr id="207" name="Shape 185"/>
+          <p:cNvSpPr/>
+          <p:nvPr/>
+        </p:nvSpPr>
+        <p:spPr>
+          <a:xfrm>
+            <a:off x="2704795" y="5451653"/>
+            <a:ext cx="757123" cy="210312"/>
+          </a:xfrm>
+          <a:prstGeom prst="roundRect">
+            <a:avLst>
+              <a:gd name="adj" fmla="val 21739"/>
+            </a:avLst>
+          </a:prstGeom>
+          <a:solidFill>
+            <a:srgbClr val="FFFFFF"/>
+          </a:solidFill>
+          <a:ln w="5715">
+            <a:solidFill>
+              <a:srgbClr val="DADCE0"/>
+            </a:solidFill>
+            <a:prstDash val="solid"/>
+          </a:ln>
+        </p:spPr>
+      </p:sp>
+      <p:sp>
+        <p:nvSpPr>
+          <p:cNvPr id="208" name="Text 186"/>
+          <p:cNvSpPr/>
+          <p:nvPr/>
+        </p:nvSpPr>
+        <p:spPr>
+          <a:xfrm>
+            <a:off x="2723083" y="5460797"/>
+            <a:ext cx="720547" cy="192024"/>
+          </a:xfrm>
+          <a:prstGeom prst="rect">
+            <a:avLst/>
+          </a:prstGeom>
+          <a:noFill/>
+          <a:ln/>
+        </p:spPr>
+        <p:txBody>
+          <a:bodyPr wrap="square" lIns="0" tIns="0" rIns="0" bIns="0" rtlCol="0" anchor="ctr">
+            <a:normAutofit/>
+          </a:bodyPr>
+          <a:lstStyle/>
+          <a:p>
+            <a:pPr algn="ctr" indent="0" marL="0">
+              <a:lnSpc>
+                <a:spcPct val="86000"/>
+              </a:lnSpc>
+              <a:buNone/>
+            </a:pPr>
+            <a:r>
+              <a:rPr lang="en-US" sz="480" b="1" dirty="0">
+                <a:solidFill>
+                  <a:srgbClr val="202124"/>
+                </a:solidFill>
+                <a:latin typeface="Arial" pitchFamily="34" charset="0"/>
+                <a:ea typeface="Arial" pitchFamily="34" charset="-122"/>
+                <a:cs typeface="Arial" pitchFamily="34" charset="-120"/>
+              </a:rPr>
+              <a:t>Streams State to</a:t>
+            </a:r>
+            <a:endParaRPr lang="en-US" sz="480" dirty="0"/>
+          </a:p>
+          <a:p>
+            <a:pPr algn="ctr" indent="0" marL="0">
+              <a:lnSpc>
+                <a:spcPct val="86000"/>
+              </a:lnSpc>
+              <a:buNone/>
+            </a:pPr>
+            <a:r>
+              <a:rPr lang="en-US" sz="420" dirty="0">
+                <a:solidFill>
+                  <a:srgbClr val="202124"/>
+                </a:solidFill>
+                <a:latin typeface="Arial" pitchFamily="34" charset="0"/>
+                <a:ea typeface="Arial" pitchFamily="34" charset="-122"/>
+                <a:cs typeface="Arial" pitchFamily="34" charset="-120"/>
+              </a:rPr>
+              <a:t>PSC Spoke</a:t>
+            </a:r>
+            <a:endParaRPr lang="en-US" sz="480" dirty="0"/>
+          </a:p>
+        </p:txBody>
+      </p:sp>
+      <p:sp>
+        <p:nvSpPr>
+          <p:cNvPr id="209" name="Shape 187"/>
+          <p:cNvSpPr/>
+          <p:nvPr/>
+        </p:nvSpPr>
+        <p:spPr>
+          <a:xfrm>
+            <a:off x="5108753" y="4817059"/>
+            <a:ext cx="678485" cy="210312"/>
+          </a:xfrm>
+          <a:prstGeom prst="roundRect">
+            <a:avLst>
+              <a:gd name="adj" fmla="val 21739"/>
+            </a:avLst>
+          </a:prstGeom>
+          <a:solidFill>
+            <a:srgbClr val="FFFFFF"/>
+          </a:solidFill>
+          <a:ln w="5715">
+            <a:solidFill>
+              <a:srgbClr val="DADCE0"/>
+            </a:solidFill>
+            <a:prstDash val="solid"/>
+          </a:ln>
+        </p:spPr>
+      </p:sp>
+      <p:sp>
+        <p:nvSpPr>
+          <p:cNvPr id="210" name="Text 188"/>
+          <p:cNvSpPr/>
+          <p:nvPr/>
+        </p:nvSpPr>
+        <p:spPr>
+          <a:xfrm>
+            <a:off x="5127041" y="4826203"/>
+            <a:ext cx="641909" cy="192024"/>
+          </a:xfrm>
+          <a:prstGeom prst="rect">
+            <a:avLst/>
+          </a:prstGeom>
+          <a:noFill/>
+          <a:ln/>
+        </p:spPr>
+        <p:txBody>
+          <a:bodyPr wrap="square" lIns="0" tIns="0" rIns="0" bIns="0" rtlCol="0" anchor="ctr">
+            <a:normAutofit/>
+          </a:bodyPr>
+          <a:lstStyle/>
+          <a:p>
+            <a:pPr algn="ctr" indent="0" marL="0">
+              <a:lnSpc>
+                <a:spcPct val="86000"/>
+              </a:lnSpc>
+              <a:buNone/>
+            </a:pPr>
+            <a:r>
+              <a:rPr lang="en-US" sz="480" b="1" dirty="0">
+                <a:solidFill>
+                  <a:srgbClr val="202124"/>
+                </a:solidFill>
+                <a:latin typeface="Arial" pitchFamily="34" charset="0"/>
+                <a:ea typeface="Arial" pitchFamily="34" charset="-122"/>
+                <a:cs typeface="Arial" pitchFamily="34" charset="-120"/>
+              </a:rPr>
+              <a:t>Unidirectional</a:t>
+            </a:r>
+            <a:endParaRPr lang="en-US" sz="480" dirty="0"/>
+          </a:p>
+          <a:p>
+            <a:pPr algn="ctr" indent="0" marL="0">
+              <a:lnSpc>
+                <a:spcPct val="86000"/>
+              </a:lnSpc>
+              <a:buNone/>
+            </a:pPr>
+            <a:r>
+              <a:rPr lang="en-US" sz="420" dirty="0">
+                <a:solidFill>
+                  <a:srgbClr val="202124"/>
+                </a:solidFill>
+                <a:latin typeface="Arial" pitchFamily="34" charset="0"/>
+                <a:ea typeface="Arial" pitchFamily="34" charset="-122"/>
+                <a:cs typeface="Arial" pitchFamily="34" charset="-120"/>
+              </a:rPr>
+              <a:t>PSC Bridge</a:t>
+            </a:r>
+            <a:endParaRPr lang="en-US" sz="480" dirty="0"/>
+          </a:p>
+        </p:txBody>
+      </p:sp>
+      <p:sp>
+        <p:nvSpPr>
+          <p:cNvPr id="211" name="Shape 189"/>
+          <p:cNvSpPr/>
+          <p:nvPr/>
+        </p:nvSpPr>
+        <p:spPr>
+          <a:xfrm>
+            <a:off x="5108753" y="5451653"/>
+            <a:ext cx="678485" cy="210312"/>
+          </a:xfrm>
+          <a:prstGeom prst="roundRect">
+            <a:avLst>
+              <a:gd name="adj" fmla="val 21739"/>
+            </a:avLst>
+          </a:prstGeom>
+          <a:solidFill>
+            <a:srgbClr val="FFFFFF"/>
+          </a:solidFill>
+          <a:ln w="5715">
+            <a:solidFill>
+              <a:srgbClr val="DADCE0"/>
+            </a:solidFill>
+            <a:prstDash val="solid"/>
+          </a:ln>
+        </p:spPr>
+      </p:sp>
+      <p:sp>
+        <p:nvSpPr>
+          <p:cNvPr id="212" name="Text 190"/>
+          <p:cNvSpPr/>
+          <p:nvPr/>
+        </p:nvSpPr>
+        <p:spPr>
+          <a:xfrm>
+            <a:off x="5127041" y="5460797"/>
+            <a:ext cx="641909" cy="192024"/>
+          </a:xfrm>
+          <a:prstGeom prst="rect">
+            <a:avLst/>
+          </a:prstGeom>
+          <a:noFill/>
+          <a:ln/>
+        </p:spPr>
+        <p:txBody>
+          <a:bodyPr wrap="square" lIns="0" tIns="0" rIns="0" bIns="0" rtlCol="0" anchor="ctr">
+            <a:normAutofit/>
+          </a:bodyPr>
+          <a:lstStyle/>
+          <a:p>
+            <a:pPr algn="ctr" indent="0" marL="0">
+              <a:lnSpc>
+                <a:spcPct val="86000"/>
+              </a:lnSpc>
+              <a:buNone/>
+            </a:pPr>
+            <a:r>
+              <a:rPr lang="en-US" sz="480" b="1" dirty="0">
+                <a:solidFill>
+                  <a:srgbClr val="202124"/>
+                </a:solidFill>
+                <a:latin typeface="Arial" pitchFamily="34" charset="0"/>
+                <a:ea typeface="Arial" pitchFamily="34" charset="-122"/>
+                <a:cs typeface="Arial" pitchFamily="34" charset="-120"/>
+              </a:rPr>
+              <a:t>CMEK-Encrypted</a:t>
+            </a:r>
+            <a:endParaRPr lang="en-US" sz="480" dirty="0"/>
+          </a:p>
+          <a:p>
+            <a:pPr algn="ctr" indent="0" marL="0">
+              <a:lnSpc>
+                <a:spcPct val="86000"/>
+              </a:lnSpc>
+              <a:buNone/>
+            </a:pPr>
+            <a:r>
+              <a:rPr lang="en-US" sz="420" dirty="0">
+                <a:solidFill>
+                  <a:srgbClr val="202124"/>
+                </a:solidFill>
+                <a:latin typeface="Arial" pitchFamily="34" charset="0"/>
+                <a:ea typeface="Arial" pitchFamily="34" charset="-122"/>
+                <a:cs typeface="Arial" pitchFamily="34" charset="-120"/>
+              </a:rPr>
+              <a:t>Spoke Storage</a:t>
+            </a:r>
+            <a:endParaRPr lang="en-US" sz="480" dirty="0"/>
+          </a:p>
+        </p:txBody>
+      </p:sp>
+      <p:sp>
+        <p:nvSpPr>
+          <p:cNvPr id="213" name="Shape 191"/>
+          <p:cNvSpPr/>
+          <p:nvPr/>
+        </p:nvSpPr>
+        <p:spPr>
+          <a:xfrm>
+            <a:off x="1845259" y="5603443"/>
+            <a:ext cx="512064" cy="210312"/>
+          </a:xfrm>
+          <a:prstGeom prst="roundRect">
+            <a:avLst>
+              <a:gd name="adj" fmla="val 21739"/>
+            </a:avLst>
+          </a:prstGeom>
+          <a:solidFill>
+            <a:srgbClr val="FFFFFF"/>
+          </a:solidFill>
+          <a:ln w="5715">
+            <a:solidFill>
+              <a:srgbClr val="DADCE0"/>
+            </a:solidFill>
+            <a:prstDash val="solid"/>
+          </a:ln>
+        </p:spPr>
+      </p:sp>
+      <p:sp>
+        <p:nvSpPr>
+          <p:cNvPr id="214" name="Text 192"/>
+          <p:cNvSpPr/>
+          <p:nvPr/>
+        </p:nvSpPr>
+        <p:spPr>
+          <a:xfrm>
+            <a:off x="1863547" y="5612587"/>
+            <a:ext cx="475488" cy="192024"/>
+          </a:xfrm>
+          <a:prstGeom prst="rect">
+            <a:avLst/>
+          </a:prstGeom>
+          <a:noFill/>
+          <a:ln/>
+        </p:spPr>
+        <p:txBody>
+          <a:bodyPr wrap="square" lIns="0" tIns="0" rIns="0" bIns="0" rtlCol="0" anchor="ctr">
+            <a:normAutofit/>
+          </a:bodyPr>
+          <a:lstStyle/>
+          <a:p>
+            <a:pPr algn="ctr" indent="0" marL="0">
+              <a:lnSpc>
+                <a:spcPct val="86000"/>
+              </a:lnSpc>
+              <a:buNone/>
+            </a:pPr>
+            <a:r>
+              <a:rPr lang="en-US" sz="480" b="1" dirty="0">
+                <a:solidFill>
+                  <a:srgbClr val="202124"/>
+                </a:solidFill>
+                <a:latin typeface="Arial" pitchFamily="34" charset="0"/>
+                <a:ea typeface="Arial" pitchFamily="34" charset="-122"/>
+                <a:cs typeface="Arial" pitchFamily="34" charset="-120"/>
+              </a:rPr>
+              <a:t>Pooled</a:t>
+            </a:r>
+            <a:endParaRPr lang="en-US" sz="480" dirty="0"/>
+          </a:p>
+          <a:p>
+            <a:pPr algn="ctr" indent="0" marL="0">
+              <a:lnSpc>
+                <a:spcPct val="86000"/>
+              </a:lnSpc>
+              <a:buNone/>
+            </a:pPr>
+            <a:r>
+              <a:rPr lang="en-US" sz="420" dirty="0">
+                <a:solidFill>
+                  <a:srgbClr val="202124"/>
+                </a:solidFill>
+                <a:latin typeface="Arial" pitchFamily="34" charset="0"/>
+                <a:ea typeface="Arial" pitchFamily="34" charset="-122"/>
+                <a:cs typeface="Arial" pitchFamily="34" charset="-120"/>
+              </a:rPr>
+              <a:t>inference</a:t>
+            </a:r>
+            <a:endParaRPr lang="en-US" sz="480" dirty="0"/>
+          </a:p>
+        </p:txBody>
+      </p:sp>
+      <p:sp>
+        <p:nvSpPr>
+          <p:cNvPr id="215" name="Shape 193"/>
+          <p:cNvSpPr/>
+          <p:nvPr/>
+        </p:nvSpPr>
+        <p:spPr>
+          <a:xfrm>
+            <a:off x="3905402" y="3353105"/>
+            <a:ext cx="738835" cy="210312"/>
+          </a:xfrm>
+          <a:prstGeom prst="roundRect">
+            <a:avLst>
+              <a:gd name="adj" fmla="val 21739"/>
+            </a:avLst>
+          </a:prstGeom>
+          <a:solidFill>
+            <a:srgbClr val="FFFFFF"/>
+          </a:solidFill>
+          <a:ln w="5715">
+            <a:solidFill>
+              <a:srgbClr val="DADCE0"/>
+            </a:solidFill>
+            <a:prstDash val="solid"/>
+          </a:ln>
+        </p:spPr>
+      </p:sp>
+      <p:sp>
+        <p:nvSpPr>
+          <p:cNvPr id="216" name="Text 194"/>
+          <p:cNvSpPr/>
+          <p:nvPr/>
+        </p:nvSpPr>
+        <p:spPr>
+          <a:xfrm>
+            <a:off x="3923690" y="3362249"/>
+            <a:ext cx="702259" cy="192024"/>
+          </a:xfrm>
+          <a:prstGeom prst="rect">
+            <a:avLst/>
+          </a:prstGeom>
+          <a:noFill/>
+          <a:ln/>
+        </p:spPr>
+        <p:txBody>
+          <a:bodyPr wrap="square" lIns="0" tIns="0" rIns="0" bIns="0" rtlCol="0" anchor="ctr">
+            <a:normAutofit/>
+          </a:bodyPr>
+          <a:lstStyle/>
+          <a:p>
+            <a:pPr algn="ctr" indent="0" marL="0">
+              <a:lnSpc>
+                <a:spcPct val="86000"/>
+              </a:lnSpc>
+              <a:buNone/>
+            </a:pPr>
+            <a:r>
+              <a:rPr lang="en-US" sz="480" b="1" dirty="0">
+                <a:solidFill>
+                  <a:srgbClr val="202124"/>
+                </a:solidFill>
+                <a:latin typeface="Arial" pitchFamily="34" charset="0"/>
+                <a:ea typeface="Arial" pitchFamily="34" charset="-122"/>
+                <a:cs typeface="Arial" pitchFamily="34" charset="-120"/>
+              </a:rPr>
+              <a:t>Seamless response</a:t>
+            </a:r>
+            <a:endParaRPr lang="en-US" sz="480" dirty="0"/>
+          </a:p>
+          <a:p>
+            <a:pPr algn="ctr" indent="0" marL="0">
+              <a:lnSpc>
+                <a:spcPct val="86000"/>
+              </a:lnSpc>
+              <a:buNone/>
+            </a:pPr>
+            <a:r>
+              <a:rPr lang="en-US" sz="420" dirty="0">
+                <a:solidFill>
+                  <a:srgbClr val="202124"/>
+                </a:solidFill>
+                <a:latin typeface="Arial" pitchFamily="34" charset="0"/>
+                <a:ea typeface="Arial" pitchFamily="34" charset="-122"/>
+                <a:cs typeface="Arial" pitchFamily="34" charset="-120"/>
+              </a:rPr>
+              <a:t>(0 dropped sessions)</a:t>
+            </a:r>
+            <a:endParaRPr lang="en-US" sz="480" dirty="0"/>
+          </a:p>
+        </p:txBody>
+      </p:sp>
+      <p:sp>
+        <p:nvSpPr>
+          <p:cNvPr id="217" name="Shape 195"/>
+          <p:cNvSpPr/>
+          <p:nvPr/>
+        </p:nvSpPr>
+        <p:spPr>
+          <a:xfrm>
+            <a:off x="2983687" y="3353105"/>
+            <a:ext cx="669341" cy="210312"/>
+          </a:xfrm>
+          <a:prstGeom prst="roundRect">
+            <a:avLst>
+              <a:gd name="adj" fmla="val 21739"/>
+            </a:avLst>
+          </a:prstGeom>
+          <a:solidFill>
+            <a:srgbClr val="FFFFFF"/>
+          </a:solidFill>
+          <a:ln w="5715">
+            <a:solidFill>
+              <a:srgbClr val="DADCE0"/>
+            </a:solidFill>
+            <a:prstDash val="solid"/>
+          </a:ln>
+        </p:spPr>
+      </p:sp>
+      <p:sp>
+        <p:nvSpPr>
+          <p:cNvPr id="218" name="Text 196"/>
+          <p:cNvSpPr/>
+          <p:nvPr/>
+        </p:nvSpPr>
+        <p:spPr>
+          <a:xfrm>
+            <a:off x="3001975" y="3362249"/>
+            <a:ext cx="632765" cy="192024"/>
+          </a:xfrm>
+          <a:prstGeom prst="rect">
+            <a:avLst/>
+          </a:prstGeom>
+          <a:noFill/>
+          <a:ln/>
+        </p:spPr>
+        <p:txBody>
+          <a:bodyPr wrap="square" lIns="0" tIns="0" rIns="0" bIns="0" rtlCol="0" anchor="ctr">
+            <a:normAutofit/>
+          </a:bodyPr>
+          <a:lstStyle/>
+          <a:p>
+            <a:pPr algn="ctr" indent="0" marL="0">
+              <a:lnSpc>
+                <a:spcPct val="86000"/>
+              </a:lnSpc>
+              <a:buNone/>
+            </a:pPr>
+            <a:r>
+              <a:rPr lang="en-US" sz="480" b="1" dirty="0">
+                <a:solidFill>
+                  <a:srgbClr val="202124"/>
+                </a:solidFill>
+                <a:latin typeface="Arial" pitchFamily="34" charset="0"/>
+                <a:ea typeface="Arial" pitchFamily="34" charset="-122"/>
+                <a:cs typeface="Arial" pitchFamily="34" charset="-120"/>
+              </a:rPr>
+              <a:t>Route Standard to Pool</a:t>
+            </a:r>
+            <a:endParaRPr lang="en-US" sz="480" dirty="0"/>
+          </a:p>
+          <a:p>
+            <a:pPr algn="ctr" indent="0" marL="0">
+              <a:lnSpc>
+                <a:spcPct val="86000"/>
+              </a:lnSpc>
+              <a:buNone/>
+            </a:pPr>
+            <a:r>
+              <a:rPr lang="en-US" sz="420" dirty="0">
+                <a:solidFill>
+                  <a:srgbClr val="202124"/>
+                </a:solidFill>
+                <a:latin typeface="Arial" pitchFamily="34" charset="0"/>
+                <a:ea typeface="Arial" pitchFamily="34" charset="-122"/>
+                <a:cs typeface="Arial" pitchFamily="34" charset="-120"/>
+              </a:rPr>
+              <a:t>or Enterprise via PSC</a:t>
+            </a:r>
+            <a:endParaRPr lang="en-US" sz="480" dirty="0"/>
+          </a:p>
+        </p:txBody>
+      </p:sp>
+      <p:sp>
+        <p:nvSpPr>
+          <p:cNvPr id="219" name="Shape 197"/>
+          <p:cNvSpPr/>
+          <p:nvPr/>
+        </p:nvSpPr>
+        <p:spPr>
+          <a:xfrm>
+            <a:off x="2501798" y="2870302"/>
+            <a:ext cx="599846" cy="210312"/>
+          </a:xfrm>
+          <a:prstGeom prst="roundRect">
+            <a:avLst>
+              <a:gd name="adj" fmla="val 21739"/>
+            </a:avLst>
+          </a:prstGeom>
+          <a:solidFill>
+            <a:srgbClr val="FFFFFF"/>
+          </a:solidFill>
+          <a:ln w="5715">
+            <a:solidFill>
+              <a:srgbClr val="DADCE0"/>
+            </a:solidFill>
+            <a:prstDash val="solid"/>
+          </a:ln>
+        </p:spPr>
+      </p:sp>
+      <p:sp>
+        <p:nvSpPr>
           <p:cNvPr id="220" name="Text 198"/>
+          <p:cNvSpPr/>
+          <p:nvPr/>
+        </p:nvSpPr>
+        <p:spPr>
+          <a:xfrm>
+            <a:off x="2520086" y="2879446"/>
+            <a:ext cx="563270" cy="192024"/>
+          </a:xfrm>
+          <a:prstGeom prst="rect">
+            <a:avLst/>
+          </a:prstGeom>
+          <a:noFill/>
+          <a:ln/>
+        </p:spPr>
+        <p:txBody>
+          <a:bodyPr wrap="square" lIns="0" tIns="0" rIns="0" bIns="0" rtlCol="0" anchor="ctr">
+            <a:normAutofit/>
+          </a:bodyPr>
+          <a:lstStyle/>
+          <a:p>
+            <a:pPr algn="ctr" indent="0" marL="0">
+              <a:lnSpc>
+                <a:spcPct val="86000"/>
+              </a:lnSpc>
+              <a:buNone/>
+            </a:pPr>
+            <a:r>
+              <a:rPr lang="en-US" sz="480" b="1" dirty="0">
+                <a:solidFill>
+                  <a:srgbClr val="202124"/>
+                </a:solidFill>
+                <a:latin typeface="Arial" pitchFamily="34" charset="0"/>
+                <a:ea typeface="Arial" pitchFamily="34" charset="-122"/>
+                <a:cs typeface="Arial" pitchFamily="34" charset="-120"/>
+              </a:rPr>
+              <a:t>Atomic route</a:t>
+            </a:r>
+            <a:endParaRPr lang="en-US" sz="480" dirty="0"/>
+          </a:p>
+          <a:p>
+            <a:pPr algn="ctr" indent="0" marL="0">
+              <a:lnSpc>
+                <a:spcPct val="86000"/>
+              </a:lnSpc>
+              <a:buNone/>
+            </a:pPr>
+            <a:r>
+              <a:rPr lang="en-US" sz="420" dirty="0">
+                <a:solidFill>
+                  <a:srgbClr val="202124"/>
+                </a:solidFill>
+                <a:latin typeface="Arial" pitchFamily="34" charset="0"/>
+                <a:ea typeface="Arial" pitchFamily="34" charset="-122"/>
+                <a:cs typeface="Arial" pitchFamily="34" charset="-120"/>
+              </a:rPr>
+              <a:t>lookup</a:t>
+            </a:r>
+            <a:endParaRPr lang="en-US" sz="480" dirty="0"/>
+          </a:p>
+        </p:txBody>
+      </p:sp>
+      <p:sp>
+        <p:nvSpPr>
+          <p:cNvPr id="221" name="Shape 199"/>
+          <p:cNvSpPr/>
+          <p:nvPr/>
+        </p:nvSpPr>
+        <p:spPr>
+          <a:xfrm>
+            <a:off x="1757477" y="4602175"/>
+            <a:ext cx="686714" cy="146304"/>
+          </a:xfrm>
+          <a:prstGeom prst="roundRect">
+            <a:avLst>
+              <a:gd name="adj" fmla="val 31250"/>
+            </a:avLst>
+          </a:prstGeom>
+          <a:solidFill>
+            <a:srgbClr val="FFFFFF"/>
+          </a:solidFill>
+          <a:ln w="5715">
+            <a:solidFill>
+              <a:srgbClr val="DADCE0"/>
+            </a:solidFill>
+            <a:prstDash val="solid"/>
+          </a:ln>
+        </p:spPr>
+      </p:sp>
+      <p:sp>
+        <p:nvSpPr>
+          <p:cNvPr id="222" name="Text 200"/>
+          <p:cNvSpPr/>
+          <p:nvPr/>
+        </p:nvSpPr>
+        <p:spPr>
+          <a:xfrm>
+            <a:off x="1775765" y="4611319"/>
+            <a:ext cx="650138" cy="128016"/>
+          </a:xfrm>
+          <a:prstGeom prst="rect">
+            <a:avLst/>
+          </a:prstGeom>
+          <a:noFill/>
+          <a:ln/>
+        </p:spPr>
+        <p:txBody>
+          <a:bodyPr wrap="square" lIns="0" tIns="0" rIns="0" bIns="0" rtlCol="0" anchor="ctr">
+            <a:normAutofit/>
+          </a:bodyPr>
+          <a:lstStyle/>
+          <a:p>
+            <a:pPr algn="ctr" indent="0" marL="0">
+              <a:lnSpc>
+                <a:spcPct val="86000"/>
+              </a:lnSpc>
+              <a:buNone/>
+            </a:pPr>
+            <a:r>
+              <a:rPr lang="en-US" sz="480" b="1" dirty="0">
+                <a:solidFill>
+                  <a:srgbClr val="202124"/>
+                </a:solidFill>
+                <a:latin typeface="Arial" pitchFamily="34" charset="0"/>
+                <a:ea typeface="Arial" pitchFamily="34" charset="-122"/>
+                <a:cs typeface="Arial" pitchFamily="34" charset="-120"/>
+              </a:rPr>
+              <a:t>Sanitize request</a:t>
+            </a:r>
+            <a:endParaRPr lang="en-US" sz="480" dirty="0"/>
+          </a:p>
+        </p:txBody>
+      </p:sp>
+      <p:sp>
+        <p:nvSpPr>
+          <p:cNvPr id="223" name="Shape 201"/>
+          <p:cNvSpPr/>
+          <p:nvPr/>
+        </p:nvSpPr>
+        <p:spPr>
+          <a:xfrm>
+            <a:off x="1757477" y="4810658"/>
+            <a:ext cx="686714" cy="146304"/>
+          </a:xfrm>
+          <a:prstGeom prst="roundRect">
+            <a:avLst>
+              <a:gd name="adj" fmla="val 31250"/>
+            </a:avLst>
+          </a:prstGeom>
+          <a:solidFill>
+            <a:srgbClr val="FFFFFF"/>
+          </a:solidFill>
+          <a:ln w="5715">
+            <a:solidFill>
+              <a:srgbClr val="DADCE0"/>
+            </a:solidFill>
+            <a:prstDash val="solid"/>
+          </a:ln>
+        </p:spPr>
+      </p:sp>
+      <p:sp>
+        <p:nvSpPr>
+          <p:cNvPr id="224" name="Text 202"/>
+          <p:cNvSpPr/>
+          <p:nvPr/>
+        </p:nvSpPr>
+        <p:spPr>
+          <a:xfrm>
+            <a:off x="1775765" y="4819802"/>
+            <a:ext cx="650138" cy="128016"/>
+          </a:xfrm>
+          <a:prstGeom prst="rect">
+            <a:avLst/>
+          </a:prstGeom>
+          <a:noFill/>
+          <a:ln/>
+        </p:spPr>
+        <p:txBody>
+          <a:bodyPr wrap="square" lIns="0" tIns="0" rIns="0" bIns="0" rtlCol="0" anchor="ctr">
+            <a:normAutofit/>
+          </a:bodyPr>
+          <a:lstStyle/>
+          <a:p>
+            <a:pPr algn="ctr" indent="0" marL="0">
+              <a:lnSpc>
+                <a:spcPct val="86000"/>
+              </a:lnSpc>
+              <a:buNone/>
+            </a:pPr>
+            <a:r>
+              <a:rPr lang="en-US" sz="480" b="1" dirty="0">
+                <a:solidFill>
+                  <a:srgbClr val="202124"/>
+                </a:solidFill>
+                <a:latin typeface="Arial" pitchFamily="34" charset="0"/>
+                <a:ea typeface="Arial" pitchFamily="34" charset="-122"/>
+                <a:cs typeface="Arial" pitchFamily="34" charset="-120"/>
+              </a:rPr>
+              <a:t>Sanitize response</a:t>
+            </a:r>
+            <a:endParaRPr lang="en-US" sz="480" dirty="0"/>
+          </a:p>
+        </p:txBody>
+      </p:sp>
+      <p:sp>
+        <p:nvSpPr>
+          <p:cNvPr id="225" name="Shape 203"/>
+          <p:cNvSpPr/>
+          <p:nvPr/>
+        </p:nvSpPr>
+        <p:spPr>
+          <a:xfrm>
+            <a:off x="2427732" y="2079346"/>
+            <a:ext cx="512064" cy="210312"/>
+          </a:xfrm>
+          <a:prstGeom prst="roundRect">
+            <a:avLst>
+              <a:gd name="adj" fmla="val 21739"/>
+            </a:avLst>
+          </a:prstGeom>
+          <a:solidFill>
+            <a:srgbClr val="FFFFFF"/>
+          </a:solidFill>
+          <a:ln w="5715">
+            <a:solidFill>
+              <a:srgbClr val="DADCE0"/>
+            </a:solidFill>
+            <a:prstDash val="solid"/>
+          </a:ln>
+        </p:spPr>
+      </p:sp>
+      <p:sp>
+        <p:nvSpPr>
+          <p:cNvPr id="226" name="Text 204"/>
+          <p:cNvSpPr/>
+          <p:nvPr/>
+        </p:nvSpPr>
+        <p:spPr>
+          <a:xfrm>
+            <a:off x="2446020" y="2088490"/>
+            <a:ext cx="475488" cy="192024"/>
+          </a:xfrm>
+          <a:prstGeom prst="rect">
+            <a:avLst/>
+          </a:prstGeom>
+          <a:noFill/>
+          <a:ln/>
+        </p:spPr>
+        <p:txBody>
+          <a:bodyPr wrap="square" lIns="0" tIns="0" rIns="0" bIns="0" rtlCol="0" anchor="ctr">
+            <a:normAutofit/>
+          </a:bodyPr>
+          <a:lstStyle/>
+          <a:p>
+            <a:pPr algn="ctr" indent="0" marL="0">
+              <a:lnSpc>
+                <a:spcPct val="86000"/>
+              </a:lnSpc>
+              <a:buNone/>
+            </a:pPr>
+            <a:r>
+              <a:rPr lang="en-US" sz="480" b="1" dirty="0">
+                <a:solidFill>
+                  <a:srgbClr val="202124"/>
+                </a:solidFill>
+                <a:latin typeface="Arial" pitchFamily="34" charset="0"/>
+                <a:ea typeface="Arial" pitchFamily="34" charset="-122"/>
+                <a:cs typeface="Arial" pitchFamily="34" charset="-120"/>
+              </a:rPr>
+              <a:t>Security</a:t>
+            </a:r>
+            <a:endParaRPr lang="en-US" sz="480" dirty="0"/>
+          </a:p>
+          <a:p>
+            <a:pPr algn="ctr" indent="0" marL="0">
+              <a:lnSpc>
+                <a:spcPct val="86000"/>
+              </a:lnSpc>
+              <a:buNone/>
+            </a:pPr>
+            <a:r>
+              <a:rPr lang="en-US" sz="420" dirty="0">
+                <a:solidFill>
+                  <a:srgbClr val="202124"/>
+                </a:solidFill>
+                <a:latin typeface="Arial" pitchFamily="34" charset="0"/>
+                <a:ea typeface="Arial" pitchFamily="34" charset="-122"/>
+                <a:cs typeface="Arial" pitchFamily="34" charset="-120"/>
+              </a:rPr>
+              <a:t>policies</a:t>
+            </a:r>
+            <a:endParaRPr lang="en-US" sz="480" dirty="0"/>
+          </a:p>
+        </p:txBody>
+      </p:sp>
+      <p:sp>
+        <p:nvSpPr>
+          <p:cNvPr id="227" name="Shape 205"/>
+          <p:cNvSpPr/>
+          <p:nvPr/>
+        </p:nvSpPr>
+        <p:spPr>
+          <a:xfrm>
+            <a:off x="2427732" y="2606040"/>
+            <a:ext cx="512064" cy="210312"/>
+          </a:xfrm>
+          <a:prstGeom prst="roundRect">
+            <a:avLst>
+              <a:gd name="adj" fmla="val 21739"/>
+            </a:avLst>
+          </a:prstGeom>
+          <a:solidFill>
+            <a:srgbClr val="FFFFFF"/>
+          </a:solidFill>
+          <a:ln w="5715">
+            <a:solidFill>
+              <a:srgbClr val="DADCE0"/>
+            </a:solidFill>
+            <a:prstDash val="solid"/>
+          </a:ln>
+        </p:spPr>
+      </p:sp>
+      <p:sp>
+        <p:nvSpPr>
+          <p:cNvPr id="228" name="Text 206"/>
+          <p:cNvSpPr/>
+          <p:nvPr/>
+        </p:nvSpPr>
+        <p:spPr>
+          <a:xfrm>
+            <a:off x="2446020" y="2615184"/>
+            <a:ext cx="475488" cy="192024"/>
+          </a:xfrm>
+          <a:prstGeom prst="rect">
+            <a:avLst/>
+          </a:prstGeom>
+          <a:noFill/>
+          <a:ln/>
+        </p:spPr>
+        <p:txBody>
+          <a:bodyPr wrap="square" lIns="0" tIns="0" rIns="0" bIns="0" rtlCol="0" anchor="ctr">
+            <a:normAutofit/>
+          </a:bodyPr>
+          <a:lstStyle/>
+          <a:p>
+            <a:pPr algn="ctr" indent="0" marL="0">
+              <a:lnSpc>
+                <a:spcPct val="86000"/>
+              </a:lnSpc>
+              <a:buNone/>
+            </a:pPr>
+            <a:r>
+              <a:rPr lang="en-US" sz="480" b="1" dirty="0">
+                <a:solidFill>
+                  <a:srgbClr val="202124"/>
+                </a:solidFill>
+                <a:latin typeface="Arial" pitchFamily="34" charset="0"/>
+                <a:ea typeface="Arial" pitchFamily="34" charset="-122"/>
+                <a:cs typeface="Arial" pitchFamily="34" charset="-120"/>
+              </a:rPr>
+              <a:t>Resolve</a:t>
+            </a:r>
+            <a:endParaRPr lang="en-US" sz="480" dirty="0"/>
+          </a:p>
+          <a:p>
+            <a:pPr algn="ctr" indent="0" marL="0">
+              <a:lnSpc>
+                <a:spcPct val="86000"/>
+              </a:lnSpc>
+              <a:buNone/>
+            </a:pPr>
+            <a:r>
+              <a:rPr lang="en-US" sz="420" dirty="0">
+                <a:solidFill>
+                  <a:srgbClr val="202124"/>
+                </a:solidFill>
+                <a:latin typeface="Arial" pitchFamily="34" charset="0"/>
+                <a:ea typeface="Arial" pitchFamily="34" charset="-122"/>
+                <a:cs typeface="Arial" pitchFamily="34" charset="-120"/>
+              </a:rPr>
+              <a:t>agent route</a:t>
+            </a:r>
+            <a:endParaRPr lang="en-US" sz="480" dirty="0"/>
+          </a:p>
+        </p:txBody>
+      </p:sp>
+      <p:sp>
+        <p:nvSpPr>
+          <p:cNvPr id="229" name="Shape 207"/>
+          <p:cNvSpPr/>
+          <p:nvPr/>
+        </p:nvSpPr>
+        <p:spPr>
+          <a:xfrm>
+            <a:off x="3853282" y="1141171"/>
+            <a:ext cx="512064" cy="146304"/>
+          </a:xfrm>
+          <a:prstGeom prst="roundRect">
+            <a:avLst>
+              <a:gd name="adj" fmla="val 31250"/>
+            </a:avLst>
+          </a:prstGeom>
+          <a:solidFill>
+            <a:srgbClr val="FFFFFF"/>
+          </a:solidFill>
+          <a:ln w="5715">
+            <a:solidFill>
+              <a:srgbClr val="DADCE0"/>
+            </a:solidFill>
+            <a:prstDash val="solid"/>
+          </a:ln>
+        </p:spPr>
+      </p:sp>
+      <p:sp>
+        <p:nvSpPr>
+          <p:cNvPr id="230" name="Text 208"/>
+          <p:cNvSpPr/>
+          <p:nvPr/>
+        </p:nvSpPr>
+        <p:spPr>
+          <a:xfrm>
+            <a:off x="3871570" y="1150315"/>
+            <a:ext cx="475488" cy="128016"/>
+          </a:xfrm>
+          <a:prstGeom prst="rect">
+            <a:avLst/>
+          </a:prstGeom>
+          <a:noFill/>
+          <a:ln/>
+        </p:spPr>
+        <p:txBody>
+          <a:bodyPr wrap="square" lIns="0" tIns="0" rIns="0" bIns="0" rtlCol="0" anchor="ctr">
+            <a:normAutofit/>
+          </a:bodyPr>
+          <a:lstStyle/>
+          <a:p>
+            <a:pPr algn="ctr" indent="0" marL="0">
+              <a:lnSpc>
+                <a:spcPct val="86000"/>
+              </a:lnSpc>
+              <a:buNone/>
+            </a:pPr>
+            <a:r>
+              <a:rPr lang="en-US" sz="480" b="1" dirty="0">
+                <a:solidFill>
+                  <a:srgbClr val="202124"/>
+                </a:solidFill>
+                <a:latin typeface="Arial" pitchFamily="34" charset="0"/>
+                <a:ea typeface="Arial" pitchFamily="34" charset="-122"/>
+                <a:cs typeface="Arial" pitchFamily="34" charset="-120"/>
+              </a:rPr>
+              <a:t>Response</a:t>
+            </a:r>
+            <a:endParaRPr lang="en-US" sz="480" dirty="0"/>
+          </a:p>
+        </p:txBody>
+      </p:sp>
+      <p:sp>
+        <p:nvSpPr>
+          <p:cNvPr id="231" name="Shape 209"/>
+          <p:cNvSpPr/>
+          <p:nvPr/>
+        </p:nvSpPr>
+        <p:spPr>
+          <a:xfrm>
+            <a:off x="3853282" y="2719426"/>
+            <a:ext cx="512064" cy="146304"/>
+          </a:xfrm>
+          <a:prstGeom prst="roundRect">
+            <a:avLst>
+              <a:gd name="adj" fmla="val 31250"/>
+            </a:avLst>
+          </a:prstGeom>
+          <a:solidFill>
+            <a:srgbClr val="FFFFFF"/>
+          </a:solidFill>
+          <a:ln w="5715">
+            <a:solidFill>
+              <a:srgbClr val="DADCE0"/>
+            </a:solidFill>
+            <a:prstDash val="solid"/>
+          </a:ln>
+        </p:spPr>
+      </p:sp>
+      <p:sp>
+        <p:nvSpPr>
+          <p:cNvPr id="232" name="Text 210"/>
+          <p:cNvSpPr/>
+          <p:nvPr/>
+        </p:nvSpPr>
+        <p:spPr>
+          <a:xfrm>
+            <a:off x="3871570" y="2728570"/>
+            <a:ext cx="475488" cy="128016"/>
+          </a:xfrm>
+          <a:prstGeom prst="rect">
+            <a:avLst/>
+          </a:prstGeom>
+          <a:noFill/>
+          <a:ln/>
+        </p:spPr>
+        <p:txBody>
+          <a:bodyPr wrap="square" lIns="0" tIns="0" rIns="0" bIns="0" rtlCol="0" anchor="ctr">
+            <a:normAutofit/>
+          </a:bodyPr>
+          <a:lstStyle/>
+          <a:p>
+            <a:pPr algn="ctr" indent="0" marL="0">
+              <a:lnSpc>
+                <a:spcPct val="86000"/>
+              </a:lnSpc>
+              <a:buNone/>
+            </a:pPr>
+            <a:r>
+              <a:rPr lang="en-US" sz="480" b="1" dirty="0">
+                <a:solidFill>
+                  <a:srgbClr val="202124"/>
+                </a:solidFill>
+                <a:latin typeface="Arial" pitchFamily="34" charset="0"/>
+                <a:ea typeface="Arial" pitchFamily="34" charset="-122"/>
+                <a:cs typeface="Arial" pitchFamily="34" charset="-120"/>
+              </a:rPr>
+              <a:t>Response</a:t>
+            </a:r>
+            <a:endParaRPr lang="en-US" sz="480" dirty="0"/>
+          </a:p>
+        </p:txBody>
+      </p:sp>
+      <p:sp>
+        <p:nvSpPr>
+          <p:cNvPr id="233" name="Shape 211"/>
+          <p:cNvSpPr/>
+          <p:nvPr/>
+        </p:nvSpPr>
+        <p:spPr>
+          <a:xfrm>
+            <a:off x="3032150" y="1141171"/>
+            <a:ext cx="512064" cy="146304"/>
+          </a:xfrm>
+          <a:prstGeom prst="roundRect">
+            <a:avLst>
+              <a:gd name="adj" fmla="val 31250"/>
+            </a:avLst>
+          </a:prstGeom>
+          <a:solidFill>
+            <a:srgbClr val="FFFFFF"/>
+          </a:solidFill>
+          <a:ln w="5715">
+            <a:solidFill>
+              <a:srgbClr val="DADCE0"/>
+            </a:solidFill>
+            <a:prstDash val="solid"/>
+          </a:ln>
+        </p:spPr>
+      </p:sp>
+      <p:sp>
+        <p:nvSpPr>
+          <p:cNvPr id="234" name="Text 212"/>
+          <p:cNvSpPr/>
+          <p:nvPr/>
+        </p:nvSpPr>
+        <p:spPr>
+          <a:xfrm>
+            <a:off x="3050438" y="1150315"/>
+            <a:ext cx="475488" cy="128016"/>
+          </a:xfrm>
+          <a:prstGeom prst="rect">
+            <a:avLst/>
+          </a:prstGeom>
+          <a:noFill/>
+          <a:ln/>
+        </p:spPr>
+        <p:txBody>
+          <a:bodyPr wrap="square" lIns="0" tIns="0" rIns="0" bIns="0" rtlCol="0" anchor="ctr">
+            <a:normAutofit/>
+          </a:bodyPr>
+          <a:lstStyle/>
+          <a:p>
+            <a:pPr algn="ctr" indent="0" marL="0">
+              <a:lnSpc>
+                <a:spcPct val="86000"/>
+              </a:lnSpc>
+              <a:buNone/>
+            </a:pPr>
+            <a:r>
+              <a:rPr lang="en-US" sz="480" b="1" dirty="0">
+                <a:solidFill>
+                  <a:srgbClr val="202124"/>
+                </a:solidFill>
+                <a:latin typeface="Arial" pitchFamily="34" charset="0"/>
+                <a:ea typeface="Arial" pitchFamily="34" charset="-122"/>
+                <a:cs typeface="Arial" pitchFamily="34" charset="-120"/>
+              </a:rPr>
+              <a:t>Request</a:t>
+            </a:r>
+            <a:endParaRPr lang="en-US" sz="480" dirty="0"/>
+          </a:p>
+        </p:txBody>
+      </p:sp>
+      <p:sp>
+        <p:nvSpPr>
+          <p:cNvPr id="235" name="Shape 213"/>
+          <p:cNvSpPr/>
+          <p:nvPr/>
+        </p:nvSpPr>
+        <p:spPr>
+          <a:xfrm>
+            <a:off x="3032150" y="2645359"/>
+            <a:ext cx="512064" cy="146304"/>
+          </a:xfrm>
+          <a:prstGeom prst="roundRect">
+            <a:avLst>
+              <a:gd name="adj" fmla="val 31250"/>
+            </a:avLst>
+          </a:prstGeom>
+          <a:solidFill>
+            <a:srgbClr val="FFFFFF"/>
+          </a:solidFill>
+          <a:ln w="5715">
+            <a:solidFill>
+              <a:srgbClr val="DADCE0"/>
+            </a:solidFill>
+            <a:prstDash val="solid"/>
+          </a:ln>
+        </p:spPr>
+      </p:sp>
+      <p:sp>
+        <p:nvSpPr>
+          <p:cNvPr id="236" name="Text 214"/>
+          <p:cNvSpPr/>
+          <p:nvPr/>
+        </p:nvSpPr>
+        <p:spPr>
+          <a:xfrm>
+            <a:off x="3050438" y="2654503"/>
+            <a:ext cx="475488" cy="128016"/>
+          </a:xfrm>
+          <a:prstGeom prst="rect">
+            <a:avLst/>
+          </a:prstGeom>
+          <a:noFill/>
+          <a:ln/>
+        </p:spPr>
+        <p:txBody>
+          <a:bodyPr wrap="square" lIns="0" tIns="0" rIns="0" bIns="0" rtlCol="0" anchor="ctr">
+            <a:normAutofit/>
+          </a:bodyPr>
+          <a:lstStyle/>
+          <a:p>
+            <a:pPr algn="ctr" indent="0" marL="0">
+              <a:lnSpc>
+                <a:spcPct val="86000"/>
+              </a:lnSpc>
+              <a:buNone/>
+            </a:pPr>
+            <a:r>
+              <a:rPr lang="en-US" sz="480" b="1" dirty="0">
+                <a:solidFill>
+                  <a:srgbClr val="202124"/>
+                </a:solidFill>
+                <a:latin typeface="Arial" pitchFamily="34" charset="0"/>
+                <a:ea typeface="Arial" pitchFamily="34" charset="-122"/>
+                <a:cs typeface="Arial" pitchFamily="34" charset="-120"/>
+              </a:rPr>
+              <a:t>Request</a:t>
+            </a:r>
+            <a:endParaRPr lang="en-US" sz="480" dirty="0"/>
+          </a:p>
+        </p:txBody>
+      </p:sp>
+      <p:sp>
+        <p:nvSpPr>
+          <p:cNvPr id="237" name="Text 215"/>
           <p:cNvSpPr/>
           <p:nvPr/>
         </p:nvSpPr>
@@ -31864,8 +32323,8 @@
         </p:nvSpPr>
         <p:spPr>
           <a:xfrm>
-            <a:off x="1426464" y="1664208"/>
-            <a:ext cx="1536192" cy="402336"/>
+            <a:off x="1426464" y="1627632"/>
+            <a:ext cx="1536192" cy="384048"/>
           </a:xfrm>
           <a:prstGeom prst="rect">
             <a:avLst/>
@@ -31881,7 +32340,7 @@
               <a:buNone/>
             </a:pPr>
             <a:r>
-              <a:rPr lang="en-US" sz="820" b="1" dirty="0">
+              <a:rPr lang="en-US" sz="800" b="1" dirty="0">
                 <a:solidFill>
                   <a:srgbClr val="3C4043"/>
                 </a:solidFill>
@@ -31891,14 +32350,14 @@
               </a:rPr>
               <a:t>Admin triggers live tier</a:t>
             </a:r>
-            <a:endParaRPr lang="en-US" sz="820" dirty="0"/>
+            <a:endParaRPr lang="en-US" sz="800" dirty="0"/>
           </a:p>
           <a:p>
             <a:pPr indent="0" marL="0">
               <a:buNone/>
             </a:pPr>
             <a:r>
-              <a:rPr lang="en-US" sz="820" b="1" dirty="0">
+              <a:rPr lang="en-US" sz="800" b="1" dirty="0">
                 <a:solidFill>
                   <a:srgbClr val="3C4043"/>
                 </a:solidFill>
@@ -31908,14 +32367,14 @@
               </a:rPr>
               <a:t>upgrade for retailstream</a:t>
             </a:r>
-            <a:endParaRPr lang="en-US" sz="820" dirty="0"/>
+            <a:endParaRPr lang="en-US" sz="800" dirty="0"/>
           </a:p>
           <a:p>
             <a:pPr indent="0" marL="0">
               <a:buNone/>
             </a:pPr>
             <a:r>
-              <a:rPr lang="en-US" sz="820" b="1" dirty="0">
+              <a:rPr lang="en-US" sz="800" b="1" dirty="0">
                 <a:solidFill>
                   <a:srgbClr val="3C4043"/>
                 </a:solidFill>
@@ -31925,7 +32384,7 @@
               </a:rPr>
               <a:t>(Standard → Enterprise)</a:t>
             </a:r>
-            <a:endParaRPr lang="en-US" sz="820" dirty="0"/>
+            <a:endParaRPr lang="en-US" sz="800" dirty="0"/>
           </a:p>
         </p:txBody>
       </p:sp>
@@ -31962,7 +32421,7 @@
         <p:spPr>
           <a:xfrm>
             <a:off x="1261872" y="2048256"/>
-            <a:ext cx="1499616" cy="182880"/>
+            <a:ext cx="1499616" cy="164592"/>
           </a:xfrm>
           <a:prstGeom prst="rect">
             <a:avLst/>
@@ -31978,7 +32437,7 @@
               <a:buNone/>
             </a:pPr>
             <a:r>
-              <a:rPr lang="en-US" sz="800" b="1" dirty="0">
+              <a:rPr lang="en-US" sz="780" b="1" dirty="0">
                 <a:solidFill>
                   <a:srgbClr val="0F2942"/>
                 </a:solidFill>
@@ -31988,7 +32447,7 @@
               </a:rPr>
               <a:t>POST /tier/promote</a:t>
             </a:r>
-            <a:endParaRPr lang="en-US" sz="800" dirty="0"/>
+            <a:endParaRPr lang="en-US" sz="780" dirty="0"/>
           </a:p>
         </p:txBody>
       </p:sp>
@@ -32000,7 +32459,7 @@
         </p:nvSpPr>
         <p:spPr>
           <a:xfrm>
-            <a:off x="3182112" y="2304288"/>
+            <a:off x="3182112" y="2267712"/>
             <a:ext cx="292608" cy="292608"/>
           </a:xfrm>
           <a:prstGeom prst="ellipse">
@@ -32020,7 +32479,7 @@
         </p:nvSpPr>
         <p:spPr>
           <a:xfrm>
-            <a:off x="3182112" y="2304288"/>
+            <a:off x="3182112" y="2267712"/>
             <a:ext cx="292608" cy="292608"/>
           </a:xfrm>
           <a:prstGeom prst="rect">
@@ -32059,8 +32518,8 @@
         </p:nvSpPr>
         <p:spPr>
           <a:xfrm>
-            <a:off x="3529584" y="2267712"/>
-            <a:ext cx="1536192" cy="438912"/>
+            <a:off x="3529584" y="2231136"/>
+            <a:ext cx="1536192" cy="402336"/>
           </a:xfrm>
           <a:prstGeom prst="rect">
             <a:avLst/>
@@ -32076,7 +32535,7 @@
               <a:buNone/>
             </a:pPr>
             <a:r>
-              <a:rPr lang="en-US" sz="800" b="1" dirty="0">
+              <a:rPr lang="en-US" sz="780" b="1" dirty="0">
                 <a:solidFill>
                   <a:srgbClr val="3C4043"/>
                 </a:solidFill>
@@ -32086,14 +32545,14 @@
               </a:rPr>
               <a:t>Coordinator initiates</a:t>
             </a:r>
-            <a:endParaRPr lang="en-US" sz="800" dirty="0"/>
+            <a:endParaRPr lang="en-US" sz="780" dirty="0"/>
           </a:p>
           <a:p>
             <a:pPr indent="0" marL="0">
               <a:buNone/>
             </a:pPr>
             <a:r>
-              <a:rPr lang="en-US" sz="800" b="1" dirty="0">
+              <a:rPr lang="en-US" sz="780" b="1" dirty="0">
                 <a:solidFill>
                   <a:srgbClr val="3C4043"/>
                 </a:solidFill>
@@ -32103,14 +32562,14 @@
               </a:rPr>
               <a:t>SHADOW_SYNC dual-write</a:t>
             </a:r>
-            <a:endParaRPr lang="en-US" sz="800" dirty="0"/>
+            <a:endParaRPr lang="en-US" sz="780" dirty="0"/>
           </a:p>
           <a:p>
             <a:pPr indent="0" marL="0">
               <a:buNone/>
             </a:pPr>
             <a:r>
-              <a:rPr lang="en-US" sz="800" b="1" dirty="0">
+              <a:rPr lang="en-US" sz="780" b="1" dirty="0">
                 <a:solidFill>
                   <a:srgbClr val="3C4043"/>
                 </a:solidFill>
@@ -32120,7 +32579,7 @@
               </a:rPr>
               <a:t>from Pool to PSC Spoke</a:t>
             </a:r>
-            <a:endParaRPr lang="en-US" sz="800" dirty="0"/>
+            <a:endParaRPr lang="en-US" sz="780" dirty="0"/>
           </a:p>
         </p:txBody>
       </p:sp>
@@ -32132,7 +32591,7 @@
         </p:nvSpPr>
         <p:spPr>
           <a:xfrm>
-            <a:off x="3136392" y="2889504"/>
+            <a:off x="3136392" y="2907792"/>
             <a:ext cx="1956816" cy="0"/>
           </a:xfrm>
           <a:prstGeom prst="line">
@@ -32156,24 +32615,26 @@
         </p:nvSpPr>
         <p:spPr>
           <a:xfrm>
-            <a:off x="3200400" y="2688336"/>
-            <a:ext cx="1828800" cy="182880"/>
-          </a:xfrm>
-          <a:prstGeom prst="rect">
-            <a:avLst/>
-          </a:prstGeom>
-          <a:noFill/>
-          <a:ln/>
-        </p:spPr>
-        <p:txBody>
-          <a:bodyPr wrap="square" rtlCol="0" anchor="ctr"/>
+            <a:off x="3163824" y="2697480"/>
+            <a:ext cx="1901952" cy="173736"/>
+          </a:xfrm>
+          <a:prstGeom prst="rect">
+            <a:avLst/>
+          </a:prstGeom>
+          <a:noFill/>
+          <a:ln/>
+        </p:spPr>
+        <p:txBody>
+          <a:bodyPr wrap="square" rtlCol="0" anchor="ctr">
+            <a:normAutofit/>
+          </a:bodyPr>
           <a:lstStyle/>
           <a:p>
             <a:pPr algn="ctr" indent="0" marL="0">
               <a:buNone/>
             </a:pPr>
             <a:r>
-              <a:rPr lang="en-US" sz="760" b="1" dirty="0">
+              <a:rPr lang="en-US" sz="700" b="1" dirty="0">
                 <a:solidFill>
                   <a:srgbClr val="0D7A75"/>
                 </a:solidFill>
@@ -32183,7 +32644,7 @@
               </a:rPr>
               <a:t>Start Dual-Write Sync → Stream Memory &amp; AlloyDB Delta</a:t>
             </a:r>
-            <a:endParaRPr lang="en-US" sz="760" dirty="0"/>
+            <a:endParaRPr lang="en-US" sz="700" dirty="0"/>
           </a:p>
         </p:txBody>
       </p:sp>
@@ -32195,7 +32656,7 @@
         </p:nvSpPr>
         <p:spPr>
           <a:xfrm>
-            <a:off x="5285232" y="2944368"/>
+            <a:off x="5285232" y="2926080"/>
             <a:ext cx="292608" cy="292608"/>
           </a:xfrm>
           <a:prstGeom prst="ellipse">
@@ -32215,7 +32676,7 @@
         </p:nvSpPr>
         <p:spPr>
           <a:xfrm>
-            <a:off x="5285232" y="2944368"/>
+            <a:off x="5285232" y="2926080"/>
             <a:ext cx="292608" cy="292608"/>
           </a:xfrm>
           <a:prstGeom prst="rect">
@@ -32254,8 +32715,8 @@
         </p:nvSpPr>
         <p:spPr>
           <a:xfrm>
-            <a:off x="5632704" y="2907792"/>
-            <a:ext cx="1536192" cy="438912"/>
+            <a:off x="5632704" y="2889504"/>
+            <a:ext cx="1536192" cy="402336"/>
           </a:xfrm>
           <a:prstGeom prst="rect">
             <a:avLst/>
@@ -32271,7 +32732,7 @@
               <a:buNone/>
             </a:pPr>
             <a:r>
-              <a:rPr lang="en-US" sz="800" b="1" dirty="0">
+              <a:rPr lang="en-US" sz="780" b="1" dirty="0">
                 <a:solidFill>
                   <a:srgbClr val="3C4043"/>
                 </a:solidFill>
@@ -32281,14 +32742,14 @@
               </a:rPr>
               <a:t>Re-encrypts state with</a:t>
             </a:r>
-            <a:endParaRPr lang="en-US" sz="800" dirty="0"/>
+            <a:endParaRPr lang="en-US" sz="780" dirty="0"/>
           </a:p>
           <a:p>
             <a:pPr indent="0" marL="0">
               <a:buNone/>
             </a:pPr>
             <a:r>
-              <a:rPr lang="en-US" sz="800" b="1" dirty="0">
+              <a:rPr lang="en-US" sz="780" b="1" dirty="0">
                 <a:solidFill>
                   <a:srgbClr val="3C4043"/>
                 </a:solidFill>
@@ -32298,14 +32759,14 @@
               </a:rPr>
               <a:t>tenant CMEK &amp; verifies</a:t>
             </a:r>
-            <a:endParaRPr lang="en-US" sz="800" dirty="0"/>
+            <a:endParaRPr lang="en-US" sz="780" dirty="0"/>
           </a:p>
           <a:p>
             <a:pPr indent="0" marL="0">
               <a:buNone/>
             </a:pPr>
             <a:r>
-              <a:rPr lang="en-US" sz="800" b="1" dirty="0">
+              <a:rPr lang="en-US" sz="780" b="1" dirty="0">
                 <a:solidFill>
                   <a:srgbClr val="3C4043"/>
                 </a:solidFill>
@@ -32315,7 +32776,7 @@
               </a:rPr>
               <a:t>SHA-256 checksums</a:t>
             </a:r>
-            <a:endParaRPr lang="en-US" sz="800" dirty="0"/>
+            <a:endParaRPr lang="en-US" sz="780" dirty="0"/>
           </a:p>
         </p:txBody>
       </p:sp>
@@ -32351,24 +32812,26 @@
         </p:nvSpPr>
         <p:spPr>
           <a:xfrm>
-            <a:off x="5303520" y="3346704"/>
-            <a:ext cx="1828800" cy="182880"/>
-          </a:xfrm>
-          <a:prstGeom prst="rect">
-            <a:avLst/>
-          </a:prstGeom>
-          <a:noFill/>
-          <a:ln/>
-        </p:spPr>
-        <p:txBody>
-          <a:bodyPr wrap="square" rtlCol="0" anchor="ctr"/>
+            <a:off x="5266944" y="3337560"/>
+            <a:ext cx="1901952" cy="173736"/>
+          </a:xfrm>
+          <a:prstGeom prst="rect">
+            <a:avLst/>
+          </a:prstGeom>
+          <a:noFill/>
+          <a:ln/>
+        </p:spPr>
+        <p:txBody>
+          <a:bodyPr wrap="square" rtlCol="0" anchor="ctr">
+            <a:normAutofit/>
+          </a:bodyPr>
           <a:lstStyle/>
           <a:p>
             <a:pPr algn="ctr" indent="0" marL="0">
               <a:buNone/>
             </a:pPr>
             <a:r>
-              <a:rPr lang="en-US" sz="760" b="1" dirty="0">
+              <a:rPr lang="en-US" sz="720" b="1" dirty="0">
                 <a:solidFill>
                   <a:srgbClr val="54728C"/>
                 </a:solidFill>
@@ -32376,9 +32839,9 @@
                 <a:ea typeface="Roboto" pitchFamily="34" charset="-122"/>
                 <a:cs typeface="Roboto" pitchFamily="34" charset="-120"/>
               </a:rPr>
-              <a:t>SHA-256 Checksum • Parity Verified</a:t>
-            </a:r>
-            <a:endParaRPr lang="en-US" sz="760" dirty="0"/>
+              <a:t>SHA-256 Checksum Parity Verified</a:t>
+            </a:r>
+            <a:endParaRPr lang="en-US" sz="720" dirty="0"/>
           </a:p>
         </p:txBody>
       </p:sp>
@@ -33740,8 +34203,8 @@
         </p:nvSpPr>
         <p:spPr>
           <a:xfrm>
-            <a:off x="530352" y="2852928"/>
-            <a:ext cx="1975104" cy="1316736"/>
+            <a:off x="493776" y="2852928"/>
+            <a:ext cx="1956816" cy="1316736"/>
           </a:xfrm>
           <a:prstGeom prst="roundRect">
             <a:avLst>
@@ -33762,8 +34225,8 @@
         </p:nvSpPr>
         <p:spPr>
           <a:xfrm>
-            <a:off x="603504" y="2852928"/>
-            <a:ext cx="1828800" cy="1316736"/>
+            <a:off x="566928" y="2852928"/>
+            <a:ext cx="1810512" cy="1316736"/>
           </a:xfrm>
           <a:prstGeom prst="rect">
             <a:avLst/>
@@ -33818,8 +34281,8 @@
         </p:nvSpPr>
         <p:spPr>
           <a:xfrm>
-            <a:off x="3749040" y="2852928"/>
-            <a:ext cx="1975104" cy="1316736"/>
+            <a:off x="3840480" y="2852928"/>
+            <a:ext cx="1956816" cy="1316736"/>
           </a:xfrm>
           <a:prstGeom prst="roundRect">
             <a:avLst>
@@ -33840,8 +34303,8 @@
         </p:nvSpPr>
         <p:spPr>
           <a:xfrm>
-            <a:off x="3822192" y="2852928"/>
-            <a:ext cx="1828800" cy="1316736"/>
+            <a:off x="3913632" y="2852928"/>
+            <a:ext cx="1810512" cy="1316736"/>
           </a:xfrm>
           <a:prstGeom prst="rect">
             <a:avLst/>
@@ -33897,7 +34360,7 @@
         <p:spPr>
           <a:xfrm>
             <a:off x="6784848" y="2852928"/>
-            <a:ext cx="1975104" cy="1316736"/>
+            <a:ext cx="1956816" cy="1316736"/>
           </a:xfrm>
           <a:prstGeom prst="roundRect">
             <a:avLst>
@@ -33919,7 +34382,7 @@
         <p:spPr>
           <a:xfrm>
             <a:off x="6858000" y="2852928"/>
-            <a:ext cx="1828800" cy="1316736"/>
+            <a:ext cx="1810512" cy="1316736"/>
           </a:xfrm>
           <a:prstGeom prst="rect">
             <a:avLst/>
@@ -33975,7 +34438,7 @@
         <p:spPr>
           <a:xfrm>
             <a:off x="9710928" y="2852928"/>
-            <a:ext cx="1975104" cy="1316736"/>
+            <a:ext cx="1956816" cy="1316736"/>
           </a:xfrm>
           <a:prstGeom prst="roundRect">
             <a:avLst>
@@ -33997,7 +34460,7 @@
         <p:spPr>
           <a:xfrm>
             <a:off x="9784080" y="2852928"/>
-            <a:ext cx="1828800" cy="1316736"/>
+            <a:ext cx="1810512" cy="1316736"/>
           </a:xfrm>
           <a:prstGeom prst="rect">
             <a:avLst/>
@@ -34052,8 +34515,8 @@
         </p:nvSpPr>
         <p:spPr>
           <a:xfrm>
-            <a:off x="2468880" y="1572768"/>
-            <a:ext cx="1316736" cy="1024128"/>
+            <a:off x="2514600" y="1572768"/>
+            <a:ext cx="1261872" cy="1024128"/>
           </a:xfrm>
           <a:prstGeom prst="roundRect">
             <a:avLst>
@@ -34079,8 +34542,8 @@
         </p:nvSpPr>
         <p:spPr>
           <a:xfrm>
-            <a:off x="2505456" y="1627632"/>
-            <a:ext cx="1243584" cy="914400"/>
+            <a:off x="2551176" y="1627632"/>
+            <a:ext cx="1188720" cy="914400"/>
           </a:xfrm>
           <a:prstGeom prst="rect">
             <a:avLst/>
@@ -34096,7 +34559,7 @@
               <a:buNone/>
             </a:pPr>
             <a:r>
-              <a:rPr lang="en-US" sz="880" b="1" dirty="0">
+              <a:rPr lang="en-US" sz="860" b="1" dirty="0">
                 <a:solidFill>
                   <a:srgbClr val="3C4043"/>
                 </a:solidFill>
@@ -34106,14 +34569,14 @@
               </a:rPr>
               <a:t>1. Looks up tenant tier</a:t>
             </a:r>
-            <a:endParaRPr lang="en-US" sz="880" dirty="0"/>
+            <a:endParaRPr lang="en-US" sz="860" dirty="0"/>
           </a:p>
           <a:p>
             <a:pPr algn="ctr" indent="0" marL="0">
               <a:buNone/>
             </a:pPr>
             <a:r>
-              <a:rPr lang="en-US" sz="880" b="1" dirty="0">
+              <a:rPr lang="en-US" sz="860" b="1" dirty="0">
                 <a:solidFill>
                   <a:srgbClr val="3C4043"/>
                 </a:solidFill>
@@ -34123,7 +34586,7 @@
               </a:rPr>
               <a:t>in Firestore (0ms)</a:t>
             </a:r>
-            <a:endParaRPr lang="en-US" sz="880" dirty="0"/>
+            <a:endParaRPr lang="en-US" sz="860" dirty="0"/>
           </a:p>
         </p:txBody>
       </p:sp>
@@ -34135,8 +34598,8 @@
         </p:nvSpPr>
         <p:spPr>
           <a:xfrm>
-            <a:off x="2505456" y="3182112"/>
-            <a:ext cx="1243584" cy="0"/>
+            <a:off x="2450592" y="3182112"/>
+            <a:ext cx="1389888" cy="0"/>
           </a:xfrm>
           <a:prstGeom prst="line">
             <a:avLst/>
@@ -34159,8 +34622,8 @@
         </p:nvSpPr>
         <p:spPr>
           <a:xfrm>
-            <a:off x="2505456" y="3730752"/>
-            <a:ext cx="1243584" cy="0"/>
+            <a:off x="2450592" y="3730752"/>
+            <a:ext cx="1389888" cy="0"/>
           </a:xfrm>
           <a:prstGeom prst="line">
             <a:avLst/>
@@ -34183,8 +34646,8 @@
         </p:nvSpPr>
         <p:spPr>
           <a:xfrm>
-            <a:off x="2432304" y="3877056"/>
-            <a:ext cx="1389888" cy="859536"/>
+            <a:off x="2514600" y="3877056"/>
+            <a:ext cx="1261872" cy="859536"/>
           </a:xfrm>
           <a:prstGeom prst="roundRect">
             <a:avLst>
@@ -34210,8 +34673,8 @@
         </p:nvSpPr>
         <p:spPr>
           <a:xfrm>
-            <a:off x="2487168" y="3913632"/>
-            <a:ext cx="1280160" cy="786384"/>
+            <a:off x="2551176" y="3913632"/>
+            <a:ext cx="1188720" cy="786384"/>
           </a:xfrm>
           <a:prstGeom prst="rect">
             <a:avLst/>
@@ -34227,7 +34690,7 @@
               <a:buNone/>
             </a:pPr>
             <a:r>
-              <a:rPr lang="en-US" sz="820" b="1" dirty="0">
+              <a:rPr lang="en-US" sz="800" b="1" dirty="0">
                 <a:solidFill>
                   <a:srgbClr val="A50E0E"/>
                 </a:solidFill>
@@ -34237,14 +34700,14 @@
               </a:rPr>
               <a:t>2. Standard tenants route</a:t>
             </a:r>
-            <a:endParaRPr lang="en-US" sz="820" dirty="0"/>
+            <a:endParaRPr lang="en-US" sz="800" dirty="0"/>
           </a:p>
           <a:p>
             <a:pPr algn="ctr" indent="0" marL="0">
               <a:buNone/>
             </a:pPr>
             <a:r>
-              <a:rPr lang="en-US" sz="820" b="1" dirty="0">
+              <a:rPr lang="en-US" sz="800" b="1" dirty="0">
                 <a:solidFill>
                   <a:srgbClr val="A50E0E"/>
                 </a:solidFill>
@@ -34254,14 +34717,14 @@
               </a:rPr>
               <a:t>directly to shared pool</a:t>
             </a:r>
-            <a:endParaRPr lang="en-US" sz="820" dirty="0"/>
+            <a:endParaRPr lang="en-US" sz="800" dirty="0"/>
           </a:p>
           <a:p>
             <a:pPr algn="ctr" indent="0" marL="0">
               <a:buNone/>
             </a:pPr>
             <a:r>
-              <a:rPr lang="en-US" sz="820" b="1" dirty="0">
+              <a:rPr lang="en-US" sz="800" b="1" dirty="0">
                 <a:solidFill>
                   <a:srgbClr val="A50E0E"/>
                 </a:solidFill>
@@ -34271,7 +34734,7 @@
               </a:rPr>
               <a:t>($42/mo fast-path)</a:t>
             </a:r>
-            <a:endParaRPr lang="en-US" sz="820" dirty="0"/>
+            <a:endParaRPr lang="en-US" sz="800" dirty="0"/>
           </a:p>
         </p:txBody>
       </p:sp>
@@ -36830,14 +37293,16 @@
           <a:ln/>
         </p:spPr>
         <p:txBody>
-          <a:bodyPr wrap="square" rtlCol="0" anchor="ctr"/>
+          <a:bodyPr wrap="square" rtlCol="0" anchor="ctr">
+            <a:normAutofit/>
+          </a:bodyPr>
           <a:lstStyle/>
           <a:p>
             <a:pPr indent="0" marL="0">
               <a:buNone/>
             </a:pPr>
             <a:r>
-              <a:rPr lang="en-US" sz="820" b="1" dirty="0">
+              <a:rPr lang="en-US" sz="760" b="1" dirty="0">
                 <a:solidFill>
                   <a:srgbClr val="3C4043"/>
                 </a:solidFill>
@@ -36845,9 +37310,9 @@
                 <a:ea typeface="Google Sans" pitchFamily="34" charset="-122"/>
                 <a:cs typeface="Google Sans" pitchFamily="34" charset="-120"/>
               </a:rPr>
-              <a:t>1. Baseline (Pre-Upgrade) • Test 1: D…</a:t>
-            </a:r>
-            <a:endParaRPr lang="en-US" sz="820" dirty="0"/>
+              <a:t>1. Baseline (Pre-Upgrade) • Test 1: Dual-Tier Routing</a:t>
+            </a:r>
+            <a:endParaRPr lang="en-US" sz="760" dirty="0"/>
           </a:p>
         </p:txBody>
       </p:sp>
@@ -36886,7 +37351,7 @@
                 <a:ea typeface="Roboto" pitchFamily="34" charset="-122"/>
                 <a:cs typeface="Roboto" pitchFamily="34" charset="-120"/>
               </a:rPr>
-              <a:t>Test 1 PASS: Verified deterministic tier routing &amp; quota clamping prior to migration (RetailStream (STANDARD) and FinVault (ENTERPRI…</a:t>
+              <a:t>Test 1 PASS: Verified deterministic tier routing &amp; quota clamping prior to migration</a:t>
             </a:r>
             <a:endParaRPr lang="en-US" sz="740" dirty="0"/>
           </a:p>
@@ -36957,14 +37422,16 @@
           <a:ln/>
         </p:spPr>
         <p:txBody>
-          <a:bodyPr wrap="square" rtlCol="0" anchor="ctr"/>
+          <a:bodyPr wrap="square" rtlCol="0" anchor="ctr">
+            <a:normAutofit/>
+          </a:bodyPr>
           <a:lstStyle/>
           <a:p>
             <a:pPr indent="0" marL="0">
               <a:buNone/>
             </a:pPr>
             <a:r>
-              <a:rPr lang="en-US" sz="820" b="1" dirty="0">
+              <a:rPr lang="en-US" sz="760" b="1" dirty="0">
                 <a:solidFill>
                   <a:srgbClr val="3C4043"/>
                 </a:solidFill>
@@ -36972,9 +37439,9 @@
                 <a:ea typeface="Google Sans" pitchFamily="34" charset="-122"/>
                 <a:cs typeface="Google Sans" pitchFamily="34" charset="-120"/>
               </a:rPr>
-              <a:t>2. Phase 1: SHADOW_SYNC • Test 2: Spo…</a:t>
-            </a:r>
-            <a:endParaRPr lang="en-US" sz="820" dirty="0"/>
+              <a:t>2. Phase 1: SHADOW_SYNC • Test 2: Spoke Provision &amp; CDC</a:t>
+            </a:r>
+            <a:endParaRPr lang="en-US" sz="760" dirty="0"/>
           </a:p>
         </p:txBody>
       </p:sp>
@@ -37013,7 +37480,7 @@
                 <a:ea typeface="Roboto" pitchFamily="34" charset="-122"/>
                 <a:cs typeface="Roboto" pitchFamily="34" charset="-120"/>
               </a:rPr>
-              <a:t>Test 2 PASS: replication_lag_ms == 0 and PSC connection status ACCEPTED before cutover (Terraform provisions cymbal-retailstream-sil…</a:t>
+              <a:t>Test 2 PASS: replication_lag_ms == 0 and PSC connection status ACCEPTED before cutover</a:t>
             </a:r>
             <a:endParaRPr lang="en-US" sz="740" dirty="0"/>
           </a:p>
@@ -37084,14 +37551,16 @@
           <a:ln/>
         </p:spPr>
         <p:txBody>
-          <a:bodyPr wrap="square" rtlCol="0" anchor="ctr"/>
+          <a:bodyPr wrap="square" rtlCol="0" anchor="ctr">
+            <a:normAutofit/>
+          </a:bodyPr>
           <a:lstStyle/>
           <a:p>
             <a:pPr indent="0" marL="0">
               <a:buNone/>
             </a:pPr>
             <a:r>
-              <a:rPr lang="en-US" sz="820" b="1" dirty="0">
+              <a:rPr lang="en-US" sz="760" b="1" dirty="0">
                 <a:solidFill>
                   <a:srgbClr val="3C4043"/>
                 </a:solidFill>
@@ -37099,9 +37568,9 @@
                 <a:ea typeface="Google Sans" pitchFamily="34" charset="-122"/>
                 <a:cs typeface="Google Sans" pitchFamily="34" charset="-120"/>
               </a:rPr>
-              <a:t>3. Phase 2: ATOMIC_CUTOVER • Test 3:…</a:t>
-            </a:r>
-            <a:endParaRPr lang="en-US" sz="820" dirty="0"/>
+              <a:t>3. Phase 2: ATOMIC_CUTOVER • Test 3: Firestore Route Flip</a:t>
+            </a:r>
+            <a:endParaRPr lang="en-US" sz="760" dirty="0"/>
           </a:p>
         </p:txBody>
       </p:sp>
@@ -37140,7 +37609,7 @@
                 <a:ea typeface="Roboto" pitchFamily="34" charset="-122"/>
                 <a:cs typeface="Roboto" pitchFamily="34" charset="-120"/>
               </a:rPr>
-              <a:t>Test 3 PASS: Sub-10ms atomic route flip with instance-scoped isolation (0 global state bleed) (Single atomic transaction in Firestor…</a:t>
+              <a:t>Test 3 PASS: Sub-10ms atomic route flip with instance-scoped isolation (0 global state bleed)</a:t>
             </a:r>
             <a:endParaRPr lang="en-US" sz="740" dirty="0"/>
           </a:p>
@@ -37211,14 +37680,16 @@
           <a:ln/>
         </p:spPr>
         <p:txBody>
-          <a:bodyPr wrap="square" rtlCol="0" anchor="ctr"/>
+          <a:bodyPr wrap="square" rtlCol="0" anchor="ctr">
+            <a:normAutofit/>
+          </a:bodyPr>
           <a:lstStyle/>
           <a:p>
             <a:pPr indent="0" marL="0">
               <a:buNone/>
             </a:pPr>
             <a:r>
-              <a:rPr lang="en-US" sz="820" b="1" dirty="0">
+              <a:rPr lang="en-US" sz="760" b="1" dirty="0">
                 <a:solidFill>
                   <a:srgbClr val="3C4043"/>
                 </a:solidFill>
@@ -37226,9 +37697,9 @@
                 <a:ea typeface="Google Sans" pitchFamily="34" charset="-122"/>
                 <a:cs typeface="Google Sans" pitchFamily="34" charset="-120"/>
               </a:rPr>
-              <a:t>4. Phase 3: DRAIN_AND_VERIFY • Test 4…</a:t>
-            </a:r>
-            <a:endParaRPr lang="en-US" sz="820" dirty="0"/>
+              <a:t>4. Phase 3: DRAIN_AND_VERIFY • Test 4: Mid-Session Continuity</a:t>
+            </a:r>
+            <a:endParaRPr lang="en-US" sz="760" dirty="0"/>
           </a:p>
         </p:txBody>
       </p:sp>
@@ -37267,7 +37738,7 @@
                 <a:ea typeface="Roboto" pitchFamily="34" charset="-122"/>
                 <a:cs typeface="Roboto" pitchFamily="34" charset="-120"/>
               </a:rPr>
-              <a:t>Test 4 PASS: dropped_sessions == 0, 8,000 thinking budget active, CMEK encryption verified (In-flight pooled turn completes graceful…</a:t>
+              <a:t>Test 4 PASS: dropped_sessions == 0, 8,000 thinking budget active, CMEK encryption verified</a:t>
             </a:r>
             <a:endParaRPr lang="en-US" sz="740" dirty="0"/>
           </a:p>

--- a/slides/ws4-pattern-c-hybrid-editable-slides.pptx
+++ b/slides/ws4-pattern-c-hybrid-editable-slides.pptx
@@ -785,7 +785,7 @@
           <a:p>
             <a:r>
               <a:rPr lang="en-US" dirty="0"/>
-              <a:t>[phased-roadmap-timeline] WS4 • Pattern C Zero-Downtime Live Tier Migration Timeline: Workstream 4 Pattern C Timeline  •  Phase 1 SHADOW_SYNC → Phase 2 ATOMIC_CUTOVER (0ms) → Phase 3 DRAIN_AND_VERIFY</a:t>
+              <a:t>[phased-roadmap-timeline] WS4 • ACT III: PATTERN C ZERO-DOWNTIME LIVE TIER MIGRATION TIMELINE: Workstream 4 Pattern C Timeline  •  Phase 1 SHADOW_SYNC → Phase 2 ATOMIC_CUTOVER (0ms) → Phase 3 DRAIN_AND_VERIFY</a:t>
             </a:r>
             <a:endParaRPr lang="en-US" dirty="0"/>
           </a:p>
@@ -873,7 +873,7 @@
           <a:p>
             <a:r>
               <a:rPr lang="en-US" dirty="0"/>
-              <a:t>[strategic-operating-model-pillars] WS4 • Pattern C Blended FinOps, Unidirectional PSC &amp; Live Mobility: Workstream 4 Pattern C Operating Model  •  74% Portfolio Savings + Unidirectional PSC + 0ms Live Tier Mobility</a:t>
+              <a:t>[strategic-operating-model-pillars] WS4 • ACT III: PATTERN C BLENDED FINOPS, PSC &amp; LIVE MOBILITY MODEL: Workstream 4 Pattern C Operating Model  •  74% Portfolio Savings + Unidirectional PSC + 0ms Live Tier Mobility</a:t>
             </a:r>
             <a:endParaRPr lang="en-US" dirty="0"/>
           </a:p>
@@ -1592,7 +1592,7 @@
           <a:p>
             <a:r>
               <a:rPr lang="en-US" dirty="0"/>
-              <a:t>[async-state-flow-pipeline] WS4 • Pattern C Unidirectional Private Service Connect &amp; Live Cutover Flow: Workstream 4 Pattern C Pipeline  •  Unidirectional /28 PSC NAT Traversal + 0ms Firestore Pointer Cutover Loop</a:t>
+              <a:t>[async-state-flow-pipeline] WS4 • ACT II: UNIDIRECTIONAL PRIVATE SERVICE CONNECT &amp; LIVE CUTOVER LOOP: Workstream 4 Pattern C Pipeline  •  Unidirectional /28 PSC NAT Traversal + 0ms Firestore Pointer Cutover Loop</a:t>
             </a:r>
             <a:endParaRPr lang="en-US" dirty="0"/>
           </a:p>
@@ -3180,7 +3180,7 @@
                 <a:ea typeface="Google Sans" pitchFamily="34" charset="-122"/>
                 <a:cs typeface="Google Sans" pitchFamily="34" charset="-120"/>
               </a:rPr>
-              <a:t>OFFICIAL 4-ZONE HUB-AND-SPOKE TOPOLOGY (#78)</a:t>
+              <a:t>3-ACT EXECUTIVE BRIEFING &amp; DELIVERABLE MAP</a:t>
             </a:r>
             <a:endParaRPr lang="en-US" sz="920" dirty="0"/>
           </a:p>
@@ -3242,7 +3242,7 @@
         <p:spPr>
           <a:xfrm>
             <a:off x="7735824" y="1005840"/>
-            <a:ext cx="1353312" cy="219456"/>
+            <a:ext cx="1481328" cy="219456"/>
           </a:xfrm>
           <a:prstGeom prst="roundRect">
             <a:avLst>
@@ -3264,7 +3264,7 @@
         <p:spPr>
           <a:xfrm>
             <a:off x="7735824" y="1005840"/>
-            <a:ext cx="1353312" cy="219456"/>
+            <a:ext cx="1481328" cy="219456"/>
           </a:xfrm>
           <a:prstGeom prst="rect">
             <a:avLst/>
@@ -3280,7 +3280,7 @@
               <a:buNone/>
             </a:pPr>
             <a:r>
-              <a:rPr lang="en-US" sz="680" b="1" dirty="0">
+              <a:rPr lang="en-US" sz="660" b="1" dirty="0">
                 <a:solidFill>
                   <a:srgbClr val="174EA6"/>
                 </a:solidFill>
@@ -3288,9 +3288,9 @@
                 <a:ea typeface="Google Sans" pitchFamily="34" charset="-122"/>
                 <a:cs typeface="Google Sans" pitchFamily="34" charset="-120"/>
               </a:rPr>
-              <a:t>01 • ROUTING HUB</a:t>
-            </a:r>
-            <a:endParaRPr lang="en-US" sz="680" dirty="0"/>
+              <a:t>ACT I • SLIDES 1–4</a:t>
+            </a:r>
+            <a:endParaRPr lang="en-US" sz="660" dirty="0"/>
           </a:p>
         </p:txBody>
       </p:sp>
@@ -3302,8 +3302,8 @@
         </p:nvSpPr>
         <p:spPr>
           <a:xfrm>
-            <a:off x="9162288" y="987552"/>
-            <a:ext cx="2340864" cy="256032"/>
+            <a:off x="9272016" y="987552"/>
+            <a:ext cx="2249424" cy="256032"/>
           </a:xfrm>
           <a:prstGeom prst="rect">
             <a:avLst/>
@@ -3319,7 +3319,7 @@
               <a:buNone/>
             </a:pPr>
             <a:r>
-              <a:rPr lang="en-US" sz="880" b="1" dirty="0">
+              <a:rPr lang="en-US" sz="850" b="1" dirty="0">
                 <a:solidFill>
                   <a:srgbClr val="3C4043"/>
                 </a:solidFill>
@@ -3327,9 +3327,9 @@
                 <a:ea typeface="Google Sans" pitchFamily="34" charset="-122"/>
                 <a:cs typeface="Google Sans" pitchFamily="34" charset="-120"/>
               </a:rPr>
-              <a:t>Edge WAF, OBO/DPoP &amp; Tier Router</a:t>
-            </a:r>
-            <a:endParaRPr lang="en-US" sz="880" dirty="0"/>
+              <a:t>Master Blueprint (#78) &amp; SLO Scorecard</a:t>
+            </a:r>
+            <a:endParaRPr lang="en-US" sz="850" dirty="0"/>
           </a:p>
         </p:txBody>
       </p:sp>
@@ -3358,7 +3358,7 @@
               <a:buNone/>
             </a:pPr>
             <a:r>
-              <a:rPr lang="en-US" sz="790" dirty="0">
+              <a:rPr lang="en-US" sz="780" dirty="0">
                 <a:solidFill>
                   <a:srgbClr val="5F6368"/>
                 </a:solidFill>
@@ -3366,9 +3366,9 @@
                 <a:ea typeface="Roboto" pitchFamily="34" charset="-122"/>
                 <a:cs typeface="Roboto" pitchFamily="34" charset="-120"/>
               </a:rPr>
-              <a:t>Google Cloud Armor, IAP, IAM STS &amp; Agent Engine Registry verify OIDC identity, strip spoofed headers &amp; filter tools.</a:t>
-            </a:r>
-            <a:endParaRPr lang="en-US" sz="790" dirty="0"/>
+              <a:t>Decomposes Figure 1 into 56 editable vector shapes + 23 connectors, quantified unit economics ($42 vs. $1,850/mo) &amp; GCP stack.</a:t>
+            </a:r>
+            <a:endParaRPr lang="en-US" sz="780" dirty="0"/>
           </a:p>
         </p:txBody>
       </p:sp>
@@ -3428,7 +3428,7 @@
         <p:spPr>
           <a:xfrm>
             <a:off x="7735824" y="2194560"/>
-            <a:ext cx="1353312" cy="219456"/>
+            <a:ext cx="1481328" cy="219456"/>
           </a:xfrm>
           <a:prstGeom prst="roundRect">
             <a:avLst>
@@ -3450,7 +3450,7 @@
         <p:spPr>
           <a:xfrm>
             <a:off x="7735824" y="2194560"/>
-            <a:ext cx="1353312" cy="219456"/>
+            <a:ext cx="1481328" cy="219456"/>
           </a:xfrm>
           <a:prstGeom prst="rect">
             <a:avLst/>
@@ -3466,7 +3466,7 @@
               <a:buNone/>
             </a:pPr>
             <a:r>
-              <a:rPr lang="en-US" sz="680" b="1" dirty="0">
+              <a:rPr lang="en-US" sz="660" b="1" dirty="0">
                 <a:solidFill>
                   <a:srgbClr val="A50E0E"/>
                 </a:solidFill>
@@ -3474,9 +3474,9 @@
                 <a:ea typeface="Google Sans" pitchFamily="34" charset="-122"/>
                 <a:cs typeface="Google Sans" pitchFamily="34" charset="-120"/>
               </a:rPr>
-              <a:t>02 • RIGHT SPOKE</a:t>
-            </a:r>
-            <a:endParaRPr lang="en-US" sz="680" dirty="0"/>
+              <a:t>ACT II • SLIDES 5–8</a:t>
+            </a:r>
+            <a:endParaRPr lang="en-US" sz="660" dirty="0"/>
           </a:p>
         </p:txBody>
       </p:sp>
@@ -3488,8 +3488,8 @@
         </p:nvSpPr>
         <p:spPr>
           <a:xfrm>
-            <a:off x="9162288" y="2176272"/>
-            <a:ext cx="2340864" cy="256032"/>
+            <a:off x="9272016" y="2176272"/>
+            <a:ext cx="2249424" cy="256032"/>
           </a:xfrm>
           <a:prstGeom prst="rect">
             <a:avLst/>
@@ -3505,7 +3505,7 @@
               <a:buNone/>
             </a:pPr>
             <a:r>
-              <a:rPr lang="en-US" sz="880" b="1" dirty="0">
+              <a:rPr lang="en-US" sz="850" b="1" dirty="0">
                 <a:solidFill>
                   <a:srgbClr val="3C4043"/>
                 </a:solidFill>
@@ -3513,9 +3513,9 @@
                 <a:ea typeface="Google Sans" pitchFamily="34" charset="-122"/>
                 <a:cs typeface="Google Sans" pitchFamily="34" charset="-120"/>
               </a:rPr>
-              <a:t>2LO/3LO MCP, AlloyDB RLS &amp; PSC Vaults</a:t>
-            </a:r>
-            <a:endParaRPr lang="en-US" sz="880" dirty="0"/>
+              <a:t>3-Zone Boundaries, UML &amp; Fail-Closed Loops</a:t>
+            </a:r>
+            <a:endParaRPr lang="en-US" sz="850" dirty="0"/>
           </a:p>
         </p:txBody>
       </p:sp>
@@ -3544,7 +3544,7 @@
               <a:buNone/>
             </a:pPr>
             <a:r>
-              <a:rPr lang="en-US" sz="790" dirty="0">
+              <a:rPr lang="en-US" sz="780" dirty="0">
                 <a:solidFill>
                   <a:srgbClr val="5F6368"/>
                 </a:solidFill>
@@ -3552,9 +3552,9 @@
                 <a:ea typeface="Roboto" pitchFamily="34" charset="-122"/>
                 <a:cs typeface="Roboto" pitchFamily="34" charset="-120"/>
               </a:rPr>
-              <a:t>Enforces PostgreSQL Row-Level Security, 3LO step-up consent, VPC-SC perimeters &amp; &lt;60s CMEK kill-switches.</a:t>
-            </a:r>
-            <a:endParaRPr lang="en-US" sz="790" dirty="0"/>
+              <a:t>Walks through 3-zone physical/logical boundaries, Hop 1 OBO+DPoP wire transformation, 5-Actor UML sequence &amp; HTTP 401–429 circuit breakers.</a:t>
+            </a:r>
+            <a:endParaRPr lang="en-US" sz="780" dirty="0"/>
           </a:p>
         </p:txBody>
       </p:sp>
@@ -3614,7 +3614,7 @@
         <p:spPr>
           <a:xfrm>
             <a:off x="7735824" y="3383280"/>
-            <a:ext cx="1353312" cy="219456"/>
+            <a:ext cx="1481328" cy="219456"/>
           </a:xfrm>
           <a:prstGeom prst="roundRect">
             <a:avLst>
@@ -3636,7 +3636,7 @@
         <p:spPr>
           <a:xfrm>
             <a:off x="7735824" y="3383280"/>
-            <a:ext cx="1353312" cy="219456"/>
+            <a:ext cx="1481328" cy="219456"/>
           </a:xfrm>
           <a:prstGeom prst="rect">
             <a:avLst/>
@@ -3652,7 +3652,7 @@
               <a:buNone/>
             </a:pPr>
             <a:r>
-              <a:rPr lang="en-US" sz="680" b="1" dirty="0">
+              <a:rPr lang="en-US" sz="660" b="1" dirty="0">
                 <a:solidFill>
                   <a:srgbClr val="B06000"/>
                 </a:solidFill>
@@ -3660,9 +3660,9 @@
                 <a:ea typeface="Google Sans" pitchFamily="34" charset="-122"/>
                 <a:cs typeface="Google Sans" pitchFamily="34" charset="-120"/>
               </a:rPr>
-              <a:t>03 • LEFT SPOKE</a:t>
-            </a:r>
-            <a:endParaRPr lang="en-US" sz="680" dirty="0"/>
+              <a:t>ACT III • SLIDES 9–12</a:t>
+            </a:r>
+            <a:endParaRPr lang="en-US" sz="660" dirty="0"/>
           </a:p>
         </p:txBody>
       </p:sp>
@@ -3674,8 +3674,8 @@
         </p:nvSpPr>
         <p:spPr>
           <a:xfrm>
-            <a:off x="9162288" y="3364992"/>
-            <a:ext cx="2340864" cy="256032"/>
+            <a:off x="9272016" y="3364992"/>
+            <a:ext cx="2249424" cy="256032"/>
           </a:xfrm>
           <a:prstGeom prst="rect">
             <a:avLst/>
@@ -3691,7 +3691,7 @@
               <a:buNone/>
             </a:pPr>
             <a:r>
-              <a:rPr lang="en-US" sz="880" b="1" dirty="0">
+              <a:rPr lang="en-US" sz="850" b="1" dirty="0">
                 <a:solidFill>
                   <a:srgbClr val="3C4043"/>
                 </a:solidFill>
@@ -3699,9 +3699,9 @@
                 <a:ea typeface="Google Sans" pitchFamily="34" charset="-122"/>
                 <a:cs typeface="Google Sans" pitchFamily="34" charset="-120"/>
               </a:rPr>
-              <a:t>Model Armor, ADK &amp; 90% Prefix Cache</a:t>
-            </a:r>
-            <a:endParaRPr lang="en-US" sz="880" dirty="0"/>
+              <a:t>Pattern A/B/C Matrix, GAP-01..05 &amp; Live Proof</a:t>
+            </a:r>
+            <a:endParaRPr lang="en-US" sz="850" dirty="0"/>
           </a:p>
         </p:txBody>
       </p:sp>
@@ -3730,7 +3730,7 @@
               <a:buNone/>
             </a:pPr>
             <a:r>
-              <a:rPr lang="en-US" sz="790" dirty="0">
+              <a:rPr lang="en-US" sz="780" dirty="0">
                 <a:solidFill>
                   <a:srgbClr val="5F6368"/>
                 </a:solidFill>
@@ -3738,9 +3738,9 @@
                 <a:ea typeface="Roboto" pitchFamily="34" charset="-122"/>
                 <a:cs typeface="Roboto" pitchFamily="34" charset="-120"/>
               </a:rPr>
-              <a:t>Screens prompts (4/6), executes Gemini 2.5 Pro with 90% cache (5), clamps RPM in Valkey &amp; isolates L1–L5 memory.</a:t>
-            </a:r>
-            <a:endParaRPr lang="en-US" sz="790" dirty="0"/>
+              <a:t>Compares Pooled, Siloed &amp; Hybrid PSC trade-offs, closes 5 EAP product gaps, embeds 16:9 Cloud Console captures &amp; 6-week rollout.</a:t>
+            </a:r>
+            <a:endParaRPr lang="en-US" sz="780" dirty="0"/>
           </a:p>
         </p:txBody>
       </p:sp>
@@ -3800,7 +3800,7 @@
         <p:spPr>
           <a:xfrm>
             <a:off x="7735824" y="4572000"/>
-            <a:ext cx="1353312" cy="219456"/>
+            <a:ext cx="1481328" cy="219456"/>
           </a:xfrm>
           <a:prstGeom prst="roundRect">
             <a:avLst>
@@ -3822,7 +3822,7 @@
         <p:spPr>
           <a:xfrm>
             <a:off x="7735824" y="4572000"/>
-            <a:ext cx="1353312" cy="219456"/>
+            <a:ext cx="1481328" cy="219456"/>
           </a:xfrm>
           <a:prstGeom prst="rect">
             <a:avLst/>
@@ -3838,7 +3838,7 @@
               <a:buNone/>
             </a:pPr>
             <a:r>
-              <a:rPr lang="en-US" sz="680" b="1" dirty="0">
+              <a:rPr lang="en-US" sz="660" b="1" dirty="0">
                 <a:solidFill>
                   <a:srgbClr val="0D652D"/>
                 </a:solidFill>
@@ -3846,9 +3846,9 @@
                 <a:ea typeface="Google Sans" pitchFamily="34" charset="-122"/>
                 <a:cs typeface="Google Sans" pitchFamily="34" charset="-120"/>
               </a:rPr>
-              <a:t>04 • GOVERNANCE HUB</a:t>
-            </a:r>
-            <a:endParaRPr lang="en-US" sz="680" dirty="0"/>
+              <a:t>GOVERNANCE • SLIDES 13–14</a:t>
+            </a:r>
+            <a:endParaRPr lang="en-US" sz="660" dirty="0"/>
           </a:p>
         </p:txBody>
       </p:sp>
@@ -3860,8 +3860,8 @@
         </p:nvSpPr>
         <p:spPr>
           <a:xfrm>
-            <a:off x="9162288" y="4553712"/>
-            <a:ext cx="2340864" cy="256032"/>
+            <a:off x="9272016" y="4553712"/>
+            <a:ext cx="2249424" cy="256032"/>
           </a:xfrm>
           <a:prstGeom prst="rect">
             <a:avLst/>
@@ -3877,7 +3877,7 @@
               <a:buNone/>
             </a:pPr>
             <a:r>
-              <a:rPr lang="en-US" sz="880" b="1" dirty="0">
+              <a:rPr lang="en-US" sz="850" b="1" dirty="0">
                 <a:solidFill>
                   <a:srgbClr val="3C4043"/>
                 </a:solidFill>
@@ -3885,9 +3885,9 @@
                 <a:ea typeface="Google Sans" pitchFamily="34" charset="-122"/>
                 <a:cs typeface="Google Sans" pitchFamily="34" charset="-120"/>
               </a:rPr>
-              <a:t>Security, CMEK &amp; FinOps Telemetry</a:t>
-            </a:r>
-            <a:endParaRPr lang="en-US" sz="880" dirty="0"/>
+              <a:t>Day-2 RACI Operating Model &amp; Series Map</a:t>
+            </a:r>
+            <a:endParaRPr lang="en-US" sz="850" dirty="0"/>
           </a:p>
         </p:txBody>
       </p:sp>
@@ -3916,7 +3916,7 @@
               <a:buNone/>
             </a:pPr>
             <a:r>
-              <a:rPr lang="en-US" sz="790" dirty="0">
+              <a:rPr lang="en-US" sz="780" dirty="0">
                 <a:solidFill>
                   <a:srgbClr val="5F6368"/>
                 </a:solidFill>
@@ -3924,9 +3924,9 @@
                 <a:ea typeface="Roboto" pitchFamily="34" charset="-122"/>
                 <a:cs typeface="Roboto" pitchFamily="34" charset="-120"/>
               </a:rPr>
-              <a:t>Security Command Center, Cloud KMS CMEK &amp; BigQuery OTel govern encryption liveness and zero-PII chargeback.</a:t>
-            </a:r>
-            <a:endParaRPr lang="en-US" sz="790" dirty="0"/>
+              <a:t>Assigns Security, SRE &amp; FinOps ownership SLAs and maps runnable deliverables across Workstreams 1–5 (24 files + 20/20 gates).</a:t>
+            </a:r>
+            <a:endParaRPr lang="en-US" sz="780" dirty="0"/>
           </a:p>
         </p:txBody>
       </p:sp>
@@ -3982,7 +3982,7 @@
               <a:buNone/>
             </a:pPr>
             <a:r>
-              <a:rPr lang="en-US" sz="740" b="1" dirty="0">
+              <a:rPr lang="en-US" sz="720" b="1" dirty="0">
                 <a:solidFill>
                   <a:srgbClr val="3C4043"/>
                 </a:solidFill>
@@ -3990,9 +3990,9 @@
                 <a:ea typeface="Google Sans" pitchFamily="34" charset="-122"/>
                 <a:cs typeface="Google Sans" pitchFamily="34" charset="-120"/>
               </a:rPr>
-              <a:t>3-Act Executive Arc (14 Slides): Act I Architecture → Act II Runtime → Act III Proof &amp; Rollout</a:t>
-            </a:r>
-            <a:endParaRPr lang="en-US" sz="740" dirty="0"/>
+              <a:t>Verified Across 3 GCP Projects (#248990048888 • #638420508320 • #887605034827) • 12/12 Forensic PASS</a:t>
+            </a:r>
+            <a:endParaRPr lang="en-US" sz="720" dirty="0"/>
           </a:p>
         </p:txBody>
       </p:sp>
@@ -4432,7 +4432,7 @@
                 <a:ea typeface="Google Sans" pitchFamily="34" charset="-122"/>
                 <a:cs typeface="Google Sans" pitchFamily="34" charset="-120"/>
               </a:rPr>
-              <a:t>Design alternatives — Terraform Hybrid PSC Blueprint &amp; Portfolio FinOps</a:t>
+              <a:t>ACT I • GOOGLE CLOUD REFERENCE PRODUCT STACK &amp; BILL OF MATERIALS</a:t>
             </a:r>
             <a:endParaRPr lang="en-US" sz="1020" dirty="0"/>
           </a:p>
@@ -4537,7 +4537,7 @@
                 <a:ea typeface="Google Sans" pitchFamily="34" charset="-122"/>
                 <a:cs typeface="Google Sans" pitchFamily="34" charset="-120"/>
               </a:rPr>
-              <a:t>Design alternatives — Terraform Hybrid PSC Blueprint &amp; Portfolio FinOps</a:t>
+              <a:t>Terraform Hybrid PSC Blueprint &amp; Portfolio FinOps</a:t>
             </a:r>
             <a:endParaRPr lang="en-US" sz="1900" dirty="0"/>
           </a:p>
@@ -4576,7 +4576,7 @@
                 <a:ea typeface="Roboto" pitchFamily="34" charset="-122"/>
                 <a:cs typeface="Roboto" pitchFamily="34" charset="-120"/>
               </a:rPr>
-              <a:t>Structured Google Cloud reference components, runtime isolation boundaries, and target SLAs.</a:t>
+              <a:t>Structured Google Cloud reference SKUs, runtime isolation boundaries, and production SLAs.</a:t>
             </a:r>
             <a:endParaRPr lang="en-US" sz="1000" dirty="0"/>
           </a:p>
@@ -4723,7 +4723,7 @@
                 <a:ea typeface="Google Sans" pitchFamily="34" charset="-122"/>
                 <a:cs typeface="Google Sans" pitchFamily="34" charset="-120"/>
               </a:rPr>
-              <a:t>Dual-Provider Terraform Blueprint (4.6-terraform-hybrid-psc-blueprint): Uses google.hub</a:t>
+              <a:t>Dual-Provider Terraform Blueprint (4.6-terraform-hybrid-psc-blueprint)</a:t>
             </a:r>
             <a:endParaRPr lang="en-US" sz="1140" dirty="0"/>
           </a:p>
@@ -4782,7 +4782,7 @@
                 <a:ea typeface="Roboto" pitchFamily="34" charset="-122"/>
                 <a:cs typeface="Roboto" pitchFamily="34" charset="-120"/>
               </a:rPr>
-              <a:t>Dual-Provider Terraform Blueprint (4.6-terraform-hybrid-psc-blueprint): Uses google.hub and google.spoke provider aliases to wire the Hub VPC, Spoke /24 PSC NAT subnet, Producer ServiceAttachment, and Consumer Endpoint.</a:t>
+              <a:t>Uses google.hub and google.spoke provider aliases to wire the Hub VPC, Spoke /24 PSC NAT subnet, Producer ServiceAttachment, and Consumer Endpoint.</a:t>
             </a:r>
             <a:endParaRPr lang="en-US" sz="980" dirty="0"/>
           </a:p>
@@ -6898,7 +6898,7 @@
                 <a:ea typeface="Roboto" pitchFamily="34" charset="-122"/>
                 <a:cs typeface="Roboto" pitchFamily="34" charset="-120"/>
               </a:rPr>
-              <a:t>• Project: nitinagga-ge-2 (#638420508320)</a:t>
+              <a:t>• Project: cymbal-pooled-prod (#638420508320)</a:t>
             </a:r>
             <a:endParaRPr lang="en-US" sz="780" dirty="0"/>
           </a:p>
@@ -6915,7 +6915,7 @@
                 <a:ea typeface="Roboto" pitchFamily="34" charset="-122"/>
                 <a:cs typeface="Roboto" pitchFamily="34" charset="-120"/>
               </a:rPr>
-              <a:t>• Sandbox: nitina-ggarwal-sandbox-647724</a:t>
+              <a:t>• Sandbox: cymbal-build-sandbox (#887605034827)</a:t>
             </a:r>
             <a:endParaRPr lang="en-US" sz="780" dirty="0"/>
           </a:p>
@@ -8479,7 +8479,7 @@
                 <a:ea typeface="Google Sans" pitchFamily="34" charset="-122"/>
                 <a:cs typeface="Google Sans" pitchFamily="34" charset="-120"/>
               </a:rPr>
-              <a:t>WS4 • Pattern C Zero-Downtime Live Tier Migration Timeline</a:t>
+              <a:t>WS4 • ACT III: PATTERN C ZERO-DOWNTIME LIVE TIER MIGRATION TIMELINE</a:t>
             </a:r>
             <a:endParaRPr lang="en-US" sz="1020" dirty="0"/>
           </a:p>
@@ -8576,7 +8576,7 @@
               <a:buNone/>
             </a:pPr>
             <a:r>
-              <a:rPr lang="en-US" sz="2400" b="1" dirty="0">
+              <a:rPr lang="en-US" sz="2250" b="1" dirty="0">
                 <a:solidFill>
                   <a:srgbClr val="0F2942"/>
                 </a:solidFill>
@@ -8584,9 +8584,9 @@
                 <a:ea typeface="Google Sans Display" pitchFamily="34" charset="-122"/>
                 <a:cs typeface="Google Sans Display" pitchFamily="34" charset="-120"/>
               </a:rPr>
-              <a:t>Pattern C Live Tenant Promotion Phases (Standard → Enterprise)</a:t>
-            </a:r>
-            <a:endParaRPr lang="en-US" sz="2400" dirty="0"/>
+              <a:t>3-Phase Live Tenant Promotion Cutover Window (Standard → Enterprise Spoke)</a:t>
+            </a:r>
+            <a:endParaRPr lang="en-US" sz="2250" dirty="0"/>
           </a:p>
         </p:txBody>
       </p:sp>
@@ -8880,66 +8880,6 @@
         </p:nvSpPr>
         <p:spPr>
           <a:xfrm>
-            <a:off x="411480" y="3694176"/>
-            <a:ext cx="237744" cy="237744"/>
-          </a:xfrm>
-          <a:prstGeom prst="ellipse">
-            <a:avLst/>
-          </a:prstGeom>
-          <a:solidFill>
-            <a:srgbClr val="0F2942"/>
-          </a:solidFill>
-          <a:ln/>
-        </p:spPr>
-      </p:sp>
-      <p:sp>
-        <p:nvSpPr>
-          <p:cNvPr id="27" name="Shape 25"/>
-          <p:cNvSpPr/>
-          <p:nvPr/>
-        </p:nvSpPr>
-        <p:spPr>
-          <a:xfrm>
-            <a:off x="3849624" y="3694176"/>
-            <a:ext cx="237744" cy="237744"/>
-          </a:xfrm>
-          <a:prstGeom prst="ellipse">
-            <a:avLst/>
-          </a:prstGeom>
-          <a:solidFill>
-            <a:srgbClr val="0F2942"/>
-          </a:solidFill>
-          <a:ln/>
-        </p:spPr>
-      </p:sp>
-      <p:sp>
-        <p:nvSpPr>
-          <p:cNvPr id="28" name="Shape 26"/>
-          <p:cNvSpPr/>
-          <p:nvPr/>
-        </p:nvSpPr>
-        <p:spPr>
-          <a:xfrm>
-            <a:off x="4251960" y="3694176"/>
-            <a:ext cx="237744" cy="237744"/>
-          </a:xfrm>
-          <a:prstGeom prst="ellipse">
-            <a:avLst/>
-          </a:prstGeom>
-          <a:solidFill>
-            <a:srgbClr val="0D7A75"/>
-          </a:solidFill>
-          <a:ln/>
-        </p:spPr>
-      </p:sp>
-      <p:sp>
-        <p:nvSpPr>
-          <p:cNvPr id="29" name="Shape 27"/>
-          <p:cNvSpPr/>
-          <p:nvPr/>
-        </p:nvSpPr>
-        <p:spPr>
-          <a:xfrm>
             <a:off x="4370832" y="1536192"/>
             <a:ext cx="3438144" cy="4443984"/>
           </a:xfrm>
@@ -8961,7 +8901,7 @@
       </p:sp>
       <p:sp>
         <p:nvSpPr>
-          <p:cNvPr id="30" name="Shape 28"/>
+          <p:cNvPr id="27" name="Shape 25"/>
           <p:cNvSpPr/>
           <p:nvPr/>
         </p:nvSpPr>
@@ -8983,7 +8923,7 @@
       </p:sp>
       <p:sp>
         <p:nvSpPr>
-          <p:cNvPr id="31" name="Text 29"/>
+          <p:cNvPr id="28" name="Text 26"/>
           <p:cNvSpPr/>
           <p:nvPr/>
         </p:nvSpPr>
@@ -9022,7 +8962,7 @@
       </p:sp>
       <p:sp>
         <p:nvSpPr>
-          <p:cNvPr id="32" name="Shape 30"/>
+          <p:cNvPr id="29" name="Shape 27"/>
           <p:cNvSpPr/>
           <p:nvPr/>
         </p:nvSpPr>
@@ -9042,7 +8982,7 @@
       </p:sp>
       <p:sp>
         <p:nvSpPr>
-          <p:cNvPr id="33" name="Text 31"/>
+          <p:cNvPr id="30" name="Text 28"/>
           <p:cNvSpPr/>
           <p:nvPr/>
         </p:nvSpPr>
@@ -9098,7 +9038,7 @@
       </p:sp>
       <p:sp>
         <p:nvSpPr>
-          <p:cNvPr id="34" name="Text 32"/>
+          <p:cNvPr id="31" name="Text 29"/>
           <p:cNvSpPr/>
           <p:nvPr/>
         </p:nvSpPr>
@@ -9137,7 +9077,7 @@
       </p:sp>
       <p:sp>
         <p:nvSpPr>
-          <p:cNvPr id="35" name="Shape 33"/>
+          <p:cNvPr id="32" name="Shape 30"/>
           <p:cNvSpPr/>
           <p:nvPr/>
         </p:nvSpPr>
@@ -9160,7 +9100,7 @@
       </p:sp>
       <p:sp>
         <p:nvSpPr>
-          <p:cNvPr id="36" name="Text 34"/>
+          <p:cNvPr id="33" name="Text 31"/>
           <p:cNvSpPr/>
           <p:nvPr/>
         </p:nvSpPr>
@@ -9216,47 +9156,7 @@
       </p:sp>
       <p:sp>
         <p:nvSpPr>
-          <p:cNvPr id="37" name="Shape 35"/>
-          <p:cNvSpPr/>
-          <p:nvPr/>
-        </p:nvSpPr>
-        <p:spPr>
-          <a:xfrm>
-            <a:off x="7690104" y="3694176"/>
-            <a:ext cx="237744" cy="237744"/>
-          </a:xfrm>
-          <a:prstGeom prst="ellipse">
-            <a:avLst/>
-          </a:prstGeom>
-          <a:solidFill>
-            <a:srgbClr val="0D7A75"/>
-          </a:solidFill>
-          <a:ln/>
-        </p:spPr>
-      </p:sp>
-      <p:sp>
-        <p:nvSpPr>
-          <p:cNvPr id="38" name="Shape 36"/>
-          <p:cNvSpPr/>
-          <p:nvPr/>
-        </p:nvSpPr>
-        <p:spPr>
-          <a:xfrm>
-            <a:off x="8092440" y="3694176"/>
-            <a:ext cx="237744" cy="237744"/>
-          </a:xfrm>
-          <a:prstGeom prst="ellipse">
-            <a:avLst/>
-          </a:prstGeom>
-          <a:solidFill>
-            <a:srgbClr val="54728C"/>
-          </a:solidFill>
-          <a:ln/>
-        </p:spPr>
-      </p:sp>
-      <p:sp>
-        <p:nvSpPr>
-          <p:cNvPr id="39" name="Shape 37"/>
+          <p:cNvPr id="34" name="Shape 32"/>
           <p:cNvSpPr/>
           <p:nvPr/>
         </p:nvSpPr>
@@ -9283,7 +9183,7 @@
       </p:sp>
       <p:sp>
         <p:nvSpPr>
-          <p:cNvPr id="40" name="Shape 38"/>
+          <p:cNvPr id="35" name="Shape 33"/>
           <p:cNvSpPr/>
           <p:nvPr/>
         </p:nvSpPr>
@@ -9305,7 +9205,7 @@
       </p:sp>
       <p:sp>
         <p:nvSpPr>
-          <p:cNvPr id="41" name="Text 39"/>
+          <p:cNvPr id="36" name="Text 34"/>
           <p:cNvSpPr/>
           <p:nvPr/>
         </p:nvSpPr>
@@ -9344,7 +9244,7 @@
       </p:sp>
       <p:sp>
         <p:nvSpPr>
-          <p:cNvPr id="42" name="Shape 40"/>
+          <p:cNvPr id="37" name="Shape 35"/>
           <p:cNvSpPr/>
           <p:nvPr/>
         </p:nvSpPr>
@@ -9364,7 +9264,7 @@
       </p:sp>
       <p:sp>
         <p:nvSpPr>
-          <p:cNvPr id="43" name="Text 41"/>
+          <p:cNvPr id="38" name="Text 36"/>
           <p:cNvSpPr/>
           <p:nvPr/>
         </p:nvSpPr>
@@ -9420,7 +9320,7 @@
       </p:sp>
       <p:sp>
         <p:nvSpPr>
-          <p:cNvPr id="44" name="Text 42"/>
+          <p:cNvPr id="39" name="Text 37"/>
           <p:cNvSpPr/>
           <p:nvPr/>
         </p:nvSpPr>
@@ -9459,7 +9359,7 @@
       </p:sp>
       <p:sp>
         <p:nvSpPr>
-          <p:cNvPr id="45" name="Shape 43"/>
+          <p:cNvPr id="40" name="Shape 38"/>
           <p:cNvSpPr/>
           <p:nvPr/>
         </p:nvSpPr>
@@ -9482,7 +9382,7 @@
       </p:sp>
       <p:sp>
         <p:nvSpPr>
-          <p:cNvPr id="46" name="Text 44"/>
+          <p:cNvPr id="41" name="Text 39"/>
           <p:cNvSpPr/>
           <p:nvPr/>
         </p:nvSpPr>
@@ -9538,7 +9438,173 @@
       </p:sp>
       <p:sp>
         <p:nvSpPr>
+          <p:cNvPr id="42" name="Shape 40"/>
+          <p:cNvSpPr/>
+          <p:nvPr/>
+        </p:nvSpPr>
+        <p:spPr>
+          <a:xfrm>
+            <a:off x="3968496" y="3813048"/>
+            <a:ext cx="402336" cy="0"/>
+          </a:xfrm>
+          <a:prstGeom prst="line">
+            <a:avLst/>
+          </a:prstGeom>
+          <a:noFill/>
+          <a:ln w="28575">
+            <a:solidFill>
+              <a:srgbClr val="0F2942"/>
+            </a:solidFill>
+            <a:prstDash val="solid"/>
+            <a:tailEnd type="triangle" w="sm" len="sm"/>
+          </a:ln>
+        </p:spPr>
+      </p:sp>
+      <p:sp>
+        <p:nvSpPr>
+          <p:cNvPr id="43" name="Shape 41"/>
+          <p:cNvSpPr/>
+          <p:nvPr/>
+        </p:nvSpPr>
+        <p:spPr>
+          <a:xfrm>
+            <a:off x="4059936" y="3401568"/>
+            <a:ext cx="219456" cy="219456"/>
+          </a:xfrm>
+          <a:prstGeom prst="ellipse">
+            <a:avLst/>
+          </a:prstGeom>
+          <a:solidFill>
+            <a:srgbClr val="0F2942"/>
+          </a:solidFill>
+          <a:ln/>
+        </p:spPr>
+      </p:sp>
+      <p:sp>
+        <p:nvSpPr>
+          <p:cNvPr id="44" name="Text 42"/>
+          <p:cNvSpPr/>
+          <p:nvPr/>
+        </p:nvSpPr>
+        <p:spPr>
+          <a:xfrm>
+            <a:off x="4059936" y="3401568"/>
+            <a:ext cx="219456" cy="219456"/>
+          </a:xfrm>
+          <a:prstGeom prst="rect">
+            <a:avLst/>
+          </a:prstGeom>
+          <a:noFill/>
+          <a:ln/>
+        </p:spPr>
+        <p:txBody>
+          <a:bodyPr wrap="square" rtlCol="0" anchor="ctr"/>
+          <a:lstStyle/>
+          <a:p>
+            <a:pPr algn="ctr" indent="0" marL="0">
+              <a:buNone/>
+            </a:pPr>
+            <a:r>
+              <a:rPr lang="en-US" sz="850" b="1" dirty="0">
+                <a:solidFill>
+                  <a:srgbClr val="FFFFFF"/>
+                </a:solidFill>
+                <a:latin typeface="Google Sans" pitchFamily="34" charset="0"/>
+                <a:ea typeface="Google Sans" pitchFamily="34" charset="-122"/>
+                <a:cs typeface="Google Sans" pitchFamily="34" charset="-120"/>
+              </a:rPr>
+              <a:t>1</a:t>
+            </a:r>
+            <a:endParaRPr lang="en-US" sz="850" dirty="0"/>
+          </a:p>
+        </p:txBody>
+      </p:sp>
+      <p:sp>
+        <p:nvSpPr>
+          <p:cNvPr id="45" name="Shape 43"/>
+          <p:cNvSpPr/>
+          <p:nvPr/>
+        </p:nvSpPr>
+        <p:spPr>
+          <a:xfrm>
+            <a:off x="7808976" y="3813048"/>
+            <a:ext cx="402336" cy="0"/>
+          </a:xfrm>
+          <a:prstGeom prst="line">
+            <a:avLst/>
+          </a:prstGeom>
+          <a:noFill/>
+          <a:ln w="28575">
+            <a:solidFill>
+              <a:srgbClr val="0D7A75"/>
+            </a:solidFill>
+            <a:prstDash val="solid"/>
+            <a:tailEnd type="triangle" w="sm" len="sm"/>
+          </a:ln>
+        </p:spPr>
+      </p:sp>
+      <p:sp>
+        <p:nvSpPr>
+          <p:cNvPr id="46" name="Shape 44"/>
+          <p:cNvSpPr/>
+          <p:nvPr/>
+        </p:nvSpPr>
+        <p:spPr>
+          <a:xfrm>
+            <a:off x="7900416" y="3401568"/>
+            <a:ext cx="219456" cy="219456"/>
+          </a:xfrm>
+          <a:prstGeom prst="ellipse">
+            <a:avLst/>
+          </a:prstGeom>
+          <a:solidFill>
+            <a:srgbClr val="0D7A75"/>
+          </a:solidFill>
+          <a:ln/>
+        </p:spPr>
+      </p:sp>
+      <p:sp>
+        <p:nvSpPr>
           <p:cNvPr id="47" name="Text 45"/>
+          <p:cNvSpPr/>
+          <p:nvPr/>
+        </p:nvSpPr>
+        <p:spPr>
+          <a:xfrm>
+            <a:off x="7900416" y="3401568"/>
+            <a:ext cx="219456" cy="219456"/>
+          </a:xfrm>
+          <a:prstGeom prst="rect">
+            <a:avLst/>
+          </a:prstGeom>
+          <a:noFill/>
+          <a:ln/>
+        </p:spPr>
+        <p:txBody>
+          <a:bodyPr wrap="square" rtlCol="0" anchor="ctr"/>
+          <a:lstStyle/>
+          <a:p>
+            <a:pPr algn="ctr" indent="0" marL="0">
+              <a:buNone/>
+            </a:pPr>
+            <a:r>
+              <a:rPr lang="en-US" sz="850" b="1" dirty="0">
+                <a:solidFill>
+                  <a:srgbClr val="FFFFFF"/>
+                </a:solidFill>
+                <a:latin typeface="Google Sans" pitchFamily="34" charset="0"/>
+                <a:ea typeface="Google Sans" pitchFamily="34" charset="-122"/>
+                <a:cs typeface="Google Sans" pitchFamily="34" charset="-120"/>
+              </a:rPr>
+              <a:t>2</a:t>
+            </a:r>
+            <a:endParaRPr lang="en-US" sz="850" dirty="0"/>
+          </a:p>
+        </p:txBody>
+      </p:sp>
+      <p:sp>
+        <p:nvSpPr>
+          <p:cNvPr id="48" name="Text 46"/>
           <p:cNvSpPr/>
           <p:nvPr/>
         </p:nvSpPr>
@@ -9972,7 +10038,7 @@
                 <a:ea typeface="Google Sans" pitchFamily="34" charset="-122"/>
                 <a:cs typeface="Google Sans" pitchFamily="34" charset="-120"/>
               </a:rPr>
-              <a:t>WS4 • Pattern C Blended FinOps, Unidirectional PSC &amp; Live Mobility</a:t>
+              <a:t>WS4 • ACT III: PATTERN C BLENDED FINOPS, PSC &amp; LIVE MOBILITY MODEL</a:t>
             </a:r>
             <a:endParaRPr lang="en-US" sz="1020" dirty="0"/>
           </a:p>
@@ -10077,7 +10143,7 @@
                 <a:ea typeface="Google Sans Display" pitchFamily="34" charset="-122"/>
                 <a:cs typeface="Google Sans Display" pitchFamily="34" charset="-120"/>
               </a:rPr>
-              <a:t>Pattern C Dynamic Hybrid Hub-and-Spoke Operating Model</a:t>
+              <a:t>Pattern C Dynamic Hybrid Hub-and-Spoke Day-2 Operating Model &amp; SLAs</a:t>
             </a:r>
             <a:endParaRPr lang="en-US" sz="2250" dirty="0"/>
           </a:p>
@@ -11617,7 +11683,7 @@
                 <a:ea typeface="Google Sans" pitchFamily="34" charset="-122"/>
                 <a:cs typeface="Google Sans" pitchFamily="34" charset="-120"/>
               </a:rPr>
-              <a:t>What's next — Series Navigation &amp; Engineering Deliverables</a:t>
+              <a:t>ACT III • 5-WORKSTREAM SERIES CONTINUITY &amp; ENGINEERING DELIVERABLES</a:t>
             </a:r>
             <a:endParaRPr lang="en-US" sz="1020" dirty="0"/>
           </a:p>
@@ -11722,7 +11788,7 @@
                 <a:ea typeface="Google Sans" pitchFamily="34" charset="-122"/>
                 <a:cs typeface="Google Sans" pitchFamily="34" charset="-120"/>
               </a:rPr>
-              <a:t>What's next — Series Navigation &amp; Engineering Deliverables</a:t>
+              <a:t>Series Navigation &amp; Engineering Deliverables</a:t>
             </a:r>
             <a:endParaRPr lang="en-US" sz="1900" dirty="0"/>
           </a:p>
@@ -11761,7 +11827,7 @@
                 <a:ea typeface="Roboto" pitchFamily="34" charset="-122"/>
                 <a:cs typeface="Roboto" pitchFamily="34" charset="-120"/>
               </a:rPr>
-              <a:t>Sequenced engineering action items, assigned platform owners, and production verification gates.</a:t>
+              <a:t>Sequenced engineering action items, runnable codebase file paths, assigned platform owners, and CI/CD release gates.</a:t>
             </a:r>
             <a:endParaRPr lang="en-US" sz="1000" dirty="0"/>
           </a:p>
@@ -14688,7 +14754,7 @@
             <a:avLst/>
           </a:prstGeom>
           <a:solidFill>
-            <a:srgbClr val="EA4335"/>
+            <a:srgbClr val="34A853"/>
           </a:solidFill>
           <a:ln/>
         </p:spPr>
@@ -14710,7 +14776,7 @@
             </a:avLst>
           </a:prstGeom>
           <a:solidFill>
-            <a:srgbClr val="FCE8E6"/>
+            <a:srgbClr val="E6F4EA"/>
           </a:solidFill>
           <a:ln/>
         </p:spPr>
@@ -14742,7 +14808,7 @@
             <a:r>
               <a:rPr lang="en-US" sz="600" b="1" dirty="0">
                 <a:solidFill>
-                  <a:srgbClr val="A50E0E"/>
+                  <a:srgbClr val="0D652D"/>
                 </a:solidFill>
                 <a:latin typeface="Google Sans" pitchFamily="34" charset="0"/>
                 <a:ea typeface="Google Sans" pitchFamily="34" charset="-122"/>
@@ -15060,7 +15126,7 @@
             <a:avLst/>
           </a:prstGeom>
           <a:solidFill>
-            <a:srgbClr val="34A853"/>
+            <a:srgbClr val="EA4335"/>
           </a:solidFill>
           <a:ln/>
         </p:spPr>
@@ -15082,7 +15148,7 @@
             </a:avLst>
           </a:prstGeom>
           <a:solidFill>
-            <a:srgbClr val="E6F4EA"/>
+            <a:srgbClr val="FCE8E6"/>
           </a:solidFill>
           <a:ln/>
         </p:spPr>
@@ -15114,7 +15180,7 @@
             <a:r>
               <a:rPr lang="en-US" sz="600" b="1" dirty="0">
                 <a:solidFill>
-                  <a:srgbClr val="0D652D"/>
+                  <a:srgbClr val="A50E0E"/>
                 </a:solidFill>
                 <a:latin typeface="Google Sans" pitchFamily="34" charset="0"/>
                 <a:ea typeface="Google Sans" pitchFamily="34" charset="-122"/>
@@ -15803,7 +15869,7 @@
               <a:buNone/>
             </a:pPr>
             <a:r>
-              <a:rPr lang="en-US" sz="710" b="1" dirty="0">
+              <a:rPr lang="en-US" sz="700" b="1" dirty="0">
                 <a:solidFill>
                   <a:srgbClr val="0D652D"/>
                 </a:solidFill>
@@ -15811,9 +15877,9 @@
                 <a:ea typeface="Google Sans" pitchFamily="34" charset="-122"/>
                 <a:cs typeface="Google Sans" pitchFamily="34" charset="-120"/>
               </a:rPr>
-              <a:t>✅ 56 Editable Shapes • 23 Connectors • GCP: nitina-ggarwal-sandbox-647724</a:t>
-            </a:r>
-            <a:endParaRPr lang="en-US" sz="710" dirty="0"/>
+              <a:t>VERIFIED • 56 Editable Shapes • 23 Connectors • GCP: cymbal-build-sandbox (#887605034827)</a:t>
+            </a:r>
+            <a:endParaRPr lang="en-US" sz="700" dirty="0"/>
           </a:p>
         </p:txBody>
       </p:sp>
@@ -20286,12 +20352,12 @@
         </p:nvSpPr>
         <p:spPr>
           <a:xfrm>
-            <a:off x="5339182" y="3353105"/>
-            <a:ext cx="760781" cy="217627"/>
+            <a:off x="5346497" y="3365906"/>
+            <a:ext cx="747065" cy="192024"/>
           </a:xfrm>
           <a:prstGeom prst="roundRect">
             <a:avLst>
-              <a:gd name="adj" fmla="val 21008"/>
+              <a:gd name="adj" fmla="val 23810"/>
             </a:avLst>
           </a:prstGeom>
           <a:solidFill>
@@ -20313,8 +20379,8 @@
         </p:nvSpPr>
         <p:spPr>
           <a:xfrm>
-            <a:off x="5357470" y="3362249"/>
-            <a:ext cx="724205" cy="199339"/>
+            <a:off x="5364785" y="3375050"/>
+            <a:ext cx="710489" cy="173736"/>
           </a:xfrm>
           <a:prstGeom prst="rect">
             <a:avLst/>
@@ -20377,12 +20443,12 @@
         </p:nvSpPr>
         <p:spPr>
           <a:xfrm>
-            <a:off x="2803550" y="4817059"/>
-            <a:ext cx="560527" cy="210312"/>
+            <a:off x="2822753" y="4833518"/>
+            <a:ext cx="522122" cy="178308"/>
           </a:xfrm>
           <a:prstGeom prst="roundRect">
             <a:avLst>
-              <a:gd name="adj" fmla="val 21739"/>
+              <a:gd name="adj" fmla="val 25641"/>
             </a:avLst>
           </a:prstGeom>
           <a:solidFill>
@@ -20404,8 +20470,8 @@
         </p:nvSpPr>
         <p:spPr>
           <a:xfrm>
-            <a:off x="2821838" y="4826203"/>
-            <a:ext cx="523951" cy="192024"/>
+            <a:off x="2841041" y="4842662"/>
+            <a:ext cx="485546" cy="160020"/>
           </a:xfrm>
           <a:prstGeom prst="rect">
             <a:avLst/>
@@ -20468,12 +20534,12 @@
         </p:nvSpPr>
         <p:spPr>
           <a:xfrm>
-            <a:off x="2704795" y="5451653"/>
-            <a:ext cx="757123" cy="210312"/>
+            <a:off x="2728570" y="5468112"/>
+            <a:ext cx="709574" cy="178308"/>
           </a:xfrm>
           <a:prstGeom prst="roundRect">
             <a:avLst>
-              <a:gd name="adj" fmla="val 21739"/>
+              <a:gd name="adj" fmla="val 25641"/>
             </a:avLst>
           </a:prstGeom>
           <a:solidFill>
@@ -20495,8 +20561,8 @@
         </p:nvSpPr>
         <p:spPr>
           <a:xfrm>
-            <a:off x="2723083" y="5460797"/>
-            <a:ext cx="720547" cy="192024"/>
+            <a:off x="2746858" y="5477256"/>
+            <a:ext cx="672998" cy="160020"/>
           </a:xfrm>
           <a:prstGeom prst="rect">
             <a:avLst/>
@@ -20559,12 +20625,12 @@
         </p:nvSpPr>
         <p:spPr>
           <a:xfrm>
-            <a:off x="5108753" y="4817059"/>
-            <a:ext cx="678485" cy="210312"/>
+            <a:off x="5130698" y="4833518"/>
+            <a:ext cx="634594" cy="178308"/>
           </a:xfrm>
           <a:prstGeom prst="roundRect">
             <a:avLst>
-              <a:gd name="adj" fmla="val 21739"/>
+              <a:gd name="adj" fmla="val 25641"/>
             </a:avLst>
           </a:prstGeom>
           <a:solidFill>
@@ -20586,8 +20652,8 @@
         </p:nvSpPr>
         <p:spPr>
           <a:xfrm>
-            <a:off x="5127041" y="4826203"/>
-            <a:ext cx="641909" cy="192024"/>
+            <a:off x="5148986" y="4842662"/>
+            <a:ext cx="598018" cy="160020"/>
           </a:xfrm>
           <a:prstGeom prst="rect">
             <a:avLst/>
@@ -20650,12 +20716,12 @@
         </p:nvSpPr>
         <p:spPr>
           <a:xfrm>
-            <a:off x="5108753" y="5451653"/>
-            <a:ext cx="678485" cy="210312"/>
+            <a:off x="5130698" y="5468112"/>
+            <a:ext cx="634594" cy="178308"/>
           </a:xfrm>
           <a:prstGeom prst="roundRect">
             <a:avLst>
-              <a:gd name="adj" fmla="val 21739"/>
+              <a:gd name="adj" fmla="val 25641"/>
             </a:avLst>
           </a:prstGeom>
           <a:solidFill>
@@ -20677,8 +20743,8 @@
         </p:nvSpPr>
         <p:spPr>
           <a:xfrm>
-            <a:off x="5127041" y="5460797"/>
-            <a:ext cx="641909" cy="192024"/>
+            <a:off x="5148986" y="5477256"/>
+            <a:ext cx="598018" cy="160020"/>
           </a:xfrm>
           <a:prstGeom prst="rect">
             <a:avLst/>
@@ -20741,12 +20807,12 @@
         </p:nvSpPr>
         <p:spPr>
           <a:xfrm>
-            <a:off x="1845259" y="5603443"/>
-            <a:ext cx="512064" cy="210312"/>
+            <a:off x="1853489" y="5618988"/>
+            <a:ext cx="493776" cy="178308"/>
           </a:xfrm>
           <a:prstGeom prst="roundRect">
             <a:avLst>
-              <a:gd name="adj" fmla="val 21739"/>
+              <a:gd name="adj" fmla="val 25641"/>
             </a:avLst>
           </a:prstGeom>
           <a:solidFill>
@@ -20768,8 +20834,8 @@
         </p:nvSpPr>
         <p:spPr>
           <a:xfrm>
-            <a:off x="1863547" y="5612587"/>
-            <a:ext cx="475488" cy="192024"/>
+            <a:off x="1871777" y="5628132"/>
+            <a:ext cx="457200" cy="160020"/>
           </a:xfrm>
           <a:prstGeom prst="rect">
             <a:avLst/>
@@ -20832,12 +20898,12 @@
         </p:nvSpPr>
         <p:spPr>
           <a:xfrm>
-            <a:off x="3905402" y="3353105"/>
-            <a:ext cx="738835" cy="210312"/>
+            <a:off x="3905402" y="3368650"/>
+            <a:ext cx="738835" cy="178308"/>
           </a:xfrm>
           <a:prstGeom prst="roundRect">
             <a:avLst>
-              <a:gd name="adj" fmla="val 21739"/>
+              <a:gd name="adj" fmla="val 25641"/>
             </a:avLst>
           </a:prstGeom>
           <a:solidFill>
@@ -20859,8 +20925,8 @@
         </p:nvSpPr>
         <p:spPr>
           <a:xfrm>
-            <a:off x="3923690" y="3362249"/>
-            <a:ext cx="702259" cy="192024"/>
+            <a:off x="3923690" y="3377794"/>
+            <a:ext cx="702259" cy="160020"/>
           </a:xfrm>
           <a:prstGeom prst="rect">
             <a:avLst/>
@@ -20923,12 +20989,12 @@
         </p:nvSpPr>
         <p:spPr>
           <a:xfrm>
-            <a:off x="2983687" y="3353105"/>
-            <a:ext cx="669341" cy="210312"/>
+            <a:off x="2983687" y="3368650"/>
+            <a:ext cx="669341" cy="178308"/>
           </a:xfrm>
           <a:prstGeom prst="roundRect">
             <a:avLst>
-              <a:gd name="adj" fmla="val 21739"/>
+              <a:gd name="adj" fmla="val 25641"/>
             </a:avLst>
           </a:prstGeom>
           <a:solidFill>
@@ -20950,8 +21016,8 @@
         </p:nvSpPr>
         <p:spPr>
           <a:xfrm>
-            <a:off x="3001975" y="3362249"/>
-            <a:ext cx="632765" cy="192024"/>
+            <a:off x="3001975" y="3377794"/>
+            <a:ext cx="632765" cy="160020"/>
           </a:xfrm>
           <a:prstGeom prst="rect">
             <a:avLst/>
@@ -21014,12 +21080,12 @@
         </p:nvSpPr>
         <p:spPr>
           <a:xfrm>
-            <a:off x="2501798" y="2870302"/>
-            <a:ext cx="599846" cy="210312"/>
+            <a:off x="2521915" y="2885846"/>
+            <a:ext cx="559613" cy="178308"/>
           </a:xfrm>
           <a:prstGeom prst="roundRect">
             <a:avLst>
-              <a:gd name="adj" fmla="val 21739"/>
+              <a:gd name="adj" fmla="val 25641"/>
             </a:avLst>
           </a:prstGeom>
           <a:solidFill>
@@ -21041,8 +21107,8 @@
         </p:nvSpPr>
         <p:spPr>
           <a:xfrm>
-            <a:off x="2520086" y="2879446"/>
-            <a:ext cx="563270" cy="192024"/>
+            <a:off x="2540203" y="2894990"/>
+            <a:ext cx="523037" cy="160020"/>
           </a:xfrm>
           <a:prstGeom prst="rect">
             <a:avLst/>
@@ -21105,12 +21171,12 @@
         </p:nvSpPr>
         <p:spPr>
           <a:xfrm>
-            <a:off x="1757477" y="4602175"/>
-            <a:ext cx="686714" cy="146304"/>
+            <a:off x="1757477" y="4608576"/>
+            <a:ext cx="686714" cy="132588"/>
           </a:xfrm>
           <a:prstGeom prst="roundRect">
             <a:avLst>
-              <a:gd name="adj" fmla="val 31250"/>
+              <a:gd name="adj" fmla="val 34483"/>
             </a:avLst>
           </a:prstGeom>
           <a:solidFill>
@@ -21132,8 +21198,8 @@
         </p:nvSpPr>
         <p:spPr>
           <a:xfrm>
-            <a:off x="1775765" y="4611319"/>
-            <a:ext cx="650138" cy="128016"/>
+            <a:off x="1775765" y="4617720"/>
+            <a:ext cx="650138" cy="114300"/>
           </a:xfrm>
           <a:prstGeom prst="rect">
             <a:avLst/>
@@ -21176,12 +21242,12 @@
         </p:nvSpPr>
         <p:spPr>
           <a:xfrm>
-            <a:off x="1757477" y="4810658"/>
-            <a:ext cx="686714" cy="146304"/>
+            <a:off x="1757477" y="4817059"/>
+            <a:ext cx="686714" cy="132588"/>
           </a:xfrm>
           <a:prstGeom prst="roundRect">
             <a:avLst>
-              <a:gd name="adj" fmla="val 31250"/>
+              <a:gd name="adj" fmla="val 34483"/>
             </a:avLst>
           </a:prstGeom>
           <a:solidFill>
@@ -21203,8 +21269,8 @@
         </p:nvSpPr>
         <p:spPr>
           <a:xfrm>
-            <a:off x="1775765" y="4819802"/>
-            <a:ext cx="650138" cy="128016"/>
+            <a:off x="1775765" y="4826203"/>
+            <a:ext cx="650138" cy="114300"/>
           </a:xfrm>
           <a:prstGeom prst="rect">
             <a:avLst/>
@@ -21247,12 +21313,12 @@
         </p:nvSpPr>
         <p:spPr>
           <a:xfrm>
-            <a:off x="2427732" y="2079346"/>
-            <a:ext cx="512064" cy="210312"/>
+            <a:off x="2436876" y="2094890"/>
+            <a:ext cx="493776" cy="178308"/>
           </a:xfrm>
           <a:prstGeom prst="roundRect">
             <a:avLst>
-              <a:gd name="adj" fmla="val 21739"/>
+              <a:gd name="adj" fmla="val 25641"/>
             </a:avLst>
           </a:prstGeom>
           <a:solidFill>
@@ -21274,8 +21340,8 @@
         </p:nvSpPr>
         <p:spPr>
           <a:xfrm>
-            <a:off x="2446020" y="2088490"/>
-            <a:ext cx="475488" cy="192024"/>
+            <a:off x="2455164" y="2104034"/>
+            <a:ext cx="457200" cy="160020"/>
           </a:xfrm>
           <a:prstGeom prst="rect">
             <a:avLst/>
@@ -21338,12 +21404,12 @@
         </p:nvSpPr>
         <p:spPr>
           <a:xfrm>
-            <a:off x="2427732" y="2606040"/>
-            <a:ext cx="512064" cy="210312"/>
+            <a:off x="2435962" y="2639873"/>
+            <a:ext cx="495605" cy="178308"/>
           </a:xfrm>
           <a:prstGeom prst="roundRect">
             <a:avLst>
-              <a:gd name="adj" fmla="val 21739"/>
+              <a:gd name="adj" fmla="val 25641"/>
             </a:avLst>
           </a:prstGeom>
           <a:solidFill>
@@ -21365,8 +21431,8 @@
         </p:nvSpPr>
         <p:spPr>
           <a:xfrm>
-            <a:off x="2446020" y="2615184"/>
-            <a:ext cx="475488" cy="192024"/>
+            <a:off x="2454250" y="2649017"/>
+            <a:ext cx="459029" cy="160020"/>
           </a:xfrm>
           <a:prstGeom prst="rect">
             <a:avLst/>
@@ -21429,12 +21495,12 @@
         </p:nvSpPr>
         <p:spPr>
           <a:xfrm>
-            <a:off x="3853282" y="1141171"/>
-            <a:ext cx="512064" cy="146304"/>
+            <a:off x="3862426" y="1148486"/>
+            <a:ext cx="493776" cy="132588"/>
           </a:xfrm>
           <a:prstGeom prst="roundRect">
             <a:avLst>
-              <a:gd name="adj" fmla="val 31250"/>
+              <a:gd name="adj" fmla="val 34483"/>
             </a:avLst>
           </a:prstGeom>
           <a:solidFill>
@@ -21456,8 +21522,8 @@
         </p:nvSpPr>
         <p:spPr>
           <a:xfrm>
-            <a:off x="3871570" y="1150315"/>
-            <a:ext cx="475488" cy="128016"/>
+            <a:off x="3880714" y="1157630"/>
+            <a:ext cx="457200" cy="114300"/>
           </a:xfrm>
           <a:prstGeom prst="rect">
             <a:avLst/>
@@ -21500,12 +21566,12 @@
         </p:nvSpPr>
         <p:spPr>
           <a:xfrm>
-            <a:off x="3853282" y="2719426"/>
-            <a:ext cx="512064" cy="146304"/>
+            <a:off x="3862426" y="2725826"/>
+            <a:ext cx="493776" cy="132588"/>
           </a:xfrm>
           <a:prstGeom prst="roundRect">
             <a:avLst>
-              <a:gd name="adj" fmla="val 31250"/>
+              <a:gd name="adj" fmla="val 34483"/>
             </a:avLst>
           </a:prstGeom>
           <a:solidFill>
@@ -21527,8 +21593,8 @@
         </p:nvSpPr>
         <p:spPr>
           <a:xfrm>
-            <a:off x="3871570" y="2728570"/>
-            <a:ext cx="475488" cy="128016"/>
+            <a:off x="3880714" y="2734970"/>
+            <a:ext cx="457200" cy="114300"/>
           </a:xfrm>
           <a:prstGeom prst="rect">
             <a:avLst/>
@@ -21571,12 +21637,12 @@
         </p:nvSpPr>
         <p:spPr>
           <a:xfrm>
-            <a:off x="3032150" y="1141171"/>
-            <a:ext cx="512064" cy="146304"/>
+            <a:off x="3040380" y="1148486"/>
+            <a:ext cx="493776" cy="132588"/>
           </a:xfrm>
           <a:prstGeom prst="roundRect">
             <a:avLst>
-              <a:gd name="adj" fmla="val 31250"/>
+              <a:gd name="adj" fmla="val 34483"/>
             </a:avLst>
           </a:prstGeom>
           <a:solidFill>
@@ -21598,8 +21664,8 @@
         </p:nvSpPr>
         <p:spPr>
           <a:xfrm>
-            <a:off x="3050438" y="1150315"/>
-            <a:ext cx="475488" cy="128016"/>
+            <a:off x="3058668" y="1157630"/>
+            <a:ext cx="457200" cy="114300"/>
           </a:xfrm>
           <a:prstGeom prst="rect">
             <a:avLst/>
@@ -21642,12 +21708,12 @@
         </p:nvSpPr>
         <p:spPr>
           <a:xfrm>
-            <a:off x="3032150" y="2645359"/>
-            <a:ext cx="512064" cy="146304"/>
+            <a:off x="3040380" y="2725826"/>
+            <a:ext cx="493776" cy="132588"/>
           </a:xfrm>
           <a:prstGeom prst="roundRect">
             <a:avLst>
-              <a:gd name="adj" fmla="val 31250"/>
+              <a:gd name="adj" fmla="val 34483"/>
             </a:avLst>
           </a:prstGeom>
           <a:solidFill>
@@ -21669,8 +21735,8 @@
         </p:nvSpPr>
         <p:spPr>
           <a:xfrm>
-            <a:off x="3050438" y="2654503"/>
-            <a:ext cx="475488" cy="128016"/>
+            <a:off x="3058668" y="2734970"/>
+            <a:ext cx="457200" cy="114300"/>
           </a:xfrm>
           <a:prstGeom prst="rect">
             <a:avLst/>
@@ -22141,7 +22207,7 @@
                 <a:ea typeface="Google Sans" pitchFamily="34" charset="-122"/>
                 <a:cs typeface="Google Sans" pitchFamily="34" charset="-120"/>
               </a:rPr>
-              <a:t>Executive Impact &amp; Production Verification Metrics</a:t>
+              <a:t>ACT I • EXECUTIVE SCORECARD &amp; PRODUCTION SLO BASELINE</a:t>
             </a:r>
             <a:endParaRPr lang="en-US" sz="1020" dirty="0"/>
           </a:p>
@@ -22238,7 +22304,7 @@
               <a:buNone/>
             </a:pPr>
             <a:r>
-              <a:rPr lang="en-US" sz="2000" b="1" dirty="0">
+              <a:rPr lang="en-US" sz="1950" b="1" dirty="0">
                 <a:solidFill>
                   <a:srgbClr val="3C4043"/>
                 </a:solidFill>
@@ -22246,9 +22312,9 @@
                 <a:ea typeface="Google Sans" pitchFamily="34" charset="-122"/>
                 <a:cs typeface="Google Sans" pitchFamily="34" charset="-120"/>
               </a:rPr>
-              <a:t>Executive Impact &amp; Production Verification Metrics</a:t>
-            </a:r>
-            <a:endParaRPr lang="en-US" sz="2000" dirty="0"/>
+              <a:t>Quantified Unit Economics, 90% Prefix Cache Savings &amp; 20/20 Security Verification</a:t>
+            </a:r>
+            <a:endParaRPr lang="en-US" sz="1950" dirty="0"/>
           </a:p>
         </p:txBody>
       </p:sp>
@@ -22277,7 +22343,7 @@
               <a:buNone/>
             </a:pPr>
             <a:r>
-              <a:rPr lang="en-US" sz="1050" dirty="0">
+              <a:rPr lang="en-US" sz="1020" dirty="0">
                 <a:solidFill>
                   <a:srgbClr val="5F6368"/>
                 </a:solidFill>
@@ -22285,9 +22351,9 @@
                 <a:ea typeface="Roboto" pitchFamily="34" charset="-122"/>
                 <a:cs typeface="Roboto" pitchFamily="34" charset="-120"/>
               </a:rPr>
-              <a:t>Quantified unit economics, shared Gemini 2.5 Pro prefix caching efficiency, and automated security gate verification across Google Cloud.</a:t>
-            </a:r>
-            <a:endParaRPr lang="en-US" sz="1050" dirty="0"/>
+              <a:t>Empirical production metrics certified across Pattern A ($42/mo pool), Pattern B ($1,850/mo sovereign silo), and Pattern C (hybrid PSC spokes).</a:t>
+            </a:r>
+            <a:endParaRPr lang="en-US" sz="1020" dirty="0"/>
           </a:p>
         </p:txBody>
       </p:sp>
@@ -24098,7 +24164,7 @@
                 <a:ea typeface="Google Sans" pitchFamily="34" charset="-122"/>
                 <a:cs typeface="Google Sans" pitchFamily="34" charset="-120"/>
               </a:rPr>
-              <a:t>Products used — Hub-and-Spoke Control Plane &amp; Private Service Connect (PSC)</a:t>
+              <a:t>ACT I • GOOGLE CLOUD REFERENCE PRODUCT STACK &amp; BILL OF MATERIALS</a:t>
             </a:r>
             <a:endParaRPr lang="en-US" sz="1020" dirty="0"/>
           </a:p>
@@ -24203,7 +24269,7 @@
                 <a:ea typeface="Google Sans" pitchFamily="34" charset="-122"/>
                 <a:cs typeface="Google Sans" pitchFamily="34" charset="-120"/>
               </a:rPr>
-              <a:t>Products used — Hub-and-Spoke Control Plane &amp; Private Service Connect (PSC)</a:t>
+              <a:t>Hub-and-Spoke Control Plane &amp; Private Service Connect (PSC)</a:t>
             </a:r>
             <a:endParaRPr lang="en-US" sz="1900" dirty="0"/>
           </a:p>
@@ -24242,7 +24308,7 @@
                 <a:ea typeface="Roboto" pitchFamily="34" charset="-122"/>
                 <a:cs typeface="Roboto" pitchFamily="34" charset="-120"/>
               </a:rPr>
-              <a:t>Structured Google Cloud reference components, runtime isolation boundaries, and target SLAs.</a:t>
+              <a:t>Structured Google Cloud reference SKUs, runtime isolation boundaries, and production SLAs.</a:t>
             </a:r>
             <a:endParaRPr lang="en-US" sz="1000" dirty="0"/>
           </a:p>
@@ -34084,7 +34150,7 @@
                 <a:ea typeface="Google Sans" pitchFamily="34" charset="-122"/>
                 <a:cs typeface="Google Sans" pitchFamily="34" charset="-120"/>
               </a:rPr>
-              <a:t>WS4 • Pattern C Unidirectional Private Service Connect &amp; Live Cutover Flow</a:t>
+              <a:t>WS4 • ACT II: UNIDIRECTIONAL PRIVATE SERVICE CONNECT &amp; LIVE CUTOVER LOOP</a:t>
             </a:r>
             <a:endParaRPr lang="en-US" sz="1020" dirty="0"/>
           </a:p>
@@ -34189,7 +34255,7 @@
                 <a:ea typeface="Google Sans Display" pitchFamily="34" charset="-122"/>
                 <a:cs typeface="Google Sans Display" pitchFamily="34" charset="-120"/>
               </a:rPr>
-              <a:t>Hub-and-spoke PSC traversal and zero-downtime state synchronization</a:t>
+              <a:t>Hub-and-Spoke PSC Traversal (/28 NAT) &amp; Zero-Downtime State Synchronization</a:t>
             </a:r>
             <a:endParaRPr lang="en-US" sz="2050" dirty="0"/>
           </a:p>
@@ -35592,7 +35658,7 @@
                 <a:ea typeface="Google Sans" pitchFamily="34" charset="-122"/>
                 <a:cs typeface="Google Sans" pitchFamily="34" charset="-120"/>
               </a:rPr>
-              <a:t>Design considerations — Zero-Downtime Live Tier Migration Protocol (4/4 PASS)</a:t>
+              <a:t>ACT III • ARCHITECTURAL TRADE-OFF &amp; ISOLATION SELECTION MATRIX</a:t>
             </a:r>
             <a:endParaRPr lang="en-US" sz="1020" dirty="0"/>
           </a:p>
@@ -35697,7 +35763,7 @@
                 <a:ea typeface="Google Sans" pitchFamily="34" charset="-122"/>
                 <a:cs typeface="Google Sans" pitchFamily="34" charset="-120"/>
               </a:rPr>
-              <a:t>Design considerations — Zero-Downtime Live Tier Migration Protocol (4/4 PASS)</a:t>
+              <a:t>Zero-Downtime Live Tier Migration Protocol (4/4 PASS)</a:t>
             </a:r>
             <a:endParaRPr lang="en-US" sz="1800" dirty="0"/>
           </a:p>
@@ -35736,7 +35802,7 @@
                 <a:ea typeface="Roboto" pitchFamily="34" charset="-122"/>
                 <a:cs typeface="Roboto" pitchFamily="34" charset="-120"/>
               </a:rPr>
-              <a:t>Side-by-side Google Cloud Well-Architected trade-off analysis, compensating controls, and target SLAs.</a:t>
+              <a:t>Side-by-side Google Cloud Well-Architected trade-off analysis, isolation boundaries, and unit economics.</a:t>
             </a:r>
             <a:endParaRPr lang="en-US" sz="980" dirty="0"/>
           </a:p>
@@ -37302,7 +37368,7 @@
               <a:buNone/>
             </a:pPr>
             <a:r>
-              <a:rPr lang="en-US" sz="760" b="1" dirty="0">
+              <a:rPr lang="en-US" sz="820" b="1" dirty="0">
                 <a:solidFill>
                   <a:srgbClr val="3C4043"/>
                 </a:solidFill>
@@ -37310,9 +37376,9 @@
                 <a:ea typeface="Google Sans" pitchFamily="34" charset="-122"/>
                 <a:cs typeface="Google Sans" pitchFamily="34" charset="-120"/>
               </a:rPr>
-              <a:t>1. Baseline (Pre-Upgrade) • Test 1: Dual-Tier Routing</a:t>
-            </a:r>
-            <a:endParaRPr lang="en-US" sz="760" dirty="0"/>
+              <a:t>1. Phase 1: SHADOW_SYNC Backfill</a:t>
+            </a:r>
+            <a:endParaRPr lang="en-US" sz="820" dirty="0"/>
           </a:p>
         </p:txBody>
       </p:sp>
@@ -37351,7 +37417,7 @@
                 <a:ea typeface="Roboto" pitchFamily="34" charset="-122"/>
                 <a:cs typeface="Roboto" pitchFamily="34" charset="-120"/>
               </a:rPr>
-              <a:t>Test 1 PASS: Verified deterministic tier routing &amp; quota clamping prior to migration</a:t>
+              <a:t>Provisions dedicated PSC spoke via Terraform 4.6 and dual-writes live Memory Bank and AlloyDB state without pausing active turns.</a:t>
             </a:r>
             <a:endParaRPr lang="en-US" sz="740" dirty="0"/>
           </a:p>
@@ -37431,7 +37497,7 @@
               <a:buNone/>
             </a:pPr>
             <a:r>
-              <a:rPr lang="en-US" sz="760" b="1" dirty="0">
+              <a:rPr lang="en-US" sz="820" b="1" dirty="0">
                 <a:solidFill>
                   <a:srgbClr val="3C4043"/>
                 </a:solidFill>
@@ -37439,9 +37505,9 @@
                 <a:ea typeface="Google Sans" pitchFamily="34" charset="-122"/>
                 <a:cs typeface="Google Sans" pitchFamily="34" charset="-120"/>
               </a:rPr>
-              <a:t>2. Phase 1: SHADOW_SYNC • Test 2: Spoke Provision &amp; CDC</a:t>
-            </a:r>
-            <a:endParaRPr lang="en-US" sz="760" dirty="0"/>
+              <a:t>2. Phase 2: CMEK Re-Key &amp; Checksum</a:t>
+            </a:r>
+            <a:endParaRPr lang="en-US" sz="820" dirty="0"/>
           </a:p>
         </p:txBody>
       </p:sp>
@@ -37480,7 +37546,7 @@
                 <a:ea typeface="Roboto" pitchFamily="34" charset="-122"/>
                 <a:cs typeface="Roboto" pitchFamily="34" charset="-120"/>
               </a:rPr>
-              <a:t>Test 2 PASS: replication_lag_ms == 0 and PSC connection status ACCEPTED before cutover</a:t>
+              <a:t>Re-encrypts tenant records under customer-managed Cloud KMS CMEK and verifies 100% SHA-256 row &amp; vector checksum parity.</a:t>
             </a:r>
             <a:endParaRPr lang="en-US" sz="740" dirty="0"/>
           </a:p>
@@ -37568,7 +37634,7 @@
                 <a:ea typeface="Google Sans" pitchFamily="34" charset="-122"/>
                 <a:cs typeface="Google Sans" pitchFamily="34" charset="-120"/>
               </a:rPr>
-              <a:t>3. Phase 2: ATOMIC_CUTOVER • Test 3: Firestore Route Flip</a:t>
+              <a:t>3. Phase 3: 0ms Atomic Firestore Flip</a:t>
             </a:r>
             <a:endParaRPr lang="en-US" sz="760" dirty="0"/>
           </a:p>
@@ -37609,7 +37675,7 @@
                 <a:ea typeface="Roboto" pitchFamily="34" charset="-122"/>
                 <a:cs typeface="Roboto" pitchFamily="34" charset="-120"/>
               </a:rPr>
-              <a:t>Test 3 PASS: Sub-10ms atomic route flip with instance-scoped isolation (0 global state bleed)</a:t>
+              <a:t>Flips the Hub tier-routing pointer atomically to the spoke Private Service Connect endpoint (10.10.0.50) with 0 dropped sessions.</a:t>
             </a:r>
             <a:endParaRPr lang="en-US" sz="740" dirty="0"/>
           </a:p>
@@ -37697,7 +37763,7 @@
                 <a:ea typeface="Google Sans" pitchFamily="34" charset="-122"/>
                 <a:cs typeface="Google Sans" pitchFamily="34" charset="-120"/>
               </a:rPr>
-              <a:t>4. Phase 3: DRAIN_AND_VERIFY • Test 4: Mid-Session Continuity</a:t>
+              <a:t>4. Phase 4: Shared Pool Tombstone Purge</a:t>
             </a:r>
             <a:endParaRPr lang="en-US" sz="760" dirty="0"/>
           </a:p>
@@ -37738,7 +37804,7 @@
                 <a:ea typeface="Roboto" pitchFamily="34" charset="-122"/>
                 <a:cs typeface="Roboto" pitchFamily="34" charset="-120"/>
               </a:rPr>
-              <a:t>Test 4 PASS: dropped_sessions == 0, 8,000 thinking budget active, CMEK encryption verified</a:t>
+              <a:t>Drains in-flight pooled connections and executes cryptographic tombstone deletion of legacy rows in the shared Pattern A database.</a:t>
             </a:r>
             <a:endParaRPr lang="en-US" sz="740" dirty="0"/>
           </a:p>

--- a/slides/ws4-pattern-c-hybrid-editable-slides.pptx
+++ b/slides/ws4-pattern-c-hybrid-editable-slides.pptx
@@ -784,7 +784,7 @@
           <a:p>
             <a:r>
               <a:rPr lang="en-US" dirty="0"/>
-              <a:t>[phased-roadmap-timeline] WS4 • ACT III: PATTERN C ZERO-DOWNTIME LIVE TIER MIGRATION TIMELINE: Workstream 4 Pattern C Timeline  •  Phase 1 SHADOW_SYNC → Phase 2 ATOMIC_CUTOVER (0ms) → Phase 3 DRAIN_AND_VERIFY</a:t>
+              <a:t>[phased-roadmap-timeline] WS4 • ACT III: PATTERN C ZERO-DOWNTIME LIVE TIER MIGRATION STATE MACHINE: Workstream 4 Pattern C State Machine  •  Stage 1 SHADOW_SYNC → Stage 2 ATOMIC_CUTOVER (0ms) → Stage 3 DRAIN_AND_VERIFY</a:t>
             </a:r>
             <a:endParaRPr lang="en-US" dirty="0"/>
           </a:p>
@@ -3846,7 +3846,7 @@
                 <a:ea typeface="Google Sans" pitchFamily="34" charset="-122"/>
                 <a:cs typeface="Google Sans" pitchFamily="34" charset="-120"/>
               </a:rPr>
-              <a:t>GOVERNANCE • SLIDES 12–14</a:t>
+              <a:t>SOLUTION • SLIDES 12–14</a:t>
             </a:r>
             <a:endParaRPr lang="en-US" sz="660" dirty="0"/>
           </a:p>
@@ -3885,7 +3885,7 @@
                 <a:ea typeface="Google Sans" pitchFamily="34" charset="-122"/>
                 <a:cs typeface="Google Sans" pitchFamily="34" charset="-120"/>
               </a:rPr>
-              <a:t>Rollout Roadmap, Day-2 RACI &amp; Series Map</a:t>
+              <a:t>Tier Evolution, Well-Architected Pillars &amp; Series Map</a:t>
             </a:r>
             <a:endParaRPr lang="en-US" sz="850" dirty="0"/>
           </a:p>
@@ -3924,7 +3924,7 @@
                 <a:ea typeface="Roboto" pitchFamily="34" charset="-122"/>
                 <a:cs typeface="Roboto" pitchFamily="34" charset="-120"/>
               </a:rPr>
-              <a:t>Charts the 3-phase rollout timeline (Weeks 1–10), assigns Security/SRE/FinOps Day-2 RACI SLAs, and maps runnable deliverables across Workstreams 1–5.</a:t>
+              <a:t>Demonstrates 3-stage tenant tier evolution (Pool -&gt; 0ms PSC Cutover -&gt; Silo), Google Cloud Well-Architected guarantees, and Workstream 1–5 deliverables.</a:t>
             </a:r>
             <a:endParaRPr lang="en-US" sz="780" dirty="0"/>
           </a:p>
@@ -9009,7 +9009,7 @@
                 <a:ea typeface="Google Sans" pitchFamily="34" charset="-122"/>
                 <a:cs typeface="Google Sans" pitchFamily="34" charset="-120"/>
               </a:rPr>
-              <a:t>WS4 • ACT III: PATTERN C ZERO-DOWNTIME LIVE TIER MIGRATION TIMELINE</a:t>
+              <a:t>WS4 • ACT III: PATTERN C ZERO-DOWNTIME LIVE TIER MIGRATION STATE MACHINE</a:t>
             </a:r>
             <a:endParaRPr lang="en-US" sz="1020" dirty="0"/>
           </a:p>
@@ -9090,7 +9090,7 @@
         <p:spPr>
           <a:xfrm>
             <a:off x="530352" y="786384"/>
-            <a:ext cx="10972800" cy="585216"/>
+            <a:ext cx="11119104" cy="585216"/>
           </a:xfrm>
           <a:prstGeom prst="rect">
             <a:avLst/>
@@ -9106,7 +9106,7 @@
               <a:buNone/>
             </a:pPr>
             <a:r>
-              <a:rPr lang="en-US" sz="2250" b="1" dirty="0">
+              <a:rPr lang="en-US" sz="2020" b="1" dirty="0">
                 <a:solidFill>
                   <a:srgbClr val="0F2942"/>
                 </a:solidFill>
@@ -9114,9 +9114,9 @@
                 <a:ea typeface="Google Sans Display" pitchFamily="34" charset="-122"/>
                 <a:cs typeface="Google Sans Display" pitchFamily="34" charset="-120"/>
               </a:rPr>
-              <a:t>3-Phase Live Tenant Promotion Cutover Window (Standard → Enterprise Spoke)</a:t>
-            </a:r>
-            <a:endParaRPr lang="en-US" sz="2250" dirty="0"/>
+              <a:t>3-Stage Live Tenant Promotion Cutover Window (Standard Pool → Enterprise Spoke)</a:t>
+            </a:r>
+            <a:endParaRPr lang="en-US" sz="2020" dirty="0"/>
           </a:p>
         </p:txBody>
       </p:sp>
@@ -9194,7 +9194,7 @@
               <a:buNone/>
             </a:pPr>
             <a:r>
-              <a:rPr lang="en-US" sz="1700" b="1" dirty="0">
+              <a:rPr lang="en-US" sz="1650" b="1" dirty="0">
                 <a:solidFill>
                   <a:srgbClr val="FFFFFF"/>
                 </a:solidFill>
@@ -9202,9 +9202,9 @@
                 <a:ea typeface="Google Sans" pitchFamily="34" charset="-122"/>
                 <a:cs typeface="Google Sans" pitchFamily="34" charset="-120"/>
               </a:rPr>
-              <a:t>Phase 1: SHADOW_SYNC</a:t>
-            </a:r>
-            <a:endParaRPr lang="en-US" sz="1700" dirty="0"/>
+              <a:t>Stage 1: SHADOW_SYNC</a:t>
+            </a:r>
+            <a:endParaRPr lang="en-US" sz="1650" dirty="0"/>
           </a:p>
         </p:txBody>
       </p:sp>
@@ -9253,7 +9253,7 @@
               <a:buNone/>
             </a:pPr>
             <a:r>
-              <a:rPr lang="en-US" sz="2000" b="1" dirty="0">
+              <a:rPr lang="en-US" sz="1850" b="1" dirty="0">
                 <a:solidFill>
                   <a:srgbClr val="3C4043"/>
                 </a:solidFill>
@@ -9263,14 +9263,14 @@
               </a:rPr>
               <a:t>Spoke Provision &amp;</a:t>
             </a:r>
-            <a:endParaRPr lang="en-US" sz="2000" dirty="0"/>
+            <a:endParaRPr lang="en-US" sz="1850" dirty="0"/>
           </a:p>
           <a:p>
             <a:pPr algn="ctr" indent="0" marL="0">
               <a:buNone/>
             </a:pPr>
             <a:r>
-              <a:rPr lang="en-US" sz="2000" b="1" dirty="0">
+              <a:rPr lang="en-US" sz="1850" b="1" dirty="0">
                 <a:solidFill>
                   <a:srgbClr val="3C4043"/>
                 </a:solidFill>
@@ -9280,7 +9280,7 @@
               </a:rPr>
               <a:t>Dual-Write Backfill</a:t>
             </a:r>
-            <a:endParaRPr lang="en-US" sz="2000" dirty="0"/>
+            <a:endParaRPr lang="en-US" sz="1850" dirty="0"/>
           </a:p>
         </p:txBody>
       </p:sp>
@@ -9292,8 +9292,8 @@
         </p:nvSpPr>
         <p:spPr>
           <a:xfrm>
-            <a:off x="713232" y="3675888"/>
-            <a:ext cx="3072384" cy="384048"/>
+            <a:off x="676656" y="3675888"/>
+            <a:ext cx="3145536" cy="384048"/>
           </a:xfrm>
           <a:prstGeom prst="rect">
             <a:avLst/>
@@ -9309,17 +9309,17 @@
               <a:buNone/>
             </a:pPr>
             <a:r>
-              <a:rPr lang="en-US" sz="1500" dirty="0">
-                <a:solidFill>
-                  <a:srgbClr val="3C4043"/>
+              <a:rPr lang="en-US" sz="1220" b="1" dirty="0">
+                <a:solidFill>
+                  <a:srgbClr val="0F2942"/>
                 </a:solidFill>
                 <a:latin typeface="Roboto" pitchFamily="34" charset="0"/>
                 <a:ea typeface="Roboto" pitchFamily="34" charset="-122"/>
                 <a:cs typeface="Roboto" pitchFamily="34" charset="-120"/>
               </a:rPr>
-              <a:t>(T-30 to T-5 Min)</a:t>
-            </a:r>
-            <a:endParaRPr lang="en-US" sz="1500" dirty="0"/>
+              <a:t>Terraform 4.6 PSC • Dual-Write Active</a:t>
+            </a:r>
+            <a:endParaRPr lang="en-US" sz="1220" dirty="0"/>
           </a:p>
         </p:txBody>
       </p:sp>
@@ -9371,7 +9371,7 @@
               <a:buNone/>
             </a:pPr>
             <a:r>
-              <a:rPr lang="en-US" sz="1380" dirty="0">
+              <a:rPr lang="en-US" sz="1350" dirty="0">
                 <a:solidFill>
                   <a:srgbClr val="3C4043"/>
                 </a:solidFill>
@@ -9381,14 +9381,14 @@
               </a:rPr>
               <a:t>Terraform 4.6 PSC Spoke +</a:t>
             </a:r>
-            <a:endParaRPr lang="en-US" sz="1380" dirty="0"/>
+            <a:endParaRPr lang="en-US" sz="1350" dirty="0"/>
           </a:p>
           <a:p>
             <a:pPr algn="ctr" indent="0" marL="0">
               <a:buNone/>
             </a:pPr>
             <a:r>
-              <a:rPr lang="en-US" sz="1380" dirty="0">
+              <a:rPr lang="en-US" sz="1350" dirty="0">
                 <a:solidFill>
                   <a:srgbClr val="3C4043"/>
                 </a:solidFill>
@@ -9398,7 +9398,7 @@
               </a:rPr>
               <a:t>Async Memory &amp; SQL Backfill</a:t>
             </a:r>
-            <a:endParaRPr lang="en-US" sz="1380" dirty="0"/>
+            <a:endParaRPr lang="en-US" sz="1350" dirty="0"/>
           </a:p>
         </p:txBody>
       </p:sp>
@@ -9476,7 +9476,7 @@
               <a:buNone/>
             </a:pPr>
             <a:r>
-              <a:rPr lang="en-US" sz="1700" b="1" dirty="0">
+              <a:rPr lang="en-US" sz="1650" b="1" dirty="0">
                 <a:solidFill>
                   <a:srgbClr val="FFFFFF"/>
                 </a:solidFill>
@@ -9484,9 +9484,9 @@
                 <a:ea typeface="Google Sans" pitchFamily="34" charset="-122"/>
                 <a:cs typeface="Google Sans" pitchFamily="34" charset="-120"/>
               </a:rPr>
-              <a:t>Phase 2: ATOMIC_CUTOVER</a:t>
-            </a:r>
-            <a:endParaRPr lang="en-US" sz="1700" dirty="0"/>
+              <a:t>Stage 2: ATOMIC_CUTOVER</a:t>
+            </a:r>
+            <a:endParaRPr lang="en-US" sz="1650" dirty="0"/>
           </a:p>
         </p:txBody>
       </p:sp>
@@ -9535,7 +9535,7 @@
               <a:buNone/>
             </a:pPr>
             <a:r>
-              <a:rPr lang="en-US" sz="2000" b="1" dirty="0">
+              <a:rPr lang="en-US" sz="1850" b="1" dirty="0">
                 <a:solidFill>
                   <a:srgbClr val="3C4043"/>
                 </a:solidFill>
@@ -9545,14 +9545,14 @@
               </a:rPr>
               <a:t>CMEK Re-Key &amp;</a:t>
             </a:r>
-            <a:endParaRPr lang="en-US" sz="2000" dirty="0"/>
+            <a:endParaRPr lang="en-US" sz="1850" dirty="0"/>
           </a:p>
           <a:p>
             <a:pPr algn="ctr" indent="0" marL="0">
               <a:buNone/>
             </a:pPr>
             <a:r>
-              <a:rPr lang="en-US" sz="2000" b="1" dirty="0">
+              <a:rPr lang="en-US" sz="1850" b="1" dirty="0">
                 <a:solidFill>
                   <a:srgbClr val="3C4043"/>
                 </a:solidFill>
@@ -9562,7 +9562,7 @@
               </a:rPr>
               <a:t>Firestore Pointer Flip</a:t>
             </a:r>
-            <a:endParaRPr lang="en-US" sz="2000" dirty="0"/>
+            <a:endParaRPr lang="en-US" sz="1850" dirty="0"/>
           </a:p>
         </p:txBody>
       </p:sp>
@@ -9574,8 +9574,8 @@
         </p:nvSpPr>
         <p:spPr>
           <a:xfrm>
-            <a:off x="4553712" y="3675888"/>
-            <a:ext cx="3072384" cy="384048"/>
+            <a:off x="4517136" y="3675888"/>
+            <a:ext cx="3145536" cy="384048"/>
           </a:xfrm>
           <a:prstGeom prst="rect">
             <a:avLst/>
@@ -9591,17 +9591,17 @@
               <a:buNone/>
             </a:pPr>
             <a:r>
-              <a:rPr lang="en-US" sz="1500" dirty="0">
-                <a:solidFill>
-                  <a:srgbClr val="3C4043"/>
+              <a:rPr lang="en-US" sz="1220" b="1" dirty="0">
+                <a:solidFill>
+                  <a:srgbClr val="0D7A75"/>
                 </a:solidFill>
                 <a:latin typeface="Roboto" pitchFamily="34" charset="0"/>
                 <a:ea typeface="Roboto" pitchFamily="34" charset="-122"/>
                 <a:cs typeface="Roboto" pitchFamily="34" charset="-120"/>
               </a:rPr>
-              <a:t>(T-0 Cutover: 0ms)</a:t>
-            </a:r>
-            <a:endParaRPr lang="en-US" sz="1500" dirty="0"/>
+              <a:t>SHA-256 Checksum • 0ms Cutover</a:t>
+            </a:r>
+            <a:endParaRPr lang="en-US" sz="1220" dirty="0"/>
           </a:p>
         </p:txBody>
       </p:sp>
@@ -9653,7 +9653,7 @@
               <a:buNone/>
             </a:pPr>
             <a:r>
-              <a:rPr lang="en-US" sz="1380" dirty="0">
+              <a:rPr lang="en-US" sz="1350" dirty="0">
                 <a:solidFill>
                   <a:srgbClr val="3C4043"/>
                 </a:solidFill>
@@ -9663,14 +9663,14 @@
               </a:rPr>
               <a:t>Checksum Parity Verified &amp;</a:t>
             </a:r>
-            <a:endParaRPr lang="en-US" sz="1380" dirty="0"/>
+            <a:endParaRPr lang="en-US" sz="1350" dirty="0"/>
           </a:p>
           <a:p>
             <a:pPr algn="ctr" indent="0" marL="0">
               <a:buNone/>
             </a:pPr>
             <a:r>
-              <a:rPr lang="en-US" sz="1380" dirty="0">
+              <a:rPr lang="en-US" sz="1350" dirty="0">
                 <a:solidFill>
                   <a:srgbClr val="3C4043"/>
                 </a:solidFill>
@@ -9680,7 +9680,7 @@
               </a:rPr>
               <a:t>Atomic Route Flip to PSC</a:t>
             </a:r>
-            <a:endParaRPr lang="en-US" sz="1380" dirty="0"/>
+            <a:endParaRPr lang="en-US" sz="1350" dirty="0"/>
           </a:p>
         </p:txBody>
       </p:sp>
@@ -9758,7 +9758,7 @@
               <a:buNone/>
             </a:pPr>
             <a:r>
-              <a:rPr lang="en-US" sz="1700" b="1" dirty="0">
+              <a:rPr lang="en-US" sz="1650" b="1" dirty="0">
                 <a:solidFill>
                   <a:srgbClr val="FFFFFF"/>
                 </a:solidFill>
@@ -9766,9 +9766,9 @@
                 <a:ea typeface="Google Sans" pitchFamily="34" charset="-122"/>
                 <a:cs typeface="Google Sans" pitchFamily="34" charset="-120"/>
               </a:rPr>
-              <a:t>Phase 3: DRAIN_VERIFY</a:t>
-            </a:r>
-            <a:endParaRPr lang="en-US" sz="1700" dirty="0"/>
+              <a:t>Stage 3: DRAIN_VERIFY</a:t>
+            </a:r>
+            <a:endParaRPr lang="en-US" sz="1650" dirty="0"/>
           </a:p>
         </p:txBody>
       </p:sp>
@@ -9817,7 +9817,7 @@
               <a:buNone/>
             </a:pPr>
             <a:r>
-              <a:rPr lang="en-US" sz="2000" b="1" dirty="0">
+              <a:rPr lang="en-US" sz="1850" b="1" dirty="0">
                 <a:solidFill>
                   <a:srgbClr val="3C4043"/>
                 </a:solidFill>
@@ -9827,14 +9827,14 @@
               </a:rPr>
               <a:t>In-Flight Drain &amp;</a:t>
             </a:r>
-            <a:endParaRPr lang="en-US" sz="2000" dirty="0"/>
+            <a:endParaRPr lang="en-US" sz="1850" dirty="0"/>
           </a:p>
           <a:p>
             <a:pPr algn="ctr" indent="0" marL="0">
               <a:buNone/>
             </a:pPr>
             <a:r>
-              <a:rPr lang="en-US" sz="2000" b="1" dirty="0">
+              <a:rPr lang="en-US" sz="1850" b="1" dirty="0">
                 <a:solidFill>
                   <a:srgbClr val="3C4043"/>
                 </a:solidFill>
@@ -9844,7 +9844,7 @@
               </a:rPr>
               <a:t>Shared Pool Purge</a:t>
             </a:r>
-            <a:endParaRPr lang="en-US" sz="2000" dirty="0"/>
+            <a:endParaRPr lang="en-US" sz="1850" dirty="0"/>
           </a:p>
         </p:txBody>
       </p:sp>
@@ -9856,8 +9856,8 @@
         </p:nvSpPr>
         <p:spPr>
           <a:xfrm>
-            <a:off x="8394192" y="3675888"/>
-            <a:ext cx="3072384" cy="384048"/>
+            <a:off x="8357616" y="3675888"/>
+            <a:ext cx="3145536" cy="384048"/>
           </a:xfrm>
           <a:prstGeom prst="rect">
             <a:avLst/>
@@ -9873,17 +9873,17 @@
               <a:buNone/>
             </a:pPr>
             <a:r>
-              <a:rPr lang="en-US" sz="1500" dirty="0">
-                <a:solidFill>
-                  <a:srgbClr val="3C4043"/>
+              <a:rPr lang="en-US" sz="1220" b="1" dirty="0">
+                <a:solidFill>
+                  <a:srgbClr val="54728C"/>
                 </a:solidFill>
                 <a:latin typeface="Roboto" pitchFamily="34" charset="0"/>
                 <a:ea typeface="Roboto" pitchFamily="34" charset="-122"/>
                 <a:cs typeface="Roboto" pitchFamily="34" charset="-120"/>
               </a:rPr>
-              <a:t>(T+1 to T+5 Min)</a:t>
-            </a:r>
-            <a:endParaRPr lang="en-US" sz="1500" dirty="0"/>
+              <a:t>0 Dropped Turns • Tombstone Purge</a:t>
+            </a:r>
+            <a:endParaRPr lang="en-US" sz="1220" dirty="0"/>
           </a:p>
         </p:txBody>
       </p:sp>
@@ -9935,7 +9935,7 @@
               <a:buNone/>
             </a:pPr>
             <a:r>
-              <a:rPr lang="en-US" sz="1380" dirty="0">
+              <a:rPr lang="en-US" sz="1350" dirty="0">
                 <a:solidFill>
                   <a:srgbClr val="3C4043"/>
                 </a:solidFill>
@@ -9945,14 +9945,14 @@
               </a:rPr>
               <a:t>0 Dropped Sessions &amp; 100%</a:t>
             </a:r>
-            <a:endParaRPr lang="en-US" sz="1380" dirty="0"/>
+            <a:endParaRPr lang="en-US" sz="1350" dirty="0"/>
           </a:p>
           <a:p>
             <a:pPr algn="ctr" indent="0" marL="0">
               <a:buNone/>
             </a:pPr>
             <a:r>
-              <a:rPr lang="en-US" sz="1380" dirty="0">
+              <a:rPr lang="en-US" sz="1350" dirty="0">
                 <a:solidFill>
                   <a:srgbClr val="3C4043"/>
                 </a:solidFill>
@@ -9962,7 +9962,7 @@
               </a:rPr>
               <a:t>Pooled Row Tombstone Purge</a:t>
             </a:r>
-            <a:endParaRPr lang="en-US" sz="1380" dirty="0"/>
+            <a:endParaRPr lang="en-US" sz="1350" dirty="0"/>
           </a:p>
         </p:txBody>
       </p:sp>
@@ -10179,7 +10179,7 @@
                 <a:ea typeface="Roboto" pitchFamily="34" charset="-122"/>
                 <a:cs typeface="Roboto" pitchFamily="34" charset="-120"/>
               </a:rPr>
-              <a:t>Workstream 4 Pattern C Timeline  •  Phase 1 SHADOW_SYNC → Phase 2 ATOMIC_CUTOVER (0ms) → Phase 3 DRAIN_AND_VERIFY  •  </a:t>
+              <a:t>Workstream 4 Pattern C State Machine  •  Stage 1 SHADOW_SYNC → Stage 2 ATOMIC_CUTOVER (0ms) → Stage 3 DRAIN_AND_VERIFY  •  </a:t>
             </a:r>
             <a:pPr algn="l" indent="0" marL="0">
               <a:buNone/>

--- a/slides/ws4-pattern-c-hybrid-editable-slides.pptx
+++ b/slides/ws4-pattern-c-hybrid-editable-slides.pptx
@@ -606,9 +606,7 @@
             <a:r>
               <a:rPr lang="en-US" dirty="0"/>
               <a:t>Design considerations — Zero-Downtime Live Tier Migration Protocol (4/4 PASS)
-• Phase 1 (`SHADOW_SYNC`): Provisions the target Enterprise spoke project, Cloud KMS key, and PSC attachment while streaming AlloyDB RLS rows and L1–L5 Memory Bank state to 0ms replication lag.
-• Phase 2 (`ATOMIC_CUTOVER`): Executes a single atomic Firestore transaction flipping the tenant’s route from `pool://` to `psc://`, unlocking the 8,000-token budget and CMEK binding simultaneously.
-• Phase 3 (`DRAIN_AND_VERIFY`): Drains any in-flight pooled turn without interruption and routes the very next message in the same active `session_id` into the dedicated PSC spoke (`0` dropped sessions).</a:t>
+</a:t>
             </a:r>
             <a:endParaRPr lang="en-US" dirty="0"/>
           </a:p>
@@ -1141,11 +1139,11 @@
           <a:p>
             <a:r>
               <a:rPr lang="en-US" dirty="0"/>
-              <a:t>Use cases — Multi-Tier SaaS Serving Both Pooled Standard &amp; Sovereign Enterprise
-• Standard Commercial Tier Profile (RetailStream Baseline): Authenticates via Microsoft Entra ID, runs in the shared Pattern A pool with a 4,000-token thinking cap, and shares an AlloyDB RLS cluster ($42/mo).
-• Regulated Enterprise Tier Profile (FinVault Spoke): Authenticates via Google Workspace, invokes private Agent Alpha with an 8,000-token budget, and mandates a dedicated CMEK-encrypted spoke project ($1,850/mo).
-• Why Maintaining Two Separate Products Fails: Operating disconnected Pooled and Siloed platforms doubles CI/CD maintenance, fragments the URL/API surface, and forces offline downtime when customers upgrade tiers.
-• The Pattern C Solution (Route Isolation, Not Product Duplication): Centralizes identity, WAF, and routing in a shared Hub while dynamically dispatching execution to the shared pool or dedicated PSC spokes.</a:t>
+              <a:t>Use cases — Multi-Tier SaaS Serving Standard Pool &amp; Enterprise Spokes on One Google Cloud Stack
+• Unified SaaS Front Door (`cymbal-hybrid-hub-prod`): Standard and Enterprise customers connect to one public ALB hostname (`agents.cymbal.cloud`), where Cloud Armor, IAP, and the Cloud Run Hybrid Router resolve tier routes in Firestore.
+• Standard Commercial Tier Profile (RetailStream Baseline -&gt; Live Promotion): Starts in the shared Pattern A pool ($42/mo, 4,000-token cap, 120 RPM, AlloyDB RLS) and upgrades live mid-conversation into a dedicated Enterprise PSC spoke (`0` dropped turns).
+• Regulated Enterprise Spoke Profile (FinVault Spoke `10.10.0.50`): Traverses a unidirectional Private Service Connect endpoint into a dedicated VPC-SC &amp; Cloud KMS CMEK spoke project ($1,850/mo, 8,000-token budget, 600 RPM, private Agent Alpha).
+• Unified Hybrid Google Cloud Stack (`4.6` Dual-Provider Terraform): Combines Cloud Armor, IAP OBO/DPoP, Federated Agent Registry, Firestore Route Table, PSC `ServiceAttachment` (`/24` NAT), Datastream CDC, AlloyDB, and BigQuery OTel.</a:t>
             </a:r>
             <a:endParaRPr lang="en-US" dirty="0"/>
           </a:p>
@@ -1233,11 +1231,8 @@
           <a:p>
             <a:r>
               <a:rPr lang="en-US" dirty="0"/>
-              <a:t>Products used — Hub-and-Spoke Control Plane &amp; Private Service Connect (PSC)
-• Central Ingress &amp; Routing Hub (`cymbal-hybrid-hub-prod`): Hosts the Global External ALB, Cloud Armor WAF, IAP OIDC verifier, Cross-Project Agent Registry, and Firestore Tenant Routing Table.
-• Consumer PSC Endpoint in the Hub (`10.10.0.50`): The Hub VPC (`10.10.0.0/20`) binds an internal Private Service Connect forwarding rule directly to each Enterprise tenant’s spoke ServiceAttachment URI.
-• Producer ServiceAttachment in Each Spoke (`ACCEPT_MANUAL`): Each Enterprise spoke project exposes its private Cloud Run / GKE agent runtime via a `/24` PSC NAT subnet (`10.40.240.0/24`) whitelisting only the Hub project.
-• Zero CIDR Overlap &amp; Unidirectional Security: Because PSC performs source NAT at the attachment boundary, all 1,000+ Enterprise spokes can reuse identical `10.40.0.0/20` VPC CIDRs and can never initiate reverse connections into the Hub.</a:t>
+              <a:t>Design alternatives — Cross-Project Connectivity &amp; Live Tier Migration Comparison (Pattern C vs. Legacy)
+</a:t>
             </a:r>
             <a:endParaRPr lang="en-US" dirty="0"/>
           </a:p>
@@ -16828,7 +16823,7 @@
                 <a:ea typeface="Google Sans" pitchFamily="34" charset="-122"/>
                 <a:cs typeface="Google Sans" pitchFamily="34" charset="-120"/>
               </a:rPr>
-              <a:t>Multi-Tier SaaS Serving Both Pooled Standard &amp; Sovereign Enterprise</a:t>
+              <a:t>Multi-Tier SaaS Serving Standard Pool &amp; Enterprise Spokes on One Google Cloud Stack</a:t>
             </a:r>
             <a:endParaRPr lang="en-US" sz="1900" dirty="0"/>
           </a:p>
@@ -17014,7 +17009,7 @@
                 <a:ea typeface="Google Sans" pitchFamily="34" charset="-122"/>
                 <a:cs typeface="Google Sans" pitchFamily="34" charset="-120"/>
               </a:rPr>
-              <a:t>Standard Commercial Tier Profile (RetailStream Baseline)</a:t>
+              <a:t>Unified SaaS Front Door (cymbal-hybrid-hub-prod)</a:t>
             </a:r>
             <a:endParaRPr lang="en-US" sz="1140" dirty="0"/>
           </a:p>
@@ -17073,7 +17068,7 @@
                 <a:ea typeface="Roboto" pitchFamily="34" charset="-122"/>
                 <a:cs typeface="Roboto" pitchFamily="34" charset="-120"/>
               </a:rPr>
-              <a:t>Authenticates via Microsoft Entra ID, runs in the shared Pattern A pool with a 4,000-token thinking cap, and shares an AlloyDB RLS cluster ($42/mo).</a:t>
+              <a:t>Standard and Enterprise customers connect to one public ALB hostname (agents.cymbal.cloud), where Cloud Armor, IAP, and the Cloud Run Hybrid Router resolve tier routes in Firestore.</a:t>
             </a:r>
             <a:endParaRPr lang="en-US" sz="980" dirty="0"/>
           </a:p>
@@ -17159,7 +17154,7 @@
                 <a:ea typeface="Google Sans" pitchFamily="34" charset="-122"/>
                 <a:cs typeface="Google Sans" pitchFamily="34" charset="-120"/>
               </a:rPr>
-              <a:t>Cloud Stack: Route: pool://cymbal-shared-pooled-runtime-v2 • AlloyDB RLS • 90% Prefix Cache
+              <a:t>Cloud Stack: Global ALB • Cloud Armor • IAP STS • Cloud Run Hybrid Router • Firestore Route Table
 </a:t>
             </a:r>
             <a:pPr indent="0" marL="0">
@@ -17174,7 +17169,7 @@
                 <a:ea typeface="Roboto" pitchFamily="34" charset="-122"/>
                 <a:cs typeface="Roboto" pitchFamily="34" charset="-120"/>
               </a:rPr>
-              <a:t>Target &amp; SLA: Tier: STANDARD • 120 RPM • 4,000 Thinking Tokens • $42/mo Unit Cost</a:t>
+              <a:t>Target &amp; SLA: Single SaaS Codebase &amp; URL • Sub-2ms Cryptographic Tier Lookup (pool:// vs. psc://)</a:t>
             </a:r>
             <a:endParaRPr lang="en-US" sz="750" dirty="0"/>
           </a:p>
@@ -17235,7 +17230,7 @@
                 <a:ea typeface="Google Sans" pitchFamily="34" charset="-122"/>
                 <a:cs typeface="Google Sans" pitchFamily="34" charset="-120"/>
               </a:rPr>
-              <a:t>Standard Pooled Tier</a:t>
+              <a:t>1. Unified Hybrid Control Plane</a:t>
             </a:r>
             <a:endParaRPr lang="en-US" sz="750" dirty="0"/>
           </a:p>
@@ -17382,7 +17377,7 @@
                 <a:ea typeface="Google Sans" pitchFamily="34" charset="-122"/>
                 <a:cs typeface="Google Sans" pitchFamily="34" charset="-120"/>
               </a:rPr>
-              <a:t>Regulated Enterprise Tier Profile (FinVault Spoke)</a:t>
+              <a:t>Standard Commercial Tier Profile (RetailStream Baseline -&gt; Live Promotion)</a:t>
             </a:r>
             <a:endParaRPr lang="en-US" sz="1140" dirty="0"/>
           </a:p>
@@ -17441,7 +17436,7 @@
                 <a:ea typeface="Roboto" pitchFamily="34" charset="-122"/>
                 <a:cs typeface="Roboto" pitchFamily="34" charset="-120"/>
               </a:rPr>
-              <a:t>Authenticates via Google Workspace, invokes private Agent Alpha with an 8,000-token budget, and mandates a dedicated CMEK-encrypted spoke project ($1,850/mo).</a:t>
+              <a:t>Starts in the shared Pattern A pool ($42/mo, 4,000-token cap, 120 RPM, AlloyDB RLS) and upgrades live mid-conversation into a dedicated Enterprise PSC spoke (0 dropped turns).</a:t>
             </a:r>
             <a:endParaRPr lang="en-US" sz="980" dirty="0"/>
           </a:p>
@@ -17527,7 +17522,7 @@
                 <a:ea typeface="Google Sans" pitchFamily="34" charset="-122"/>
                 <a:cs typeface="Google Sans" pitchFamily="34" charset="-120"/>
               </a:rPr>
-              <a:t>Cloud Stack: Route: psc://finvault-agent-spoke-psc • Dedicated VPC-SC &amp; CMEK Vault
+              <a:t>Cloud Stack: Route: pool://shared-runtime -&gt; Live 3-Phase Promotion -&gt; psc://10.10.0.51 (RetailStream)
 </a:t>
             </a:r>
             <a:pPr indent="0" marL="0">
@@ -17542,7 +17537,7 @@
                 <a:ea typeface="Roboto" pitchFamily="34" charset="-122"/>
                 <a:cs typeface="Roboto" pitchFamily="34" charset="-120"/>
               </a:rPr>
-              <a:t>Target &amp; SLA: Tier: ENTERPRISE • 600 RPM • 8,000 Thinking Tokens • $1,850/mo Dedicated SLA</a:t>
+              <a:t>Target &amp; SLA: Starts at $42/mo (4k Cap / 120 RPM) • Upgrades Live to Enterprise Spoke with 0 Dropped Chats</a:t>
             </a:r>
             <a:endParaRPr lang="en-US" sz="750" dirty="0"/>
           </a:p>
@@ -17603,7 +17598,7 @@
                 <a:ea typeface="Google Sans" pitchFamily="34" charset="-122"/>
                 <a:cs typeface="Google Sans" pitchFamily="34" charset="-120"/>
               </a:rPr>
-              <a:t>Enterprise Sovereign Spoke</a:t>
+              <a:t>2. Land-and-Expand Tenant (RetailStream)</a:t>
             </a:r>
             <a:endParaRPr lang="en-US" sz="750" dirty="0"/>
           </a:p>
@@ -17750,7 +17745,7 @@
                 <a:ea typeface="Google Sans" pitchFamily="34" charset="-122"/>
                 <a:cs typeface="Google Sans" pitchFamily="34" charset="-120"/>
               </a:rPr>
-              <a:t>Why Maintaining Two Separate Products Fails</a:t>
+              <a:t>Regulated Enterprise Spoke Profile (FinVault Spoke 10.10.0.50)</a:t>
             </a:r>
             <a:endParaRPr lang="en-US" sz="1140" dirty="0"/>
           </a:p>
@@ -17809,7 +17804,7 @@
                 <a:ea typeface="Roboto" pitchFamily="34" charset="-122"/>
                 <a:cs typeface="Roboto" pitchFamily="34" charset="-120"/>
               </a:rPr>
-              <a:t>Operating disconnected Pooled and Siloed platforms doubles CI/CD maintenance, fragments the URL/API surface, and forces offline downtime when customers upgrade tiers.</a:t>
+              <a:t>Traverses a unidirectional Private Service Connect endpoint into a dedicated VPC-SC &amp; Cloud KMS CMEK spoke project ($1,850/mo, 8,000-token budget, 600 RPM, private Agent Alpha).</a:t>
             </a:r>
             <a:endParaRPr lang="en-US" sz="980" dirty="0"/>
           </a:p>
@@ -17895,7 +17890,7 @@
                 <a:ea typeface="Google Sans" pitchFamily="34" charset="-122"/>
                 <a:cs typeface="Google Sans" pitchFamily="34" charset="-120"/>
               </a:rPr>
-              <a:t>Cloud Stack: Single 80% Reusable ADK 2.0 Codebase • Unified Public Domain &amp; OAuth Redirects
+              <a:t>Cloud Stack: Route: psc://10.10.0.50 -&gt; finvault-agent-spoke-psc (ACCEPT_MANUAL) • VPC-SC &amp; CMEK
 </a:t>
             </a:r>
             <a:pPr indent="0" marL="0">
@@ -17910,7 +17905,7 @@
                 <a:ea typeface="Roboto" pitchFamily="34" charset="-122"/>
                 <a:cs typeface="Roboto" pitchFamily="34" charset="-120"/>
               </a:rPr>
-              <a:t>Target &amp; SLA: Eliminates Dual-Product Engineering Overhead &amp; Customer Re-Onboarding Friction</a:t>
+              <a:t>Target &amp; SLA: Tier: ENTERPRISE ($1,850/mo) • 600 RPM • 8,000 Thinking Budget • Reuses 10.40.0.0/20 CIDR</a:t>
             </a:r>
             <a:endParaRPr lang="en-US" sz="750" dirty="0"/>
           </a:p>
@@ -17971,7 +17966,7 @@
                 <a:ea typeface="Google Sans" pitchFamily="34" charset="-122"/>
                 <a:cs typeface="Google Sans" pitchFamily="34" charset="-120"/>
               </a:rPr>
-              <a:t>Zero Product Fragmentation</a:t>
+              <a:t>3. Sovereign Spoke Tenant (FinVault)</a:t>
             </a:r>
             <a:endParaRPr lang="en-US" sz="750" dirty="0"/>
           </a:p>
@@ -18118,7 +18113,7 @@
                 <a:ea typeface="Google Sans" pitchFamily="34" charset="-122"/>
                 <a:cs typeface="Google Sans" pitchFamily="34" charset="-120"/>
               </a:rPr>
-              <a:t>The Pattern C Solution (Route Isolation, Not Product Duplication)</a:t>
+              <a:t>Unified Hybrid Google Cloud Stack (4.6 Dual-Provider Terraform)</a:t>
             </a:r>
             <a:endParaRPr lang="en-US" sz="1140" dirty="0"/>
           </a:p>
@@ -18177,7 +18172,7 @@
                 <a:ea typeface="Roboto" pitchFamily="34" charset="-122"/>
                 <a:cs typeface="Roboto" pitchFamily="34" charset="-120"/>
               </a:rPr>
-              <a:t>Centralizes identity, WAF, and routing in a shared Hub while dynamically dispatching execution to the shared pool or dedicated PSC spokes.</a:t>
+              <a:t>Combines Cloud Armor, IAP OBO/DPoP, Federated Agent Registry, Firestore Route Table, PSC ServiceAttachment (/24 NAT), Datastream CDC, AlloyDB, and BigQuery OTel.</a:t>
             </a:r>
             <a:endParaRPr lang="en-US" sz="980" dirty="0"/>
           </a:p>
@@ -18263,7 +18258,7 @@
                 <a:ea typeface="Google Sans" pitchFamily="34" charset="-122"/>
                 <a:cs typeface="Google Sans" pitchFamily="34" charset="-120"/>
               </a:rPr>
-              <a:t>Cloud Stack: Firestore Per-Tenant Routing Metadata (isolation_pattern, target_endpoint)
+              <a:t>Cloud Stack: Private Service Connect (PSC) • Datastream CDC • AlloyDB RLS/CMEK • 4.6 Terraform Blueprint
 </a:t>
             </a:r>
             <a:pPr indent="0" marL="0">
@@ -18278,7 +18273,7 @@
                 <a:ea typeface="Roboto" pitchFamily="34" charset="-122"/>
                 <a:cs typeface="Roboto" pitchFamily="34" charset="-120"/>
               </a:rPr>
-              <a:t>Target &amp; SLA: Turns Standard -&gt; Enterprise Upsells into an Instant Software-Defined Flip</a:t>
+              <a:t>Target &amp; SLA: 74% Lower Portfolio Cloud TCO (950 Pool + 50 Spokes) • 4/4 Live Migration Tests PASS</a:t>
             </a:r>
             <a:endParaRPr lang="en-US" sz="750" dirty="0"/>
           </a:p>
@@ -18339,7 +18334,7 @@
                 <a:ea typeface="Google Sans" pitchFamily="34" charset="-122"/>
                 <a:cs typeface="Google Sans" pitchFamily="34" charset="-120"/>
               </a:rPr>
-              <a:t>Frictionless Revenue Expansion</a:t>
+              <a:t>4. Unified Pattern C Hybrid Stack</a:t>
             </a:r>
             <a:endParaRPr lang="en-US" sz="750" dirty="0"/>
           </a:p>
@@ -18908,7 +18903,7 @@
                 <a:ea typeface="Google Sans" pitchFamily="34" charset="-122"/>
                 <a:cs typeface="Google Sans" pitchFamily="34" charset="-120"/>
               </a:rPr>
-              <a:t>ACT I • GOOGLE CLOUD REFERENCE PRODUCT STACK &amp; BILL OF MATERIALS</a:t>
+              <a:t>ACT I • ARCHITECTURAL OPTIONS &amp; PATTERN A / B / C DECISION MATRIX</a:t>
             </a:r>
             <a:endParaRPr lang="en-US" sz="1020" dirty="0"/>
           </a:p>
@@ -18974,7 +18969,7 @@
                 <a:ea typeface="Roboto" pitchFamily="34" charset="-122"/>
                 <a:cs typeface="Roboto" pitchFamily="34" charset="-120"/>
               </a:rPr>
-              <a:t>THREE-PILLAR • ARCHITECTURE</a:t>
+              <a:t>COMPARISON-GRID • MATRIX</a:t>
             </a:r>
             <a:endParaRPr lang="en-US" sz="750" dirty="0"/>
           </a:p>
@@ -18988,8 +18983,8 @@
         </p:nvSpPr>
         <p:spPr>
           <a:xfrm>
-            <a:off x="411480" y="658368"/>
-            <a:ext cx="11368735" cy="365760"/>
+            <a:off x="411480" y="640080"/>
+            <a:ext cx="11368735" cy="347472"/>
           </a:xfrm>
           <a:prstGeom prst="rect">
             <a:avLst/>
@@ -19005,7 +19000,7 @@
               <a:buNone/>
             </a:pPr>
             <a:r>
-              <a:rPr lang="en-US" sz="1900" b="1" dirty="0">
+              <a:rPr lang="en-US" sz="1800" b="1" dirty="0">
                 <a:solidFill>
                   <a:srgbClr val="3C4043"/>
                 </a:solidFill>
@@ -19013,9 +19008,9 @@
                 <a:ea typeface="Google Sans" pitchFamily="34" charset="-122"/>
                 <a:cs typeface="Google Sans" pitchFamily="34" charset="-120"/>
               </a:rPr>
-              <a:t>Hub-and-Spoke Control Plane &amp; Private Service Connect (PSC)</a:t>
-            </a:r>
-            <a:endParaRPr lang="en-US" sz="1900" dirty="0"/>
+              <a:t>Cross-Project Connectivity &amp; Live Tier Migration Comparison (Pattern C vs. Legacy)</a:t>
+            </a:r>
+            <a:endParaRPr lang="en-US" sz="1800" dirty="0"/>
           </a:p>
         </p:txBody>
       </p:sp>
@@ -19027,8 +19022,8 @@
         </p:nvSpPr>
         <p:spPr>
           <a:xfrm>
-            <a:off x="411480" y="1024128"/>
-            <a:ext cx="11368735" cy="237744"/>
+            <a:off x="411480" y="987552"/>
+            <a:ext cx="11368735" cy="219456"/>
           </a:xfrm>
           <a:prstGeom prst="rect">
             <a:avLst/>
@@ -19044,7 +19039,7 @@
               <a:buNone/>
             </a:pPr>
             <a:r>
-              <a:rPr lang="en-US" sz="1000" dirty="0">
+              <a:rPr lang="en-US" sz="980" dirty="0">
                 <a:solidFill>
                   <a:srgbClr val="5F6368"/>
                 </a:solidFill>
@@ -19052,26 +19047,1976 @@
                 <a:ea typeface="Roboto" pitchFamily="34" charset="-122"/>
                 <a:cs typeface="Roboto" pitchFamily="34" charset="-120"/>
               </a:rPr>
-              <a:t>Structured Google Cloud reference SKUs, runtime isolation boundaries, and production SLAs.</a:t>
-            </a:r>
-            <a:endParaRPr lang="en-US" sz="1000" dirty="0"/>
-          </a:p>
-        </p:txBody>
-      </p:sp>
-      <p:sp>
-        <p:nvSpPr>
-          <p:cNvPr id="19" name="Shape 17"/>
-          <p:cNvSpPr/>
-          <p:nvPr/>
-        </p:nvSpPr>
-        <p:spPr>
-          <a:xfrm>
-            <a:off x="411480" y="1353312"/>
-            <a:ext cx="5583326" cy="2258568"/>
+              <a:t>Side-by-side Google Cloud Well-Architected trade-off analysis, isolation boundaries, and unit economics.</a:t>
+            </a:r>
+            <a:endParaRPr lang="en-US" sz="980" dirty="0"/>
+          </a:p>
+        </p:txBody>
+      </p:sp>
+      <p:graphicFrame>
+        <p:nvGraphicFramePr>
+          <p:cNvPr id="5" name="Table 0"/>
+          <p:cNvGraphicFramePr>
+            <a:graphicFrameLocks noGrp="1"/>
+          </p:cNvGraphicFramePr>
+          <p:nvPr>
+            <p:extLst>
+              <p:ext uri="{D42A27DB-BD31-4B8C-83A1-F6EECF244321}">
+                <p14:modId xmlns:p14="http://schemas.microsoft.com/office/powerpoint/2010/main" val="1579011935"/>
+              </p:ext>
+            </p:extLst>
+          </p:nvPr>
+        </p:nvGraphicFramePr>
+        <p:xfrm>
+          <a:off x="411480" y="1243584"/>
+          <a:ext cx="11368735" cy="914400"/>
+        </p:xfrm>
+        <a:graphic>
+          <a:graphicData uri="http://schemas.openxmlformats.org/drawingml/2006/table">
+            <a:tbl>
+              <a:tblPr/>
+              <a:tblGrid>
+                <a:gridCol w="2057400"/>
+                <a:gridCol w="2971800"/>
+                <a:gridCol w="3154680"/>
+                <a:gridCol w="3276295"/>
+              </a:tblGrid>
+              <a:tr h="0">
+                <a:tc>
+                  <a:txBody>
+                    <a:bodyPr/>
+                    <a:lstStyle/>
+                    <a:p>
+                      <a:pPr indent="0" marL="0">
+                        <a:buNone/>
+                      </a:pPr>
+                      <a:r>
+                        <a:rPr lang="en-US" sz="850" b="1" dirty="0">
+                          <a:solidFill>
+                            <a:srgbClr val="FFFFFF"/>
+                          </a:solidFill>
+                          <a:latin typeface="Google Sans" pitchFamily="34" charset="0"/>
+                          <a:ea typeface="Google Sans" pitchFamily="34" charset="-122"/>
+                          <a:cs typeface="Google Sans" pitchFamily="34" charset="-120"/>
+                        </a:rPr>
+                        <a:t>Hybrid Connectivity Dimension</a:t>
+                      </a:r>
+                      <a:endParaRPr lang="en-US" sz="850" dirty="0">
+                        <a:latin typeface="Google Sans" charset="0"/>
+                        <a:ea typeface="Google Sans" charset="0"/>
+                        <a:cs typeface="Google Sans" charset="0"/>
+                      </a:endParaRPr>
+                    </a:p>
+                  </a:txBody>
+                  <a:tcPr marL="91440" marR="91440" marT="45720" marB="45720" anchor="ctr">
+                    <a:lnL w="9525" cap="flat" cmpd="sng" algn="ctr">
+                      <a:solidFill>
+                        <a:srgbClr val="DADCE0"/>
+                      </a:solidFill>
+                      <a:prstDash val="solid"/>
+                      <a:round/>
+                      <a:headEnd type="none" w="med" len="med"/>
+                      <a:tailEnd type="none" w="med" len="med"/>
+                    </a:lnL>
+                    <a:lnR w="9525" cap="flat" cmpd="sng" algn="ctr">
+                      <a:solidFill>
+                        <a:srgbClr val="DADCE0"/>
+                      </a:solidFill>
+                      <a:prstDash val="solid"/>
+                      <a:round/>
+                      <a:headEnd type="none" w="med" len="med"/>
+                      <a:tailEnd type="none" w="med" len="med"/>
+                    </a:lnR>
+                    <a:lnT w="9525" cap="flat" cmpd="sng" algn="ctr">
+                      <a:solidFill>
+                        <a:srgbClr val="DADCE0"/>
+                      </a:solidFill>
+                      <a:prstDash val="solid"/>
+                      <a:round/>
+                      <a:headEnd type="none" w="med" len="med"/>
+                      <a:tailEnd type="none" w="med" len="med"/>
+                    </a:lnT>
+                    <a:lnB w="9525" cap="flat" cmpd="sng" algn="ctr">
+                      <a:solidFill>
+                        <a:srgbClr val="DADCE0"/>
+                      </a:solidFill>
+                      <a:prstDash val="solid"/>
+                      <a:round/>
+                      <a:headEnd type="none" w="med" len="med"/>
+                      <a:tailEnd type="none" w="med" len="med"/>
+                    </a:lnB>
+                    <a:solidFill>
+                      <a:srgbClr val="4285F4"/>
+                    </a:solidFill>
+                  </a:tcPr>
+                </a:tc>
+                <a:tc>
+                  <a:txBody>
+                    <a:bodyPr/>
+                    <a:lstStyle/>
+                    <a:p>
+                      <a:pPr indent="0" marL="0">
+                        <a:buNone/>
+                      </a:pPr>
+                      <a:r>
+                        <a:rPr lang="en-US" sz="850" b="1" dirty="0">
+                          <a:solidFill>
+                            <a:srgbClr val="FFFFFF"/>
+                          </a:solidFill>
+                          <a:latin typeface="Google Sans" pitchFamily="34" charset="0"/>
+                          <a:ea typeface="Google Sans" pitchFamily="34" charset="-122"/>
+                          <a:cs typeface="Google Sans" pitchFamily="34" charset="-120"/>
+                        </a:rPr>
+                        <a:t>Dual Disconnected Products (Pool + Silo Fork)</a:t>
+                      </a:r>
+                      <a:endParaRPr lang="en-US" sz="850" dirty="0">
+                        <a:latin typeface="Google Sans" charset="0"/>
+                        <a:ea typeface="Google Sans" charset="0"/>
+                        <a:cs typeface="Google Sans" charset="0"/>
+                      </a:endParaRPr>
+                    </a:p>
+                  </a:txBody>
+                  <a:tcPr marL="91440" marR="91440" marT="45720" marB="45720" anchor="ctr">
+                    <a:lnL w="9525" cap="flat" cmpd="sng" algn="ctr">
+                      <a:solidFill>
+                        <a:srgbClr val="DADCE0"/>
+                      </a:solidFill>
+                      <a:prstDash val="solid"/>
+                      <a:round/>
+                      <a:headEnd type="none" w="med" len="med"/>
+                      <a:tailEnd type="none" w="med" len="med"/>
+                    </a:lnL>
+                    <a:lnR w="9525" cap="flat" cmpd="sng" algn="ctr">
+                      <a:solidFill>
+                        <a:srgbClr val="DADCE0"/>
+                      </a:solidFill>
+                      <a:prstDash val="solid"/>
+                      <a:round/>
+                      <a:headEnd type="none" w="med" len="med"/>
+                      <a:tailEnd type="none" w="med" len="med"/>
+                    </a:lnR>
+                    <a:lnT w="9525" cap="flat" cmpd="sng" algn="ctr">
+                      <a:solidFill>
+                        <a:srgbClr val="DADCE0"/>
+                      </a:solidFill>
+                      <a:prstDash val="solid"/>
+                      <a:round/>
+                      <a:headEnd type="none" w="med" len="med"/>
+                      <a:tailEnd type="none" w="med" len="med"/>
+                    </a:lnT>
+                    <a:lnB w="9525" cap="flat" cmpd="sng" algn="ctr">
+                      <a:solidFill>
+                        <a:srgbClr val="DADCE0"/>
+                      </a:solidFill>
+                      <a:prstDash val="solid"/>
+                      <a:round/>
+                      <a:headEnd type="none" w="med" len="med"/>
+                      <a:tailEnd type="none" w="med" len="med"/>
+                    </a:lnB>
+                    <a:solidFill>
+                      <a:srgbClr val="4285F4"/>
+                    </a:solidFill>
+                  </a:tcPr>
+                </a:tc>
+                <a:tc>
+                  <a:txBody>
+                    <a:bodyPr/>
+                    <a:lstStyle/>
+                    <a:p>
+                      <a:pPr indent="0" marL="0">
+                        <a:buNone/>
+                      </a:pPr>
+                      <a:r>
+                        <a:rPr lang="en-US" sz="850" b="1" dirty="0">
+                          <a:solidFill>
+                            <a:srgbClr val="FFFFFF"/>
+                          </a:solidFill>
+                          <a:latin typeface="Google Sans" pitchFamily="34" charset="0"/>
+                          <a:ea typeface="Google Sans" pitchFamily="34" charset="-122"/>
+                          <a:cs typeface="Google Sans" pitchFamily="34" charset="-120"/>
+                        </a:rPr>
+                        <a:t>Legacy VPC Network Peering Hub-and-Spoke</a:t>
+                      </a:r>
+                      <a:endParaRPr lang="en-US" sz="850" dirty="0">
+                        <a:latin typeface="Google Sans" charset="0"/>
+                        <a:ea typeface="Google Sans" charset="0"/>
+                        <a:cs typeface="Google Sans" charset="0"/>
+                      </a:endParaRPr>
+                    </a:p>
+                  </a:txBody>
+                  <a:tcPr marL="91440" marR="91440" marT="45720" marB="45720" anchor="ctr">
+                    <a:lnL w="9525" cap="flat" cmpd="sng" algn="ctr">
+                      <a:solidFill>
+                        <a:srgbClr val="DADCE0"/>
+                      </a:solidFill>
+                      <a:prstDash val="solid"/>
+                      <a:round/>
+                      <a:headEnd type="none" w="med" len="med"/>
+                      <a:tailEnd type="none" w="med" len="med"/>
+                    </a:lnL>
+                    <a:lnR w="9525" cap="flat" cmpd="sng" algn="ctr">
+                      <a:solidFill>
+                        <a:srgbClr val="DADCE0"/>
+                      </a:solidFill>
+                      <a:prstDash val="solid"/>
+                      <a:round/>
+                      <a:headEnd type="none" w="med" len="med"/>
+                      <a:tailEnd type="none" w="med" len="med"/>
+                    </a:lnR>
+                    <a:lnT w="9525" cap="flat" cmpd="sng" algn="ctr">
+                      <a:solidFill>
+                        <a:srgbClr val="DADCE0"/>
+                      </a:solidFill>
+                      <a:prstDash val="solid"/>
+                      <a:round/>
+                      <a:headEnd type="none" w="med" len="med"/>
+                      <a:tailEnd type="none" w="med" len="med"/>
+                    </a:lnT>
+                    <a:lnB w="9525" cap="flat" cmpd="sng" algn="ctr">
+                      <a:solidFill>
+                        <a:srgbClr val="DADCE0"/>
+                      </a:solidFill>
+                      <a:prstDash val="solid"/>
+                      <a:round/>
+                      <a:headEnd type="none" w="med" len="med"/>
+                      <a:tailEnd type="none" w="med" len="med"/>
+                    </a:lnB>
+                    <a:solidFill>
+                      <a:srgbClr val="4285F4"/>
+                    </a:solidFill>
+                  </a:tcPr>
+                </a:tc>
+                <a:tc>
+                  <a:txBody>
+                    <a:bodyPr/>
+                    <a:lstStyle/>
+                    <a:p>
+                      <a:pPr indent="0" marL="0">
+                        <a:buNone/>
+                      </a:pPr>
+                      <a:r>
+                        <a:rPr lang="en-US" sz="850" b="1" dirty="0">
+                          <a:solidFill>
+                            <a:srgbClr val="FFFFFF"/>
+                          </a:solidFill>
+                          <a:latin typeface="Google Sans" pitchFamily="34" charset="0"/>
+                          <a:ea typeface="Google Sans" pitchFamily="34" charset="-122"/>
+                          <a:cs typeface="Google Sans" pitchFamily="34" charset="-120"/>
+                        </a:rPr>
+                        <a:t>Pattern C: Private Service Connect (PSC) + Live Migrator</a:t>
+                      </a:r>
+                      <a:endParaRPr lang="en-US" sz="850" dirty="0">
+                        <a:latin typeface="Google Sans" charset="0"/>
+                        <a:ea typeface="Google Sans" charset="0"/>
+                        <a:cs typeface="Google Sans" charset="0"/>
+                      </a:endParaRPr>
+                    </a:p>
+                  </a:txBody>
+                  <a:tcPr marL="91440" marR="91440" marT="45720" marB="45720" anchor="ctr">
+                    <a:lnL w="9525" cap="flat" cmpd="sng" algn="ctr">
+                      <a:solidFill>
+                        <a:srgbClr val="DADCE0"/>
+                      </a:solidFill>
+                      <a:prstDash val="solid"/>
+                      <a:round/>
+                      <a:headEnd type="none" w="med" len="med"/>
+                      <a:tailEnd type="none" w="med" len="med"/>
+                    </a:lnL>
+                    <a:lnR w="9525" cap="flat" cmpd="sng" algn="ctr">
+                      <a:solidFill>
+                        <a:srgbClr val="DADCE0"/>
+                      </a:solidFill>
+                      <a:prstDash val="solid"/>
+                      <a:round/>
+                      <a:headEnd type="none" w="med" len="med"/>
+                      <a:tailEnd type="none" w="med" len="med"/>
+                    </a:lnR>
+                    <a:lnT w="9525" cap="flat" cmpd="sng" algn="ctr">
+                      <a:solidFill>
+                        <a:srgbClr val="DADCE0"/>
+                      </a:solidFill>
+                      <a:prstDash val="solid"/>
+                      <a:round/>
+                      <a:headEnd type="none" w="med" len="med"/>
+                      <a:tailEnd type="none" w="med" len="med"/>
+                    </a:lnT>
+                    <a:lnB w="9525" cap="flat" cmpd="sng" algn="ctr">
+                      <a:solidFill>
+                        <a:srgbClr val="DADCE0"/>
+                      </a:solidFill>
+                      <a:prstDash val="solid"/>
+                      <a:round/>
+                      <a:headEnd type="none" w="med" len="med"/>
+                      <a:tailEnd type="none" w="med" len="med"/>
+                    </a:lnB>
+                    <a:solidFill>
+                      <a:srgbClr val="4285F4"/>
+                    </a:solidFill>
+                  </a:tcPr>
+                </a:tc>
+              </a:tr>
+              <a:tr h="0">
+                <a:tc>
+                  <a:txBody>
+                    <a:bodyPr/>
+                    <a:lstStyle/>
+                    <a:p>
+                      <a:pPr indent="0" marL="0">
+                        <a:buNone/>
+                      </a:pPr>
+                      <a:r>
+                        <a:rPr lang="en-US" sz="780" b="1" dirty="0">
+                          <a:solidFill>
+                            <a:srgbClr val="3C4043"/>
+                          </a:solidFill>
+                          <a:latin typeface="Google Sans" pitchFamily="34" charset="0"/>
+                          <a:ea typeface="Google Sans" pitchFamily="34" charset="-122"/>
+                          <a:cs typeface="Google Sans" pitchFamily="34" charset="-120"/>
+                        </a:rPr>
+                        <a:t>SaaS front door &amp; API surface</a:t>
+                      </a:r>
+                      <a:endParaRPr lang="en-US" sz="780" dirty="0">
+                        <a:latin typeface="Google Sans" charset="0"/>
+                        <a:ea typeface="Google Sans" charset="0"/>
+                        <a:cs typeface="Google Sans" charset="0"/>
+                      </a:endParaRPr>
+                    </a:p>
+                  </a:txBody>
+                  <a:tcPr marL="91440" marR="91440" marT="45720" marB="45720" anchor="ctr">
+                    <a:lnL w="9525" cap="flat" cmpd="sng" algn="ctr">
+                      <a:solidFill>
+                        <a:srgbClr val="DADCE0"/>
+                      </a:solidFill>
+                      <a:prstDash val="solid"/>
+                      <a:round/>
+                      <a:headEnd type="none" w="med" len="med"/>
+                      <a:tailEnd type="none" w="med" len="med"/>
+                    </a:lnL>
+                    <a:lnR w="9525" cap="flat" cmpd="sng" algn="ctr">
+                      <a:solidFill>
+                        <a:srgbClr val="DADCE0"/>
+                      </a:solidFill>
+                      <a:prstDash val="solid"/>
+                      <a:round/>
+                      <a:headEnd type="none" w="med" len="med"/>
+                      <a:tailEnd type="none" w="med" len="med"/>
+                    </a:lnR>
+                    <a:lnT w="9525" cap="flat" cmpd="sng" algn="ctr">
+                      <a:solidFill>
+                        <a:srgbClr val="DADCE0"/>
+                      </a:solidFill>
+                      <a:prstDash val="solid"/>
+                      <a:round/>
+                      <a:headEnd type="none" w="med" len="med"/>
+                      <a:tailEnd type="none" w="med" len="med"/>
+                    </a:lnT>
+                    <a:lnB w="9525" cap="flat" cmpd="sng" algn="ctr">
+                      <a:solidFill>
+                        <a:srgbClr val="DADCE0"/>
+                      </a:solidFill>
+                      <a:prstDash val="solid"/>
+                      <a:round/>
+                      <a:headEnd type="none" w="med" len="med"/>
+                      <a:tailEnd type="none" w="med" len="med"/>
+                    </a:lnB>
+                    <a:solidFill>
+                      <a:srgbClr val="FFFFFF"/>
+                    </a:solidFill>
+                  </a:tcPr>
+                </a:tc>
+                <a:tc>
+                  <a:txBody>
+                    <a:bodyPr/>
+                    <a:lstStyle/>
+                    <a:p>
+                      <a:pPr indent="0" marL="0">
+                        <a:buNone/>
+                      </a:pPr>
+                      <a:r>
+                        <a:rPr lang="en-US" sz="760" dirty="0">
+                          <a:solidFill>
+                            <a:srgbClr val="5F6368"/>
+                          </a:solidFill>
+                          <a:latin typeface="Roboto" pitchFamily="34" charset="0"/>
+                          <a:ea typeface="Roboto" pitchFamily="34" charset="-122"/>
+                          <a:cs typeface="Roboto" pitchFamily="34" charset="-120"/>
+                        </a:rPr>
+                        <a:t>Two separate URLs &amp; codebases (app.cymbal.cloud vs. {tenant}.cymbal.cloud)</a:t>
+                      </a:r>
+                      <a:endParaRPr lang="en-US" sz="760" dirty="0">
+                        <a:latin typeface="Roboto" charset="0"/>
+                        <a:ea typeface="Roboto" charset="0"/>
+                        <a:cs typeface="Roboto" charset="0"/>
+                      </a:endParaRPr>
+                    </a:p>
+                  </a:txBody>
+                  <a:tcPr marL="91440" marR="91440" marT="45720" marB="45720" anchor="ctr">
+                    <a:lnL w="9525" cap="flat" cmpd="sng" algn="ctr">
+                      <a:solidFill>
+                        <a:srgbClr val="DADCE0"/>
+                      </a:solidFill>
+                      <a:prstDash val="solid"/>
+                      <a:round/>
+                      <a:headEnd type="none" w="med" len="med"/>
+                      <a:tailEnd type="none" w="med" len="med"/>
+                    </a:lnL>
+                    <a:lnR w="9525" cap="flat" cmpd="sng" algn="ctr">
+                      <a:solidFill>
+                        <a:srgbClr val="DADCE0"/>
+                      </a:solidFill>
+                      <a:prstDash val="solid"/>
+                      <a:round/>
+                      <a:headEnd type="none" w="med" len="med"/>
+                      <a:tailEnd type="none" w="med" len="med"/>
+                    </a:lnR>
+                    <a:lnT w="9525" cap="flat" cmpd="sng" algn="ctr">
+                      <a:solidFill>
+                        <a:srgbClr val="DADCE0"/>
+                      </a:solidFill>
+                      <a:prstDash val="solid"/>
+                      <a:round/>
+                      <a:headEnd type="none" w="med" len="med"/>
+                      <a:tailEnd type="none" w="med" len="med"/>
+                    </a:lnT>
+                    <a:lnB w="9525" cap="flat" cmpd="sng" algn="ctr">
+                      <a:solidFill>
+                        <a:srgbClr val="DADCE0"/>
+                      </a:solidFill>
+                      <a:prstDash val="solid"/>
+                      <a:round/>
+                      <a:headEnd type="none" w="med" len="med"/>
+                      <a:tailEnd type="none" w="med" len="med"/>
+                    </a:lnB>
+                    <a:solidFill>
+                      <a:srgbClr val="FFFFFF"/>
+                    </a:solidFill>
+                  </a:tcPr>
+                </a:tc>
+                <a:tc>
+                  <a:txBody>
+                    <a:bodyPr/>
+                    <a:lstStyle/>
+                    <a:p>
+                      <a:pPr indent="0" marL="0">
+                        <a:buNone/>
+                      </a:pPr>
+                      <a:r>
+                        <a:rPr lang="en-US" sz="760" dirty="0">
+                          <a:solidFill>
+                            <a:srgbClr val="5F6368"/>
+                          </a:solidFill>
+                          <a:latin typeface="Roboto" pitchFamily="34" charset="0"/>
+                          <a:ea typeface="Roboto" pitchFamily="34" charset="-122"/>
+                          <a:cs typeface="Roboto" pitchFamily="34" charset="-120"/>
+                        </a:rPr>
+                        <a:t>Single Hub ALB, but flat Layer-3 routed network across tenant projects</a:t>
+                      </a:r>
+                      <a:endParaRPr lang="en-US" sz="760" dirty="0">
+                        <a:latin typeface="Roboto" charset="0"/>
+                        <a:ea typeface="Roboto" charset="0"/>
+                        <a:cs typeface="Roboto" charset="0"/>
+                      </a:endParaRPr>
+                    </a:p>
+                  </a:txBody>
+                  <a:tcPr marL="91440" marR="91440" marT="45720" marB="45720" anchor="ctr">
+                    <a:lnL w="9525" cap="flat" cmpd="sng" algn="ctr">
+                      <a:solidFill>
+                        <a:srgbClr val="DADCE0"/>
+                      </a:solidFill>
+                      <a:prstDash val="solid"/>
+                      <a:round/>
+                      <a:headEnd type="none" w="med" len="med"/>
+                      <a:tailEnd type="none" w="med" len="med"/>
+                    </a:lnL>
+                    <a:lnR w="9525" cap="flat" cmpd="sng" algn="ctr">
+                      <a:solidFill>
+                        <a:srgbClr val="DADCE0"/>
+                      </a:solidFill>
+                      <a:prstDash val="solid"/>
+                      <a:round/>
+                      <a:headEnd type="none" w="med" len="med"/>
+                      <a:tailEnd type="none" w="med" len="med"/>
+                    </a:lnR>
+                    <a:lnT w="9525" cap="flat" cmpd="sng" algn="ctr">
+                      <a:solidFill>
+                        <a:srgbClr val="DADCE0"/>
+                      </a:solidFill>
+                      <a:prstDash val="solid"/>
+                      <a:round/>
+                      <a:headEnd type="none" w="med" len="med"/>
+                      <a:tailEnd type="none" w="med" len="med"/>
+                    </a:lnT>
+                    <a:lnB w="9525" cap="flat" cmpd="sng" algn="ctr">
+                      <a:solidFill>
+                        <a:srgbClr val="DADCE0"/>
+                      </a:solidFill>
+                      <a:prstDash val="solid"/>
+                      <a:round/>
+                      <a:headEnd type="none" w="med" len="med"/>
+                      <a:tailEnd type="none" w="med" len="med"/>
+                    </a:lnB>
+                    <a:solidFill>
+                      <a:srgbClr val="FFFFFF"/>
+                    </a:solidFill>
+                  </a:tcPr>
+                </a:tc>
+                <a:tc>
+                  <a:txBody>
+                    <a:bodyPr/>
+                    <a:lstStyle/>
+                    <a:p>
+                      <a:pPr indent="0" marL="0">
+                        <a:buNone/>
+                      </a:pPr>
+                      <a:r>
+                        <a:rPr lang="en-US" sz="760" dirty="0">
+                          <a:solidFill>
+                            <a:srgbClr val="5F6368"/>
+                          </a:solidFill>
+                          <a:latin typeface="Roboto" pitchFamily="34" charset="0"/>
+                          <a:ea typeface="Roboto" pitchFamily="34" charset="-122"/>
+                          <a:cs typeface="Roboto" pitchFamily="34" charset="-120"/>
+                        </a:rPr>
+                        <a:t>Single SaaS URL (agents.cymbal.cloud) + Hop 1 Firestore cryptographic tier router</a:t>
+                      </a:r>
+                      <a:endParaRPr lang="en-US" sz="760" dirty="0">
+                        <a:latin typeface="Roboto" charset="0"/>
+                        <a:ea typeface="Roboto" charset="0"/>
+                        <a:cs typeface="Roboto" charset="0"/>
+                      </a:endParaRPr>
+                    </a:p>
+                  </a:txBody>
+                  <a:tcPr marL="91440" marR="91440" marT="45720" marB="45720" anchor="ctr">
+                    <a:lnL w="9525" cap="flat" cmpd="sng" algn="ctr">
+                      <a:solidFill>
+                        <a:srgbClr val="DADCE0"/>
+                      </a:solidFill>
+                      <a:prstDash val="solid"/>
+                      <a:round/>
+                      <a:headEnd type="none" w="med" len="med"/>
+                      <a:tailEnd type="none" w="med" len="med"/>
+                    </a:lnL>
+                    <a:lnR w="9525" cap="flat" cmpd="sng" algn="ctr">
+                      <a:solidFill>
+                        <a:srgbClr val="DADCE0"/>
+                      </a:solidFill>
+                      <a:prstDash val="solid"/>
+                      <a:round/>
+                      <a:headEnd type="none" w="med" len="med"/>
+                      <a:tailEnd type="none" w="med" len="med"/>
+                    </a:lnR>
+                    <a:lnT w="9525" cap="flat" cmpd="sng" algn="ctr">
+                      <a:solidFill>
+                        <a:srgbClr val="DADCE0"/>
+                      </a:solidFill>
+                      <a:prstDash val="solid"/>
+                      <a:round/>
+                      <a:headEnd type="none" w="med" len="med"/>
+                      <a:tailEnd type="none" w="med" len="med"/>
+                    </a:lnT>
+                    <a:lnB w="9525" cap="flat" cmpd="sng" algn="ctr">
+                      <a:solidFill>
+                        <a:srgbClr val="DADCE0"/>
+                      </a:solidFill>
+                      <a:prstDash val="solid"/>
+                      <a:round/>
+                      <a:headEnd type="none" w="med" len="med"/>
+                      <a:tailEnd type="none" w="med" len="med"/>
+                    </a:lnB>
+                    <a:solidFill>
+                      <a:srgbClr val="FFFFFF"/>
+                    </a:solidFill>
+                  </a:tcPr>
+                </a:tc>
+              </a:tr>
+              <a:tr h="0">
+                <a:tc>
+                  <a:txBody>
+                    <a:bodyPr/>
+                    <a:lstStyle/>
+                    <a:p>
+                      <a:pPr indent="0" marL="0">
+                        <a:buNone/>
+                      </a:pPr>
+                      <a:r>
+                        <a:rPr lang="en-US" sz="780" b="1" dirty="0">
+                          <a:solidFill>
+                            <a:srgbClr val="3C4043"/>
+                          </a:solidFill>
+                          <a:latin typeface="Google Sans" pitchFamily="34" charset="0"/>
+                          <a:ea typeface="Google Sans" pitchFamily="34" charset="-122"/>
+                          <a:cs typeface="Google Sans" pitchFamily="34" charset="-120"/>
+                        </a:rPr>
+                        <a:t>Cross-project network topology</a:t>
+                      </a:r>
+                      <a:endParaRPr lang="en-US" sz="780" dirty="0">
+                        <a:latin typeface="Google Sans" charset="0"/>
+                        <a:ea typeface="Google Sans" charset="0"/>
+                        <a:cs typeface="Google Sans" charset="0"/>
+                      </a:endParaRPr>
+                    </a:p>
+                  </a:txBody>
+                  <a:tcPr marL="91440" marR="91440" marT="45720" marB="45720" anchor="ctr">
+                    <a:lnL w="9525" cap="flat" cmpd="sng" algn="ctr">
+                      <a:solidFill>
+                        <a:srgbClr val="DADCE0"/>
+                      </a:solidFill>
+                      <a:prstDash val="solid"/>
+                      <a:round/>
+                      <a:headEnd type="none" w="med" len="med"/>
+                      <a:tailEnd type="none" w="med" len="med"/>
+                    </a:lnL>
+                    <a:lnR w="9525" cap="flat" cmpd="sng" algn="ctr">
+                      <a:solidFill>
+                        <a:srgbClr val="DADCE0"/>
+                      </a:solidFill>
+                      <a:prstDash val="solid"/>
+                      <a:round/>
+                      <a:headEnd type="none" w="med" len="med"/>
+                      <a:tailEnd type="none" w="med" len="med"/>
+                    </a:lnR>
+                    <a:lnT w="9525" cap="flat" cmpd="sng" algn="ctr">
+                      <a:solidFill>
+                        <a:srgbClr val="DADCE0"/>
+                      </a:solidFill>
+                      <a:prstDash val="solid"/>
+                      <a:round/>
+                      <a:headEnd type="none" w="med" len="med"/>
+                      <a:tailEnd type="none" w="med" len="med"/>
+                    </a:lnT>
+                    <a:lnB w="9525" cap="flat" cmpd="sng" algn="ctr">
+                      <a:solidFill>
+                        <a:srgbClr val="DADCE0"/>
+                      </a:solidFill>
+                      <a:prstDash val="solid"/>
+                      <a:round/>
+                      <a:headEnd type="none" w="med" len="med"/>
+                      <a:tailEnd type="none" w="med" len="med"/>
+                    </a:lnB>
+                    <a:solidFill>
+                      <a:srgbClr val="F8F9FA"/>
+                    </a:solidFill>
+                  </a:tcPr>
+                </a:tc>
+                <a:tc>
+                  <a:txBody>
+                    <a:bodyPr/>
+                    <a:lstStyle/>
+                    <a:p>
+                      <a:pPr indent="0" marL="0">
+                        <a:buNone/>
+                      </a:pPr>
+                      <a:r>
+                        <a:rPr lang="en-US" sz="760" dirty="0">
+                          <a:solidFill>
+                            <a:srgbClr val="5F6368"/>
+                          </a:solidFill>
+                          <a:latin typeface="Roboto" pitchFamily="34" charset="0"/>
+                          <a:ea typeface="Roboto" pitchFamily="34" charset="-122"/>
+                          <a:cs typeface="Roboto" pitchFamily="34" charset="-120"/>
+                        </a:rPr>
+                        <a:t>Public internet egress or manual per-customer IPsec VPN tunnels</a:t>
+                      </a:r>
+                      <a:endParaRPr lang="en-US" sz="760" dirty="0">
+                        <a:latin typeface="Roboto" charset="0"/>
+                        <a:ea typeface="Roboto" charset="0"/>
+                        <a:cs typeface="Roboto" charset="0"/>
+                      </a:endParaRPr>
+                    </a:p>
+                  </a:txBody>
+                  <a:tcPr marL="91440" marR="91440" marT="45720" marB="45720" anchor="ctr">
+                    <a:lnL w="9525" cap="flat" cmpd="sng" algn="ctr">
+                      <a:solidFill>
+                        <a:srgbClr val="DADCE0"/>
+                      </a:solidFill>
+                      <a:prstDash val="solid"/>
+                      <a:round/>
+                      <a:headEnd type="none" w="med" len="med"/>
+                      <a:tailEnd type="none" w="med" len="med"/>
+                    </a:lnL>
+                    <a:lnR w="9525" cap="flat" cmpd="sng" algn="ctr">
+                      <a:solidFill>
+                        <a:srgbClr val="DADCE0"/>
+                      </a:solidFill>
+                      <a:prstDash val="solid"/>
+                      <a:round/>
+                      <a:headEnd type="none" w="med" len="med"/>
+                      <a:tailEnd type="none" w="med" len="med"/>
+                    </a:lnR>
+                    <a:lnT w="9525" cap="flat" cmpd="sng" algn="ctr">
+                      <a:solidFill>
+                        <a:srgbClr val="DADCE0"/>
+                      </a:solidFill>
+                      <a:prstDash val="solid"/>
+                      <a:round/>
+                      <a:headEnd type="none" w="med" len="med"/>
+                      <a:tailEnd type="none" w="med" len="med"/>
+                    </a:lnT>
+                    <a:lnB w="9525" cap="flat" cmpd="sng" algn="ctr">
+                      <a:solidFill>
+                        <a:srgbClr val="DADCE0"/>
+                      </a:solidFill>
+                      <a:prstDash val="solid"/>
+                      <a:round/>
+                      <a:headEnd type="none" w="med" len="med"/>
+                      <a:tailEnd type="none" w="med" len="med"/>
+                    </a:lnB>
+                    <a:solidFill>
+                      <a:srgbClr val="F8F9FA"/>
+                    </a:solidFill>
+                  </a:tcPr>
+                </a:tc>
+                <a:tc>
+                  <a:txBody>
+                    <a:bodyPr/>
+                    <a:lstStyle/>
+                    <a:p>
+                      <a:pPr indent="0" marL="0">
+                        <a:buNone/>
+                      </a:pPr>
+                      <a:r>
+                        <a:rPr lang="en-US" sz="760" dirty="0">
+                          <a:solidFill>
+                            <a:srgbClr val="5F6368"/>
+                          </a:solidFill>
+                          <a:latin typeface="Roboto" pitchFamily="34" charset="0"/>
+                          <a:ea typeface="Roboto" pitchFamily="34" charset="-122"/>
+                          <a:cs typeface="Roboto" pitchFamily="34" charset="-120"/>
+                        </a:rPr>
+                        <a:t>Bidirectional VPC Peering (hard 25-peer quota limit per Hub VPC)</a:t>
+                      </a:r>
+                      <a:endParaRPr lang="en-US" sz="760" dirty="0">
+                        <a:latin typeface="Roboto" charset="0"/>
+                        <a:ea typeface="Roboto" charset="0"/>
+                        <a:cs typeface="Roboto" charset="0"/>
+                      </a:endParaRPr>
+                    </a:p>
+                  </a:txBody>
+                  <a:tcPr marL="91440" marR="91440" marT="45720" marB="45720" anchor="ctr">
+                    <a:lnL w="9525" cap="flat" cmpd="sng" algn="ctr">
+                      <a:solidFill>
+                        <a:srgbClr val="DADCE0"/>
+                      </a:solidFill>
+                      <a:prstDash val="solid"/>
+                      <a:round/>
+                      <a:headEnd type="none" w="med" len="med"/>
+                      <a:tailEnd type="none" w="med" len="med"/>
+                    </a:lnL>
+                    <a:lnR w="9525" cap="flat" cmpd="sng" algn="ctr">
+                      <a:solidFill>
+                        <a:srgbClr val="DADCE0"/>
+                      </a:solidFill>
+                      <a:prstDash val="solid"/>
+                      <a:round/>
+                      <a:headEnd type="none" w="med" len="med"/>
+                      <a:tailEnd type="none" w="med" len="med"/>
+                    </a:lnR>
+                    <a:lnT w="9525" cap="flat" cmpd="sng" algn="ctr">
+                      <a:solidFill>
+                        <a:srgbClr val="DADCE0"/>
+                      </a:solidFill>
+                      <a:prstDash val="solid"/>
+                      <a:round/>
+                      <a:headEnd type="none" w="med" len="med"/>
+                      <a:tailEnd type="none" w="med" len="med"/>
+                    </a:lnT>
+                    <a:lnB w="9525" cap="flat" cmpd="sng" algn="ctr">
+                      <a:solidFill>
+                        <a:srgbClr val="DADCE0"/>
+                      </a:solidFill>
+                      <a:prstDash val="solid"/>
+                      <a:round/>
+                      <a:headEnd type="none" w="med" len="med"/>
+                      <a:tailEnd type="none" w="med" len="med"/>
+                    </a:lnB>
+                    <a:solidFill>
+                      <a:srgbClr val="F8F9FA"/>
+                    </a:solidFill>
+                  </a:tcPr>
+                </a:tc>
+                <a:tc>
+                  <a:txBody>
+                    <a:bodyPr/>
+                    <a:lstStyle/>
+                    <a:p>
+                      <a:pPr indent="0" marL="0">
+                        <a:buNone/>
+                      </a:pPr>
+                      <a:r>
+                        <a:rPr lang="en-US" sz="760" dirty="0">
+                          <a:solidFill>
+                            <a:srgbClr val="5F6368"/>
+                          </a:solidFill>
+                          <a:latin typeface="Roboto" pitchFamily="34" charset="0"/>
+                          <a:ea typeface="Roboto" pitchFamily="34" charset="-122"/>
+                          <a:cs typeface="Roboto" pitchFamily="34" charset="-120"/>
+                        </a:rPr>
+                        <a:t>Unidirectional PSC Consumer (10.10.0.50) -&gt; Spoke ServiceAttachment (1,000+ spokes)</a:t>
+                      </a:r>
+                      <a:endParaRPr lang="en-US" sz="760" dirty="0">
+                        <a:latin typeface="Roboto" charset="0"/>
+                        <a:ea typeface="Roboto" charset="0"/>
+                        <a:cs typeface="Roboto" charset="0"/>
+                      </a:endParaRPr>
+                    </a:p>
+                  </a:txBody>
+                  <a:tcPr marL="91440" marR="91440" marT="45720" marB="45720" anchor="ctr">
+                    <a:lnL w="9525" cap="flat" cmpd="sng" algn="ctr">
+                      <a:solidFill>
+                        <a:srgbClr val="DADCE0"/>
+                      </a:solidFill>
+                      <a:prstDash val="solid"/>
+                      <a:round/>
+                      <a:headEnd type="none" w="med" len="med"/>
+                      <a:tailEnd type="none" w="med" len="med"/>
+                    </a:lnL>
+                    <a:lnR w="9525" cap="flat" cmpd="sng" algn="ctr">
+                      <a:solidFill>
+                        <a:srgbClr val="DADCE0"/>
+                      </a:solidFill>
+                      <a:prstDash val="solid"/>
+                      <a:round/>
+                      <a:headEnd type="none" w="med" len="med"/>
+                      <a:tailEnd type="none" w="med" len="med"/>
+                    </a:lnR>
+                    <a:lnT w="9525" cap="flat" cmpd="sng" algn="ctr">
+                      <a:solidFill>
+                        <a:srgbClr val="DADCE0"/>
+                      </a:solidFill>
+                      <a:prstDash val="solid"/>
+                      <a:round/>
+                      <a:headEnd type="none" w="med" len="med"/>
+                      <a:tailEnd type="none" w="med" len="med"/>
+                    </a:lnT>
+                    <a:lnB w="9525" cap="flat" cmpd="sng" algn="ctr">
+                      <a:solidFill>
+                        <a:srgbClr val="DADCE0"/>
+                      </a:solidFill>
+                      <a:prstDash val="solid"/>
+                      <a:round/>
+                      <a:headEnd type="none" w="med" len="med"/>
+                      <a:tailEnd type="none" w="med" len="med"/>
+                    </a:lnB>
+                    <a:solidFill>
+                      <a:srgbClr val="F8F9FA"/>
+                    </a:solidFill>
+                  </a:tcPr>
+                </a:tc>
+              </a:tr>
+              <a:tr h="0">
+                <a:tc>
+                  <a:txBody>
+                    <a:bodyPr/>
+                    <a:lstStyle/>
+                    <a:p>
+                      <a:pPr indent="0" marL="0">
+                        <a:buNone/>
+                      </a:pPr>
+                      <a:r>
+                        <a:rPr lang="en-US" sz="780" b="1" dirty="0">
+                          <a:solidFill>
+                            <a:srgbClr val="3C4043"/>
+                          </a:solidFill>
+                          <a:latin typeface="Google Sans" pitchFamily="34" charset="0"/>
+                          <a:ea typeface="Google Sans" pitchFamily="34" charset="-122"/>
+                          <a:cs typeface="Google Sans" pitchFamily="34" charset="-120"/>
+                        </a:rPr>
+                        <a:t>IP address &amp; CIDR management</a:t>
+                      </a:r>
+                      <a:endParaRPr lang="en-US" sz="780" dirty="0">
+                        <a:latin typeface="Google Sans" charset="0"/>
+                        <a:ea typeface="Google Sans" charset="0"/>
+                        <a:cs typeface="Google Sans" charset="0"/>
+                      </a:endParaRPr>
+                    </a:p>
+                  </a:txBody>
+                  <a:tcPr marL="91440" marR="91440" marT="45720" marB="45720" anchor="ctr">
+                    <a:lnL w="9525" cap="flat" cmpd="sng" algn="ctr">
+                      <a:solidFill>
+                        <a:srgbClr val="DADCE0"/>
+                      </a:solidFill>
+                      <a:prstDash val="solid"/>
+                      <a:round/>
+                      <a:headEnd type="none" w="med" len="med"/>
+                      <a:tailEnd type="none" w="med" len="med"/>
+                    </a:lnL>
+                    <a:lnR w="9525" cap="flat" cmpd="sng" algn="ctr">
+                      <a:solidFill>
+                        <a:srgbClr val="DADCE0"/>
+                      </a:solidFill>
+                      <a:prstDash val="solid"/>
+                      <a:round/>
+                      <a:headEnd type="none" w="med" len="med"/>
+                      <a:tailEnd type="none" w="med" len="med"/>
+                    </a:lnR>
+                    <a:lnT w="9525" cap="flat" cmpd="sng" algn="ctr">
+                      <a:solidFill>
+                        <a:srgbClr val="DADCE0"/>
+                      </a:solidFill>
+                      <a:prstDash val="solid"/>
+                      <a:round/>
+                      <a:headEnd type="none" w="med" len="med"/>
+                      <a:tailEnd type="none" w="med" len="med"/>
+                    </a:lnT>
+                    <a:lnB w="9525" cap="flat" cmpd="sng" algn="ctr">
+                      <a:solidFill>
+                        <a:srgbClr val="DADCE0"/>
+                      </a:solidFill>
+                      <a:prstDash val="solid"/>
+                      <a:round/>
+                      <a:headEnd type="none" w="med" len="med"/>
+                      <a:tailEnd type="none" w="med" len="med"/>
+                    </a:lnB>
+                    <a:solidFill>
+                      <a:srgbClr val="FFFFFF"/>
+                    </a:solidFill>
+                  </a:tcPr>
+                </a:tc>
+                <a:tc>
+                  <a:txBody>
+                    <a:bodyPr/>
+                    <a:lstStyle/>
+                    <a:p>
+                      <a:pPr indent="0" marL="0">
+                        <a:buNone/>
+                      </a:pPr>
+                      <a:r>
+                        <a:rPr lang="en-US" sz="760" dirty="0">
+                          <a:solidFill>
+                            <a:srgbClr val="5F6368"/>
+                          </a:solidFill>
+                          <a:latin typeface="Roboto" pitchFamily="34" charset="0"/>
+                          <a:ea typeface="Roboto" pitchFamily="34" charset="-122"/>
+                          <a:cs typeface="Roboto" pitchFamily="34" charset="-120"/>
+                        </a:rPr>
+                        <a:t>Manual non-overlapping CIDR spreadsheet per enterprise customer</a:t>
+                      </a:r>
+                      <a:endParaRPr lang="en-US" sz="760" dirty="0">
+                        <a:latin typeface="Roboto" charset="0"/>
+                        <a:ea typeface="Roboto" charset="0"/>
+                        <a:cs typeface="Roboto" charset="0"/>
+                      </a:endParaRPr>
+                    </a:p>
+                  </a:txBody>
+                  <a:tcPr marL="91440" marR="91440" marT="45720" marB="45720" anchor="ctr">
+                    <a:lnL w="9525" cap="flat" cmpd="sng" algn="ctr">
+                      <a:solidFill>
+                        <a:srgbClr val="DADCE0"/>
+                      </a:solidFill>
+                      <a:prstDash val="solid"/>
+                      <a:round/>
+                      <a:headEnd type="none" w="med" len="med"/>
+                      <a:tailEnd type="none" w="med" len="med"/>
+                    </a:lnL>
+                    <a:lnR w="9525" cap="flat" cmpd="sng" algn="ctr">
+                      <a:solidFill>
+                        <a:srgbClr val="DADCE0"/>
+                      </a:solidFill>
+                      <a:prstDash val="solid"/>
+                      <a:round/>
+                      <a:headEnd type="none" w="med" len="med"/>
+                      <a:tailEnd type="none" w="med" len="med"/>
+                    </a:lnR>
+                    <a:lnT w="9525" cap="flat" cmpd="sng" algn="ctr">
+                      <a:solidFill>
+                        <a:srgbClr val="DADCE0"/>
+                      </a:solidFill>
+                      <a:prstDash val="solid"/>
+                      <a:round/>
+                      <a:headEnd type="none" w="med" len="med"/>
+                      <a:tailEnd type="none" w="med" len="med"/>
+                    </a:lnT>
+                    <a:lnB w="9525" cap="flat" cmpd="sng" algn="ctr">
+                      <a:solidFill>
+                        <a:srgbClr val="DADCE0"/>
+                      </a:solidFill>
+                      <a:prstDash val="solid"/>
+                      <a:round/>
+                      <a:headEnd type="none" w="med" len="med"/>
+                      <a:tailEnd type="none" w="med" len="med"/>
+                    </a:lnB>
+                    <a:solidFill>
+                      <a:srgbClr val="FFFFFF"/>
+                    </a:solidFill>
+                  </a:tcPr>
+                </a:tc>
+                <a:tc>
+                  <a:txBody>
+                    <a:bodyPr/>
+                    <a:lstStyle/>
+                    <a:p>
+                      <a:pPr indent="0" marL="0">
+                        <a:buNone/>
+                      </a:pPr>
+                      <a:r>
+                        <a:rPr lang="en-US" sz="760" dirty="0">
+                          <a:solidFill>
+                            <a:srgbClr val="5F6368"/>
+                          </a:solidFill>
+                          <a:latin typeface="Roboto" pitchFamily="34" charset="0"/>
+                          <a:ea typeface="Roboto" pitchFamily="34" charset="-122"/>
+                          <a:cs typeface="Roboto" pitchFamily="34" charset="-120"/>
+                        </a:rPr>
+                        <a:t>Every spoke requires globally unique RFC 1918 subnets (CIDR exhaustion)</a:t>
+                      </a:r>
+                      <a:endParaRPr lang="en-US" sz="760" dirty="0">
+                        <a:latin typeface="Roboto" charset="0"/>
+                        <a:ea typeface="Roboto" charset="0"/>
+                        <a:cs typeface="Roboto" charset="0"/>
+                      </a:endParaRPr>
+                    </a:p>
+                  </a:txBody>
+                  <a:tcPr marL="91440" marR="91440" marT="45720" marB="45720" anchor="ctr">
+                    <a:lnL w="9525" cap="flat" cmpd="sng" algn="ctr">
+                      <a:solidFill>
+                        <a:srgbClr val="DADCE0"/>
+                      </a:solidFill>
+                      <a:prstDash val="solid"/>
+                      <a:round/>
+                      <a:headEnd type="none" w="med" len="med"/>
+                      <a:tailEnd type="none" w="med" len="med"/>
+                    </a:lnL>
+                    <a:lnR w="9525" cap="flat" cmpd="sng" algn="ctr">
+                      <a:solidFill>
+                        <a:srgbClr val="DADCE0"/>
+                      </a:solidFill>
+                      <a:prstDash val="solid"/>
+                      <a:round/>
+                      <a:headEnd type="none" w="med" len="med"/>
+                      <a:tailEnd type="none" w="med" len="med"/>
+                    </a:lnR>
+                    <a:lnT w="9525" cap="flat" cmpd="sng" algn="ctr">
+                      <a:solidFill>
+                        <a:srgbClr val="DADCE0"/>
+                      </a:solidFill>
+                      <a:prstDash val="solid"/>
+                      <a:round/>
+                      <a:headEnd type="none" w="med" len="med"/>
+                      <a:tailEnd type="none" w="med" len="med"/>
+                    </a:lnT>
+                    <a:lnB w="9525" cap="flat" cmpd="sng" algn="ctr">
+                      <a:solidFill>
+                        <a:srgbClr val="DADCE0"/>
+                      </a:solidFill>
+                      <a:prstDash val="solid"/>
+                      <a:round/>
+                      <a:headEnd type="none" w="med" len="med"/>
+                      <a:tailEnd type="none" w="med" len="med"/>
+                    </a:lnB>
+                    <a:solidFill>
+                      <a:srgbClr val="FFFFFF"/>
+                    </a:solidFill>
+                  </a:tcPr>
+                </a:tc>
+                <a:tc>
+                  <a:txBody>
+                    <a:bodyPr/>
+                    <a:lstStyle/>
+                    <a:p>
+                      <a:pPr indent="0" marL="0">
+                        <a:buNone/>
+                      </a:pPr>
+                      <a:r>
+                        <a:rPr lang="en-US" sz="760" dirty="0">
+                          <a:solidFill>
+                            <a:srgbClr val="5F6368"/>
+                          </a:solidFill>
+                          <a:latin typeface="Roboto" pitchFamily="34" charset="0"/>
+                          <a:ea typeface="Roboto" pitchFamily="34" charset="-122"/>
+                          <a:cs typeface="Roboto" pitchFamily="34" charset="-120"/>
+                        </a:rPr>
+                        <a:t>Zero CIDR overlap: /24 PSC NAT allows all spokes to reuse identical 10.40.0.0/20</a:t>
+                      </a:r>
+                      <a:endParaRPr lang="en-US" sz="760" dirty="0">
+                        <a:latin typeface="Roboto" charset="0"/>
+                        <a:ea typeface="Roboto" charset="0"/>
+                        <a:cs typeface="Roboto" charset="0"/>
+                      </a:endParaRPr>
+                    </a:p>
+                  </a:txBody>
+                  <a:tcPr marL="91440" marR="91440" marT="45720" marB="45720" anchor="ctr">
+                    <a:lnL w="9525" cap="flat" cmpd="sng" algn="ctr">
+                      <a:solidFill>
+                        <a:srgbClr val="DADCE0"/>
+                      </a:solidFill>
+                      <a:prstDash val="solid"/>
+                      <a:round/>
+                      <a:headEnd type="none" w="med" len="med"/>
+                      <a:tailEnd type="none" w="med" len="med"/>
+                    </a:lnL>
+                    <a:lnR w="9525" cap="flat" cmpd="sng" algn="ctr">
+                      <a:solidFill>
+                        <a:srgbClr val="DADCE0"/>
+                      </a:solidFill>
+                      <a:prstDash val="solid"/>
+                      <a:round/>
+                      <a:headEnd type="none" w="med" len="med"/>
+                      <a:tailEnd type="none" w="med" len="med"/>
+                    </a:lnR>
+                    <a:lnT w="9525" cap="flat" cmpd="sng" algn="ctr">
+                      <a:solidFill>
+                        <a:srgbClr val="DADCE0"/>
+                      </a:solidFill>
+                      <a:prstDash val="solid"/>
+                      <a:round/>
+                      <a:headEnd type="none" w="med" len="med"/>
+                      <a:tailEnd type="none" w="med" len="med"/>
+                    </a:lnT>
+                    <a:lnB w="9525" cap="flat" cmpd="sng" algn="ctr">
+                      <a:solidFill>
+                        <a:srgbClr val="DADCE0"/>
+                      </a:solidFill>
+                      <a:prstDash val="solid"/>
+                      <a:round/>
+                      <a:headEnd type="none" w="med" len="med"/>
+                      <a:tailEnd type="none" w="med" len="med"/>
+                    </a:lnB>
+                    <a:solidFill>
+                      <a:srgbClr val="FFFFFF"/>
+                    </a:solidFill>
+                  </a:tcPr>
+                </a:tc>
+              </a:tr>
+              <a:tr h="0">
+                <a:tc>
+                  <a:txBody>
+                    <a:bodyPr/>
+                    <a:lstStyle/>
+                    <a:p>
+                      <a:pPr indent="0" marL="0">
+                        <a:buNone/>
+                      </a:pPr>
+                      <a:r>
+                        <a:rPr lang="en-US" sz="780" b="1" dirty="0">
+                          <a:solidFill>
+                            <a:srgbClr val="3C4043"/>
+                          </a:solidFill>
+                          <a:latin typeface="Google Sans" pitchFamily="34" charset="0"/>
+                          <a:ea typeface="Google Sans" pitchFamily="34" charset="-122"/>
+                          <a:cs typeface="Google Sans" pitchFamily="34" charset="-120"/>
+                        </a:rPr>
+                        <a:t>Lateral movement blast radius</a:t>
+                      </a:r>
+                      <a:endParaRPr lang="en-US" sz="780" dirty="0">
+                        <a:latin typeface="Google Sans" charset="0"/>
+                        <a:ea typeface="Google Sans" charset="0"/>
+                        <a:cs typeface="Google Sans" charset="0"/>
+                      </a:endParaRPr>
+                    </a:p>
+                  </a:txBody>
+                  <a:tcPr marL="91440" marR="91440" marT="45720" marB="45720" anchor="ctr">
+                    <a:lnL w="9525" cap="flat" cmpd="sng" algn="ctr">
+                      <a:solidFill>
+                        <a:srgbClr val="DADCE0"/>
+                      </a:solidFill>
+                      <a:prstDash val="solid"/>
+                      <a:round/>
+                      <a:headEnd type="none" w="med" len="med"/>
+                      <a:tailEnd type="none" w="med" len="med"/>
+                    </a:lnL>
+                    <a:lnR w="9525" cap="flat" cmpd="sng" algn="ctr">
+                      <a:solidFill>
+                        <a:srgbClr val="DADCE0"/>
+                      </a:solidFill>
+                      <a:prstDash val="solid"/>
+                      <a:round/>
+                      <a:headEnd type="none" w="med" len="med"/>
+                      <a:tailEnd type="none" w="med" len="med"/>
+                    </a:lnR>
+                    <a:lnT w="9525" cap="flat" cmpd="sng" algn="ctr">
+                      <a:solidFill>
+                        <a:srgbClr val="DADCE0"/>
+                      </a:solidFill>
+                      <a:prstDash val="solid"/>
+                      <a:round/>
+                      <a:headEnd type="none" w="med" len="med"/>
+                      <a:tailEnd type="none" w="med" len="med"/>
+                    </a:lnT>
+                    <a:lnB w="9525" cap="flat" cmpd="sng" algn="ctr">
+                      <a:solidFill>
+                        <a:srgbClr val="DADCE0"/>
+                      </a:solidFill>
+                      <a:prstDash val="solid"/>
+                      <a:round/>
+                      <a:headEnd type="none" w="med" len="med"/>
+                      <a:tailEnd type="none" w="med" len="med"/>
+                    </a:lnB>
+                    <a:solidFill>
+                      <a:srgbClr val="F8F9FA"/>
+                    </a:solidFill>
+                  </a:tcPr>
+                </a:tc>
+                <a:tc>
+                  <a:txBody>
+                    <a:bodyPr/>
+                    <a:lstStyle/>
+                    <a:p>
+                      <a:pPr indent="0" marL="0">
+                        <a:buNone/>
+                      </a:pPr>
+                      <a:r>
+                        <a:rPr lang="en-US" sz="760" dirty="0">
+                          <a:solidFill>
+                            <a:srgbClr val="5F6368"/>
+                          </a:solidFill>
+                          <a:latin typeface="Roboto" pitchFamily="34" charset="0"/>
+                          <a:ea typeface="Roboto" pitchFamily="34" charset="-122"/>
+                          <a:cs typeface="Roboto" pitchFamily="34" charset="-120"/>
+                        </a:rPr>
+                        <a:t>Compromised shared control plane can reach external endpoints</a:t>
+                      </a:r>
+                      <a:endParaRPr lang="en-US" sz="760" dirty="0">
+                        <a:latin typeface="Roboto" charset="0"/>
+                        <a:ea typeface="Roboto" charset="0"/>
+                        <a:cs typeface="Roboto" charset="0"/>
+                      </a:endParaRPr>
+                    </a:p>
+                  </a:txBody>
+                  <a:tcPr marL="91440" marR="91440" marT="45720" marB="45720" anchor="ctr">
+                    <a:lnL w="9525" cap="flat" cmpd="sng" algn="ctr">
+                      <a:solidFill>
+                        <a:srgbClr val="DADCE0"/>
+                      </a:solidFill>
+                      <a:prstDash val="solid"/>
+                      <a:round/>
+                      <a:headEnd type="none" w="med" len="med"/>
+                      <a:tailEnd type="none" w="med" len="med"/>
+                    </a:lnL>
+                    <a:lnR w="9525" cap="flat" cmpd="sng" algn="ctr">
+                      <a:solidFill>
+                        <a:srgbClr val="DADCE0"/>
+                      </a:solidFill>
+                      <a:prstDash val="solid"/>
+                      <a:round/>
+                      <a:headEnd type="none" w="med" len="med"/>
+                      <a:tailEnd type="none" w="med" len="med"/>
+                    </a:lnR>
+                    <a:lnT w="9525" cap="flat" cmpd="sng" algn="ctr">
+                      <a:solidFill>
+                        <a:srgbClr val="DADCE0"/>
+                      </a:solidFill>
+                      <a:prstDash val="solid"/>
+                      <a:round/>
+                      <a:headEnd type="none" w="med" len="med"/>
+                      <a:tailEnd type="none" w="med" len="med"/>
+                    </a:lnT>
+                    <a:lnB w="9525" cap="flat" cmpd="sng" algn="ctr">
+                      <a:solidFill>
+                        <a:srgbClr val="DADCE0"/>
+                      </a:solidFill>
+                      <a:prstDash val="solid"/>
+                      <a:round/>
+                      <a:headEnd type="none" w="med" len="med"/>
+                      <a:tailEnd type="none" w="med" len="med"/>
+                    </a:lnB>
+                    <a:solidFill>
+                      <a:srgbClr val="F8F9FA"/>
+                    </a:solidFill>
+                  </a:tcPr>
+                </a:tc>
+                <a:tc>
+                  <a:txBody>
+                    <a:bodyPr/>
+                    <a:lstStyle/>
+                    <a:p>
+                      <a:pPr indent="0" marL="0">
+                        <a:buNone/>
+                      </a:pPr>
+                      <a:r>
+                        <a:rPr lang="en-US" sz="760" dirty="0">
+                          <a:solidFill>
+                            <a:srgbClr val="5F6368"/>
+                          </a:solidFill>
+                          <a:latin typeface="Roboto" pitchFamily="34" charset="0"/>
+                          <a:ea typeface="Roboto" pitchFamily="34" charset="-122"/>
+                          <a:cs typeface="Roboto" pitchFamily="34" charset="-120"/>
+                        </a:rPr>
+                        <a:t>Bidirectional L3 routes allow spoke-to-hub packet initiation if spoke is breached</a:t>
+                      </a:r>
+                      <a:endParaRPr lang="en-US" sz="760" dirty="0">
+                        <a:latin typeface="Roboto" charset="0"/>
+                        <a:ea typeface="Roboto" charset="0"/>
+                        <a:cs typeface="Roboto" charset="0"/>
+                      </a:endParaRPr>
+                    </a:p>
+                  </a:txBody>
+                  <a:tcPr marL="91440" marR="91440" marT="45720" marB="45720" anchor="ctr">
+                    <a:lnL w="9525" cap="flat" cmpd="sng" algn="ctr">
+                      <a:solidFill>
+                        <a:srgbClr val="DADCE0"/>
+                      </a:solidFill>
+                      <a:prstDash val="solid"/>
+                      <a:round/>
+                      <a:headEnd type="none" w="med" len="med"/>
+                      <a:tailEnd type="none" w="med" len="med"/>
+                    </a:lnL>
+                    <a:lnR w="9525" cap="flat" cmpd="sng" algn="ctr">
+                      <a:solidFill>
+                        <a:srgbClr val="DADCE0"/>
+                      </a:solidFill>
+                      <a:prstDash val="solid"/>
+                      <a:round/>
+                      <a:headEnd type="none" w="med" len="med"/>
+                      <a:tailEnd type="none" w="med" len="med"/>
+                    </a:lnR>
+                    <a:lnT w="9525" cap="flat" cmpd="sng" algn="ctr">
+                      <a:solidFill>
+                        <a:srgbClr val="DADCE0"/>
+                      </a:solidFill>
+                      <a:prstDash val="solid"/>
+                      <a:round/>
+                      <a:headEnd type="none" w="med" len="med"/>
+                      <a:tailEnd type="none" w="med" len="med"/>
+                    </a:lnT>
+                    <a:lnB w="9525" cap="flat" cmpd="sng" algn="ctr">
+                      <a:solidFill>
+                        <a:srgbClr val="DADCE0"/>
+                      </a:solidFill>
+                      <a:prstDash val="solid"/>
+                      <a:round/>
+                      <a:headEnd type="none" w="med" len="med"/>
+                      <a:tailEnd type="none" w="med" len="med"/>
+                    </a:lnB>
+                    <a:solidFill>
+                      <a:srgbClr val="F8F9FA"/>
+                    </a:solidFill>
+                  </a:tcPr>
+                </a:tc>
+                <a:tc>
+                  <a:txBody>
+                    <a:bodyPr/>
+                    <a:lstStyle/>
+                    <a:p>
+                      <a:pPr indent="0" marL="0">
+                        <a:buNone/>
+                      </a:pPr>
+                      <a:r>
+                        <a:rPr lang="en-US" sz="760" dirty="0">
+                          <a:solidFill>
+                            <a:srgbClr val="5F6368"/>
+                          </a:solidFill>
+                          <a:latin typeface="Roboto" pitchFamily="34" charset="0"/>
+                          <a:ea typeface="Roboto" pitchFamily="34" charset="-122"/>
+                          <a:cs typeface="Roboto" pitchFamily="34" charset="-120"/>
+                        </a:rPr>
+                        <a:t>Strictly unidirectional Hub -&gt; Spoke NAT (ACCEPT_MANUAL, hub project allowlist)</a:t>
+                      </a:r>
+                      <a:endParaRPr lang="en-US" sz="760" dirty="0">
+                        <a:latin typeface="Roboto" charset="0"/>
+                        <a:ea typeface="Roboto" charset="0"/>
+                        <a:cs typeface="Roboto" charset="0"/>
+                      </a:endParaRPr>
+                    </a:p>
+                  </a:txBody>
+                  <a:tcPr marL="91440" marR="91440" marT="45720" marB="45720" anchor="ctr">
+                    <a:lnL w="9525" cap="flat" cmpd="sng" algn="ctr">
+                      <a:solidFill>
+                        <a:srgbClr val="DADCE0"/>
+                      </a:solidFill>
+                      <a:prstDash val="solid"/>
+                      <a:round/>
+                      <a:headEnd type="none" w="med" len="med"/>
+                      <a:tailEnd type="none" w="med" len="med"/>
+                    </a:lnL>
+                    <a:lnR w="9525" cap="flat" cmpd="sng" algn="ctr">
+                      <a:solidFill>
+                        <a:srgbClr val="DADCE0"/>
+                      </a:solidFill>
+                      <a:prstDash val="solid"/>
+                      <a:round/>
+                      <a:headEnd type="none" w="med" len="med"/>
+                      <a:tailEnd type="none" w="med" len="med"/>
+                    </a:lnR>
+                    <a:lnT w="9525" cap="flat" cmpd="sng" algn="ctr">
+                      <a:solidFill>
+                        <a:srgbClr val="DADCE0"/>
+                      </a:solidFill>
+                      <a:prstDash val="solid"/>
+                      <a:round/>
+                      <a:headEnd type="none" w="med" len="med"/>
+                      <a:tailEnd type="none" w="med" len="med"/>
+                    </a:lnT>
+                    <a:lnB w="9525" cap="flat" cmpd="sng" algn="ctr">
+                      <a:solidFill>
+                        <a:srgbClr val="DADCE0"/>
+                      </a:solidFill>
+                      <a:prstDash val="solid"/>
+                      <a:round/>
+                      <a:headEnd type="none" w="med" len="med"/>
+                      <a:tailEnd type="none" w="med" len="med"/>
+                    </a:lnB>
+                    <a:solidFill>
+                      <a:srgbClr val="F8F9FA"/>
+                    </a:solidFill>
+                  </a:tcPr>
+                </a:tc>
+              </a:tr>
+              <a:tr h="0">
+                <a:tc>
+                  <a:txBody>
+                    <a:bodyPr/>
+                    <a:lstStyle/>
+                    <a:p>
+                      <a:pPr indent="0" marL="0">
+                        <a:buNone/>
+                      </a:pPr>
+                      <a:r>
+                        <a:rPr lang="en-US" sz="780" b="1" dirty="0">
+                          <a:solidFill>
+                            <a:srgbClr val="3C4043"/>
+                          </a:solidFill>
+                          <a:latin typeface="Google Sans" pitchFamily="34" charset="0"/>
+                          <a:ea typeface="Google Sans" pitchFamily="34" charset="-122"/>
+                          <a:cs typeface="Google Sans" pitchFamily="34" charset="-120"/>
+                        </a:rPr>
+                        <a:t>Standard -&gt; Enterprise upgrade</a:t>
+                      </a:r>
+                      <a:endParaRPr lang="en-US" sz="780" dirty="0">
+                        <a:latin typeface="Google Sans" charset="0"/>
+                        <a:ea typeface="Google Sans" charset="0"/>
+                        <a:cs typeface="Google Sans" charset="0"/>
+                      </a:endParaRPr>
+                    </a:p>
+                  </a:txBody>
+                  <a:tcPr marL="91440" marR="91440" marT="45720" marB="45720" anchor="ctr">
+                    <a:lnL w="9525" cap="flat" cmpd="sng" algn="ctr">
+                      <a:solidFill>
+                        <a:srgbClr val="DADCE0"/>
+                      </a:solidFill>
+                      <a:prstDash val="solid"/>
+                      <a:round/>
+                      <a:headEnd type="none" w="med" len="med"/>
+                      <a:tailEnd type="none" w="med" len="med"/>
+                    </a:lnL>
+                    <a:lnR w="9525" cap="flat" cmpd="sng" algn="ctr">
+                      <a:solidFill>
+                        <a:srgbClr val="DADCE0"/>
+                      </a:solidFill>
+                      <a:prstDash val="solid"/>
+                      <a:round/>
+                      <a:headEnd type="none" w="med" len="med"/>
+                      <a:tailEnd type="none" w="med" len="med"/>
+                    </a:lnR>
+                    <a:lnT w="9525" cap="flat" cmpd="sng" algn="ctr">
+                      <a:solidFill>
+                        <a:srgbClr val="DADCE0"/>
+                      </a:solidFill>
+                      <a:prstDash val="solid"/>
+                      <a:round/>
+                      <a:headEnd type="none" w="med" len="med"/>
+                      <a:tailEnd type="none" w="med" len="med"/>
+                    </a:lnT>
+                    <a:lnB w="9525" cap="flat" cmpd="sng" algn="ctr">
+                      <a:solidFill>
+                        <a:srgbClr val="DADCE0"/>
+                      </a:solidFill>
+                      <a:prstDash val="solid"/>
+                      <a:round/>
+                      <a:headEnd type="none" w="med" len="med"/>
+                      <a:tailEnd type="none" w="med" len="med"/>
+                    </a:lnB>
+                    <a:solidFill>
+                      <a:srgbClr val="FFFFFF"/>
+                    </a:solidFill>
+                  </a:tcPr>
+                </a:tc>
+                <a:tc>
+                  <a:txBody>
+                    <a:bodyPr/>
+                    <a:lstStyle/>
+                    <a:p>
+                      <a:pPr indent="0" marL="0">
+                        <a:buNone/>
+                      </a:pPr>
+                      <a:r>
+                        <a:rPr lang="en-US" sz="760" dirty="0">
+                          <a:solidFill>
+                            <a:srgbClr val="5F6368"/>
+                          </a:solidFill>
+                          <a:latin typeface="Roboto" pitchFamily="34" charset="0"/>
+                          <a:ea typeface="Roboto" pitchFamily="34" charset="-122"/>
+                          <a:cs typeface="Roboto" pitchFamily="34" charset="-120"/>
+                        </a:rPr>
+                        <a:t>Offline DB dump/restore window; new URL, new API keys &amp; OAuth 3LO re-consent</a:t>
+                      </a:r>
+                      <a:endParaRPr lang="en-US" sz="760" dirty="0">
+                        <a:latin typeface="Roboto" charset="0"/>
+                        <a:ea typeface="Roboto" charset="0"/>
+                        <a:cs typeface="Roboto" charset="0"/>
+                      </a:endParaRPr>
+                    </a:p>
+                  </a:txBody>
+                  <a:tcPr marL="91440" marR="91440" marT="45720" marB="45720" anchor="ctr">
+                    <a:lnL w="9525" cap="flat" cmpd="sng" algn="ctr">
+                      <a:solidFill>
+                        <a:srgbClr val="DADCE0"/>
+                      </a:solidFill>
+                      <a:prstDash val="solid"/>
+                      <a:round/>
+                      <a:headEnd type="none" w="med" len="med"/>
+                      <a:tailEnd type="none" w="med" len="med"/>
+                    </a:lnL>
+                    <a:lnR w="9525" cap="flat" cmpd="sng" algn="ctr">
+                      <a:solidFill>
+                        <a:srgbClr val="DADCE0"/>
+                      </a:solidFill>
+                      <a:prstDash val="solid"/>
+                      <a:round/>
+                      <a:headEnd type="none" w="med" len="med"/>
+                      <a:tailEnd type="none" w="med" len="med"/>
+                    </a:lnR>
+                    <a:lnT w="9525" cap="flat" cmpd="sng" algn="ctr">
+                      <a:solidFill>
+                        <a:srgbClr val="DADCE0"/>
+                      </a:solidFill>
+                      <a:prstDash val="solid"/>
+                      <a:round/>
+                      <a:headEnd type="none" w="med" len="med"/>
+                      <a:tailEnd type="none" w="med" len="med"/>
+                    </a:lnT>
+                    <a:lnB w="9525" cap="flat" cmpd="sng" algn="ctr">
+                      <a:solidFill>
+                        <a:srgbClr val="DADCE0"/>
+                      </a:solidFill>
+                      <a:prstDash val="solid"/>
+                      <a:round/>
+                      <a:headEnd type="none" w="med" len="med"/>
+                      <a:tailEnd type="none" w="med" len="med"/>
+                    </a:lnB>
+                    <a:solidFill>
+                      <a:srgbClr val="FFFFFF"/>
+                    </a:solidFill>
+                  </a:tcPr>
+                </a:tc>
+                <a:tc>
+                  <a:txBody>
+                    <a:bodyPr/>
+                    <a:lstStyle/>
+                    <a:p>
+                      <a:pPr indent="0" marL="0">
+                        <a:buNone/>
+                      </a:pPr>
+                      <a:r>
+                        <a:rPr lang="en-US" sz="760" dirty="0">
+                          <a:solidFill>
+                            <a:srgbClr val="5F6368"/>
+                          </a:solidFill>
+                          <a:latin typeface="Roboto" pitchFamily="34" charset="0"/>
+                          <a:ea typeface="Roboto" pitchFamily="34" charset="-122"/>
+                          <a:cs typeface="Roboto" pitchFamily="34" charset="-120"/>
+                        </a:rPr>
+                        <a:t>Manual DB migration + DNS cutover; active user chat sessions dropped</a:t>
+                      </a:r>
+                      <a:endParaRPr lang="en-US" sz="760" dirty="0">
+                        <a:latin typeface="Roboto" charset="0"/>
+                        <a:ea typeface="Roboto" charset="0"/>
+                        <a:cs typeface="Roboto" charset="0"/>
+                      </a:endParaRPr>
+                    </a:p>
+                  </a:txBody>
+                  <a:tcPr marL="91440" marR="91440" marT="45720" marB="45720" anchor="ctr">
+                    <a:lnL w="9525" cap="flat" cmpd="sng" algn="ctr">
+                      <a:solidFill>
+                        <a:srgbClr val="DADCE0"/>
+                      </a:solidFill>
+                      <a:prstDash val="solid"/>
+                      <a:round/>
+                      <a:headEnd type="none" w="med" len="med"/>
+                      <a:tailEnd type="none" w="med" len="med"/>
+                    </a:lnL>
+                    <a:lnR w="9525" cap="flat" cmpd="sng" algn="ctr">
+                      <a:solidFill>
+                        <a:srgbClr val="DADCE0"/>
+                      </a:solidFill>
+                      <a:prstDash val="solid"/>
+                      <a:round/>
+                      <a:headEnd type="none" w="med" len="med"/>
+                      <a:tailEnd type="none" w="med" len="med"/>
+                    </a:lnR>
+                    <a:lnT w="9525" cap="flat" cmpd="sng" algn="ctr">
+                      <a:solidFill>
+                        <a:srgbClr val="DADCE0"/>
+                      </a:solidFill>
+                      <a:prstDash val="solid"/>
+                      <a:round/>
+                      <a:headEnd type="none" w="med" len="med"/>
+                      <a:tailEnd type="none" w="med" len="med"/>
+                    </a:lnT>
+                    <a:lnB w="9525" cap="flat" cmpd="sng" algn="ctr">
+                      <a:solidFill>
+                        <a:srgbClr val="DADCE0"/>
+                      </a:solidFill>
+                      <a:prstDash val="solid"/>
+                      <a:round/>
+                      <a:headEnd type="none" w="med" len="med"/>
+                      <a:tailEnd type="none" w="med" len="med"/>
+                    </a:lnB>
+                    <a:solidFill>
+                      <a:srgbClr val="FFFFFF"/>
+                    </a:solidFill>
+                  </a:tcPr>
+                </a:tc>
+                <a:tc>
+                  <a:txBody>
+                    <a:bodyPr/>
+                    <a:lstStyle/>
+                    <a:p>
+                      <a:pPr indent="0" marL="0">
+                        <a:buNone/>
+                      </a:pPr>
+                      <a:r>
+                        <a:rPr lang="en-US" sz="760" dirty="0">
+                          <a:solidFill>
+                            <a:srgbClr val="5F6368"/>
+                          </a:solidFill>
+                          <a:latin typeface="Roboto" pitchFamily="34" charset="0"/>
+                          <a:ea typeface="Roboto" pitchFamily="34" charset="-122"/>
+                          <a:cs typeface="Roboto" pitchFamily="34" charset="-120"/>
+                        </a:rPr>
+                        <a:t>3-phase live migrator (SHADOW_SYNC -&gt; ATOMIC_CUTOVER -&gt; 0 dropped sessions)</a:t>
+                      </a:r>
+                      <a:endParaRPr lang="en-US" sz="760" dirty="0">
+                        <a:latin typeface="Roboto" charset="0"/>
+                        <a:ea typeface="Roboto" charset="0"/>
+                        <a:cs typeface="Roboto" charset="0"/>
+                      </a:endParaRPr>
+                    </a:p>
+                  </a:txBody>
+                  <a:tcPr marL="91440" marR="91440" marT="45720" marB="45720" anchor="ctr">
+                    <a:lnL w="9525" cap="flat" cmpd="sng" algn="ctr">
+                      <a:solidFill>
+                        <a:srgbClr val="DADCE0"/>
+                      </a:solidFill>
+                      <a:prstDash val="solid"/>
+                      <a:round/>
+                      <a:headEnd type="none" w="med" len="med"/>
+                      <a:tailEnd type="none" w="med" len="med"/>
+                    </a:lnL>
+                    <a:lnR w="9525" cap="flat" cmpd="sng" algn="ctr">
+                      <a:solidFill>
+                        <a:srgbClr val="DADCE0"/>
+                      </a:solidFill>
+                      <a:prstDash val="solid"/>
+                      <a:round/>
+                      <a:headEnd type="none" w="med" len="med"/>
+                      <a:tailEnd type="none" w="med" len="med"/>
+                    </a:lnR>
+                    <a:lnT w="9525" cap="flat" cmpd="sng" algn="ctr">
+                      <a:solidFill>
+                        <a:srgbClr val="DADCE0"/>
+                      </a:solidFill>
+                      <a:prstDash val="solid"/>
+                      <a:round/>
+                      <a:headEnd type="none" w="med" len="med"/>
+                      <a:tailEnd type="none" w="med" len="med"/>
+                    </a:lnT>
+                    <a:lnB w="9525" cap="flat" cmpd="sng" algn="ctr">
+                      <a:solidFill>
+                        <a:srgbClr val="DADCE0"/>
+                      </a:solidFill>
+                      <a:prstDash val="solid"/>
+                      <a:round/>
+                      <a:headEnd type="none" w="med" len="med"/>
+                      <a:tailEnd type="none" w="med" len="med"/>
+                    </a:lnB>
+                    <a:solidFill>
+                      <a:srgbClr val="FFFFFF"/>
+                    </a:solidFill>
+                  </a:tcPr>
+                </a:tc>
+              </a:tr>
+              <a:tr h="0">
+                <a:tc>
+                  <a:txBody>
+                    <a:bodyPr/>
+                    <a:lstStyle/>
+                    <a:p>
+                      <a:pPr indent="0" marL="0">
+                        <a:buNone/>
+                      </a:pPr>
+                      <a:r>
+                        <a:rPr lang="en-US" sz="780" b="1" dirty="0">
+                          <a:solidFill>
+                            <a:srgbClr val="3C4043"/>
+                          </a:solidFill>
+                          <a:latin typeface="Google Sans" pitchFamily="34" charset="0"/>
+                          <a:ea typeface="Google Sans" pitchFamily="34" charset="-122"/>
+                          <a:cs typeface="Google Sans" pitchFamily="34" charset="-120"/>
+                        </a:rPr>
+                        <a:t>1,000-tenant portfolio FinOps</a:t>
+                      </a:r>
+                      <a:endParaRPr lang="en-US" sz="780" dirty="0">
+                        <a:latin typeface="Google Sans" charset="0"/>
+                        <a:ea typeface="Google Sans" charset="0"/>
+                        <a:cs typeface="Google Sans" charset="0"/>
+                      </a:endParaRPr>
+                    </a:p>
+                  </a:txBody>
+                  <a:tcPr marL="91440" marR="91440" marT="45720" marB="45720" anchor="ctr">
+                    <a:lnL w="9525" cap="flat" cmpd="sng" algn="ctr">
+                      <a:solidFill>
+                        <a:srgbClr val="DADCE0"/>
+                      </a:solidFill>
+                      <a:prstDash val="solid"/>
+                      <a:round/>
+                      <a:headEnd type="none" w="med" len="med"/>
+                      <a:tailEnd type="none" w="med" len="med"/>
+                    </a:lnL>
+                    <a:lnR w="9525" cap="flat" cmpd="sng" algn="ctr">
+                      <a:solidFill>
+                        <a:srgbClr val="DADCE0"/>
+                      </a:solidFill>
+                      <a:prstDash val="solid"/>
+                      <a:round/>
+                      <a:headEnd type="none" w="med" len="med"/>
+                      <a:tailEnd type="none" w="med" len="med"/>
+                    </a:lnR>
+                    <a:lnT w="9525" cap="flat" cmpd="sng" algn="ctr">
+                      <a:solidFill>
+                        <a:srgbClr val="DADCE0"/>
+                      </a:solidFill>
+                      <a:prstDash val="solid"/>
+                      <a:round/>
+                      <a:headEnd type="none" w="med" len="med"/>
+                      <a:tailEnd type="none" w="med" len="med"/>
+                    </a:lnT>
+                    <a:lnB w="9525" cap="flat" cmpd="sng" algn="ctr">
+                      <a:solidFill>
+                        <a:srgbClr val="DADCE0"/>
+                      </a:solidFill>
+                      <a:prstDash val="solid"/>
+                      <a:round/>
+                      <a:headEnd type="none" w="med" len="med"/>
+                      <a:tailEnd type="none" w="med" len="med"/>
+                    </a:lnB>
+                    <a:solidFill>
+                      <a:srgbClr val="F8F9FA"/>
+                    </a:solidFill>
+                  </a:tcPr>
+                </a:tc>
+                <a:tc>
+                  <a:txBody>
+                    <a:bodyPr/>
+                    <a:lstStyle/>
+                    <a:p>
+                      <a:pPr indent="0" marL="0">
+                        <a:buNone/>
+                      </a:pPr>
+                      <a:r>
+                        <a:rPr lang="en-US" sz="760" dirty="0">
+                          <a:solidFill>
+                            <a:srgbClr val="5F6368"/>
+                          </a:solidFill>
+                          <a:latin typeface="Roboto" pitchFamily="34" charset="0"/>
+                          <a:ea typeface="Roboto" pitchFamily="34" charset="-122"/>
+                          <a:cs typeface="Roboto" pitchFamily="34" charset="-120"/>
+                        </a:rPr>
+                        <a:t>2x engineering maintenance overhead + high customer churn on upgrade friction</a:t>
+                      </a:r>
+                      <a:endParaRPr lang="en-US" sz="760" dirty="0">
+                        <a:latin typeface="Roboto" charset="0"/>
+                        <a:ea typeface="Roboto" charset="0"/>
+                        <a:cs typeface="Roboto" charset="0"/>
+                      </a:endParaRPr>
+                    </a:p>
+                  </a:txBody>
+                  <a:tcPr marL="91440" marR="91440" marT="45720" marB="45720" anchor="ctr">
+                    <a:lnL w="9525" cap="flat" cmpd="sng" algn="ctr">
+                      <a:solidFill>
+                        <a:srgbClr val="DADCE0"/>
+                      </a:solidFill>
+                      <a:prstDash val="solid"/>
+                      <a:round/>
+                      <a:headEnd type="none" w="med" len="med"/>
+                      <a:tailEnd type="none" w="med" len="med"/>
+                    </a:lnL>
+                    <a:lnR w="9525" cap="flat" cmpd="sng" algn="ctr">
+                      <a:solidFill>
+                        <a:srgbClr val="DADCE0"/>
+                      </a:solidFill>
+                      <a:prstDash val="solid"/>
+                      <a:round/>
+                      <a:headEnd type="none" w="med" len="med"/>
+                      <a:tailEnd type="none" w="med" len="med"/>
+                    </a:lnR>
+                    <a:lnT w="9525" cap="flat" cmpd="sng" algn="ctr">
+                      <a:solidFill>
+                        <a:srgbClr val="DADCE0"/>
+                      </a:solidFill>
+                      <a:prstDash val="solid"/>
+                      <a:round/>
+                      <a:headEnd type="none" w="med" len="med"/>
+                      <a:tailEnd type="none" w="med" len="med"/>
+                    </a:lnT>
+                    <a:lnB w="9525" cap="flat" cmpd="sng" algn="ctr">
+                      <a:solidFill>
+                        <a:srgbClr val="DADCE0"/>
+                      </a:solidFill>
+                      <a:prstDash val="solid"/>
+                      <a:round/>
+                      <a:headEnd type="none" w="med" len="med"/>
+                      <a:tailEnd type="none" w="med" len="med"/>
+                    </a:lnB>
+                    <a:solidFill>
+                      <a:srgbClr val="F8F9FA"/>
+                    </a:solidFill>
+                  </a:tcPr>
+                </a:tc>
+                <a:tc>
+                  <a:txBody>
+                    <a:bodyPr/>
+                    <a:lstStyle/>
+                    <a:p>
+                      <a:pPr indent="0" marL="0">
+                        <a:buNone/>
+                      </a:pPr>
+                      <a:r>
+                        <a:rPr lang="en-US" sz="760" dirty="0">
+                          <a:solidFill>
+                            <a:srgbClr val="5F6368"/>
+                          </a:solidFill>
+                          <a:latin typeface="Roboto" pitchFamily="34" charset="0"/>
+                          <a:ea typeface="Roboto" pitchFamily="34" charset="-122"/>
+                          <a:cs typeface="Roboto" pitchFamily="34" charset="-120"/>
+                        </a:rPr>
+                        <a:t>Hard scaling ceiling at 25 Enterprise tenants per Hub VPC network</a:t>
+                      </a:r>
+                      <a:endParaRPr lang="en-US" sz="760" dirty="0">
+                        <a:latin typeface="Roboto" charset="0"/>
+                        <a:ea typeface="Roboto" charset="0"/>
+                        <a:cs typeface="Roboto" charset="0"/>
+                      </a:endParaRPr>
+                    </a:p>
+                  </a:txBody>
+                  <a:tcPr marL="91440" marR="91440" marT="45720" marB="45720" anchor="ctr">
+                    <a:lnL w="9525" cap="flat" cmpd="sng" algn="ctr">
+                      <a:solidFill>
+                        <a:srgbClr val="DADCE0"/>
+                      </a:solidFill>
+                      <a:prstDash val="solid"/>
+                      <a:round/>
+                      <a:headEnd type="none" w="med" len="med"/>
+                      <a:tailEnd type="none" w="med" len="med"/>
+                    </a:lnL>
+                    <a:lnR w="9525" cap="flat" cmpd="sng" algn="ctr">
+                      <a:solidFill>
+                        <a:srgbClr val="DADCE0"/>
+                      </a:solidFill>
+                      <a:prstDash val="solid"/>
+                      <a:round/>
+                      <a:headEnd type="none" w="med" len="med"/>
+                      <a:tailEnd type="none" w="med" len="med"/>
+                    </a:lnR>
+                    <a:lnT w="9525" cap="flat" cmpd="sng" algn="ctr">
+                      <a:solidFill>
+                        <a:srgbClr val="DADCE0"/>
+                      </a:solidFill>
+                      <a:prstDash val="solid"/>
+                      <a:round/>
+                      <a:headEnd type="none" w="med" len="med"/>
+                      <a:tailEnd type="none" w="med" len="med"/>
+                    </a:lnT>
+                    <a:lnB w="9525" cap="flat" cmpd="sng" algn="ctr">
+                      <a:solidFill>
+                        <a:srgbClr val="DADCE0"/>
+                      </a:solidFill>
+                      <a:prstDash val="solid"/>
+                      <a:round/>
+                      <a:headEnd type="none" w="med" len="med"/>
+                      <a:tailEnd type="none" w="med" len="med"/>
+                    </a:lnB>
+                    <a:solidFill>
+                      <a:srgbClr val="F8F9FA"/>
+                    </a:solidFill>
+                  </a:tcPr>
+                </a:tc>
+                <a:tc>
+                  <a:txBody>
+                    <a:bodyPr/>
+                    <a:lstStyle/>
+                    <a:p>
+                      <a:pPr indent="0" marL="0">
+                        <a:buNone/>
+                      </a:pPr>
+                      <a:r>
+                        <a:rPr lang="en-US" sz="760" b="1" dirty="0">
+                          <a:solidFill>
+                            <a:srgbClr val="0D652D"/>
+                          </a:solidFill>
+                          <a:latin typeface="Roboto" pitchFamily="34" charset="0"/>
+                          <a:ea typeface="Roboto" pitchFamily="34" charset="-122"/>
+                          <a:cs typeface="Roboto" pitchFamily="34" charset="-120"/>
+                        </a:rPr>
+                        <a:t>74% lower TCO ($132.4k/mo vs. $1.85M/mo all-silo) + 4/4 migration tests PASS</a:t>
+                      </a:r>
+                      <a:endParaRPr lang="en-US" sz="760" dirty="0">
+                        <a:latin typeface="Roboto" charset="0"/>
+                        <a:ea typeface="Roboto" charset="0"/>
+                        <a:cs typeface="Roboto" charset="0"/>
+                      </a:endParaRPr>
+                    </a:p>
+                  </a:txBody>
+                  <a:tcPr marL="91440" marR="91440" marT="45720" marB="45720" anchor="ctr">
+                    <a:lnL w="9525" cap="flat" cmpd="sng" algn="ctr">
+                      <a:solidFill>
+                        <a:srgbClr val="DADCE0"/>
+                      </a:solidFill>
+                      <a:prstDash val="solid"/>
+                      <a:round/>
+                      <a:headEnd type="none" w="med" len="med"/>
+                      <a:tailEnd type="none" w="med" len="med"/>
+                    </a:lnL>
+                    <a:lnR w="9525" cap="flat" cmpd="sng" algn="ctr">
+                      <a:solidFill>
+                        <a:srgbClr val="DADCE0"/>
+                      </a:solidFill>
+                      <a:prstDash val="solid"/>
+                      <a:round/>
+                      <a:headEnd type="none" w="med" len="med"/>
+                      <a:tailEnd type="none" w="med" len="med"/>
+                    </a:lnR>
+                    <a:lnT w="9525" cap="flat" cmpd="sng" algn="ctr">
+                      <a:solidFill>
+                        <a:srgbClr val="DADCE0"/>
+                      </a:solidFill>
+                      <a:prstDash val="solid"/>
+                      <a:round/>
+                      <a:headEnd type="none" w="med" len="med"/>
+                      <a:tailEnd type="none" w="med" len="med"/>
+                    </a:lnT>
+                    <a:lnB w="9525" cap="flat" cmpd="sng" algn="ctr">
+                      <a:solidFill>
+                        <a:srgbClr val="DADCE0"/>
+                      </a:solidFill>
+                      <a:prstDash val="solid"/>
+                      <a:round/>
+                      <a:headEnd type="none" w="med" len="med"/>
+                      <a:tailEnd type="none" w="med" len="med"/>
+                    </a:lnB>
+                    <a:solidFill>
+                      <a:srgbClr val="F8F9FA"/>
+                    </a:solidFill>
+                  </a:tcPr>
+                </a:tc>
+              </a:tr>
+            </a:tbl>
+          </a:graphicData>
+        </a:graphic>
+      </p:graphicFrame>
+      <p:sp>
+        <p:nvSpPr>
+          <p:cNvPr id="20" name="Shape 17"/>
+          <p:cNvSpPr/>
+          <p:nvPr/>
+        </p:nvSpPr>
+        <p:spPr>
+          <a:xfrm>
+            <a:off x="411480" y="4663440"/>
+            <a:ext cx="2718511" cy="1408176"/>
           </a:xfrm>
           <a:prstGeom prst="roundRect">
             <a:avLst>
-              <a:gd name="adj" fmla="val 3239"/>
+              <a:gd name="adj" fmla="val 5195"/>
             </a:avLst>
           </a:prstGeom>
           <a:solidFill>
@@ -19087,14 +21032,14 @@
       </p:sp>
       <p:sp>
         <p:nvSpPr>
-          <p:cNvPr id="20" name="Shape 18"/>
-          <p:cNvSpPr/>
-          <p:nvPr/>
-        </p:nvSpPr>
-        <p:spPr>
-          <a:xfrm>
-            <a:off x="411480" y="1353312"/>
-            <a:ext cx="5583326" cy="59436"/>
+          <p:cNvPr id="21" name="Shape 18"/>
+          <p:cNvSpPr/>
+          <p:nvPr/>
+        </p:nvSpPr>
+        <p:spPr>
+          <a:xfrm>
+            <a:off x="411480" y="4663440"/>
+            <a:ext cx="2718511" cy="50292"/>
           </a:xfrm>
           <a:prstGeom prst="rect">
             <a:avLst/>
@@ -19107,150 +21052,73 @@
       </p:sp>
       <p:sp>
         <p:nvSpPr>
-          <p:cNvPr id="21" name="Shape 19"/>
-          <p:cNvSpPr/>
-          <p:nvPr/>
-        </p:nvSpPr>
-        <p:spPr>
-          <a:xfrm>
-            <a:off x="557784" y="1481328"/>
-            <a:ext cx="365760" cy="256032"/>
-          </a:xfrm>
-          <a:prstGeom prst="roundRect">
-            <a:avLst>
-              <a:gd name="adj" fmla="val 21429"/>
-            </a:avLst>
-          </a:prstGeom>
-          <a:solidFill>
-            <a:srgbClr val="E8F0FE"/>
-          </a:solidFill>
-          <a:ln/>
-        </p:spPr>
-      </p:sp>
-      <p:sp>
-        <p:nvSpPr>
-          <p:cNvPr id="22" name="Text 20"/>
-          <p:cNvSpPr/>
-          <p:nvPr/>
-        </p:nvSpPr>
-        <p:spPr>
-          <a:xfrm>
-            <a:off x="557784" y="1481328"/>
-            <a:ext cx="365760" cy="256032"/>
-          </a:xfrm>
-          <a:prstGeom prst="rect">
-            <a:avLst/>
-          </a:prstGeom>
-          <a:noFill/>
-          <a:ln/>
-        </p:spPr>
-        <p:txBody>
-          <a:bodyPr wrap="square" rtlCol="0" anchor="ctr"/>
-          <a:lstStyle/>
-          <a:p>
-            <a:pPr algn="ctr" indent="0" marL="0">
-              <a:buNone/>
-            </a:pPr>
-            <a:r>
-              <a:rPr lang="en-US" sz="920" b="1" dirty="0">
-                <a:solidFill>
-                  <a:srgbClr val="174EA6"/>
+          <p:cNvPr id="22" name="Text 19"/>
+          <p:cNvSpPr/>
+          <p:nvPr/>
+        </p:nvSpPr>
+        <p:spPr>
+          <a:xfrm>
+            <a:off x="521208" y="4736592"/>
+            <a:ext cx="2499055" cy="256032"/>
+          </a:xfrm>
+          <a:prstGeom prst="rect">
+            <a:avLst/>
+          </a:prstGeom>
+          <a:noFill/>
+          <a:ln/>
+        </p:spPr>
+        <p:txBody>
+          <a:bodyPr wrap="square" rtlCol="0" anchor="ctr">
+            <a:normAutofit/>
+          </a:bodyPr>
+          <a:lstStyle/>
+          <a:p>
+            <a:pPr indent="0" marL="0">
+              <a:buNone/>
+            </a:pPr>
+            <a:r>
+              <a:rPr lang="en-US" sz="760" b="1" dirty="0">
+                <a:solidFill>
+                  <a:srgbClr val="3C4043"/>
                 </a:solidFill>
                 <a:latin typeface="Google Sans" pitchFamily="34" charset="0"/>
                 <a:ea typeface="Google Sans" pitchFamily="34" charset="-122"/>
                 <a:cs typeface="Google Sans" pitchFamily="34" charset="-120"/>
               </a:rPr>
-              <a:t>01</a:t>
-            </a:r>
-            <a:endParaRPr lang="en-US" sz="920" dirty="0"/>
-          </a:p>
-        </p:txBody>
-      </p:sp>
-      <p:sp>
-        <p:nvSpPr>
-          <p:cNvPr id="23" name="Text 21"/>
-          <p:cNvSpPr/>
-          <p:nvPr/>
-        </p:nvSpPr>
-        <p:spPr>
-          <a:xfrm>
-            <a:off x="996696" y="1463040"/>
-            <a:ext cx="4851806" cy="329184"/>
-          </a:xfrm>
-          <a:prstGeom prst="rect">
-            <a:avLst/>
-          </a:prstGeom>
-          <a:noFill/>
-          <a:ln/>
-        </p:spPr>
-        <p:txBody>
-          <a:bodyPr wrap="square" rtlCol="0" anchor="ctr"/>
+              <a:t>1. Why Legacy VPC Peering Hits a Wall</a:t>
+            </a:r>
+            <a:endParaRPr lang="en-US" sz="760" dirty="0"/>
+          </a:p>
+        </p:txBody>
+      </p:sp>
+      <p:sp>
+        <p:nvSpPr>
+          <p:cNvPr id="23" name="Text 20"/>
+          <p:cNvSpPr/>
+          <p:nvPr/>
+        </p:nvSpPr>
+        <p:spPr>
+          <a:xfrm>
+            <a:off x="521208" y="4992624"/>
+            <a:ext cx="2499055" cy="1024128"/>
+          </a:xfrm>
+          <a:prstGeom prst="rect">
+            <a:avLst/>
+          </a:prstGeom>
+          <a:noFill/>
+          <a:ln/>
+        </p:spPr>
+        <p:txBody>
+          <a:bodyPr wrap="square" rtlCol="0" anchor="t">
+            <a:normAutofit/>
+          </a:bodyPr>
           <a:lstStyle/>
           <a:p>
             <a:pPr indent="0" marL="0">
               <a:buNone/>
             </a:pPr>
             <a:r>
-              <a:rPr lang="en-US" sz="1140" b="1" dirty="0">
-                <a:solidFill>
-                  <a:srgbClr val="3C4043"/>
-                </a:solidFill>
-                <a:latin typeface="Google Sans" pitchFamily="34" charset="0"/>
-                <a:ea typeface="Google Sans" pitchFamily="34" charset="-122"/>
-                <a:cs typeface="Google Sans" pitchFamily="34" charset="-120"/>
-              </a:rPr>
-              <a:t>Central Ingress &amp; Routing Hub (cymbal-hybrid-hub-prod)</a:t>
-            </a:r>
-            <a:endParaRPr lang="en-US" sz="1140" dirty="0"/>
-          </a:p>
-        </p:txBody>
-      </p:sp>
-      <p:sp>
-        <p:nvSpPr>
-          <p:cNvPr id="24" name="Shape 22"/>
-          <p:cNvSpPr/>
-          <p:nvPr/>
-        </p:nvSpPr>
-        <p:spPr>
-          <a:xfrm>
-            <a:off x="557784" y="1847088"/>
-            <a:ext cx="5290718" cy="9144"/>
-          </a:xfrm>
-          <a:prstGeom prst="rect">
-            <a:avLst/>
-          </a:prstGeom>
-          <a:solidFill>
-            <a:srgbClr val="DADCE0"/>
-          </a:solidFill>
-          <a:ln/>
-        </p:spPr>
-      </p:sp>
-      <p:sp>
-        <p:nvSpPr>
-          <p:cNvPr id="25" name="Text 23"/>
-          <p:cNvSpPr/>
-          <p:nvPr/>
-        </p:nvSpPr>
-        <p:spPr>
-          <a:xfrm>
-            <a:off x="557784" y="1901952"/>
-            <a:ext cx="5290718" cy="850392"/>
-          </a:xfrm>
-          <a:prstGeom prst="rect">
-            <a:avLst/>
-          </a:prstGeom>
-          <a:noFill/>
-          <a:ln/>
-        </p:spPr>
-        <p:txBody>
-          <a:bodyPr wrap="square" rtlCol="0" anchor="t"/>
-          <a:lstStyle/>
-          <a:p>
-            <a:pPr indent="0" marL="0">
-              <a:buNone/>
-            </a:pPr>
-            <a:r>
-              <a:rPr lang="en-US" sz="980" dirty="0">
+              <a:rPr lang="en-US" sz="740" dirty="0">
                 <a:solidFill>
                   <a:srgbClr val="5F6368"/>
                 </a:solidFill>
@@ -19258,188 +21126,26 @@
                 <a:ea typeface="Roboto" pitchFamily="34" charset="-122"/>
                 <a:cs typeface="Roboto" pitchFamily="34" charset="-120"/>
               </a:rPr>
-              <a:t>Hosts the Global External ALB, Cloud Armor WAF, IAP OIDC verifier, Cross-Project Agent Registry, and Firestore Tenant Routing Table.</a:t>
-            </a:r>
-            <a:endParaRPr lang="en-US" sz="980" dirty="0"/>
-          </a:p>
-        </p:txBody>
-      </p:sp>
-      <p:sp>
-        <p:nvSpPr>
-          <p:cNvPr id="26" name="Shape 24"/>
-          <p:cNvSpPr/>
-          <p:nvPr/>
-        </p:nvSpPr>
-        <p:spPr>
-          <a:xfrm>
-            <a:off x="557784" y="2788920"/>
-            <a:ext cx="5290718" cy="493776"/>
+              <a:t>Traditional VPC peering caps at 25 spokes per hub, requires globally non-overlapping CIDRs, and opens bi-directional L3 blast radius.</a:t>
+            </a:r>
+            <a:endParaRPr lang="en-US" sz="740" dirty="0"/>
+          </a:p>
+        </p:txBody>
+      </p:sp>
+      <p:sp>
+        <p:nvSpPr>
+          <p:cNvPr id="24" name="Shape 21"/>
+          <p:cNvSpPr/>
+          <p:nvPr/>
+        </p:nvSpPr>
+        <p:spPr>
+          <a:xfrm>
+            <a:off x="3294583" y="4663440"/>
+            <a:ext cx="2718511" cy="1408176"/>
           </a:xfrm>
           <a:prstGeom prst="roundRect">
             <a:avLst>
-              <a:gd name="adj" fmla="val 11111"/>
-            </a:avLst>
-          </a:prstGeom>
-          <a:solidFill>
-            <a:srgbClr val="FFFFFF"/>
-          </a:solidFill>
-          <a:ln w="9525">
-            <a:solidFill>
-              <a:srgbClr val="DADCE0"/>
-            </a:solidFill>
-            <a:prstDash val="solid"/>
-          </a:ln>
-        </p:spPr>
-      </p:sp>
-      <p:sp>
-        <p:nvSpPr>
-          <p:cNvPr id="27" name="Shape 25"/>
-          <p:cNvSpPr/>
-          <p:nvPr/>
-        </p:nvSpPr>
-        <p:spPr>
-          <a:xfrm>
-            <a:off x="557784" y="2788920"/>
-            <a:ext cx="54864" cy="493776"/>
-          </a:xfrm>
-          <a:prstGeom prst="rect">
-            <a:avLst/>
-          </a:prstGeom>
-          <a:solidFill>
-            <a:srgbClr val="4285F4"/>
-          </a:solidFill>
-          <a:ln/>
-        </p:spPr>
-      </p:sp>
-      <p:sp>
-        <p:nvSpPr>
-          <p:cNvPr id="28" name="Text 26"/>
-          <p:cNvSpPr/>
-          <p:nvPr/>
-        </p:nvSpPr>
-        <p:spPr>
-          <a:xfrm>
-            <a:off x="649224" y="2816352"/>
-            <a:ext cx="5162702" cy="438912"/>
-          </a:xfrm>
-          <a:prstGeom prst="rect">
-            <a:avLst/>
-          </a:prstGeom>
-          <a:noFill/>
-          <a:ln/>
-        </p:spPr>
-        <p:txBody>
-          <a:bodyPr wrap="square" rtlCol="0" anchor="ctr"/>
-          <a:lstStyle/>
-          <a:p>
-            <a:pPr indent="0" marL="0">
-              <a:buNone/>
-            </a:pPr>
-            <a:r>
-              <a:rPr lang="en-US" sz="750" b="1" dirty="0">
-                <a:solidFill>
-                  <a:srgbClr val="3C4043"/>
-                </a:solidFill>
-                <a:latin typeface="Google Sans" pitchFamily="34" charset="0"/>
-                <a:ea typeface="Google Sans" pitchFamily="34" charset="-122"/>
-                <a:cs typeface="Google Sans" pitchFamily="34" charset="-120"/>
-              </a:rPr>
-              <a:t>Cloud Stack: Hub VPC: cymbal-pattern-c-hub-vpc (10.10.0.0/20) • Cloud Run Hybrid Router
-</a:t>
-            </a:r>
-            <a:pPr indent="0" marL="0">
-              <a:buNone/>
-            </a:pPr>
-            <a:r>
-              <a:rPr lang="en-US" sz="730" dirty="0">
-                <a:solidFill>
-                  <a:srgbClr val="5F6368"/>
-                </a:solidFill>
-                <a:latin typeface="Roboto" pitchFamily="34" charset="0"/>
-                <a:ea typeface="Roboto" pitchFamily="34" charset="-122"/>
-                <a:cs typeface="Roboto" pitchFamily="34" charset="-120"/>
-              </a:rPr>
-              <a:t>Target &amp; SLA: Sub-2ms Tier Lookup in Firestore • Enforces Hop 1 OBO/DPoP &amp; Hop 2 Catalog Filter</a:t>
-            </a:r>
-            <a:endParaRPr lang="en-US" sz="750" dirty="0"/>
-          </a:p>
-        </p:txBody>
-      </p:sp>
-      <p:sp>
-        <p:nvSpPr>
-          <p:cNvPr id="29" name="Shape 27"/>
-          <p:cNvSpPr/>
-          <p:nvPr/>
-        </p:nvSpPr>
-        <p:spPr>
-          <a:xfrm>
-            <a:off x="557784" y="3337560"/>
-            <a:ext cx="5290718" cy="219456"/>
-          </a:xfrm>
-          <a:prstGeom prst="roundRect">
-            <a:avLst>
-              <a:gd name="adj" fmla="val 20833"/>
-            </a:avLst>
-          </a:prstGeom>
-          <a:solidFill>
-            <a:srgbClr val="E8F0FE"/>
-          </a:solidFill>
-          <a:ln/>
-        </p:spPr>
-      </p:sp>
-      <p:sp>
-        <p:nvSpPr>
-          <p:cNvPr id="30" name="Text 28"/>
-          <p:cNvSpPr/>
-          <p:nvPr/>
-        </p:nvSpPr>
-        <p:spPr>
-          <a:xfrm>
-            <a:off x="612648" y="3337560"/>
-            <a:ext cx="5180990" cy="219456"/>
-          </a:xfrm>
-          <a:prstGeom prst="rect">
-            <a:avLst/>
-          </a:prstGeom>
-          <a:noFill/>
-          <a:ln/>
-        </p:spPr>
-        <p:txBody>
-          <a:bodyPr wrap="square" rtlCol="0" anchor="ctr"/>
-          <a:lstStyle/>
-          <a:p>
-            <a:pPr indent="0" marL="0">
-              <a:buNone/>
-            </a:pPr>
-            <a:r>
-              <a:rPr lang="en-US" sz="750" b="1" dirty="0">
-                <a:solidFill>
-                  <a:srgbClr val="174EA6"/>
-                </a:solidFill>
-                <a:latin typeface="Google Sans" pitchFamily="34" charset="0"/>
-                <a:ea typeface="Google Sans" pitchFamily="34" charset="-122"/>
-                <a:cs typeface="Google Sans" pitchFamily="34" charset="-120"/>
-              </a:rPr>
-              <a:t>Zone 1: Central Routing Hub</a:t>
-            </a:r>
-            <a:endParaRPr lang="en-US" sz="750" dirty="0"/>
-          </a:p>
-        </p:txBody>
-      </p:sp>
-      <p:sp>
-        <p:nvSpPr>
-          <p:cNvPr id="31" name="Shape 29"/>
-          <p:cNvSpPr/>
-          <p:nvPr/>
-        </p:nvSpPr>
-        <p:spPr>
-          <a:xfrm>
-            <a:off x="6195974" y="1353312"/>
-            <a:ext cx="5583326" cy="2258568"/>
-          </a:xfrm>
-          <a:prstGeom prst="roundRect">
-            <a:avLst>
-              <a:gd name="adj" fmla="val 3239"/>
+              <a:gd name="adj" fmla="val 5195"/>
             </a:avLst>
           </a:prstGeom>
           <a:solidFill>
@@ -19455,14 +21161,14 @@
       </p:sp>
       <p:sp>
         <p:nvSpPr>
-          <p:cNvPr id="32" name="Shape 30"/>
-          <p:cNvSpPr/>
-          <p:nvPr/>
-        </p:nvSpPr>
-        <p:spPr>
-          <a:xfrm>
-            <a:off x="6195974" y="1353312"/>
-            <a:ext cx="5583326" cy="59436"/>
+          <p:cNvPr id="25" name="Shape 22"/>
+          <p:cNvSpPr/>
+          <p:nvPr/>
+        </p:nvSpPr>
+        <p:spPr>
+          <a:xfrm>
+            <a:off x="3294583" y="4663440"/>
+            <a:ext cx="2718511" cy="50292"/>
           </a:xfrm>
           <a:prstGeom prst="rect">
             <a:avLst/>
@@ -19475,150 +21181,73 @@
       </p:sp>
       <p:sp>
         <p:nvSpPr>
-          <p:cNvPr id="33" name="Shape 31"/>
-          <p:cNvSpPr/>
-          <p:nvPr/>
-        </p:nvSpPr>
-        <p:spPr>
-          <a:xfrm>
-            <a:off x="6342278" y="1481328"/>
-            <a:ext cx="365760" cy="256032"/>
-          </a:xfrm>
-          <a:prstGeom prst="roundRect">
-            <a:avLst>
-              <a:gd name="adj" fmla="val 21429"/>
-            </a:avLst>
-          </a:prstGeom>
-          <a:solidFill>
-            <a:srgbClr val="FCE8E6"/>
-          </a:solidFill>
-          <a:ln/>
-        </p:spPr>
-      </p:sp>
-      <p:sp>
-        <p:nvSpPr>
-          <p:cNvPr id="34" name="Text 32"/>
-          <p:cNvSpPr/>
-          <p:nvPr/>
-        </p:nvSpPr>
-        <p:spPr>
-          <a:xfrm>
-            <a:off x="6342278" y="1481328"/>
-            <a:ext cx="365760" cy="256032"/>
-          </a:xfrm>
-          <a:prstGeom prst="rect">
-            <a:avLst/>
-          </a:prstGeom>
-          <a:noFill/>
-          <a:ln/>
-        </p:spPr>
-        <p:txBody>
-          <a:bodyPr wrap="square" rtlCol="0" anchor="ctr"/>
-          <a:lstStyle/>
-          <a:p>
-            <a:pPr algn="ctr" indent="0" marL="0">
-              <a:buNone/>
-            </a:pPr>
-            <a:r>
-              <a:rPr lang="en-US" sz="920" b="1" dirty="0">
-                <a:solidFill>
-                  <a:srgbClr val="A50E0E"/>
+          <p:cNvPr id="26" name="Text 23"/>
+          <p:cNvSpPr/>
+          <p:nvPr/>
+        </p:nvSpPr>
+        <p:spPr>
+          <a:xfrm>
+            <a:off x="3404311" y="4736592"/>
+            <a:ext cx="2499055" cy="256032"/>
+          </a:xfrm>
+          <a:prstGeom prst="rect">
+            <a:avLst/>
+          </a:prstGeom>
+          <a:noFill/>
+          <a:ln/>
+        </p:spPr>
+        <p:txBody>
+          <a:bodyPr wrap="square" rtlCol="0" anchor="ctr">
+            <a:normAutofit/>
+          </a:bodyPr>
+          <a:lstStyle/>
+          <a:p>
+            <a:pPr indent="0" marL="0">
+              <a:buNone/>
+            </a:pPr>
+            <a:r>
+              <a:rPr lang="en-US" sz="760" b="1" dirty="0">
+                <a:solidFill>
+                  <a:srgbClr val="3C4043"/>
                 </a:solidFill>
                 <a:latin typeface="Google Sans" pitchFamily="34" charset="0"/>
                 <a:ea typeface="Google Sans" pitchFamily="34" charset="-122"/>
                 <a:cs typeface="Google Sans" pitchFamily="34" charset="-120"/>
               </a:rPr>
-              <a:t>02</a:t>
-            </a:r>
-            <a:endParaRPr lang="en-US" sz="920" dirty="0"/>
-          </a:p>
-        </p:txBody>
-      </p:sp>
-      <p:sp>
-        <p:nvSpPr>
-          <p:cNvPr id="35" name="Text 33"/>
-          <p:cNvSpPr/>
-          <p:nvPr/>
-        </p:nvSpPr>
-        <p:spPr>
-          <a:xfrm>
-            <a:off x="6781190" y="1463040"/>
-            <a:ext cx="4851806" cy="329184"/>
-          </a:xfrm>
-          <a:prstGeom prst="rect">
-            <a:avLst/>
-          </a:prstGeom>
-          <a:noFill/>
-          <a:ln/>
-        </p:spPr>
-        <p:txBody>
-          <a:bodyPr wrap="square" rtlCol="0" anchor="ctr"/>
+              <a:t>2. Why Private Service Connect (PSC) Scales</a:t>
+            </a:r>
+            <a:endParaRPr lang="en-US" sz="760" dirty="0"/>
+          </a:p>
+        </p:txBody>
+      </p:sp>
+      <p:sp>
+        <p:nvSpPr>
+          <p:cNvPr id="27" name="Text 24"/>
+          <p:cNvSpPr/>
+          <p:nvPr/>
+        </p:nvSpPr>
+        <p:spPr>
+          <a:xfrm>
+            <a:off x="3404311" y="4992624"/>
+            <a:ext cx="2499055" cy="1024128"/>
+          </a:xfrm>
+          <a:prstGeom prst="rect">
+            <a:avLst/>
+          </a:prstGeom>
+          <a:noFill/>
+          <a:ln/>
+        </p:spPr>
+        <p:txBody>
+          <a:bodyPr wrap="square" rtlCol="0" anchor="t">
+            <a:normAutofit/>
+          </a:bodyPr>
           <a:lstStyle/>
           <a:p>
             <a:pPr indent="0" marL="0">
               <a:buNone/>
             </a:pPr>
             <a:r>
-              <a:rPr lang="en-US" sz="1140" b="1" dirty="0">
-                <a:solidFill>
-                  <a:srgbClr val="3C4043"/>
-                </a:solidFill>
-                <a:latin typeface="Google Sans" pitchFamily="34" charset="0"/>
-                <a:ea typeface="Google Sans" pitchFamily="34" charset="-122"/>
-                <a:cs typeface="Google Sans" pitchFamily="34" charset="-120"/>
-              </a:rPr>
-              <a:t>Consumer PSC Endpoint in the Hub (10.10.0.50)</a:t>
-            </a:r>
-            <a:endParaRPr lang="en-US" sz="1140" dirty="0"/>
-          </a:p>
-        </p:txBody>
-      </p:sp>
-      <p:sp>
-        <p:nvSpPr>
-          <p:cNvPr id="36" name="Shape 34"/>
-          <p:cNvSpPr/>
-          <p:nvPr/>
-        </p:nvSpPr>
-        <p:spPr>
-          <a:xfrm>
-            <a:off x="6342278" y="1847088"/>
-            <a:ext cx="5290718" cy="9144"/>
-          </a:xfrm>
-          <a:prstGeom prst="rect">
-            <a:avLst/>
-          </a:prstGeom>
-          <a:solidFill>
-            <a:srgbClr val="DADCE0"/>
-          </a:solidFill>
-          <a:ln/>
-        </p:spPr>
-      </p:sp>
-      <p:sp>
-        <p:nvSpPr>
-          <p:cNvPr id="37" name="Text 35"/>
-          <p:cNvSpPr/>
-          <p:nvPr/>
-        </p:nvSpPr>
-        <p:spPr>
-          <a:xfrm>
-            <a:off x="6342278" y="1901952"/>
-            <a:ext cx="5290718" cy="850392"/>
-          </a:xfrm>
-          <a:prstGeom prst="rect">
-            <a:avLst/>
-          </a:prstGeom>
-          <a:noFill/>
-          <a:ln/>
-        </p:spPr>
-        <p:txBody>
-          <a:bodyPr wrap="square" rtlCol="0" anchor="t"/>
-          <a:lstStyle/>
-          <a:p>
-            <a:pPr indent="0" marL="0">
-              <a:buNone/>
-            </a:pPr>
-            <a:r>
-              <a:rPr lang="en-US" sz="980" dirty="0">
+              <a:rPr lang="en-US" sz="740" dirty="0">
                 <a:solidFill>
                   <a:srgbClr val="5F6368"/>
                 </a:solidFill>
@@ -19626,188 +21255,26 @@
                 <a:ea typeface="Roboto" pitchFamily="34" charset="-122"/>
                 <a:cs typeface="Roboto" pitchFamily="34" charset="-120"/>
               </a:rPr>
-              <a:t>The Hub VPC (10.10.0.0/20) binds an internal Private Service Connect forwarding rule directly to each Enterprise tenant’s spoke ServiceAttachment URI.</a:t>
-            </a:r>
-            <a:endParaRPr lang="en-US" sz="980" dirty="0"/>
-          </a:p>
-        </p:txBody>
-      </p:sp>
-      <p:sp>
-        <p:nvSpPr>
-          <p:cNvPr id="38" name="Shape 36"/>
-          <p:cNvSpPr/>
-          <p:nvPr/>
-        </p:nvSpPr>
-        <p:spPr>
-          <a:xfrm>
-            <a:off x="6342278" y="2788920"/>
-            <a:ext cx="5290718" cy="493776"/>
+              <a:t>Unidirectional NAT (ServiceAttachment) scales to 100s of enterprise spokes while letting every spoke reuse the identical 10.40.0.0/20 CIDR.</a:t>
+            </a:r>
+            <a:endParaRPr lang="en-US" sz="740" dirty="0"/>
+          </a:p>
+        </p:txBody>
+      </p:sp>
+      <p:sp>
+        <p:nvSpPr>
+          <p:cNvPr id="28" name="Shape 25"/>
+          <p:cNvSpPr/>
+          <p:nvPr/>
+        </p:nvSpPr>
+        <p:spPr>
+          <a:xfrm>
+            <a:off x="6177686" y="4663440"/>
+            <a:ext cx="2718511" cy="1408176"/>
           </a:xfrm>
           <a:prstGeom prst="roundRect">
             <a:avLst>
-              <a:gd name="adj" fmla="val 11111"/>
-            </a:avLst>
-          </a:prstGeom>
-          <a:solidFill>
-            <a:srgbClr val="FFFFFF"/>
-          </a:solidFill>
-          <a:ln w="9525">
-            <a:solidFill>
-              <a:srgbClr val="DADCE0"/>
-            </a:solidFill>
-            <a:prstDash val="solid"/>
-          </a:ln>
-        </p:spPr>
-      </p:sp>
-      <p:sp>
-        <p:nvSpPr>
-          <p:cNvPr id="39" name="Shape 37"/>
-          <p:cNvSpPr/>
-          <p:nvPr/>
-        </p:nvSpPr>
-        <p:spPr>
-          <a:xfrm>
-            <a:off x="6342278" y="2788920"/>
-            <a:ext cx="54864" cy="493776"/>
-          </a:xfrm>
-          <a:prstGeom prst="rect">
-            <a:avLst/>
-          </a:prstGeom>
-          <a:solidFill>
-            <a:srgbClr val="EA4335"/>
-          </a:solidFill>
-          <a:ln/>
-        </p:spPr>
-      </p:sp>
-      <p:sp>
-        <p:nvSpPr>
-          <p:cNvPr id="40" name="Text 38"/>
-          <p:cNvSpPr/>
-          <p:nvPr/>
-        </p:nvSpPr>
-        <p:spPr>
-          <a:xfrm>
-            <a:off x="6433718" y="2816352"/>
-            <a:ext cx="5162702" cy="438912"/>
-          </a:xfrm>
-          <a:prstGeom prst="rect">
-            <a:avLst/>
-          </a:prstGeom>
-          <a:noFill/>
-          <a:ln/>
-        </p:spPr>
-        <p:txBody>
-          <a:bodyPr wrap="square" rtlCol="0" anchor="ctr"/>
-          <a:lstStyle/>
-          <a:p>
-            <a:pPr indent="0" marL="0">
-              <a:buNone/>
-            </a:pPr>
-            <a:r>
-              <a:rPr lang="en-US" sz="750" b="1" dirty="0">
-                <a:solidFill>
-                  <a:srgbClr val="3C4043"/>
-                </a:solidFill>
-                <a:latin typeface="Google Sans" pitchFamily="34" charset="0"/>
-                <a:ea typeface="Google Sans" pitchFamily="34" charset="-122"/>
-                <a:cs typeface="Google Sans" pitchFamily="34" charset="-120"/>
-              </a:rPr>
-              <a:t>Cloud Stack: google_compute_address (10.10.0.50) + google_compute_forwarding_rule (PSC Consumer)
-</a:t>
-            </a:r>
-            <a:pPr indent="0" marL="0">
-              <a:buNone/>
-            </a:pPr>
-            <a:r>
-              <a:rPr lang="en-US" sz="730" dirty="0">
-                <a:solidFill>
-                  <a:srgbClr val="5F6368"/>
-                </a:solidFill>
-                <a:latin typeface="Roboto" pitchFamily="34" charset="0"/>
-                <a:ea typeface="Roboto" pitchFamily="34" charset="-122"/>
-                <a:cs typeface="Roboto" pitchFamily="34" charset="-120"/>
-              </a:rPr>
-              <a:t>Target &amp; SLA: Private Layer-4/7 Tunnel Across Project Boundaries Without Public IP Exposure</a:t>
-            </a:r>
-            <a:endParaRPr lang="en-US" sz="750" dirty="0"/>
-          </a:p>
-        </p:txBody>
-      </p:sp>
-      <p:sp>
-        <p:nvSpPr>
-          <p:cNvPr id="41" name="Shape 39"/>
-          <p:cNvSpPr/>
-          <p:nvPr/>
-        </p:nvSpPr>
-        <p:spPr>
-          <a:xfrm>
-            <a:off x="6342278" y="3337560"/>
-            <a:ext cx="5290718" cy="219456"/>
-          </a:xfrm>
-          <a:prstGeom prst="roundRect">
-            <a:avLst>
-              <a:gd name="adj" fmla="val 20833"/>
-            </a:avLst>
-          </a:prstGeom>
-          <a:solidFill>
-            <a:srgbClr val="FCE8E6"/>
-          </a:solidFill>
-          <a:ln/>
-        </p:spPr>
-      </p:sp>
-      <p:sp>
-        <p:nvSpPr>
-          <p:cNvPr id="42" name="Text 40"/>
-          <p:cNvSpPr/>
-          <p:nvPr/>
-        </p:nvSpPr>
-        <p:spPr>
-          <a:xfrm>
-            <a:off x="6397142" y="3337560"/>
-            <a:ext cx="5180990" cy="219456"/>
-          </a:xfrm>
-          <a:prstGeom prst="rect">
-            <a:avLst/>
-          </a:prstGeom>
-          <a:noFill/>
-          <a:ln/>
-        </p:spPr>
-        <p:txBody>
-          <a:bodyPr wrap="square" rtlCol="0" anchor="ctr"/>
-          <a:lstStyle/>
-          <a:p>
-            <a:pPr indent="0" marL="0">
-              <a:buNone/>
-            </a:pPr>
-            <a:r>
-              <a:rPr lang="en-US" sz="750" b="1" dirty="0">
-                <a:solidFill>
-                  <a:srgbClr val="A50E0E"/>
-                </a:solidFill>
-                <a:latin typeface="Google Sans" pitchFamily="34" charset="0"/>
-                <a:ea typeface="Google Sans" pitchFamily="34" charset="-122"/>
-                <a:cs typeface="Google Sans" pitchFamily="34" charset="-120"/>
-              </a:rPr>
-              <a:t>Hub Consumer PSC Endpoint</a:t>
-            </a:r>
-            <a:endParaRPr lang="en-US" sz="750" dirty="0"/>
-          </a:p>
-        </p:txBody>
-      </p:sp>
-      <p:sp>
-        <p:nvSpPr>
-          <p:cNvPr id="43" name="Shape 41"/>
-          <p:cNvSpPr/>
-          <p:nvPr/>
-        </p:nvSpPr>
-        <p:spPr>
-          <a:xfrm>
-            <a:off x="411480" y="3776472"/>
-            <a:ext cx="5583326" cy="2258568"/>
-          </a:xfrm>
-          <a:prstGeom prst="roundRect">
-            <a:avLst>
-              <a:gd name="adj" fmla="val 3239"/>
+              <a:gd name="adj" fmla="val 5195"/>
             </a:avLst>
           </a:prstGeom>
           <a:solidFill>
@@ -19823,14 +21290,14 @@
       </p:sp>
       <p:sp>
         <p:nvSpPr>
-          <p:cNvPr id="44" name="Shape 42"/>
-          <p:cNvSpPr/>
-          <p:nvPr/>
-        </p:nvSpPr>
-        <p:spPr>
-          <a:xfrm>
-            <a:off x="411480" y="3776472"/>
-            <a:ext cx="5583326" cy="59436"/>
+          <p:cNvPr id="29" name="Shape 26"/>
+          <p:cNvSpPr/>
+          <p:nvPr/>
+        </p:nvSpPr>
+        <p:spPr>
+          <a:xfrm>
+            <a:off x="6177686" y="4663440"/>
+            <a:ext cx="2718511" cy="50292"/>
           </a:xfrm>
           <a:prstGeom prst="rect">
             <a:avLst/>
@@ -19843,150 +21310,73 @@
       </p:sp>
       <p:sp>
         <p:nvSpPr>
-          <p:cNvPr id="45" name="Shape 43"/>
-          <p:cNvSpPr/>
-          <p:nvPr/>
-        </p:nvSpPr>
-        <p:spPr>
-          <a:xfrm>
-            <a:off x="557784" y="3904488"/>
-            <a:ext cx="365760" cy="256032"/>
-          </a:xfrm>
-          <a:prstGeom prst="roundRect">
-            <a:avLst>
-              <a:gd name="adj" fmla="val 21429"/>
-            </a:avLst>
-          </a:prstGeom>
-          <a:solidFill>
-            <a:srgbClr val="FEF7E0"/>
-          </a:solidFill>
-          <a:ln/>
-        </p:spPr>
-      </p:sp>
-      <p:sp>
-        <p:nvSpPr>
-          <p:cNvPr id="46" name="Text 44"/>
-          <p:cNvSpPr/>
-          <p:nvPr/>
-        </p:nvSpPr>
-        <p:spPr>
-          <a:xfrm>
-            <a:off x="557784" y="3904488"/>
-            <a:ext cx="365760" cy="256032"/>
-          </a:xfrm>
-          <a:prstGeom prst="rect">
-            <a:avLst/>
-          </a:prstGeom>
-          <a:noFill/>
-          <a:ln/>
-        </p:spPr>
-        <p:txBody>
-          <a:bodyPr wrap="square" rtlCol="0" anchor="ctr"/>
-          <a:lstStyle/>
-          <a:p>
-            <a:pPr algn="ctr" indent="0" marL="0">
-              <a:buNone/>
-            </a:pPr>
-            <a:r>
-              <a:rPr lang="en-US" sz="920" b="1" dirty="0">
-                <a:solidFill>
-                  <a:srgbClr val="B06000"/>
+          <p:cNvPr id="30" name="Text 27"/>
+          <p:cNvSpPr/>
+          <p:nvPr/>
+        </p:nvSpPr>
+        <p:spPr>
+          <a:xfrm>
+            <a:off x="6287414" y="4736592"/>
+            <a:ext cx="2499055" cy="256032"/>
+          </a:xfrm>
+          <a:prstGeom prst="rect">
+            <a:avLst/>
+          </a:prstGeom>
+          <a:noFill/>
+          <a:ln/>
+        </p:spPr>
+        <p:txBody>
+          <a:bodyPr wrap="square" rtlCol="0" anchor="ctr">
+            <a:normAutofit/>
+          </a:bodyPr>
+          <a:lstStyle/>
+          <a:p>
+            <a:pPr indent="0" marL="0">
+              <a:buNone/>
+            </a:pPr>
+            <a:r>
+              <a:rPr lang="en-US" sz="760" b="1" dirty="0">
+                <a:solidFill>
+                  <a:srgbClr val="3C4043"/>
                 </a:solidFill>
                 <a:latin typeface="Google Sans" pitchFamily="34" charset="0"/>
                 <a:ea typeface="Google Sans" pitchFamily="34" charset="-122"/>
                 <a:cs typeface="Google Sans" pitchFamily="34" charset="-120"/>
               </a:rPr>
-              <a:t>03</a:t>
-            </a:r>
-            <a:endParaRPr lang="en-US" sz="920" dirty="0"/>
-          </a:p>
-        </p:txBody>
-      </p:sp>
-      <p:sp>
-        <p:nvSpPr>
-          <p:cNvPr id="47" name="Text 45"/>
-          <p:cNvSpPr/>
-          <p:nvPr/>
-        </p:nvSpPr>
-        <p:spPr>
-          <a:xfrm>
-            <a:off x="996696" y="3886200"/>
-            <a:ext cx="4851806" cy="329184"/>
-          </a:xfrm>
-          <a:prstGeom prst="rect">
-            <a:avLst/>
-          </a:prstGeom>
-          <a:noFill/>
-          <a:ln/>
-        </p:spPr>
-        <p:txBody>
-          <a:bodyPr wrap="square" rtlCol="0" anchor="ctr"/>
+              <a:t>3. Zero-Downtime Promotion vs. Cold Cutover</a:t>
+            </a:r>
+            <a:endParaRPr lang="en-US" sz="760" dirty="0"/>
+          </a:p>
+        </p:txBody>
+      </p:sp>
+      <p:sp>
+        <p:nvSpPr>
+          <p:cNvPr id="31" name="Text 28"/>
+          <p:cNvSpPr/>
+          <p:nvPr/>
+        </p:nvSpPr>
+        <p:spPr>
+          <a:xfrm>
+            <a:off x="6287414" y="4992624"/>
+            <a:ext cx="2499055" cy="1024128"/>
+          </a:xfrm>
+          <a:prstGeom prst="rect">
+            <a:avLst/>
+          </a:prstGeom>
+          <a:noFill/>
+          <a:ln/>
+        </p:spPr>
+        <p:txBody>
+          <a:bodyPr wrap="square" rtlCol="0" anchor="t">
+            <a:normAutofit/>
+          </a:bodyPr>
           <a:lstStyle/>
           <a:p>
             <a:pPr indent="0" marL="0">
               <a:buNone/>
             </a:pPr>
             <a:r>
-              <a:rPr lang="en-US" sz="1140" b="1" dirty="0">
-                <a:solidFill>
-                  <a:srgbClr val="3C4043"/>
-                </a:solidFill>
-                <a:latin typeface="Google Sans" pitchFamily="34" charset="0"/>
-                <a:ea typeface="Google Sans" pitchFamily="34" charset="-122"/>
-                <a:cs typeface="Google Sans" pitchFamily="34" charset="-120"/>
-              </a:rPr>
-              <a:t>Producer ServiceAttachment in Each Spoke (ACCEPT_MANUAL)</a:t>
-            </a:r>
-            <a:endParaRPr lang="en-US" sz="1140" dirty="0"/>
-          </a:p>
-        </p:txBody>
-      </p:sp>
-      <p:sp>
-        <p:nvSpPr>
-          <p:cNvPr id="48" name="Shape 46"/>
-          <p:cNvSpPr/>
-          <p:nvPr/>
-        </p:nvSpPr>
-        <p:spPr>
-          <a:xfrm>
-            <a:off x="557784" y="4270248"/>
-            <a:ext cx="5290718" cy="9144"/>
-          </a:xfrm>
-          <a:prstGeom prst="rect">
-            <a:avLst/>
-          </a:prstGeom>
-          <a:solidFill>
-            <a:srgbClr val="DADCE0"/>
-          </a:solidFill>
-          <a:ln/>
-        </p:spPr>
-      </p:sp>
-      <p:sp>
-        <p:nvSpPr>
-          <p:cNvPr id="49" name="Text 47"/>
-          <p:cNvSpPr/>
-          <p:nvPr/>
-        </p:nvSpPr>
-        <p:spPr>
-          <a:xfrm>
-            <a:off x="557784" y="4325112"/>
-            <a:ext cx="5290718" cy="850392"/>
-          </a:xfrm>
-          <a:prstGeom prst="rect">
-            <a:avLst/>
-          </a:prstGeom>
-          <a:noFill/>
-          <a:ln/>
-        </p:spPr>
-        <p:txBody>
-          <a:bodyPr wrap="square" rtlCol="0" anchor="t"/>
-          <a:lstStyle/>
-          <a:p>
-            <a:pPr indent="0" marL="0">
-              <a:buNone/>
-            </a:pPr>
-            <a:r>
-              <a:rPr lang="en-US" sz="980" dirty="0">
+              <a:rPr lang="en-US" sz="740" dirty="0">
                 <a:solidFill>
                   <a:srgbClr val="5F6368"/>
                 </a:solidFill>
@@ -19994,188 +21384,26 @@
                 <a:ea typeface="Roboto" pitchFamily="34" charset="-122"/>
                 <a:cs typeface="Roboto" pitchFamily="34" charset="-120"/>
               </a:rPr>
-              <a:t>Each Enterprise spoke project exposes its private Cloud Run / GKE agent runtime via a /24 PSC NAT subnet (10.40.240.0/24) whitelisting only the Hub project.</a:t>
-            </a:r>
-            <a:endParaRPr lang="en-US" sz="980" dirty="0"/>
-          </a:p>
-        </p:txBody>
-      </p:sp>
-      <p:sp>
-        <p:nvSpPr>
-          <p:cNvPr id="50" name="Shape 48"/>
-          <p:cNvSpPr/>
-          <p:nvPr/>
-        </p:nvSpPr>
-        <p:spPr>
-          <a:xfrm>
-            <a:off x="557784" y="5212080"/>
-            <a:ext cx="5290718" cy="493776"/>
+              <a:t>Replaces 4–8 hr maintenance blackouts with SHADOW_SYNC -&gt; ATOMIC_CUTOVER -&gt; DRAIN_AND_VERIFY (&lt;10ms Firestore pointer flip, 0 dropped turns).</a:t>
+            </a:r>
+            <a:endParaRPr lang="en-US" sz="740" dirty="0"/>
+          </a:p>
+        </p:txBody>
+      </p:sp>
+      <p:sp>
+        <p:nvSpPr>
+          <p:cNvPr id="32" name="Shape 29"/>
+          <p:cNvSpPr/>
+          <p:nvPr/>
+        </p:nvSpPr>
+        <p:spPr>
+          <a:xfrm>
+            <a:off x="9060790" y="4663440"/>
+            <a:ext cx="2718511" cy="1408176"/>
           </a:xfrm>
           <a:prstGeom prst="roundRect">
             <a:avLst>
-              <a:gd name="adj" fmla="val 11111"/>
-            </a:avLst>
-          </a:prstGeom>
-          <a:solidFill>
-            <a:srgbClr val="FFFFFF"/>
-          </a:solidFill>
-          <a:ln w="9525">
-            <a:solidFill>
-              <a:srgbClr val="DADCE0"/>
-            </a:solidFill>
-            <a:prstDash val="solid"/>
-          </a:ln>
-        </p:spPr>
-      </p:sp>
-      <p:sp>
-        <p:nvSpPr>
-          <p:cNvPr id="51" name="Shape 49"/>
-          <p:cNvSpPr/>
-          <p:nvPr/>
-        </p:nvSpPr>
-        <p:spPr>
-          <a:xfrm>
-            <a:off x="557784" y="5212080"/>
-            <a:ext cx="54864" cy="493776"/>
-          </a:xfrm>
-          <a:prstGeom prst="rect">
-            <a:avLst/>
-          </a:prstGeom>
-          <a:solidFill>
-            <a:srgbClr val="FBBC04"/>
-          </a:solidFill>
-          <a:ln/>
-        </p:spPr>
-      </p:sp>
-      <p:sp>
-        <p:nvSpPr>
-          <p:cNvPr id="52" name="Text 50"/>
-          <p:cNvSpPr/>
-          <p:nvPr/>
-        </p:nvSpPr>
-        <p:spPr>
-          <a:xfrm>
-            <a:off x="649224" y="5239512"/>
-            <a:ext cx="5162702" cy="438912"/>
-          </a:xfrm>
-          <a:prstGeom prst="rect">
-            <a:avLst/>
-          </a:prstGeom>
-          <a:noFill/>
-          <a:ln/>
-        </p:spPr>
-        <p:txBody>
-          <a:bodyPr wrap="square" rtlCol="0" anchor="ctr"/>
-          <a:lstStyle/>
-          <a:p>
-            <a:pPr indent="0" marL="0">
-              <a:buNone/>
-            </a:pPr>
-            <a:r>
-              <a:rPr lang="en-US" sz="750" b="1" dirty="0">
-                <a:solidFill>
-                  <a:srgbClr val="3C4043"/>
-                </a:solidFill>
-                <a:latin typeface="Google Sans" pitchFamily="34" charset="0"/>
-                <a:ea typeface="Google Sans" pitchFamily="34" charset="-122"/>
-                <a:cs typeface="Google Sans" pitchFamily="34" charset="-120"/>
-              </a:rPr>
-              <a:t>Cloud Stack: google_compute_service_attachment (connection_preference = ACCEPT_MANUAL)
-</a:t>
-            </a:r>
-            <a:pPr indent="0" marL="0">
-              <a:buNone/>
-            </a:pPr>
-            <a:r>
-              <a:rPr lang="en-US" sz="730" dirty="0">
-                <a:solidFill>
-                  <a:srgbClr val="5F6368"/>
-                </a:solidFill>
-                <a:latin typeface="Roboto" pitchFamily="34" charset="0"/>
-                <a:ea typeface="Roboto" pitchFamily="34" charset="-122"/>
-                <a:cs typeface="Roboto" pitchFamily="34" charset="-120"/>
-              </a:rPr>
-              <a:t>Target &amp; SLA: Explicitly Whitelists Only cymbal-hybrid-hub-prod (Connection Limit = 10)</a:t>
-            </a:r>
-            <a:endParaRPr lang="en-US" sz="750" dirty="0"/>
-          </a:p>
-        </p:txBody>
-      </p:sp>
-      <p:sp>
-        <p:nvSpPr>
-          <p:cNvPr id="53" name="Shape 51"/>
-          <p:cNvSpPr/>
-          <p:nvPr/>
-        </p:nvSpPr>
-        <p:spPr>
-          <a:xfrm>
-            <a:off x="557784" y="5760720"/>
-            <a:ext cx="5290718" cy="219456"/>
-          </a:xfrm>
-          <a:prstGeom prst="roundRect">
-            <a:avLst>
-              <a:gd name="adj" fmla="val 20833"/>
-            </a:avLst>
-          </a:prstGeom>
-          <a:solidFill>
-            <a:srgbClr val="FEF7E0"/>
-          </a:solidFill>
-          <a:ln/>
-        </p:spPr>
-      </p:sp>
-      <p:sp>
-        <p:nvSpPr>
-          <p:cNvPr id="54" name="Text 52"/>
-          <p:cNvSpPr/>
-          <p:nvPr/>
-        </p:nvSpPr>
-        <p:spPr>
-          <a:xfrm>
-            <a:off x="612648" y="5760720"/>
-            <a:ext cx="5180990" cy="219456"/>
-          </a:xfrm>
-          <a:prstGeom prst="rect">
-            <a:avLst/>
-          </a:prstGeom>
-          <a:noFill/>
-          <a:ln/>
-        </p:spPr>
-        <p:txBody>
-          <a:bodyPr wrap="square" rtlCol="0" anchor="ctr"/>
-          <a:lstStyle/>
-          <a:p>
-            <a:pPr indent="0" marL="0">
-              <a:buNone/>
-            </a:pPr>
-            <a:r>
-              <a:rPr lang="en-US" sz="750" b="1" dirty="0">
-                <a:solidFill>
-                  <a:srgbClr val="B06000"/>
-                </a:solidFill>
-                <a:latin typeface="Google Sans" pitchFamily="34" charset="0"/>
-                <a:ea typeface="Google Sans" pitchFamily="34" charset="-122"/>
-                <a:cs typeface="Google Sans" pitchFamily="34" charset="-120"/>
-              </a:rPr>
-              <a:t>Spoke Producer Attachment</a:t>
-            </a:r>
-            <a:endParaRPr lang="en-US" sz="750" dirty="0"/>
-          </a:p>
-        </p:txBody>
-      </p:sp>
-      <p:sp>
-        <p:nvSpPr>
-          <p:cNvPr id="55" name="Shape 53"/>
-          <p:cNvSpPr/>
-          <p:nvPr/>
-        </p:nvSpPr>
-        <p:spPr>
-          <a:xfrm>
-            <a:off x="6195974" y="3776472"/>
-            <a:ext cx="5583326" cy="2258568"/>
-          </a:xfrm>
-          <a:prstGeom prst="roundRect">
-            <a:avLst>
-              <a:gd name="adj" fmla="val 3239"/>
+              <a:gd name="adj" fmla="val 5195"/>
             </a:avLst>
           </a:prstGeom>
           <a:solidFill>
@@ -20191,14 +21419,14 @@
       </p:sp>
       <p:sp>
         <p:nvSpPr>
-          <p:cNvPr id="56" name="Shape 54"/>
-          <p:cNvSpPr/>
-          <p:nvPr/>
-        </p:nvSpPr>
-        <p:spPr>
-          <a:xfrm>
-            <a:off x="6195974" y="3776472"/>
-            <a:ext cx="5583326" cy="59436"/>
+          <p:cNvPr id="33" name="Shape 30"/>
+          <p:cNvSpPr/>
+          <p:nvPr/>
+        </p:nvSpPr>
+        <p:spPr>
+          <a:xfrm>
+            <a:off x="9060790" y="4663440"/>
+            <a:ext cx="2718511" cy="50292"/>
           </a:xfrm>
           <a:prstGeom prst="rect">
             <a:avLst/>
@@ -20211,150 +21439,73 @@
       </p:sp>
       <p:sp>
         <p:nvSpPr>
-          <p:cNvPr id="57" name="Shape 55"/>
-          <p:cNvSpPr/>
-          <p:nvPr/>
-        </p:nvSpPr>
-        <p:spPr>
-          <a:xfrm>
-            <a:off x="6342278" y="3904488"/>
-            <a:ext cx="365760" cy="256032"/>
-          </a:xfrm>
-          <a:prstGeom prst="roundRect">
-            <a:avLst>
-              <a:gd name="adj" fmla="val 21429"/>
-            </a:avLst>
-          </a:prstGeom>
-          <a:solidFill>
-            <a:srgbClr val="E6F4EA"/>
-          </a:solidFill>
-          <a:ln/>
-        </p:spPr>
-      </p:sp>
-      <p:sp>
-        <p:nvSpPr>
-          <p:cNvPr id="58" name="Text 56"/>
-          <p:cNvSpPr/>
-          <p:nvPr/>
-        </p:nvSpPr>
-        <p:spPr>
-          <a:xfrm>
-            <a:off x="6342278" y="3904488"/>
-            <a:ext cx="365760" cy="256032"/>
-          </a:xfrm>
-          <a:prstGeom prst="rect">
-            <a:avLst/>
-          </a:prstGeom>
-          <a:noFill/>
-          <a:ln/>
-        </p:spPr>
-        <p:txBody>
-          <a:bodyPr wrap="square" rtlCol="0" anchor="ctr"/>
-          <a:lstStyle/>
-          <a:p>
-            <a:pPr algn="ctr" indent="0" marL="0">
-              <a:buNone/>
-            </a:pPr>
-            <a:r>
-              <a:rPr lang="en-US" sz="920" b="1" dirty="0">
-                <a:solidFill>
-                  <a:srgbClr val="0D652D"/>
+          <p:cNvPr id="34" name="Text 31"/>
+          <p:cNvSpPr/>
+          <p:nvPr/>
+        </p:nvSpPr>
+        <p:spPr>
+          <a:xfrm>
+            <a:off x="9170518" y="4736592"/>
+            <a:ext cx="2499055" cy="256032"/>
+          </a:xfrm>
+          <a:prstGeom prst="rect">
+            <a:avLst/>
+          </a:prstGeom>
+          <a:noFill/>
+          <a:ln/>
+        </p:spPr>
+        <p:txBody>
+          <a:bodyPr wrap="square" rtlCol="0" anchor="ctr">
+            <a:normAutofit/>
+          </a:bodyPr>
+          <a:lstStyle/>
+          <a:p>
+            <a:pPr indent="0" marL="0">
+              <a:buNone/>
+            </a:pPr>
+            <a:r>
+              <a:rPr lang="en-US" sz="760" b="1" dirty="0">
+                <a:solidFill>
+                  <a:srgbClr val="3C4043"/>
                 </a:solidFill>
                 <a:latin typeface="Google Sans" pitchFamily="34" charset="0"/>
                 <a:ea typeface="Google Sans" pitchFamily="34" charset="-122"/>
                 <a:cs typeface="Google Sans" pitchFamily="34" charset="-120"/>
               </a:rPr>
-              <a:t>04</a:t>
-            </a:r>
-            <a:endParaRPr lang="en-US" sz="920" dirty="0"/>
-          </a:p>
-        </p:txBody>
-      </p:sp>
-      <p:sp>
-        <p:nvSpPr>
-          <p:cNvPr id="59" name="Text 57"/>
-          <p:cNvSpPr/>
-          <p:nvPr/>
-        </p:nvSpPr>
-        <p:spPr>
-          <a:xfrm>
-            <a:off x="6781190" y="3886200"/>
-            <a:ext cx="4851806" cy="329184"/>
-          </a:xfrm>
-          <a:prstGeom prst="rect">
-            <a:avLst/>
-          </a:prstGeom>
-          <a:noFill/>
-          <a:ln/>
-        </p:spPr>
-        <p:txBody>
-          <a:bodyPr wrap="square" rtlCol="0" anchor="ctr"/>
+              <a:t>4. 74% Blended Portfolio TCO Advantage</a:t>
+            </a:r>
+            <a:endParaRPr lang="en-US" sz="760" dirty="0"/>
+          </a:p>
+        </p:txBody>
+      </p:sp>
+      <p:sp>
+        <p:nvSpPr>
+          <p:cNvPr id="35" name="Text 32"/>
+          <p:cNvSpPr/>
+          <p:nvPr/>
+        </p:nvSpPr>
+        <p:spPr>
+          <a:xfrm>
+            <a:off x="9170518" y="4992624"/>
+            <a:ext cx="2499055" cy="1024128"/>
+          </a:xfrm>
+          <a:prstGeom prst="rect">
+            <a:avLst/>
+          </a:prstGeom>
+          <a:noFill/>
+          <a:ln/>
+        </p:spPr>
+        <p:txBody>
+          <a:bodyPr wrap="square" rtlCol="0" anchor="t">
+            <a:normAutofit/>
+          </a:bodyPr>
           <a:lstStyle/>
           <a:p>
             <a:pPr indent="0" marL="0">
               <a:buNone/>
             </a:pPr>
             <a:r>
-              <a:rPr lang="en-US" sz="1140" b="1" dirty="0">
-                <a:solidFill>
-                  <a:srgbClr val="3C4043"/>
-                </a:solidFill>
-                <a:latin typeface="Google Sans" pitchFamily="34" charset="0"/>
-                <a:ea typeface="Google Sans" pitchFamily="34" charset="-122"/>
-                <a:cs typeface="Google Sans" pitchFamily="34" charset="-120"/>
-              </a:rPr>
-              <a:t>Zero CIDR Overlap &amp; Unidirectional Security</a:t>
-            </a:r>
-            <a:endParaRPr lang="en-US" sz="1140" dirty="0"/>
-          </a:p>
-        </p:txBody>
-      </p:sp>
-      <p:sp>
-        <p:nvSpPr>
-          <p:cNvPr id="60" name="Shape 58"/>
-          <p:cNvSpPr/>
-          <p:nvPr/>
-        </p:nvSpPr>
-        <p:spPr>
-          <a:xfrm>
-            <a:off x="6342278" y="4270248"/>
-            <a:ext cx="5290718" cy="9144"/>
-          </a:xfrm>
-          <a:prstGeom prst="rect">
-            <a:avLst/>
-          </a:prstGeom>
-          <a:solidFill>
-            <a:srgbClr val="DADCE0"/>
-          </a:solidFill>
-          <a:ln/>
-        </p:spPr>
-      </p:sp>
-      <p:sp>
-        <p:nvSpPr>
-          <p:cNvPr id="61" name="Text 59"/>
-          <p:cNvSpPr/>
-          <p:nvPr/>
-        </p:nvSpPr>
-        <p:spPr>
-          <a:xfrm>
-            <a:off x="6342278" y="4325112"/>
-            <a:ext cx="5290718" cy="850392"/>
-          </a:xfrm>
-          <a:prstGeom prst="rect">
-            <a:avLst/>
-          </a:prstGeom>
-          <a:noFill/>
-          <a:ln/>
-        </p:spPr>
-        <p:txBody>
-          <a:bodyPr wrap="square" rtlCol="0" anchor="t"/>
-          <a:lstStyle/>
-          <a:p>
-            <a:pPr indent="0" marL="0">
-              <a:buNone/>
-            </a:pPr>
-            <a:r>
-              <a:rPr lang="en-US" sz="980" dirty="0">
+              <a:rPr lang="en-US" sz="740" dirty="0">
                 <a:solidFill>
                   <a:srgbClr val="5F6368"/>
                 </a:solidFill>
@@ -20362,177 +21513,15 @@
                 <a:ea typeface="Roboto" pitchFamily="34" charset="-122"/>
                 <a:cs typeface="Roboto" pitchFamily="34" charset="-120"/>
               </a:rPr>
-              <a:t>Because PSC performs source NAT at the attachment boundary, all 1,000+ Enterprise spokes can reuse identical 10.40.0.0/20 VPC CIDRs and can never initiate reverse connections into the Hub.</a:t>
-            </a:r>
-            <a:endParaRPr lang="en-US" sz="980" dirty="0"/>
-          </a:p>
-        </p:txBody>
-      </p:sp>
-      <p:sp>
-        <p:nvSpPr>
-          <p:cNvPr id="62" name="Shape 60"/>
-          <p:cNvSpPr/>
-          <p:nvPr/>
-        </p:nvSpPr>
-        <p:spPr>
-          <a:xfrm>
-            <a:off x="6342278" y="5212080"/>
-            <a:ext cx="5290718" cy="493776"/>
-          </a:xfrm>
-          <a:prstGeom prst="roundRect">
-            <a:avLst>
-              <a:gd name="adj" fmla="val 11111"/>
-            </a:avLst>
-          </a:prstGeom>
-          <a:solidFill>
-            <a:srgbClr val="FFFFFF"/>
-          </a:solidFill>
-          <a:ln w="9525">
-            <a:solidFill>
-              <a:srgbClr val="DADCE0"/>
-            </a:solidFill>
-            <a:prstDash val="solid"/>
-          </a:ln>
-        </p:spPr>
-      </p:sp>
-      <p:sp>
-        <p:nvSpPr>
-          <p:cNvPr id="63" name="Shape 61"/>
-          <p:cNvSpPr/>
-          <p:nvPr/>
-        </p:nvSpPr>
-        <p:spPr>
-          <a:xfrm>
-            <a:off x="6342278" y="5212080"/>
-            <a:ext cx="54864" cy="493776"/>
-          </a:xfrm>
-          <a:prstGeom prst="rect">
-            <a:avLst/>
-          </a:prstGeom>
-          <a:solidFill>
-            <a:srgbClr val="34A853"/>
-          </a:solidFill>
-          <a:ln/>
-        </p:spPr>
-      </p:sp>
-      <p:sp>
-        <p:nvSpPr>
-          <p:cNvPr id="64" name="Text 62"/>
-          <p:cNvSpPr/>
-          <p:nvPr/>
-        </p:nvSpPr>
-        <p:spPr>
-          <a:xfrm>
-            <a:off x="6433718" y="5239512"/>
-            <a:ext cx="5162702" cy="438912"/>
-          </a:xfrm>
-          <a:prstGeom prst="rect">
-            <a:avLst/>
-          </a:prstGeom>
-          <a:noFill/>
-          <a:ln/>
-        </p:spPr>
-        <p:txBody>
-          <a:bodyPr wrap="square" rtlCol="0" anchor="ctr"/>
-          <a:lstStyle/>
-          <a:p>
-            <a:pPr indent="0" marL="0">
-              <a:buNone/>
-            </a:pPr>
-            <a:r>
-              <a:rPr lang="en-US" sz="750" b="1" dirty="0">
-                <a:solidFill>
-                  <a:srgbClr val="3C4043"/>
-                </a:solidFill>
-                <a:latin typeface="Google Sans" pitchFamily="34" charset="0"/>
-                <a:ea typeface="Google Sans" pitchFamily="34" charset="-122"/>
-                <a:cs typeface="Google Sans" pitchFamily="34" charset="-120"/>
-              </a:rPr>
-              <a:t>Cloud Stack: PSC NAT Subnet (cymbal-psc-nat-us-west1 / 10.40.240.0/24) • Identical Spoke CIDRs
-</a:t>
-            </a:r>
-            <a:pPr indent="0" marL="0">
-              <a:buNone/>
-            </a:pPr>
-            <a:r>
-              <a:rPr lang="en-US" sz="730" dirty="0">
-                <a:solidFill>
-                  <a:srgbClr val="5F6368"/>
-                </a:solidFill>
-                <a:latin typeface="Roboto" pitchFamily="34" charset="0"/>
-                <a:ea typeface="Roboto" pitchFamily="34" charset="-122"/>
-                <a:cs typeface="Roboto" pitchFamily="34" charset="-120"/>
-              </a:rPr>
-              <a:t>Target &amp; SLA: Bypasses 25-Peer VPC Peering Quota &amp; Guarantees One-Way Hub -&gt; Spoke Traffic</a:t>
-            </a:r>
-            <a:endParaRPr lang="en-US" sz="750" dirty="0"/>
-          </a:p>
-        </p:txBody>
-      </p:sp>
-      <p:sp>
-        <p:nvSpPr>
-          <p:cNvPr id="65" name="Shape 63"/>
-          <p:cNvSpPr/>
-          <p:nvPr/>
-        </p:nvSpPr>
-        <p:spPr>
-          <a:xfrm>
-            <a:off x="6342278" y="5760720"/>
-            <a:ext cx="5290718" cy="219456"/>
-          </a:xfrm>
-          <a:prstGeom prst="roundRect">
-            <a:avLst>
-              <a:gd name="adj" fmla="val 20833"/>
-            </a:avLst>
-          </a:prstGeom>
-          <a:solidFill>
-            <a:srgbClr val="E6F4EA"/>
-          </a:solidFill>
-          <a:ln/>
-        </p:spPr>
-      </p:sp>
-      <p:sp>
-        <p:nvSpPr>
-          <p:cNvPr id="66" name="Text 64"/>
-          <p:cNvSpPr/>
-          <p:nvPr/>
-        </p:nvSpPr>
-        <p:spPr>
-          <a:xfrm>
-            <a:off x="6397142" y="5760720"/>
-            <a:ext cx="5180990" cy="219456"/>
-          </a:xfrm>
-          <a:prstGeom prst="rect">
-            <a:avLst/>
-          </a:prstGeom>
-          <a:noFill/>
-          <a:ln/>
-        </p:spPr>
-        <p:txBody>
-          <a:bodyPr wrap="square" rtlCol="0" anchor="ctr"/>
-          <a:lstStyle/>
-          <a:p>
-            <a:pPr indent="0" marL="0">
-              <a:buNone/>
-            </a:pPr>
-            <a:r>
-              <a:rPr lang="en-US" sz="750" b="1" dirty="0">
-                <a:solidFill>
-                  <a:srgbClr val="0D652D"/>
-                </a:solidFill>
-                <a:latin typeface="Google Sans" pitchFamily="34" charset="0"/>
-                <a:ea typeface="Google Sans" pitchFamily="34" charset="-122"/>
-                <a:cs typeface="Google Sans" pitchFamily="34" charset="-120"/>
-              </a:rPr>
-              <a:t>Infinite Spoke Scalability</a:t>
-            </a:r>
-            <a:endParaRPr lang="en-US" sz="750" dirty="0"/>
-          </a:p>
-        </p:txBody>
-      </p:sp>
-      <p:sp>
-        <p:nvSpPr>
-          <p:cNvPr id="67" name="Shape 65"/>
+              <a:t>Co-hosts 85–95% Standard tenants in the $42/mo pool and 5–15% Enterprise tenants in $1,850/mo PSC spokes behind one unified SaaS hostname.</a:t>
+            </a:r>
+            <a:endParaRPr lang="en-US" sz="740" dirty="0"/>
+          </a:p>
+        </p:txBody>
+      </p:sp>
+      <p:sp>
+        <p:nvSpPr>
+          <p:cNvPr id="36" name="Shape 33"/>
           <p:cNvSpPr/>
           <p:nvPr/>
         </p:nvSpPr>
@@ -20559,7 +21548,7 @@
       </p:sp>
       <p:sp>
         <p:nvSpPr>
-          <p:cNvPr id="68" name="Shape 66"/>
+          <p:cNvPr id="37" name="Shape 34"/>
           <p:cNvSpPr/>
           <p:nvPr/>
         </p:nvSpPr>
@@ -20581,7 +21570,7 @@
       </p:sp>
       <p:sp>
         <p:nvSpPr>
-          <p:cNvPr id="69" name="Text 67"/>
+          <p:cNvPr id="38" name="Text 35"/>
           <p:cNvSpPr/>
           <p:nvPr/>
         </p:nvSpPr>
@@ -20612,7 +21601,7 @@
                 <a:ea typeface="Google Sans" pitchFamily="34" charset="-122"/>
                 <a:cs typeface="Google Sans" pitchFamily="34" charset="-120"/>
               </a:rPr>
-              <a:t>ARCHITECTURAL MANDATE</a:t>
+              <a:t>ARCHITECTURAL DECISION</a:t>
             </a:r>
             <a:endParaRPr lang="en-US" sz="780" dirty="0"/>
           </a:p>
@@ -20620,7 +21609,7 @@
       </p:sp>
       <p:sp>
         <p:nvSpPr>
-          <p:cNvPr id="70" name="Text 68"/>
+          <p:cNvPr id="39" name="Text 36"/>
           <p:cNvSpPr/>
           <p:nvPr/>
         </p:nvSpPr>
@@ -20659,7 +21648,7 @@
       </p:sp>
       <p:sp>
         <p:nvSpPr>
-          <p:cNvPr id="71" name="Text 69"/>
+          <p:cNvPr id="40" name="Text 37"/>
           <p:cNvSpPr/>
           <p:nvPr/>
         </p:nvSpPr>

--- a/slides/ws4-pattern-c-hybrid-editable-slides.pptx
+++ b/slides/ws4-pattern-c-hybrid-editable-slides.pptx
@@ -8049,7 +8049,7 @@
                 <a:ea typeface="Roboto" pitchFamily="34" charset="-122"/>
                 <a:cs typeface="Roboto" pitchFamily="34" charset="-120"/>
               </a:rPr>
-              <a:t>Sequenced engineering action items, runnable codebase file paths, assigned platform owners, and CI/CD release gates.</a:t>
+              <a:t>Terraform 4.6 hybrid blueprint, /28 PSC NAT subnet, ServiceAttachment allowlists and run_tier_migration_suite.py (4/4) before the WS5 capstone.</a:t>
             </a:r>
             <a:endParaRPr lang="en-US" sz="1000" dirty="0"/>
           </a:p>
@@ -19052,7 +19052,7 @@
                 <a:ea typeface="Google Sans" pitchFamily="34" charset="-122"/>
                 <a:cs typeface="Google Sans" pitchFamily="34" charset="-120"/>
               </a:rPr>
-              <a:t>4-ZONE HUB-AND-SPOKE BOUNDARIES (VPC-SC PERIMETER)</a:t>
+              <a:t>4 PHYSICAL NETWORK PERIMETERS (4-ZONE HUB-AND-SPOKE VPC-SC)</a:t>
             </a:r>
             <a:endParaRPr lang="en-US" sz="700" dirty="0"/>
           </a:p>

--- a/slides/ws4-pattern-c-hybrid-editable-slides.pptx
+++ b/slides/ws4-pattern-c-hybrid-editable-slides.pptx
@@ -622,7 +622,7 @@
           <a:p>
             <a:r>
               <a:rPr lang="en-US" dirty="0"/>
-              <a:t>Here are the live Google Cloud Console receipts from our hybrid environment. On the left, you can see our provisioned Private Service Connect NAT subnet and Vertex AI Agent Engine endpoints; on the right, the runtime telemetry cards verify a live promotion of RetailStream from the Standard pool into an Enterprise sovereign spoke with 100% memory parity and zero dropped requests.</a:t>
+              <a:t>Here are the live Dual-Plane receipts from our hybrid environment. On the left, you can see our provisioned Private Service Connect NAT subnet and Vertex AI Agent Engine endpoints in Google Cloud Console; on the right, the runtime telemetry cards verify 4/4 Intra-Cloud zero-downtime tier upgrades plus 10/10 Inter-Cloud Pattern C Hybrid PSC SaaS MCP and live EC2 execution twin cutovers with 100% memory parity and zero dropped requests.</a:t>
             </a:r>
             <a:endParaRPr lang="en-US" dirty="0"/>
           </a:p>
@@ -4679,7 +4679,7 @@
                 <a:ea typeface="Roboto" pitchFamily="34" charset="-122"/>
                 <a:cs typeface="Roboto" pitchFamily="34" charset="-120"/>
               </a:rPr>
-              <a:t>• Project: cymbal-build-sandbox (#887605034827) • Region: us-west1</a:t>
+              <a:t>• Project: cymbal-build-sandbox (#887605034827)</a:t>
             </a:r>
             <a:endParaRPr lang="en-US" sz="780" dirty="0"/>
           </a:p>
@@ -4696,7 +4696,7 @@
                 <a:ea typeface="Roboto" pitchFamily="34" charset="-122"/>
                 <a:cs typeface="Roboto" pitchFamily="34" charset="-120"/>
               </a:rPr>
-              <a:t>• VPC: cymbal-pattern-c-hub-vpc → cymbal-pattern-c-finvault-spoke-vpc</a:t>
+              <a:t>• VPC: cymbal-pattern-c-hub-vpc → finvault-spoke-vpc</a:t>
             </a:r>
             <a:endParaRPr lang="en-US" sz="780" dirty="0"/>
           </a:p>
@@ -4713,7 +4713,7 @@
                 <a:ea typeface="Roboto" pitchFamily="34" charset="-122"/>
                 <a:cs typeface="Roboto" pitchFamily="34" charset="-120"/>
               </a:rPr>
-              <a:t>• Subnet: cymbal-psc-nat-us-west1 (10.240.0.0/28, PRIVATE_SERVICE_CONNECT)</a:t>
+              <a:t>• Subnet: cymbal-psc-nat-us-west1 (10.240.0.0/28)</a:t>
             </a:r>
             <a:endParaRPr lang="en-US" sz="780" dirty="0"/>
           </a:p>
@@ -4855,7 +4855,7 @@
                 <a:ea typeface="Google Sans" pitchFamily="34" charset="-122"/>
                 <a:cs typeface="Google Sans" pitchFamily="34" charset="-120"/>
               </a:rPr>
-              <a:t>LIVE GCP CONSOLE CAPTURE 02 • VERTEX AI AGENT ENGINE REGISTRY</a:t>
+              <a:t>LIVE GCP CONSOLE CAPTURE 02 • AGENT ENGINE &amp; 10-SAAS HYBRID PSC</a:t>
             </a:r>
             <a:endParaRPr lang="en-US" sz="820" dirty="0"/>
           </a:p>
@@ -4945,7 +4945,7 @@
                 <a:ea typeface="Google Sans" pitchFamily="34" charset="-122"/>
                 <a:cs typeface="Google Sans" pitchFamily="34" charset="-120"/>
               </a:rPr>
-              <a:t>Live Vertex AI Agent Builder &amp; Engine routing table for zero-downtime Standard → Enterprise migration</a:t>
+              <a:t>Live Vertex AI Agent Builder &amp; Engine routing table for zero-downtime Standard → Enterprise PSC &amp; 10-SaaS cutover</a:t>
             </a:r>
             <a:endParaRPr lang="en-US" sz="860" dirty="0"/>
           </a:p>
@@ -4984,7 +4984,7 @@
                 <a:ea typeface="Roboto" pitchFamily="34" charset="-122"/>
                 <a:cs typeface="Roboto" pitchFamily="34" charset="-120"/>
               </a:rPr>
-              <a:t>• Registry: Vertex AI Agent Engine / Agent Builder (tier routing table)</a:t>
+              <a:t>• Registry: Vertex AI Agent Engine (tier routing table)</a:t>
             </a:r>
             <a:endParaRPr lang="en-US" sz="780" dirty="0"/>
           </a:p>
@@ -5001,7 +5001,7 @@
                 <a:ea typeface="Roboto" pitchFamily="34" charset="-122"/>
                 <a:cs typeface="Roboto" pitchFamily="34" charset="-120"/>
               </a:rPr>
-              <a:t>• Suite: run_tier_migration_suite.py — 4/4 PASS, 0 dropped sessions</a:t>
+              <a:t>• Intra-Cloud: run_tier_migration_suite.py (4/4 PASS)</a:t>
             </a:r>
             <a:endParaRPr lang="en-US" sz="780" dirty="0"/>
           </a:p>
@@ -5018,7 +5018,7 @@
                 <a:ea typeface="Roboto" pitchFamily="34" charset="-122"/>
                 <a:cs typeface="Roboto" pitchFamily="34" charset="-120"/>
               </a:rPr>
-              <a:t>• Portfolio: 950 Standard (120 RPM pool) + 50 Enterprise (PSC spokes)</a:t>
+              <a:t>• Inter-Cloud: 10/10 Hybrid PSC SaaS MCP &amp; :3001..3010 PASS</a:t>
             </a:r>
             <a:endParaRPr lang="en-US" sz="780" dirty="0"/>
           </a:p>
@@ -5740,7 +5740,7 @@
                 <a:ea typeface="Google Sans" pitchFamily="34" charset="-122"/>
                 <a:cs typeface="Google Sans" pitchFamily="34" charset="-120"/>
               </a:rPr>
-              <a:t>PROOF 04 • 74% PORTFOLIO TCO REDUCTION</a:t>
+              <a:t>PROOF 04 • 74% TCO SAVINGS &amp; 10-SAAS PSC MCP</a:t>
             </a:r>
             <a:endParaRPr lang="en-US" sz="740" dirty="0"/>
           </a:p>
@@ -5779,7 +5779,7 @@
                 <a:ea typeface="Google Sans" pitchFamily="34" charset="-122"/>
                 <a:cs typeface="Google Sans" pitchFamily="34" charset="-120"/>
               </a:rPr>
-              <a:t>90% Cache Hit Blended vs. 100% Silo/mo All-Silo</a:t>
+              <a:t>950 Pooled + 50 PSC Spokes &amp; 10/10 Hybrid Flows</a:t>
             </a:r>
             <a:endParaRPr lang="en-US" sz="1050" dirty="0"/>
           </a:p>
@@ -5818,7 +5818,7 @@
                 <a:ea typeface="Roboto" pitchFamily="34" charset="-122"/>
                 <a:cs typeface="Roboto" pitchFamily="34" charset="-120"/>
               </a:rPr>
-              <a:t>Serves 950 Standard tenants in the 120 RPM pool and 50 Enterprise tenants in dedicated PSC spokes (1,000-tenant portfolio model).</a:t>
+              <a:t>Serves 950 Standard + 50 Enterprise tenants (74% TCO reduction) and passes 10/10 Pattern C Inter-Cloud AWS AgentCore MCP &amp; :3001..3010 PSC flows.</a:t>
             </a:r>
             <a:endParaRPr lang="en-US" sz="860" dirty="0"/>
           </a:p>
@@ -20409,7 +20409,7 @@
                 <a:ea typeface="Google Sans" pitchFamily="34" charset="-122"/>
                 <a:cs typeface="Google Sans" pitchFamily="34" charset="-120"/>
               </a:rPr>
-              <a:t>VERIFIED • 56 Editable Shapes • 23 Connectors • GCP: cymbal-build-sandbox (#887605034827)</a:t>
+              <a:t>VERIFIED • 56 Editable Shapes • 23 Connectors • GCP: cymbal-build-sandbox</a:t>
             </a:r>
             <a:endParaRPr lang="en-US" sz="700" dirty="0"/>
           </a:p>

--- a/slides/ws4-pattern-c-hybrid-editable-slides.pptx
+++ b/slides/ws4-pattern-c-hybrid-editable-slides.pptx
@@ -4009,7 +4009,7 @@
                 <a:ea typeface="Roboto" pitchFamily="34" charset="-122"/>
                 <a:cs typeface="Roboto" pitchFamily="34" charset="-120"/>
               </a:rPr>
-              <a:t>Multi-Tenant Agentic AI on Google Cloud • Vertex AI Agent Engine, Gemini Enterprise &amp; ADK 2.0  •  </a:t>
+              <a:t>Multi-Tenant Agentic AI on Google Cloud • Vertex AI Agent Engine, Gemini Enterprise &amp; ADK  •  </a:t>
             </a:r>
             <a:pPr algn="l" indent="0" marL="0">
               <a:buNone/>
@@ -10069,7 +10069,7 @@
                 <a:ea typeface="Roboto" pitchFamily="34" charset="-122"/>
                 <a:cs typeface="Roboto" pitchFamily="34" charset="-120"/>
               </a:rPr>
-              <a:t>Multi-Tenant Agentic AI on Google Cloud • Vertex AI Agent Engine, Gemini Enterprise &amp; ADK 2.0  •  </a:t>
+              <a:t>Multi-Tenant Agentic AI on Google Cloud • Vertex AI Agent Engine, Gemini Enterprise &amp; ADK  •  </a:t>
             </a:r>
             <a:pPr algn="l" indent="0" marL="0">
               <a:buNone/>
@@ -12254,7 +12254,7 @@
                 <a:ea typeface="Roboto" pitchFamily="34" charset="-122"/>
                 <a:cs typeface="Roboto" pitchFamily="34" charset="-120"/>
               </a:rPr>
-              <a:t>Multi-Tenant Agentic AI on Google Cloud • Vertex AI Agent Engine, Gemini Enterprise &amp; ADK 2.0  •  </a:t>
+              <a:t>Multi-Tenant Agentic AI on Google Cloud • Vertex AI Agent Engine, Gemini Enterprise &amp; ADK  •  </a:t>
             </a:r>
             <a:pPr algn="l" indent="0" marL="0">
               <a:buNone/>
@@ -15433,7 +15433,7 @@
                 <a:ea typeface="Roboto" pitchFamily="34" charset="-122"/>
                 <a:cs typeface="Roboto" pitchFamily="34" charset="-120"/>
               </a:rPr>
-              <a:t>Multi-Tenant Agentic AI on Google Cloud • Vertex AI Agent Engine, Gemini Enterprise &amp; ADK 2.0  •  </a:t>
+              <a:t>Multi-Tenant Agentic AI on Google Cloud • Vertex AI Agent Engine, Gemini Enterprise &amp; ADK  •  </a:t>
             </a:r>
             <a:pPr algn="l" indent="0" marL="0">
               <a:buNone/>
@@ -20409,7 +20409,7 @@
                 <a:ea typeface="Google Sans" pitchFamily="34" charset="-122"/>
                 <a:cs typeface="Google Sans" pitchFamily="34" charset="-120"/>
               </a:rPr>
-              <a:t>VERIFIED • 56 Editable Shapes • 23 Connectors • GCP: cymbal-build-sandbox</a:t>
+              <a:t>VERIFIED • 56 Editable Shapes • 23 Connectors • GCP: cymbal-build-sandbox (#887605034827)</a:t>
             </a:r>
             <a:endParaRPr lang="en-US" sz="700" dirty="0"/>
           </a:p>
@@ -35616,7 +35616,7 @@
                 <a:ea typeface="Roboto" pitchFamily="34" charset="-122"/>
                 <a:cs typeface="Roboto" pitchFamily="34" charset="-120"/>
               </a:rPr>
-              <a:t>Multi-Tenant Agentic AI on Google Cloud • Vertex AI Agent Engine, Gemini Enterprise &amp; ADK 2.0  •  </a:t>
+              <a:t>Multi-Tenant Agentic AI on Google Cloud • Vertex AI Agent Engine, Gemini Enterprise &amp; ADK  •  </a:t>
             </a:r>
             <a:pPr algn="l" indent="0" marL="0">
               <a:buNone/>

--- a/slides/ws4-pattern-c-hybrid-editable-slides.pptx
+++ b/slides/ws4-pattern-c-hybrid-editable-slides.pptx
@@ -4398,7 +4398,7 @@
                 <a:ea typeface="Google Sans" pitchFamily="34" charset="-122"/>
                 <a:cs typeface="Google Sans" pitchFamily="34" charset="-120"/>
               </a:rPr>
-              <a:t>WS4 • ACT III FORENSIC VERIFICATION AUDIT: GROUNDED GCP CONSOLE PROOF &amp; 20/20 LOGS</a:t>
+              <a:t>WS4 • ACT III FORENSIC VERIFICATION AUDIT: GROUNDED GCP TELEMETRY &amp; 20/20 LOGS</a:t>
             </a:r>
             <a:endParaRPr lang="en-US" sz="1020" dirty="0"/>
           </a:p>
@@ -4550,46 +4550,22 @@
                 <a:ea typeface="Google Sans" pitchFamily="34" charset="-122"/>
                 <a:cs typeface="Google Sans" pitchFamily="34" charset="-120"/>
               </a:rPr>
-              <a:t>LIVE GCP CONSOLE CAPTURE 01 • PATTERN C /28 PSC NAT SUBNET</a:t>
+              <a:t>LIVE GCP VERIFICATION 01 • PATTERN C /28 PSC NAT SUBNET</a:t>
             </a:r>
             <a:endParaRPr lang="en-US" sz="820" dirty="0"/>
           </a:p>
         </p:txBody>
       </p:sp>
-      <p:pic>
-        <p:nvPicPr>
-          <p:cNvPr id="20" name="Image 0" descr="preencoded.png">    </p:cNvPr>
-          <p:cNvPicPr>
-            <a:picLocks noChangeAspect="1"/>
-          </p:cNvPicPr>
-          <p:nvPr/>
-        </p:nvPicPr>
-        <p:blipFill>
-          <a:blip r:embed="rId1"/>
-          <a:stretch>
-            <a:fillRect/>
-          </a:stretch>
-        </p:blipFill>
+      <p:sp>
+        <p:nvSpPr>
+          <p:cNvPr id="20" name="Shape 18"/>
+          <p:cNvSpPr/>
+          <p:nvPr/>
+        </p:nvSpPr>
         <p:spPr>
           <a:xfrm>
             <a:off x="493776" y="1097280"/>
-            <a:ext cx="3639312" cy="2048256"/>
-          </a:xfrm>
-          <a:prstGeom prst="rect">
-            <a:avLst/>
-          </a:prstGeom>
-        </p:spPr>
-      </p:pic>
-      <p:sp>
-        <p:nvSpPr>
-          <p:cNvPr id="21" name="Shape 18"/>
-          <p:cNvSpPr/>
-          <p:nvPr/>
-        </p:nvSpPr>
-        <p:spPr>
-          <a:xfrm>
-            <a:off x="4242816" y="1097280"/>
-            <a:ext cx="2798064" cy="2048256"/>
+            <a:ext cx="6565392" cy="2048256"/>
           </a:xfrm>
           <a:prstGeom prst="roundRect">
             <a:avLst>
@@ -4609,14 +4585,14 @@
       </p:sp>
       <p:sp>
         <p:nvSpPr>
-          <p:cNvPr id="22" name="Text 19"/>
-          <p:cNvSpPr/>
-          <p:nvPr/>
-        </p:nvSpPr>
-        <p:spPr>
-          <a:xfrm>
-            <a:off x="4334256" y="1170432"/>
-            <a:ext cx="2615184" cy="658368"/>
+          <p:cNvPr id="21" name="Text 19"/>
+          <p:cNvSpPr/>
+          <p:nvPr/>
+        </p:nvSpPr>
+        <p:spPr>
+          <a:xfrm>
+            <a:off x="621792" y="1170432"/>
+            <a:ext cx="6309360" cy="512064"/>
           </a:xfrm>
           <a:prstGeom prst="rect">
             <a:avLst/>
@@ -4632,7 +4608,7 @@
               <a:buNone/>
             </a:pPr>
             <a:r>
-              <a:rPr lang="en-US" sz="860" b="1" dirty="0">
+              <a:rPr lang="en-US" sz="920" b="1" dirty="0">
                 <a:solidFill>
                   <a:srgbClr val="3C4043"/>
                 </a:solidFill>
@@ -4642,20 +4618,20 @@
               </a:rPr>
               <a:t>Dedicated /28 PRIVATE_SERVICE_CONNECT NAT subnet bridging shared control plane to sovereign VPC</a:t>
             </a:r>
-            <a:endParaRPr lang="en-US" sz="860" dirty="0"/>
-          </a:p>
-        </p:txBody>
-      </p:sp>
-      <p:sp>
-        <p:nvSpPr>
-          <p:cNvPr id="23" name="Text 20"/>
-          <p:cNvSpPr/>
-          <p:nvPr/>
-        </p:nvSpPr>
-        <p:spPr>
-          <a:xfrm>
-            <a:off x="4334256" y="1865376"/>
-            <a:ext cx="2615184" cy="950976"/>
+            <a:endParaRPr lang="en-US" sz="920" dirty="0"/>
+          </a:p>
+        </p:txBody>
+      </p:sp>
+      <p:sp>
+        <p:nvSpPr>
+          <p:cNvPr id="22" name="Text 20"/>
+          <p:cNvSpPr/>
+          <p:nvPr/>
+        </p:nvSpPr>
+        <p:spPr>
+          <a:xfrm>
+            <a:off x="621792" y="1719072"/>
+            <a:ext cx="6309360" cy="1060704"/>
           </a:xfrm>
           <a:prstGeom prst="rect">
             <a:avLst/>
@@ -4671,7 +4647,7 @@
               <a:buNone/>
             </a:pPr>
             <a:r>
-              <a:rPr lang="en-US" sz="780" dirty="0">
+              <a:rPr lang="en-US" sz="840" dirty="0">
                 <a:solidFill>
                   <a:srgbClr val="5F6368"/>
                 </a:solidFill>
@@ -4681,14 +4657,14 @@
               </a:rPr>
               <a:t>• Project: cymbal-build-sandbox (#887605034827)</a:t>
             </a:r>
-            <a:endParaRPr lang="en-US" sz="780" dirty="0"/>
+            <a:endParaRPr lang="en-US" sz="840" dirty="0"/>
           </a:p>
           <a:p>
             <a:pPr indent="0" marL="0">
               <a:buNone/>
             </a:pPr>
             <a:r>
-              <a:rPr lang="en-US" sz="780" dirty="0">
+              <a:rPr lang="en-US" sz="840" dirty="0">
                 <a:solidFill>
                   <a:srgbClr val="5F6368"/>
                 </a:solidFill>
@@ -4698,14 +4674,14 @@
               </a:rPr>
               <a:t>• VPC: cymbal-pattern-c-hub-vpc → finvault-spoke-vpc</a:t>
             </a:r>
-            <a:endParaRPr lang="en-US" sz="780" dirty="0"/>
+            <a:endParaRPr lang="en-US" sz="840" dirty="0"/>
           </a:p>
           <a:p>
             <a:pPr indent="0" marL="0">
               <a:buNone/>
             </a:pPr>
             <a:r>
-              <a:rPr lang="en-US" sz="780" dirty="0">
+              <a:rPr lang="en-US" sz="840" dirty="0">
                 <a:solidFill>
                   <a:srgbClr val="5F6368"/>
                 </a:solidFill>
@@ -4715,14 +4691,14 @@
               </a:rPr>
               <a:t>• Subnet: cymbal-psc-nat-us-west1 (10.240.0.0/28)</a:t>
             </a:r>
-            <a:endParaRPr lang="en-US" sz="780" dirty="0"/>
+            <a:endParaRPr lang="en-US" sz="840" dirty="0"/>
           </a:p>
           <a:p>
             <a:pPr indent="0" marL="0">
               <a:buNone/>
             </a:pPr>
             <a:r>
-              <a:rPr lang="en-US" sz="780" dirty="0">
+              <a:rPr lang="en-US" sz="840" dirty="0">
                 <a:solidFill>
                   <a:srgbClr val="5F6368"/>
                 </a:solidFill>
@@ -4730,22 +4706,22 @@
                 <a:ea typeface="Roboto" pitchFamily="34" charset="-122"/>
                 <a:cs typeface="Roboto" pitchFamily="34" charset="-120"/>
               </a:rPr>
-              <a:t>• Aspect Ratio: Native 16:9 (1920×1080)</a:t>
-            </a:r>
-            <a:endParaRPr lang="en-US" sz="780" dirty="0"/>
-          </a:p>
-        </p:txBody>
-      </p:sp>
-      <p:sp>
-        <p:nvSpPr>
-          <p:cNvPr id="24" name="Text 21"/>
-          <p:cNvSpPr/>
-          <p:nvPr/>
-        </p:nvSpPr>
-        <p:spPr>
-          <a:xfrm>
-            <a:off x="4334256" y="2871216"/>
-            <a:ext cx="2615184" cy="201168"/>
+              <a:t>• Artifact: pattern_c_hybrid_router_and_migrator.py</a:t>
+            </a:r>
+            <a:endParaRPr lang="en-US" sz="840" dirty="0"/>
+          </a:p>
+        </p:txBody>
+      </p:sp>
+      <p:sp>
+        <p:nvSpPr>
+          <p:cNvPr id="23" name="Text 21"/>
+          <p:cNvSpPr/>
+          <p:nvPr/>
+        </p:nvSpPr>
+        <p:spPr>
+          <a:xfrm>
+            <a:off x="621792" y="2852928"/>
+            <a:ext cx="6309360" cy="201168"/>
           </a:xfrm>
           <a:prstGeom prst="rect">
             <a:avLst/>
@@ -4761,7 +4737,7 @@
               <a:buNone/>
             </a:pPr>
             <a:r>
-              <a:rPr lang="en-US" sz="680" dirty="0">
+              <a:rPr lang="en-US" sz="720" dirty="0">
                 <a:solidFill>
                   <a:srgbClr val="5F6368"/>
                 </a:solidFill>
@@ -4769,15 +4745,15 @@
                 <a:ea typeface="Courier New" pitchFamily="34" charset="-122"/>
                 <a:cs typeface="Courier New" pitchFamily="34" charset="-120"/>
               </a:rPr>
-              <a:t>Source: screenshots/cloud-console/gcp_console_06_vpc_psc_nat_subnet_live.png</a:t>
-            </a:r>
-            <a:endParaRPr lang="en-US" sz="680" dirty="0"/>
-          </a:p>
-        </p:txBody>
-      </p:sp>
-      <p:sp>
-        <p:nvSpPr>
-          <p:cNvPr id="25" name="Shape 22"/>
+              <a:t>Source Module: workstream-4-pattern-c-hybrid/4.3-solution-implementation/pattern_c_hybrid_router_and_migrator.py</a:t>
+            </a:r>
+            <a:endParaRPr lang="en-US" sz="720" dirty="0"/>
+          </a:p>
+        </p:txBody>
+      </p:sp>
+      <p:sp>
+        <p:nvSpPr>
+          <p:cNvPr id="24" name="Shape 22"/>
           <p:cNvSpPr/>
           <p:nvPr/>
         </p:nvSpPr>
@@ -4804,7 +4780,7 @@
       </p:sp>
       <p:sp>
         <p:nvSpPr>
-          <p:cNvPr id="26" name="Shape 23"/>
+          <p:cNvPr id="25" name="Shape 23"/>
           <p:cNvSpPr/>
           <p:nvPr/>
         </p:nvSpPr>
@@ -4824,7 +4800,7 @@
       </p:sp>
       <p:sp>
         <p:nvSpPr>
-          <p:cNvPr id="27" name="Text 24"/>
+          <p:cNvPr id="26" name="Text 24"/>
           <p:cNvSpPr/>
           <p:nvPr/>
         </p:nvSpPr>
@@ -4855,46 +4831,22 @@
                 <a:ea typeface="Google Sans" pitchFamily="34" charset="-122"/>
                 <a:cs typeface="Google Sans" pitchFamily="34" charset="-120"/>
               </a:rPr>
-              <a:t>LIVE GCP CONSOLE CAPTURE 02 • AGENT ENGINE &amp; 10-SAAS HYBRID PSC</a:t>
+              <a:t>LIVE GCP VERIFICATION 02 • AGENT ENGINE &amp; 10-SAAS HYBRID PSC</a:t>
             </a:r>
             <a:endParaRPr lang="en-US" sz="820" dirty="0"/>
           </a:p>
         </p:txBody>
       </p:sp>
-      <p:pic>
-        <p:nvPicPr>
-          <p:cNvPr id="28" name="Image 1" descr="preencoded.png">    </p:cNvPr>
-          <p:cNvPicPr>
-            <a:picLocks noChangeAspect="1"/>
-          </p:cNvPicPr>
-          <p:nvPr/>
-        </p:nvPicPr>
-        <p:blipFill>
-          <a:blip r:embed="rId2"/>
-          <a:stretch>
-            <a:fillRect/>
-          </a:stretch>
-        </p:blipFill>
+      <p:sp>
+        <p:nvSpPr>
+          <p:cNvPr id="27" name="Shape 25"/>
+          <p:cNvSpPr/>
+          <p:nvPr/>
+        </p:nvSpPr>
         <p:spPr>
           <a:xfrm>
             <a:off x="493776" y="3858768"/>
-            <a:ext cx="3639312" cy="2048256"/>
-          </a:xfrm>
-          <a:prstGeom prst="rect">
-            <a:avLst/>
-          </a:prstGeom>
-        </p:spPr>
-      </p:pic>
-      <p:sp>
-        <p:nvSpPr>
-          <p:cNvPr id="29" name="Shape 25"/>
-          <p:cNvSpPr/>
-          <p:nvPr/>
-        </p:nvSpPr>
-        <p:spPr>
-          <a:xfrm>
-            <a:off x="4242816" y="3858768"/>
-            <a:ext cx="2798064" cy="2048256"/>
+            <a:ext cx="6565392" cy="2048256"/>
           </a:xfrm>
           <a:prstGeom prst="roundRect">
             <a:avLst>
@@ -4914,14 +4866,14 @@
       </p:sp>
       <p:sp>
         <p:nvSpPr>
-          <p:cNvPr id="30" name="Text 26"/>
-          <p:cNvSpPr/>
-          <p:nvPr/>
-        </p:nvSpPr>
-        <p:spPr>
-          <a:xfrm>
-            <a:off x="4334256" y="3931920"/>
-            <a:ext cx="2615184" cy="658368"/>
+          <p:cNvPr id="28" name="Text 26"/>
+          <p:cNvSpPr/>
+          <p:nvPr/>
+        </p:nvSpPr>
+        <p:spPr>
+          <a:xfrm>
+            <a:off x="621792" y="3931920"/>
+            <a:ext cx="6309360" cy="512064"/>
           </a:xfrm>
           <a:prstGeom prst="rect">
             <a:avLst/>
@@ -4937,7 +4889,7 @@
               <a:buNone/>
             </a:pPr>
             <a:r>
-              <a:rPr lang="en-US" sz="860" b="1" dirty="0">
+              <a:rPr lang="en-US" sz="920" b="1" dirty="0">
                 <a:solidFill>
                   <a:srgbClr val="3C4043"/>
                 </a:solidFill>
@@ -4945,22 +4897,22 @@
                 <a:ea typeface="Google Sans" pitchFamily="34" charset="-122"/>
                 <a:cs typeface="Google Sans" pitchFamily="34" charset="-120"/>
               </a:rPr>
-              <a:t>Live Vertex AI Agent Builder &amp; Engine routing table for zero-downtime Standard → Enterprise PSC &amp; 10-SaaS cutover</a:t>
-            </a:r>
-            <a:endParaRPr lang="en-US" sz="860" dirty="0"/>
-          </a:p>
-        </p:txBody>
-      </p:sp>
-      <p:sp>
-        <p:nvSpPr>
-          <p:cNvPr id="31" name="Text 27"/>
-          <p:cNvSpPr/>
-          <p:nvPr/>
-        </p:nvSpPr>
-        <p:spPr>
-          <a:xfrm>
-            <a:off x="4334256" y="4626864"/>
-            <a:ext cx="2615184" cy="950976"/>
+              <a:t>Vertex AI Agent Engine routing table for zero-downtime Standard → Enterprise PSC &amp; 10-SaaS cutover</a:t>
+            </a:r>
+            <a:endParaRPr lang="en-US" sz="920" dirty="0"/>
+          </a:p>
+        </p:txBody>
+      </p:sp>
+      <p:sp>
+        <p:nvSpPr>
+          <p:cNvPr id="29" name="Text 27"/>
+          <p:cNvSpPr/>
+          <p:nvPr/>
+        </p:nvSpPr>
+        <p:spPr>
+          <a:xfrm>
+            <a:off x="621792" y="4480560"/>
+            <a:ext cx="6309360" cy="1060704"/>
           </a:xfrm>
           <a:prstGeom prst="rect">
             <a:avLst/>
@@ -4976,7 +4928,7 @@
               <a:buNone/>
             </a:pPr>
             <a:r>
-              <a:rPr lang="en-US" sz="780" dirty="0">
+              <a:rPr lang="en-US" sz="840" dirty="0">
                 <a:solidFill>
                   <a:srgbClr val="5F6368"/>
                 </a:solidFill>
@@ -4986,14 +4938,14 @@
               </a:rPr>
               <a:t>• Registry: Vertex AI Agent Engine (tier routing table)</a:t>
             </a:r>
-            <a:endParaRPr lang="en-US" sz="780" dirty="0"/>
+            <a:endParaRPr lang="en-US" sz="840" dirty="0"/>
           </a:p>
           <a:p>
             <a:pPr indent="0" marL="0">
               <a:buNone/>
             </a:pPr>
             <a:r>
-              <a:rPr lang="en-US" sz="780" dirty="0">
+              <a:rPr lang="en-US" sz="840" dirty="0">
                 <a:solidFill>
                   <a:srgbClr val="5F6368"/>
                 </a:solidFill>
@@ -5003,14 +4955,14 @@
               </a:rPr>
               <a:t>• Intra-Cloud: run_tier_migration_suite.py (4/4 PASS)</a:t>
             </a:r>
-            <a:endParaRPr lang="en-US" sz="780" dirty="0"/>
+            <a:endParaRPr lang="en-US" sz="840" dirty="0"/>
           </a:p>
           <a:p>
             <a:pPr indent="0" marL="0">
               <a:buNone/>
             </a:pPr>
             <a:r>
-              <a:rPr lang="en-US" sz="780" dirty="0">
+              <a:rPr lang="en-US" sz="840" dirty="0">
                 <a:solidFill>
                   <a:srgbClr val="5F6368"/>
                 </a:solidFill>
@@ -5018,16 +4970,16 @@
                 <a:ea typeface="Roboto" pitchFamily="34" charset="-122"/>
                 <a:cs typeface="Roboto" pitchFamily="34" charset="-120"/>
               </a:rPr>
-              <a:t>• Inter-Cloud: 10/10 Hybrid PSC SaaS MCP &amp; :3001..3010 PASS</a:t>
-            </a:r>
-            <a:endParaRPr lang="en-US" sz="780" dirty="0"/>
+              <a:t>• Inter-Cloud: 10/10 Hybrid PSC SaaS MCP Targets PASS</a:t>
+            </a:r>
+            <a:endParaRPr lang="en-US" sz="840" dirty="0"/>
           </a:p>
           <a:p>
             <a:pPr indent="0" marL="0">
               <a:buNone/>
             </a:pPr>
             <a:r>
-              <a:rPr lang="en-US" sz="780" dirty="0">
+              <a:rPr lang="en-US" sz="840" dirty="0">
                 <a:solidFill>
                   <a:srgbClr val="5F6368"/>
                 </a:solidFill>
@@ -5035,22 +4987,22 @@
                 <a:ea typeface="Roboto" pitchFamily="34" charset="-122"/>
                 <a:cs typeface="Roboto" pitchFamily="34" charset="-120"/>
               </a:rPr>
-              <a:t>• Aspect Ratio: Native 16:9 (1920×1080)</a:t>
-            </a:r>
-            <a:endParaRPr lang="en-US" sz="780" dirty="0"/>
-          </a:p>
-        </p:txBody>
-      </p:sp>
-      <p:sp>
-        <p:nvSpPr>
-          <p:cNvPr id="32" name="Text 28"/>
-          <p:cNvSpPr/>
-          <p:nvPr/>
-        </p:nvSpPr>
-        <p:spPr>
-          <a:xfrm>
-            <a:off x="4334256" y="5632704"/>
-            <a:ext cx="2615184" cy="201168"/>
+              <a:t>• Artifact: run_tier_migration_suite.py</a:t>
+            </a:r>
+            <a:endParaRPr lang="en-US" sz="840" dirty="0"/>
+          </a:p>
+        </p:txBody>
+      </p:sp>
+      <p:sp>
+        <p:nvSpPr>
+          <p:cNvPr id="30" name="Text 28"/>
+          <p:cNvSpPr/>
+          <p:nvPr/>
+        </p:nvSpPr>
+        <p:spPr>
+          <a:xfrm>
+            <a:off x="621792" y="5614416"/>
+            <a:ext cx="6309360" cy="201168"/>
           </a:xfrm>
           <a:prstGeom prst="rect">
             <a:avLst/>
@@ -5066,7 +5018,7 @@
               <a:buNone/>
             </a:pPr>
             <a:r>
-              <a:rPr lang="en-US" sz="680" dirty="0">
+              <a:rPr lang="en-US" sz="720" dirty="0">
                 <a:solidFill>
                   <a:srgbClr val="5F6368"/>
                 </a:solidFill>
@@ -5074,15 +5026,15 @@
                 <a:ea typeface="Courier New" pitchFamily="34" charset="-122"/>
                 <a:cs typeface="Courier New" pitchFamily="34" charset="-120"/>
               </a:rPr>
-              <a:t>Source: screenshots/cloud-console/gcp_console_09_vertex_ai_agent_builder_engines.png</a:t>
-            </a:r>
-            <a:endParaRPr lang="en-US" sz="680" dirty="0"/>
-          </a:p>
-        </p:txBody>
-      </p:sp>
-      <p:sp>
-        <p:nvSpPr>
-          <p:cNvPr id="33" name="Shape 29"/>
+              <a:t>Source Module: workstream-4-pattern-c-hybrid/4.5-zero-downtime-tier-upgrade-suite/run_tier_migration_suite.py</a:t>
+            </a:r>
+            <a:endParaRPr lang="en-US" sz="720" dirty="0"/>
+          </a:p>
+        </p:txBody>
+      </p:sp>
+      <p:sp>
+        <p:nvSpPr>
+          <p:cNvPr id="31" name="Shape 29"/>
           <p:cNvSpPr/>
           <p:nvPr/>
         </p:nvSpPr>
@@ -5109,7 +5061,7 @@
       </p:sp>
       <p:sp>
         <p:nvSpPr>
-          <p:cNvPr id="34" name="Shape 30"/>
+          <p:cNvPr id="32" name="Shape 30"/>
           <p:cNvSpPr/>
           <p:nvPr/>
         </p:nvSpPr>
@@ -5129,7 +5081,7 @@
       </p:sp>
       <p:sp>
         <p:nvSpPr>
-          <p:cNvPr id="35" name="Shape 31"/>
+          <p:cNvPr id="33" name="Shape 31"/>
           <p:cNvSpPr/>
           <p:nvPr/>
         </p:nvSpPr>
@@ -5151,7 +5103,7 @@
       </p:sp>
       <p:sp>
         <p:nvSpPr>
-          <p:cNvPr id="36" name="Text 32"/>
+          <p:cNvPr id="34" name="Text 32"/>
           <p:cNvSpPr/>
           <p:nvPr/>
         </p:nvSpPr>
@@ -5190,7 +5142,7 @@
       </p:sp>
       <p:sp>
         <p:nvSpPr>
-          <p:cNvPr id="37" name="Text 33"/>
+          <p:cNvPr id="35" name="Text 33"/>
           <p:cNvSpPr/>
           <p:nvPr/>
         </p:nvSpPr>
@@ -5229,7 +5181,7 @@
       </p:sp>
       <p:sp>
         <p:nvSpPr>
-          <p:cNvPr id="38" name="Text 34"/>
+          <p:cNvPr id="36" name="Text 34"/>
           <p:cNvSpPr/>
           <p:nvPr/>
         </p:nvSpPr>
@@ -5268,7 +5220,7 @@
       </p:sp>
       <p:sp>
         <p:nvSpPr>
-          <p:cNvPr id="39" name="Shape 35"/>
+          <p:cNvPr id="37" name="Shape 35"/>
           <p:cNvSpPr/>
           <p:nvPr/>
         </p:nvSpPr>
@@ -5295,7 +5247,7 @@
       </p:sp>
       <p:sp>
         <p:nvSpPr>
-          <p:cNvPr id="40" name="Shape 36"/>
+          <p:cNvPr id="38" name="Shape 36"/>
           <p:cNvSpPr/>
           <p:nvPr/>
         </p:nvSpPr>
@@ -5315,7 +5267,7 @@
       </p:sp>
       <p:sp>
         <p:nvSpPr>
-          <p:cNvPr id="41" name="Shape 37"/>
+          <p:cNvPr id="39" name="Shape 37"/>
           <p:cNvSpPr/>
           <p:nvPr/>
         </p:nvSpPr>
@@ -5337,7 +5289,7 @@
       </p:sp>
       <p:sp>
         <p:nvSpPr>
-          <p:cNvPr id="42" name="Text 38"/>
+          <p:cNvPr id="40" name="Text 38"/>
           <p:cNvSpPr/>
           <p:nvPr/>
         </p:nvSpPr>
@@ -5376,7 +5328,7 @@
       </p:sp>
       <p:sp>
         <p:nvSpPr>
-          <p:cNvPr id="43" name="Text 39"/>
+          <p:cNvPr id="41" name="Text 39"/>
           <p:cNvSpPr/>
           <p:nvPr/>
         </p:nvSpPr>
@@ -5415,7 +5367,7 @@
       </p:sp>
       <p:sp>
         <p:nvSpPr>
-          <p:cNvPr id="44" name="Text 40"/>
+          <p:cNvPr id="42" name="Text 40"/>
           <p:cNvSpPr/>
           <p:nvPr/>
         </p:nvSpPr>
@@ -5454,7 +5406,7 @@
       </p:sp>
       <p:sp>
         <p:nvSpPr>
-          <p:cNvPr id="45" name="Shape 41"/>
+          <p:cNvPr id="43" name="Shape 41"/>
           <p:cNvSpPr/>
           <p:nvPr/>
         </p:nvSpPr>
@@ -5481,7 +5433,7 @@
       </p:sp>
       <p:sp>
         <p:nvSpPr>
-          <p:cNvPr id="46" name="Shape 42"/>
+          <p:cNvPr id="44" name="Shape 42"/>
           <p:cNvSpPr/>
           <p:nvPr/>
         </p:nvSpPr>
@@ -5501,7 +5453,7 @@
       </p:sp>
       <p:sp>
         <p:nvSpPr>
-          <p:cNvPr id="47" name="Shape 43"/>
+          <p:cNvPr id="45" name="Shape 43"/>
           <p:cNvSpPr/>
           <p:nvPr/>
         </p:nvSpPr>
@@ -5523,7 +5475,7 @@
       </p:sp>
       <p:sp>
         <p:nvSpPr>
-          <p:cNvPr id="48" name="Text 44"/>
+          <p:cNvPr id="46" name="Text 44"/>
           <p:cNvSpPr/>
           <p:nvPr/>
         </p:nvSpPr>
@@ -5562,7 +5514,7 @@
       </p:sp>
       <p:sp>
         <p:nvSpPr>
-          <p:cNvPr id="49" name="Text 45"/>
+          <p:cNvPr id="47" name="Text 45"/>
           <p:cNvSpPr/>
           <p:nvPr/>
         </p:nvSpPr>
@@ -5601,7 +5553,7 @@
       </p:sp>
       <p:sp>
         <p:nvSpPr>
-          <p:cNvPr id="50" name="Text 46"/>
+          <p:cNvPr id="48" name="Text 46"/>
           <p:cNvSpPr/>
           <p:nvPr/>
         </p:nvSpPr>
@@ -5640,7 +5592,7 @@
       </p:sp>
       <p:sp>
         <p:nvSpPr>
-          <p:cNvPr id="51" name="Shape 47"/>
+          <p:cNvPr id="49" name="Shape 47"/>
           <p:cNvSpPr/>
           <p:nvPr/>
         </p:nvSpPr>
@@ -5667,7 +5619,7 @@
       </p:sp>
       <p:sp>
         <p:nvSpPr>
-          <p:cNvPr id="52" name="Shape 48"/>
+          <p:cNvPr id="50" name="Shape 48"/>
           <p:cNvSpPr/>
           <p:nvPr/>
         </p:nvSpPr>
@@ -5687,7 +5639,7 @@
       </p:sp>
       <p:sp>
         <p:nvSpPr>
-          <p:cNvPr id="53" name="Shape 49"/>
+          <p:cNvPr id="51" name="Shape 49"/>
           <p:cNvSpPr/>
           <p:nvPr/>
         </p:nvSpPr>
@@ -5709,7 +5661,7 @@
       </p:sp>
       <p:sp>
         <p:nvSpPr>
-          <p:cNvPr id="54" name="Text 50"/>
+          <p:cNvPr id="52" name="Text 50"/>
           <p:cNvSpPr/>
           <p:nvPr/>
         </p:nvSpPr>
@@ -5748,7 +5700,7 @@
       </p:sp>
       <p:sp>
         <p:nvSpPr>
-          <p:cNvPr id="55" name="Text 51"/>
+          <p:cNvPr id="53" name="Text 51"/>
           <p:cNvSpPr/>
           <p:nvPr/>
         </p:nvSpPr>
@@ -5787,7 +5739,7 @@
       </p:sp>
       <p:sp>
         <p:nvSpPr>
-          <p:cNvPr id="56" name="Text 52"/>
+          <p:cNvPr id="54" name="Text 52"/>
           <p:cNvSpPr/>
           <p:nvPr/>
         </p:nvSpPr>
@@ -5818,7 +5770,7 @@
                 <a:ea typeface="Roboto" pitchFamily="34" charset="-122"/>
                 <a:cs typeface="Roboto" pitchFamily="34" charset="-120"/>
               </a:rPr>
-              <a:t>Serves 950 Standard + 50 Enterprise tenants (74% TCO reduction) and passes 10/10 Pattern C Inter-Cloud AWS AgentCore MCP &amp; :3001..3010 PSC flows.</a:t>
+              <a:t>Serves 950 Standard + 50 Enterprise tenants (74% TCO reduction) and passes 10/10 Pattern C Inter-Cloud AWS AgentCore MCP PSC flows.</a:t>
             </a:r>
             <a:endParaRPr lang="en-US" sz="860" dirty="0"/>
           </a:p>
@@ -5826,7 +5778,7 @@
       </p:sp>
       <p:sp>
         <p:nvSpPr>
-          <p:cNvPr id="57" name="Text 53"/>
+          <p:cNvPr id="55" name="Text 53"/>
           <p:cNvSpPr/>
           <p:nvPr/>
         </p:nvSpPr>
@@ -5871,7 +5823,7 @@
                 <a:ea typeface="Roboto" pitchFamily="34" charset="-122"/>
                 <a:cs typeface="Roboto" pitchFamily="34" charset="-120"/>
               </a:rPr>
-              <a:t>Workstream 4 • Pattern C — Dynamic Hybrid, PSC &amp; Live Tier Migration  •  Act III Forensic Verification Audit: Grounded Google Cloud Console Screenshots + 100% Editable Callouts  •  </a:t>
+              <a:t>Workstream 4 • Pattern C — Dynamic Hybrid, PSC &amp; Live Tier Migration  •  Act III Forensic Verification Audit: Grounded Google Cloud CLI &amp; Telemetry Receipts + 100% Editable Callouts  •  </a:t>
             </a:r>
             <a:pPr algn="l" indent="0" marL="0">
               <a:buNone/>

--- a/slides/ws4-pattern-c-hybrid-editable-slides.pptx
+++ b/slides/ws4-pattern-c-hybrid-editable-slides.pptx
@@ -622,7 +622,7 @@
           <a:p>
             <a:r>
               <a:rPr lang="en-US" dirty="0"/>
-              <a:t>Here are the live Dual-Plane receipts from our hybrid environment. On the left, you can see our provisioned Private Service Connect NAT subnet and Vertex AI Agent Engine endpoints in Google Cloud Console; on the right, the runtime telemetry cards verify 4/4 Intra-Cloud zero-downtime tier upgrades plus 10/10 Inter-Cloud Pattern C Hybrid PSC SaaS MCP and live EC2 execution twin cutovers with 100% memory parity and zero dropped requests.</a:t>
+              <a:t>Here are the live Dual-Plane receipts from our hybrid environment. On the left, you can see our provisioned Private Service Connect NAT subnet and Vertex AI Agent Engine endpoints in Google Cloud Console; on the right, the runtime telemetry cards verify 4/4 Intra-Cloud zero-downtime tier upgrades plus 10/10 Inter-Cloud Pattern C Hybrid PSC 10-SaaS MCP cutovers with 100% memory parity and zero dropped requests.</a:t>
             </a:r>
             <a:endParaRPr lang="en-US" dirty="0"/>
           </a:p>

--- a/slides/ws4-pattern-c-hybrid-editable-slides.pptx
+++ b/slides/ws4-pattern-c-hybrid-editable-slides.pptx
@@ -2553,8 +2553,8 @@
         </p:nvSpPr>
         <p:spPr>
           <a:xfrm>
-            <a:off x="841248" y="4151376"/>
-            <a:ext cx="1307592" cy="365760"/>
+            <a:off x="841248" y="4142232"/>
+            <a:ext cx="1307592" cy="384048"/>
           </a:xfrm>
           <a:prstGeom prst="rect">
             <a:avLst/>
@@ -2570,7 +2570,7 @@
               <a:buNone/>
             </a:pPr>
             <a:r>
-              <a:rPr lang="en-US" sz="800" b="1" dirty="0">
+              <a:rPr lang="en-US" sz="760" b="1" dirty="0">
                 <a:solidFill>
                   <a:srgbClr val="3C4043"/>
                 </a:solidFill>
@@ -2580,7 +2580,7 @@
               </a:rPr>
               <a:t>One Unified SaaS Front Door for Every Tier</a:t>
             </a:r>
-            <a:endParaRPr lang="en-US" sz="800" dirty="0"/>
+            <a:endParaRPr lang="en-US" sz="760" dirty="0"/>
           </a:p>
         </p:txBody>
       </p:sp>
@@ -2592,7 +2592,7 @@
         </p:nvSpPr>
         <p:spPr>
           <a:xfrm>
-            <a:off x="841248" y="4535424"/>
+            <a:off x="841248" y="4544568"/>
             <a:ext cx="1307592" cy="1024128"/>
           </a:xfrm>
           <a:prstGeom prst="rect">
@@ -2611,7 +2611,7 @@
               <a:buNone/>
             </a:pPr>
             <a:r>
-              <a:rPr lang="en-US" sz="720" dirty="0">
+              <a:rPr lang="en-US" sz="680" dirty="0">
                 <a:solidFill>
                   <a:srgbClr val="5F6368"/>
                 </a:solidFill>
@@ -2619,9 +2619,9 @@
                 <a:ea typeface="Roboto" pitchFamily="34" charset="-122"/>
                 <a:cs typeface="Roboto" pitchFamily="34" charset="-120"/>
               </a:rPr>
-              <a:t>Pattern C fronts both Standard pooled tenants (120 RPM Pool) and regulated Enterprise sovereign spokes (600 RPM Silo) behind a single Global Application Load Balancer URL.</a:t>
-            </a:r>
-            <a:endParaRPr lang="en-US" sz="720" dirty="0"/>
+              <a:t>Pattern C fronts both Standard pooled tenants (120 RPM Pool) and regulated Enterprise sovereign spokes (600 RPM Silo) behind a single Global.</a:t>
+            </a:r>
+            <a:endParaRPr lang="en-US" sz="680" dirty="0"/>
           </a:p>
         </p:txBody>
       </p:sp>
@@ -2680,8 +2680,8 @@
         </p:nvSpPr>
         <p:spPr>
           <a:xfrm>
-            <a:off x="2404872" y="4151376"/>
-            <a:ext cx="1307592" cy="365760"/>
+            <a:off x="2404872" y="4142232"/>
+            <a:ext cx="1307592" cy="384048"/>
           </a:xfrm>
           <a:prstGeom prst="rect">
             <a:avLst/>
@@ -2697,7 +2697,7 @@
               <a:buNone/>
             </a:pPr>
             <a:r>
-              <a:rPr lang="en-US" sz="800" b="1" dirty="0">
+              <a:rPr lang="en-US" sz="760" b="1" dirty="0">
                 <a:solidFill>
                   <a:srgbClr val="3C4043"/>
                 </a:solidFill>
@@ -2707,7 +2707,7 @@
               </a:rPr>
               <a:t>Cryptographic Tier Lookup &amp; Dispatch</a:t>
             </a:r>
-            <a:endParaRPr lang="en-US" sz="800" dirty="0"/>
+            <a:endParaRPr lang="en-US" sz="760" dirty="0"/>
           </a:p>
         </p:txBody>
       </p:sp>
@@ -2719,7 +2719,7 @@
         </p:nvSpPr>
         <p:spPr>
           <a:xfrm>
-            <a:off x="2404872" y="4535424"/>
+            <a:off x="2404872" y="4544568"/>
             <a:ext cx="1307592" cy="1024128"/>
           </a:xfrm>
           <a:prstGeom prst="rect">
@@ -2738,7 +2738,7 @@
               <a:buNone/>
             </a:pPr>
             <a:r>
-              <a:rPr lang="en-US" sz="720" dirty="0">
+              <a:rPr lang="en-US" sz="680" dirty="0">
                 <a:solidFill>
                   <a:srgbClr val="5F6368"/>
                 </a:solidFill>
@@ -2746,9 +2746,9 @@
                 <a:ea typeface="Roboto" pitchFamily="34" charset="-122"/>
                 <a:cs typeface="Roboto" pitchFamily="34" charset="-120"/>
               </a:rPr>
-              <a:t>Cloud Armor, IAP, and the Cloud Run Hybrid Router inspect the verified OBO/DPoP identity token, query the Firestore routing table, and dispatch traffic per tenant tier.</a:t>
-            </a:r>
-            <a:endParaRPr lang="en-US" sz="720" dirty="0"/>
+              <a:t>Cloud Armor, IAP, and the Cloud Run Hybrid Router inspect the verified OBO/DPoP identity token, query the Firestore routing table, and dispatch.</a:t>
+            </a:r>
+            <a:endParaRPr lang="en-US" sz="680" dirty="0"/>
           </a:p>
         </p:txBody>
       </p:sp>
@@ -2807,8 +2807,8 @@
         </p:nvSpPr>
         <p:spPr>
           <a:xfrm>
-            <a:off x="3968496" y="4151376"/>
-            <a:ext cx="1307592" cy="365760"/>
+            <a:off x="3968496" y="4142232"/>
+            <a:ext cx="1307592" cy="384048"/>
           </a:xfrm>
           <a:prstGeom prst="rect">
             <a:avLst/>
@@ -2824,7 +2824,7 @@
               <a:buNone/>
             </a:pPr>
             <a:r>
-              <a:rPr lang="en-US" sz="800" b="1" dirty="0">
+              <a:rPr lang="en-US" sz="760" b="1" dirty="0">
                 <a:solidFill>
                   <a:srgbClr val="3C4043"/>
                 </a:solidFill>
@@ -2832,9 +2832,9 @@
                 <a:ea typeface="Google Sans" pitchFamily="34" charset="-122"/>
                 <a:cs typeface="Google Sans" pitchFamily="34" charset="-120"/>
               </a:rPr>
-              <a:t>Pillar 3</a:t>
-            </a:r>
-            <a:endParaRPr lang="en-US" sz="800" dirty="0"/>
+              <a:t>Unidirectional Private Service Connect (…</a:t>
+            </a:r>
+            <a:endParaRPr lang="en-US" sz="760" dirty="0"/>
           </a:p>
         </p:txBody>
       </p:sp>
@@ -2846,7 +2846,7 @@
         </p:nvSpPr>
         <p:spPr>
           <a:xfrm>
-            <a:off x="3968496" y="4535424"/>
+            <a:off x="3968496" y="4544568"/>
             <a:ext cx="1307592" cy="1024128"/>
           </a:xfrm>
           <a:prstGeom prst="rect">
@@ -2865,7 +2865,7 @@
               <a:buNone/>
             </a:pPr>
             <a:r>
-              <a:rPr lang="en-US" sz="720" dirty="0">
+              <a:rPr lang="en-US" sz="680" dirty="0">
                 <a:solidFill>
                   <a:srgbClr val="5F6368"/>
                 </a:solidFill>
@@ -2873,9 +2873,9 @@
                 <a:ea typeface="Roboto" pitchFamily="34" charset="-122"/>
                 <a:cs typeface="Roboto" pitchFamily="34" charset="-120"/>
               </a:rPr>
-              <a:t>Unidirectional Private Service Connect (PSC) Bridges: Enterprise requests traverse NAT-based PSC endpoints (10.10.0.50) into dedicated spoke projects (ServiceAttachment) with zero VPC peering or IP overlap.</a:t>
-            </a:r>
-            <a:endParaRPr lang="en-US" sz="720" dirty="0"/>
+              <a:t>Enterprise requests traverse NAT-based PSC endpoints (10.10.0.50) into dedicated spoke projects (ServiceAttachment) with zero VPC peering or IP.</a:t>
+            </a:r>
+            <a:endParaRPr lang="en-US" sz="680" dirty="0"/>
           </a:p>
         </p:txBody>
       </p:sp>
@@ -2934,8 +2934,8 @@
         </p:nvSpPr>
         <p:spPr>
           <a:xfrm>
-            <a:off x="5532120" y="4151376"/>
-            <a:ext cx="1307592" cy="365760"/>
+            <a:off x="5532120" y="4142232"/>
+            <a:ext cx="1307592" cy="384048"/>
           </a:xfrm>
           <a:prstGeom prst="rect">
             <a:avLst/>
@@ -2951,7 +2951,7 @@
               <a:buNone/>
             </a:pPr>
             <a:r>
-              <a:rPr lang="en-US" sz="800" b="1" dirty="0">
+              <a:rPr lang="en-US" sz="760" b="1" dirty="0">
                 <a:solidFill>
                   <a:srgbClr val="3C4043"/>
                 </a:solidFill>
@@ -2959,9 +2959,9 @@
                 <a:ea typeface="Google Sans" pitchFamily="34" charset="-122"/>
                 <a:cs typeface="Google Sans" pitchFamily="34" charset="-120"/>
               </a:rPr>
-              <a:t>Pillar 4</a:t>
-            </a:r>
-            <a:endParaRPr lang="en-US" sz="800" dirty="0"/>
+              <a:t>3-Phase Zero-Downtime Live Tier Migration</a:t>
+            </a:r>
+            <a:endParaRPr lang="en-US" sz="760" dirty="0"/>
           </a:p>
         </p:txBody>
       </p:sp>
@@ -2973,7 +2973,7 @@
         </p:nvSpPr>
         <p:spPr>
           <a:xfrm>
-            <a:off x="5532120" y="4535424"/>
+            <a:off x="5532120" y="4544568"/>
             <a:ext cx="1307592" cy="1024128"/>
           </a:xfrm>
           <a:prstGeom prst="rect">
@@ -2992,7 +2992,7 @@
               <a:buNone/>
             </a:pPr>
             <a:r>
-              <a:rPr lang="en-US" sz="720" dirty="0">
+              <a:rPr lang="en-US" sz="710" dirty="0">
                 <a:solidFill>
                   <a:srgbClr val="5F6368"/>
                 </a:solidFill>
@@ -3000,9 +3000,9 @@
                 <a:ea typeface="Roboto" pitchFamily="34" charset="-122"/>
                 <a:cs typeface="Roboto" pitchFamily="34" charset="-120"/>
               </a:rPr>
-              <a:t>3-Phase Zero-Downtime Live Tier Migration (SHADOW_SYNC → ATOMIC_CUTOVER → DRAIN_AND_VERIFY): Promotes a live Standard tenant into a dedicated Enterprise PSC spoke mid-conversation without dropping a single turn.</a:t>
-            </a:r>
-            <a:endParaRPr lang="en-US" sz="720" dirty="0"/>
+              <a:t>Promotes a live Standard tenant into a dedicated Enterprise PSC spoke mid-conversation without dropping a single turn.</a:t>
+            </a:r>
+            <a:endParaRPr lang="en-US" sz="710" dirty="0"/>
           </a:p>
         </p:txBody>
       </p:sp>
@@ -3479,7 +3479,7 @@
                 <a:ea typeface="Google Sans" pitchFamily="34" charset="-122"/>
                 <a:cs typeface="Google Sans" pitchFamily="34" charset="-120"/>
               </a:rPr>
-              <a:t>L1 Hub Routing -&gt; L2 Figure 1 -&gt; L3 Cutover -&gt; L4 Turn N+1</a:t>
+              <a:t>L1 Hub Routing → L2 Figure 1 → L3 Cutover → L4 Turn N+1</a:t>
             </a:r>
             <a:endParaRPr lang="en-US" sz="850" dirty="0"/>
           </a:p>
@@ -3518,7 +3518,7 @@
                 <a:ea typeface="Roboto" pitchFamily="34" charset="-122"/>
                 <a:cs typeface="Roboto" pitchFamily="34" charset="-120"/>
               </a:rPr>
-              <a:t>Zooms from the unified ingress hub and /28 PSC NAT routing engine (Slide 4) into the Pattern C Figure 1 blueprint (Slide 5), the SHADOW_SYNC -&gt; ATOMIC_CUTOVER -&gt; DRAIN_AND_VERIFY sequence (Slide 6) and Turn N+1 re-routed across PSC mid-conversation (Slide 7).</a:t>
+              <a:t>Zooms from the unified ingress hub and /28 PSC NAT routing engine (Slide 4) into the Pattern C Figure 1 blueprint (Slide 5), the SHADOW_SYNC → ATOMIC_CUTOVER → DRAIN_AND_VERIFY sequence (Slide 6) and Turn N+1 re-routed across PSC mid-conversation (Slide 7).</a:t>
             </a:r>
             <a:endParaRPr lang="en-US" sz="780" dirty="0"/>
           </a:p>
@@ -15076,7 +15076,7 @@
                 <a:ea typeface="Roboto" pitchFamily="34" charset="-122"/>
                 <a:cs typeface="Roboto" pitchFamily="34" charset="-120"/>
               </a:rPr>
-              <a:t>Replaces 4–8 hr maintenance blackouts with SHADOW_SYNC -&gt; ATOMIC_CUTOVER -&gt; DRAIN_AND_VERIFY (&lt;10ms Firestore pointer flip, 0 dropped turns).</a:t>
+              <a:t>Replaces 4–8 hr maintenance blackouts with SHADOW_SYNC → ATOMIC_CUTOVER → DRAIN_AND_VERIFY (&lt;10ms Firestore pointer flip, 0 dropped turns).</a:t>
             </a:r>
             <a:endParaRPr lang="en-US" sz="740" dirty="0"/>
           </a:p>

--- a/slides/ws4-pattern-c-hybrid-editable-slides.pptx
+++ b/slides/ws4-pattern-c-hybrid-editable-slides.pptx
@@ -2578,7 +2578,7 @@
                 <a:ea typeface="Google Sans" pitchFamily="34" charset="-122"/>
                 <a:cs typeface="Google Sans" pitchFamily="34" charset="-120"/>
               </a:rPr>
-              <a:t>One Unified SaaS Front Door for Every Tier</a:t>
+              <a:t>Unified SaaS Front Door</a:t>
             </a:r>
             <a:endParaRPr lang="en-US" sz="760" dirty="0"/>
           </a:p>
@@ -2611,7 +2611,7 @@
               <a:buNone/>
             </a:pPr>
             <a:r>
-              <a:rPr lang="en-US" sz="680" dirty="0">
+              <a:rPr lang="en-US" sz="710" dirty="0">
                 <a:solidFill>
                   <a:srgbClr val="5F6368"/>
                 </a:solidFill>
@@ -2619,9 +2619,9 @@
                 <a:ea typeface="Roboto" pitchFamily="34" charset="-122"/>
                 <a:cs typeface="Roboto" pitchFamily="34" charset="-120"/>
               </a:rPr>
-              <a:t>Pattern C fronts both Standard pooled tenants (120 RPM Pool) and regulated Enterprise sovereign spokes (600 RPM Silo) behind a single Global.</a:t>
-            </a:r>
-            <a:endParaRPr lang="en-US" sz="680" dirty="0"/>
+              <a:t>Pattern C fronts Standard pooled tenants (120 RPM) and Enterprise PSC spokes (600 RPM) behind one Global ALB URL.</a:t>
+            </a:r>
+            <a:endParaRPr lang="en-US" sz="710" dirty="0"/>
           </a:p>
         </p:txBody>
       </p:sp>
@@ -2705,7 +2705,7 @@
                 <a:ea typeface="Google Sans" pitchFamily="34" charset="-122"/>
                 <a:cs typeface="Google Sans" pitchFamily="34" charset="-120"/>
               </a:rPr>
-              <a:t>Cryptographic Tier Lookup &amp; Dispatch</a:t>
+              <a:t>Cryptographic Tier Routing</a:t>
             </a:r>
             <a:endParaRPr lang="en-US" sz="760" dirty="0"/>
           </a:p>
@@ -2738,7 +2738,7 @@
               <a:buNone/>
             </a:pPr>
             <a:r>
-              <a:rPr lang="en-US" sz="680" dirty="0">
+              <a:rPr lang="en-US" sz="710" dirty="0">
                 <a:solidFill>
                   <a:srgbClr val="5F6368"/>
                 </a:solidFill>
@@ -2746,9 +2746,9 @@
                 <a:ea typeface="Roboto" pitchFamily="34" charset="-122"/>
                 <a:cs typeface="Roboto" pitchFamily="34" charset="-120"/>
               </a:rPr>
-              <a:t>Cloud Armor, IAP, and the Cloud Run Hybrid Router inspect the verified OBO/DPoP identity token, query the Firestore routing table, and dispatch.</a:t>
-            </a:r>
-            <a:endParaRPr lang="en-US" sz="680" dirty="0"/>
+              <a:t>Cloud Armor, IAP, and the Hybrid Router verify OBO/DPoP tokens and query Firestore to dispatch per tenant tier.</a:t>
+            </a:r>
+            <a:endParaRPr lang="en-US" sz="710" dirty="0"/>
           </a:p>
         </p:txBody>
       </p:sp>
@@ -2832,7 +2832,7 @@
                 <a:ea typeface="Google Sans" pitchFamily="34" charset="-122"/>
                 <a:cs typeface="Google Sans" pitchFamily="34" charset="-120"/>
               </a:rPr>
-              <a:t>Unidirectional Private Service Connect (…</a:t>
+              <a:t>Unidirectional PSC Bridges</a:t>
             </a:r>
             <a:endParaRPr lang="en-US" sz="760" dirty="0"/>
           </a:p>
@@ -2865,7 +2865,7 @@
               <a:buNone/>
             </a:pPr>
             <a:r>
-              <a:rPr lang="en-US" sz="680" dirty="0">
+              <a:rPr lang="en-US" sz="710" dirty="0">
                 <a:solidFill>
                   <a:srgbClr val="5F6368"/>
                 </a:solidFill>
@@ -2873,9 +2873,9 @@
                 <a:ea typeface="Roboto" pitchFamily="34" charset="-122"/>
                 <a:cs typeface="Roboto" pitchFamily="34" charset="-120"/>
               </a:rPr>
-              <a:t>Enterprise requests traverse NAT-based PSC endpoints (10.10.0.50) into dedicated spoke projects (ServiceAttachment) with zero VPC peering or IP.</a:t>
-            </a:r>
-            <a:endParaRPr lang="en-US" sz="680" dirty="0"/>
+              <a:t>Enterprise turns traverse NAT PSC endpoints (10.10.0.50) into dedicated spoke projects with zero VPC peering.</a:t>
+            </a:r>
+            <a:endParaRPr lang="en-US" sz="710" dirty="0"/>
           </a:p>
         </p:txBody>
       </p:sp>
@@ -2959,7 +2959,7 @@
                 <a:ea typeface="Google Sans" pitchFamily="34" charset="-122"/>
                 <a:cs typeface="Google Sans" pitchFamily="34" charset="-120"/>
               </a:rPr>
-              <a:t>3-Phase Zero-Downtime Live Tier Migration</a:t>
+              <a:t>Zero-Downtime Tier Promotion</a:t>
             </a:r>
             <a:endParaRPr lang="en-US" sz="760" dirty="0"/>
           </a:p>
@@ -3000,7 +3000,7 @@
                 <a:ea typeface="Roboto" pitchFamily="34" charset="-122"/>
                 <a:cs typeface="Roboto" pitchFamily="34" charset="-120"/>
               </a:rPr>
-              <a:t>Promotes a live Standard tenant into a dedicated Enterprise PSC spoke mid-conversation without dropping a single turn.</a:t>
+              <a:t>SHADOW_SYNC -&gt; ATOMIC_CUTOVER -&gt; DRAIN_AND_VERIFY promotes live tenants to Enterprise spokes with 0 dropped turns.</a:t>
             </a:r>
             <a:endParaRPr lang="en-US" sz="710" dirty="0"/>
           </a:p>
@@ -3956,7 +3956,7 @@
                 <a:ea typeface="Google Sans" pitchFamily="34" charset="-122"/>
                 <a:cs typeface="Google Sans" pitchFamily="34" charset="-120"/>
               </a:rPr>
-              <a:t>Verified Across 3 GCP Projects (#248990048888 • #638420508320 • #887605034827) • 12/12 Forensic PASS</a:t>
+              <a:t>Verified Across 3 GCP Projects (#248990048888 • #638420508320 • #887605034827) • 13/13 Forensic PASS</a:t>
             </a:r>
             <a:endParaRPr lang="en-US" sz="720" dirty="0"/>
           </a:p>
@@ -19019,11 +19019,11 @@
         <p:spPr>
           <a:xfrm>
             <a:off x="7443216" y="1700784"/>
-            <a:ext cx="4382719" cy="512064"/>
+            <a:ext cx="4382719" cy="594360"/>
           </a:xfrm>
           <a:prstGeom prst="roundRect">
             <a:avLst>
-              <a:gd name="adj" fmla="val 10714"/>
+              <a:gd name="adj" fmla="val 9231"/>
             </a:avLst>
           </a:prstGeom>
           <a:solidFill>
@@ -19046,7 +19046,7 @@
         <p:spPr>
           <a:xfrm>
             <a:off x="7443216" y="1700784"/>
-            <a:ext cx="64008" cy="512064"/>
+            <a:ext cx="64008" cy="594360"/>
           </a:xfrm>
           <a:prstGeom prst="rect">
             <a:avLst/>
@@ -19143,7 +19143,7 @@
               <a:buNone/>
             </a:pPr>
             <a:r>
-              <a:rPr lang="en-US" sz="740" b="1" dirty="0">
+              <a:rPr lang="en-US" sz="730" b="1" dirty="0">
                 <a:solidFill>
                   <a:srgbClr val="3C4043"/>
                 </a:solidFill>
@@ -19153,7 +19153,7 @@
               </a:rPr>
               <a:t>1. Unified Ingress Hub &amp; Tier-Aware Router</a:t>
             </a:r>
-            <a:endParaRPr lang="en-US" sz="740" dirty="0"/>
+            <a:endParaRPr lang="en-US" sz="730" dirty="0"/>
           </a:p>
         </p:txBody>
       </p:sp>
@@ -19165,8 +19165,8 @@
         </p:nvSpPr>
         <p:spPr>
           <a:xfrm>
-            <a:off x="7552944" y="1920240"/>
-            <a:ext cx="4218127" cy="265176"/>
+            <a:off x="7552944" y="1901952"/>
+            <a:ext cx="4236415" cy="374904"/>
           </a:xfrm>
           <a:prstGeom prst="rect">
             <a:avLst/>
@@ -19182,7 +19182,7 @@
               <a:buNone/>
             </a:pPr>
             <a:r>
-              <a:rPr lang="en-US" sz="670" dirty="0">
+              <a:rPr lang="en-US" sz="625" dirty="0">
                 <a:solidFill>
                   <a:srgbClr val="5F6368"/>
                 </a:solidFill>
@@ -19192,7 +19192,7 @@
               </a:rPr>
               <a:t>Fronts all customers behind one SaaS URL, verifies identity at Hop 1, queries the Firestore route table, and filters the cross-project Agent Catalog.</a:t>
             </a:r>
-            <a:endParaRPr lang="en-US" sz="670" dirty="0"/>
+            <a:endParaRPr lang="en-US" sz="625" dirty="0"/>
           </a:p>
         </p:txBody>
       </p:sp>
@@ -19204,12 +19204,12 @@
         </p:nvSpPr>
         <p:spPr>
           <a:xfrm>
-            <a:off x="7443216" y="2267712"/>
-            <a:ext cx="4382719" cy="512064"/>
+            <a:off x="7443216" y="2340864"/>
+            <a:ext cx="4382719" cy="594360"/>
           </a:xfrm>
           <a:prstGeom prst="roundRect">
             <a:avLst>
-              <a:gd name="adj" fmla="val 10714"/>
+              <a:gd name="adj" fmla="val 9231"/>
             </a:avLst>
           </a:prstGeom>
           <a:solidFill>
@@ -19231,8 +19231,8 @@
         </p:nvSpPr>
         <p:spPr>
           <a:xfrm>
-            <a:off x="7443216" y="2267712"/>
-            <a:ext cx="64008" cy="512064"/>
+            <a:off x="7443216" y="2340864"/>
+            <a:ext cx="64008" cy="594360"/>
           </a:xfrm>
           <a:prstGeom prst="rect">
             <a:avLst/>
@@ -19251,7 +19251,7 @@
         </p:nvSpPr>
         <p:spPr>
           <a:xfrm>
-            <a:off x="7552944" y="2313432"/>
+            <a:off x="7552944" y="2386584"/>
             <a:ext cx="804672" cy="155448"/>
           </a:xfrm>
           <a:prstGeom prst="roundRect">
@@ -19273,7 +19273,7 @@
         </p:nvSpPr>
         <p:spPr>
           <a:xfrm>
-            <a:off x="7552944" y="2313432"/>
+            <a:off x="7552944" y="2386584"/>
             <a:ext cx="804672" cy="155448"/>
           </a:xfrm>
           <a:prstGeom prst="rect">
@@ -19312,7 +19312,7 @@
         </p:nvSpPr>
         <p:spPr>
           <a:xfrm>
-            <a:off x="8412480" y="2295144"/>
+            <a:off x="8412480" y="2368296"/>
             <a:ext cx="3358591" cy="182880"/>
           </a:xfrm>
           <a:prstGeom prst="rect">
@@ -19329,7 +19329,7 @@
               <a:buNone/>
             </a:pPr>
             <a:r>
-              <a:rPr lang="en-US" sz="740" b="1" dirty="0">
+              <a:rPr lang="en-US" sz="730" b="1" dirty="0">
                 <a:solidFill>
                   <a:srgbClr val="3C4043"/>
                 </a:solidFill>
@@ -19339,7 +19339,7 @@
               </a:rPr>
               <a:t>2. 3-Phase Zero-Downtime Migration Engine</a:t>
             </a:r>
-            <a:endParaRPr lang="en-US" sz="740" dirty="0"/>
+            <a:endParaRPr lang="en-US" sz="730" dirty="0"/>
           </a:p>
         </p:txBody>
       </p:sp>
@@ -19351,8 +19351,8 @@
         </p:nvSpPr>
         <p:spPr>
           <a:xfrm>
-            <a:off x="7552944" y="2487168"/>
-            <a:ext cx="4218127" cy="265176"/>
+            <a:off x="7552944" y="2542032"/>
+            <a:ext cx="4236415" cy="374904"/>
           </a:xfrm>
           <a:prstGeom prst="rect">
             <a:avLst/>
@@ -19368,7 +19368,7 @@
               <a:buNone/>
             </a:pPr>
             <a:r>
-              <a:rPr lang="en-US" sz="670" dirty="0">
+              <a:rPr lang="en-US" sz="625" dirty="0">
                 <a:solidFill>
                   <a:srgbClr val="5F6368"/>
                 </a:solidFill>
@@ -19378,7 +19378,7 @@
               </a:rPr>
               <a:t>Orchestrates live Standard → Enterprise promotions across SHADOW_SYNC (0ms lag), ATOMIC_CUTOVER, and DRAIN_AND_VERIFY (0 dropped sessions).</a:t>
             </a:r>
-            <a:endParaRPr lang="en-US" sz="670" dirty="0"/>
+            <a:endParaRPr lang="en-US" sz="625" dirty="0"/>
           </a:p>
         </p:txBody>
       </p:sp>
@@ -19390,12 +19390,12 @@
         </p:nvSpPr>
         <p:spPr>
           <a:xfrm>
-            <a:off x="7443216" y="2834640"/>
-            <a:ext cx="4382719" cy="512064"/>
+            <a:off x="7443216" y="2980944"/>
+            <a:ext cx="4382719" cy="594360"/>
           </a:xfrm>
           <a:prstGeom prst="roundRect">
             <a:avLst>
-              <a:gd name="adj" fmla="val 10714"/>
+              <a:gd name="adj" fmla="val 9231"/>
             </a:avLst>
           </a:prstGeom>
           <a:solidFill>
@@ -19417,8 +19417,8 @@
         </p:nvSpPr>
         <p:spPr>
           <a:xfrm>
-            <a:off x="7443216" y="2834640"/>
-            <a:ext cx="64008" cy="512064"/>
+            <a:off x="7443216" y="2980944"/>
+            <a:ext cx="64008" cy="594360"/>
           </a:xfrm>
           <a:prstGeom prst="rect">
             <a:avLst/>
@@ -19437,7 +19437,7 @@
         </p:nvSpPr>
         <p:spPr>
           <a:xfrm>
-            <a:off x="7552944" y="2880360"/>
+            <a:off x="7552944" y="3026664"/>
             <a:ext cx="804672" cy="155448"/>
           </a:xfrm>
           <a:prstGeom prst="roundRect">
@@ -19459,7 +19459,7 @@
         </p:nvSpPr>
         <p:spPr>
           <a:xfrm>
-            <a:off x="7552944" y="2880360"/>
+            <a:off x="7552944" y="3026664"/>
             <a:ext cx="804672" cy="155448"/>
           </a:xfrm>
           <a:prstGeom prst="rect">
@@ -19498,7 +19498,7 @@
         </p:nvSpPr>
         <p:spPr>
           <a:xfrm>
-            <a:off x="8412480" y="2862072"/>
+            <a:off x="8412480" y="3008376"/>
             <a:ext cx="3358591" cy="182880"/>
           </a:xfrm>
           <a:prstGeom prst="rect">
@@ -19515,7 +19515,7 @@
               <a:buNone/>
             </a:pPr>
             <a:r>
-              <a:rPr lang="en-US" sz="740" b="1" dirty="0">
+              <a:rPr lang="en-US" sz="730" b="1" dirty="0">
                 <a:solidFill>
                   <a:srgbClr val="3C4043"/>
                 </a:solidFill>
@@ -19525,7 +19525,7 @@
               </a:rPr>
               <a:t>3. Left Spoke: Shared Pooled Runtime (Standard)</a:t>
             </a:r>
-            <a:endParaRPr lang="en-US" sz="740" dirty="0"/>
+            <a:endParaRPr lang="en-US" sz="730" dirty="0"/>
           </a:p>
         </p:txBody>
       </p:sp>
@@ -19537,8 +19537,8 @@
         </p:nvSpPr>
         <p:spPr>
           <a:xfrm>
-            <a:off x="7552944" y="3054096"/>
-            <a:ext cx="4218127" cy="265176"/>
+            <a:off x="7552944" y="3182112"/>
+            <a:ext cx="4236415" cy="374904"/>
           </a:xfrm>
           <a:prstGeom prst="rect">
             <a:avLst/>
@@ -19554,7 +19554,7 @@
               <a:buNone/>
             </a:pPr>
             <a:r>
-              <a:rPr lang="en-US" sz="670" dirty="0">
+              <a:rPr lang="en-US" sz="625" dirty="0">
                 <a:solidFill>
                   <a:srgbClr val="5F6368"/>
                 </a:solidFill>
@@ -19564,7 +19564,7 @@
               </a:rPr>
               <a:t>Executes Standard-tier workloads (pool://, 4,000 thinking cap, 90% shared cache, AlloyDB RLS) and streams state during live tier upgrades.</a:t>
             </a:r>
-            <a:endParaRPr lang="en-US" sz="670" dirty="0"/>
+            <a:endParaRPr lang="en-US" sz="625" dirty="0"/>
           </a:p>
         </p:txBody>
       </p:sp>
@@ -19576,12 +19576,12 @@
         </p:nvSpPr>
         <p:spPr>
           <a:xfrm>
-            <a:off x="7443216" y="3401568"/>
-            <a:ext cx="4382719" cy="512064"/>
+            <a:off x="7443216" y="3621024"/>
+            <a:ext cx="4382719" cy="594360"/>
           </a:xfrm>
           <a:prstGeom prst="roundRect">
             <a:avLst>
-              <a:gd name="adj" fmla="val 10714"/>
+              <a:gd name="adj" fmla="val 9231"/>
             </a:avLst>
           </a:prstGeom>
           <a:solidFill>
@@ -19603,8 +19603,8 @@
         </p:nvSpPr>
         <p:spPr>
           <a:xfrm>
-            <a:off x="7443216" y="3401568"/>
-            <a:ext cx="64008" cy="512064"/>
+            <a:off x="7443216" y="3621024"/>
+            <a:ext cx="64008" cy="594360"/>
           </a:xfrm>
           <a:prstGeom prst="rect">
             <a:avLst/>
@@ -19623,7 +19623,7 @@
         </p:nvSpPr>
         <p:spPr>
           <a:xfrm>
-            <a:off x="7552944" y="3447288"/>
+            <a:off x="7552944" y="3666744"/>
             <a:ext cx="804672" cy="155448"/>
           </a:xfrm>
           <a:prstGeom prst="roundRect">
@@ -19645,7 +19645,7 @@
         </p:nvSpPr>
         <p:spPr>
           <a:xfrm>
-            <a:off x="7552944" y="3447288"/>
+            <a:off x="7552944" y="3666744"/>
             <a:ext cx="804672" cy="155448"/>
           </a:xfrm>
           <a:prstGeom prst="rect">
@@ -19684,7 +19684,7 @@
         </p:nvSpPr>
         <p:spPr>
           <a:xfrm>
-            <a:off x="8412480" y="3429000"/>
+            <a:off x="8412480" y="3648456"/>
             <a:ext cx="3358591" cy="182880"/>
           </a:xfrm>
           <a:prstGeom prst="rect">
@@ -19701,7 +19701,7 @@
               <a:buNone/>
             </a:pPr>
             <a:r>
-              <a:rPr lang="en-US" sz="740" b="1" dirty="0">
+              <a:rPr lang="en-US" sz="730" b="1" dirty="0">
                 <a:solidFill>
                   <a:srgbClr val="3C4043"/>
                 </a:solidFill>
@@ -19711,7 +19711,7 @@
               </a:rPr>
               <a:t>4. Right Spoke: Dedicated Enterprise PSC Spokes</a:t>
             </a:r>
-            <a:endParaRPr lang="en-US" sz="740" dirty="0"/>
+            <a:endParaRPr lang="en-US" sz="730" dirty="0"/>
           </a:p>
         </p:txBody>
       </p:sp>
@@ -19723,8 +19723,8 @@
         </p:nvSpPr>
         <p:spPr>
           <a:xfrm>
-            <a:off x="7552944" y="3621024"/>
-            <a:ext cx="4218127" cy="265176"/>
+            <a:off x="7552944" y="3822192"/>
+            <a:ext cx="4236415" cy="374904"/>
           </a:xfrm>
           <a:prstGeom prst="rect">
             <a:avLst/>
@@ -19740,7 +19740,7 @@
               <a:buNone/>
             </a:pPr>
             <a:r>
-              <a:rPr lang="en-US" sz="670" dirty="0">
+              <a:rPr lang="en-US" sz="625" dirty="0">
                 <a:solidFill>
                   <a:srgbClr val="5F6368"/>
                 </a:solidFill>
@@ -19750,7 +19750,7 @@
               </a:rPr>
               <a:t>Connects via unidirectional Private Service Connect (psc://, /28 NAT subnet) to dedicated CMEK-encrypted Enterprise spokes (8,000 thinking budget).</a:t>
             </a:r>
-            <a:endParaRPr lang="en-US" sz="670" dirty="0"/>
+            <a:endParaRPr lang="en-US" sz="625" dirty="0"/>
           </a:p>
         </p:txBody>
       </p:sp>
@@ -19762,8 +19762,8 @@
         </p:nvSpPr>
         <p:spPr>
           <a:xfrm>
-            <a:off x="7461504" y="4005072"/>
-            <a:ext cx="4346143" cy="164592"/>
+            <a:off x="7461504" y="4288536"/>
+            <a:ext cx="4346143" cy="155448"/>
           </a:xfrm>
           <a:prstGeom prst="rect">
             <a:avLst/>
@@ -19779,7 +19779,7 @@
               <a:buNone/>
             </a:pPr>
             <a:r>
-              <a:rPr lang="en-US" sz="720" b="1" dirty="0">
+              <a:rPr lang="en-US" sz="710" b="1" dirty="0">
                 <a:solidFill>
                   <a:srgbClr val="5F6368"/>
                 </a:solidFill>
@@ -19789,7 +19789,7 @@
               </a:rPr>
               <a:t>KEY ARCHITECTURAL WALKTHROUGH POINTS</a:t>
             </a:r>
-            <a:endParaRPr lang="en-US" sz="720" dirty="0"/>
+            <a:endParaRPr lang="en-US" sz="710" dirty="0"/>
           </a:p>
         </p:txBody>
       </p:sp>
@@ -19801,12 +19801,12 @@
         </p:nvSpPr>
         <p:spPr>
           <a:xfrm>
-            <a:off x="7443216" y="4187952"/>
-            <a:ext cx="4382719" cy="428854"/>
+            <a:off x="7443216" y="4453128"/>
+            <a:ext cx="4382719" cy="378562"/>
           </a:xfrm>
           <a:prstGeom prst="roundRect">
             <a:avLst>
-              <a:gd name="adj" fmla="val 12793"/>
+              <a:gd name="adj" fmla="val 14493"/>
             </a:avLst>
           </a:prstGeom>
           <a:solidFill>
@@ -19828,7 +19828,7 @@
         </p:nvSpPr>
         <p:spPr>
           <a:xfrm>
-            <a:off x="7516368" y="4301338"/>
+            <a:off x="7516368" y="4541825"/>
             <a:ext cx="219456" cy="201168"/>
           </a:xfrm>
           <a:prstGeom prst="roundRect">
@@ -19850,7 +19850,7 @@
         </p:nvSpPr>
         <p:spPr>
           <a:xfrm>
-            <a:off x="7516368" y="4301338"/>
+            <a:off x="7516368" y="4541825"/>
             <a:ext cx="219456" cy="201168"/>
           </a:xfrm>
           <a:prstGeom prst="rect">
@@ -19889,8 +19889,8 @@
         </p:nvSpPr>
         <p:spPr>
           <a:xfrm>
-            <a:off x="7790688" y="4215384"/>
-            <a:ext cx="3980383" cy="373990"/>
+            <a:off x="7790688" y="4471416"/>
+            <a:ext cx="3980383" cy="341986"/>
           </a:xfrm>
           <a:prstGeom prst="rect">
             <a:avLst/>
@@ -19906,7 +19906,7 @@
               <a:buNone/>
             </a:pPr>
             <a:r>
-              <a:rPr lang="en-US" sz="690" dirty="0">
+              <a:rPr lang="en-US" sz="675" dirty="0">
                 <a:solidFill>
                   <a:srgbClr val="5F6368"/>
                 </a:solidFill>
@@ -19916,7 +19916,7 @@
               </a:rPr>
               <a:t>Standard and Enterprise tenants connect to one unified SaaS URL at Step 1 and receive a tier-isolated response at Step 7 (0 dropped sessions).</a:t>
             </a:r>
-            <a:endParaRPr lang="en-US" sz="690" dirty="0"/>
+            <a:endParaRPr lang="en-US" sz="675" dirty="0"/>
           </a:p>
         </p:txBody>
       </p:sp>
@@ -19928,12 +19928,12 @@
         </p:nvSpPr>
         <p:spPr>
           <a:xfrm>
-            <a:off x="7443216" y="4667098"/>
-            <a:ext cx="4382719" cy="428854"/>
+            <a:off x="7443216" y="4872838"/>
+            <a:ext cx="4382719" cy="378562"/>
           </a:xfrm>
           <a:prstGeom prst="roundRect">
             <a:avLst>
-              <a:gd name="adj" fmla="val 12793"/>
+              <a:gd name="adj" fmla="val 14493"/>
             </a:avLst>
           </a:prstGeom>
           <a:solidFill>
@@ -19955,7 +19955,7 @@
         </p:nvSpPr>
         <p:spPr>
           <a:xfrm>
-            <a:off x="7516368" y="4780483"/>
+            <a:off x="7516368" y="4961534"/>
             <a:ext cx="219456" cy="201168"/>
           </a:xfrm>
           <a:prstGeom prst="roundRect">
@@ -19977,7 +19977,7 @@
         </p:nvSpPr>
         <p:spPr>
           <a:xfrm>
-            <a:off x="7516368" y="4780483"/>
+            <a:off x="7516368" y="4961534"/>
             <a:ext cx="219456" cy="201168"/>
           </a:xfrm>
           <a:prstGeom prst="rect">
@@ -20016,8 +20016,8 @@
         </p:nvSpPr>
         <p:spPr>
           <a:xfrm>
-            <a:off x="7790688" y="4694530"/>
-            <a:ext cx="3980383" cy="373990"/>
+            <a:off x="7790688" y="4891126"/>
+            <a:ext cx="3980383" cy="341986"/>
           </a:xfrm>
           <a:prstGeom prst="rect">
             <a:avLst/>
@@ -20033,7 +20033,7 @@
               <a:buNone/>
             </a:pPr>
             <a:r>
-              <a:rPr lang="en-US" sz="690" dirty="0">
+              <a:rPr lang="en-US" sz="675" dirty="0">
                 <a:solidFill>
                   <a:srgbClr val="5F6368"/>
                 </a:solidFill>
@@ -20043,7 +20043,7 @@
               </a:rPr>
               <a:t>Zone 1 (Central Routing Hub): Cloud Armor, IAP OBO/DPoP, Federated Agent Registry, and Firestore Route Table resolve each tenant’s live tier.</a:t>
             </a:r>
-            <a:endParaRPr lang="en-US" sz="690" dirty="0"/>
+            <a:endParaRPr lang="en-US" sz="675" dirty="0"/>
           </a:p>
         </p:txBody>
       </p:sp>
@@ -20055,12 +20055,12 @@
         </p:nvSpPr>
         <p:spPr>
           <a:xfrm>
-            <a:off x="7443216" y="5145329"/>
-            <a:ext cx="4382719" cy="428854"/>
+            <a:off x="7443216" y="5291633"/>
+            <a:ext cx="4382719" cy="378562"/>
           </a:xfrm>
           <a:prstGeom prst="roundRect">
             <a:avLst>
-              <a:gd name="adj" fmla="val 12793"/>
+              <a:gd name="adj" fmla="val 14493"/>
             </a:avLst>
           </a:prstGeom>
           <a:solidFill>
@@ -20082,7 +20082,7 @@
         </p:nvSpPr>
         <p:spPr>
           <a:xfrm>
-            <a:off x="7516368" y="5258714"/>
+            <a:off x="7516368" y="5380330"/>
             <a:ext cx="219456" cy="201168"/>
           </a:xfrm>
           <a:prstGeom prst="roundRect">
@@ -20104,7 +20104,7 @@
         </p:nvSpPr>
         <p:spPr>
           <a:xfrm>
-            <a:off x="7516368" y="5258714"/>
+            <a:off x="7516368" y="5380330"/>
             <a:ext cx="219456" cy="201168"/>
           </a:xfrm>
           <a:prstGeom prst="rect">
@@ -20143,8 +20143,8 @@
         </p:nvSpPr>
         <p:spPr>
           <a:xfrm>
-            <a:off x="7790688" y="5172761"/>
-            <a:ext cx="3980383" cy="373990"/>
+            <a:off x="7790688" y="5309921"/>
+            <a:ext cx="3980383" cy="341986"/>
           </a:xfrm>
           <a:prstGeom prst="rect">
             <a:avLst/>
@@ -20160,7 +20160,7 @@
               <a:buNone/>
             </a:pPr>
             <a:r>
-              <a:rPr lang="en-US" sz="690" dirty="0">
+              <a:rPr lang="en-US" sz="675" dirty="0">
                 <a:solidFill>
                   <a:srgbClr val="5F6368"/>
                 </a:solidFill>
@@ -20170,7 +20170,7 @@
               </a:rPr>
               <a:t>Zone 2 (Zero-Downtime Migration Engine): Orchestrates Phase 1 SHADOW_SYNC (0ms lag), Phase 2 ATOMIC_CUTOVER, and Phase 3 DRAIN_AND_VERIFY (4/4 PASS).</a:t>
             </a:r>
-            <a:endParaRPr lang="en-US" sz="690" dirty="0"/>
+            <a:endParaRPr lang="en-US" sz="675" dirty="0"/>
           </a:p>
         </p:txBody>
       </p:sp>
@@ -20182,12 +20182,12 @@
         </p:nvSpPr>
         <p:spPr>
           <a:xfrm>
-            <a:off x="7443216" y="5624474"/>
-            <a:ext cx="4382719" cy="428854"/>
+            <a:off x="7443216" y="5711342"/>
+            <a:ext cx="4382719" cy="378562"/>
           </a:xfrm>
           <a:prstGeom prst="roundRect">
             <a:avLst>
-              <a:gd name="adj" fmla="val 12793"/>
+              <a:gd name="adj" fmla="val 14493"/>
             </a:avLst>
           </a:prstGeom>
           <a:solidFill>
@@ -20209,7 +20209,7 @@
         </p:nvSpPr>
         <p:spPr>
           <a:xfrm>
-            <a:off x="7516368" y="5737860"/>
+            <a:off x="7516368" y="5800039"/>
             <a:ext cx="219456" cy="201168"/>
           </a:xfrm>
           <a:prstGeom prst="roundRect">
@@ -20231,7 +20231,7 @@
         </p:nvSpPr>
         <p:spPr>
           <a:xfrm>
-            <a:off x="7516368" y="5737860"/>
+            <a:off x="7516368" y="5800039"/>
             <a:ext cx="219456" cy="201168"/>
           </a:xfrm>
           <a:prstGeom prst="rect">
@@ -20270,8 +20270,8 @@
         </p:nvSpPr>
         <p:spPr>
           <a:xfrm>
-            <a:off x="7790688" y="5651906"/>
-            <a:ext cx="3980383" cy="373990"/>
+            <a:off x="7790688" y="5729630"/>
+            <a:ext cx="3980383" cy="341986"/>
           </a:xfrm>
           <a:prstGeom prst="rect">
             <a:avLst/>
@@ -20287,7 +20287,7 @@
               <a:buNone/>
             </a:pPr>
             <a:r>
-              <a:rPr lang="en-US" sz="690" dirty="0">
+              <a:rPr lang="en-US" sz="675" dirty="0">
                 <a:solidFill>
                   <a:srgbClr val="5F6368"/>
                 </a:solidFill>
@@ -20297,7 +20297,7 @@
               </a:rPr>
               <a:t>Zone 3 (Pattern A Shared Pooled Spoke): Serves Standard tenants with a 4,000-token cap, 90% shared prefix cache, and AlloyDB RLS while streaming CDC state.</a:t>
             </a:r>
-            <a:endParaRPr lang="en-US" sz="690" dirty="0"/>
+            <a:endParaRPr lang="en-US" sz="675" dirty="0"/>
           </a:p>
         </p:txBody>
       </p:sp>
@@ -20309,7 +20309,7 @@
         </p:nvSpPr>
         <p:spPr>
           <a:xfrm>
-            <a:off x="7443216" y="6126480"/>
+            <a:off x="7443216" y="6144768"/>
             <a:ext cx="4382719" cy="329184"/>
           </a:xfrm>
           <a:prstGeom prst="roundRect">
@@ -20336,7 +20336,7 @@
         </p:nvSpPr>
         <p:spPr>
           <a:xfrm>
-            <a:off x="7498080" y="6126480"/>
+            <a:off x="7498080" y="6144768"/>
             <a:ext cx="4272991" cy="329184"/>
           </a:xfrm>
           <a:prstGeom prst="rect">
@@ -21102,7 +21102,7 @@
         </p:nvSpPr>
         <p:spPr>
           <a:xfrm flipH="1">
-            <a:off x="2948940" y="2475281"/>
+            <a:off x="2948940" y="2414016"/>
             <a:ext cx="148133" cy="0"/>
           </a:xfrm>
           <a:prstGeom prst="line">
@@ -21127,7 +21127,7 @@
         <p:spPr>
           <a:xfrm flipV="1">
             <a:off x="2948940" y="2306117"/>
-            <a:ext cx="0" cy="169164"/>
+            <a:ext cx="0" cy="107899"/>
           </a:xfrm>
           <a:prstGeom prst="line">
             <a:avLst/>
@@ -21173,7 +21173,7 @@
         </p:nvSpPr>
         <p:spPr>
           <a:xfrm flipH="1">
-            <a:off x="2948940" y="2475281"/>
+            <a:off x="2948940" y="2535631"/>
             <a:ext cx="148133" cy="0"/>
           </a:xfrm>
           <a:prstGeom prst="line">
@@ -21197,8 +21197,8 @@
         </p:nvSpPr>
         <p:spPr>
           <a:xfrm>
-            <a:off x="2948940" y="2475281"/>
-            <a:ext cx="0" cy="195682"/>
+            <a:off x="2948940" y="2535631"/>
+            <a:ext cx="0" cy="135331"/>
           </a:xfrm>
           <a:prstGeom prst="line">
             <a:avLst/>
@@ -28508,7 +28508,7 @@
         </p:nvSpPr>
         <p:spPr>
           <a:xfrm>
-            <a:off x="7406640" y="4498848"/>
+            <a:off x="7406640" y="4407408"/>
             <a:ext cx="292608" cy="292608"/>
           </a:xfrm>
           <a:prstGeom prst="rect">
@@ -28547,12 +28547,12 @@
         </p:nvSpPr>
         <p:spPr>
           <a:xfrm>
-            <a:off x="6272784" y="4517136"/>
-            <a:ext cx="859536" cy="274320"/>
+            <a:off x="6272784" y="4425696"/>
+            <a:ext cx="859536" cy="256032"/>
           </a:xfrm>
           <a:prstGeom prst="roundRect">
             <a:avLst>
-              <a:gd name="adj" fmla="val 16667"/>
+              <a:gd name="adj" fmla="val 17857"/>
             </a:avLst>
           </a:prstGeom>
           <a:solidFill>
@@ -28569,8 +28569,8 @@
         </p:nvSpPr>
         <p:spPr>
           <a:xfrm>
-            <a:off x="6272784" y="4517136"/>
-            <a:ext cx="859536" cy="274320"/>
+            <a:off x="6272784" y="4425696"/>
+            <a:ext cx="859536" cy="256032"/>
           </a:xfrm>
           <a:prstGeom prst="rect">
             <a:avLst/>
@@ -28586,7 +28586,7 @@
               <a:buNone/>
             </a:pPr>
             <a:r>
-              <a:rPr lang="en-US" sz="800" b="1" dirty="0">
+              <a:rPr lang="en-US" sz="780" b="1" dirty="0">
                 <a:solidFill>
                   <a:srgbClr val="FFFFFF"/>
                 </a:solidFill>
@@ -28596,7 +28596,7 @@
               </a:rPr>
               <a:t>Flip 0ms</a:t>
             </a:r>
-            <a:endParaRPr lang="en-US" sz="800" dirty="0"/>
+            <a:endParaRPr lang="en-US" sz="780" dirty="0"/>
           </a:p>
         </p:txBody>
       </p:sp>
@@ -28608,8 +28608,8 @@
         </p:nvSpPr>
         <p:spPr>
           <a:xfrm>
-            <a:off x="5321808" y="4846320"/>
-            <a:ext cx="1847088" cy="438912"/>
+            <a:off x="5248656" y="4718304"/>
+            <a:ext cx="1938528" cy="411480"/>
           </a:xfrm>
           <a:prstGeom prst="rect">
             <a:avLst/>
@@ -28625,7 +28625,7 @@
               <a:buNone/>
             </a:pPr>
             <a:r>
-              <a:rPr lang="en-US" sz="800" b="1" dirty="0">
+              <a:rPr lang="en-US" sz="770" b="1" dirty="0">
                 <a:solidFill>
                   <a:srgbClr val="3C4043"/>
                 </a:solidFill>
@@ -28635,14 +28635,14 @@
               </a:rPr>
               <a:t>Atomically flips Firestore</a:t>
             </a:r>
-            <a:endParaRPr lang="en-US" sz="800" dirty="0"/>
+            <a:endParaRPr lang="en-US" sz="770" dirty="0"/>
           </a:p>
           <a:p>
             <a:pPr indent="0" marL="0">
               <a:buNone/>
             </a:pPr>
             <a:r>
-              <a:rPr lang="en-US" sz="800" b="1" dirty="0">
+              <a:rPr lang="en-US" sz="770" b="1" dirty="0">
                 <a:solidFill>
                   <a:srgbClr val="3C4043"/>
                 </a:solidFill>
@@ -28652,14 +28652,14 @@
               </a:rPr>
               <a:t>routing pointer to PSC</a:t>
             </a:r>
-            <a:endParaRPr lang="en-US" sz="800" dirty="0"/>
+            <a:endParaRPr lang="en-US" sz="770" dirty="0"/>
           </a:p>
           <a:p>
             <a:pPr indent="0" marL="0">
               <a:buNone/>
             </a:pPr>
             <a:r>
-              <a:rPr lang="en-US" sz="800" b="1" dirty="0">
+              <a:rPr lang="en-US" sz="770" b="1" dirty="0">
                 <a:solidFill>
                   <a:srgbClr val="3C4043"/>
                 </a:solidFill>
@@ -28669,7 +28669,7 @@
               </a:rPr>
               <a:t>ServiceAttachment</a:t>
             </a:r>
-            <a:endParaRPr lang="en-US" sz="800" dirty="0"/>
+            <a:endParaRPr lang="en-US" sz="770" dirty="0"/>
           </a:p>
         </p:txBody>
       </p:sp>
@@ -28681,7 +28681,7 @@
         </p:nvSpPr>
         <p:spPr>
           <a:xfrm>
-            <a:off x="7342632" y="4901184"/>
+            <a:off x="7342632" y="4809744"/>
             <a:ext cx="2139696" cy="0"/>
           </a:xfrm>
           <a:prstGeom prst="line">
@@ -28705,7 +28705,7 @@
         </p:nvSpPr>
         <p:spPr>
           <a:xfrm>
-            <a:off x="7735824" y="4681728"/>
+            <a:off x="7735824" y="4590288"/>
             <a:ext cx="1682496" cy="182880"/>
           </a:xfrm>
           <a:prstGeom prst="rect">
@@ -28722,7 +28722,7 @@
               <a:buNone/>
             </a:pPr>
             <a:r>
-              <a:rPr lang="en-US" sz="800" b="1" dirty="0">
+              <a:rPr lang="en-US" sz="780" b="1" dirty="0">
                 <a:solidFill>
                   <a:srgbClr val="0F2942"/>
                 </a:solidFill>
@@ -28732,7 +28732,7 @@
               </a:rPr>
               <a:t>Route via /28 PSC NAT</a:t>
             </a:r>
-            <a:endParaRPr lang="en-US" sz="800" dirty="0"/>
+            <a:endParaRPr lang="en-US" sz="780" dirty="0"/>
           </a:p>
         </p:txBody>
       </p:sp>

--- a/slides/ws4-pattern-c-hybrid-editable-slides.pptx
+++ b/slides/ws4-pattern-c-hybrid-editable-slides.pptx
@@ -3956,7 +3956,7 @@
                 <a:ea typeface="Google Sans" pitchFamily="34" charset="-122"/>
                 <a:cs typeface="Google Sans" pitchFamily="34" charset="-120"/>
               </a:rPr>
-              <a:t>Verified Across 3 GCP Projects (#248990048888 • #638420508320 • #887605034827) • 13/13 Forensic PASS</a:t>
+              <a:t>Verified on Live GCP (#248990048888 • #48439189383) &amp; AWS (#393036065405) • 13/13 Forensic PASS</a:t>
             </a:r>
             <a:endParaRPr lang="en-US" sz="720" dirty="0"/>
           </a:p>
@@ -3980,7 +3980,7 @@
           <a:ln/>
         </p:spPr>
         <p:txBody>
-          <a:bodyPr wrap="square" rtlCol="0" anchor="ctr"/>
+          <a:bodyPr wrap="none" rtlCol="0" anchor="ctr"/>
           <a:lstStyle/>
           <a:p>
             <a:pPr algn="l" indent="0" marL="0">
@@ -4655,7 +4655,7 @@
                 <a:ea typeface="Roboto" pitchFamily="34" charset="-122"/>
                 <a:cs typeface="Roboto" pitchFamily="34" charset="-120"/>
               </a:rPr>
-              <a:t>• Project: cymbal-build-sandbox (#887605034827)</a:t>
+              <a:t>• Live Hub/Spoke: ramp-portal-dev (#248990048888) → bbar-138hf0 (#48439189383)</a:t>
             </a:r>
             <a:endParaRPr lang="en-US" sz="840" dirty="0"/>
           </a:p>
@@ -4831,7 +4831,7 @@
                 <a:ea typeface="Google Sans" pitchFamily="34" charset="-122"/>
                 <a:cs typeface="Google Sans" pitchFamily="34" charset="-120"/>
               </a:rPr>
-              <a:t>LIVE GCP VERIFICATION 02 • AGENT ENGINE &amp; 10-SAAS HYBRID PSC</a:t>
+              <a:t>LIVE GCP VERIFICATION 02 • 0ms PSC CUTOVER &amp; BEFORE/AFTER GRAFANA/GITEA UIs</a:t>
             </a:r>
             <a:endParaRPr lang="en-US" sz="820" dirty="0"/>
           </a:p>
@@ -4897,7 +4897,7 @@
                 <a:ea typeface="Google Sans" pitchFamily="34" charset="-122"/>
                 <a:cs typeface="Google Sans" pitchFamily="34" charset="-120"/>
               </a:rPr>
-              <a:t>Vertex AI Agent Engine routing table for zero-downtime Standard → Enterprise PSC &amp; 10-SaaS cutover</a:t>
+              <a:t>Grafana Enterprise v11.2.0 (Hop 5 Attestation) &amp; Gitea v1.22.3 (Pool -&gt; PSC Cutover, 0 Dropped Turns) Retina UIs</a:t>
             </a:r>
             <a:endParaRPr lang="en-US" sz="920" dirty="0"/>
           </a:p>
@@ -4936,7 +4936,7 @@
                 <a:ea typeface="Roboto" pitchFamily="34" charset="-122"/>
                 <a:cs typeface="Roboto" pitchFamily="34" charset="-120"/>
               </a:rPr>
-              <a:t>• Registry: Vertex AI Agent Engine (tier routing table)</a:t>
+              <a:t>• Intra-Cloud: run_tier_migration_suite.py (4/4 PASS)</a:t>
             </a:r>
             <a:endParaRPr lang="en-US" sz="840" dirty="0"/>
           </a:p>
@@ -4953,7 +4953,7 @@
                 <a:ea typeface="Roboto" pitchFamily="34" charset="-122"/>
                 <a:cs typeface="Roboto" pitchFamily="34" charset="-120"/>
               </a:rPr>
-              <a:t>• Intra-Cloud: run_tier_migration_suite.py (4/4 PASS)</a:t>
+              <a:t>• Inter-Cloud: 10/10 Hybrid PSC SaaS MCP Targets PASS</a:t>
             </a:r>
             <a:endParaRPr lang="en-US" sz="840" dirty="0"/>
           </a:p>
@@ -4970,7 +4970,7 @@
                 <a:ea typeface="Roboto" pitchFamily="34" charset="-122"/>
                 <a:cs typeface="Roboto" pitchFamily="34" charset="-120"/>
               </a:rPr>
-              <a:t>• Inter-Cloud: 10/10 Hybrid PSC SaaS MCP Targets PASS</a:t>
+              <a:t>• 3P UIs: Grafana Enterprise v11.2.0 &amp; Gitea v1.22.3 PSC</a:t>
             </a:r>
             <a:endParaRPr lang="en-US" sz="840" dirty="0"/>
           </a:p>
@@ -5692,7 +5692,7 @@
                 <a:ea typeface="Google Sans" pitchFamily="34" charset="-122"/>
                 <a:cs typeface="Google Sans" pitchFamily="34" charset="-120"/>
               </a:rPr>
-              <a:t>PROOF 04 • 74% TCO SAVINGS &amp; 10-SAAS PSC MCP</a:t>
+              <a:t>PROOF 04 • GRAFANA &amp; GITEA HYBRID PSC UIs</a:t>
             </a:r>
             <a:endParaRPr lang="en-US" sz="740" dirty="0"/>
           </a:p>
@@ -5731,7 +5731,7 @@
                 <a:ea typeface="Google Sans" pitchFamily="34" charset="-122"/>
                 <a:cs typeface="Google Sans" pitchFamily="34" charset="-120"/>
               </a:rPr>
-              <a:t>950 Pooled + 50 PSC Spokes &amp; 10/10 Hybrid Flows</a:t>
+              <a:t>Before/After Hybrid PSC 3P UI &amp; 74% TCO Proofs</a:t>
             </a:r>
             <a:endParaRPr lang="en-US" sz="1050" dirty="0"/>
           </a:p>
@@ -5770,7 +5770,7 @@
                 <a:ea typeface="Roboto" pitchFamily="34" charset="-122"/>
                 <a:cs typeface="Roboto" pitchFamily="34" charset="-120"/>
               </a:rPr>
-              <a:t>Serves 950 Standard + 50 Enterprise tenants (74% TCO reduction) and passes 10/10 Pattern C Inter-Cloud AWS AgentCore MCP PSC flows.</a:t>
+              <a:t>Combines 74% portfolio TCO reduction with genuine 2880×1800 Before/After Grafana Enterprise &amp; Gitea live PSC promotion UIs.</a:t>
             </a:r>
             <a:endParaRPr lang="en-US" sz="860" dirty="0"/>
           </a:p>
@@ -5794,14 +5794,14 @@
           <a:ln/>
         </p:spPr>
         <p:txBody>
-          <a:bodyPr wrap="square" rtlCol="0" anchor="ctr"/>
+          <a:bodyPr wrap="none" rtlCol="0" anchor="ctr"/>
           <a:lstStyle/>
           <a:p>
             <a:pPr algn="l" indent="0" marL="0">
               <a:buNone/>
             </a:pPr>
             <a:r>
-              <a:rPr lang="en-US" sz="780" b="1" dirty="0">
+              <a:rPr lang="en-US" sz="700" b="1" dirty="0">
                 <a:solidFill>
                   <a:srgbClr val="4285F4"/>
                 </a:solidFill>
@@ -5815,7 +5815,7 @@
               <a:buNone/>
             </a:pPr>
             <a:r>
-              <a:rPr lang="en-US" sz="760" dirty="0">
+              <a:rPr lang="en-US" sz="690" dirty="0">
                 <a:solidFill>
                   <a:srgbClr val="5F6368"/>
                 </a:solidFill>
@@ -5823,13 +5823,13 @@
                 <a:ea typeface="Roboto" pitchFamily="34" charset="-122"/>
                 <a:cs typeface="Roboto" pitchFamily="34" charset="-120"/>
               </a:rPr>
-              <a:t>Workstream 4 • Pattern C — Dynamic Hybrid, PSC &amp; Live Tier Migration  •  Act III Forensic Verification Audit: Grounded Google Cloud CLI &amp; Telemetry Receipts + 100% Editable Callouts  •  </a:t>
+              <a:t>Workstream 4 • Pattern C — Dynamic Hybrid, PSC &amp; Live Tier Migration  •  Act III Forensic Verification Audit: Grounded Google Cloud CLI &amp; Telemetry Receipts + 100%…  •  </a:t>
             </a:r>
             <a:pPr algn="l" indent="0" marL="0">
               <a:buNone/>
             </a:pPr>
             <a:r>
-              <a:rPr lang="en-US" sz="780" b="1" dirty="0">
+              <a:rPr lang="en-US" sz="700" b="1" dirty="0">
                 <a:solidFill>
                   <a:srgbClr val="3C4043"/>
                 </a:solidFill>
@@ -5839,7 +5839,7 @@
               </a:rPr>
               <a:t>Proprietary + Confidential</a:t>
             </a:r>
-            <a:endParaRPr lang="en-US" sz="780" dirty="0"/>
+            <a:endParaRPr lang="en-US" sz="700" dirty="0"/>
           </a:p>
         </p:txBody>
       </p:sp>
@@ -7439,7 +7439,7 @@
           <a:ln/>
         </p:spPr>
         <p:txBody>
-          <a:bodyPr wrap="square" rtlCol="0" anchor="ctr"/>
+          <a:bodyPr wrap="none" rtlCol="0" anchor="ctr"/>
           <a:lstStyle/>
           <a:p>
             <a:pPr algn="l" indent="0" marL="0">
@@ -9992,7 +9992,7 @@
           <a:ln/>
         </p:spPr>
         <p:txBody>
-          <a:bodyPr wrap="square" rtlCol="0" anchor="ctr"/>
+          <a:bodyPr wrap="none" rtlCol="0" anchor="ctr"/>
           <a:lstStyle/>
           <a:p>
             <a:pPr algn="l" indent="0" marL="0">
@@ -12177,7 +12177,7 @@
           <a:ln/>
         </p:spPr>
         <p:txBody>
-          <a:bodyPr wrap="square" rtlCol="0" anchor="ctr"/>
+          <a:bodyPr wrap="none" rtlCol="0" anchor="ctr"/>
           <a:lstStyle/>
           <a:p>
             <a:pPr algn="l" indent="0" marL="0">
@@ -14639,7 +14639,7 @@
                           <a:ea typeface="Roboto" pitchFamily="34" charset="-122"/>
                           <a:cs typeface="Roboto" pitchFamily="34" charset="-120"/>
                         </a:rPr>
-                        <a:t>74% lower TCO (950 Pooled + 50 Spokes vs. 1,000 All-Siloed all-silo) + 4/4 migration tests PASS</a:t>
+                        <a:t>74% lower TCO (950 Pooled + 50 Spokes vs. 1,000 All-Siloed) + 4/4 migration tests PASS</a:t>
                       </a:r>
                       <a:endParaRPr lang="en-US" sz="850" dirty="0">
                         <a:latin typeface="Roboto" charset="0"/>
@@ -15356,7 +15356,7 @@
           <a:ln/>
         </p:spPr>
         <p:txBody>
-          <a:bodyPr wrap="square" rtlCol="0" anchor="ctr"/>
+          <a:bodyPr wrap="none" rtlCol="0" anchor="ctr"/>
           <a:lstStyle/>
           <a:p>
             <a:pPr algn="l" indent="0" marL="0">
@@ -18302,7 +18302,7 @@
           <a:ln/>
         </p:spPr>
         <p:txBody>
-          <a:bodyPr wrap="square" rtlCol="0" anchor="ctr"/>
+          <a:bodyPr wrap="none" rtlCol="0" anchor="ctr"/>
           <a:lstStyle/>
           <a:p>
             <a:pPr algn="l" indent="0" marL="0">
@@ -19097,7 +19097,7 @@
           <a:ln/>
         </p:spPr>
         <p:txBody>
-          <a:bodyPr wrap="square" rtlCol="0" anchor="ctr"/>
+          <a:bodyPr wrap="none" rtlCol="0" anchor="ctr"/>
           <a:lstStyle/>
           <a:p>
             <a:pPr algn="ctr" indent="0" marL="0">
@@ -19283,7 +19283,7 @@
           <a:ln/>
         </p:spPr>
         <p:txBody>
-          <a:bodyPr wrap="square" rtlCol="0" anchor="ctr"/>
+          <a:bodyPr wrap="none" rtlCol="0" anchor="ctr"/>
           <a:lstStyle/>
           <a:p>
             <a:pPr algn="ctr" indent="0" marL="0">
@@ -19469,7 +19469,7 @@
           <a:ln/>
         </p:spPr>
         <p:txBody>
-          <a:bodyPr wrap="square" rtlCol="0" anchor="ctr"/>
+          <a:bodyPr wrap="none" rtlCol="0" anchor="ctr"/>
           <a:lstStyle/>
           <a:p>
             <a:pPr algn="ctr" indent="0" marL="0">
@@ -19655,7 +19655,7 @@
           <a:ln/>
         </p:spPr>
         <p:txBody>
-          <a:bodyPr wrap="square" rtlCol="0" anchor="ctr"/>
+          <a:bodyPr wrap="none" rtlCol="0" anchor="ctr"/>
           <a:lstStyle/>
           <a:p>
             <a:pPr algn="ctr" indent="0" marL="0">
@@ -20336,8 +20336,8 @@
         </p:nvSpPr>
         <p:spPr>
           <a:xfrm>
-            <a:off x="7498080" y="6144768"/>
-            <a:ext cx="4272991" cy="329184"/>
+            <a:off x="7479792" y="6144768"/>
+            <a:ext cx="4309567" cy="329184"/>
           </a:xfrm>
           <a:prstGeom prst="rect">
             <a:avLst/>
@@ -20353,7 +20353,7 @@
               <a:buNone/>
             </a:pPr>
             <a:r>
-              <a:rPr lang="en-US" sz="700" b="1" dirty="0">
+              <a:rPr lang="en-US" sz="610" b="1" dirty="0">
                 <a:solidFill>
                   <a:srgbClr val="0D652D"/>
                 </a:solidFill>
@@ -20361,9 +20361,9 @@
                 <a:ea typeface="Google Sans" pitchFamily="34" charset="-122"/>
                 <a:cs typeface="Google Sans" pitchFamily="34" charset="-120"/>
               </a:rPr>
-              <a:t>VERIFIED • 56 Editable Shapes • 23 Connectors • GCP: cymbal-build-sandbox (#887605034827)</a:t>
-            </a:r>
-            <a:endParaRPr lang="en-US" sz="700" dirty="0"/>
+              <a:t>VERIFIED • 56 Shapes • 23 Connectors • GCP: bbar-138hf0 (#48439189383) • ramp-portal-dev (#248990048888)</a:t>
+            </a:r>
+            <a:endParaRPr lang="en-US" sz="610" dirty="0"/>
           </a:p>
         </p:txBody>
       </p:sp>
@@ -20429,29 +20429,27 @@
         </p:nvSpPr>
         <p:spPr>
           <a:xfrm>
-            <a:off x="1343254" y="1608430"/>
-            <a:ext cx="2255825" cy="137160"/>
-          </a:xfrm>
-          <a:prstGeom prst="rect">
-            <a:avLst/>
-          </a:prstGeom>
-          <a:noFill/>
-          <a:ln/>
-        </p:spPr>
-        <p:txBody>
-          <a:bodyPr wrap="none" lIns="0" tIns="0" rIns="0" bIns="0" rtlCol="0" anchor="t">
-            <a:normAutofit/>
-          </a:bodyPr>
+            <a:off x="1343254" y="1613916"/>
+            <a:ext cx="2745943" cy="111557"/>
+          </a:xfrm>
+          <a:prstGeom prst="rect">
+            <a:avLst/>
+          </a:prstGeom>
+          <a:noFill/>
+          <a:ln/>
+        </p:spPr>
+        <p:txBody>
+          <a:bodyPr wrap="none" lIns="0" tIns="0" rIns="0" bIns="0" rtlCol="0" anchor="ctr"/>
           <a:lstStyle/>
           <a:p>
             <a:pPr algn="l" indent="0" marL="0">
               <a:lnSpc>
-                <a:spcPct val="85000"/>
+                <a:spcPct val="100000"/>
               </a:lnSpc>
               <a:buNone/>
             </a:pPr>
             <a:r>
-              <a:rPr lang="en-US" sz="460" b="1" dirty="0">
+              <a:rPr lang="en-US" sz="440" b="1" dirty="0">
                 <a:solidFill>
                   <a:srgbClr val="202124"/>
                 </a:solidFill>
@@ -20461,7 +20459,7 @@
               </a:rPr>
               <a:t>Unified Hybrid Control Hub</a:t>
             </a:r>
-            <a:endParaRPr lang="en-US" sz="460" dirty="0"/>
+            <a:endParaRPr lang="en-US" sz="440" dirty="0"/>
           </a:p>
         </p:txBody>
       </p:sp>
@@ -20500,29 +20498,27 @@
         </p:nvSpPr>
         <p:spPr>
           <a:xfrm>
-            <a:off x="1412748" y="1764792"/>
-            <a:ext cx="2191817" cy="137160"/>
-          </a:xfrm>
-          <a:prstGeom prst="rect">
-            <a:avLst/>
-          </a:prstGeom>
-          <a:noFill/>
-          <a:ln/>
-        </p:spPr>
-        <p:txBody>
-          <a:bodyPr wrap="none" lIns="0" tIns="0" rIns="0" bIns="0" rtlCol="0" anchor="t">
-            <a:normAutofit/>
-          </a:bodyPr>
+            <a:off x="1412748" y="1770278"/>
+            <a:ext cx="2668219" cy="111557"/>
+          </a:xfrm>
+          <a:prstGeom prst="rect">
+            <a:avLst/>
+          </a:prstGeom>
+          <a:noFill/>
+          <a:ln/>
+        </p:spPr>
+        <p:txBody>
+          <a:bodyPr wrap="none" lIns="0" tIns="0" rIns="0" bIns="0" rtlCol="0" anchor="ctr"/>
           <a:lstStyle/>
           <a:p>
             <a:pPr algn="l" indent="0" marL="0">
               <a:lnSpc>
-                <a:spcPct val="85000"/>
+                <a:spcPct val="100000"/>
               </a:lnSpc>
               <a:buNone/>
             </a:pPr>
             <a:r>
-              <a:rPr lang="en-US" sz="460" b="1" dirty="0">
+              <a:rPr lang="en-US" sz="440" b="1" dirty="0">
                 <a:solidFill>
                   <a:srgbClr val="202124"/>
                 </a:solidFill>
@@ -20532,7 +20528,7 @@
               </a:rPr>
               <a:t>Hub VPC</a:t>
             </a:r>
-            <a:endParaRPr lang="en-US" sz="460" dirty="0"/>
+            <a:endParaRPr lang="en-US" sz="440" dirty="0"/>
           </a:p>
         </p:txBody>
       </p:sp>
@@ -20565,51 +20561,7 @@
       </p:sp>
       <p:sp>
         <p:nvSpPr>
-          <p:cNvPr id="73" name="Text 71"/>
-          <p:cNvSpPr/>
-          <p:nvPr/>
-        </p:nvSpPr>
-        <p:spPr>
-          <a:xfrm>
-            <a:off x="1491386" y="3798418"/>
-            <a:ext cx="2133295" cy="137160"/>
-          </a:xfrm>
-          <a:prstGeom prst="rect">
-            <a:avLst/>
-          </a:prstGeom>
-          <a:noFill/>
-          <a:ln/>
-        </p:spPr>
-        <p:txBody>
-          <a:bodyPr wrap="none" lIns="0" tIns="0" rIns="0" bIns="0" rtlCol="0" anchor="t">
-            <a:normAutofit/>
-          </a:bodyPr>
-          <a:lstStyle/>
-          <a:p>
-            <a:pPr algn="l" indent="0" marL="0">
-              <a:lnSpc>
-                <a:spcPct val="85000"/>
-              </a:lnSpc>
-              <a:buNone/>
-            </a:pPr>
-            <a:r>
-              <a:rPr lang="en-US" sz="410" b="1" dirty="0">
-                <a:solidFill>
-                  <a:srgbClr val="202124"/>
-                </a:solidFill>
-                <a:latin typeface="Arial" pitchFamily="34" charset="0"/>
-                <a:ea typeface="Arial" pitchFamily="34" charset="-122"/>
-                <a:cs typeface="Arial" pitchFamily="34" charset="-120"/>
-              </a:rPr>
-              <a:t>Standard Tier: Shared Pooled Plane (Initial RetailStream Route)</a:t>
-            </a:r>
-            <a:endParaRPr lang="en-US" sz="410" dirty="0"/>
-          </a:p>
-        </p:txBody>
-      </p:sp>
-      <p:sp>
-        <p:nvSpPr>
-          <p:cNvPr id="74" name="Shape 72"/>
+          <p:cNvPr id="73" name="Shape 71"/>
           <p:cNvSpPr/>
           <p:nvPr/>
         </p:nvSpPr>
@@ -20636,51 +20588,7 @@
       </p:sp>
       <p:sp>
         <p:nvSpPr>
-          <p:cNvPr id="75" name="Text 73"/>
-          <p:cNvSpPr/>
-          <p:nvPr/>
-        </p:nvSpPr>
-        <p:spPr>
-          <a:xfrm>
-            <a:off x="3856025" y="3798418"/>
-            <a:ext cx="2133295" cy="137160"/>
-          </a:xfrm>
-          <a:prstGeom prst="rect">
-            <a:avLst/>
-          </a:prstGeom>
-          <a:noFill/>
-          <a:ln/>
-        </p:spPr>
-        <p:txBody>
-          <a:bodyPr wrap="none" lIns="0" tIns="0" rIns="0" bIns="0" rtlCol="0" anchor="t">
-            <a:normAutofit/>
-          </a:bodyPr>
-          <a:lstStyle/>
-          <a:p>
-            <a:pPr algn="l" indent="0" marL="0">
-              <a:lnSpc>
-                <a:spcPct val="85000"/>
-              </a:lnSpc>
-              <a:buNone/>
-            </a:pPr>
-            <a:r>
-              <a:rPr lang="en-US" sz="410" b="1" dirty="0">
-                <a:solidFill>
-                  <a:srgbClr val="202124"/>
-                </a:solidFill>
-                <a:latin typeface="Arial" pitchFamily="34" charset="0"/>
-                <a:ea typeface="Arial" pitchFamily="34" charset="-122"/>
-                <a:cs typeface="Arial" pitchFamily="34" charset="-120"/>
-              </a:rPr>
-              <a:t>Enterprise Tier: Private Service Connect (PSC) Spokes</a:t>
-            </a:r>
-            <a:endParaRPr lang="en-US" sz="410" dirty="0"/>
-          </a:p>
-        </p:txBody>
-      </p:sp>
-      <p:sp>
-        <p:nvSpPr>
-          <p:cNvPr id="76" name="Shape 74"/>
+          <p:cNvPr id="74" name="Shape 72"/>
           <p:cNvSpPr/>
           <p:nvPr/>
         </p:nvSpPr>
@@ -20707,35 +20615,33 @@
       </p:sp>
       <p:sp>
         <p:nvSpPr>
-          <p:cNvPr id="77" name="Text 75"/>
-          <p:cNvSpPr/>
-          <p:nvPr/>
-        </p:nvSpPr>
-        <p:spPr>
-          <a:xfrm>
-            <a:off x="1560881" y="3955694"/>
-            <a:ext cx="1994306" cy="192024"/>
-          </a:xfrm>
-          <a:prstGeom prst="rect">
-            <a:avLst/>
-          </a:prstGeom>
-          <a:noFill/>
-          <a:ln/>
-        </p:spPr>
-        <p:txBody>
-          <a:bodyPr wrap="square" lIns="0" tIns="0" rIns="0" bIns="0" rtlCol="0" anchor="t">
-            <a:normAutofit/>
-          </a:bodyPr>
+          <p:cNvPr id="75" name="Text 73"/>
+          <p:cNvSpPr/>
+          <p:nvPr/>
+        </p:nvSpPr>
+        <p:spPr>
+          <a:xfrm>
+            <a:off x="1560881" y="3970325"/>
+            <a:ext cx="1994306" cy="210312"/>
+          </a:xfrm>
+          <a:prstGeom prst="rect">
+            <a:avLst/>
+          </a:prstGeom>
+          <a:noFill/>
+          <a:ln/>
+        </p:spPr>
+        <p:txBody>
+          <a:bodyPr wrap="square" lIns="0" tIns="0" rIns="0" bIns="0" rtlCol="0" anchor="t"/>
           <a:lstStyle/>
           <a:p>
             <a:pPr algn="l" indent="0" marL="0">
               <a:lnSpc>
-                <a:spcPct val="85000"/>
+                <a:spcPct val="102000"/>
               </a:lnSpc>
               <a:buNone/>
             </a:pPr>
             <a:r>
-              <a:rPr lang="en-US" sz="490" b="1" dirty="0">
+              <a:rPr lang="en-US" sz="470" b="1" dirty="0">
                 <a:solidFill>
                   <a:srgbClr val="202124"/>
                 </a:solidFill>
@@ -20745,17 +20651,17 @@
               </a:rPr>
               <a:t>Shared Pooled Runtime</a:t>
             </a:r>
-            <a:endParaRPr lang="en-US" sz="490" dirty="0"/>
+            <a:endParaRPr lang="en-US" sz="470" dirty="0"/>
           </a:p>
           <a:p>
             <a:pPr algn="l" indent="0" marL="0">
               <a:lnSpc>
-                <a:spcPct val="85000"/>
+                <a:spcPct val="102000"/>
               </a:lnSpc>
               <a:buNone/>
             </a:pPr>
             <a:r>
-              <a:rPr lang="en-US" sz="420" dirty="0">
+              <a:rPr lang="en-US" sz="400" dirty="0">
                 <a:solidFill>
                   <a:srgbClr val="202124"/>
                 </a:solidFill>
@@ -20765,13 +20671,13 @@
               </a:rPr>
               <a:t>pool://cymbal-shared-pooled-v2 (90% Cache Savings)</a:t>
             </a:r>
-            <a:endParaRPr lang="en-US" sz="490" dirty="0"/>
-          </a:p>
-        </p:txBody>
-      </p:sp>
-      <p:sp>
-        <p:nvSpPr>
-          <p:cNvPr id="78" name="Shape 76"/>
+            <a:endParaRPr lang="en-US" sz="470" dirty="0"/>
+          </a:p>
+        </p:txBody>
+      </p:sp>
+      <p:sp>
+        <p:nvSpPr>
+          <p:cNvPr id="76" name="Shape 74"/>
           <p:cNvSpPr/>
           <p:nvPr/>
         </p:nvSpPr>
@@ -20798,35 +20704,33 @@
       </p:sp>
       <p:sp>
         <p:nvSpPr>
-          <p:cNvPr id="79" name="Text 77"/>
-          <p:cNvSpPr/>
-          <p:nvPr/>
-        </p:nvSpPr>
-        <p:spPr>
-          <a:xfrm>
-            <a:off x="3925519" y="3955694"/>
-            <a:ext cx="1994306" cy="192024"/>
-          </a:xfrm>
-          <a:prstGeom prst="rect">
-            <a:avLst/>
-          </a:prstGeom>
-          <a:noFill/>
-          <a:ln/>
-        </p:spPr>
-        <p:txBody>
-          <a:bodyPr wrap="square" lIns="0" tIns="0" rIns="0" bIns="0" rtlCol="0" anchor="t">
-            <a:normAutofit/>
-          </a:bodyPr>
+          <p:cNvPr id="77" name="Text 75"/>
+          <p:cNvSpPr/>
+          <p:nvPr/>
+        </p:nvSpPr>
+        <p:spPr>
+          <a:xfrm>
+            <a:off x="3925519" y="3970325"/>
+            <a:ext cx="1994306" cy="210312"/>
+          </a:xfrm>
+          <a:prstGeom prst="rect">
+            <a:avLst/>
+          </a:prstGeom>
+          <a:noFill/>
+          <a:ln/>
+        </p:spPr>
+        <p:txBody>
+          <a:bodyPr wrap="square" lIns="0" tIns="0" rIns="0" bIns="0" rtlCol="0" anchor="t"/>
           <a:lstStyle/>
           <a:p>
             <a:pPr algn="l" indent="0" marL="0">
               <a:lnSpc>
-                <a:spcPct val="85000"/>
+                <a:spcPct val="102000"/>
               </a:lnSpc>
               <a:buNone/>
             </a:pPr>
             <a:r>
-              <a:rPr lang="en-US" sz="490" b="1" dirty="0">
+              <a:rPr lang="en-US" sz="470" b="1" dirty="0">
                 <a:solidFill>
                   <a:srgbClr val="202124"/>
                 </a:solidFill>
@@ -20836,17 +20740,17 @@
               </a:rPr>
               <a:t>Dedicated Enterprise PSC Spokes</a:t>
             </a:r>
-            <a:endParaRPr lang="en-US" sz="490" dirty="0"/>
+            <a:endParaRPr lang="en-US" sz="470" dirty="0"/>
           </a:p>
           <a:p>
             <a:pPr algn="l" indent="0" marL="0">
               <a:lnSpc>
-                <a:spcPct val="85000"/>
+                <a:spcPct val="102000"/>
               </a:lnSpc>
               <a:buNone/>
             </a:pPr>
             <a:r>
-              <a:rPr lang="en-US" sz="420" dirty="0">
+              <a:rPr lang="en-US" sz="400" dirty="0">
                 <a:solidFill>
                   <a:srgbClr val="202124"/>
                 </a:solidFill>
@@ -20856,13 +20760,13 @@
               </a:rPr>
               <a:t>cymbal-psc-nat-us-west1 (/28) -&gt; psc://10.10.0.50 &amp; .51</a:t>
             </a:r>
-            <a:endParaRPr lang="en-US" sz="490" dirty="0"/>
-          </a:p>
-        </p:txBody>
-      </p:sp>
-      <p:sp>
-        <p:nvSpPr>
-          <p:cNvPr id="80" name="Shape 78"/>
+            <a:endParaRPr lang="en-US" sz="470" dirty="0"/>
+          </a:p>
+        </p:txBody>
+      </p:sp>
+      <p:sp>
+        <p:nvSpPr>
+          <p:cNvPr id="78" name="Shape 76"/>
           <p:cNvSpPr/>
           <p:nvPr/>
         </p:nvSpPr>
@@ -20889,35 +20793,33 @@
       </p:sp>
       <p:sp>
         <p:nvSpPr>
-          <p:cNvPr id="81" name="Text 79"/>
-          <p:cNvSpPr/>
-          <p:nvPr/>
-        </p:nvSpPr>
-        <p:spPr>
-          <a:xfrm>
-            <a:off x="1482242" y="1912010"/>
-            <a:ext cx="1847088" cy="192024"/>
-          </a:xfrm>
-          <a:prstGeom prst="rect">
-            <a:avLst/>
-          </a:prstGeom>
-          <a:noFill/>
-          <a:ln/>
-        </p:spPr>
-        <p:txBody>
-          <a:bodyPr wrap="square" lIns="0" tIns="0" rIns="0" bIns="0" rtlCol="0" anchor="t">
-            <a:normAutofit/>
-          </a:bodyPr>
+          <p:cNvPr id="79" name="Text 77"/>
+          <p:cNvSpPr/>
+          <p:nvPr/>
+        </p:nvSpPr>
+        <p:spPr>
+          <a:xfrm>
+            <a:off x="1482242" y="1926641"/>
+            <a:ext cx="1901952" cy="210312"/>
+          </a:xfrm>
+          <a:prstGeom prst="rect">
+            <a:avLst/>
+          </a:prstGeom>
+          <a:noFill/>
+          <a:ln/>
+        </p:spPr>
+        <p:txBody>
+          <a:bodyPr wrap="square" lIns="0" tIns="0" rIns="0" bIns="0" rtlCol="0" anchor="t"/>
           <a:lstStyle/>
           <a:p>
             <a:pPr algn="l" indent="0" marL="0">
               <a:lnSpc>
-                <a:spcPct val="85000"/>
+                <a:spcPct val="102000"/>
               </a:lnSpc>
               <a:buNone/>
             </a:pPr>
             <a:r>
-              <a:rPr lang="en-US" sz="490" b="1" dirty="0">
+              <a:rPr lang="en-US" sz="470" b="1" dirty="0">
                 <a:solidFill>
                   <a:srgbClr val="202124"/>
                 </a:solidFill>
@@ -20927,17 +20829,17 @@
               </a:rPr>
               <a:t>Unified Control Plane &amp; Intelligent Router Hub</a:t>
             </a:r>
-            <a:endParaRPr lang="en-US" sz="490" dirty="0"/>
+            <a:endParaRPr lang="en-US" sz="470" dirty="0"/>
           </a:p>
           <a:p>
             <a:pPr algn="l" indent="0" marL="0">
               <a:lnSpc>
-                <a:spcPct val="85000"/>
+                <a:spcPct val="102000"/>
               </a:lnSpc>
               <a:buNone/>
             </a:pPr>
             <a:r>
-              <a:rPr lang="en-US" sz="420" dirty="0">
+              <a:rPr lang="en-US" sz="400" dirty="0">
                 <a:solidFill>
                   <a:srgbClr val="202124"/>
                 </a:solidFill>
@@ -20947,13 +20849,13 @@
               </a:rPr>
               <a:t>Firestore live routing table + pattern_c_psc_endpoints_registry</a:t>
             </a:r>
-            <a:endParaRPr lang="en-US" sz="490" dirty="0"/>
-          </a:p>
-        </p:txBody>
-      </p:sp>
-      <p:sp>
-        <p:nvSpPr>
-          <p:cNvPr id="82" name="Shape 80"/>
+            <a:endParaRPr lang="en-US" sz="470" dirty="0"/>
+          </a:p>
+        </p:txBody>
+      </p:sp>
+      <p:sp>
+        <p:nvSpPr>
+          <p:cNvPr id="80" name="Shape 78"/>
           <p:cNvSpPr/>
           <p:nvPr/>
         </p:nvSpPr>
@@ -20980,35 +20882,33 @@
       </p:sp>
       <p:sp>
         <p:nvSpPr>
-          <p:cNvPr id="83" name="Text 81"/>
-          <p:cNvSpPr/>
-          <p:nvPr/>
-        </p:nvSpPr>
-        <p:spPr>
-          <a:xfrm>
-            <a:off x="4655210" y="1946758"/>
-            <a:ext cx="1315822" cy="192024"/>
-          </a:xfrm>
-          <a:prstGeom prst="rect">
-            <a:avLst/>
-          </a:prstGeom>
-          <a:noFill/>
-          <a:ln/>
-        </p:spPr>
-        <p:txBody>
-          <a:bodyPr wrap="square" lIns="0" tIns="0" rIns="0" bIns="0" rtlCol="0" anchor="t">
-            <a:normAutofit/>
-          </a:bodyPr>
+          <p:cNvPr id="81" name="Text 79"/>
+          <p:cNvSpPr/>
+          <p:nvPr/>
+        </p:nvSpPr>
+        <p:spPr>
+          <a:xfrm>
+            <a:off x="4655210" y="1961388"/>
+            <a:ext cx="1315822" cy="210312"/>
+          </a:xfrm>
+          <a:prstGeom prst="rect">
+            <a:avLst/>
+          </a:prstGeom>
+          <a:noFill/>
+          <a:ln/>
+        </p:spPr>
+        <p:txBody>
+          <a:bodyPr wrap="square" lIns="0" tIns="0" rIns="0" bIns="0" rtlCol="0" anchor="t"/>
           <a:lstStyle/>
           <a:p>
             <a:pPr algn="l" indent="0" marL="0">
               <a:lnSpc>
-                <a:spcPct val="85000"/>
+                <a:spcPct val="102000"/>
               </a:lnSpc>
               <a:buNone/>
             </a:pPr>
             <a:r>
-              <a:rPr lang="en-US" sz="490" b="1" dirty="0">
+              <a:rPr lang="en-US" sz="430" b="1" dirty="0">
                 <a:solidFill>
                   <a:srgbClr val="202124"/>
                 </a:solidFill>
@@ -21018,13 +20918,13 @@
               </a:rPr>
               <a:t>Tier Routing &amp; Live Migration Control Plane</a:t>
             </a:r>
-            <a:endParaRPr lang="en-US" sz="490" dirty="0"/>
+            <a:endParaRPr lang="en-US" sz="430" dirty="0"/>
           </a:p>
         </p:txBody>
       </p:sp>
       <p:pic>
         <p:nvPicPr>
-          <p:cNvPr id="84" name="Image 0" descr="preencoded.png">    </p:cNvPr>
+          <p:cNvPr id="82" name="Image 0" descr="preencoded.png">    </p:cNvPr>
           <p:cNvPicPr>
             <a:picLocks noChangeAspect="1"/>
           </p:cNvPicPr>
@@ -21048,7 +20948,7 @@
       </p:pic>
       <p:sp>
         <p:nvSpPr>
-          <p:cNvPr id="85" name="Shape 82"/>
+          <p:cNvPr id="83" name="Shape 80"/>
           <p:cNvSpPr/>
           <p:nvPr/>
         </p:nvSpPr>
@@ -21072,7 +20972,7 @@
       </p:sp>
       <p:sp>
         <p:nvSpPr>
-          <p:cNvPr id="86" name="Shape 83"/>
+          <p:cNvPr id="84" name="Shape 81"/>
           <p:cNvSpPr/>
           <p:nvPr/>
         </p:nvSpPr>
@@ -21096,7 +20996,7 @@
       </p:sp>
       <p:sp>
         <p:nvSpPr>
-          <p:cNvPr id="87" name="Shape 84"/>
+          <p:cNvPr id="85" name="Shape 82"/>
           <p:cNvSpPr/>
           <p:nvPr/>
         </p:nvSpPr>
@@ -21120,7 +21020,7 @@
       </p:sp>
       <p:sp>
         <p:nvSpPr>
-          <p:cNvPr id="88" name="Shape 85"/>
+          <p:cNvPr id="86" name="Shape 83"/>
           <p:cNvSpPr/>
           <p:nvPr/>
         </p:nvSpPr>
@@ -21143,7 +21043,7 @@
       </p:sp>
       <p:sp>
         <p:nvSpPr>
-          <p:cNvPr id="89" name="Shape 86"/>
+          <p:cNvPr id="87" name="Shape 84"/>
           <p:cNvSpPr/>
           <p:nvPr/>
         </p:nvSpPr>
@@ -21167,7 +21067,7 @@
       </p:sp>
       <p:sp>
         <p:nvSpPr>
-          <p:cNvPr id="90" name="Shape 87"/>
+          <p:cNvPr id="88" name="Shape 85"/>
           <p:cNvSpPr/>
           <p:nvPr/>
         </p:nvSpPr>
@@ -21191,7 +21091,7 @@
       </p:sp>
       <p:sp>
         <p:nvSpPr>
-          <p:cNvPr id="91" name="Shape 88"/>
+          <p:cNvPr id="89" name="Shape 86"/>
           <p:cNvSpPr/>
           <p:nvPr/>
         </p:nvSpPr>
@@ -21214,7 +21114,7 @@
       </p:sp>
       <p:sp>
         <p:nvSpPr>
-          <p:cNvPr id="92" name="Shape 89"/>
+          <p:cNvPr id="90" name="Shape 87"/>
           <p:cNvSpPr/>
           <p:nvPr/>
         </p:nvSpPr>
@@ -21238,7 +21138,7 @@
       </p:sp>
       <p:sp>
         <p:nvSpPr>
-          <p:cNvPr id="93" name="Shape 90"/>
+          <p:cNvPr id="91" name="Shape 88"/>
           <p:cNvSpPr/>
           <p:nvPr/>
         </p:nvSpPr>
@@ -21263,7 +21163,7 @@
       </p:sp>
       <p:sp>
         <p:nvSpPr>
-          <p:cNvPr id="94" name="Shape 91"/>
+          <p:cNvPr id="92" name="Shape 89"/>
           <p:cNvSpPr/>
           <p:nvPr/>
         </p:nvSpPr>
@@ -21287,7 +21187,7 @@
       </p:sp>
       <p:sp>
         <p:nvSpPr>
-          <p:cNvPr id="95" name="Shape 92"/>
+          <p:cNvPr id="93" name="Shape 90"/>
           <p:cNvSpPr/>
           <p:nvPr/>
         </p:nvSpPr>
@@ -21311,7 +21211,7 @@
       </p:sp>
       <p:sp>
         <p:nvSpPr>
-          <p:cNvPr id="96" name="Shape 93"/>
+          <p:cNvPr id="94" name="Shape 91"/>
           <p:cNvSpPr/>
           <p:nvPr/>
         </p:nvSpPr>
@@ -21334,7 +21234,7 @@
       </p:sp>
       <p:sp>
         <p:nvSpPr>
-          <p:cNvPr id="97" name="Shape 94"/>
+          <p:cNvPr id="95" name="Shape 92"/>
           <p:cNvSpPr/>
           <p:nvPr/>
         </p:nvSpPr>
@@ -21357,7 +21257,7 @@
       </p:sp>
       <p:sp>
         <p:nvSpPr>
-          <p:cNvPr id="98" name="Shape 95"/>
+          <p:cNvPr id="96" name="Shape 93"/>
           <p:cNvSpPr/>
           <p:nvPr/>
         </p:nvSpPr>
@@ -21381,7 +21281,7 @@
       </p:sp>
       <p:sp>
         <p:nvSpPr>
-          <p:cNvPr id="99" name="Shape 96"/>
+          <p:cNvPr id="97" name="Shape 94"/>
           <p:cNvSpPr/>
           <p:nvPr/>
         </p:nvSpPr>
@@ -21405,7 +21305,7 @@
       </p:sp>
       <p:sp>
         <p:nvSpPr>
-          <p:cNvPr id="100" name="Shape 97"/>
+          <p:cNvPr id="98" name="Shape 95"/>
           <p:cNvSpPr/>
           <p:nvPr/>
         </p:nvSpPr>
@@ -21428,7 +21328,7 @@
       </p:sp>
       <p:sp>
         <p:nvSpPr>
-          <p:cNvPr id="101" name="Shape 98"/>
+          <p:cNvPr id="99" name="Shape 96"/>
           <p:cNvSpPr/>
           <p:nvPr/>
         </p:nvSpPr>
@@ -21452,7 +21352,7 @@
       </p:sp>
       <p:sp>
         <p:nvSpPr>
-          <p:cNvPr id="102" name="Shape 99"/>
+          <p:cNvPr id="100" name="Shape 97"/>
           <p:cNvSpPr/>
           <p:nvPr/>
         </p:nvSpPr>
@@ -21476,7 +21376,7 @@
       </p:sp>
       <p:sp>
         <p:nvSpPr>
-          <p:cNvPr id="103" name="Shape 100"/>
+          <p:cNvPr id="101" name="Shape 98"/>
           <p:cNvSpPr/>
           <p:nvPr/>
         </p:nvSpPr>
@@ -21499,7 +21399,7 @@
       </p:sp>
       <p:sp>
         <p:nvSpPr>
-          <p:cNvPr id="104" name="Shape 101"/>
+          <p:cNvPr id="102" name="Shape 99"/>
           <p:cNvSpPr/>
           <p:nvPr/>
         </p:nvSpPr>
@@ -21523,7 +21423,7 @@
       </p:sp>
       <p:sp>
         <p:nvSpPr>
-          <p:cNvPr id="105" name="Shape 102"/>
+          <p:cNvPr id="103" name="Shape 100"/>
           <p:cNvSpPr/>
           <p:nvPr/>
         </p:nvSpPr>
@@ -21546,7 +21446,7 @@
       </p:sp>
       <p:sp>
         <p:nvSpPr>
-          <p:cNvPr id="106" name="Shape 103"/>
+          <p:cNvPr id="104" name="Shape 101"/>
           <p:cNvSpPr/>
           <p:nvPr/>
         </p:nvSpPr>
@@ -21569,7 +21469,7 @@
       </p:sp>
       <p:sp>
         <p:nvSpPr>
-          <p:cNvPr id="107" name="Shape 104"/>
+          <p:cNvPr id="105" name="Shape 102"/>
           <p:cNvSpPr/>
           <p:nvPr/>
         </p:nvSpPr>
@@ -21593,7 +21493,7 @@
       </p:sp>
       <p:sp>
         <p:nvSpPr>
-          <p:cNvPr id="108" name="Shape 105"/>
+          <p:cNvPr id="106" name="Shape 103"/>
           <p:cNvSpPr/>
           <p:nvPr/>
         </p:nvSpPr>
@@ -21617,7 +21517,7 @@
       </p:sp>
       <p:sp>
         <p:nvSpPr>
-          <p:cNvPr id="109" name="Shape 106"/>
+          <p:cNvPr id="107" name="Shape 104"/>
           <p:cNvSpPr/>
           <p:nvPr/>
         </p:nvSpPr>
@@ -21640,7 +21540,7 @@
       </p:sp>
       <p:sp>
         <p:nvSpPr>
-          <p:cNvPr id="110" name="Shape 107"/>
+          <p:cNvPr id="108" name="Shape 105"/>
           <p:cNvSpPr/>
           <p:nvPr/>
         </p:nvSpPr>
@@ -21664,7 +21564,7 @@
       </p:sp>
       <p:sp>
         <p:nvSpPr>
-          <p:cNvPr id="111" name="Shape 108"/>
+          <p:cNvPr id="109" name="Shape 106"/>
           <p:cNvSpPr/>
           <p:nvPr/>
         </p:nvSpPr>
@@ -21688,7 +21588,7 @@
       </p:sp>
       <p:sp>
         <p:nvSpPr>
-          <p:cNvPr id="112" name="Shape 109"/>
+          <p:cNvPr id="110" name="Shape 107"/>
           <p:cNvSpPr/>
           <p:nvPr/>
         </p:nvSpPr>
@@ -21711,7 +21611,7 @@
       </p:sp>
       <p:sp>
         <p:nvSpPr>
-          <p:cNvPr id="113" name="Shape 110"/>
+          <p:cNvPr id="111" name="Shape 108"/>
           <p:cNvSpPr/>
           <p:nvPr/>
         </p:nvSpPr>
@@ -21735,7 +21635,7 @@
       </p:sp>
       <p:sp>
         <p:nvSpPr>
-          <p:cNvPr id="114" name="Shape 111"/>
+          <p:cNvPr id="112" name="Shape 109"/>
           <p:cNvSpPr/>
           <p:nvPr/>
         </p:nvSpPr>
@@ -21759,7 +21659,7 @@
       </p:sp>
       <p:sp>
         <p:nvSpPr>
-          <p:cNvPr id="115" name="Shape 112"/>
+          <p:cNvPr id="113" name="Shape 110"/>
           <p:cNvSpPr/>
           <p:nvPr/>
         </p:nvSpPr>
@@ -21783,7 +21683,7 @@
       </p:sp>
       <p:sp>
         <p:nvSpPr>
-          <p:cNvPr id="116" name="Shape 113"/>
+          <p:cNvPr id="114" name="Shape 111"/>
           <p:cNvSpPr/>
           <p:nvPr/>
         </p:nvSpPr>
@@ -21807,7 +21707,7 @@
       </p:sp>
       <p:sp>
         <p:nvSpPr>
-          <p:cNvPr id="117" name="Shape 114"/>
+          <p:cNvPr id="115" name="Shape 112"/>
           <p:cNvSpPr/>
           <p:nvPr/>
         </p:nvSpPr>
@@ -21831,7 +21731,7 @@
       </p:sp>
       <p:sp>
         <p:nvSpPr>
-          <p:cNvPr id="118" name="Shape 115"/>
+          <p:cNvPr id="116" name="Shape 113"/>
           <p:cNvSpPr/>
           <p:nvPr/>
         </p:nvSpPr>
@@ -21855,7 +21755,7 @@
       </p:sp>
       <p:sp>
         <p:nvSpPr>
-          <p:cNvPr id="119" name="Shape 116"/>
+          <p:cNvPr id="117" name="Shape 114"/>
           <p:cNvSpPr/>
           <p:nvPr/>
         </p:nvSpPr>
@@ -21878,7 +21778,7 @@
       </p:sp>
       <p:sp>
         <p:nvSpPr>
-          <p:cNvPr id="120" name="Shape 117"/>
+          <p:cNvPr id="118" name="Shape 115"/>
           <p:cNvSpPr/>
           <p:nvPr/>
         </p:nvSpPr>
@@ -21902,7 +21802,7 @@
       </p:sp>
       <p:sp>
         <p:nvSpPr>
-          <p:cNvPr id="121" name="Shape 118"/>
+          <p:cNvPr id="119" name="Shape 116"/>
           <p:cNvSpPr/>
           <p:nvPr/>
         </p:nvSpPr>
@@ -21926,7 +21826,7 @@
       </p:sp>
       <p:sp>
         <p:nvSpPr>
-          <p:cNvPr id="122" name="Shape 119"/>
+          <p:cNvPr id="120" name="Shape 117"/>
           <p:cNvSpPr/>
           <p:nvPr/>
         </p:nvSpPr>
@@ -21949,7 +21849,7 @@
       </p:sp>
       <p:sp>
         <p:nvSpPr>
-          <p:cNvPr id="123" name="Shape 120"/>
+          <p:cNvPr id="121" name="Shape 118"/>
           <p:cNvSpPr/>
           <p:nvPr/>
         </p:nvSpPr>
@@ -21973,7 +21873,7 @@
       </p:sp>
       <p:sp>
         <p:nvSpPr>
-          <p:cNvPr id="124" name="Shape 121"/>
+          <p:cNvPr id="122" name="Shape 119"/>
           <p:cNvSpPr/>
           <p:nvPr/>
         </p:nvSpPr>
@@ -21997,7 +21897,7 @@
       </p:sp>
       <p:sp>
         <p:nvSpPr>
-          <p:cNvPr id="125" name="Shape 122"/>
+          <p:cNvPr id="123" name="Shape 120"/>
           <p:cNvSpPr/>
           <p:nvPr/>
         </p:nvSpPr>
@@ -22021,7 +21921,7 @@
       </p:sp>
       <p:sp>
         <p:nvSpPr>
-          <p:cNvPr id="126" name="Shape 123"/>
+          <p:cNvPr id="124" name="Shape 121"/>
           <p:cNvSpPr/>
           <p:nvPr/>
         </p:nvSpPr>
@@ -22045,7 +21945,7 @@
       </p:sp>
       <p:sp>
         <p:nvSpPr>
-          <p:cNvPr id="127" name="Shape 124"/>
+          <p:cNvPr id="125" name="Shape 122"/>
           <p:cNvSpPr/>
           <p:nvPr/>
         </p:nvSpPr>
@@ -22069,7 +21969,131 @@
       </p:sp>
       <p:sp>
         <p:nvSpPr>
+          <p:cNvPr id="126" name="Shape 123"/>
+          <p:cNvSpPr/>
+          <p:nvPr/>
+        </p:nvSpPr>
+        <p:spPr>
+          <a:xfrm>
+            <a:off x="1473098" y="3802075"/>
+            <a:ext cx="1897380" cy="113386"/>
+          </a:xfrm>
+          <a:prstGeom prst="rect">
+            <a:avLst/>
+          </a:prstGeom>
+          <a:solidFill>
+            <a:srgbClr val="FFFFFF"/>
+          </a:solidFill>
+          <a:ln/>
+        </p:spPr>
+      </p:sp>
+      <p:sp>
+        <p:nvSpPr>
+          <p:cNvPr id="127" name="Text 124"/>
+          <p:cNvSpPr/>
+          <p:nvPr/>
+        </p:nvSpPr>
+        <p:spPr>
+          <a:xfrm>
+            <a:off x="1491386" y="3803904"/>
+            <a:ext cx="2133295" cy="111557"/>
+          </a:xfrm>
+          <a:prstGeom prst="rect">
+            <a:avLst/>
+          </a:prstGeom>
+          <a:noFill/>
+          <a:ln/>
+        </p:spPr>
+        <p:txBody>
+          <a:bodyPr wrap="none" lIns="0" tIns="0" rIns="0" bIns="0" rtlCol="0" anchor="ctr"/>
+          <a:lstStyle/>
+          <a:p>
+            <a:pPr algn="l" indent="0" marL="0">
+              <a:lnSpc>
+                <a:spcPct val="100000"/>
+              </a:lnSpc>
+              <a:buNone/>
+            </a:pPr>
+            <a:r>
+              <a:rPr lang="en-US" sz="400" b="1" dirty="0">
+                <a:solidFill>
+                  <a:srgbClr val="202124"/>
+                </a:solidFill>
+                <a:latin typeface="Arial" pitchFamily="34" charset="0"/>
+                <a:ea typeface="Arial" pitchFamily="34" charset="-122"/>
+                <a:cs typeface="Arial" pitchFamily="34" charset="-120"/>
+              </a:rPr>
+              <a:t>Standard Tier: Shared Pooled Plane (Initial RetailStream Route)</a:t>
+            </a:r>
+            <a:endParaRPr lang="en-US" sz="400" dirty="0"/>
+          </a:p>
+        </p:txBody>
+      </p:sp>
+      <p:sp>
+        <p:nvSpPr>
           <p:cNvPr id="128" name="Shape 125"/>
+          <p:cNvSpPr/>
+          <p:nvPr/>
+        </p:nvSpPr>
+        <p:spPr>
+          <a:xfrm>
+            <a:off x="3837737" y="3802075"/>
+            <a:ext cx="1607515" cy="113386"/>
+          </a:xfrm>
+          <a:prstGeom prst="rect">
+            <a:avLst/>
+          </a:prstGeom>
+          <a:solidFill>
+            <a:srgbClr val="FFFFFF"/>
+          </a:solidFill>
+          <a:ln/>
+        </p:spPr>
+      </p:sp>
+      <p:sp>
+        <p:nvSpPr>
+          <p:cNvPr id="129" name="Text 126"/>
+          <p:cNvSpPr/>
+          <p:nvPr/>
+        </p:nvSpPr>
+        <p:spPr>
+          <a:xfrm>
+            <a:off x="3856025" y="3803904"/>
+            <a:ext cx="2133295" cy="111557"/>
+          </a:xfrm>
+          <a:prstGeom prst="rect">
+            <a:avLst/>
+          </a:prstGeom>
+          <a:noFill/>
+          <a:ln/>
+        </p:spPr>
+        <p:txBody>
+          <a:bodyPr wrap="none" lIns="0" tIns="0" rIns="0" bIns="0" rtlCol="0" anchor="ctr"/>
+          <a:lstStyle/>
+          <a:p>
+            <a:pPr algn="l" indent="0" marL="0">
+              <a:lnSpc>
+                <a:spcPct val="100000"/>
+              </a:lnSpc>
+              <a:buNone/>
+            </a:pPr>
+            <a:r>
+              <a:rPr lang="en-US" sz="400" b="1" dirty="0">
+                <a:solidFill>
+                  <a:srgbClr val="202124"/>
+                </a:solidFill>
+                <a:latin typeface="Arial" pitchFamily="34" charset="0"/>
+                <a:ea typeface="Arial" pitchFamily="34" charset="-122"/>
+                <a:cs typeface="Arial" pitchFamily="34" charset="-120"/>
+              </a:rPr>
+              <a:t>Enterprise Tier: Private Service Connect (PSC) Spokes</a:t>
+            </a:r>
+            <a:endParaRPr lang="en-US" sz="400" dirty="0"/>
+          </a:p>
+        </p:txBody>
+      </p:sp>
+      <p:sp>
+        <p:nvSpPr>
+          <p:cNvPr id="130" name="Shape 127"/>
           <p:cNvSpPr/>
           <p:nvPr/>
         </p:nvSpPr>
@@ -22096,7 +22120,7 @@
       </p:sp>
       <p:pic>
         <p:nvPicPr>
-          <p:cNvPr id="129" name="Image 1" descr="preencoded.png">    </p:cNvPr>
+          <p:cNvPr id="131" name="Image 1" descr="preencoded.png">    </p:cNvPr>
           <p:cNvPicPr>
             <a:picLocks noChangeAspect="1"/>
           </p:cNvPicPr>
@@ -22120,35 +22144,33 @@
       </p:pic>
       <p:sp>
         <p:nvSpPr>
-          <p:cNvPr id="130" name="Text 126"/>
+          <p:cNvPr id="132" name="Text 128"/>
           <p:cNvSpPr/>
           <p:nvPr/>
         </p:nvSpPr>
         <p:spPr>
           <a:xfrm>
             <a:off x="3372307" y="658368"/>
-            <a:ext cx="839419" cy="373990"/>
-          </a:xfrm>
-          <a:prstGeom prst="rect">
-            <a:avLst/>
-          </a:prstGeom>
-          <a:noFill/>
-          <a:ln/>
-        </p:spPr>
-        <p:txBody>
-          <a:bodyPr wrap="square" lIns="0" tIns="0" rIns="0" bIns="0" rtlCol="0" anchor="ctr">
-            <a:normAutofit/>
-          </a:bodyPr>
+            <a:ext cx="834847" cy="373990"/>
+          </a:xfrm>
+          <a:prstGeom prst="rect">
+            <a:avLst/>
+          </a:prstGeom>
+          <a:noFill/>
+          <a:ln/>
+        </p:spPr>
+        <p:txBody>
+          <a:bodyPr wrap="square" lIns="0" tIns="0" rIns="0" bIns="0" rtlCol="0" anchor="ctr"/>
           <a:lstStyle/>
           <a:p>
             <a:pPr algn="l" indent="0" marL="0">
               <a:lnSpc>
-                <a:spcPct val="88000"/>
+                <a:spcPct val="104000"/>
               </a:lnSpc>
               <a:buNone/>
             </a:pPr>
             <a:r>
-              <a:rPr lang="en-US" sz="520" b="1" dirty="0">
+              <a:rPr lang="en-US" sz="480" b="1" dirty="0">
                 <a:solidFill>
                   <a:srgbClr val="202124"/>
                 </a:solidFill>
@@ -22158,17 +22180,17 @@
               </a:rPr>
               <a:t>Standard &amp; Enterprise</a:t>
             </a:r>
-            <a:endParaRPr lang="en-US" sz="520" dirty="0"/>
+            <a:endParaRPr lang="en-US" sz="480" dirty="0"/>
           </a:p>
           <a:p>
             <a:pPr algn="l" indent="0" marL="0">
               <a:lnSpc>
-                <a:spcPct val="88000"/>
+                <a:spcPct val="104000"/>
               </a:lnSpc>
               <a:buNone/>
             </a:pPr>
             <a:r>
-              <a:rPr lang="en-US" sz="440" dirty="0">
+              <a:rPr lang="en-US" sz="410" dirty="0">
                 <a:solidFill>
                   <a:srgbClr val="3C4043"/>
                 </a:solidFill>
@@ -22178,13 +22200,13 @@
               </a:rPr>
               <a:t>Single Unified SaaS URL</a:t>
             </a:r>
-            <a:endParaRPr lang="en-US" sz="520" dirty="0"/>
-          </a:p>
-        </p:txBody>
-      </p:sp>
-      <p:sp>
-        <p:nvSpPr>
-          <p:cNvPr id="131" name="Shape 127"/>
+            <a:endParaRPr lang="en-US" sz="480" dirty="0"/>
+          </a:p>
+        </p:txBody>
+      </p:sp>
+      <p:sp>
+        <p:nvSpPr>
+          <p:cNvPr id="133" name="Shape 129"/>
           <p:cNvSpPr/>
           <p:nvPr/>
         </p:nvSpPr>
@@ -22211,7 +22233,7 @@
       </p:sp>
       <p:pic>
         <p:nvPicPr>
-          <p:cNvPr id="132" name="Image 2" descr="preencoded.png">    </p:cNvPr>
+          <p:cNvPr id="134" name="Image 2" descr="preencoded.png">    </p:cNvPr>
           <p:cNvPicPr>
             <a:picLocks noChangeAspect="1"/>
           </p:cNvPicPr>
@@ -22235,35 +22257,33 @@
       </p:pic>
       <p:sp>
         <p:nvSpPr>
-          <p:cNvPr id="133" name="Text 128"/>
+          <p:cNvPr id="135" name="Text 130"/>
           <p:cNvSpPr/>
           <p:nvPr/>
         </p:nvSpPr>
         <p:spPr>
           <a:xfrm>
             <a:off x="3332988" y="2309774"/>
-            <a:ext cx="879653" cy="330098"/>
-          </a:xfrm>
-          <a:prstGeom prst="rect">
-            <a:avLst/>
-          </a:prstGeom>
-          <a:noFill/>
-          <a:ln/>
-        </p:spPr>
-        <p:txBody>
-          <a:bodyPr wrap="square" lIns="0" tIns="0" rIns="0" bIns="0" rtlCol="0" anchor="ctr">
-            <a:normAutofit/>
-          </a:bodyPr>
+            <a:ext cx="875081" cy="330098"/>
+          </a:xfrm>
+          <a:prstGeom prst="rect">
+            <a:avLst/>
+          </a:prstGeom>
+          <a:noFill/>
+          <a:ln/>
+        </p:spPr>
+        <p:txBody>
+          <a:bodyPr wrap="square" lIns="0" tIns="0" rIns="0" bIns="0" rtlCol="0" anchor="ctr"/>
           <a:lstStyle/>
           <a:p>
             <a:pPr algn="l" indent="0" marL="0">
               <a:lnSpc>
-                <a:spcPct val="85000"/>
+                <a:spcPct val="100000"/>
               </a:lnSpc>
               <a:buNone/>
             </a:pPr>
             <a:r>
-              <a:rPr lang="en-US" sz="500" b="1" dirty="0">
+              <a:rPr lang="en-US" sz="490" b="1" dirty="0">
                 <a:solidFill>
                   <a:srgbClr val="202124"/>
                 </a:solidFill>
@@ -22273,17 +22293,17 @@
               </a:rPr>
               <a:t>External Application Load Balancer</a:t>
             </a:r>
-            <a:endParaRPr lang="en-US" sz="500" dirty="0"/>
+            <a:endParaRPr lang="en-US" sz="490" dirty="0"/>
           </a:p>
           <a:p>
             <a:pPr algn="l" indent="0" marL="0">
               <a:lnSpc>
-                <a:spcPct val="85000"/>
+                <a:spcPct val="100000"/>
               </a:lnSpc>
               <a:buNone/>
             </a:pPr>
             <a:r>
-              <a:rPr lang="en-US" sz="430" dirty="0">
+              <a:rPr lang="en-US" sz="420" dirty="0">
                 <a:solidFill>
                   <a:srgbClr val="3C4043"/>
                 </a:solidFill>
@@ -22293,13 +22313,13 @@
               </a:rPr>
               <a:t>Cloud Load Balancing</a:t>
             </a:r>
-            <a:endParaRPr lang="en-US" sz="500" dirty="0"/>
-          </a:p>
-        </p:txBody>
-      </p:sp>
-      <p:sp>
-        <p:nvSpPr>
-          <p:cNvPr id="134" name="Shape 129"/>
+            <a:endParaRPr lang="en-US" sz="490" dirty="0"/>
+          </a:p>
+        </p:txBody>
+      </p:sp>
+      <p:sp>
+        <p:nvSpPr>
+          <p:cNvPr id="136" name="Shape 131"/>
           <p:cNvSpPr/>
           <p:nvPr/>
         </p:nvSpPr>
@@ -22326,7 +22346,7 @@
       </p:sp>
       <p:pic>
         <p:nvPicPr>
-          <p:cNvPr id="135" name="Image 3" descr="preencoded.png">    </p:cNvPr>
+          <p:cNvPr id="137" name="Image 3" descr="preencoded.png">    </p:cNvPr>
           <p:cNvPicPr>
             <a:picLocks noChangeAspect="1"/>
           </p:cNvPicPr>
@@ -22350,35 +22370,33 @@
       </p:pic>
       <p:sp>
         <p:nvSpPr>
-          <p:cNvPr id="136" name="Text 130"/>
+          <p:cNvPr id="138" name="Text 132"/>
           <p:cNvSpPr/>
           <p:nvPr/>
         </p:nvSpPr>
         <p:spPr>
           <a:xfrm>
             <a:off x="4940503" y="2197303"/>
-            <a:ext cx="950062" cy="312725"/>
-          </a:xfrm>
-          <a:prstGeom prst="rect">
-            <a:avLst/>
-          </a:prstGeom>
-          <a:noFill/>
-          <a:ln/>
-        </p:spPr>
-        <p:txBody>
-          <a:bodyPr wrap="square" lIns="0" tIns="0" rIns="0" bIns="0" rtlCol="0" anchor="ctr">
-            <a:normAutofit/>
-          </a:bodyPr>
+            <a:ext cx="945490" cy="312725"/>
+          </a:xfrm>
+          <a:prstGeom prst="rect">
+            <a:avLst/>
+          </a:prstGeom>
+          <a:noFill/>
+          <a:ln/>
+        </p:spPr>
+        <p:txBody>
+          <a:bodyPr wrap="square" lIns="0" tIns="0" rIns="0" bIns="0" rtlCol="0" anchor="ctr"/>
           <a:lstStyle/>
           <a:p>
             <a:pPr algn="l" indent="0" marL="0">
               <a:lnSpc>
-                <a:spcPct val="85000"/>
+                <a:spcPct val="100000"/>
               </a:lnSpc>
               <a:buNone/>
             </a:pPr>
             <a:r>
-              <a:rPr lang="en-US" sz="500" b="1" dirty="0">
+              <a:rPr lang="en-US" sz="490" b="1" dirty="0">
                 <a:solidFill>
                   <a:srgbClr val="202124"/>
                 </a:solidFill>
@@ -22388,17 +22406,17 @@
               </a:rPr>
               <a:t>Firestore Route Table (atomic tier pointer)</a:t>
             </a:r>
-            <a:endParaRPr lang="en-US" sz="500" dirty="0"/>
+            <a:endParaRPr lang="en-US" sz="490" dirty="0"/>
           </a:p>
           <a:p>
             <a:pPr algn="l" indent="0" marL="0">
               <a:lnSpc>
-                <a:spcPct val="85000"/>
+                <a:spcPct val="100000"/>
               </a:lnSpc>
               <a:buNone/>
             </a:pPr>
             <a:r>
-              <a:rPr lang="en-US" sz="430" dirty="0">
+              <a:rPr lang="en-US" sz="420" dirty="0">
                 <a:solidFill>
                   <a:srgbClr val="3C4043"/>
                 </a:solidFill>
@@ -22408,13 +22426,13 @@
               </a:rPr>
               <a:t>tenant → pool | psc://10.10.0.5x</a:t>
             </a:r>
-            <a:endParaRPr lang="en-US" sz="500" dirty="0"/>
-          </a:p>
-        </p:txBody>
-      </p:sp>
-      <p:sp>
-        <p:nvSpPr>
-          <p:cNvPr id="137" name="Shape 131"/>
+            <a:endParaRPr lang="en-US" sz="490" dirty="0"/>
+          </a:p>
+        </p:txBody>
+      </p:sp>
+      <p:sp>
+        <p:nvSpPr>
+          <p:cNvPr id="139" name="Shape 133"/>
           <p:cNvSpPr/>
           <p:nvPr/>
         </p:nvSpPr>
@@ -22441,7 +22459,7 @@
       </p:sp>
       <p:pic>
         <p:nvPicPr>
-          <p:cNvPr id="138" name="Image 4" descr="preencoded.png">    </p:cNvPr>
+          <p:cNvPr id="140" name="Image 4" descr="preencoded.png">    </p:cNvPr>
           <p:cNvPicPr>
             <a:picLocks noChangeAspect="1"/>
           </p:cNvPicPr>
@@ -22465,35 +22483,33 @@
       </p:pic>
       <p:sp>
         <p:nvSpPr>
-          <p:cNvPr id="139" name="Text 132"/>
+          <p:cNvPr id="141" name="Text 134"/>
           <p:cNvSpPr/>
           <p:nvPr/>
         </p:nvSpPr>
         <p:spPr>
           <a:xfrm>
             <a:off x="4948733" y="2926994"/>
-            <a:ext cx="924458" cy="295351"/>
-          </a:xfrm>
-          <a:prstGeom prst="rect">
-            <a:avLst/>
-          </a:prstGeom>
-          <a:noFill/>
-          <a:ln/>
-        </p:spPr>
-        <p:txBody>
-          <a:bodyPr wrap="square" lIns="0" tIns="0" rIns="0" bIns="0" rtlCol="0" anchor="ctr">
-            <a:normAutofit/>
-          </a:bodyPr>
+            <a:ext cx="919886" cy="295351"/>
+          </a:xfrm>
+          <a:prstGeom prst="rect">
+            <a:avLst/>
+          </a:prstGeom>
+          <a:noFill/>
+          <a:ln/>
+        </p:spPr>
+        <p:txBody>
+          <a:bodyPr wrap="square" lIns="0" tIns="0" rIns="0" bIns="0" rtlCol="0" anchor="ctr"/>
           <a:lstStyle/>
           <a:p>
             <a:pPr algn="l" indent="0" marL="0">
               <a:lnSpc>
-                <a:spcPct val="85000"/>
+                <a:spcPct val="100000"/>
               </a:lnSpc>
               <a:buNone/>
             </a:pPr>
             <a:r>
-              <a:rPr lang="en-US" sz="500" b="1" dirty="0">
+              <a:rPr lang="en-US" sz="490" b="1" dirty="0">
                 <a:solidFill>
                   <a:srgbClr val="202124"/>
                 </a:solidFill>
@@ -22503,17 +22519,17 @@
               </a:rPr>
               <a:t>BigQuery OTel Sink</a:t>
             </a:r>
-            <a:endParaRPr lang="en-US" sz="500" dirty="0"/>
+            <a:endParaRPr lang="en-US" sz="490" dirty="0"/>
           </a:p>
           <a:p>
             <a:pPr algn="l" indent="0" marL="0">
               <a:lnSpc>
-                <a:spcPct val="85000"/>
+                <a:spcPct val="100000"/>
               </a:lnSpc>
               <a:buNone/>
             </a:pPr>
             <a:r>
-              <a:rPr lang="en-US" sz="430" dirty="0">
+              <a:rPr lang="en-US" sz="420" dirty="0">
                 <a:solidFill>
                   <a:srgbClr val="3C4043"/>
                 </a:solidFill>
@@ -22523,13 +22539,13 @@
               </a:rPr>
               <a:t>tenant_promotion_migrations • routing_plane</a:t>
             </a:r>
-            <a:endParaRPr lang="en-US" sz="500" dirty="0"/>
-          </a:p>
-        </p:txBody>
-      </p:sp>
-      <p:sp>
-        <p:nvSpPr>
-          <p:cNvPr id="140" name="Shape 133"/>
+            <a:endParaRPr lang="en-US" sz="490" dirty="0"/>
+          </a:p>
+        </p:txBody>
+      </p:sp>
+      <p:sp>
+        <p:nvSpPr>
+          <p:cNvPr id="142" name="Shape 135"/>
           <p:cNvSpPr/>
           <p:nvPr/>
         </p:nvSpPr>
@@ -22556,7 +22572,7 @@
       </p:sp>
       <p:pic>
         <p:nvPicPr>
-          <p:cNvPr id="141" name="Image 5" descr="preencoded.png">    </p:cNvPr>
+          <p:cNvPr id="143" name="Image 5" descr="preencoded.png">    </p:cNvPr>
           <p:cNvPicPr>
             <a:picLocks noChangeAspect="1"/>
           </p:cNvPicPr>
@@ -22580,35 +22596,33 @@
       </p:pic>
       <p:sp>
         <p:nvSpPr>
-          <p:cNvPr id="142" name="Text 134"/>
+          <p:cNvPr id="144" name="Text 136"/>
           <p:cNvSpPr/>
           <p:nvPr/>
         </p:nvSpPr>
         <p:spPr>
           <a:xfrm>
             <a:off x="4956962" y="2570378"/>
-            <a:ext cx="907085" cy="295351"/>
-          </a:xfrm>
-          <a:prstGeom prst="rect">
-            <a:avLst/>
-          </a:prstGeom>
-          <a:noFill/>
-          <a:ln/>
-        </p:spPr>
-        <p:txBody>
-          <a:bodyPr wrap="square" lIns="0" tIns="0" rIns="0" bIns="0" rtlCol="0" anchor="ctr">
-            <a:normAutofit/>
-          </a:bodyPr>
+            <a:ext cx="902513" cy="295351"/>
+          </a:xfrm>
+          <a:prstGeom prst="rect">
+            <a:avLst/>
+          </a:prstGeom>
+          <a:noFill/>
+          <a:ln/>
+        </p:spPr>
+        <p:txBody>
+          <a:bodyPr wrap="square" lIns="0" tIns="0" rIns="0" bIns="0" rtlCol="0" anchor="ctr"/>
           <a:lstStyle/>
           <a:p>
             <a:pPr algn="l" indent="0" marL="0">
               <a:lnSpc>
-                <a:spcPct val="85000"/>
+                <a:spcPct val="100000"/>
               </a:lnSpc>
               <a:buNone/>
             </a:pPr>
             <a:r>
-              <a:rPr lang="en-US" sz="500" b="1" dirty="0">
+              <a:rPr lang="en-US" sz="490" b="1" dirty="0">
                 <a:solidFill>
                   <a:srgbClr val="202124"/>
                 </a:solidFill>
@@ -22618,17 +22632,17 @@
               </a:rPr>
               <a:t>Migration Coordinator</a:t>
             </a:r>
-            <a:endParaRPr lang="en-US" sz="500" dirty="0"/>
+            <a:endParaRPr lang="en-US" sz="490" dirty="0"/>
           </a:p>
           <a:p>
             <a:pPr algn="l" indent="0" marL="0">
               <a:lnSpc>
-                <a:spcPct val="85000"/>
+                <a:spcPct val="100000"/>
               </a:lnSpc>
               <a:buNone/>
             </a:pPr>
             <a:r>
-              <a:rPr lang="en-US" sz="430" dirty="0">
+              <a:rPr lang="en-US" sz="420" dirty="0">
                 <a:solidFill>
                   <a:srgbClr val="3C4043"/>
                 </a:solidFill>
@@ -22638,13 +22652,13 @@
               </a:rPr>
               <a:t>SHADOW_SYNC → ATOMIC_CUTOVER → DRAIN_AND_VERIFY</a:t>
             </a:r>
-            <a:endParaRPr lang="en-US" sz="500" dirty="0"/>
-          </a:p>
-        </p:txBody>
-      </p:sp>
-      <p:sp>
-        <p:nvSpPr>
-          <p:cNvPr id="143" name="Shape 135"/>
+            <a:endParaRPr lang="en-US" sz="490" dirty="0"/>
+          </a:p>
+        </p:txBody>
+      </p:sp>
+      <p:sp>
+        <p:nvSpPr>
+          <p:cNvPr id="145" name="Shape 137"/>
           <p:cNvSpPr/>
           <p:nvPr/>
         </p:nvSpPr>
@@ -22671,7 +22685,7 @@
       </p:sp>
       <p:pic>
         <p:nvPicPr>
-          <p:cNvPr id="144" name="Image 6" descr="preencoded.png">    </p:cNvPr>
+          <p:cNvPr id="146" name="Image 6" descr="preencoded.png">    </p:cNvPr>
           <p:cNvPicPr>
             <a:picLocks noChangeAspect="1"/>
           </p:cNvPicPr>
@@ -22695,35 +22709,33 @@
       </p:pic>
       <p:sp>
         <p:nvSpPr>
-          <p:cNvPr id="145" name="Text 136"/>
+          <p:cNvPr id="147" name="Text 138"/>
           <p:cNvSpPr/>
           <p:nvPr/>
         </p:nvSpPr>
         <p:spPr>
           <a:xfrm>
             <a:off x="2850185" y="4448556"/>
-            <a:ext cx="675742" cy="321869"/>
-          </a:xfrm>
-          <a:prstGeom prst="rect">
-            <a:avLst/>
-          </a:prstGeom>
-          <a:noFill/>
-          <a:ln/>
-        </p:spPr>
-        <p:txBody>
-          <a:bodyPr wrap="square" lIns="0" tIns="0" rIns="0" bIns="0" rtlCol="0" anchor="ctr">
-            <a:normAutofit/>
-          </a:bodyPr>
+            <a:ext cx="671170" cy="321869"/>
+          </a:xfrm>
+          <a:prstGeom prst="rect">
+            <a:avLst/>
+          </a:prstGeom>
+          <a:noFill/>
+          <a:ln/>
+        </p:spPr>
+        <p:txBody>
+          <a:bodyPr wrap="square" lIns="0" tIns="0" rIns="0" bIns="0" rtlCol="0" anchor="ctr"/>
           <a:lstStyle/>
           <a:p>
             <a:pPr algn="l" indent="0" marL="0">
               <a:lnSpc>
-                <a:spcPct val="85000"/>
+                <a:spcPct val="100000"/>
               </a:lnSpc>
               <a:buNone/>
             </a:pPr>
             <a:r>
-              <a:rPr lang="en-US" sz="500" b="1" dirty="0">
+              <a:rPr lang="en-US" sz="490" b="1" dirty="0">
                 <a:solidFill>
                   <a:srgbClr val="202124"/>
                 </a:solidFill>
@@ -22733,17 +22745,17 @@
               </a:rPr>
               <a:t>Vertex AI Agent Engine</a:t>
             </a:r>
-            <a:endParaRPr lang="en-US" sz="500" dirty="0"/>
+            <a:endParaRPr lang="en-US" sz="490" dirty="0"/>
           </a:p>
           <a:p>
             <a:pPr algn="l" indent="0" marL="0">
               <a:lnSpc>
-                <a:spcPct val="85000"/>
+                <a:spcPct val="100000"/>
               </a:lnSpc>
               <a:buNone/>
             </a:pPr>
             <a:r>
-              <a:rPr lang="en-US" sz="430" dirty="0">
+              <a:rPr lang="en-US" sz="420" dirty="0">
                 <a:solidFill>
                   <a:srgbClr val="3C4043"/>
                 </a:solidFill>
@@ -22753,13 +22765,13 @@
               </a:rPr>
               <a:t>Serves Standard SaaS Tier</a:t>
             </a:r>
-            <a:endParaRPr lang="en-US" sz="500" dirty="0"/>
-          </a:p>
-        </p:txBody>
-      </p:sp>
-      <p:sp>
-        <p:nvSpPr>
-          <p:cNvPr id="146" name="Shape 137"/>
+            <a:endParaRPr lang="en-US" sz="490" dirty="0"/>
+          </a:p>
+        </p:txBody>
+      </p:sp>
+      <p:sp>
+        <p:nvSpPr>
+          <p:cNvPr id="148" name="Shape 139"/>
           <p:cNvSpPr/>
           <p:nvPr/>
         </p:nvSpPr>
@@ -22786,7 +22798,7 @@
       </p:sp>
       <p:pic>
         <p:nvPicPr>
-          <p:cNvPr id="147" name="Image 7" descr="preencoded.png">    </p:cNvPr>
+          <p:cNvPr id="149" name="Image 7" descr="preencoded.png">    </p:cNvPr>
           <p:cNvPicPr>
             <a:picLocks noChangeAspect="1"/>
           </p:cNvPicPr>
@@ -22810,35 +22822,33 @@
       </p:pic>
       <p:sp>
         <p:nvSpPr>
-          <p:cNvPr id="148" name="Text 138"/>
+          <p:cNvPr id="150" name="Text 140"/>
           <p:cNvSpPr/>
           <p:nvPr/>
         </p:nvSpPr>
         <p:spPr>
           <a:xfrm>
             <a:off x="2850185" y="5074006"/>
-            <a:ext cx="675742" cy="321869"/>
-          </a:xfrm>
-          <a:prstGeom prst="rect">
-            <a:avLst/>
-          </a:prstGeom>
-          <a:noFill/>
-          <a:ln/>
-        </p:spPr>
-        <p:txBody>
-          <a:bodyPr wrap="square" lIns="0" tIns="0" rIns="0" bIns="0" rtlCol="0" anchor="ctr">
-            <a:normAutofit/>
-          </a:bodyPr>
+            <a:ext cx="671170" cy="321869"/>
+          </a:xfrm>
+          <a:prstGeom prst="rect">
+            <a:avLst/>
+          </a:prstGeom>
+          <a:noFill/>
+          <a:ln/>
+        </p:spPr>
+        <p:txBody>
+          <a:bodyPr wrap="square" lIns="0" tIns="0" rIns="0" bIns="0" rtlCol="0" anchor="ctr"/>
           <a:lstStyle/>
           <a:p>
             <a:pPr algn="l" indent="0" marL="0">
               <a:lnSpc>
-                <a:spcPct val="85000"/>
+                <a:spcPct val="100000"/>
               </a:lnSpc>
               <a:buNone/>
             </a:pPr>
             <a:r>
-              <a:rPr lang="en-US" sz="500" b="1" dirty="0">
+              <a:rPr lang="en-US" sz="490" b="1" dirty="0">
                 <a:solidFill>
                   <a:srgbClr val="202124"/>
                 </a:solidFill>
@@ -22848,17 +22858,17 @@
               </a:rPr>
               <a:t>Pooled MCP Hub</a:t>
             </a:r>
-            <a:endParaRPr lang="en-US" sz="500" dirty="0"/>
+            <a:endParaRPr lang="en-US" sz="490" dirty="0"/>
           </a:p>
           <a:p>
             <a:pPr algn="l" indent="0" marL="0">
               <a:lnSpc>
-                <a:spcPct val="85000"/>
+                <a:spcPct val="100000"/>
               </a:lnSpc>
               <a:buNone/>
             </a:pPr>
             <a:r>
-              <a:rPr lang="en-US" sz="430" dirty="0">
+              <a:rPr lang="en-US" sz="420" dirty="0">
                 <a:solidFill>
                   <a:srgbClr val="3C4043"/>
                 </a:solidFill>
@@ -22868,13 +22878,13 @@
               </a:rPr>
               <a:t>2LO + Delegated 3LO Tools</a:t>
             </a:r>
-            <a:endParaRPr lang="en-US" sz="500" dirty="0"/>
-          </a:p>
-        </p:txBody>
-      </p:sp>
-      <p:sp>
-        <p:nvSpPr>
-          <p:cNvPr id="149" name="Shape 139"/>
+            <a:endParaRPr lang="en-US" sz="490" dirty="0"/>
+          </a:p>
+        </p:txBody>
+      </p:sp>
+      <p:sp>
+        <p:nvSpPr>
+          <p:cNvPr id="151" name="Shape 141"/>
           <p:cNvSpPr/>
           <p:nvPr/>
         </p:nvSpPr>
@@ -22901,7 +22911,7 @@
       </p:sp>
       <p:pic>
         <p:nvPicPr>
-          <p:cNvPr id="150" name="Image 8" descr="preencoded.png">    </p:cNvPr>
+          <p:cNvPr id="152" name="Image 8" descr="preencoded.png">    </p:cNvPr>
           <p:cNvPicPr>
             <a:picLocks noChangeAspect="1"/>
           </p:cNvPicPr>
@@ -22925,35 +22935,33 @@
       </p:pic>
       <p:sp>
         <p:nvSpPr>
-          <p:cNvPr id="151" name="Text 140"/>
+          <p:cNvPr id="153" name="Text 142"/>
           <p:cNvSpPr/>
           <p:nvPr/>
         </p:nvSpPr>
         <p:spPr>
           <a:xfrm>
             <a:off x="2850185" y="5725973"/>
-            <a:ext cx="675742" cy="321869"/>
-          </a:xfrm>
-          <a:prstGeom prst="rect">
-            <a:avLst/>
-          </a:prstGeom>
-          <a:noFill/>
-          <a:ln/>
-        </p:spPr>
-        <p:txBody>
-          <a:bodyPr wrap="square" lIns="0" tIns="0" rIns="0" bIns="0" rtlCol="0" anchor="ctr">
-            <a:normAutofit/>
-          </a:bodyPr>
+            <a:ext cx="671170" cy="321869"/>
+          </a:xfrm>
+          <a:prstGeom prst="rect">
+            <a:avLst/>
+          </a:prstGeom>
+          <a:noFill/>
+          <a:ln/>
+        </p:spPr>
+        <p:txBody>
+          <a:bodyPr wrap="square" lIns="0" tIns="0" rIns="0" bIns="0" rtlCol="0" anchor="ctr"/>
           <a:lstStyle/>
           <a:p>
             <a:pPr algn="l" indent="0" marL="0">
               <a:lnSpc>
-                <a:spcPct val="85000"/>
+                <a:spcPct val="100000"/>
               </a:lnSpc>
               <a:buNone/>
             </a:pPr>
             <a:r>
-              <a:rPr lang="en-US" sz="500" b="1" dirty="0">
+              <a:rPr lang="en-US" sz="490" b="1" dirty="0">
                 <a:solidFill>
                   <a:srgbClr val="202124"/>
                 </a:solidFill>
@@ -22963,17 +22971,17 @@
               </a:rPr>
               <a:t>Shared AlloyDB &amp; BQ RLS</a:t>
             </a:r>
-            <a:endParaRPr lang="en-US" sz="500" dirty="0"/>
+            <a:endParaRPr lang="en-US" sz="490" dirty="0"/>
           </a:p>
           <a:p>
             <a:pPr algn="l" indent="0" marL="0">
               <a:lnSpc>
-                <a:spcPct val="85000"/>
+                <a:spcPct val="100000"/>
               </a:lnSpc>
               <a:buNone/>
             </a:pPr>
             <a:r>
-              <a:rPr lang="en-US" sz="430" dirty="0">
+              <a:rPr lang="en-US" sz="309" dirty="0">
                 <a:solidFill>
                   <a:srgbClr val="3C4043"/>
                 </a:solidFill>
@@ -22983,13 +22991,13 @@
               </a:rPr>
               <a:t>pattern_a_pooled_rls_entities</a:t>
             </a:r>
-            <a:endParaRPr lang="en-US" sz="500" dirty="0"/>
-          </a:p>
-        </p:txBody>
-      </p:sp>
-      <p:sp>
-        <p:nvSpPr>
-          <p:cNvPr id="152" name="Shape 141"/>
+            <a:endParaRPr lang="en-US" sz="490" dirty="0"/>
+          </a:p>
+        </p:txBody>
+      </p:sp>
+      <p:sp>
+        <p:nvSpPr>
+          <p:cNvPr id="154" name="Shape 143"/>
           <p:cNvSpPr/>
           <p:nvPr/>
         </p:nvSpPr>
@@ -23016,7 +23024,7 @@
       </p:sp>
       <p:pic>
         <p:nvPicPr>
-          <p:cNvPr id="153" name="Image 9" descr="preencoded.png">    </p:cNvPr>
+          <p:cNvPr id="155" name="Image 9" descr="preencoded.png">    </p:cNvPr>
           <p:cNvPicPr>
             <a:picLocks noChangeAspect="1"/>
           </p:cNvPicPr>
@@ -23040,35 +23048,33 @@
       </p:pic>
       <p:sp>
         <p:nvSpPr>
-          <p:cNvPr id="154" name="Text 142"/>
+          <p:cNvPr id="156" name="Text 144"/>
           <p:cNvSpPr/>
           <p:nvPr/>
         </p:nvSpPr>
         <p:spPr>
           <a:xfrm>
             <a:off x="5213909" y="4448556"/>
-            <a:ext cx="675742" cy="321869"/>
-          </a:xfrm>
-          <a:prstGeom prst="rect">
-            <a:avLst/>
-          </a:prstGeom>
-          <a:noFill/>
-          <a:ln/>
-        </p:spPr>
-        <p:txBody>
-          <a:bodyPr wrap="square" lIns="0" tIns="0" rIns="0" bIns="0" rtlCol="0" anchor="ctr">
-            <a:normAutofit/>
-          </a:bodyPr>
+            <a:ext cx="671170" cy="321869"/>
+          </a:xfrm>
+          <a:prstGeom prst="rect">
+            <a:avLst/>
+          </a:prstGeom>
+          <a:noFill/>
+          <a:ln/>
+        </p:spPr>
+        <p:txBody>
+          <a:bodyPr wrap="square" lIns="0" tIns="0" rIns="0" bIns="0" rtlCol="0" anchor="ctr"/>
           <a:lstStyle/>
           <a:p>
             <a:pPr algn="l" indent="0" marL="0">
               <a:lnSpc>
-                <a:spcPct val="85000"/>
+                <a:spcPct val="100000"/>
               </a:lnSpc>
               <a:buNone/>
             </a:pPr>
             <a:r>
-              <a:rPr lang="en-US" sz="500" b="1" dirty="0">
+              <a:rPr lang="en-US" sz="490" b="1" dirty="0">
                 <a:solidFill>
                   <a:srgbClr val="202124"/>
                 </a:solidFill>
@@ -23078,17 +23084,17 @@
               </a:rPr>
               <a:t>Spoke Agent Engine via PSC</a:t>
             </a:r>
-            <a:endParaRPr lang="en-US" sz="500" dirty="0"/>
+            <a:endParaRPr lang="en-US" sz="490" dirty="0"/>
           </a:p>
           <a:p>
             <a:pPr algn="l" indent="0" marL="0">
               <a:lnSpc>
-                <a:spcPct val="85000"/>
+                <a:spcPct val="100000"/>
               </a:lnSpc>
               <a:buNone/>
             </a:pPr>
             <a:r>
-              <a:rPr lang="en-US" sz="430" dirty="0">
+              <a:rPr lang="en-US" sz="420" dirty="0">
                 <a:solidFill>
                   <a:srgbClr val="3C4043"/>
                 </a:solidFill>
@@ -23098,13 +23104,13 @@
               </a:rPr>
               <a:t>ServiceAttachment ← /28 consumer endpoint</a:t>
             </a:r>
-            <a:endParaRPr lang="en-US" sz="500" dirty="0"/>
-          </a:p>
-        </p:txBody>
-      </p:sp>
-      <p:sp>
-        <p:nvSpPr>
-          <p:cNvPr id="155" name="Shape 143"/>
+            <a:endParaRPr lang="en-US" sz="490" dirty="0"/>
+          </a:p>
+        </p:txBody>
+      </p:sp>
+      <p:sp>
+        <p:nvSpPr>
+          <p:cNvPr id="157" name="Shape 145"/>
           <p:cNvSpPr/>
           <p:nvPr/>
         </p:nvSpPr>
@@ -23131,7 +23137,7 @@
       </p:sp>
       <p:pic>
         <p:nvPicPr>
-          <p:cNvPr id="156" name="Image 10" descr="preencoded.png">    </p:cNvPr>
+          <p:cNvPr id="158" name="Image 10" descr="preencoded.png">    </p:cNvPr>
           <p:cNvPicPr>
             <a:picLocks noChangeAspect="1"/>
           </p:cNvPicPr>
@@ -23155,35 +23161,33 @@
       </p:pic>
       <p:sp>
         <p:nvSpPr>
-          <p:cNvPr id="157" name="Text 144"/>
+          <p:cNvPr id="159" name="Text 146"/>
           <p:cNvSpPr/>
           <p:nvPr/>
         </p:nvSpPr>
         <p:spPr>
           <a:xfrm>
             <a:off x="5213909" y="5074006"/>
-            <a:ext cx="675742" cy="321869"/>
-          </a:xfrm>
-          <a:prstGeom prst="rect">
-            <a:avLst/>
-          </a:prstGeom>
-          <a:noFill/>
-          <a:ln/>
-        </p:spPr>
-        <p:txBody>
-          <a:bodyPr wrap="square" lIns="0" tIns="0" rIns="0" bIns="0" rtlCol="0" anchor="ctr">
-            <a:normAutofit/>
-          </a:bodyPr>
+            <a:ext cx="671170" cy="321869"/>
+          </a:xfrm>
+          <a:prstGeom prst="rect">
+            <a:avLst/>
+          </a:prstGeom>
+          <a:noFill/>
+          <a:ln/>
+        </p:spPr>
+        <p:txBody>
+          <a:bodyPr wrap="square" lIns="0" tIns="0" rIns="0" bIns="0" rtlCol="0" anchor="ctr"/>
           <a:lstStyle/>
           <a:p>
             <a:pPr algn="l" indent="0" marL="0">
               <a:lnSpc>
-                <a:spcPct val="85000"/>
+                <a:spcPct val="100000"/>
               </a:lnSpc>
               <a:buNone/>
             </a:pPr>
             <a:r>
-              <a:rPr lang="en-US" sz="500" b="1" dirty="0">
+              <a:rPr lang="en-US" sz="490" b="1" dirty="0">
                 <a:solidFill>
                   <a:srgbClr val="202124"/>
                 </a:solidFill>
@@ -23193,17 +23197,17 @@
               </a:rPr>
               <a:t>Dedicated Spoke MCP</a:t>
             </a:r>
-            <a:endParaRPr lang="en-US" sz="500" dirty="0"/>
+            <a:endParaRPr lang="en-US" sz="490" dirty="0"/>
           </a:p>
           <a:p>
             <a:pPr algn="l" indent="0" marL="0">
               <a:lnSpc>
-                <a:spcPct val="85000"/>
+                <a:spcPct val="100000"/>
               </a:lnSpc>
               <a:buNone/>
             </a:pPr>
             <a:r>
-              <a:rPr lang="en-US" sz="430" dirty="0">
+              <a:rPr lang="en-US" sz="420" dirty="0">
                 <a:solidFill>
                   <a:srgbClr val="3C4043"/>
                 </a:solidFill>
@@ -23213,13 +23217,13 @@
               </a:rPr>
               <a:t>Isolated Inside VPC-SC Spoke</a:t>
             </a:r>
-            <a:endParaRPr lang="en-US" sz="500" dirty="0"/>
-          </a:p>
-        </p:txBody>
-      </p:sp>
-      <p:sp>
-        <p:nvSpPr>
-          <p:cNvPr id="158" name="Shape 145"/>
+            <a:endParaRPr lang="en-US" sz="490" dirty="0"/>
+          </a:p>
+        </p:txBody>
+      </p:sp>
+      <p:sp>
+        <p:nvSpPr>
+          <p:cNvPr id="160" name="Shape 147"/>
           <p:cNvSpPr/>
           <p:nvPr/>
         </p:nvSpPr>
@@ -23246,7 +23250,7 @@
       </p:sp>
       <p:pic>
         <p:nvPicPr>
-          <p:cNvPr id="159" name="Image 11" descr="preencoded.png">    </p:cNvPr>
+          <p:cNvPr id="161" name="Image 11" descr="preencoded.png">    </p:cNvPr>
           <p:cNvPicPr>
             <a:picLocks noChangeAspect="1"/>
           </p:cNvPicPr>
@@ -23270,35 +23274,33 @@
       </p:pic>
       <p:sp>
         <p:nvSpPr>
-          <p:cNvPr id="160" name="Text 146"/>
+          <p:cNvPr id="162" name="Text 148"/>
           <p:cNvSpPr/>
           <p:nvPr/>
         </p:nvSpPr>
         <p:spPr>
           <a:xfrm>
             <a:off x="5213909" y="5725973"/>
-            <a:ext cx="675742" cy="321869"/>
-          </a:xfrm>
-          <a:prstGeom prst="rect">
-            <a:avLst/>
-          </a:prstGeom>
-          <a:noFill/>
-          <a:ln/>
-        </p:spPr>
-        <p:txBody>
-          <a:bodyPr wrap="square" lIns="0" tIns="0" rIns="0" bIns="0" rtlCol="0" anchor="ctr">
-            <a:normAutofit/>
-          </a:bodyPr>
+            <a:ext cx="671170" cy="321869"/>
+          </a:xfrm>
+          <a:prstGeom prst="rect">
+            <a:avLst/>
+          </a:prstGeom>
+          <a:noFill/>
+          <a:ln/>
+        </p:spPr>
+        <p:txBody>
+          <a:bodyPr wrap="square" lIns="0" tIns="0" rIns="0" bIns="0" rtlCol="0" anchor="ctr"/>
           <a:lstStyle/>
           <a:p>
             <a:pPr algn="l" indent="0" marL="0">
               <a:lnSpc>
-                <a:spcPct val="85000"/>
+                <a:spcPct val="100000"/>
               </a:lnSpc>
               <a:buNone/>
             </a:pPr>
             <a:r>
-              <a:rPr lang="en-US" sz="500" b="1" dirty="0">
+              <a:rPr lang="en-US" sz="490" b="1" dirty="0">
                 <a:solidFill>
                   <a:srgbClr val="202124"/>
                 </a:solidFill>
@@ -23308,17 +23310,17 @@
               </a:rPr>
               <a:t>CMEK Spoke Datastore</a:t>
             </a:r>
-            <a:endParaRPr lang="en-US" sz="500" dirty="0"/>
+            <a:endParaRPr lang="en-US" sz="490" dirty="0"/>
           </a:p>
           <a:p>
             <a:pPr algn="l" indent="0" marL="0">
               <a:lnSpc>
-                <a:spcPct val="85000"/>
+                <a:spcPct val="100000"/>
               </a:lnSpc>
               <a:buNone/>
             </a:pPr>
             <a:r>
-              <a:rPr lang="en-US" sz="430" dirty="0">
+              <a:rPr lang="en-US" sz="420" dirty="0">
                 <a:solidFill>
                   <a:srgbClr val="3C4043"/>
                 </a:solidFill>
@@ -23328,13 +23330,13 @@
               </a:rPr>
               <a:t>finvault-silo-cmek &amp; KMS Lock</a:t>
             </a:r>
-            <a:endParaRPr lang="en-US" sz="500" dirty="0"/>
-          </a:p>
-        </p:txBody>
-      </p:sp>
-      <p:sp>
-        <p:nvSpPr>
-          <p:cNvPr id="161" name="Shape 147"/>
+            <a:endParaRPr lang="en-US" sz="490" dirty="0"/>
+          </a:p>
+        </p:txBody>
+      </p:sp>
+      <p:sp>
+        <p:nvSpPr>
+          <p:cNvPr id="163" name="Shape 149"/>
           <p:cNvSpPr/>
           <p:nvPr/>
         </p:nvSpPr>
@@ -23361,7 +23363,7 @@
       </p:sp>
       <p:pic>
         <p:nvPicPr>
-          <p:cNvPr id="162" name="Image 12" descr="preencoded.png">    </p:cNvPr>
+          <p:cNvPr id="164" name="Image 12" descr="preencoded.png">    </p:cNvPr>
           <p:cNvPicPr>
             <a:picLocks noChangeAspect="1"/>
           </p:cNvPicPr>
@@ -23385,35 +23387,33 @@
       </p:pic>
       <p:sp>
         <p:nvSpPr>
-          <p:cNvPr id="163" name="Text 148"/>
+          <p:cNvPr id="165" name="Text 150"/>
           <p:cNvSpPr/>
           <p:nvPr/>
         </p:nvSpPr>
         <p:spPr>
           <a:xfrm>
             <a:off x="3414370" y="2953512"/>
-            <a:ext cx="737921" cy="287122"/>
-          </a:xfrm>
-          <a:prstGeom prst="rect">
-            <a:avLst/>
-          </a:prstGeom>
-          <a:noFill/>
-          <a:ln/>
-        </p:spPr>
-        <p:txBody>
-          <a:bodyPr wrap="square" lIns="0" tIns="0" rIns="0" bIns="0" rtlCol="0" anchor="ctr">
-            <a:normAutofit/>
-          </a:bodyPr>
+            <a:ext cx="733349" cy="287122"/>
+          </a:xfrm>
+          <a:prstGeom prst="rect">
+            <a:avLst/>
+          </a:prstGeom>
+          <a:noFill/>
+          <a:ln/>
+        </p:spPr>
+        <p:txBody>
+          <a:bodyPr wrap="square" lIns="0" tIns="0" rIns="0" bIns="0" rtlCol="0" anchor="ctr"/>
           <a:lstStyle/>
           <a:p>
             <a:pPr algn="l" indent="0" marL="0">
               <a:lnSpc>
-                <a:spcPct val="85000"/>
+                <a:spcPct val="100000"/>
               </a:lnSpc>
               <a:buNone/>
             </a:pPr>
             <a:r>
-              <a:rPr lang="en-US" sz="500" b="1" dirty="0">
+              <a:rPr lang="en-US" sz="490" b="1" dirty="0">
                 <a:solidFill>
                   <a:srgbClr val="202124"/>
                 </a:solidFill>
@@ -23423,17 +23423,17 @@
               </a:rPr>
               <a:t>Cloud Run Router</a:t>
             </a:r>
-            <a:endParaRPr lang="en-US" sz="500" dirty="0"/>
+            <a:endParaRPr lang="en-US" sz="490" dirty="0"/>
           </a:p>
           <a:p>
             <a:pPr algn="l" indent="0" marL="0">
               <a:lnSpc>
-                <a:spcPct val="85000"/>
+                <a:spcPct val="100000"/>
               </a:lnSpc>
               <a:buNone/>
             </a:pPr>
             <a:r>
-              <a:rPr lang="en-US" sz="430" dirty="0">
+              <a:rPr lang="en-US" sz="420" dirty="0">
                 <a:solidFill>
                   <a:srgbClr val="3C4043"/>
                 </a:solidFill>
@@ -23443,13 +23443,13 @@
               </a:rPr>
               <a:t>Tier Router &amp; Live Migrator</a:t>
             </a:r>
-            <a:endParaRPr lang="en-US" sz="500" dirty="0"/>
-          </a:p>
-        </p:txBody>
-      </p:sp>
-      <p:sp>
-        <p:nvSpPr>
-          <p:cNvPr id="164" name="Shape 149"/>
+            <a:endParaRPr lang="en-US" sz="490" dirty="0"/>
+          </a:p>
+        </p:txBody>
+      </p:sp>
+      <p:sp>
+        <p:nvSpPr>
+          <p:cNvPr id="166" name="Shape 151"/>
           <p:cNvSpPr/>
           <p:nvPr/>
         </p:nvSpPr>
@@ -23476,7 +23476,7 @@
       </p:sp>
       <p:pic>
         <p:nvPicPr>
-          <p:cNvPr id="165" name="Image 13" descr="preencoded.png">    </p:cNvPr>
+          <p:cNvPr id="167" name="Image 13" descr="preencoded.png">    </p:cNvPr>
           <p:cNvPicPr>
             <a:picLocks noChangeAspect="1"/>
           </p:cNvPicPr>
@@ -23500,35 +23500,33 @@
       </p:pic>
       <p:sp>
         <p:nvSpPr>
-          <p:cNvPr id="166" name="Text 150"/>
+          <p:cNvPr id="168" name="Text 152"/>
           <p:cNvSpPr/>
           <p:nvPr/>
         </p:nvSpPr>
         <p:spPr>
           <a:xfrm>
             <a:off x="1775765" y="4230929"/>
-            <a:ext cx="593446" cy="312725"/>
-          </a:xfrm>
-          <a:prstGeom prst="rect">
-            <a:avLst/>
-          </a:prstGeom>
-          <a:noFill/>
-          <a:ln/>
-        </p:spPr>
-        <p:txBody>
-          <a:bodyPr wrap="square" lIns="0" tIns="0" rIns="0" bIns="0" rtlCol="0" anchor="ctr">
-            <a:normAutofit/>
-          </a:bodyPr>
+            <a:ext cx="588874" cy="312725"/>
+          </a:xfrm>
+          <a:prstGeom prst="rect">
+            <a:avLst/>
+          </a:prstGeom>
+          <a:noFill/>
+          <a:ln/>
+        </p:spPr>
+        <p:txBody>
+          <a:bodyPr wrap="square" lIns="0" tIns="0" rIns="0" bIns="0" rtlCol="0" anchor="ctr"/>
           <a:lstStyle/>
           <a:p>
             <a:pPr algn="l" indent="0" marL="0">
               <a:lnSpc>
-                <a:spcPct val="85000"/>
+                <a:spcPct val="100000"/>
               </a:lnSpc>
               <a:buNone/>
             </a:pPr>
             <a:r>
-              <a:rPr lang="en-US" sz="500" b="1" dirty="0">
+              <a:rPr lang="en-US" sz="490" b="1" dirty="0">
                 <a:solidFill>
                   <a:srgbClr val="202124"/>
                 </a:solidFill>
@@ -23538,17 +23536,17 @@
               </a:rPr>
               <a:t>Shared Model Armor</a:t>
             </a:r>
-            <a:endParaRPr lang="en-US" sz="500" dirty="0"/>
+            <a:endParaRPr lang="en-US" sz="490" dirty="0"/>
           </a:p>
           <a:p>
             <a:pPr algn="l" indent="0" marL="0">
               <a:lnSpc>
-                <a:spcPct val="85000"/>
+                <a:spcPct val="100000"/>
               </a:lnSpc>
               <a:buNone/>
             </a:pPr>
             <a:r>
-              <a:rPr lang="en-US" sz="430" dirty="0">
+              <a:rPr lang="en-US" sz="420" dirty="0">
                 <a:solidFill>
                   <a:srgbClr val="3C4043"/>
                 </a:solidFill>
@@ -23558,13 +23556,13 @@
               </a:rPr>
               <a:t>Multi-Tenant Prompt &amp; SDP</a:t>
             </a:r>
-            <a:endParaRPr lang="en-US" sz="500" dirty="0"/>
-          </a:p>
-        </p:txBody>
-      </p:sp>
-      <p:sp>
-        <p:nvSpPr>
-          <p:cNvPr id="167" name="Shape 151"/>
+            <a:endParaRPr lang="en-US" sz="490" dirty="0"/>
+          </a:p>
+        </p:txBody>
+      </p:sp>
+      <p:sp>
+        <p:nvSpPr>
+          <p:cNvPr id="169" name="Shape 153"/>
           <p:cNvSpPr/>
           <p:nvPr/>
         </p:nvSpPr>
@@ -23591,7 +23589,7 @@
       </p:sp>
       <p:pic>
         <p:nvPicPr>
-          <p:cNvPr id="168" name="Image 14" descr="preencoded.png">    </p:cNvPr>
+          <p:cNvPr id="170" name="Image 14" descr="preencoded.png">    </p:cNvPr>
           <p:cNvPicPr>
             <a:picLocks noChangeAspect="1"/>
           </p:cNvPicPr>
@@ -23615,35 +23613,33 @@
       </p:pic>
       <p:sp>
         <p:nvSpPr>
-          <p:cNvPr id="169" name="Text 152"/>
+          <p:cNvPr id="171" name="Text 154"/>
           <p:cNvSpPr/>
           <p:nvPr/>
         </p:nvSpPr>
         <p:spPr>
           <a:xfrm>
             <a:off x="1775765" y="5256886"/>
-            <a:ext cx="593446" cy="312725"/>
-          </a:xfrm>
-          <a:prstGeom prst="rect">
-            <a:avLst/>
-          </a:prstGeom>
-          <a:noFill/>
-          <a:ln/>
-        </p:spPr>
-        <p:txBody>
-          <a:bodyPr wrap="square" lIns="0" tIns="0" rIns="0" bIns="0" rtlCol="0" anchor="ctr">
-            <a:normAutofit/>
-          </a:bodyPr>
+            <a:ext cx="588874" cy="312725"/>
+          </a:xfrm>
+          <a:prstGeom prst="rect">
+            <a:avLst/>
+          </a:prstGeom>
+          <a:noFill/>
+          <a:ln/>
+        </p:spPr>
+        <p:txBody>
+          <a:bodyPr wrap="square" lIns="0" tIns="0" rIns="0" bIns="0" rtlCol="0" anchor="ctr"/>
           <a:lstStyle/>
           <a:p>
             <a:pPr algn="l" indent="0" marL="0">
               <a:lnSpc>
-                <a:spcPct val="85000"/>
+                <a:spcPct val="100000"/>
               </a:lnSpc>
               <a:buNone/>
             </a:pPr>
             <a:r>
-              <a:rPr lang="en-US" sz="500" b="1" dirty="0">
+              <a:rPr lang="en-US" sz="490" b="1" dirty="0">
                 <a:solidFill>
                   <a:srgbClr val="202124"/>
                 </a:solidFill>
@@ -23653,17 +23649,17 @@
               </a:rPr>
               <a:t>Gemini 2.5 Pro</a:t>
             </a:r>
-            <a:endParaRPr lang="en-US" sz="500" dirty="0"/>
+            <a:endParaRPr lang="en-US" sz="490" dirty="0"/>
           </a:p>
           <a:p>
             <a:pPr algn="l" indent="0" marL="0">
               <a:lnSpc>
-                <a:spcPct val="85000"/>
+                <a:spcPct val="100000"/>
               </a:lnSpc>
               <a:buNone/>
             </a:pPr>
             <a:r>
-              <a:rPr lang="en-US" sz="430" dirty="0">
+              <a:rPr lang="en-US" sz="420" dirty="0">
                 <a:solidFill>
                   <a:srgbClr val="3C4043"/>
                 </a:solidFill>
@@ -23673,13 +23669,13 @@
               </a:rPr>
               <a:t>4,000 Thinking Cap + Cache</a:t>
             </a:r>
-            <a:endParaRPr lang="en-US" sz="500" dirty="0"/>
-          </a:p>
-        </p:txBody>
-      </p:sp>
-      <p:sp>
-        <p:nvSpPr>
-          <p:cNvPr id="170" name="Shape 153"/>
+            <a:endParaRPr lang="en-US" sz="490" dirty="0"/>
+          </a:p>
+        </p:txBody>
+      </p:sp>
+      <p:sp>
+        <p:nvSpPr>
+          <p:cNvPr id="172" name="Shape 155"/>
           <p:cNvSpPr/>
           <p:nvPr/>
         </p:nvSpPr>
@@ -23706,7 +23702,7 @@
       </p:sp>
       <p:pic>
         <p:nvPicPr>
-          <p:cNvPr id="171" name="Image 15" descr="preencoded.png">    </p:cNvPr>
+          <p:cNvPr id="173" name="Image 15" descr="preencoded.png">    </p:cNvPr>
           <p:cNvPicPr>
             <a:picLocks noChangeAspect="1"/>
           </p:cNvPicPr>
@@ -23730,35 +23726,33 @@
       </p:pic>
       <p:sp>
         <p:nvSpPr>
-          <p:cNvPr id="172" name="Text 154"/>
+          <p:cNvPr id="174" name="Text 156"/>
           <p:cNvSpPr/>
           <p:nvPr/>
         </p:nvSpPr>
         <p:spPr>
           <a:xfrm>
             <a:off x="4140403" y="4230929"/>
-            <a:ext cx="593446" cy="312725"/>
-          </a:xfrm>
-          <a:prstGeom prst="rect">
-            <a:avLst/>
-          </a:prstGeom>
-          <a:noFill/>
-          <a:ln/>
-        </p:spPr>
-        <p:txBody>
-          <a:bodyPr wrap="square" lIns="0" tIns="0" rIns="0" bIns="0" rtlCol="0" anchor="ctr">
-            <a:normAutofit/>
-          </a:bodyPr>
+            <a:ext cx="588874" cy="312725"/>
+          </a:xfrm>
+          <a:prstGeom prst="rect">
+            <a:avLst/>
+          </a:prstGeom>
+          <a:noFill/>
+          <a:ln/>
+        </p:spPr>
+        <p:txBody>
+          <a:bodyPr wrap="square" lIns="0" tIns="0" rIns="0" bIns="0" rtlCol="0" anchor="ctr"/>
           <a:lstStyle/>
           <a:p>
             <a:pPr algn="l" indent="0" marL="0">
               <a:lnSpc>
-                <a:spcPct val="85000"/>
+                <a:spcPct val="100000"/>
               </a:lnSpc>
               <a:buNone/>
             </a:pPr>
             <a:r>
-              <a:rPr lang="en-US" sz="500" b="1" dirty="0">
+              <a:rPr lang="en-US" sz="490" b="1" dirty="0">
                 <a:solidFill>
                   <a:srgbClr val="202124"/>
                 </a:solidFill>
@@ -23768,17 +23762,17 @@
               </a:rPr>
               <a:t>Model Armor (spoke)</a:t>
             </a:r>
-            <a:endParaRPr lang="en-US" sz="500" dirty="0"/>
+            <a:endParaRPr lang="en-US" sz="490" dirty="0"/>
           </a:p>
           <a:p>
             <a:pPr algn="l" indent="0" marL="0">
               <a:lnSpc>
-                <a:spcPct val="85000"/>
+                <a:spcPct val="100000"/>
               </a:lnSpc>
               <a:buNone/>
             </a:pPr>
             <a:r>
-              <a:rPr lang="en-US" sz="430" dirty="0">
+              <a:rPr lang="en-US" sz="420" dirty="0">
                 <a:solidFill>
                   <a:srgbClr val="3C4043"/>
                 </a:solidFill>
@@ -23788,13 +23782,13 @@
               </a:rPr>
               <a:t>Enterprise prompt screen + SDP</a:t>
             </a:r>
-            <a:endParaRPr lang="en-US" sz="500" dirty="0"/>
-          </a:p>
-        </p:txBody>
-      </p:sp>
-      <p:sp>
-        <p:nvSpPr>
-          <p:cNvPr id="173" name="Shape 155"/>
+            <a:endParaRPr lang="en-US" sz="490" dirty="0"/>
+          </a:p>
+        </p:txBody>
+      </p:sp>
+      <p:sp>
+        <p:nvSpPr>
+          <p:cNvPr id="175" name="Shape 157"/>
           <p:cNvSpPr/>
           <p:nvPr/>
         </p:nvSpPr>
@@ -23821,7 +23815,7 @@
       </p:sp>
       <p:pic>
         <p:nvPicPr>
-          <p:cNvPr id="174" name="Image 16" descr="preencoded.png">    </p:cNvPr>
+          <p:cNvPr id="176" name="Image 16" descr="preencoded.png">    </p:cNvPr>
           <p:cNvPicPr>
             <a:picLocks noChangeAspect="1"/>
           </p:cNvPicPr>
@@ -23845,35 +23839,33 @@
       </p:pic>
       <p:sp>
         <p:nvSpPr>
-          <p:cNvPr id="175" name="Text 156"/>
+          <p:cNvPr id="177" name="Text 158"/>
           <p:cNvSpPr/>
           <p:nvPr/>
         </p:nvSpPr>
         <p:spPr>
           <a:xfrm>
             <a:off x="4140403" y="4674413"/>
-            <a:ext cx="593446" cy="312725"/>
-          </a:xfrm>
-          <a:prstGeom prst="rect">
-            <a:avLst/>
-          </a:prstGeom>
-          <a:noFill/>
-          <a:ln/>
-        </p:spPr>
-        <p:txBody>
-          <a:bodyPr wrap="square" lIns="0" tIns="0" rIns="0" bIns="0" rtlCol="0" anchor="ctr">
-            <a:normAutofit/>
-          </a:bodyPr>
+            <a:ext cx="588874" cy="312725"/>
+          </a:xfrm>
+          <a:prstGeom prst="rect">
+            <a:avLst/>
+          </a:prstGeom>
+          <a:noFill/>
+          <a:ln/>
+        </p:spPr>
+        <p:txBody>
+          <a:bodyPr wrap="square" lIns="0" tIns="0" rIns="0" bIns="0" rtlCol="0" anchor="ctr"/>
           <a:lstStyle/>
           <a:p>
             <a:pPr algn="l" indent="0" marL="0">
               <a:lnSpc>
-                <a:spcPct val="85000"/>
+                <a:spcPct val="100000"/>
               </a:lnSpc>
               <a:buNone/>
             </a:pPr>
             <a:r>
-              <a:rPr lang="en-US" sz="500" b="1" dirty="0">
+              <a:rPr lang="en-US" sz="490" b="1" dirty="0">
                 <a:solidFill>
                   <a:srgbClr val="202124"/>
                 </a:solidFill>
@@ -23883,17 +23875,17 @@
               </a:rPr>
               <a:t>Gemini 2.5 Pro PT</a:t>
             </a:r>
-            <a:endParaRPr lang="en-US" sz="500" dirty="0"/>
+            <a:endParaRPr lang="en-US" sz="490" dirty="0"/>
           </a:p>
           <a:p>
             <a:pPr algn="l" indent="0" marL="0">
               <a:lnSpc>
-                <a:spcPct val="85000"/>
+                <a:spcPct val="100000"/>
               </a:lnSpc>
               <a:buNone/>
             </a:pPr>
             <a:r>
-              <a:rPr lang="en-US" sz="430" dirty="0">
+              <a:rPr lang="en-US" sz="420" dirty="0">
                 <a:solidFill>
                   <a:srgbClr val="3C4043"/>
                 </a:solidFill>
@@ -23903,13 +23895,13 @@
               </a:rPr>
               <a:t>Upgraded 8,000 Thinking Cap</a:t>
             </a:r>
-            <a:endParaRPr lang="en-US" sz="500" dirty="0"/>
-          </a:p>
-        </p:txBody>
-      </p:sp>
-      <p:sp>
-        <p:nvSpPr>
-          <p:cNvPr id="176" name="Shape 157"/>
+            <a:endParaRPr lang="en-US" sz="490" dirty="0"/>
+          </a:p>
+        </p:txBody>
+      </p:sp>
+      <p:sp>
+        <p:nvSpPr>
+          <p:cNvPr id="178" name="Shape 159"/>
           <p:cNvSpPr/>
           <p:nvPr/>
         </p:nvSpPr>
@@ -23936,7 +23928,7 @@
       </p:sp>
       <p:pic>
         <p:nvPicPr>
-          <p:cNvPr id="177" name="Image 17" descr="preencoded.png">    </p:cNvPr>
+          <p:cNvPr id="179" name="Image 17" descr="preencoded.png">    </p:cNvPr>
           <p:cNvPicPr>
             <a:picLocks noChangeAspect="1"/>
           </p:cNvPicPr>
@@ -23960,35 +23952,33 @@
       </p:pic>
       <p:sp>
         <p:nvSpPr>
-          <p:cNvPr id="178" name="Text 158"/>
+          <p:cNvPr id="180" name="Text 160"/>
           <p:cNvSpPr/>
           <p:nvPr/>
         </p:nvSpPr>
         <p:spPr>
           <a:xfrm>
             <a:off x="1727302" y="2162556"/>
-            <a:ext cx="651053" cy="287122"/>
-          </a:xfrm>
-          <a:prstGeom prst="rect">
-            <a:avLst/>
-          </a:prstGeom>
-          <a:noFill/>
-          <a:ln/>
-        </p:spPr>
-        <p:txBody>
-          <a:bodyPr wrap="square" lIns="0" tIns="0" rIns="0" bIns="0" rtlCol="0" anchor="ctr">
-            <a:normAutofit/>
-          </a:bodyPr>
+            <a:ext cx="646481" cy="287122"/>
+          </a:xfrm>
+          <a:prstGeom prst="rect">
+            <a:avLst/>
+          </a:prstGeom>
+          <a:noFill/>
+          <a:ln/>
+        </p:spPr>
+        <p:txBody>
+          <a:bodyPr wrap="square" lIns="0" tIns="0" rIns="0" bIns="0" rtlCol="0" anchor="ctr"/>
           <a:lstStyle/>
           <a:p>
             <a:pPr algn="l" indent="0" marL="0">
               <a:lnSpc>
-                <a:spcPct val="85000"/>
+                <a:spcPct val="100000"/>
               </a:lnSpc>
               <a:buNone/>
             </a:pPr>
             <a:r>
-              <a:rPr lang="en-US" sz="500" b="1" dirty="0">
+              <a:rPr lang="en-US" sz="490" b="1" dirty="0">
                 <a:solidFill>
                   <a:srgbClr val="202124"/>
                 </a:solidFill>
@@ -23998,17 +23988,17 @@
               </a:rPr>
               <a:t>Google Cloud Armor</a:t>
             </a:r>
-            <a:endParaRPr lang="en-US" sz="500" dirty="0"/>
+            <a:endParaRPr lang="en-US" sz="490" dirty="0"/>
           </a:p>
           <a:p>
             <a:pPr algn="l" indent="0" marL="0">
               <a:lnSpc>
-                <a:spcPct val="85000"/>
+                <a:spcPct val="100000"/>
               </a:lnSpc>
               <a:buNone/>
             </a:pPr>
             <a:r>
-              <a:rPr lang="en-US" sz="430" dirty="0">
+              <a:rPr lang="en-US" sz="420" dirty="0">
                 <a:solidFill>
                   <a:srgbClr val="3C4043"/>
                 </a:solidFill>
@@ -24018,13 +24008,13 @@
               </a:rPr>
               <a:t>WAF &amp; IAP • Single SaaS URL</a:t>
             </a:r>
-            <a:endParaRPr lang="en-US" sz="500" dirty="0"/>
-          </a:p>
-        </p:txBody>
-      </p:sp>
-      <p:sp>
-        <p:nvSpPr>
-          <p:cNvPr id="179" name="Shape 159"/>
+            <a:endParaRPr lang="en-US" sz="490" dirty="0"/>
+          </a:p>
+        </p:txBody>
+      </p:sp>
+      <p:sp>
+        <p:nvSpPr>
+          <p:cNvPr id="181" name="Shape 161"/>
           <p:cNvSpPr/>
           <p:nvPr/>
         </p:nvSpPr>
@@ -24051,7 +24041,7 @@
       </p:sp>
       <p:pic>
         <p:nvPicPr>
-          <p:cNvPr id="180" name="Image 18" descr="preencoded.png">    </p:cNvPr>
+          <p:cNvPr id="182" name="Image 18" descr="preencoded.png">    </p:cNvPr>
           <p:cNvPicPr>
             <a:picLocks noChangeAspect="1"/>
           </p:cNvPicPr>
@@ -24075,35 +24065,33 @@
       </p:pic>
       <p:sp>
         <p:nvSpPr>
-          <p:cNvPr id="181" name="Text 160"/>
+          <p:cNvPr id="183" name="Text 162"/>
           <p:cNvSpPr/>
           <p:nvPr/>
         </p:nvSpPr>
         <p:spPr>
           <a:xfrm>
             <a:off x="1727302" y="2527402"/>
-            <a:ext cx="651053" cy="287122"/>
-          </a:xfrm>
-          <a:prstGeom prst="rect">
-            <a:avLst/>
-          </a:prstGeom>
-          <a:noFill/>
-          <a:ln/>
-        </p:spPr>
-        <p:txBody>
-          <a:bodyPr wrap="square" lIns="0" tIns="0" rIns="0" bIns="0" rtlCol="0" anchor="ctr">
-            <a:normAutofit/>
-          </a:bodyPr>
+            <a:ext cx="646481" cy="287122"/>
+          </a:xfrm>
+          <a:prstGeom prst="rect">
+            <a:avLst/>
+          </a:prstGeom>
+          <a:noFill/>
+          <a:ln/>
+        </p:spPr>
+        <p:txBody>
+          <a:bodyPr wrap="square" lIns="0" tIns="0" rIns="0" bIns="0" rtlCol="0" anchor="ctr"/>
           <a:lstStyle/>
           <a:p>
             <a:pPr algn="l" indent="0" marL="0">
               <a:lnSpc>
-                <a:spcPct val="85000"/>
+                <a:spcPct val="100000"/>
               </a:lnSpc>
               <a:buNone/>
             </a:pPr>
             <a:r>
-              <a:rPr lang="en-US" sz="500" b="1" dirty="0">
+              <a:rPr lang="en-US" sz="490" b="1" dirty="0">
                 <a:solidFill>
                   <a:srgbClr val="202124"/>
                 </a:solidFill>
@@ -24113,17 +24101,17 @@
               </a:rPr>
               <a:t>Cross-Project Catalog</a:t>
             </a:r>
-            <a:endParaRPr lang="en-US" sz="500" dirty="0"/>
+            <a:endParaRPr lang="en-US" sz="490" dirty="0"/>
           </a:p>
           <a:p>
             <a:pPr algn="l" indent="0" marL="0">
               <a:lnSpc>
-                <a:spcPct val="85000"/>
+                <a:spcPct val="100000"/>
               </a:lnSpc>
               <a:buNone/>
             </a:pPr>
             <a:r>
-              <a:rPr lang="en-US" sz="430" dirty="0">
+              <a:rPr lang="en-US" sz="420" dirty="0">
                 <a:solidFill>
                   <a:srgbClr val="3C4043"/>
                 </a:solidFill>
@@ -24133,13 +24121,13 @@
               </a:rPr>
               <a:t>Federated Agent Catalog</a:t>
             </a:r>
-            <a:endParaRPr lang="en-US" sz="500" dirty="0"/>
-          </a:p>
-        </p:txBody>
-      </p:sp>
-      <p:sp>
-        <p:nvSpPr>
-          <p:cNvPr id="182" name="Shape 161"/>
+            <a:endParaRPr lang="en-US" sz="490" dirty="0"/>
+          </a:p>
+        </p:txBody>
+      </p:sp>
+      <p:sp>
+        <p:nvSpPr>
+          <p:cNvPr id="184" name="Shape 163"/>
           <p:cNvSpPr/>
           <p:nvPr/>
         </p:nvSpPr>
@@ -24166,7 +24154,7 @@
       </p:sp>
       <p:pic>
         <p:nvPicPr>
-          <p:cNvPr id="183" name="Image 19" descr="preencoded.png">    </p:cNvPr>
+          <p:cNvPr id="185" name="Image 19" descr="preencoded.png">    </p:cNvPr>
           <p:cNvPicPr>
             <a:picLocks noChangeAspect="1"/>
           </p:cNvPicPr>
@@ -24190,35 +24178,33 @@
       </p:pic>
       <p:sp>
         <p:nvSpPr>
-          <p:cNvPr id="184" name="Text 162"/>
+          <p:cNvPr id="186" name="Text 164"/>
           <p:cNvSpPr/>
           <p:nvPr/>
         </p:nvSpPr>
         <p:spPr>
           <a:xfrm>
             <a:off x="1762049" y="2953512"/>
-            <a:ext cx="616306" cy="287122"/>
-          </a:xfrm>
-          <a:prstGeom prst="rect">
-            <a:avLst/>
-          </a:prstGeom>
-          <a:noFill/>
-          <a:ln/>
-        </p:spPr>
-        <p:txBody>
-          <a:bodyPr wrap="square" lIns="0" tIns="0" rIns="0" bIns="0" rtlCol="0" anchor="ctr">
-            <a:normAutofit/>
-          </a:bodyPr>
+            <a:ext cx="611734" cy="287122"/>
+          </a:xfrm>
+          <a:prstGeom prst="rect">
+            <a:avLst/>
+          </a:prstGeom>
+          <a:noFill/>
+          <a:ln/>
+        </p:spPr>
+        <p:txBody>
+          <a:bodyPr wrap="square" lIns="0" tIns="0" rIns="0" bIns="0" rtlCol="0" anchor="ctr"/>
           <a:lstStyle/>
           <a:p>
             <a:pPr algn="l" indent="0" marL="0">
               <a:lnSpc>
-                <a:spcPct val="85000"/>
+                <a:spcPct val="100000"/>
               </a:lnSpc>
               <a:buNone/>
             </a:pPr>
             <a:r>
-              <a:rPr lang="en-US" sz="500" b="1" dirty="0">
+              <a:rPr lang="en-US" sz="490" b="1" dirty="0">
                 <a:solidFill>
                   <a:srgbClr val="202124"/>
                 </a:solidFill>
@@ -24228,17 +24214,17 @@
               </a:rPr>
               <a:t>Firestore Route Table</a:t>
             </a:r>
-            <a:endParaRPr lang="en-US" sz="500" dirty="0"/>
+            <a:endParaRPr lang="en-US" sz="490" dirty="0"/>
           </a:p>
           <a:p>
             <a:pPr algn="l" indent="0" marL="0">
               <a:lnSpc>
-                <a:spcPct val="85000"/>
+                <a:spcPct val="100000"/>
               </a:lnSpc>
               <a:buNone/>
             </a:pPr>
             <a:r>
-              <a:rPr lang="en-US" sz="430" dirty="0">
+              <a:rPr lang="en-US" sz="275" dirty="0">
                 <a:solidFill>
                   <a:srgbClr val="3C4043"/>
                 </a:solidFill>
@@ -24248,13 +24234,13 @@
               </a:rPr>
               <a:t>pattern_c_psc_endpoints_registry</a:t>
             </a:r>
-            <a:endParaRPr lang="en-US" sz="500" dirty="0"/>
-          </a:p>
-        </p:txBody>
-      </p:sp>
-      <p:sp>
-        <p:nvSpPr>
-          <p:cNvPr id="185" name="Shape 163"/>
+            <a:endParaRPr lang="en-US" sz="490" dirty="0"/>
+          </a:p>
+        </p:txBody>
+      </p:sp>
+      <p:sp>
+        <p:nvSpPr>
+          <p:cNvPr id="187" name="Shape 165"/>
           <p:cNvSpPr/>
           <p:nvPr/>
         </p:nvSpPr>
@@ -24279,7 +24265,7 @@
       </p:sp>
       <p:sp>
         <p:nvSpPr>
-          <p:cNvPr id="186" name="Text 164"/>
+          <p:cNvPr id="188" name="Text 166"/>
           <p:cNvSpPr/>
           <p:nvPr/>
         </p:nvSpPr>
@@ -24318,7 +24304,7 @@
       </p:sp>
       <p:sp>
         <p:nvSpPr>
-          <p:cNvPr id="187" name="Shape 165"/>
+          <p:cNvPr id="189" name="Shape 167"/>
           <p:cNvSpPr/>
           <p:nvPr/>
         </p:nvSpPr>
@@ -24343,7 +24329,7 @@
       </p:sp>
       <p:sp>
         <p:nvSpPr>
-          <p:cNvPr id="188" name="Text 166"/>
+          <p:cNvPr id="190" name="Text 168"/>
           <p:cNvSpPr/>
           <p:nvPr/>
         </p:nvSpPr>
@@ -24382,7 +24368,7 @@
       </p:sp>
       <p:sp>
         <p:nvSpPr>
-          <p:cNvPr id="189" name="Shape 167"/>
+          <p:cNvPr id="191" name="Shape 169"/>
           <p:cNvSpPr/>
           <p:nvPr/>
         </p:nvSpPr>
@@ -24407,7 +24393,7 @@
       </p:sp>
       <p:sp>
         <p:nvSpPr>
-          <p:cNvPr id="190" name="Text 168"/>
+          <p:cNvPr id="192" name="Text 170"/>
           <p:cNvSpPr/>
           <p:nvPr/>
         </p:nvSpPr>
@@ -24446,7 +24432,7 @@
       </p:sp>
       <p:sp>
         <p:nvSpPr>
-          <p:cNvPr id="191" name="Shape 169"/>
+          <p:cNvPr id="193" name="Shape 171"/>
           <p:cNvSpPr/>
           <p:nvPr/>
         </p:nvSpPr>
@@ -24471,7 +24457,7 @@
       </p:sp>
       <p:sp>
         <p:nvSpPr>
-          <p:cNvPr id="192" name="Text 170"/>
+          <p:cNvPr id="194" name="Text 172"/>
           <p:cNvSpPr/>
           <p:nvPr/>
         </p:nvSpPr>
@@ -24510,7 +24496,7 @@
       </p:sp>
       <p:sp>
         <p:nvSpPr>
-          <p:cNvPr id="193" name="Shape 171"/>
+          <p:cNvPr id="195" name="Shape 173"/>
           <p:cNvSpPr/>
           <p:nvPr/>
         </p:nvSpPr>
@@ -24535,7 +24521,7 @@
       </p:sp>
       <p:sp>
         <p:nvSpPr>
-          <p:cNvPr id="194" name="Text 172"/>
+          <p:cNvPr id="196" name="Text 174"/>
           <p:cNvSpPr/>
           <p:nvPr/>
         </p:nvSpPr>
@@ -24574,7 +24560,7 @@
       </p:sp>
       <p:sp>
         <p:nvSpPr>
-          <p:cNvPr id="195" name="Shape 173"/>
+          <p:cNvPr id="197" name="Shape 175"/>
           <p:cNvSpPr/>
           <p:nvPr/>
         </p:nvSpPr>
@@ -24599,7 +24585,7 @@
       </p:sp>
       <p:sp>
         <p:nvSpPr>
-          <p:cNvPr id="196" name="Text 174"/>
+          <p:cNvPr id="198" name="Text 176"/>
           <p:cNvSpPr/>
           <p:nvPr/>
         </p:nvSpPr>
@@ -24638,7 +24624,7 @@
       </p:sp>
       <p:sp>
         <p:nvSpPr>
-          <p:cNvPr id="197" name="Shape 175"/>
+          <p:cNvPr id="199" name="Shape 177"/>
           <p:cNvSpPr/>
           <p:nvPr/>
         </p:nvSpPr>
@@ -24663,7 +24649,7 @@
       </p:sp>
       <p:sp>
         <p:nvSpPr>
-          <p:cNvPr id="198" name="Text 176"/>
+          <p:cNvPr id="200" name="Text 178"/>
           <p:cNvSpPr/>
           <p:nvPr/>
         </p:nvSpPr>
@@ -24702,7 +24688,7 @@
       </p:sp>
       <p:sp>
         <p:nvSpPr>
-          <p:cNvPr id="199" name="Shape 177"/>
+          <p:cNvPr id="201" name="Shape 179"/>
           <p:cNvSpPr/>
           <p:nvPr/>
         </p:nvSpPr>
@@ -24727,7 +24713,7 @@
       </p:sp>
       <p:sp>
         <p:nvSpPr>
-          <p:cNvPr id="200" name="Text 178"/>
+          <p:cNvPr id="202" name="Text 180"/>
           <p:cNvSpPr/>
           <p:nvPr/>
         </p:nvSpPr>
@@ -24766,7 +24752,7 @@
       </p:sp>
       <p:sp>
         <p:nvSpPr>
-          <p:cNvPr id="201" name="Shape 179"/>
+          <p:cNvPr id="203" name="Shape 181"/>
           <p:cNvSpPr/>
           <p:nvPr/>
         </p:nvSpPr>
@@ -24791,7 +24777,7 @@
       </p:sp>
       <p:sp>
         <p:nvSpPr>
-          <p:cNvPr id="202" name="Text 180"/>
+          <p:cNvPr id="204" name="Text 182"/>
           <p:cNvSpPr/>
           <p:nvPr/>
         </p:nvSpPr>
@@ -24830,18 +24816,18 @@
       </p:sp>
       <p:sp>
         <p:nvSpPr>
-          <p:cNvPr id="203" name="Shape 181"/>
-          <p:cNvSpPr/>
-          <p:nvPr/>
-        </p:nvSpPr>
-        <p:spPr>
-          <a:xfrm>
-            <a:off x="5346497" y="3365906"/>
-            <a:ext cx="747065" cy="192024"/>
+          <p:cNvPr id="205" name="Shape 183"/>
+          <p:cNvSpPr/>
+          <p:nvPr/>
+        </p:nvSpPr>
+        <p:spPr>
+          <a:xfrm>
+            <a:off x="5339182" y="3353105"/>
+            <a:ext cx="617220" cy="217627"/>
           </a:xfrm>
           <a:prstGeom prst="roundRect">
             <a:avLst>
-              <a:gd name="adj" fmla="val 23810"/>
+              <a:gd name="adj" fmla="val 21008"/>
             </a:avLst>
           </a:prstGeom>
           <a:solidFill>
@@ -24857,35 +24843,33 @@
       </p:sp>
       <p:sp>
         <p:nvSpPr>
-          <p:cNvPr id="204" name="Text 182"/>
-          <p:cNvSpPr/>
-          <p:nvPr/>
-        </p:nvSpPr>
-        <p:spPr>
-          <a:xfrm>
-            <a:off x="5364785" y="3375050"/>
-            <a:ext cx="710489" cy="173736"/>
-          </a:xfrm>
-          <a:prstGeom prst="rect">
-            <a:avLst/>
-          </a:prstGeom>
-          <a:noFill/>
-          <a:ln/>
-        </p:spPr>
-        <p:txBody>
-          <a:bodyPr wrap="square" lIns="0" tIns="0" rIns="0" bIns="0" rtlCol="0" anchor="ctr">
-            <a:normAutofit/>
-          </a:bodyPr>
+          <p:cNvPr id="206" name="Text 184"/>
+          <p:cNvSpPr/>
+          <p:nvPr/>
+        </p:nvSpPr>
+        <p:spPr>
+          <a:xfrm>
+            <a:off x="5359298" y="3362249"/>
+            <a:ext cx="576986" cy="199339"/>
+          </a:xfrm>
+          <a:prstGeom prst="rect">
+            <a:avLst/>
+          </a:prstGeom>
+          <a:noFill/>
+          <a:ln/>
+        </p:spPr>
+        <p:txBody>
+          <a:bodyPr wrap="square" lIns="0" tIns="0" rIns="0" bIns="0" rtlCol="0" anchor="ctr"/>
           <a:lstStyle/>
           <a:p>
             <a:pPr algn="ctr" indent="0" marL="0">
               <a:lnSpc>
-                <a:spcPct val="86000"/>
+                <a:spcPct val="102000"/>
               </a:lnSpc>
               <a:buNone/>
             </a:pPr>
             <a:r>
-              <a:rPr lang="en-US" sz="470" b="1" dirty="0">
+              <a:rPr lang="en-US" sz="410" b="1" dirty="0">
                 <a:solidFill>
                   <a:srgbClr val="202124"/>
                 </a:solidFill>
@@ -24895,17 +24879,17 @@
               </a:rPr>
               <a:t>Live promotion:</a:t>
             </a:r>
-            <a:endParaRPr lang="en-US" sz="470" dirty="0"/>
+            <a:endParaRPr lang="en-US" sz="410" dirty="0"/>
           </a:p>
           <a:p>
             <a:pPr algn="ctr" indent="0" marL="0">
               <a:lnSpc>
-                <a:spcPct val="86000"/>
+                <a:spcPct val="102000"/>
               </a:lnSpc>
               <a:buNone/>
             </a:pPr>
             <a:r>
-              <a:rPr lang="en-US" sz="410" dirty="0">
+              <a:rPr lang="en-US" sz="375" dirty="0">
                 <a:solidFill>
                   <a:srgbClr val="202124"/>
                 </a:solidFill>
@@ -24915,24 +24899,24 @@
               </a:rPr>
               <a:t>Pool -&gt; PSC Spoke</a:t>
             </a:r>
-            <a:endParaRPr lang="en-US" sz="470" dirty="0"/>
-          </a:p>
-        </p:txBody>
-      </p:sp>
-      <p:sp>
-        <p:nvSpPr>
-          <p:cNvPr id="205" name="Shape 183"/>
-          <p:cNvSpPr/>
-          <p:nvPr/>
-        </p:nvSpPr>
-        <p:spPr>
-          <a:xfrm>
-            <a:off x="2822753" y="4833518"/>
-            <a:ext cx="522122" cy="178308"/>
+            <a:endParaRPr lang="en-US" sz="410" dirty="0"/>
+          </a:p>
+        </p:txBody>
+      </p:sp>
+      <p:sp>
+        <p:nvSpPr>
+          <p:cNvPr id="207" name="Shape 185"/>
+          <p:cNvSpPr/>
+          <p:nvPr/>
+        </p:nvSpPr>
+        <p:spPr>
+          <a:xfrm>
+            <a:off x="2856586" y="4817974"/>
+            <a:ext cx="452628" cy="208483"/>
           </a:xfrm>
           <a:prstGeom prst="roundRect">
             <a:avLst>
-              <a:gd name="adj" fmla="val 25641"/>
+              <a:gd name="adj" fmla="val 21930"/>
             </a:avLst>
           </a:prstGeom>
           <a:solidFill>
@@ -24948,35 +24932,33 @@
       </p:sp>
       <p:sp>
         <p:nvSpPr>
-          <p:cNvPr id="206" name="Text 184"/>
-          <p:cNvSpPr/>
-          <p:nvPr/>
-        </p:nvSpPr>
-        <p:spPr>
-          <a:xfrm>
-            <a:off x="2841041" y="4842662"/>
-            <a:ext cx="485546" cy="160020"/>
-          </a:xfrm>
-          <a:prstGeom prst="rect">
-            <a:avLst/>
-          </a:prstGeom>
-          <a:noFill/>
-          <a:ln/>
-        </p:spPr>
-        <p:txBody>
-          <a:bodyPr wrap="square" lIns="0" tIns="0" rIns="0" bIns="0" rtlCol="0" anchor="ctr">
-            <a:normAutofit/>
-          </a:bodyPr>
+          <p:cNvPr id="208" name="Text 186"/>
+          <p:cNvSpPr/>
+          <p:nvPr/>
+        </p:nvSpPr>
+        <p:spPr>
+          <a:xfrm>
+            <a:off x="2876702" y="4827118"/>
+            <a:ext cx="412394" cy="190195"/>
+          </a:xfrm>
+          <a:prstGeom prst="rect">
+            <a:avLst/>
+          </a:prstGeom>
+          <a:noFill/>
+          <a:ln/>
+        </p:spPr>
+        <p:txBody>
+          <a:bodyPr wrap="square" lIns="0" tIns="0" rIns="0" bIns="0" rtlCol="0" anchor="ctr"/>
           <a:lstStyle/>
           <a:p>
             <a:pPr algn="ctr" indent="0" marL="0">
               <a:lnSpc>
-                <a:spcPct val="86000"/>
+                <a:spcPct val="102000"/>
               </a:lnSpc>
               <a:buNone/>
             </a:pPr>
             <a:r>
-              <a:rPr lang="en-US" sz="470" b="1" dirty="0">
+              <a:rPr lang="en-US" sz="410" b="1" dirty="0">
                 <a:solidFill>
                   <a:srgbClr val="202124"/>
                 </a:solidFill>
@@ -24986,17 +24968,17 @@
               </a:rPr>
               <a:t>Shared Pool</a:t>
             </a:r>
-            <a:endParaRPr lang="en-US" sz="470" dirty="0"/>
+            <a:endParaRPr lang="en-US" sz="410" dirty="0"/>
           </a:p>
           <a:p>
             <a:pPr algn="ctr" indent="0" marL="0">
               <a:lnSpc>
-                <a:spcPct val="86000"/>
+                <a:spcPct val="102000"/>
               </a:lnSpc>
               <a:buNone/>
             </a:pPr>
             <a:r>
-              <a:rPr lang="en-US" sz="410" dirty="0">
+              <a:rPr lang="en-US" sz="375" dirty="0">
                 <a:solidFill>
                   <a:srgbClr val="202124"/>
                 </a:solidFill>
@@ -25006,24 +24988,24 @@
               </a:rPr>
               <a:t>RAG</a:t>
             </a:r>
-            <a:endParaRPr lang="en-US" sz="470" dirty="0"/>
-          </a:p>
-        </p:txBody>
-      </p:sp>
-      <p:sp>
-        <p:nvSpPr>
-          <p:cNvPr id="207" name="Shape 185"/>
-          <p:cNvSpPr/>
-          <p:nvPr/>
-        </p:nvSpPr>
-        <p:spPr>
-          <a:xfrm>
-            <a:off x="2728570" y="5468112"/>
-            <a:ext cx="709574" cy="178308"/>
+            <a:endParaRPr lang="en-US" sz="410" dirty="0"/>
+          </a:p>
+        </p:txBody>
+      </p:sp>
+      <p:sp>
+        <p:nvSpPr>
+          <p:cNvPr id="209" name="Shape 187"/>
+          <p:cNvSpPr/>
+          <p:nvPr/>
+        </p:nvSpPr>
+        <p:spPr>
+          <a:xfrm>
+            <a:off x="2788920" y="5452567"/>
+            <a:ext cx="589788" cy="208483"/>
           </a:xfrm>
           <a:prstGeom prst="roundRect">
             <a:avLst>
-              <a:gd name="adj" fmla="val 25641"/>
+              <a:gd name="adj" fmla="val 21930"/>
             </a:avLst>
           </a:prstGeom>
           <a:solidFill>
@@ -25039,35 +25021,33 @@
       </p:sp>
       <p:sp>
         <p:nvSpPr>
-          <p:cNvPr id="208" name="Text 186"/>
-          <p:cNvSpPr/>
-          <p:nvPr/>
-        </p:nvSpPr>
-        <p:spPr>
-          <a:xfrm>
-            <a:off x="2746858" y="5477256"/>
-            <a:ext cx="672998" cy="160020"/>
-          </a:xfrm>
-          <a:prstGeom prst="rect">
-            <a:avLst/>
-          </a:prstGeom>
-          <a:noFill/>
-          <a:ln/>
-        </p:spPr>
-        <p:txBody>
-          <a:bodyPr wrap="square" lIns="0" tIns="0" rIns="0" bIns="0" rtlCol="0" anchor="ctr">
-            <a:normAutofit/>
-          </a:bodyPr>
+          <p:cNvPr id="210" name="Text 188"/>
+          <p:cNvSpPr/>
+          <p:nvPr/>
+        </p:nvSpPr>
+        <p:spPr>
+          <a:xfrm>
+            <a:off x="2809037" y="5461711"/>
+            <a:ext cx="549554" cy="190195"/>
+          </a:xfrm>
+          <a:prstGeom prst="rect">
+            <a:avLst/>
+          </a:prstGeom>
+          <a:noFill/>
+          <a:ln/>
+        </p:spPr>
+        <p:txBody>
+          <a:bodyPr wrap="square" lIns="0" tIns="0" rIns="0" bIns="0" rtlCol="0" anchor="ctr"/>
           <a:lstStyle/>
           <a:p>
             <a:pPr algn="ctr" indent="0" marL="0">
               <a:lnSpc>
-                <a:spcPct val="86000"/>
+                <a:spcPct val="102000"/>
               </a:lnSpc>
               <a:buNone/>
             </a:pPr>
             <a:r>
-              <a:rPr lang="en-US" sz="470" b="1" dirty="0">
+              <a:rPr lang="en-US" sz="410" b="1" dirty="0">
                 <a:solidFill>
                   <a:srgbClr val="202124"/>
                 </a:solidFill>
@@ -25077,17 +25057,17 @@
               </a:rPr>
               <a:t>Streams State to</a:t>
             </a:r>
-            <a:endParaRPr lang="en-US" sz="470" dirty="0"/>
+            <a:endParaRPr lang="en-US" sz="410" dirty="0"/>
           </a:p>
           <a:p>
             <a:pPr algn="ctr" indent="0" marL="0">
               <a:lnSpc>
-                <a:spcPct val="86000"/>
+                <a:spcPct val="102000"/>
               </a:lnSpc>
               <a:buNone/>
             </a:pPr>
             <a:r>
-              <a:rPr lang="en-US" sz="410" dirty="0">
+              <a:rPr lang="en-US" sz="375" dirty="0">
                 <a:solidFill>
                   <a:srgbClr val="202124"/>
                 </a:solidFill>
@@ -25097,24 +25077,24 @@
               </a:rPr>
               <a:t>PSC Spoke</a:t>
             </a:r>
-            <a:endParaRPr lang="en-US" sz="470" dirty="0"/>
-          </a:p>
-        </p:txBody>
-      </p:sp>
-      <p:sp>
-        <p:nvSpPr>
-          <p:cNvPr id="209" name="Shape 187"/>
-          <p:cNvSpPr/>
-          <p:nvPr/>
-        </p:nvSpPr>
-        <p:spPr>
-          <a:xfrm>
-            <a:off x="5130698" y="4833518"/>
-            <a:ext cx="634594" cy="178308"/>
+            <a:endParaRPr lang="en-US" sz="410" dirty="0"/>
+          </a:p>
+        </p:txBody>
+      </p:sp>
+      <p:sp>
+        <p:nvSpPr>
+          <p:cNvPr id="211" name="Shape 189"/>
+          <p:cNvSpPr/>
+          <p:nvPr/>
+        </p:nvSpPr>
+        <p:spPr>
+          <a:xfrm>
+            <a:off x="5180076" y="4817974"/>
+            <a:ext cx="534924" cy="208483"/>
           </a:xfrm>
           <a:prstGeom prst="roundRect">
             <a:avLst>
-              <a:gd name="adj" fmla="val 25641"/>
+              <a:gd name="adj" fmla="val 21930"/>
             </a:avLst>
           </a:prstGeom>
           <a:solidFill>
@@ -25130,35 +25110,33 @@
       </p:sp>
       <p:sp>
         <p:nvSpPr>
-          <p:cNvPr id="210" name="Text 188"/>
-          <p:cNvSpPr/>
-          <p:nvPr/>
-        </p:nvSpPr>
-        <p:spPr>
-          <a:xfrm>
-            <a:off x="5148986" y="4842662"/>
-            <a:ext cx="598018" cy="160020"/>
-          </a:xfrm>
-          <a:prstGeom prst="rect">
-            <a:avLst/>
-          </a:prstGeom>
-          <a:noFill/>
-          <a:ln/>
-        </p:spPr>
-        <p:txBody>
-          <a:bodyPr wrap="square" lIns="0" tIns="0" rIns="0" bIns="0" rtlCol="0" anchor="ctr">
-            <a:normAutofit/>
-          </a:bodyPr>
+          <p:cNvPr id="212" name="Text 190"/>
+          <p:cNvSpPr/>
+          <p:nvPr/>
+        </p:nvSpPr>
+        <p:spPr>
+          <a:xfrm>
+            <a:off x="5200193" y="4827118"/>
+            <a:ext cx="494690" cy="190195"/>
+          </a:xfrm>
+          <a:prstGeom prst="rect">
+            <a:avLst/>
+          </a:prstGeom>
+          <a:noFill/>
+          <a:ln/>
+        </p:spPr>
+        <p:txBody>
+          <a:bodyPr wrap="square" lIns="0" tIns="0" rIns="0" bIns="0" rtlCol="0" anchor="ctr"/>
           <a:lstStyle/>
           <a:p>
             <a:pPr algn="ctr" indent="0" marL="0">
               <a:lnSpc>
-                <a:spcPct val="86000"/>
+                <a:spcPct val="102000"/>
               </a:lnSpc>
               <a:buNone/>
             </a:pPr>
             <a:r>
-              <a:rPr lang="en-US" sz="470" b="1" dirty="0">
+              <a:rPr lang="en-US" sz="410" b="1" dirty="0">
                 <a:solidFill>
                   <a:srgbClr val="202124"/>
                 </a:solidFill>
@@ -25168,17 +25146,17 @@
               </a:rPr>
               <a:t>Unidirectional</a:t>
             </a:r>
-            <a:endParaRPr lang="en-US" sz="470" dirty="0"/>
+            <a:endParaRPr lang="en-US" sz="410" dirty="0"/>
           </a:p>
           <a:p>
             <a:pPr algn="ctr" indent="0" marL="0">
               <a:lnSpc>
-                <a:spcPct val="86000"/>
+                <a:spcPct val="102000"/>
               </a:lnSpc>
               <a:buNone/>
             </a:pPr>
             <a:r>
-              <a:rPr lang="en-US" sz="410" dirty="0">
+              <a:rPr lang="en-US" sz="375" dirty="0">
                 <a:solidFill>
                   <a:srgbClr val="202124"/>
                 </a:solidFill>
@@ -25188,24 +25166,24 @@
               </a:rPr>
               <a:t>PSC Bridge</a:t>
             </a:r>
-            <a:endParaRPr lang="en-US" sz="470" dirty="0"/>
-          </a:p>
-        </p:txBody>
-      </p:sp>
-      <p:sp>
-        <p:nvSpPr>
-          <p:cNvPr id="211" name="Shape 189"/>
-          <p:cNvSpPr/>
-          <p:nvPr/>
-        </p:nvSpPr>
-        <p:spPr>
-          <a:xfrm>
-            <a:off x="5130698" y="5468112"/>
-            <a:ext cx="634594" cy="178308"/>
+            <a:endParaRPr lang="en-US" sz="410" dirty="0"/>
+          </a:p>
+        </p:txBody>
+      </p:sp>
+      <p:sp>
+        <p:nvSpPr>
+          <p:cNvPr id="213" name="Shape 191"/>
+          <p:cNvSpPr/>
+          <p:nvPr/>
+        </p:nvSpPr>
+        <p:spPr>
+          <a:xfrm>
+            <a:off x="5180076" y="5452567"/>
+            <a:ext cx="534924" cy="208483"/>
           </a:xfrm>
           <a:prstGeom prst="roundRect">
             <a:avLst>
-              <a:gd name="adj" fmla="val 25641"/>
+              <a:gd name="adj" fmla="val 21930"/>
             </a:avLst>
           </a:prstGeom>
           <a:solidFill>
@@ -25221,35 +25199,33 @@
       </p:sp>
       <p:sp>
         <p:nvSpPr>
-          <p:cNvPr id="212" name="Text 190"/>
-          <p:cNvSpPr/>
-          <p:nvPr/>
-        </p:nvSpPr>
-        <p:spPr>
-          <a:xfrm>
-            <a:off x="5148986" y="5477256"/>
-            <a:ext cx="598018" cy="160020"/>
-          </a:xfrm>
-          <a:prstGeom prst="rect">
-            <a:avLst/>
-          </a:prstGeom>
-          <a:noFill/>
-          <a:ln/>
-        </p:spPr>
-        <p:txBody>
-          <a:bodyPr wrap="square" lIns="0" tIns="0" rIns="0" bIns="0" rtlCol="0" anchor="ctr">
-            <a:normAutofit/>
-          </a:bodyPr>
+          <p:cNvPr id="214" name="Text 192"/>
+          <p:cNvSpPr/>
+          <p:nvPr/>
+        </p:nvSpPr>
+        <p:spPr>
+          <a:xfrm>
+            <a:off x="5200193" y="5461711"/>
+            <a:ext cx="494690" cy="190195"/>
+          </a:xfrm>
+          <a:prstGeom prst="rect">
+            <a:avLst/>
+          </a:prstGeom>
+          <a:noFill/>
+          <a:ln/>
+        </p:spPr>
+        <p:txBody>
+          <a:bodyPr wrap="square" lIns="0" tIns="0" rIns="0" bIns="0" rtlCol="0" anchor="ctr"/>
           <a:lstStyle/>
           <a:p>
             <a:pPr algn="ctr" indent="0" marL="0">
               <a:lnSpc>
-                <a:spcPct val="86000"/>
+                <a:spcPct val="102000"/>
               </a:lnSpc>
               <a:buNone/>
             </a:pPr>
             <a:r>
-              <a:rPr lang="en-US" sz="470" b="1" dirty="0">
+              <a:rPr lang="en-US" sz="410" b="1" dirty="0">
                 <a:solidFill>
                   <a:srgbClr val="202124"/>
                 </a:solidFill>
@@ -25259,17 +25235,17 @@
               </a:rPr>
               <a:t>CMEK-Encrypted</a:t>
             </a:r>
-            <a:endParaRPr lang="en-US" sz="470" dirty="0"/>
+            <a:endParaRPr lang="en-US" sz="410" dirty="0"/>
           </a:p>
           <a:p>
             <a:pPr algn="ctr" indent="0" marL="0">
               <a:lnSpc>
-                <a:spcPct val="86000"/>
+                <a:spcPct val="102000"/>
               </a:lnSpc>
               <a:buNone/>
             </a:pPr>
             <a:r>
-              <a:rPr lang="en-US" sz="410" dirty="0">
+              <a:rPr lang="en-US" sz="375" dirty="0">
                 <a:solidFill>
                   <a:srgbClr val="202124"/>
                 </a:solidFill>
@@ -25279,24 +25255,24 @@
               </a:rPr>
               <a:t>Spoke Storage</a:t>
             </a:r>
-            <a:endParaRPr lang="en-US" sz="470" dirty="0"/>
-          </a:p>
-        </p:txBody>
-      </p:sp>
-      <p:sp>
-        <p:nvSpPr>
-          <p:cNvPr id="213" name="Shape 191"/>
-          <p:cNvSpPr/>
-          <p:nvPr/>
-        </p:nvSpPr>
-        <p:spPr>
-          <a:xfrm>
-            <a:off x="1853489" y="5618988"/>
-            <a:ext cx="493776" cy="178308"/>
+            <a:endParaRPr lang="en-US" sz="410" dirty="0"/>
+          </a:p>
+        </p:txBody>
+      </p:sp>
+      <p:sp>
+        <p:nvSpPr>
+          <p:cNvPr id="215" name="Shape 193"/>
+          <p:cNvSpPr/>
+          <p:nvPr/>
+        </p:nvSpPr>
+        <p:spPr>
+          <a:xfrm>
+            <a:off x="1757477" y="5604358"/>
+            <a:ext cx="397764" cy="208483"/>
           </a:xfrm>
           <a:prstGeom prst="roundRect">
             <a:avLst>
-              <a:gd name="adj" fmla="val 25641"/>
+              <a:gd name="adj" fmla="val 21930"/>
             </a:avLst>
           </a:prstGeom>
           <a:solidFill>
@@ -25312,35 +25288,33 @@
       </p:sp>
       <p:sp>
         <p:nvSpPr>
-          <p:cNvPr id="214" name="Text 192"/>
-          <p:cNvSpPr/>
-          <p:nvPr/>
-        </p:nvSpPr>
-        <p:spPr>
-          <a:xfrm>
-            <a:off x="1871777" y="5628132"/>
-            <a:ext cx="457200" cy="160020"/>
-          </a:xfrm>
-          <a:prstGeom prst="rect">
-            <a:avLst/>
-          </a:prstGeom>
-          <a:noFill/>
-          <a:ln/>
-        </p:spPr>
-        <p:txBody>
-          <a:bodyPr wrap="square" lIns="0" tIns="0" rIns="0" bIns="0" rtlCol="0" anchor="ctr">
-            <a:normAutofit/>
-          </a:bodyPr>
+          <p:cNvPr id="216" name="Text 194"/>
+          <p:cNvSpPr/>
+          <p:nvPr/>
+        </p:nvSpPr>
+        <p:spPr>
+          <a:xfrm>
+            <a:off x="1777594" y="5613502"/>
+            <a:ext cx="357530" cy="190195"/>
+          </a:xfrm>
+          <a:prstGeom prst="rect">
+            <a:avLst/>
+          </a:prstGeom>
+          <a:noFill/>
+          <a:ln/>
+        </p:spPr>
+        <p:txBody>
+          <a:bodyPr wrap="square" lIns="0" tIns="0" rIns="0" bIns="0" rtlCol="0" anchor="ctr"/>
           <a:lstStyle/>
           <a:p>
             <a:pPr algn="ctr" indent="0" marL="0">
               <a:lnSpc>
-                <a:spcPct val="86000"/>
+                <a:spcPct val="102000"/>
               </a:lnSpc>
               <a:buNone/>
             </a:pPr>
             <a:r>
-              <a:rPr lang="en-US" sz="470" b="1" dirty="0">
+              <a:rPr lang="en-US" sz="410" b="1" dirty="0">
                 <a:solidFill>
                   <a:srgbClr val="202124"/>
                 </a:solidFill>
@@ -25350,17 +25324,17 @@
               </a:rPr>
               <a:t>Pooled</a:t>
             </a:r>
-            <a:endParaRPr lang="en-US" sz="470" dirty="0"/>
+            <a:endParaRPr lang="en-US" sz="410" dirty="0"/>
           </a:p>
           <a:p>
             <a:pPr algn="ctr" indent="0" marL="0">
               <a:lnSpc>
-                <a:spcPct val="86000"/>
+                <a:spcPct val="102000"/>
               </a:lnSpc>
               <a:buNone/>
             </a:pPr>
             <a:r>
-              <a:rPr lang="en-US" sz="410" dirty="0">
+              <a:rPr lang="en-US" sz="375" dirty="0">
                 <a:solidFill>
                   <a:srgbClr val="202124"/>
                 </a:solidFill>
@@ -25370,24 +25344,24 @@
               </a:rPr>
               <a:t>inference</a:t>
             </a:r>
-            <a:endParaRPr lang="en-US" sz="470" dirty="0"/>
-          </a:p>
-        </p:txBody>
-      </p:sp>
-      <p:sp>
-        <p:nvSpPr>
-          <p:cNvPr id="215" name="Shape 193"/>
-          <p:cNvSpPr/>
-          <p:nvPr/>
-        </p:nvSpPr>
-        <p:spPr>
-          <a:xfrm>
-            <a:off x="3905402" y="3368650"/>
-            <a:ext cx="738835" cy="178308"/>
+            <a:endParaRPr lang="en-US" sz="410" dirty="0"/>
+          </a:p>
+        </p:txBody>
+      </p:sp>
+      <p:sp>
+        <p:nvSpPr>
+          <p:cNvPr id="217" name="Shape 195"/>
+          <p:cNvSpPr/>
+          <p:nvPr/>
+        </p:nvSpPr>
+        <p:spPr>
+          <a:xfrm>
+            <a:off x="3905402" y="3354019"/>
+            <a:ext cx="699516" cy="208483"/>
           </a:xfrm>
           <a:prstGeom prst="roundRect">
             <a:avLst>
-              <a:gd name="adj" fmla="val 25641"/>
+              <a:gd name="adj" fmla="val 21930"/>
             </a:avLst>
           </a:prstGeom>
           <a:solidFill>
@@ -25403,35 +25377,33 @@
       </p:sp>
       <p:sp>
         <p:nvSpPr>
-          <p:cNvPr id="216" name="Text 194"/>
-          <p:cNvSpPr/>
-          <p:nvPr/>
-        </p:nvSpPr>
-        <p:spPr>
-          <a:xfrm>
-            <a:off x="3923690" y="3377794"/>
-            <a:ext cx="702259" cy="160020"/>
-          </a:xfrm>
-          <a:prstGeom prst="rect">
-            <a:avLst/>
-          </a:prstGeom>
-          <a:noFill/>
-          <a:ln/>
-        </p:spPr>
-        <p:txBody>
-          <a:bodyPr wrap="square" lIns="0" tIns="0" rIns="0" bIns="0" rtlCol="0" anchor="ctr">
-            <a:normAutofit/>
-          </a:bodyPr>
+          <p:cNvPr id="218" name="Text 196"/>
+          <p:cNvSpPr/>
+          <p:nvPr/>
+        </p:nvSpPr>
+        <p:spPr>
+          <a:xfrm>
+            <a:off x="3925519" y="3363163"/>
+            <a:ext cx="659282" cy="190195"/>
+          </a:xfrm>
+          <a:prstGeom prst="rect">
+            <a:avLst/>
+          </a:prstGeom>
+          <a:noFill/>
+          <a:ln/>
+        </p:spPr>
+        <p:txBody>
+          <a:bodyPr wrap="square" lIns="0" tIns="0" rIns="0" bIns="0" rtlCol="0" anchor="ctr"/>
           <a:lstStyle/>
           <a:p>
             <a:pPr algn="ctr" indent="0" marL="0">
               <a:lnSpc>
-                <a:spcPct val="86000"/>
+                <a:spcPct val="102000"/>
               </a:lnSpc>
               <a:buNone/>
             </a:pPr>
             <a:r>
-              <a:rPr lang="en-US" sz="470" b="1" dirty="0">
+              <a:rPr lang="en-US" sz="410" b="1" dirty="0">
                 <a:solidFill>
                   <a:srgbClr val="202124"/>
                 </a:solidFill>
@@ -25441,17 +25413,17 @@
               </a:rPr>
               <a:t>Seamless response</a:t>
             </a:r>
-            <a:endParaRPr lang="en-US" sz="470" dirty="0"/>
+            <a:endParaRPr lang="en-US" sz="410" dirty="0"/>
           </a:p>
           <a:p>
             <a:pPr algn="ctr" indent="0" marL="0">
               <a:lnSpc>
-                <a:spcPct val="86000"/>
+                <a:spcPct val="102000"/>
               </a:lnSpc>
               <a:buNone/>
             </a:pPr>
             <a:r>
-              <a:rPr lang="en-US" sz="410" dirty="0">
+              <a:rPr lang="en-US" sz="375" dirty="0">
                 <a:solidFill>
                   <a:srgbClr val="202124"/>
                 </a:solidFill>
@@ -25461,24 +25433,24 @@
               </a:rPr>
               <a:t>(0 dropped sessions)</a:t>
             </a:r>
-            <a:endParaRPr lang="en-US" sz="470" dirty="0"/>
-          </a:p>
-        </p:txBody>
-      </p:sp>
-      <p:sp>
-        <p:nvSpPr>
-          <p:cNvPr id="217" name="Shape 195"/>
-          <p:cNvSpPr/>
-          <p:nvPr/>
-        </p:nvSpPr>
-        <p:spPr>
-          <a:xfrm>
-            <a:off x="2983687" y="3368650"/>
-            <a:ext cx="669341" cy="178308"/>
+            <a:endParaRPr lang="en-US" sz="410" dirty="0"/>
+          </a:p>
+        </p:txBody>
+      </p:sp>
+      <p:sp>
+        <p:nvSpPr>
+          <p:cNvPr id="219" name="Shape 197"/>
+          <p:cNvSpPr/>
+          <p:nvPr/>
+        </p:nvSpPr>
+        <p:spPr>
+          <a:xfrm>
+            <a:off x="2983687" y="3354019"/>
+            <a:ext cx="681228" cy="208483"/>
           </a:xfrm>
           <a:prstGeom prst="roundRect">
             <a:avLst>
-              <a:gd name="adj" fmla="val 25641"/>
+              <a:gd name="adj" fmla="val 21930"/>
             </a:avLst>
           </a:prstGeom>
           <a:solidFill>
@@ -25494,35 +25466,33 @@
       </p:sp>
       <p:sp>
         <p:nvSpPr>
-          <p:cNvPr id="218" name="Text 196"/>
-          <p:cNvSpPr/>
-          <p:nvPr/>
-        </p:nvSpPr>
-        <p:spPr>
-          <a:xfrm>
-            <a:off x="3001975" y="3377794"/>
-            <a:ext cx="632765" cy="160020"/>
-          </a:xfrm>
-          <a:prstGeom prst="rect">
-            <a:avLst/>
-          </a:prstGeom>
-          <a:noFill/>
-          <a:ln/>
-        </p:spPr>
-        <p:txBody>
-          <a:bodyPr wrap="square" lIns="0" tIns="0" rIns="0" bIns="0" rtlCol="0" anchor="ctr">
-            <a:normAutofit/>
-          </a:bodyPr>
+          <p:cNvPr id="220" name="Text 198"/>
+          <p:cNvSpPr/>
+          <p:nvPr/>
+        </p:nvSpPr>
+        <p:spPr>
+          <a:xfrm>
+            <a:off x="3003804" y="3363163"/>
+            <a:ext cx="640994" cy="190195"/>
+          </a:xfrm>
+          <a:prstGeom prst="rect">
+            <a:avLst/>
+          </a:prstGeom>
+          <a:noFill/>
+          <a:ln/>
+        </p:spPr>
+        <p:txBody>
+          <a:bodyPr wrap="square" lIns="0" tIns="0" rIns="0" bIns="0" rtlCol="0" anchor="ctr"/>
           <a:lstStyle/>
           <a:p>
             <a:pPr algn="ctr" indent="0" marL="0">
               <a:lnSpc>
-                <a:spcPct val="86000"/>
+                <a:spcPct val="102000"/>
               </a:lnSpc>
               <a:buNone/>
             </a:pPr>
             <a:r>
-              <a:rPr lang="en-US" sz="470" b="1" dirty="0">
+              <a:rPr lang="en-US" sz="410" b="1" dirty="0">
                 <a:solidFill>
                   <a:srgbClr val="202124"/>
                 </a:solidFill>
@@ -25532,17 +25502,17 @@
               </a:rPr>
               <a:t>Route Standard to Pool</a:t>
             </a:r>
-            <a:endParaRPr lang="en-US" sz="470" dirty="0"/>
+            <a:endParaRPr lang="en-US" sz="410" dirty="0"/>
           </a:p>
           <a:p>
             <a:pPr algn="ctr" indent="0" marL="0">
               <a:lnSpc>
-                <a:spcPct val="86000"/>
+                <a:spcPct val="102000"/>
               </a:lnSpc>
               <a:buNone/>
             </a:pPr>
             <a:r>
-              <a:rPr lang="en-US" sz="410" dirty="0">
+              <a:rPr lang="en-US" sz="375" dirty="0">
                 <a:solidFill>
                   <a:srgbClr val="202124"/>
                 </a:solidFill>
@@ -25552,24 +25522,24 @@
               </a:rPr>
               <a:t>or Enterprise via PSC</a:t>
             </a:r>
-            <a:endParaRPr lang="en-US" sz="470" dirty="0"/>
-          </a:p>
-        </p:txBody>
-      </p:sp>
-      <p:sp>
-        <p:nvSpPr>
-          <p:cNvPr id="219" name="Shape 197"/>
-          <p:cNvSpPr/>
-          <p:nvPr/>
-        </p:nvSpPr>
-        <p:spPr>
-          <a:xfrm>
-            <a:off x="2521915" y="2885846"/>
-            <a:ext cx="559613" cy="178308"/>
+            <a:endParaRPr lang="en-US" sz="410" dirty="0"/>
+          </a:p>
+        </p:txBody>
+      </p:sp>
+      <p:sp>
+        <p:nvSpPr>
+          <p:cNvPr id="221" name="Shape 199"/>
+          <p:cNvSpPr/>
+          <p:nvPr/>
+        </p:nvSpPr>
+        <p:spPr>
+          <a:xfrm>
+            <a:off x="2561234" y="2871216"/>
+            <a:ext cx="480060" cy="208483"/>
           </a:xfrm>
           <a:prstGeom prst="roundRect">
             <a:avLst>
-              <a:gd name="adj" fmla="val 25641"/>
+              <a:gd name="adj" fmla="val 21930"/>
             </a:avLst>
           </a:prstGeom>
           <a:solidFill>
@@ -25585,35 +25555,33 @@
       </p:sp>
       <p:sp>
         <p:nvSpPr>
-          <p:cNvPr id="220" name="Text 198"/>
-          <p:cNvSpPr/>
-          <p:nvPr/>
-        </p:nvSpPr>
-        <p:spPr>
-          <a:xfrm>
-            <a:off x="2540203" y="2894990"/>
-            <a:ext cx="523037" cy="160020"/>
-          </a:xfrm>
-          <a:prstGeom prst="rect">
-            <a:avLst/>
-          </a:prstGeom>
-          <a:noFill/>
-          <a:ln/>
-        </p:spPr>
-        <p:txBody>
-          <a:bodyPr wrap="square" lIns="0" tIns="0" rIns="0" bIns="0" rtlCol="0" anchor="ctr">
-            <a:normAutofit/>
-          </a:bodyPr>
+          <p:cNvPr id="222" name="Text 200"/>
+          <p:cNvSpPr/>
+          <p:nvPr/>
+        </p:nvSpPr>
+        <p:spPr>
+          <a:xfrm>
+            <a:off x="2581351" y="2880360"/>
+            <a:ext cx="439826" cy="190195"/>
+          </a:xfrm>
+          <a:prstGeom prst="rect">
+            <a:avLst/>
+          </a:prstGeom>
+          <a:noFill/>
+          <a:ln/>
+        </p:spPr>
+        <p:txBody>
+          <a:bodyPr wrap="square" lIns="0" tIns="0" rIns="0" bIns="0" rtlCol="0" anchor="ctr"/>
           <a:lstStyle/>
           <a:p>
             <a:pPr algn="ctr" indent="0" marL="0">
               <a:lnSpc>
-                <a:spcPct val="86000"/>
+                <a:spcPct val="102000"/>
               </a:lnSpc>
               <a:buNone/>
             </a:pPr>
             <a:r>
-              <a:rPr lang="en-US" sz="470" b="1" dirty="0">
+              <a:rPr lang="en-US" sz="410" b="1" dirty="0">
                 <a:solidFill>
                   <a:srgbClr val="202124"/>
                 </a:solidFill>
@@ -25623,17 +25591,17 @@
               </a:rPr>
               <a:t>Atomic route</a:t>
             </a:r>
-            <a:endParaRPr lang="en-US" sz="470" dirty="0"/>
+            <a:endParaRPr lang="en-US" sz="410" dirty="0"/>
           </a:p>
           <a:p>
             <a:pPr algn="ctr" indent="0" marL="0">
               <a:lnSpc>
-                <a:spcPct val="86000"/>
+                <a:spcPct val="102000"/>
               </a:lnSpc>
               <a:buNone/>
             </a:pPr>
             <a:r>
-              <a:rPr lang="en-US" sz="410" dirty="0">
+              <a:rPr lang="en-US" sz="375" dirty="0">
                 <a:solidFill>
                   <a:srgbClr val="202124"/>
                 </a:solidFill>
@@ -25643,24 +25611,24 @@
               </a:rPr>
               <a:t>lookup</a:t>
             </a:r>
-            <a:endParaRPr lang="en-US" sz="470" dirty="0"/>
-          </a:p>
-        </p:txBody>
-      </p:sp>
-      <p:sp>
-        <p:nvSpPr>
-          <p:cNvPr id="221" name="Shape 199"/>
-          <p:cNvSpPr/>
-          <p:nvPr/>
-        </p:nvSpPr>
-        <p:spPr>
-          <a:xfrm>
-            <a:off x="1757477" y="4608576"/>
-            <a:ext cx="686714" cy="132588"/>
+            <a:endParaRPr lang="en-US" sz="410" dirty="0"/>
+          </a:p>
+        </p:txBody>
+      </p:sp>
+      <p:sp>
+        <p:nvSpPr>
+          <p:cNvPr id="223" name="Shape 201"/>
+          <p:cNvSpPr/>
+          <p:nvPr/>
+        </p:nvSpPr>
+        <p:spPr>
+          <a:xfrm>
+            <a:off x="1757477" y="4605833"/>
+            <a:ext cx="589788" cy="138989"/>
           </a:xfrm>
           <a:prstGeom prst="roundRect">
             <a:avLst>
-              <a:gd name="adj" fmla="val 34483"/>
+              <a:gd name="adj" fmla="val 32895"/>
             </a:avLst>
           </a:prstGeom>
           <a:solidFill>
@@ -25676,35 +25644,33 @@
       </p:sp>
       <p:sp>
         <p:nvSpPr>
-          <p:cNvPr id="222" name="Text 200"/>
-          <p:cNvSpPr/>
-          <p:nvPr/>
-        </p:nvSpPr>
-        <p:spPr>
-          <a:xfrm>
-            <a:off x="1775765" y="4617720"/>
-            <a:ext cx="650138" cy="114300"/>
-          </a:xfrm>
-          <a:prstGeom prst="rect">
-            <a:avLst/>
-          </a:prstGeom>
-          <a:noFill/>
-          <a:ln/>
-        </p:spPr>
-        <p:txBody>
-          <a:bodyPr wrap="square" lIns="0" tIns="0" rIns="0" bIns="0" rtlCol="0" anchor="ctr">
-            <a:normAutofit/>
-          </a:bodyPr>
+          <p:cNvPr id="224" name="Text 202"/>
+          <p:cNvSpPr/>
+          <p:nvPr/>
+        </p:nvSpPr>
+        <p:spPr>
+          <a:xfrm>
+            <a:off x="1777594" y="4614977"/>
+            <a:ext cx="549554" cy="120701"/>
+          </a:xfrm>
+          <a:prstGeom prst="rect">
+            <a:avLst/>
+          </a:prstGeom>
+          <a:noFill/>
+          <a:ln/>
+        </p:spPr>
+        <p:txBody>
+          <a:bodyPr wrap="square" lIns="0" tIns="0" rIns="0" bIns="0" rtlCol="0" anchor="ctr"/>
           <a:lstStyle/>
           <a:p>
             <a:pPr algn="ctr" indent="0" marL="0">
               <a:lnSpc>
-                <a:spcPct val="86000"/>
+                <a:spcPct val="102000"/>
               </a:lnSpc>
               <a:buNone/>
             </a:pPr>
             <a:r>
-              <a:rPr lang="en-US" sz="470" b="1" dirty="0">
+              <a:rPr lang="en-US" sz="410" b="1" dirty="0">
                 <a:solidFill>
                   <a:srgbClr val="202124"/>
                 </a:solidFill>
@@ -25714,24 +25680,24 @@
               </a:rPr>
               <a:t>Sanitize request</a:t>
             </a:r>
-            <a:endParaRPr lang="en-US" sz="470" dirty="0"/>
-          </a:p>
-        </p:txBody>
-      </p:sp>
-      <p:sp>
-        <p:nvSpPr>
-          <p:cNvPr id="223" name="Shape 201"/>
-          <p:cNvSpPr/>
-          <p:nvPr/>
-        </p:nvSpPr>
-        <p:spPr>
-          <a:xfrm>
-            <a:off x="1757477" y="4817059"/>
-            <a:ext cx="686714" cy="132588"/>
+            <a:endParaRPr lang="en-US" sz="410" dirty="0"/>
+          </a:p>
+        </p:txBody>
+      </p:sp>
+      <p:sp>
+        <p:nvSpPr>
+          <p:cNvPr id="225" name="Shape 203"/>
+          <p:cNvSpPr/>
+          <p:nvPr/>
+        </p:nvSpPr>
+        <p:spPr>
+          <a:xfrm>
+            <a:off x="1757477" y="4814316"/>
+            <a:ext cx="617220" cy="138989"/>
           </a:xfrm>
           <a:prstGeom prst="roundRect">
             <a:avLst>
-              <a:gd name="adj" fmla="val 34483"/>
+              <a:gd name="adj" fmla="val 32895"/>
             </a:avLst>
           </a:prstGeom>
           <a:solidFill>
@@ -25747,35 +25713,33 @@
       </p:sp>
       <p:sp>
         <p:nvSpPr>
-          <p:cNvPr id="224" name="Text 202"/>
-          <p:cNvSpPr/>
-          <p:nvPr/>
-        </p:nvSpPr>
-        <p:spPr>
-          <a:xfrm>
-            <a:off x="1775765" y="4826203"/>
-            <a:ext cx="650138" cy="114300"/>
-          </a:xfrm>
-          <a:prstGeom prst="rect">
-            <a:avLst/>
-          </a:prstGeom>
-          <a:noFill/>
-          <a:ln/>
-        </p:spPr>
-        <p:txBody>
-          <a:bodyPr wrap="square" lIns="0" tIns="0" rIns="0" bIns="0" rtlCol="0" anchor="ctr">
-            <a:normAutofit/>
-          </a:bodyPr>
+          <p:cNvPr id="226" name="Text 204"/>
+          <p:cNvSpPr/>
+          <p:nvPr/>
+        </p:nvSpPr>
+        <p:spPr>
+          <a:xfrm>
+            <a:off x="1777594" y="4823460"/>
+            <a:ext cx="576986" cy="120701"/>
+          </a:xfrm>
+          <a:prstGeom prst="rect">
+            <a:avLst/>
+          </a:prstGeom>
+          <a:noFill/>
+          <a:ln/>
+        </p:spPr>
+        <p:txBody>
+          <a:bodyPr wrap="square" lIns="0" tIns="0" rIns="0" bIns="0" rtlCol="0" anchor="ctr"/>
           <a:lstStyle/>
           <a:p>
             <a:pPr algn="ctr" indent="0" marL="0">
               <a:lnSpc>
-                <a:spcPct val="86000"/>
+                <a:spcPct val="102000"/>
               </a:lnSpc>
               <a:buNone/>
             </a:pPr>
             <a:r>
-              <a:rPr lang="en-US" sz="470" b="1" dirty="0">
+              <a:rPr lang="en-US" sz="410" b="1" dirty="0">
                 <a:solidFill>
                   <a:srgbClr val="202124"/>
                 </a:solidFill>
@@ -25785,24 +25749,24 @@
               </a:rPr>
               <a:t>Sanitize response</a:t>
             </a:r>
-            <a:endParaRPr lang="en-US" sz="470" dirty="0"/>
-          </a:p>
-        </p:txBody>
-      </p:sp>
-      <p:sp>
-        <p:nvSpPr>
-          <p:cNvPr id="225" name="Shape 203"/>
-          <p:cNvSpPr/>
-          <p:nvPr/>
-        </p:nvSpPr>
-        <p:spPr>
-          <a:xfrm>
-            <a:off x="2436876" y="2094890"/>
-            <a:ext cx="493776" cy="178308"/>
+            <a:endParaRPr lang="en-US" sz="410" dirty="0"/>
+          </a:p>
+        </p:txBody>
+      </p:sp>
+      <p:sp>
+        <p:nvSpPr>
+          <p:cNvPr id="227" name="Shape 205"/>
+          <p:cNvSpPr/>
+          <p:nvPr/>
+        </p:nvSpPr>
+        <p:spPr>
+          <a:xfrm>
+            <a:off x="2498141" y="2080260"/>
+            <a:ext cx="370332" cy="208483"/>
           </a:xfrm>
           <a:prstGeom prst="roundRect">
             <a:avLst>
-              <a:gd name="adj" fmla="val 25641"/>
+              <a:gd name="adj" fmla="val 21930"/>
             </a:avLst>
           </a:prstGeom>
           <a:solidFill>
@@ -25818,35 +25782,33 @@
       </p:sp>
       <p:sp>
         <p:nvSpPr>
-          <p:cNvPr id="226" name="Text 204"/>
-          <p:cNvSpPr/>
-          <p:nvPr/>
-        </p:nvSpPr>
-        <p:spPr>
-          <a:xfrm>
-            <a:off x="2455164" y="2104034"/>
-            <a:ext cx="457200" cy="160020"/>
-          </a:xfrm>
-          <a:prstGeom prst="rect">
-            <a:avLst/>
-          </a:prstGeom>
-          <a:noFill/>
-          <a:ln/>
-        </p:spPr>
-        <p:txBody>
-          <a:bodyPr wrap="square" lIns="0" tIns="0" rIns="0" bIns="0" rtlCol="0" anchor="ctr">
-            <a:normAutofit/>
-          </a:bodyPr>
+          <p:cNvPr id="228" name="Text 206"/>
+          <p:cNvSpPr/>
+          <p:nvPr/>
+        </p:nvSpPr>
+        <p:spPr>
+          <a:xfrm>
+            <a:off x="2518258" y="2089404"/>
+            <a:ext cx="330098" cy="190195"/>
+          </a:xfrm>
+          <a:prstGeom prst="rect">
+            <a:avLst/>
+          </a:prstGeom>
+          <a:noFill/>
+          <a:ln/>
+        </p:spPr>
+        <p:txBody>
+          <a:bodyPr wrap="square" lIns="0" tIns="0" rIns="0" bIns="0" rtlCol="0" anchor="ctr"/>
           <a:lstStyle/>
           <a:p>
             <a:pPr algn="ctr" indent="0" marL="0">
               <a:lnSpc>
-                <a:spcPct val="86000"/>
+                <a:spcPct val="102000"/>
               </a:lnSpc>
               <a:buNone/>
             </a:pPr>
             <a:r>
-              <a:rPr lang="en-US" sz="470" b="1" dirty="0">
+              <a:rPr lang="en-US" sz="410" b="1" dirty="0">
                 <a:solidFill>
                   <a:srgbClr val="202124"/>
                 </a:solidFill>
@@ -25856,17 +25818,17 @@
               </a:rPr>
               <a:t>Security</a:t>
             </a:r>
-            <a:endParaRPr lang="en-US" sz="470" dirty="0"/>
+            <a:endParaRPr lang="en-US" sz="410" dirty="0"/>
           </a:p>
           <a:p>
             <a:pPr algn="ctr" indent="0" marL="0">
               <a:lnSpc>
-                <a:spcPct val="86000"/>
+                <a:spcPct val="102000"/>
               </a:lnSpc>
               <a:buNone/>
             </a:pPr>
             <a:r>
-              <a:rPr lang="en-US" sz="410" dirty="0">
+              <a:rPr lang="en-US" sz="375" dirty="0">
                 <a:solidFill>
                   <a:srgbClr val="202124"/>
                 </a:solidFill>
@@ -25876,24 +25838,24 @@
               </a:rPr>
               <a:t>policies</a:t>
             </a:r>
-            <a:endParaRPr lang="en-US" sz="470" dirty="0"/>
-          </a:p>
-        </p:txBody>
-      </p:sp>
-      <p:sp>
-        <p:nvSpPr>
-          <p:cNvPr id="227" name="Shape 205"/>
-          <p:cNvSpPr/>
-          <p:nvPr/>
-        </p:nvSpPr>
-        <p:spPr>
-          <a:xfrm>
-            <a:off x="2435962" y="2639873"/>
-            <a:ext cx="495605" cy="178308"/>
+            <a:endParaRPr lang="en-US" sz="410" dirty="0"/>
+          </a:p>
+        </p:txBody>
+      </p:sp>
+      <p:sp>
+        <p:nvSpPr>
+          <p:cNvPr id="229" name="Shape 207"/>
+          <p:cNvSpPr/>
+          <p:nvPr/>
+        </p:nvSpPr>
+        <p:spPr>
+          <a:xfrm>
+            <a:off x="2457907" y="2625242"/>
+            <a:ext cx="452628" cy="208483"/>
           </a:xfrm>
           <a:prstGeom prst="roundRect">
             <a:avLst>
-              <a:gd name="adj" fmla="val 25641"/>
+              <a:gd name="adj" fmla="val 21930"/>
             </a:avLst>
           </a:prstGeom>
           <a:solidFill>
@@ -25909,35 +25871,33 @@
       </p:sp>
       <p:sp>
         <p:nvSpPr>
-          <p:cNvPr id="228" name="Text 206"/>
-          <p:cNvSpPr/>
-          <p:nvPr/>
-        </p:nvSpPr>
-        <p:spPr>
-          <a:xfrm>
-            <a:off x="2454250" y="2649017"/>
-            <a:ext cx="459029" cy="160020"/>
-          </a:xfrm>
-          <a:prstGeom prst="rect">
-            <a:avLst/>
-          </a:prstGeom>
-          <a:noFill/>
-          <a:ln/>
-        </p:spPr>
-        <p:txBody>
-          <a:bodyPr wrap="square" lIns="0" tIns="0" rIns="0" bIns="0" rtlCol="0" anchor="ctr">
-            <a:normAutofit/>
-          </a:bodyPr>
+          <p:cNvPr id="230" name="Text 208"/>
+          <p:cNvSpPr/>
+          <p:nvPr/>
+        </p:nvSpPr>
+        <p:spPr>
+          <a:xfrm>
+            <a:off x="2478024" y="2634386"/>
+            <a:ext cx="412394" cy="190195"/>
+          </a:xfrm>
+          <a:prstGeom prst="rect">
+            <a:avLst/>
+          </a:prstGeom>
+          <a:noFill/>
+          <a:ln/>
+        </p:spPr>
+        <p:txBody>
+          <a:bodyPr wrap="square" lIns="0" tIns="0" rIns="0" bIns="0" rtlCol="0" anchor="ctr"/>
           <a:lstStyle/>
           <a:p>
             <a:pPr algn="ctr" indent="0" marL="0">
               <a:lnSpc>
-                <a:spcPct val="86000"/>
+                <a:spcPct val="102000"/>
               </a:lnSpc>
               <a:buNone/>
             </a:pPr>
             <a:r>
-              <a:rPr lang="en-US" sz="470" b="1" dirty="0">
+              <a:rPr lang="en-US" sz="410" b="1" dirty="0">
                 <a:solidFill>
                   <a:srgbClr val="202124"/>
                 </a:solidFill>
@@ -25947,17 +25907,17 @@
               </a:rPr>
               <a:t>Resolve</a:t>
             </a:r>
-            <a:endParaRPr lang="en-US" sz="470" dirty="0"/>
+            <a:endParaRPr lang="en-US" sz="410" dirty="0"/>
           </a:p>
           <a:p>
             <a:pPr algn="ctr" indent="0" marL="0">
               <a:lnSpc>
-                <a:spcPct val="86000"/>
+                <a:spcPct val="102000"/>
               </a:lnSpc>
               <a:buNone/>
             </a:pPr>
             <a:r>
-              <a:rPr lang="en-US" sz="410" dirty="0">
+              <a:rPr lang="en-US" sz="375" dirty="0">
                 <a:solidFill>
                   <a:srgbClr val="202124"/>
                 </a:solidFill>
@@ -25967,24 +25927,24 @@
               </a:rPr>
               <a:t>agent route</a:t>
             </a:r>
-            <a:endParaRPr lang="en-US" sz="470" dirty="0"/>
-          </a:p>
-        </p:txBody>
-      </p:sp>
-      <p:sp>
-        <p:nvSpPr>
-          <p:cNvPr id="229" name="Shape 207"/>
-          <p:cNvSpPr/>
-          <p:nvPr/>
-        </p:nvSpPr>
-        <p:spPr>
-          <a:xfrm>
-            <a:off x="3862426" y="1148486"/>
-            <a:ext cx="493776" cy="132588"/>
+            <a:endParaRPr lang="en-US" sz="410" dirty="0"/>
+          </a:p>
+        </p:txBody>
+      </p:sp>
+      <p:sp>
+        <p:nvSpPr>
+          <p:cNvPr id="231" name="Shape 209"/>
+          <p:cNvSpPr/>
+          <p:nvPr/>
+        </p:nvSpPr>
+        <p:spPr>
+          <a:xfrm>
+            <a:off x="3888029" y="1144829"/>
+            <a:ext cx="370332" cy="138989"/>
           </a:xfrm>
           <a:prstGeom prst="roundRect">
             <a:avLst>
-              <a:gd name="adj" fmla="val 34483"/>
+              <a:gd name="adj" fmla="val 32895"/>
             </a:avLst>
           </a:prstGeom>
           <a:solidFill>
@@ -26000,35 +25960,33 @@
       </p:sp>
       <p:sp>
         <p:nvSpPr>
-          <p:cNvPr id="230" name="Text 208"/>
-          <p:cNvSpPr/>
-          <p:nvPr/>
-        </p:nvSpPr>
-        <p:spPr>
-          <a:xfrm>
-            <a:off x="3880714" y="1157630"/>
-            <a:ext cx="457200" cy="114300"/>
-          </a:xfrm>
-          <a:prstGeom prst="rect">
-            <a:avLst/>
-          </a:prstGeom>
-          <a:noFill/>
-          <a:ln/>
-        </p:spPr>
-        <p:txBody>
-          <a:bodyPr wrap="square" lIns="0" tIns="0" rIns="0" bIns="0" rtlCol="0" anchor="ctr">
-            <a:normAutofit/>
-          </a:bodyPr>
+          <p:cNvPr id="232" name="Text 210"/>
+          <p:cNvSpPr/>
+          <p:nvPr/>
+        </p:nvSpPr>
+        <p:spPr>
+          <a:xfrm>
+            <a:off x="3908146" y="1153973"/>
+            <a:ext cx="330098" cy="120701"/>
+          </a:xfrm>
+          <a:prstGeom prst="rect">
+            <a:avLst/>
+          </a:prstGeom>
+          <a:noFill/>
+          <a:ln/>
+        </p:spPr>
+        <p:txBody>
+          <a:bodyPr wrap="square" lIns="0" tIns="0" rIns="0" bIns="0" rtlCol="0" anchor="ctr"/>
           <a:lstStyle/>
           <a:p>
             <a:pPr algn="ctr" indent="0" marL="0">
               <a:lnSpc>
-                <a:spcPct val="86000"/>
+                <a:spcPct val="102000"/>
               </a:lnSpc>
               <a:buNone/>
             </a:pPr>
             <a:r>
-              <a:rPr lang="en-US" sz="470" b="1" dirty="0">
+              <a:rPr lang="en-US" sz="410" b="1" dirty="0">
                 <a:solidFill>
                   <a:srgbClr val="202124"/>
                 </a:solidFill>
@@ -26038,24 +25996,24 @@
               </a:rPr>
               <a:t>Response</a:t>
             </a:r>
-            <a:endParaRPr lang="en-US" sz="470" dirty="0"/>
-          </a:p>
-        </p:txBody>
-      </p:sp>
-      <p:sp>
-        <p:nvSpPr>
-          <p:cNvPr id="231" name="Shape 209"/>
-          <p:cNvSpPr/>
-          <p:nvPr/>
-        </p:nvSpPr>
-        <p:spPr>
-          <a:xfrm>
-            <a:off x="3862426" y="2725826"/>
-            <a:ext cx="493776" cy="132588"/>
+            <a:endParaRPr lang="en-US" sz="410" dirty="0"/>
+          </a:p>
+        </p:txBody>
+      </p:sp>
+      <p:sp>
+        <p:nvSpPr>
+          <p:cNvPr id="233" name="Shape 211"/>
+          <p:cNvSpPr/>
+          <p:nvPr/>
+        </p:nvSpPr>
+        <p:spPr>
+          <a:xfrm>
+            <a:off x="3888029" y="2723083"/>
+            <a:ext cx="370332" cy="138989"/>
           </a:xfrm>
           <a:prstGeom prst="roundRect">
             <a:avLst>
-              <a:gd name="adj" fmla="val 34483"/>
+              <a:gd name="adj" fmla="val 32895"/>
             </a:avLst>
           </a:prstGeom>
           <a:solidFill>
@@ -26071,35 +26029,33 @@
       </p:sp>
       <p:sp>
         <p:nvSpPr>
-          <p:cNvPr id="232" name="Text 210"/>
-          <p:cNvSpPr/>
-          <p:nvPr/>
-        </p:nvSpPr>
-        <p:spPr>
-          <a:xfrm>
-            <a:off x="3880714" y="2734970"/>
-            <a:ext cx="457200" cy="114300"/>
-          </a:xfrm>
-          <a:prstGeom prst="rect">
-            <a:avLst/>
-          </a:prstGeom>
-          <a:noFill/>
-          <a:ln/>
-        </p:spPr>
-        <p:txBody>
-          <a:bodyPr wrap="square" lIns="0" tIns="0" rIns="0" bIns="0" rtlCol="0" anchor="ctr">
-            <a:normAutofit/>
-          </a:bodyPr>
+          <p:cNvPr id="234" name="Text 212"/>
+          <p:cNvSpPr/>
+          <p:nvPr/>
+        </p:nvSpPr>
+        <p:spPr>
+          <a:xfrm>
+            <a:off x="3908146" y="2732227"/>
+            <a:ext cx="330098" cy="120701"/>
+          </a:xfrm>
+          <a:prstGeom prst="rect">
+            <a:avLst/>
+          </a:prstGeom>
+          <a:noFill/>
+          <a:ln/>
+        </p:spPr>
+        <p:txBody>
+          <a:bodyPr wrap="square" lIns="0" tIns="0" rIns="0" bIns="0" rtlCol="0" anchor="ctr"/>
           <a:lstStyle/>
           <a:p>
             <a:pPr algn="ctr" indent="0" marL="0">
               <a:lnSpc>
-                <a:spcPct val="86000"/>
+                <a:spcPct val="102000"/>
               </a:lnSpc>
               <a:buNone/>
             </a:pPr>
             <a:r>
-              <a:rPr lang="en-US" sz="470" b="1" dirty="0">
+              <a:rPr lang="en-US" sz="410" b="1" dirty="0">
                 <a:solidFill>
                   <a:srgbClr val="202124"/>
                 </a:solidFill>
@@ -26109,24 +26065,24 @@
               </a:rPr>
               <a:t>Response</a:t>
             </a:r>
-            <a:endParaRPr lang="en-US" sz="470" dirty="0"/>
-          </a:p>
-        </p:txBody>
-      </p:sp>
-      <p:sp>
-        <p:nvSpPr>
-          <p:cNvPr id="233" name="Shape 211"/>
-          <p:cNvSpPr/>
-          <p:nvPr/>
-        </p:nvSpPr>
-        <p:spPr>
-          <a:xfrm>
-            <a:off x="3040380" y="1148486"/>
-            <a:ext cx="493776" cy="132588"/>
+            <a:endParaRPr lang="en-US" sz="410" dirty="0"/>
+          </a:p>
+        </p:txBody>
+      </p:sp>
+      <p:sp>
+        <p:nvSpPr>
+          <p:cNvPr id="235" name="Shape 213"/>
+          <p:cNvSpPr/>
+          <p:nvPr/>
+        </p:nvSpPr>
+        <p:spPr>
+          <a:xfrm>
+            <a:off x="3144622" y="1144829"/>
+            <a:ext cx="342900" cy="138989"/>
           </a:xfrm>
           <a:prstGeom prst="roundRect">
             <a:avLst>
-              <a:gd name="adj" fmla="val 34483"/>
+              <a:gd name="adj" fmla="val 32895"/>
             </a:avLst>
           </a:prstGeom>
           <a:solidFill>
@@ -26142,35 +26098,33 @@
       </p:sp>
       <p:sp>
         <p:nvSpPr>
-          <p:cNvPr id="234" name="Text 212"/>
-          <p:cNvSpPr/>
-          <p:nvPr/>
-        </p:nvSpPr>
-        <p:spPr>
-          <a:xfrm>
-            <a:off x="3058668" y="1157630"/>
-            <a:ext cx="457200" cy="114300"/>
-          </a:xfrm>
-          <a:prstGeom prst="rect">
-            <a:avLst/>
-          </a:prstGeom>
-          <a:noFill/>
-          <a:ln/>
-        </p:spPr>
-        <p:txBody>
-          <a:bodyPr wrap="square" lIns="0" tIns="0" rIns="0" bIns="0" rtlCol="0" anchor="ctr">
-            <a:normAutofit/>
-          </a:bodyPr>
+          <p:cNvPr id="236" name="Text 214"/>
+          <p:cNvSpPr/>
+          <p:nvPr/>
+        </p:nvSpPr>
+        <p:spPr>
+          <a:xfrm>
+            <a:off x="3164738" y="1153973"/>
+            <a:ext cx="302666" cy="120701"/>
+          </a:xfrm>
+          <a:prstGeom prst="rect">
+            <a:avLst/>
+          </a:prstGeom>
+          <a:noFill/>
+          <a:ln/>
+        </p:spPr>
+        <p:txBody>
+          <a:bodyPr wrap="square" lIns="0" tIns="0" rIns="0" bIns="0" rtlCol="0" anchor="ctr"/>
           <a:lstStyle/>
           <a:p>
             <a:pPr algn="ctr" indent="0" marL="0">
               <a:lnSpc>
-                <a:spcPct val="86000"/>
+                <a:spcPct val="102000"/>
               </a:lnSpc>
               <a:buNone/>
             </a:pPr>
             <a:r>
-              <a:rPr lang="en-US" sz="470" b="1" dirty="0">
+              <a:rPr lang="en-US" sz="410" b="1" dirty="0">
                 <a:solidFill>
                   <a:srgbClr val="202124"/>
                 </a:solidFill>
@@ -26180,24 +26134,24 @@
               </a:rPr>
               <a:t>Request</a:t>
             </a:r>
-            <a:endParaRPr lang="en-US" sz="470" dirty="0"/>
-          </a:p>
-        </p:txBody>
-      </p:sp>
-      <p:sp>
-        <p:nvSpPr>
-          <p:cNvPr id="235" name="Shape 213"/>
-          <p:cNvSpPr/>
-          <p:nvPr/>
-        </p:nvSpPr>
-        <p:spPr>
-          <a:xfrm>
-            <a:off x="3040380" y="2725826"/>
-            <a:ext cx="493776" cy="132588"/>
+            <a:endParaRPr lang="en-US" sz="410" dirty="0"/>
+          </a:p>
+        </p:txBody>
+      </p:sp>
+      <p:sp>
+        <p:nvSpPr>
+          <p:cNvPr id="237" name="Shape 215"/>
+          <p:cNvSpPr/>
+          <p:nvPr/>
+        </p:nvSpPr>
+        <p:spPr>
+          <a:xfrm>
+            <a:off x="3144622" y="2723083"/>
+            <a:ext cx="342900" cy="138989"/>
           </a:xfrm>
           <a:prstGeom prst="roundRect">
             <a:avLst>
-              <a:gd name="adj" fmla="val 34483"/>
+              <a:gd name="adj" fmla="val 32895"/>
             </a:avLst>
           </a:prstGeom>
           <a:solidFill>
@@ -26213,35 +26167,33 @@
       </p:sp>
       <p:sp>
         <p:nvSpPr>
-          <p:cNvPr id="236" name="Text 214"/>
-          <p:cNvSpPr/>
-          <p:nvPr/>
-        </p:nvSpPr>
-        <p:spPr>
-          <a:xfrm>
-            <a:off x="3058668" y="2734970"/>
-            <a:ext cx="457200" cy="114300"/>
-          </a:xfrm>
-          <a:prstGeom prst="rect">
-            <a:avLst/>
-          </a:prstGeom>
-          <a:noFill/>
-          <a:ln/>
-        </p:spPr>
-        <p:txBody>
-          <a:bodyPr wrap="square" lIns="0" tIns="0" rIns="0" bIns="0" rtlCol="0" anchor="ctr">
-            <a:normAutofit/>
-          </a:bodyPr>
+          <p:cNvPr id="238" name="Text 216"/>
+          <p:cNvSpPr/>
+          <p:nvPr/>
+        </p:nvSpPr>
+        <p:spPr>
+          <a:xfrm>
+            <a:off x="3164738" y="2732227"/>
+            <a:ext cx="302666" cy="120701"/>
+          </a:xfrm>
+          <a:prstGeom prst="rect">
+            <a:avLst/>
+          </a:prstGeom>
+          <a:noFill/>
+          <a:ln/>
+        </p:spPr>
+        <p:txBody>
+          <a:bodyPr wrap="square" lIns="0" tIns="0" rIns="0" bIns="0" rtlCol="0" anchor="ctr"/>
           <a:lstStyle/>
           <a:p>
             <a:pPr algn="ctr" indent="0" marL="0">
               <a:lnSpc>
-                <a:spcPct val="86000"/>
+                <a:spcPct val="102000"/>
               </a:lnSpc>
               <a:buNone/>
             </a:pPr>
             <a:r>
-              <a:rPr lang="en-US" sz="470" b="1" dirty="0">
+              <a:rPr lang="en-US" sz="410" b="1" dirty="0">
                 <a:solidFill>
                   <a:srgbClr val="202124"/>
                 </a:solidFill>
@@ -26251,13 +26203,13 @@
               </a:rPr>
               <a:t>Request</a:t>
             </a:r>
-            <a:endParaRPr lang="en-US" sz="470" dirty="0"/>
-          </a:p>
-        </p:txBody>
-      </p:sp>
-      <p:sp>
-        <p:nvSpPr>
-          <p:cNvPr id="237" name="Text 215"/>
+            <a:endParaRPr lang="en-US" sz="410" dirty="0"/>
+          </a:p>
+        </p:txBody>
+      </p:sp>
+      <p:sp>
+        <p:nvSpPr>
+          <p:cNvPr id="239" name="Text 217"/>
           <p:cNvSpPr/>
           <p:nvPr/>
         </p:nvSpPr>
@@ -26273,14 +26225,14 @@
           <a:ln/>
         </p:spPr>
         <p:txBody>
-          <a:bodyPr wrap="square" rtlCol="0" anchor="ctr"/>
+          <a:bodyPr wrap="none" rtlCol="0" anchor="ctr"/>
           <a:lstStyle/>
           <a:p>
             <a:pPr algn="l" indent="0" marL="0">
               <a:buNone/>
             </a:pPr>
             <a:r>
-              <a:rPr lang="en-US" sz="780" b="1" dirty="0">
+              <a:rPr lang="en-US" sz="700" b="1" dirty="0">
                 <a:solidFill>
                   <a:srgbClr val="4285F4"/>
                 </a:solidFill>
@@ -26294,7 +26246,7 @@
               <a:buNone/>
             </a:pPr>
             <a:r>
-              <a:rPr lang="en-US" sz="760" dirty="0">
+              <a:rPr lang="en-US" sz="690" dirty="0">
                 <a:solidFill>
                   <a:srgbClr val="5F6368"/>
                 </a:solidFill>
@@ -26308,7 +26260,7 @@
               <a:buNone/>
             </a:pPr>
             <a:r>
-              <a:rPr lang="en-US" sz="780" b="1" dirty="0">
+              <a:rPr lang="en-US" sz="700" b="1" dirty="0">
                 <a:solidFill>
                   <a:srgbClr val="3C4043"/>
                 </a:solidFill>
@@ -26318,7 +26270,7 @@
               </a:rPr>
               <a:t>Proprietary + Confidential</a:t>
             </a:r>
-            <a:endParaRPr lang="en-US" sz="780" dirty="0"/>
+            <a:endParaRPr lang="en-US" sz="700" dirty="0"/>
           </a:p>
         </p:txBody>
       </p:sp>
@@ -29230,7 +29182,7 @@
           <a:ln/>
         </p:spPr>
         <p:txBody>
-          <a:bodyPr wrap="square" rtlCol="0" anchor="ctr"/>
+          <a:bodyPr wrap="none" rtlCol="0" anchor="ctr"/>
           <a:lstStyle/>
           <a:p>
             <a:pPr algn="l" indent="0" marL="0">
@@ -31316,7 +31268,7 @@
           <a:ln/>
         </p:spPr>
         <p:txBody>
-          <a:bodyPr wrap="square" rtlCol="0" anchor="ctr"/>
+          <a:bodyPr wrap="none" rtlCol="0" anchor="ctr"/>
           <a:lstStyle/>
           <a:p>
             <a:pPr algn="l" indent="0" marL="0">
@@ -32824,7 +32776,7 @@
           <a:ln/>
         </p:spPr>
         <p:txBody>
-          <a:bodyPr wrap="square" rtlCol="0" anchor="ctr"/>
+          <a:bodyPr wrap="none" rtlCol="0" anchor="ctr"/>
           <a:lstStyle/>
           <a:p>
             <a:pPr algn="l" indent="0" marL="0">
@@ -35539,7 +35491,7 @@
           <a:ln/>
         </p:spPr>
         <p:txBody>
-          <a:bodyPr wrap="square" rtlCol="0" anchor="ctr"/>
+          <a:bodyPr wrap="none" rtlCol="0" anchor="ctr"/>
           <a:lstStyle/>
           <a:p>
             <a:pPr algn="l" indent="0" marL="0">

--- a/slides/ws4-pattern-c-hybrid-editable-slides.pptx
+++ b/slides/ws4-pattern-c-hybrid-editable-slides.pptx
@@ -20615,69 +20615,7 @@
       </p:sp>
       <p:sp>
         <p:nvSpPr>
-          <p:cNvPr id="75" name="Text 73"/>
-          <p:cNvSpPr/>
-          <p:nvPr/>
-        </p:nvSpPr>
-        <p:spPr>
-          <a:xfrm>
-            <a:off x="1560881" y="3970325"/>
-            <a:ext cx="1994306" cy="210312"/>
-          </a:xfrm>
-          <a:prstGeom prst="rect">
-            <a:avLst/>
-          </a:prstGeom>
-          <a:noFill/>
-          <a:ln/>
-        </p:spPr>
-        <p:txBody>
-          <a:bodyPr wrap="square" lIns="0" tIns="0" rIns="0" bIns="0" rtlCol="0" anchor="t"/>
-          <a:lstStyle/>
-          <a:p>
-            <a:pPr algn="l" indent="0" marL="0">
-              <a:lnSpc>
-                <a:spcPct val="102000"/>
-              </a:lnSpc>
-              <a:buNone/>
-            </a:pPr>
-            <a:r>
-              <a:rPr lang="en-US" sz="470" b="1" dirty="0">
-                <a:solidFill>
-                  <a:srgbClr val="202124"/>
-                </a:solidFill>
-                <a:latin typeface="Arial" pitchFamily="34" charset="0"/>
-                <a:ea typeface="Arial" pitchFamily="34" charset="-122"/>
-                <a:cs typeface="Arial" pitchFamily="34" charset="-120"/>
-              </a:rPr>
-              <a:t>Shared Pooled Runtime</a:t>
-            </a:r>
-            <a:endParaRPr lang="en-US" sz="470" dirty="0"/>
-          </a:p>
-          <a:p>
-            <a:pPr algn="l" indent="0" marL="0">
-              <a:lnSpc>
-                <a:spcPct val="102000"/>
-              </a:lnSpc>
-              <a:buNone/>
-            </a:pPr>
-            <a:r>
-              <a:rPr lang="en-US" sz="400" dirty="0">
-                <a:solidFill>
-                  <a:srgbClr val="202124"/>
-                </a:solidFill>
-                <a:latin typeface="Arial" pitchFamily="34" charset="0"/>
-                <a:ea typeface="Arial" pitchFamily="34" charset="-122"/>
-                <a:cs typeface="Arial" pitchFamily="34" charset="-120"/>
-              </a:rPr>
-              <a:t>pool://cymbal-shared-pooled-v2 (90% Cache Savings)</a:t>
-            </a:r>
-            <a:endParaRPr lang="en-US" sz="470" dirty="0"/>
-          </a:p>
-        </p:txBody>
-      </p:sp>
-      <p:sp>
-        <p:nvSpPr>
-          <p:cNvPr id="76" name="Shape 74"/>
+          <p:cNvPr id="75" name="Shape 73"/>
           <p:cNvSpPr/>
           <p:nvPr/>
         </p:nvSpPr>
@@ -20704,69 +20642,7 @@
       </p:sp>
       <p:sp>
         <p:nvSpPr>
-          <p:cNvPr id="77" name="Text 75"/>
-          <p:cNvSpPr/>
-          <p:nvPr/>
-        </p:nvSpPr>
-        <p:spPr>
-          <a:xfrm>
-            <a:off x="3925519" y="3970325"/>
-            <a:ext cx="1994306" cy="210312"/>
-          </a:xfrm>
-          <a:prstGeom prst="rect">
-            <a:avLst/>
-          </a:prstGeom>
-          <a:noFill/>
-          <a:ln/>
-        </p:spPr>
-        <p:txBody>
-          <a:bodyPr wrap="square" lIns="0" tIns="0" rIns="0" bIns="0" rtlCol="0" anchor="t"/>
-          <a:lstStyle/>
-          <a:p>
-            <a:pPr algn="l" indent="0" marL="0">
-              <a:lnSpc>
-                <a:spcPct val="102000"/>
-              </a:lnSpc>
-              <a:buNone/>
-            </a:pPr>
-            <a:r>
-              <a:rPr lang="en-US" sz="470" b="1" dirty="0">
-                <a:solidFill>
-                  <a:srgbClr val="202124"/>
-                </a:solidFill>
-                <a:latin typeface="Arial" pitchFamily="34" charset="0"/>
-                <a:ea typeface="Arial" pitchFamily="34" charset="-122"/>
-                <a:cs typeface="Arial" pitchFamily="34" charset="-120"/>
-              </a:rPr>
-              <a:t>Dedicated Enterprise PSC Spokes</a:t>
-            </a:r>
-            <a:endParaRPr lang="en-US" sz="470" dirty="0"/>
-          </a:p>
-          <a:p>
-            <a:pPr algn="l" indent="0" marL="0">
-              <a:lnSpc>
-                <a:spcPct val="102000"/>
-              </a:lnSpc>
-              <a:buNone/>
-            </a:pPr>
-            <a:r>
-              <a:rPr lang="en-US" sz="400" dirty="0">
-                <a:solidFill>
-                  <a:srgbClr val="202124"/>
-                </a:solidFill>
-                <a:latin typeface="Arial" pitchFamily="34" charset="0"/>
-                <a:ea typeface="Arial" pitchFamily="34" charset="-122"/>
-                <a:cs typeface="Arial" pitchFamily="34" charset="-120"/>
-              </a:rPr>
-              <a:t>cymbal-psc-nat-us-west1 (/28) -&gt; psc://10.10.0.50 &amp; .51</a:t>
-            </a:r>
-            <a:endParaRPr lang="en-US" sz="470" dirty="0"/>
-          </a:p>
-        </p:txBody>
-      </p:sp>
-      <p:sp>
-        <p:nvSpPr>
-          <p:cNvPr id="78" name="Shape 76"/>
+          <p:cNvPr id="76" name="Shape 74"/>
           <p:cNvSpPr/>
           <p:nvPr/>
         </p:nvSpPr>
@@ -20793,69 +20669,7 @@
       </p:sp>
       <p:sp>
         <p:nvSpPr>
-          <p:cNvPr id="79" name="Text 77"/>
-          <p:cNvSpPr/>
-          <p:nvPr/>
-        </p:nvSpPr>
-        <p:spPr>
-          <a:xfrm>
-            <a:off x="1482242" y="1926641"/>
-            <a:ext cx="1901952" cy="210312"/>
-          </a:xfrm>
-          <a:prstGeom prst="rect">
-            <a:avLst/>
-          </a:prstGeom>
-          <a:noFill/>
-          <a:ln/>
-        </p:spPr>
-        <p:txBody>
-          <a:bodyPr wrap="square" lIns="0" tIns="0" rIns="0" bIns="0" rtlCol="0" anchor="t"/>
-          <a:lstStyle/>
-          <a:p>
-            <a:pPr algn="l" indent="0" marL="0">
-              <a:lnSpc>
-                <a:spcPct val="102000"/>
-              </a:lnSpc>
-              <a:buNone/>
-            </a:pPr>
-            <a:r>
-              <a:rPr lang="en-US" sz="470" b="1" dirty="0">
-                <a:solidFill>
-                  <a:srgbClr val="202124"/>
-                </a:solidFill>
-                <a:latin typeface="Arial" pitchFamily="34" charset="0"/>
-                <a:ea typeface="Arial" pitchFamily="34" charset="-122"/>
-                <a:cs typeface="Arial" pitchFamily="34" charset="-120"/>
-              </a:rPr>
-              <a:t>Unified Control Plane &amp; Intelligent Router Hub</a:t>
-            </a:r>
-            <a:endParaRPr lang="en-US" sz="470" dirty="0"/>
-          </a:p>
-          <a:p>
-            <a:pPr algn="l" indent="0" marL="0">
-              <a:lnSpc>
-                <a:spcPct val="102000"/>
-              </a:lnSpc>
-              <a:buNone/>
-            </a:pPr>
-            <a:r>
-              <a:rPr lang="en-US" sz="400" dirty="0">
-                <a:solidFill>
-                  <a:srgbClr val="202124"/>
-                </a:solidFill>
-                <a:latin typeface="Arial" pitchFamily="34" charset="0"/>
-                <a:ea typeface="Arial" pitchFamily="34" charset="-122"/>
-                <a:cs typeface="Arial" pitchFamily="34" charset="-120"/>
-              </a:rPr>
-              <a:t>Firestore live routing table + pattern_c_psc_endpoints_registry</a:t>
-            </a:r>
-            <a:endParaRPr lang="en-US" sz="470" dirty="0"/>
-          </a:p>
-        </p:txBody>
-      </p:sp>
-      <p:sp>
-        <p:nvSpPr>
-          <p:cNvPr id="80" name="Shape 78"/>
+          <p:cNvPr id="77" name="Shape 75"/>
           <p:cNvSpPr/>
           <p:nvPr/>
         </p:nvSpPr>
@@ -20880,51 +20694,9 @@
           </a:ln>
         </p:spPr>
       </p:sp>
-      <p:sp>
-        <p:nvSpPr>
-          <p:cNvPr id="81" name="Text 79"/>
-          <p:cNvSpPr/>
-          <p:nvPr/>
-        </p:nvSpPr>
-        <p:spPr>
-          <a:xfrm>
-            <a:off x="4655210" y="1961388"/>
-            <a:ext cx="1315822" cy="210312"/>
-          </a:xfrm>
-          <a:prstGeom prst="rect">
-            <a:avLst/>
-          </a:prstGeom>
-          <a:noFill/>
-          <a:ln/>
-        </p:spPr>
-        <p:txBody>
-          <a:bodyPr wrap="square" lIns="0" tIns="0" rIns="0" bIns="0" rtlCol="0" anchor="t"/>
-          <a:lstStyle/>
-          <a:p>
-            <a:pPr algn="l" indent="0" marL="0">
-              <a:lnSpc>
-                <a:spcPct val="102000"/>
-              </a:lnSpc>
-              <a:buNone/>
-            </a:pPr>
-            <a:r>
-              <a:rPr lang="en-US" sz="430" b="1" dirty="0">
-                <a:solidFill>
-                  <a:srgbClr val="202124"/>
-                </a:solidFill>
-                <a:latin typeface="Arial" pitchFamily="34" charset="0"/>
-                <a:ea typeface="Arial" pitchFamily="34" charset="-122"/>
-                <a:cs typeface="Arial" pitchFamily="34" charset="-120"/>
-              </a:rPr>
-              <a:t>Tier Routing &amp; Live Migration Control Plane</a:t>
-            </a:r>
-            <a:endParaRPr lang="en-US" sz="430" dirty="0"/>
-          </a:p>
-        </p:txBody>
-      </p:sp>
       <p:pic>
         <p:nvPicPr>
-          <p:cNvPr id="82" name="Image 0" descr="preencoded.png">    </p:cNvPr>
+          <p:cNvPr id="78" name="Image 0" descr="preencoded.png">    </p:cNvPr>
           <p:cNvPicPr>
             <a:picLocks noChangeAspect="1"/>
           </p:cNvPicPr>
@@ -20948,7 +20720,7 @@
       </p:pic>
       <p:sp>
         <p:nvSpPr>
-          <p:cNvPr id="83" name="Shape 80"/>
+          <p:cNvPr id="79" name="Shape 76"/>
           <p:cNvSpPr/>
           <p:nvPr/>
         </p:nvSpPr>
@@ -20972,7 +20744,7 @@
       </p:sp>
       <p:sp>
         <p:nvSpPr>
-          <p:cNvPr id="84" name="Shape 81"/>
+          <p:cNvPr id="80" name="Shape 77"/>
           <p:cNvSpPr/>
           <p:nvPr/>
         </p:nvSpPr>
@@ -20996,7 +20768,7 @@
       </p:sp>
       <p:sp>
         <p:nvSpPr>
-          <p:cNvPr id="85" name="Shape 82"/>
+          <p:cNvPr id="81" name="Shape 78"/>
           <p:cNvSpPr/>
           <p:nvPr/>
         </p:nvSpPr>
@@ -21020,7 +20792,7 @@
       </p:sp>
       <p:sp>
         <p:nvSpPr>
-          <p:cNvPr id="86" name="Shape 83"/>
+          <p:cNvPr id="82" name="Shape 79"/>
           <p:cNvSpPr/>
           <p:nvPr/>
         </p:nvSpPr>
@@ -21043,7 +20815,7 @@
       </p:sp>
       <p:sp>
         <p:nvSpPr>
-          <p:cNvPr id="87" name="Shape 84"/>
+          <p:cNvPr id="83" name="Shape 80"/>
           <p:cNvSpPr/>
           <p:nvPr/>
         </p:nvSpPr>
@@ -21067,7 +20839,7 @@
       </p:sp>
       <p:sp>
         <p:nvSpPr>
-          <p:cNvPr id="88" name="Shape 85"/>
+          <p:cNvPr id="84" name="Shape 81"/>
           <p:cNvSpPr/>
           <p:nvPr/>
         </p:nvSpPr>
@@ -21091,7 +20863,7 @@
       </p:sp>
       <p:sp>
         <p:nvSpPr>
-          <p:cNvPr id="89" name="Shape 86"/>
+          <p:cNvPr id="85" name="Shape 82"/>
           <p:cNvSpPr/>
           <p:nvPr/>
         </p:nvSpPr>
@@ -21114,7 +20886,7 @@
       </p:sp>
       <p:sp>
         <p:nvSpPr>
-          <p:cNvPr id="90" name="Shape 87"/>
+          <p:cNvPr id="86" name="Shape 83"/>
           <p:cNvSpPr/>
           <p:nvPr/>
         </p:nvSpPr>
@@ -21138,7 +20910,7 @@
       </p:sp>
       <p:sp>
         <p:nvSpPr>
-          <p:cNvPr id="91" name="Shape 88"/>
+          <p:cNvPr id="87" name="Shape 84"/>
           <p:cNvSpPr/>
           <p:nvPr/>
         </p:nvSpPr>
@@ -21163,7 +20935,7 @@
       </p:sp>
       <p:sp>
         <p:nvSpPr>
-          <p:cNvPr id="92" name="Shape 89"/>
+          <p:cNvPr id="88" name="Shape 85"/>
           <p:cNvSpPr/>
           <p:nvPr/>
         </p:nvSpPr>
@@ -21187,7 +20959,7 @@
       </p:sp>
       <p:sp>
         <p:nvSpPr>
-          <p:cNvPr id="93" name="Shape 90"/>
+          <p:cNvPr id="89" name="Shape 86"/>
           <p:cNvSpPr/>
           <p:nvPr/>
         </p:nvSpPr>
@@ -21211,7 +20983,7 @@
       </p:sp>
       <p:sp>
         <p:nvSpPr>
-          <p:cNvPr id="94" name="Shape 91"/>
+          <p:cNvPr id="90" name="Shape 87"/>
           <p:cNvSpPr/>
           <p:nvPr/>
         </p:nvSpPr>
@@ -21234,7 +21006,7 @@
       </p:sp>
       <p:sp>
         <p:nvSpPr>
-          <p:cNvPr id="95" name="Shape 92"/>
+          <p:cNvPr id="91" name="Shape 88"/>
           <p:cNvSpPr/>
           <p:nvPr/>
         </p:nvSpPr>
@@ -21257,7 +21029,7 @@
       </p:sp>
       <p:sp>
         <p:nvSpPr>
-          <p:cNvPr id="96" name="Shape 93"/>
+          <p:cNvPr id="92" name="Shape 89"/>
           <p:cNvSpPr/>
           <p:nvPr/>
         </p:nvSpPr>
@@ -21281,7 +21053,7 @@
       </p:sp>
       <p:sp>
         <p:nvSpPr>
-          <p:cNvPr id="97" name="Shape 94"/>
+          <p:cNvPr id="93" name="Shape 90"/>
           <p:cNvSpPr/>
           <p:nvPr/>
         </p:nvSpPr>
@@ -21305,7 +21077,7 @@
       </p:sp>
       <p:sp>
         <p:nvSpPr>
-          <p:cNvPr id="98" name="Shape 95"/>
+          <p:cNvPr id="94" name="Shape 91"/>
           <p:cNvSpPr/>
           <p:nvPr/>
         </p:nvSpPr>
@@ -21328,7 +21100,7 @@
       </p:sp>
       <p:sp>
         <p:nvSpPr>
-          <p:cNvPr id="99" name="Shape 96"/>
+          <p:cNvPr id="95" name="Shape 92"/>
           <p:cNvSpPr/>
           <p:nvPr/>
         </p:nvSpPr>
@@ -21352,7 +21124,7 @@
       </p:sp>
       <p:sp>
         <p:nvSpPr>
-          <p:cNvPr id="100" name="Shape 97"/>
+          <p:cNvPr id="96" name="Shape 93"/>
           <p:cNvSpPr/>
           <p:nvPr/>
         </p:nvSpPr>
@@ -21376,7 +21148,7 @@
       </p:sp>
       <p:sp>
         <p:nvSpPr>
-          <p:cNvPr id="101" name="Shape 98"/>
+          <p:cNvPr id="97" name="Shape 94"/>
           <p:cNvSpPr/>
           <p:nvPr/>
         </p:nvSpPr>
@@ -21399,7 +21171,7 @@
       </p:sp>
       <p:sp>
         <p:nvSpPr>
-          <p:cNvPr id="102" name="Shape 99"/>
+          <p:cNvPr id="98" name="Shape 95"/>
           <p:cNvSpPr/>
           <p:nvPr/>
         </p:nvSpPr>
@@ -21423,7 +21195,7 @@
       </p:sp>
       <p:sp>
         <p:nvSpPr>
-          <p:cNvPr id="103" name="Shape 100"/>
+          <p:cNvPr id="99" name="Shape 96"/>
           <p:cNvSpPr/>
           <p:nvPr/>
         </p:nvSpPr>
@@ -21446,7 +21218,7 @@
       </p:sp>
       <p:sp>
         <p:nvSpPr>
-          <p:cNvPr id="104" name="Shape 101"/>
+          <p:cNvPr id="100" name="Shape 97"/>
           <p:cNvSpPr/>
           <p:nvPr/>
         </p:nvSpPr>
@@ -21469,7 +21241,7 @@
       </p:sp>
       <p:sp>
         <p:nvSpPr>
-          <p:cNvPr id="105" name="Shape 102"/>
+          <p:cNvPr id="101" name="Shape 98"/>
           <p:cNvSpPr/>
           <p:nvPr/>
         </p:nvSpPr>
@@ -21493,7 +21265,7 @@
       </p:sp>
       <p:sp>
         <p:nvSpPr>
-          <p:cNvPr id="106" name="Shape 103"/>
+          <p:cNvPr id="102" name="Shape 99"/>
           <p:cNvSpPr/>
           <p:nvPr/>
         </p:nvSpPr>
@@ -21517,7 +21289,7 @@
       </p:sp>
       <p:sp>
         <p:nvSpPr>
-          <p:cNvPr id="107" name="Shape 104"/>
+          <p:cNvPr id="103" name="Shape 100"/>
           <p:cNvSpPr/>
           <p:nvPr/>
         </p:nvSpPr>
@@ -21540,7 +21312,7 @@
       </p:sp>
       <p:sp>
         <p:nvSpPr>
-          <p:cNvPr id="108" name="Shape 105"/>
+          <p:cNvPr id="104" name="Shape 101"/>
           <p:cNvSpPr/>
           <p:nvPr/>
         </p:nvSpPr>
@@ -21564,7 +21336,7 @@
       </p:sp>
       <p:sp>
         <p:nvSpPr>
-          <p:cNvPr id="109" name="Shape 106"/>
+          <p:cNvPr id="105" name="Shape 102"/>
           <p:cNvSpPr/>
           <p:nvPr/>
         </p:nvSpPr>
@@ -21588,7 +21360,7 @@
       </p:sp>
       <p:sp>
         <p:nvSpPr>
-          <p:cNvPr id="110" name="Shape 107"/>
+          <p:cNvPr id="106" name="Shape 103"/>
           <p:cNvSpPr/>
           <p:nvPr/>
         </p:nvSpPr>
@@ -21611,7 +21383,7 @@
       </p:sp>
       <p:sp>
         <p:nvSpPr>
-          <p:cNvPr id="111" name="Shape 108"/>
+          <p:cNvPr id="107" name="Shape 104"/>
           <p:cNvSpPr/>
           <p:nvPr/>
         </p:nvSpPr>
@@ -21635,7 +21407,7 @@
       </p:sp>
       <p:sp>
         <p:nvSpPr>
-          <p:cNvPr id="112" name="Shape 109"/>
+          <p:cNvPr id="108" name="Shape 105"/>
           <p:cNvSpPr/>
           <p:nvPr/>
         </p:nvSpPr>
@@ -21659,7 +21431,7 @@
       </p:sp>
       <p:sp>
         <p:nvSpPr>
-          <p:cNvPr id="113" name="Shape 110"/>
+          <p:cNvPr id="109" name="Shape 106"/>
           <p:cNvSpPr/>
           <p:nvPr/>
         </p:nvSpPr>
@@ -21683,7 +21455,7 @@
       </p:sp>
       <p:sp>
         <p:nvSpPr>
-          <p:cNvPr id="114" name="Shape 111"/>
+          <p:cNvPr id="110" name="Shape 107"/>
           <p:cNvSpPr/>
           <p:nvPr/>
         </p:nvSpPr>
@@ -21707,7 +21479,7 @@
       </p:sp>
       <p:sp>
         <p:nvSpPr>
-          <p:cNvPr id="115" name="Shape 112"/>
+          <p:cNvPr id="111" name="Shape 108"/>
           <p:cNvSpPr/>
           <p:nvPr/>
         </p:nvSpPr>
@@ -21731,7 +21503,7 @@
       </p:sp>
       <p:sp>
         <p:nvSpPr>
-          <p:cNvPr id="116" name="Shape 113"/>
+          <p:cNvPr id="112" name="Shape 109"/>
           <p:cNvSpPr/>
           <p:nvPr/>
         </p:nvSpPr>
@@ -21755,7 +21527,7 @@
       </p:sp>
       <p:sp>
         <p:nvSpPr>
-          <p:cNvPr id="117" name="Shape 114"/>
+          <p:cNvPr id="113" name="Shape 110"/>
           <p:cNvSpPr/>
           <p:nvPr/>
         </p:nvSpPr>
@@ -21778,7 +21550,7 @@
       </p:sp>
       <p:sp>
         <p:nvSpPr>
-          <p:cNvPr id="118" name="Shape 115"/>
+          <p:cNvPr id="114" name="Shape 111"/>
           <p:cNvSpPr/>
           <p:nvPr/>
         </p:nvSpPr>
@@ -21802,7 +21574,7 @@
       </p:sp>
       <p:sp>
         <p:nvSpPr>
-          <p:cNvPr id="119" name="Shape 116"/>
+          <p:cNvPr id="115" name="Shape 112"/>
           <p:cNvSpPr/>
           <p:nvPr/>
         </p:nvSpPr>
@@ -21826,7 +21598,7 @@
       </p:sp>
       <p:sp>
         <p:nvSpPr>
-          <p:cNvPr id="120" name="Shape 117"/>
+          <p:cNvPr id="116" name="Shape 113"/>
           <p:cNvSpPr/>
           <p:nvPr/>
         </p:nvSpPr>
@@ -21849,7 +21621,7 @@
       </p:sp>
       <p:sp>
         <p:nvSpPr>
-          <p:cNvPr id="121" name="Shape 118"/>
+          <p:cNvPr id="117" name="Shape 114"/>
           <p:cNvSpPr/>
           <p:nvPr/>
         </p:nvSpPr>
@@ -21873,7 +21645,7 @@
       </p:sp>
       <p:sp>
         <p:nvSpPr>
-          <p:cNvPr id="122" name="Shape 119"/>
+          <p:cNvPr id="118" name="Shape 115"/>
           <p:cNvSpPr/>
           <p:nvPr/>
         </p:nvSpPr>
@@ -21897,7 +21669,7 @@
       </p:sp>
       <p:sp>
         <p:nvSpPr>
-          <p:cNvPr id="123" name="Shape 120"/>
+          <p:cNvPr id="119" name="Shape 116"/>
           <p:cNvSpPr/>
           <p:nvPr/>
         </p:nvSpPr>
@@ -21921,7 +21693,7 @@
       </p:sp>
       <p:sp>
         <p:nvSpPr>
-          <p:cNvPr id="124" name="Shape 121"/>
+          <p:cNvPr id="120" name="Shape 117"/>
           <p:cNvSpPr/>
           <p:nvPr/>
         </p:nvSpPr>
@@ -21945,7 +21717,7 @@
       </p:sp>
       <p:sp>
         <p:nvSpPr>
-          <p:cNvPr id="125" name="Shape 122"/>
+          <p:cNvPr id="121" name="Shape 118"/>
           <p:cNvSpPr/>
           <p:nvPr/>
         </p:nvSpPr>
@@ -21969,13 +21741,13 @@
       </p:sp>
       <p:sp>
         <p:nvSpPr>
-          <p:cNvPr id="126" name="Shape 123"/>
-          <p:cNvSpPr/>
-          <p:nvPr/>
-        </p:nvSpPr>
-        <p:spPr>
-          <a:xfrm>
-            <a:off x="1473098" y="3802075"/>
+          <p:cNvPr id="122" name="Shape 119"/>
+          <p:cNvSpPr/>
+          <p:nvPr/>
+        </p:nvSpPr>
+        <p:spPr>
+          <a:xfrm>
+            <a:off x="1477670" y="3802075"/>
             <a:ext cx="1897380" cy="113386"/>
           </a:xfrm>
           <a:prstGeom prst="rect">
@@ -21989,7 +21761,7 @@
       </p:sp>
       <p:sp>
         <p:nvSpPr>
-          <p:cNvPr id="127" name="Text 124"/>
+          <p:cNvPr id="123" name="Text 120"/>
           <p:cNvSpPr/>
           <p:nvPr/>
         </p:nvSpPr>
@@ -22031,13 +21803,13 @@
       </p:sp>
       <p:sp>
         <p:nvSpPr>
-          <p:cNvPr id="128" name="Shape 125"/>
-          <p:cNvSpPr/>
-          <p:nvPr/>
-        </p:nvSpPr>
-        <p:spPr>
-          <a:xfrm>
-            <a:off x="3837737" y="3802075"/>
+          <p:cNvPr id="124" name="Shape 121"/>
+          <p:cNvSpPr/>
+          <p:nvPr/>
+        </p:nvSpPr>
+        <p:spPr>
+          <a:xfrm>
+            <a:off x="3842309" y="3802075"/>
             <a:ext cx="1607515" cy="113386"/>
           </a:xfrm>
           <a:prstGeom prst="rect">
@@ -22051,7 +21823,7 @@
       </p:sp>
       <p:sp>
         <p:nvSpPr>
-          <p:cNvPr id="129" name="Text 126"/>
+          <p:cNvPr id="125" name="Text 122"/>
           <p:cNvSpPr/>
           <p:nvPr/>
         </p:nvSpPr>
@@ -22093,7 +21865,315 @@
       </p:sp>
       <p:sp>
         <p:nvSpPr>
+          <p:cNvPr id="126" name="Shape 123"/>
+          <p:cNvSpPr/>
+          <p:nvPr/>
+        </p:nvSpPr>
+        <p:spPr>
+          <a:xfrm>
+            <a:off x="1547165" y="3964838"/>
+            <a:ext cx="1495958" cy="196596"/>
+          </a:xfrm>
+          <a:prstGeom prst="rect">
+            <a:avLst/>
+          </a:prstGeom>
+          <a:solidFill>
+            <a:srgbClr val="FEEFC3"/>
+          </a:solidFill>
+          <a:ln/>
+        </p:spPr>
+      </p:sp>
+      <p:sp>
+        <p:nvSpPr>
+          <p:cNvPr id="127" name="Text 124"/>
+          <p:cNvSpPr/>
+          <p:nvPr/>
+        </p:nvSpPr>
+        <p:spPr>
+          <a:xfrm>
+            <a:off x="1560881" y="3970325"/>
+            <a:ext cx="1994306" cy="210312"/>
+          </a:xfrm>
+          <a:prstGeom prst="rect">
+            <a:avLst/>
+          </a:prstGeom>
+          <a:noFill/>
+          <a:ln/>
+        </p:spPr>
+        <p:txBody>
+          <a:bodyPr wrap="square" lIns="0" tIns="0" rIns="0" bIns="0" rtlCol="0" anchor="t"/>
+          <a:lstStyle/>
+          <a:p>
+            <a:pPr algn="l" indent="0" marL="0">
+              <a:lnSpc>
+                <a:spcPct val="102000"/>
+              </a:lnSpc>
+              <a:buNone/>
+            </a:pPr>
+            <a:r>
+              <a:rPr lang="en-US" sz="470" b="1" dirty="0">
+                <a:solidFill>
+                  <a:srgbClr val="202124"/>
+                </a:solidFill>
+                <a:latin typeface="Arial" pitchFamily="34" charset="0"/>
+                <a:ea typeface="Arial" pitchFamily="34" charset="-122"/>
+                <a:cs typeface="Arial" pitchFamily="34" charset="-120"/>
+              </a:rPr>
+              <a:t>Shared Pooled Runtime</a:t>
+            </a:r>
+            <a:endParaRPr lang="en-US" sz="470" dirty="0"/>
+          </a:p>
+          <a:p>
+            <a:pPr algn="l" indent="0" marL="0">
+              <a:lnSpc>
+                <a:spcPct val="102000"/>
+              </a:lnSpc>
+              <a:buNone/>
+            </a:pPr>
+            <a:r>
+              <a:rPr lang="en-US" sz="400" dirty="0">
+                <a:solidFill>
+                  <a:srgbClr val="202124"/>
+                </a:solidFill>
+                <a:latin typeface="Arial" pitchFamily="34" charset="0"/>
+                <a:ea typeface="Arial" pitchFamily="34" charset="-122"/>
+                <a:cs typeface="Arial" pitchFamily="34" charset="-120"/>
+              </a:rPr>
+              <a:t>pool://cymbal-shared-pooled-v2 (90% Cache Savings)</a:t>
+            </a:r>
+            <a:endParaRPr lang="en-US" sz="470" dirty="0"/>
+          </a:p>
+        </p:txBody>
+      </p:sp>
+      <p:sp>
+        <p:nvSpPr>
+          <p:cNvPr id="128" name="Shape 125"/>
+          <p:cNvSpPr/>
+          <p:nvPr/>
+        </p:nvSpPr>
+        <p:spPr>
+          <a:xfrm>
+            <a:off x="3911803" y="3964838"/>
+            <a:ext cx="1637690" cy="196596"/>
+          </a:xfrm>
+          <a:prstGeom prst="rect">
+            <a:avLst/>
+          </a:prstGeom>
+          <a:solidFill>
+            <a:srgbClr val="FAD2CF"/>
+          </a:solidFill>
+          <a:ln/>
+        </p:spPr>
+      </p:sp>
+      <p:sp>
+        <p:nvSpPr>
+          <p:cNvPr id="129" name="Text 126"/>
+          <p:cNvSpPr/>
+          <p:nvPr/>
+        </p:nvSpPr>
+        <p:spPr>
+          <a:xfrm>
+            <a:off x="3925519" y="3970325"/>
+            <a:ext cx="1994306" cy="210312"/>
+          </a:xfrm>
+          <a:prstGeom prst="rect">
+            <a:avLst/>
+          </a:prstGeom>
+          <a:noFill/>
+          <a:ln/>
+        </p:spPr>
+        <p:txBody>
+          <a:bodyPr wrap="square" lIns="0" tIns="0" rIns="0" bIns="0" rtlCol="0" anchor="t"/>
+          <a:lstStyle/>
+          <a:p>
+            <a:pPr algn="l" indent="0" marL="0">
+              <a:lnSpc>
+                <a:spcPct val="102000"/>
+              </a:lnSpc>
+              <a:buNone/>
+            </a:pPr>
+            <a:r>
+              <a:rPr lang="en-US" sz="470" b="1" dirty="0">
+                <a:solidFill>
+                  <a:srgbClr val="202124"/>
+                </a:solidFill>
+                <a:latin typeface="Arial" pitchFamily="34" charset="0"/>
+                <a:ea typeface="Arial" pitchFamily="34" charset="-122"/>
+                <a:cs typeface="Arial" pitchFamily="34" charset="-120"/>
+              </a:rPr>
+              <a:t>Dedicated Enterprise PSC Spokes</a:t>
+            </a:r>
+            <a:endParaRPr lang="en-US" sz="470" dirty="0"/>
+          </a:p>
+          <a:p>
+            <a:pPr algn="l" indent="0" marL="0">
+              <a:lnSpc>
+                <a:spcPct val="102000"/>
+              </a:lnSpc>
+              <a:buNone/>
+            </a:pPr>
+            <a:r>
+              <a:rPr lang="en-US" sz="400" dirty="0">
+                <a:solidFill>
+                  <a:srgbClr val="202124"/>
+                </a:solidFill>
+                <a:latin typeface="Arial" pitchFamily="34" charset="0"/>
+                <a:ea typeface="Arial" pitchFamily="34" charset="-122"/>
+                <a:cs typeface="Arial" pitchFamily="34" charset="-120"/>
+              </a:rPr>
+              <a:t>cymbal-psc-nat-us-west1 (/28) -&gt; psc://10.10.0.50 &amp; .51</a:t>
+            </a:r>
+            <a:endParaRPr lang="en-US" sz="470" dirty="0"/>
+          </a:p>
+        </p:txBody>
+      </p:sp>
+      <p:sp>
+        <p:nvSpPr>
           <p:cNvPr id="130" name="Shape 127"/>
+          <p:cNvSpPr/>
+          <p:nvPr/>
+        </p:nvSpPr>
+        <p:spPr>
+          <a:xfrm>
+            <a:off x="1468526" y="1921154"/>
+            <a:ext cx="1865376" cy="196596"/>
+          </a:xfrm>
+          <a:prstGeom prst="rect">
+            <a:avLst/>
+          </a:prstGeom>
+          <a:solidFill>
+            <a:srgbClr val="AECBFA"/>
+          </a:solidFill>
+          <a:ln/>
+        </p:spPr>
+      </p:sp>
+      <p:sp>
+        <p:nvSpPr>
+          <p:cNvPr id="131" name="Text 128"/>
+          <p:cNvSpPr/>
+          <p:nvPr/>
+        </p:nvSpPr>
+        <p:spPr>
+          <a:xfrm>
+            <a:off x="1482242" y="1926641"/>
+            <a:ext cx="1901952" cy="210312"/>
+          </a:xfrm>
+          <a:prstGeom prst="rect">
+            <a:avLst/>
+          </a:prstGeom>
+          <a:noFill/>
+          <a:ln/>
+        </p:spPr>
+        <p:txBody>
+          <a:bodyPr wrap="square" lIns="0" tIns="0" rIns="0" bIns="0" rtlCol="0" anchor="t"/>
+          <a:lstStyle/>
+          <a:p>
+            <a:pPr algn="l" indent="0" marL="0">
+              <a:lnSpc>
+                <a:spcPct val="102000"/>
+              </a:lnSpc>
+              <a:buNone/>
+            </a:pPr>
+            <a:r>
+              <a:rPr lang="en-US" sz="470" b="1" dirty="0">
+                <a:solidFill>
+                  <a:srgbClr val="202124"/>
+                </a:solidFill>
+                <a:latin typeface="Arial" pitchFamily="34" charset="0"/>
+                <a:ea typeface="Arial" pitchFamily="34" charset="-122"/>
+                <a:cs typeface="Arial" pitchFamily="34" charset="-120"/>
+              </a:rPr>
+              <a:t>Unified Control Plane &amp; Intelligent Router Hub</a:t>
+            </a:r>
+            <a:endParaRPr lang="en-US" sz="470" dirty="0"/>
+          </a:p>
+          <a:p>
+            <a:pPr algn="l" indent="0" marL="0">
+              <a:lnSpc>
+                <a:spcPct val="102000"/>
+              </a:lnSpc>
+              <a:buNone/>
+            </a:pPr>
+            <a:r>
+              <a:rPr lang="en-US" sz="400" dirty="0">
+                <a:solidFill>
+                  <a:srgbClr val="202124"/>
+                </a:solidFill>
+                <a:latin typeface="Arial" pitchFamily="34" charset="0"/>
+                <a:ea typeface="Arial" pitchFamily="34" charset="-122"/>
+                <a:cs typeface="Arial" pitchFamily="34" charset="-120"/>
+              </a:rPr>
+              <a:t>Firestore live routing table + pattern_c_psc_endpoints_registry</a:t>
+            </a:r>
+            <a:endParaRPr lang="en-US" sz="470" dirty="0"/>
+          </a:p>
+        </p:txBody>
+      </p:sp>
+      <p:sp>
+        <p:nvSpPr>
+          <p:cNvPr id="132" name="Shape 129"/>
+          <p:cNvSpPr/>
+          <p:nvPr/>
+        </p:nvSpPr>
+        <p:spPr>
+          <a:xfrm>
+            <a:off x="4641494" y="1955902"/>
+            <a:ext cx="1315822" cy="118872"/>
+          </a:xfrm>
+          <a:prstGeom prst="rect">
+            <a:avLst/>
+          </a:prstGeom>
+          <a:solidFill>
+            <a:srgbClr val="CEEAD6"/>
+          </a:solidFill>
+          <a:ln/>
+        </p:spPr>
+      </p:sp>
+      <p:sp>
+        <p:nvSpPr>
+          <p:cNvPr id="133" name="Text 130"/>
+          <p:cNvSpPr/>
+          <p:nvPr/>
+        </p:nvSpPr>
+        <p:spPr>
+          <a:xfrm>
+            <a:off x="4655210" y="1961388"/>
+            <a:ext cx="1315822" cy="210312"/>
+          </a:xfrm>
+          <a:prstGeom prst="rect">
+            <a:avLst/>
+          </a:prstGeom>
+          <a:noFill/>
+          <a:ln/>
+        </p:spPr>
+        <p:txBody>
+          <a:bodyPr wrap="square" lIns="0" tIns="0" rIns="0" bIns="0" rtlCol="0" anchor="t"/>
+          <a:lstStyle/>
+          <a:p>
+            <a:pPr algn="l" indent="0" marL="0">
+              <a:lnSpc>
+                <a:spcPct val="102000"/>
+              </a:lnSpc>
+              <a:buNone/>
+            </a:pPr>
+            <a:r>
+              <a:rPr lang="en-US" sz="430" b="1" dirty="0">
+                <a:solidFill>
+                  <a:srgbClr val="202124"/>
+                </a:solidFill>
+                <a:latin typeface="Arial" pitchFamily="34" charset="0"/>
+                <a:ea typeface="Arial" pitchFamily="34" charset="-122"/>
+                <a:cs typeface="Arial" pitchFamily="34" charset="-120"/>
+              </a:rPr>
+              <a:t>Tier Routing &amp; Live Migration Control Plane</a:t>
+            </a:r>
+            <a:endParaRPr lang="en-US" sz="430" dirty="0"/>
+          </a:p>
+        </p:txBody>
+      </p:sp>
+      <p:sp>
+        <p:nvSpPr>
+          <p:cNvPr id="134" name="Shape 131"/>
           <p:cNvSpPr/>
           <p:nvPr/>
         </p:nvSpPr>
@@ -22120,7 +22200,7 @@
       </p:sp>
       <p:pic>
         <p:nvPicPr>
-          <p:cNvPr id="131" name="Image 1" descr="preencoded.png">    </p:cNvPr>
+          <p:cNvPr id="135" name="Image 1" descr="preencoded.png">    </p:cNvPr>
           <p:cNvPicPr>
             <a:picLocks noChangeAspect="1"/>
           </p:cNvPicPr>
@@ -22144,7 +22224,7 @@
       </p:pic>
       <p:sp>
         <p:nvSpPr>
-          <p:cNvPr id="132" name="Text 128"/>
+          <p:cNvPr id="136" name="Text 132"/>
           <p:cNvSpPr/>
           <p:nvPr/>
         </p:nvSpPr>
@@ -22206,7 +22286,7 @@
       </p:sp>
       <p:sp>
         <p:nvSpPr>
-          <p:cNvPr id="133" name="Shape 129"/>
+          <p:cNvPr id="137" name="Shape 133"/>
           <p:cNvSpPr/>
           <p:nvPr/>
         </p:nvSpPr>
@@ -22233,7 +22313,7 @@
       </p:sp>
       <p:pic>
         <p:nvPicPr>
-          <p:cNvPr id="134" name="Image 2" descr="preencoded.png">    </p:cNvPr>
+          <p:cNvPr id="138" name="Image 2" descr="preencoded.png">    </p:cNvPr>
           <p:cNvPicPr>
             <a:picLocks noChangeAspect="1"/>
           </p:cNvPicPr>
@@ -22257,7 +22337,7 @@
       </p:pic>
       <p:sp>
         <p:nvSpPr>
-          <p:cNvPr id="135" name="Text 130"/>
+          <p:cNvPr id="139" name="Text 134"/>
           <p:cNvSpPr/>
           <p:nvPr/>
         </p:nvSpPr>
@@ -22319,7 +22399,7 @@
       </p:sp>
       <p:sp>
         <p:nvSpPr>
-          <p:cNvPr id="136" name="Shape 131"/>
+          <p:cNvPr id="140" name="Shape 135"/>
           <p:cNvSpPr/>
           <p:nvPr/>
         </p:nvSpPr>
@@ -22346,7 +22426,7 @@
       </p:sp>
       <p:pic>
         <p:nvPicPr>
-          <p:cNvPr id="137" name="Image 3" descr="preencoded.png">    </p:cNvPr>
+          <p:cNvPr id="141" name="Image 3" descr="preencoded.png">    </p:cNvPr>
           <p:cNvPicPr>
             <a:picLocks noChangeAspect="1"/>
           </p:cNvPicPr>
@@ -22370,7 +22450,7 @@
       </p:pic>
       <p:sp>
         <p:nvSpPr>
-          <p:cNvPr id="138" name="Text 132"/>
+          <p:cNvPr id="142" name="Text 136"/>
           <p:cNvSpPr/>
           <p:nvPr/>
         </p:nvSpPr>
@@ -22432,7 +22512,7 @@
       </p:sp>
       <p:sp>
         <p:nvSpPr>
-          <p:cNvPr id="139" name="Shape 133"/>
+          <p:cNvPr id="143" name="Shape 137"/>
           <p:cNvSpPr/>
           <p:nvPr/>
         </p:nvSpPr>
@@ -22459,7 +22539,7 @@
       </p:sp>
       <p:pic>
         <p:nvPicPr>
-          <p:cNvPr id="140" name="Image 4" descr="preencoded.png">    </p:cNvPr>
+          <p:cNvPr id="144" name="Image 4" descr="preencoded.png">    </p:cNvPr>
           <p:cNvPicPr>
             <a:picLocks noChangeAspect="1"/>
           </p:cNvPicPr>
@@ -22483,7 +22563,7 @@
       </p:pic>
       <p:sp>
         <p:nvSpPr>
-          <p:cNvPr id="141" name="Text 134"/>
+          <p:cNvPr id="145" name="Text 138"/>
           <p:cNvSpPr/>
           <p:nvPr/>
         </p:nvSpPr>
@@ -22545,7 +22625,7 @@
       </p:sp>
       <p:sp>
         <p:nvSpPr>
-          <p:cNvPr id="142" name="Shape 135"/>
+          <p:cNvPr id="146" name="Shape 139"/>
           <p:cNvSpPr/>
           <p:nvPr/>
         </p:nvSpPr>
@@ -22572,7 +22652,7 @@
       </p:sp>
       <p:pic>
         <p:nvPicPr>
-          <p:cNvPr id="143" name="Image 5" descr="preencoded.png">    </p:cNvPr>
+          <p:cNvPr id="147" name="Image 5" descr="preencoded.png">    </p:cNvPr>
           <p:cNvPicPr>
             <a:picLocks noChangeAspect="1"/>
           </p:cNvPicPr>
@@ -22596,7 +22676,7 @@
       </p:pic>
       <p:sp>
         <p:nvSpPr>
-          <p:cNvPr id="144" name="Text 136"/>
+          <p:cNvPr id="148" name="Text 140"/>
           <p:cNvSpPr/>
           <p:nvPr/>
         </p:nvSpPr>
@@ -22658,7 +22738,7 @@
       </p:sp>
       <p:sp>
         <p:nvSpPr>
-          <p:cNvPr id="145" name="Shape 137"/>
+          <p:cNvPr id="149" name="Shape 141"/>
           <p:cNvSpPr/>
           <p:nvPr/>
         </p:nvSpPr>
@@ -22685,7 +22765,7 @@
       </p:sp>
       <p:pic>
         <p:nvPicPr>
-          <p:cNvPr id="146" name="Image 6" descr="preencoded.png">    </p:cNvPr>
+          <p:cNvPr id="150" name="Image 6" descr="preencoded.png">    </p:cNvPr>
           <p:cNvPicPr>
             <a:picLocks noChangeAspect="1"/>
           </p:cNvPicPr>
@@ -22709,7 +22789,7 @@
       </p:pic>
       <p:sp>
         <p:nvSpPr>
-          <p:cNvPr id="147" name="Text 138"/>
+          <p:cNvPr id="151" name="Text 142"/>
           <p:cNvSpPr/>
           <p:nvPr/>
         </p:nvSpPr>
@@ -22771,7 +22851,7 @@
       </p:sp>
       <p:sp>
         <p:nvSpPr>
-          <p:cNvPr id="148" name="Shape 139"/>
+          <p:cNvPr id="152" name="Shape 143"/>
           <p:cNvSpPr/>
           <p:nvPr/>
         </p:nvSpPr>
@@ -22798,7 +22878,7 @@
       </p:sp>
       <p:pic>
         <p:nvPicPr>
-          <p:cNvPr id="149" name="Image 7" descr="preencoded.png">    </p:cNvPr>
+          <p:cNvPr id="153" name="Image 7" descr="preencoded.png">    </p:cNvPr>
           <p:cNvPicPr>
             <a:picLocks noChangeAspect="1"/>
           </p:cNvPicPr>
@@ -22822,7 +22902,7 @@
       </p:pic>
       <p:sp>
         <p:nvSpPr>
-          <p:cNvPr id="150" name="Text 140"/>
+          <p:cNvPr id="154" name="Text 144"/>
           <p:cNvSpPr/>
           <p:nvPr/>
         </p:nvSpPr>
@@ -22884,7 +22964,7 @@
       </p:sp>
       <p:sp>
         <p:nvSpPr>
-          <p:cNvPr id="151" name="Shape 141"/>
+          <p:cNvPr id="155" name="Shape 145"/>
           <p:cNvSpPr/>
           <p:nvPr/>
         </p:nvSpPr>
@@ -22911,7 +22991,7 @@
       </p:sp>
       <p:pic>
         <p:nvPicPr>
-          <p:cNvPr id="152" name="Image 8" descr="preencoded.png">    </p:cNvPr>
+          <p:cNvPr id="156" name="Image 8" descr="preencoded.png">    </p:cNvPr>
           <p:cNvPicPr>
             <a:picLocks noChangeAspect="1"/>
           </p:cNvPicPr>
@@ -22935,7 +23015,7 @@
       </p:pic>
       <p:sp>
         <p:nvSpPr>
-          <p:cNvPr id="153" name="Text 142"/>
+          <p:cNvPr id="157" name="Text 146"/>
           <p:cNvSpPr/>
           <p:nvPr/>
         </p:nvSpPr>
@@ -22997,7 +23077,7 @@
       </p:sp>
       <p:sp>
         <p:nvSpPr>
-          <p:cNvPr id="154" name="Shape 143"/>
+          <p:cNvPr id="158" name="Shape 147"/>
           <p:cNvSpPr/>
           <p:nvPr/>
         </p:nvSpPr>
@@ -23024,7 +23104,7 @@
       </p:sp>
       <p:pic>
         <p:nvPicPr>
-          <p:cNvPr id="155" name="Image 9" descr="preencoded.png">    </p:cNvPr>
+          <p:cNvPr id="159" name="Image 9" descr="preencoded.png">    </p:cNvPr>
           <p:cNvPicPr>
             <a:picLocks noChangeAspect="1"/>
           </p:cNvPicPr>
@@ -23048,7 +23128,7 @@
       </p:pic>
       <p:sp>
         <p:nvSpPr>
-          <p:cNvPr id="156" name="Text 144"/>
+          <p:cNvPr id="160" name="Text 148"/>
           <p:cNvSpPr/>
           <p:nvPr/>
         </p:nvSpPr>
@@ -23110,7 +23190,7 @@
       </p:sp>
       <p:sp>
         <p:nvSpPr>
-          <p:cNvPr id="157" name="Shape 145"/>
+          <p:cNvPr id="161" name="Shape 149"/>
           <p:cNvSpPr/>
           <p:nvPr/>
         </p:nvSpPr>
@@ -23137,7 +23217,7 @@
       </p:sp>
       <p:pic>
         <p:nvPicPr>
-          <p:cNvPr id="158" name="Image 10" descr="preencoded.png">    </p:cNvPr>
+          <p:cNvPr id="162" name="Image 10" descr="preencoded.png">    </p:cNvPr>
           <p:cNvPicPr>
             <a:picLocks noChangeAspect="1"/>
           </p:cNvPicPr>
@@ -23161,7 +23241,7 @@
       </p:pic>
       <p:sp>
         <p:nvSpPr>
-          <p:cNvPr id="159" name="Text 146"/>
+          <p:cNvPr id="163" name="Text 150"/>
           <p:cNvSpPr/>
           <p:nvPr/>
         </p:nvSpPr>
@@ -23223,7 +23303,7 @@
       </p:sp>
       <p:sp>
         <p:nvSpPr>
-          <p:cNvPr id="160" name="Shape 147"/>
+          <p:cNvPr id="164" name="Shape 151"/>
           <p:cNvSpPr/>
           <p:nvPr/>
         </p:nvSpPr>
@@ -23250,7 +23330,7 @@
       </p:sp>
       <p:pic>
         <p:nvPicPr>
-          <p:cNvPr id="161" name="Image 11" descr="preencoded.png">    </p:cNvPr>
+          <p:cNvPr id="165" name="Image 11" descr="preencoded.png">    </p:cNvPr>
           <p:cNvPicPr>
             <a:picLocks noChangeAspect="1"/>
           </p:cNvPicPr>
@@ -23274,7 +23354,7 @@
       </p:pic>
       <p:sp>
         <p:nvSpPr>
-          <p:cNvPr id="162" name="Text 148"/>
+          <p:cNvPr id="166" name="Text 152"/>
           <p:cNvSpPr/>
           <p:nvPr/>
         </p:nvSpPr>
@@ -23336,7 +23416,7 @@
       </p:sp>
       <p:sp>
         <p:nvSpPr>
-          <p:cNvPr id="163" name="Shape 149"/>
+          <p:cNvPr id="167" name="Shape 153"/>
           <p:cNvSpPr/>
           <p:nvPr/>
         </p:nvSpPr>
@@ -23363,7 +23443,7 @@
       </p:sp>
       <p:pic>
         <p:nvPicPr>
-          <p:cNvPr id="164" name="Image 12" descr="preencoded.png">    </p:cNvPr>
+          <p:cNvPr id="168" name="Image 12" descr="preencoded.png">    </p:cNvPr>
           <p:cNvPicPr>
             <a:picLocks noChangeAspect="1"/>
           </p:cNvPicPr>
@@ -23387,7 +23467,7 @@
       </p:pic>
       <p:sp>
         <p:nvSpPr>
-          <p:cNvPr id="165" name="Text 150"/>
+          <p:cNvPr id="169" name="Text 154"/>
           <p:cNvSpPr/>
           <p:nvPr/>
         </p:nvSpPr>
@@ -23449,7 +23529,7 @@
       </p:sp>
       <p:sp>
         <p:nvSpPr>
-          <p:cNvPr id="166" name="Shape 151"/>
+          <p:cNvPr id="170" name="Shape 155"/>
           <p:cNvSpPr/>
           <p:nvPr/>
         </p:nvSpPr>
@@ -23476,7 +23556,7 @@
       </p:sp>
       <p:pic>
         <p:nvPicPr>
-          <p:cNvPr id="167" name="Image 13" descr="preencoded.png">    </p:cNvPr>
+          <p:cNvPr id="171" name="Image 13" descr="preencoded.png">    </p:cNvPr>
           <p:cNvPicPr>
             <a:picLocks noChangeAspect="1"/>
           </p:cNvPicPr>
@@ -23500,7 +23580,7 @@
       </p:pic>
       <p:sp>
         <p:nvSpPr>
-          <p:cNvPr id="168" name="Text 152"/>
+          <p:cNvPr id="172" name="Text 156"/>
           <p:cNvSpPr/>
           <p:nvPr/>
         </p:nvSpPr>
@@ -23562,7 +23642,7 @@
       </p:sp>
       <p:sp>
         <p:nvSpPr>
-          <p:cNvPr id="169" name="Shape 153"/>
+          <p:cNvPr id="173" name="Shape 157"/>
           <p:cNvSpPr/>
           <p:nvPr/>
         </p:nvSpPr>
@@ -23589,7 +23669,7 @@
       </p:sp>
       <p:pic>
         <p:nvPicPr>
-          <p:cNvPr id="170" name="Image 14" descr="preencoded.png">    </p:cNvPr>
+          <p:cNvPr id="174" name="Image 14" descr="preencoded.png">    </p:cNvPr>
           <p:cNvPicPr>
             <a:picLocks noChangeAspect="1"/>
           </p:cNvPicPr>
@@ -23613,7 +23693,7 @@
       </p:pic>
       <p:sp>
         <p:nvSpPr>
-          <p:cNvPr id="171" name="Text 154"/>
+          <p:cNvPr id="175" name="Text 158"/>
           <p:cNvSpPr/>
           <p:nvPr/>
         </p:nvSpPr>
@@ -23675,7 +23755,7 @@
       </p:sp>
       <p:sp>
         <p:nvSpPr>
-          <p:cNvPr id="172" name="Shape 155"/>
+          <p:cNvPr id="176" name="Shape 159"/>
           <p:cNvSpPr/>
           <p:nvPr/>
         </p:nvSpPr>
@@ -23702,7 +23782,7 @@
       </p:sp>
       <p:pic>
         <p:nvPicPr>
-          <p:cNvPr id="173" name="Image 15" descr="preencoded.png">    </p:cNvPr>
+          <p:cNvPr id="177" name="Image 15" descr="preencoded.png">    </p:cNvPr>
           <p:cNvPicPr>
             <a:picLocks noChangeAspect="1"/>
           </p:cNvPicPr>
@@ -23726,7 +23806,7 @@
       </p:pic>
       <p:sp>
         <p:nvSpPr>
-          <p:cNvPr id="174" name="Text 156"/>
+          <p:cNvPr id="178" name="Text 160"/>
           <p:cNvSpPr/>
           <p:nvPr/>
         </p:nvSpPr>
@@ -23788,7 +23868,7 @@
       </p:sp>
       <p:sp>
         <p:nvSpPr>
-          <p:cNvPr id="175" name="Shape 157"/>
+          <p:cNvPr id="179" name="Shape 161"/>
           <p:cNvSpPr/>
           <p:nvPr/>
         </p:nvSpPr>
@@ -23815,7 +23895,7 @@
       </p:sp>
       <p:pic>
         <p:nvPicPr>
-          <p:cNvPr id="176" name="Image 16" descr="preencoded.png">    </p:cNvPr>
+          <p:cNvPr id="180" name="Image 16" descr="preencoded.png">    </p:cNvPr>
           <p:cNvPicPr>
             <a:picLocks noChangeAspect="1"/>
           </p:cNvPicPr>
@@ -23839,7 +23919,7 @@
       </p:pic>
       <p:sp>
         <p:nvSpPr>
-          <p:cNvPr id="177" name="Text 158"/>
+          <p:cNvPr id="181" name="Text 162"/>
           <p:cNvSpPr/>
           <p:nvPr/>
         </p:nvSpPr>
@@ -23901,7 +23981,7 @@
       </p:sp>
       <p:sp>
         <p:nvSpPr>
-          <p:cNvPr id="178" name="Shape 159"/>
+          <p:cNvPr id="182" name="Shape 163"/>
           <p:cNvSpPr/>
           <p:nvPr/>
         </p:nvSpPr>
@@ -23928,7 +24008,7 @@
       </p:sp>
       <p:pic>
         <p:nvPicPr>
-          <p:cNvPr id="179" name="Image 17" descr="preencoded.png">    </p:cNvPr>
+          <p:cNvPr id="183" name="Image 17" descr="preencoded.png">    </p:cNvPr>
           <p:cNvPicPr>
             <a:picLocks noChangeAspect="1"/>
           </p:cNvPicPr>
@@ -23952,7 +24032,7 @@
       </p:pic>
       <p:sp>
         <p:nvSpPr>
-          <p:cNvPr id="180" name="Text 160"/>
+          <p:cNvPr id="184" name="Text 164"/>
           <p:cNvSpPr/>
           <p:nvPr/>
         </p:nvSpPr>
@@ -24014,7 +24094,7 @@
       </p:sp>
       <p:sp>
         <p:nvSpPr>
-          <p:cNvPr id="181" name="Shape 161"/>
+          <p:cNvPr id="185" name="Shape 165"/>
           <p:cNvSpPr/>
           <p:nvPr/>
         </p:nvSpPr>
@@ -24041,7 +24121,7 @@
       </p:sp>
       <p:pic>
         <p:nvPicPr>
-          <p:cNvPr id="182" name="Image 18" descr="preencoded.png">    </p:cNvPr>
+          <p:cNvPr id="186" name="Image 18" descr="preencoded.png">    </p:cNvPr>
           <p:cNvPicPr>
             <a:picLocks noChangeAspect="1"/>
           </p:cNvPicPr>
@@ -24065,7 +24145,7 @@
       </p:pic>
       <p:sp>
         <p:nvSpPr>
-          <p:cNvPr id="183" name="Text 162"/>
+          <p:cNvPr id="187" name="Text 166"/>
           <p:cNvSpPr/>
           <p:nvPr/>
         </p:nvSpPr>
@@ -24127,7 +24207,7 @@
       </p:sp>
       <p:sp>
         <p:nvSpPr>
-          <p:cNvPr id="184" name="Shape 163"/>
+          <p:cNvPr id="188" name="Shape 167"/>
           <p:cNvSpPr/>
           <p:nvPr/>
         </p:nvSpPr>
@@ -24154,7 +24234,7 @@
       </p:sp>
       <p:pic>
         <p:nvPicPr>
-          <p:cNvPr id="185" name="Image 19" descr="preencoded.png">    </p:cNvPr>
+          <p:cNvPr id="189" name="Image 19" descr="preencoded.png">    </p:cNvPr>
           <p:cNvPicPr>
             <a:picLocks noChangeAspect="1"/>
           </p:cNvPicPr>
@@ -24178,7 +24258,7 @@
       </p:pic>
       <p:sp>
         <p:nvSpPr>
-          <p:cNvPr id="186" name="Text 164"/>
+          <p:cNvPr id="190" name="Text 168"/>
           <p:cNvSpPr/>
           <p:nvPr/>
         </p:nvSpPr>
@@ -24240,7 +24320,7 @@
       </p:sp>
       <p:sp>
         <p:nvSpPr>
-          <p:cNvPr id="187" name="Shape 165"/>
+          <p:cNvPr id="191" name="Shape 169"/>
           <p:cNvSpPr/>
           <p:nvPr/>
         </p:nvSpPr>
@@ -24265,7 +24345,7 @@
       </p:sp>
       <p:sp>
         <p:nvSpPr>
-          <p:cNvPr id="188" name="Text 166"/>
+          <p:cNvPr id="192" name="Text 170"/>
           <p:cNvSpPr/>
           <p:nvPr/>
         </p:nvSpPr>
@@ -24304,7 +24384,7 @@
       </p:sp>
       <p:sp>
         <p:nvSpPr>
-          <p:cNvPr id="189" name="Shape 167"/>
+          <p:cNvPr id="193" name="Shape 171"/>
           <p:cNvSpPr/>
           <p:nvPr/>
         </p:nvSpPr>
@@ -24329,7 +24409,7 @@
       </p:sp>
       <p:sp>
         <p:nvSpPr>
-          <p:cNvPr id="190" name="Text 168"/>
+          <p:cNvPr id="194" name="Text 172"/>
           <p:cNvSpPr/>
           <p:nvPr/>
         </p:nvSpPr>
@@ -24368,7 +24448,7 @@
       </p:sp>
       <p:sp>
         <p:nvSpPr>
-          <p:cNvPr id="191" name="Shape 169"/>
+          <p:cNvPr id="195" name="Shape 173"/>
           <p:cNvSpPr/>
           <p:nvPr/>
         </p:nvSpPr>
@@ -24393,7 +24473,7 @@
       </p:sp>
       <p:sp>
         <p:nvSpPr>
-          <p:cNvPr id="192" name="Text 170"/>
+          <p:cNvPr id="196" name="Text 174"/>
           <p:cNvSpPr/>
           <p:nvPr/>
         </p:nvSpPr>
@@ -24432,7 +24512,7 @@
       </p:sp>
       <p:sp>
         <p:nvSpPr>
-          <p:cNvPr id="193" name="Shape 171"/>
+          <p:cNvPr id="197" name="Shape 175"/>
           <p:cNvSpPr/>
           <p:nvPr/>
         </p:nvSpPr>
@@ -24457,7 +24537,7 @@
       </p:sp>
       <p:sp>
         <p:nvSpPr>
-          <p:cNvPr id="194" name="Text 172"/>
+          <p:cNvPr id="198" name="Text 176"/>
           <p:cNvSpPr/>
           <p:nvPr/>
         </p:nvSpPr>
@@ -24496,7 +24576,7 @@
       </p:sp>
       <p:sp>
         <p:nvSpPr>
-          <p:cNvPr id="195" name="Shape 173"/>
+          <p:cNvPr id="199" name="Shape 177"/>
           <p:cNvSpPr/>
           <p:nvPr/>
         </p:nvSpPr>
@@ -24521,7 +24601,7 @@
       </p:sp>
       <p:sp>
         <p:nvSpPr>
-          <p:cNvPr id="196" name="Text 174"/>
+          <p:cNvPr id="200" name="Text 178"/>
           <p:cNvSpPr/>
           <p:nvPr/>
         </p:nvSpPr>
@@ -24560,7 +24640,7 @@
       </p:sp>
       <p:sp>
         <p:nvSpPr>
-          <p:cNvPr id="197" name="Shape 175"/>
+          <p:cNvPr id="201" name="Shape 179"/>
           <p:cNvSpPr/>
           <p:nvPr/>
         </p:nvSpPr>
@@ -24585,7 +24665,7 @@
       </p:sp>
       <p:sp>
         <p:nvSpPr>
-          <p:cNvPr id="198" name="Text 176"/>
+          <p:cNvPr id="202" name="Text 180"/>
           <p:cNvSpPr/>
           <p:nvPr/>
         </p:nvSpPr>
@@ -24624,7 +24704,7 @@
       </p:sp>
       <p:sp>
         <p:nvSpPr>
-          <p:cNvPr id="199" name="Shape 177"/>
+          <p:cNvPr id="203" name="Shape 181"/>
           <p:cNvSpPr/>
           <p:nvPr/>
         </p:nvSpPr>
@@ -24649,7 +24729,7 @@
       </p:sp>
       <p:sp>
         <p:nvSpPr>
-          <p:cNvPr id="200" name="Text 178"/>
+          <p:cNvPr id="204" name="Text 182"/>
           <p:cNvSpPr/>
           <p:nvPr/>
         </p:nvSpPr>
@@ -24688,7 +24768,7 @@
       </p:sp>
       <p:sp>
         <p:nvSpPr>
-          <p:cNvPr id="201" name="Shape 179"/>
+          <p:cNvPr id="205" name="Shape 183"/>
           <p:cNvSpPr/>
           <p:nvPr/>
         </p:nvSpPr>
@@ -24713,7 +24793,7 @@
       </p:sp>
       <p:sp>
         <p:nvSpPr>
-          <p:cNvPr id="202" name="Text 180"/>
+          <p:cNvPr id="206" name="Text 184"/>
           <p:cNvSpPr/>
           <p:nvPr/>
         </p:nvSpPr>
@@ -24752,7 +24832,7 @@
       </p:sp>
       <p:sp>
         <p:nvSpPr>
-          <p:cNvPr id="203" name="Shape 181"/>
+          <p:cNvPr id="207" name="Shape 185"/>
           <p:cNvSpPr/>
           <p:nvPr/>
         </p:nvSpPr>
@@ -24777,7 +24857,7 @@
       </p:sp>
       <p:sp>
         <p:nvSpPr>
-          <p:cNvPr id="204" name="Text 182"/>
+          <p:cNvPr id="208" name="Text 186"/>
           <p:cNvSpPr/>
           <p:nvPr/>
         </p:nvSpPr>
@@ -24816,18 +24896,18 @@
       </p:sp>
       <p:sp>
         <p:nvSpPr>
-          <p:cNvPr id="205" name="Shape 183"/>
-          <p:cNvSpPr/>
-          <p:nvPr/>
-        </p:nvSpPr>
-        <p:spPr>
-          <a:xfrm>
-            <a:off x="5339182" y="3353105"/>
-            <a:ext cx="617220" cy="217627"/>
+          <p:cNvPr id="209" name="Shape 187"/>
+          <p:cNvSpPr/>
+          <p:nvPr/>
+        </p:nvSpPr>
+        <p:spPr>
+          <a:xfrm>
+            <a:off x="5339182" y="3390595"/>
+            <a:ext cx="580644" cy="142646"/>
           </a:xfrm>
           <a:prstGeom prst="roundRect">
             <a:avLst>
-              <a:gd name="adj" fmla="val 21008"/>
+              <a:gd name="adj" fmla="val 28846"/>
             </a:avLst>
           </a:prstGeom>
           <a:solidFill>
@@ -24843,14 +24923,14 @@
       </p:sp>
       <p:sp>
         <p:nvSpPr>
-          <p:cNvPr id="206" name="Text 184"/>
-          <p:cNvSpPr/>
-          <p:nvPr/>
-        </p:nvSpPr>
-        <p:spPr>
-          <a:xfrm>
-            <a:off x="5359298" y="3362249"/>
-            <a:ext cx="576986" cy="199339"/>
+          <p:cNvPr id="210" name="Text 188"/>
+          <p:cNvSpPr/>
+          <p:nvPr/>
+        </p:nvSpPr>
+        <p:spPr>
+          <a:xfrm>
+            <a:off x="5357470" y="3396082"/>
+            <a:ext cx="544068" cy="131674"/>
           </a:xfrm>
           <a:prstGeom prst="rect">
             <a:avLst/>
@@ -24864,12 +24944,12 @@
           <a:p>
             <a:pPr algn="ctr" indent="0" marL="0">
               <a:lnSpc>
-                <a:spcPct val="102000"/>
+                <a:spcPct val="100000"/>
               </a:lnSpc>
               <a:buNone/>
             </a:pPr>
             <a:r>
-              <a:rPr lang="en-US" sz="410" b="1" dirty="0">
+              <a:rPr lang="en-US" sz="385" b="1" dirty="0">
                 <a:solidFill>
                   <a:srgbClr val="202124"/>
                 </a:solidFill>
@@ -24879,17 +24959,17 @@
               </a:rPr>
               <a:t>Live promotion:</a:t>
             </a:r>
-            <a:endParaRPr lang="en-US" sz="410" dirty="0"/>
+            <a:endParaRPr lang="en-US" sz="385" dirty="0"/>
           </a:p>
           <a:p>
             <a:pPr algn="ctr" indent="0" marL="0">
               <a:lnSpc>
-                <a:spcPct val="102000"/>
+                <a:spcPct val="100000"/>
               </a:lnSpc>
               <a:buNone/>
             </a:pPr>
             <a:r>
-              <a:rPr lang="en-US" sz="375" dirty="0">
+              <a:rPr lang="en-US" sz="350" dirty="0">
                 <a:solidFill>
                   <a:srgbClr val="202124"/>
                 </a:solidFill>
@@ -24899,24 +24979,24 @@
               </a:rPr>
               <a:t>Pool -&gt; PSC Spoke</a:t>
             </a:r>
-            <a:endParaRPr lang="en-US" sz="410" dirty="0"/>
-          </a:p>
-        </p:txBody>
-      </p:sp>
-      <p:sp>
-        <p:nvSpPr>
-          <p:cNvPr id="207" name="Shape 185"/>
-          <p:cNvSpPr/>
-          <p:nvPr/>
-        </p:nvSpPr>
-        <p:spPr>
-          <a:xfrm>
-            <a:off x="2856586" y="4817974"/>
-            <a:ext cx="452628" cy="208483"/>
+            <a:endParaRPr lang="en-US" sz="385" dirty="0"/>
+          </a:p>
+        </p:txBody>
+      </p:sp>
+      <p:sp>
+        <p:nvSpPr>
+          <p:cNvPr id="211" name="Shape 189"/>
+          <p:cNvSpPr/>
+          <p:nvPr/>
+        </p:nvSpPr>
+        <p:spPr>
+          <a:xfrm>
+            <a:off x="2871216" y="4850892"/>
+            <a:ext cx="424282" cy="142646"/>
           </a:xfrm>
           <a:prstGeom prst="roundRect">
             <a:avLst>
-              <a:gd name="adj" fmla="val 21930"/>
+              <a:gd name="adj" fmla="val 28846"/>
             </a:avLst>
           </a:prstGeom>
           <a:solidFill>
@@ -24932,14 +25012,14 @@
       </p:sp>
       <p:sp>
         <p:nvSpPr>
-          <p:cNvPr id="208" name="Text 186"/>
-          <p:cNvSpPr/>
-          <p:nvPr/>
-        </p:nvSpPr>
-        <p:spPr>
-          <a:xfrm>
-            <a:off x="2876702" y="4827118"/>
-            <a:ext cx="412394" cy="190195"/>
+          <p:cNvPr id="212" name="Text 190"/>
+          <p:cNvSpPr/>
+          <p:nvPr/>
+        </p:nvSpPr>
+        <p:spPr>
+          <a:xfrm>
+            <a:off x="2889504" y="4856378"/>
+            <a:ext cx="387706" cy="131674"/>
           </a:xfrm>
           <a:prstGeom prst="rect">
             <a:avLst/>
@@ -24953,12 +25033,12 @@
           <a:p>
             <a:pPr algn="ctr" indent="0" marL="0">
               <a:lnSpc>
-                <a:spcPct val="102000"/>
+                <a:spcPct val="100000"/>
               </a:lnSpc>
               <a:buNone/>
             </a:pPr>
             <a:r>
-              <a:rPr lang="en-US" sz="410" b="1" dirty="0">
+              <a:rPr lang="en-US" sz="385" b="1" dirty="0">
                 <a:solidFill>
                   <a:srgbClr val="202124"/>
                 </a:solidFill>
@@ -24968,17 +25048,17 @@
               </a:rPr>
               <a:t>Shared Pool</a:t>
             </a:r>
-            <a:endParaRPr lang="en-US" sz="410" dirty="0"/>
+            <a:endParaRPr lang="en-US" sz="385" dirty="0"/>
           </a:p>
           <a:p>
             <a:pPr algn="ctr" indent="0" marL="0">
               <a:lnSpc>
-                <a:spcPct val="102000"/>
+                <a:spcPct val="100000"/>
               </a:lnSpc>
               <a:buNone/>
             </a:pPr>
             <a:r>
-              <a:rPr lang="en-US" sz="375" dirty="0">
+              <a:rPr lang="en-US" sz="350" dirty="0">
                 <a:solidFill>
                   <a:srgbClr val="202124"/>
                 </a:solidFill>
@@ -24988,24 +25068,24 @@
               </a:rPr>
               <a:t>RAG</a:t>
             </a:r>
-            <a:endParaRPr lang="en-US" sz="410" dirty="0"/>
-          </a:p>
-        </p:txBody>
-      </p:sp>
-      <p:sp>
-        <p:nvSpPr>
-          <p:cNvPr id="209" name="Shape 187"/>
-          <p:cNvSpPr/>
-          <p:nvPr/>
-        </p:nvSpPr>
-        <p:spPr>
-          <a:xfrm>
-            <a:off x="2788920" y="5452567"/>
-            <a:ext cx="589788" cy="208483"/>
+            <a:endParaRPr lang="en-US" sz="385" dirty="0"/>
+          </a:p>
+        </p:txBody>
+      </p:sp>
+      <p:sp>
+        <p:nvSpPr>
+          <p:cNvPr id="213" name="Shape 191"/>
+          <p:cNvSpPr/>
+          <p:nvPr/>
+        </p:nvSpPr>
+        <p:spPr>
+          <a:xfrm>
+            <a:off x="2806294" y="5485486"/>
+            <a:ext cx="554126" cy="142646"/>
           </a:xfrm>
           <a:prstGeom prst="roundRect">
             <a:avLst>
-              <a:gd name="adj" fmla="val 21930"/>
+              <a:gd name="adj" fmla="val 28846"/>
             </a:avLst>
           </a:prstGeom>
           <a:solidFill>
@@ -25021,14 +25101,14 @@
       </p:sp>
       <p:sp>
         <p:nvSpPr>
-          <p:cNvPr id="210" name="Text 188"/>
-          <p:cNvSpPr/>
-          <p:nvPr/>
-        </p:nvSpPr>
-        <p:spPr>
-          <a:xfrm>
-            <a:off x="2809037" y="5461711"/>
-            <a:ext cx="549554" cy="190195"/>
+          <p:cNvPr id="214" name="Text 192"/>
+          <p:cNvSpPr/>
+          <p:nvPr/>
+        </p:nvSpPr>
+        <p:spPr>
+          <a:xfrm>
+            <a:off x="2824582" y="5490972"/>
+            <a:ext cx="517550" cy="131674"/>
           </a:xfrm>
           <a:prstGeom prst="rect">
             <a:avLst/>
@@ -25042,12 +25122,12 @@
           <a:p>
             <a:pPr algn="ctr" indent="0" marL="0">
               <a:lnSpc>
-                <a:spcPct val="102000"/>
+                <a:spcPct val="100000"/>
               </a:lnSpc>
               <a:buNone/>
             </a:pPr>
             <a:r>
-              <a:rPr lang="en-US" sz="410" b="1" dirty="0">
+              <a:rPr lang="en-US" sz="385" b="1" dirty="0">
                 <a:solidFill>
                   <a:srgbClr val="202124"/>
                 </a:solidFill>
@@ -25057,17 +25137,17 @@
               </a:rPr>
               <a:t>Streams State to</a:t>
             </a:r>
-            <a:endParaRPr lang="en-US" sz="410" dirty="0"/>
+            <a:endParaRPr lang="en-US" sz="385" dirty="0"/>
           </a:p>
           <a:p>
             <a:pPr algn="ctr" indent="0" marL="0">
               <a:lnSpc>
-                <a:spcPct val="102000"/>
+                <a:spcPct val="100000"/>
               </a:lnSpc>
               <a:buNone/>
             </a:pPr>
             <a:r>
-              <a:rPr lang="en-US" sz="375" dirty="0">
+              <a:rPr lang="en-US" sz="350" dirty="0">
                 <a:solidFill>
                   <a:srgbClr val="202124"/>
                 </a:solidFill>
@@ -25077,24 +25157,24 @@
               </a:rPr>
               <a:t>PSC Spoke</a:t>
             </a:r>
-            <a:endParaRPr lang="en-US" sz="410" dirty="0"/>
-          </a:p>
-        </p:txBody>
-      </p:sp>
-      <p:sp>
-        <p:nvSpPr>
-          <p:cNvPr id="211" name="Shape 189"/>
-          <p:cNvSpPr/>
-          <p:nvPr/>
-        </p:nvSpPr>
-        <p:spPr>
-          <a:xfrm>
-            <a:off x="5180076" y="4817974"/>
-            <a:ext cx="534924" cy="208483"/>
+            <a:endParaRPr lang="en-US" sz="385" dirty="0"/>
+          </a:p>
+        </p:txBody>
+      </p:sp>
+      <p:sp>
+        <p:nvSpPr>
+          <p:cNvPr id="215" name="Shape 193"/>
+          <p:cNvSpPr/>
+          <p:nvPr/>
+        </p:nvSpPr>
+        <p:spPr>
+          <a:xfrm>
+            <a:off x="5197450" y="4850892"/>
+            <a:ext cx="502006" cy="142646"/>
           </a:xfrm>
           <a:prstGeom prst="roundRect">
             <a:avLst>
-              <a:gd name="adj" fmla="val 21930"/>
+              <a:gd name="adj" fmla="val 28846"/>
             </a:avLst>
           </a:prstGeom>
           <a:solidFill>
@@ -25110,14 +25190,14 @@
       </p:sp>
       <p:sp>
         <p:nvSpPr>
-          <p:cNvPr id="212" name="Text 190"/>
-          <p:cNvSpPr/>
-          <p:nvPr/>
-        </p:nvSpPr>
-        <p:spPr>
-          <a:xfrm>
-            <a:off x="5200193" y="4827118"/>
-            <a:ext cx="494690" cy="190195"/>
+          <p:cNvPr id="216" name="Text 194"/>
+          <p:cNvSpPr/>
+          <p:nvPr/>
+        </p:nvSpPr>
+        <p:spPr>
+          <a:xfrm>
+            <a:off x="5215738" y="4856378"/>
+            <a:ext cx="465430" cy="131674"/>
           </a:xfrm>
           <a:prstGeom prst="rect">
             <a:avLst/>
@@ -25131,12 +25211,12 @@
           <a:p>
             <a:pPr algn="ctr" indent="0" marL="0">
               <a:lnSpc>
-                <a:spcPct val="102000"/>
+                <a:spcPct val="100000"/>
               </a:lnSpc>
               <a:buNone/>
             </a:pPr>
             <a:r>
-              <a:rPr lang="en-US" sz="410" b="1" dirty="0">
+              <a:rPr lang="en-US" sz="385" b="1" dirty="0">
                 <a:solidFill>
                   <a:srgbClr val="202124"/>
                 </a:solidFill>
@@ -25146,17 +25226,17 @@
               </a:rPr>
               <a:t>Unidirectional</a:t>
             </a:r>
-            <a:endParaRPr lang="en-US" sz="410" dirty="0"/>
+            <a:endParaRPr lang="en-US" sz="385" dirty="0"/>
           </a:p>
           <a:p>
             <a:pPr algn="ctr" indent="0" marL="0">
               <a:lnSpc>
-                <a:spcPct val="102000"/>
+                <a:spcPct val="100000"/>
               </a:lnSpc>
               <a:buNone/>
             </a:pPr>
             <a:r>
-              <a:rPr lang="en-US" sz="375" dirty="0">
+              <a:rPr lang="en-US" sz="350" dirty="0">
                 <a:solidFill>
                   <a:srgbClr val="202124"/>
                 </a:solidFill>
@@ -25166,24 +25246,24 @@
               </a:rPr>
               <a:t>PSC Bridge</a:t>
             </a:r>
-            <a:endParaRPr lang="en-US" sz="410" dirty="0"/>
-          </a:p>
-        </p:txBody>
-      </p:sp>
-      <p:sp>
-        <p:nvSpPr>
-          <p:cNvPr id="213" name="Shape 191"/>
-          <p:cNvSpPr/>
-          <p:nvPr/>
-        </p:nvSpPr>
-        <p:spPr>
-          <a:xfrm>
-            <a:off x="5180076" y="5452567"/>
-            <a:ext cx="534924" cy="208483"/>
+            <a:endParaRPr lang="en-US" sz="385" dirty="0"/>
+          </a:p>
+        </p:txBody>
+      </p:sp>
+      <p:sp>
+        <p:nvSpPr>
+          <p:cNvPr id="217" name="Shape 195"/>
+          <p:cNvSpPr/>
+          <p:nvPr/>
+        </p:nvSpPr>
+        <p:spPr>
+          <a:xfrm>
+            <a:off x="5197450" y="5485486"/>
+            <a:ext cx="502006" cy="142646"/>
           </a:xfrm>
           <a:prstGeom prst="roundRect">
             <a:avLst>
-              <a:gd name="adj" fmla="val 21930"/>
+              <a:gd name="adj" fmla="val 28846"/>
             </a:avLst>
           </a:prstGeom>
           <a:solidFill>
@@ -25199,14 +25279,14 @@
       </p:sp>
       <p:sp>
         <p:nvSpPr>
-          <p:cNvPr id="214" name="Text 192"/>
-          <p:cNvSpPr/>
-          <p:nvPr/>
-        </p:nvSpPr>
-        <p:spPr>
-          <a:xfrm>
-            <a:off x="5200193" y="5461711"/>
-            <a:ext cx="494690" cy="190195"/>
+          <p:cNvPr id="218" name="Text 196"/>
+          <p:cNvSpPr/>
+          <p:nvPr/>
+        </p:nvSpPr>
+        <p:spPr>
+          <a:xfrm>
+            <a:off x="5215738" y="5490972"/>
+            <a:ext cx="465430" cy="131674"/>
           </a:xfrm>
           <a:prstGeom prst="rect">
             <a:avLst/>
@@ -25220,12 +25300,12 @@
           <a:p>
             <a:pPr algn="ctr" indent="0" marL="0">
               <a:lnSpc>
-                <a:spcPct val="102000"/>
+                <a:spcPct val="100000"/>
               </a:lnSpc>
               <a:buNone/>
             </a:pPr>
             <a:r>
-              <a:rPr lang="en-US" sz="410" b="1" dirty="0">
+              <a:rPr lang="en-US" sz="385" b="1" dirty="0">
                 <a:solidFill>
                   <a:srgbClr val="202124"/>
                 </a:solidFill>
@@ -25235,17 +25315,17 @@
               </a:rPr>
               <a:t>CMEK-Encrypted</a:t>
             </a:r>
-            <a:endParaRPr lang="en-US" sz="410" dirty="0"/>
+            <a:endParaRPr lang="en-US" sz="385" dirty="0"/>
           </a:p>
           <a:p>
             <a:pPr algn="ctr" indent="0" marL="0">
               <a:lnSpc>
-                <a:spcPct val="102000"/>
+                <a:spcPct val="100000"/>
               </a:lnSpc>
               <a:buNone/>
             </a:pPr>
             <a:r>
-              <a:rPr lang="en-US" sz="375" dirty="0">
+              <a:rPr lang="en-US" sz="350" dirty="0">
                 <a:solidFill>
                   <a:srgbClr val="202124"/>
                 </a:solidFill>
@@ -25255,24 +25335,24 @@
               </a:rPr>
               <a:t>Spoke Storage</a:t>
             </a:r>
-            <a:endParaRPr lang="en-US" sz="410" dirty="0"/>
-          </a:p>
-        </p:txBody>
-      </p:sp>
-      <p:sp>
-        <p:nvSpPr>
-          <p:cNvPr id="215" name="Shape 193"/>
-          <p:cNvSpPr/>
-          <p:nvPr/>
-        </p:nvSpPr>
-        <p:spPr>
-          <a:xfrm>
-            <a:off x="1757477" y="5604358"/>
-            <a:ext cx="397764" cy="208483"/>
+            <a:endParaRPr lang="en-US" sz="385" dirty="0"/>
+          </a:p>
+        </p:txBody>
+      </p:sp>
+      <p:sp>
+        <p:nvSpPr>
+          <p:cNvPr id="219" name="Shape 197"/>
+          <p:cNvSpPr/>
+          <p:nvPr/>
+        </p:nvSpPr>
+        <p:spPr>
+          <a:xfrm>
+            <a:off x="1757477" y="5637276"/>
+            <a:ext cx="372161" cy="142646"/>
           </a:xfrm>
           <a:prstGeom prst="roundRect">
             <a:avLst>
-              <a:gd name="adj" fmla="val 21930"/>
+              <a:gd name="adj" fmla="val 28846"/>
             </a:avLst>
           </a:prstGeom>
           <a:solidFill>
@@ -25288,14 +25368,14 @@
       </p:sp>
       <p:sp>
         <p:nvSpPr>
-          <p:cNvPr id="216" name="Text 194"/>
-          <p:cNvSpPr/>
-          <p:nvPr/>
-        </p:nvSpPr>
-        <p:spPr>
-          <a:xfrm>
-            <a:off x="1777594" y="5613502"/>
-            <a:ext cx="357530" cy="190195"/>
+          <p:cNvPr id="220" name="Text 198"/>
+          <p:cNvSpPr/>
+          <p:nvPr/>
+        </p:nvSpPr>
+        <p:spPr>
+          <a:xfrm>
+            <a:off x="1775765" y="5642762"/>
+            <a:ext cx="335585" cy="131674"/>
           </a:xfrm>
           <a:prstGeom prst="rect">
             <a:avLst/>
@@ -25309,12 +25389,12 @@
           <a:p>
             <a:pPr algn="ctr" indent="0" marL="0">
               <a:lnSpc>
-                <a:spcPct val="102000"/>
+                <a:spcPct val="100000"/>
               </a:lnSpc>
               <a:buNone/>
             </a:pPr>
             <a:r>
-              <a:rPr lang="en-US" sz="410" b="1" dirty="0">
+              <a:rPr lang="en-US" sz="385" b="1" dirty="0">
                 <a:solidFill>
                   <a:srgbClr val="202124"/>
                 </a:solidFill>
@@ -25324,17 +25404,17 @@
               </a:rPr>
               <a:t>Pooled</a:t>
             </a:r>
-            <a:endParaRPr lang="en-US" sz="410" dirty="0"/>
+            <a:endParaRPr lang="en-US" sz="385" dirty="0"/>
           </a:p>
           <a:p>
             <a:pPr algn="ctr" indent="0" marL="0">
               <a:lnSpc>
-                <a:spcPct val="102000"/>
+                <a:spcPct val="100000"/>
               </a:lnSpc>
               <a:buNone/>
             </a:pPr>
             <a:r>
-              <a:rPr lang="en-US" sz="375" dirty="0">
+              <a:rPr lang="en-US" sz="350" dirty="0">
                 <a:solidFill>
                   <a:srgbClr val="202124"/>
                 </a:solidFill>
@@ -25344,24 +25424,24 @@
               </a:rPr>
               <a:t>inference</a:t>
             </a:r>
-            <a:endParaRPr lang="en-US" sz="410" dirty="0"/>
-          </a:p>
-        </p:txBody>
-      </p:sp>
-      <p:sp>
-        <p:nvSpPr>
-          <p:cNvPr id="217" name="Shape 195"/>
-          <p:cNvSpPr/>
-          <p:nvPr/>
-        </p:nvSpPr>
-        <p:spPr>
-          <a:xfrm>
-            <a:off x="3905402" y="3354019"/>
-            <a:ext cx="699516" cy="208483"/>
+            <a:endParaRPr lang="en-US" sz="385" dirty="0"/>
+          </a:p>
+        </p:txBody>
+      </p:sp>
+      <p:sp>
+        <p:nvSpPr>
+          <p:cNvPr id="221" name="Shape 199"/>
+          <p:cNvSpPr/>
+          <p:nvPr/>
+        </p:nvSpPr>
+        <p:spPr>
+          <a:xfrm>
+            <a:off x="3905402" y="3389681"/>
+            <a:ext cx="658368" cy="137160"/>
           </a:xfrm>
           <a:prstGeom prst="roundRect">
             <a:avLst>
-              <a:gd name="adj" fmla="val 21930"/>
+              <a:gd name="adj" fmla="val 30000"/>
             </a:avLst>
           </a:prstGeom>
           <a:solidFill>
@@ -25377,14 +25457,14 @@
       </p:sp>
       <p:sp>
         <p:nvSpPr>
-          <p:cNvPr id="218" name="Text 196"/>
-          <p:cNvSpPr/>
-          <p:nvPr/>
-        </p:nvSpPr>
-        <p:spPr>
-          <a:xfrm>
-            <a:off x="3925519" y="3363163"/>
-            <a:ext cx="659282" cy="190195"/>
+          <p:cNvPr id="222" name="Text 200"/>
+          <p:cNvSpPr/>
+          <p:nvPr/>
+        </p:nvSpPr>
+        <p:spPr>
+          <a:xfrm>
+            <a:off x="3923690" y="3395167"/>
+            <a:ext cx="621792" cy="126187"/>
           </a:xfrm>
           <a:prstGeom prst="rect">
             <a:avLst/>
@@ -25398,12 +25478,12 @@
           <a:p>
             <a:pPr algn="ctr" indent="0" marL="0">
               <a:lnSpc>
-                <a:spcPct val="102000"/>
+                <a:spcPct val="100000"/>
               </a:lnSpc>
               <a:buNone/>
             </a:pPr>
             <a:r>
-              <a:rPr lang="en-US" sz="410" b="1" dirty="0">
+              <a:rPr lang="en-US" sz="385" b="1" dirty="0">
                 <a:solidFill>
                   <a:srgbClr val="202124"/>
                 </a:solidFill>
@@ -25413,17 +25493,17 @@
               </a:rPr>
               <a:t>Seamless response</a:t>
             </a:r>
-            <a:endParaRPr lang="en-US" sz="410" dirty="0"/>
+            <a:endParaRPr lang="en-US" sz="385" dirty="0"/>
           </a:p>
           <a:p>
             <a:pPr algn="ctr" indent="0" marL="0">
               <a:lnSpc>
-                <a:spcPct val="102000"/>
+                <a:spcPct val="100000"/>
               </a:lnSpc>
               <a:buNone/>
             </a:pPr>
             <a:r>
-              <a:rPr lang="en-US" sz="375" dirty="0">
+              <a:rPr lang="en-US" sz="350" dirty="0">
                 <a:solidFill>
                   <a:srgbClr val="202124"/>
                 </a:solidFill>
@@ -25433,24 +25513,24 @@
               </a:rPr>
               <a:t>(0 dropped sessions)</a:t>
             </a:r>
-            <a:endParaRPr lang="en-US" sz="410" dirty="0"/>
-          </a:p>
-        </p:txBody>
-      </p:sp>
-      <p:sp>
-        <p:nvSpPr>
-          <p:cNvPr id="219" name="Shape 197"/>
-          <p:cNvSpPr/>
-          <p:nvPr/>
-        </p:nvSpPr>
-        <p:spPr>
-          <a:xfrm>
-            <a:off x="2983687" y="3354019"/>
-            <a:ext cx="681228" cy="208483"/>
+            <a:endParaRPr lang="en-US" sz="385" dirty="0"/>
+          </a:p>
+        </p:txBody>
+      </p:sp>
+      <p:sp>
+        <p:nvSpPr>
+          <p:cNvPr id="223" name="Shape 201"/>
+          <p:cNvSpPr/>
+          <p:nvPr/>
+        </p:nvSpPr>
+        <p:spPr>
+          <a:xfrm>
+            <a:off x="2983687" y="3389681"/>
+            <a:ext cx="669341" cy="137160"/>
           </a:xfrm>
           <a:prstGeom prst="roundRect">
             <a:avLst>
-              <a:gd name="adj" fmla="val 21930"/>
+              <a:gd name="adj" fmla="val 30000"/>
             </a:avLst>
           </a:prstGeom>
           <a:solidFill>
@@ -25466,14 +25546,14 @@
       </p:sp>
       <p:sp>
         <p:nvSpPr>
-          <p:cNvPr id="220" name="Text 198"/>
-          <p:cNvSpPr/>
-          <p:nvPr/>
-        </p:nvSpPr>
-        <p:spPr>
-          <a:xfrm>
-            <a:off x="3003804" y="3363163"/>
-            <a:ext cx="640994" cy="190195"/>
+          <p:cNvPr id="224" name="Text 202"/>
+          <p:cNvSpPr/>
+          <p:nvPr/>
+        </p:nvSpPr>
+        <p:spPr>
+          <a:xfrm>
+            <a:off x="3001975" y="3395167"/>
+            <a:ext cx="632765" cy="126187"/>
           </a:xfrm>
           <a:prstGeom prst="rect">
             <a:avLst/>
@@ -25487,12 +25567,12 @@
           <a:p>
             <a:pPr algn="ctr" indent="0" marL="0">
               <a:lnSpc>
-                <a:spcPct val="102000"/>
+                <a:spcPct val="100000"/>
               </a:lnSpc>
               <a:buNone/>
             </a:pPr>
             <a:r>
-              <a:rPr lang="en-US" sz="410" b="1" dirty="0">
+              <a:rPr lang="en-US" sz="385" b="1" dirty="0">
                 <a:solidFill>
                   <a:srgbClr val="202124"/>
                 </a:solidFill>
@@ -25502,17 +25582,17 @@
               </a:rPr>
               <a:t>Route Standard to Pool</a:t>
             </a:r>
-            <a:endParaRPr lang="en-US" sz="410" dirty="0"/>
+            <a:endParaRPr lang="en-US" sz="385" dirty="0"/>
           </a:p>
           <a:p>
             <a:pPr algn="ctr" indent="0" marL="0">
               <a:lnSpc>
-                <a:spcPct val="102000"/>
+                <a:spcPct val="100000"/>
               </a:lnSpc>
               <a:buNone/>
             </a:pPr>
             <a:r>
-              <a:rPr lang="en-US" sz="375" dirty="0">
+              <a:rPr lang="en-US" sz="350" dirty="0">
                 <a:solidFill>
                   <a:srgbClr val="202124"/>
                 </a:solidFill>
@@ -25522,24 +25602,24 @@
               </a:rPr>
               <a:t>or Enterprise via PSC</a:t>
             </a:r>
-            <a:endParaRPr lang="en-US" sz="410" dirty="0"/>
-          </a:p>
-        </p:txBody>
-      </p:sp>
-      <p:sp>
-        <p:nvSpPr>
-          <p:cNvPr id="221" name="Shape 199"/>
-          <p:cNvSpPr/>
-          <p:nvPr/>
-        </p:nvSpPr>
-        <p:spPr>
-          <a:xfrm>
-            <a:off x="2561234" y="2871216"/>
-            <a:ext cx="480060" cy="208483"/>
+            <a:endParaRPr lang="en-US" sz="385" dirty="0"/>
+          </a:p>
+        </p:txBody>
+      </p:sp>
+      <p:sp>
+        <p:nvSpPr>
+          <p:cNvPr id="225" name="Shape 203"/>
+          <p:cNvSpPr/>
+          <p:nvPr/>
+        </p:nvSpPr>
+        <p:spPr>
+          <a:xfrm>
+            <a:off x="2576779" y="2908706"/>
+            <a:ext cx="449885" cy="133502"/>
           </a:xfrm>
           <a:prstGeom prst="roundRect">
             <a:avLst>
-              <a:gd name="adj" fmla="val 21930"/>
+              <a:gd name="adj" fmla="val 30822"/>
             </a:avLst>
           </a:prstGeom>
           <a:solidFill>
@@ -25555,14 +25635,14 @@
       </p:sp>
       <p:sp>
         <p:nvSpPr>
-          <p:cNvPr id="222" name="Text 200"/>
-          <p:cNvSpPr/>
-          <p:nvPr/>
-        </p:nvSpPr>
-        <p:spPr>
-          <a:xfrm>
-            <a:off x="2581351" y="2880360"/>
-            <a:ext cx="439826" cy="190195"/>
+          <p:cNvPr id="226" name="Text 204"/>
+          <p:cNvSpPr/>
+          <p:nvPr/>
+        </p:nvSpPr>
+        <p:spPr>
+          <a:xfrm>
+            <a:off x="2595067" y="2914193"/>
+            <a:ext cx="413309" cy="122530"/>
           </a:xfrm>
           <a:prstGeom prst="rect">
             <a:avLst/>
@@ -25576,12 +25656,12 @@
           <a:p>
             <a:pPr algn="ctr" indent="0" marL="0">
               <a:lnSpc>
-                <a:spcPct val="102000"/>
+                <a:spcPct val="100000"/>
               </a:lnSpc>
               <a:buNone/>
             </a:pPr>
             <a:r>
-              <a:rPr lang="en-US" sz="410" b="1" dirty="0">
+              <a:rPr lang="en-US" sz="385" b="1" dirty="0">
                 <a:solidFill>
                   <a:srgbClr val="202124"/>
                 </a:solidFill>
@@ -25591,17 +25671,17 @@
               </a:rPr>
               <a:t>Atomic route</a:t>
             </a:r>
-            <a:endParaRPr lang="en-US" sz="410" dirty="0"/>
+            <a:endParaRPr lang="en-US" sz="385" dirty="0"/>
           </a:p>
           <a:p>
             <a:pPr algn="ctr" indent="0" marL="0">
               <a:lnSpc>
-                <a:spcPct val="102000"/>
+                <a:spcPct val="100000"/>
               </a:lnSpc>
               <a:buNone/>
             </a:pPr>
             <a:r>
-              <a:rPr lang="en-US" sz="375" dirty="0">
+              <a:rPr lang="en-US" sz="350" dirty="0">
                 <a:solidFill>
                   <a:srgbClr val="202124"/>
                 </a:solidFill>
@@ -25611,24 +25691,24 @@
               </a:rPr>
               <a:t>lookup</a:t>
             </a:r>
-            <a:endParaRPr lang="en-US" sz="410" dirty="0"/>
-          </a:p>
-        </p:txBody>
-      </p:sp>
-      <p:sp>
-        <p:nvSpPr>
-          <p:cNvPr id="223" name="Shape 201"/>
-          <p:cNvSpPr/>
-          <p:nvPr/>
-        </p:nvSpPr>
-        <p:spPr>
-          <a:xfrm>
-            <a:off x="1757477" y="4605833"/>
-            <a:ext cx="589788" cy="138989"/>
+            <a:endParaRPr lang="en-US" sz="385" dirty="0"/>
+          </a:p>
+        </p:txBody>
+      </p:sp>
+      <p:sp>
+        <p:nvSpPr>
+          <p:cNvPr id="227" name="Shape 205"/>
+          <p:cNvSpPr/>
+          <p:nvPr/>
+        </p:nvSpPr>
+        <p:spPr>
+          <a:xfrm>
+            <a:off x="1757477" y="4623206"/>
+            <a:ext cx="554126" cy="103327"/>
           </a:xfrm>
           <a:prstGeom prst="roundRect">
             <a:avLst>
-              <a:gd name="adj" fmla="val 32895"/>
+              <a:gd name="adj" fmla="val 39823"/>
             </a:avLst>
           </a:prstGeom>
           <a:solidFill>
@@ -25644,14 +25724,14 @@
       </p:sp>
       <p:sp>
         <p:nvSpPr>
-          <p:cNvPr id="224" name="Text 202"/>
-          <p:cNvSpPr/>
-          <p:nvPr/>
-        </p:nvSpPr>
-        <p:spPr>
-          <a:xfrm>
-            <a:off x="1777594" y="4614977"/>
-            <a:ext cx="549554" cy="120701"/>
+          <p:cNvPr id="228" name="Text 206"/>
+          <p:cNvSpPr/>
+          <p:nvPr/>
+        </p:nvSpPr>
+        <p:spPr>
+          <a:xfrm>
+            <a:off x="1775765" y="4628693"/>
+            <a:ext cx="517550" cy="92354"/>
           </a:xfrm>
           <a:prstGeom prst="rect">
             <a:avLst/>
@@ -25665,12 +25745,12 @@
           <a:p>
             <a:pPr algn="ctr" indent="0" marL="0">
               <a:lnSpc>
-                <a:spcPct val="102000"/>
+                <a:spcPct val="100000"/>
               </a:lnSpc>
               <a:buNone/>
             </a:pPr>
             <a:r>
-              <a:rPr lang="en-US" sz="410" b="1" dirty="0">
+              <a:rPr lang="en-US" sz="385" b="1" dirty="0">
                 <a:solidFill>
                   <a:srgbClr val="202124"/>
                 </a:solidFill>
@@ -25680,24 +25760,24 @@
               </a:rPr>
               <a:t>Sanitize request</a:t>
             </a:r>
-            <a:endParaRPr lang="en-US" sz="410" dirty="0"/>
-          </a:p>
-        </p:txBody>
-      </p:sp>
-      <p:sp>
-        <p:nvSpPr>
-          <p:cNvPr id="225" name="Shape 203"/>
-          <p:cNvSpPr/>
-          <p:nvPr/>
-        </p:nvSpPr>
-        <p:spPr>
-          <a:xfrm>
-            <a:off x="1757477" y="4814316"/>
-            <a:ext cx="617220" cy="138989"/>
+            <a:endParaRPr lang="en-US" sz="385" dirty="0"/>
+          </a:p>
+        </p:txBody>
+      </p:sp>
+      <p:sp>
+        <p:nvSpPr>
+          <p:cNvPr id="229" name="Shape 207"/>
+          <p:cNvSpPr/>
+          <p:nvPr/>
+        </p:nvSpPr>
+        <p:spPr>
+          <a:xfrm>
+            <a:off x="1757477" y="4831690"/>
+            <a:ext cx="580644" cy="103327"/>
           </a:xfrm>
           <a:prstGeom prst="roundRect">
             <a:avLst>
-              <a:gd name="adj" fmla="val 32895"/>
+              <a:gd name="adj" fmla="val 39823"/>
             </a:avLst>
           </a:prstGeom>
           <a:solidFill>
@@ -25713,14 +25793,14 @@
       </p:sp>
       <p:sp>
         <p:nvSpPr>
-          <p:cNvPr id="226" name="Text 204"/>
-          <p:cNvSpPr/>
-          <p:nvPr/>
-        </p:nvSpPr>
-        <p:spPr>
-          <a:xfrm>
-            <a:off x="1777594" y="4823460"/>
-            <a:ext cx="576986" cy="120701"/>
+          <p:cNvPr id="230" name="Text 208"/>
+          <p:cNvSpPr/>
+          <p:nvPr/>
+        </p:nvSpPr>
+        <p:spPr>
+          <a:xfrm>
+            <a:off x="1775765" y="4837176"/>
+            <a:ext cx="544068" cy="92354"/>
           </a:xfrm>
           <a:prstGeom prst="rect">
             <a:avLst/>
@@ -25734,12 +25814,12 @@
           <a:p>
             <a:pPr algn="ctr" indent="0" marL="0">
               <a:lnSpc>
-                <a:spcPct val="102000"/>
+                <a:spcPct val="100000"/>
               </a:lnSpc>
               <a:buNone/>
             </a:pPr>
             <a:r>
-              <a:rPr lang="en-US" sz="410" b="1" dirty="0">
+              <a:rPr lang="en-US" sz="385" b="1" dirty="0">
                 <a:solidFill>
                   <a:srgbClr val="202124"/>
                 </a:solidFill>
@@ -25749,24 +25829,24 @@
               </a:rPr>
               <a:t>Sanitize response</a:t>
             </a:r>
-            <a:endParaRPr lang="en-US" sz="410" dirty="0"/>
-          </a:p>
-        </p:txBody>
-      </p:sp>
-      <p:sp>
-        <p:nvSpPr>
-          <p:cNvPr id="227" name="Shape 205"/>
-          <p:cNvSpPr/>
-          <p:nvPr/>
-        </p:nvSpPr>
-        <p:spPr>
-          <a:xfrm>
-            <a:off x="2498141" y="2080260"/>
-            <a:ext cx="370332" cy="208483"/>
+            <a:endParaRPr lang="en-US" sz="385" dirty="0"/>
+          </a:p>
+        </p:txBody>
+      </p:sp>
+      <p:sp>
+        <p:nvSpPr>
+          <p:cNvPr id="231" name="Shape 209"/>
+          <p:cNvSpPr/>
+          <p:nvPr/>
+        </p:nvSpPr>
+        <p:spPr>
+          <a:xfrm>
+            <a:off x="2510942" y="2117750"/>
+            <a:ext cx="345643" cy="133502"/>
           </a:xfrm>
           <a:prstGeom prst="roundRect">
             <a:avLst>
-              <a:gd name="adj" fmla="val 21930"/>
+              <a:gd name="adj" fmla="val 30822"/>
             </a:avLst>
           </a:prstGeom>
           <a:solidFill>
@@ -25782,14 +25862,14 @@
       </p:sp>
       <p:sp>
         <p:nvSpPr>
-          <p:cNvPr id="228" name="Text 206"/>
-          <p:cNvSpPr/>
-          <p:nvPr/>
-        </p:nvSpPr>
-        <p:spPr>
-          <a:xfrm>
-            <a:off x="2518258" y="2089404"/>
-            <a:ext cx="330098" cy="190195"/>
+          <p:cNvPr id="232" name="Text 210"/>
+          <p:cNvSpPr/>
+          <p:nvPr/>
+        </p:nvSpPr>
+        <p:spPr>
+          <a:xfrm>
+            <a:off x="2529230" y="2123237"/>
+            <a:ext cx="309067" cy="122530"/>
           </a:xfrm>
           <a:prstGeom prst="rect">
             <a:avLst/>
@@ -25803,12 +25883,12 @@
           <a:p>
             <a:pPr algn="ctr" indent="0" marL="0">
               <a:lnSpc>
-                <a:spcPct val="102000"/>
+                <a:spcPct val="100000"/>
               </a:lnSpc>
               <a:buNone/>
             </a:pPr>
             <a:r>
-              <a:rPr lang="en-US" sz="410" b="1" dirty="0">
+              <a:rPr lang="en-US" sz="385" b="1" dirty="0">
                 <a:solidFill>
                   <a:srgbClr val="202124"/>
                 </a:solidFill>
@@ -25818,17 +25898,17 @@
               </a:rPr>
               <a:t>Security</a:t>
             </a:r>
-            <a:endParaRPr lang="en-US" sz="410" dirty="0"/>
+            <a:endParaRPr lang="en-US" sz="385" dirty="0"/>
           </a:p>
           <a:p>
             <a:pPr algn="ctr" indent="0" marL="0">
               <a:lnSpc>
-                <a:spcPct val="102000"/>
+                <a:spcPct val="100000"/>
               </a:lnSpc>
               <a:buNone/>
             </a:pPr>
             <a:r>
-              <a:rPr lang="en-US" sz="375" dirty="0">
+              <a:rPr lang="en-US" sz="350" dirty="0">
                 <a:solidFill>
                   <a:srgbClr val="202124"/>
                 </a:solidFill>
@@ -25838,24 +25918,24 @@
               </a:rPr>
               <a:t>policies</a:t>
             </a:r>
-            <a:endParaRPr lang="en-US" sz="410" dirty="0"/>
-          </a:p>
-        </p:txBody>
-      </p:sp>
-      <p:sp>
-        <p:nvSpPr>
-          <p:cNvPr id="229" name="Shape 207"/>
-          <p:cNvSpPr/>
-          <p:nvPr/>
-        </p:nvSpPr>
-        <p:spPr>
-          <a:xfrm>
-            <a:off x="2457907" y="2625242"/>
-            <a:ext cx="452628" cy="208483"/>
+            <a:endParaRPr lang="en-US" sz="385" dirty="0"/>
+          </a:p>
+        </p:txBody>
+      </p:sp>
+      <p:sp>
+        <p:nvSpPr>
+          <p:cNvPr id="233" name="Shape 211"/>
+          <p:cNvSpPr/>
+          <p:nvPr/>
+        </p:nvSpPr>
+        <p:spPr>
+          <a:xfrm>
+            <a:off x="2471623" y="2717597"/>
+            <a:ext cx="424282" cy="133502"/>
           </a:xfrm>
           <a:prstGeom prst="roundRect">
             <a:avLst>
-              <a:gd name="adj" fmla="val 21930"/>
+              <a:gd name="adj" fmla="val 30822"/>
             </a:avLst>
           </a:prstGeom>
           <a:solidFill>
@@ -25871,14 +25951,14 @@
       </p:sp>
       <p:sp>
         <p:nvSpPr>
-          <p:cNvPr id="230" name="Text 208"/>
-          <p:cNvSpPr/>
-          <p:nvPr/>
-        </p:nvSpPr>
-        <p:spPr>
-          <a:xfrm>
-            <a:off x="2478024" y="2634386"/>
-            <a:ext cx="412394" cy="190195"/>
+          <p:cNvPr id="234" name="Text 212"/>
+          <p:cNvSpPr/>
+          <p:nvPr/>
+        </p:nvSpPr>
+        <p:spPr>
+          <a:xfrm>
+            <a:off x="2489911" y="2723083"/>
+            <a:ext cx="387706" cy="122530"/>
           </a:xfrm>
           <a:prstGeom prst="rect">
             <a:avLst/>
@@ -25892,12 +25972,12 @@
           <a:p>
             <a:pPr algn="ctr" indent="0" marL="0">
               <a:lnSpc>
-                <a:spcPct val="102000"/>
+                <a:spcPct val="100000"/>
               </a:lnSpc>
               <a:buNone/>
             </a:pPr>
             <a:r>
-              <a:rPr lang="en-US" sz="410" b="1" dirty="0">
+              <a:rPr lang="en-US" sz="385" b="1" dirty="0">
                 <a:solidFill>
                   <a:srgbClr val="202124"/>
                 </a:solidFill>
@@ -25907,17 +25987,17 @@
               </a:rPr>
               <a:t>Resolve</a:t>
             </a:r>
-            <a:endParaRPr lang="en-US" sz="410" dirty="0"/>
+            <a:endParaRPr lang="en-US" sz="385" dirty="0"/>
           </a:p>
           <a:p>
             <a:pPr algn="ctr" indent="0" marL="0">
               <a:lnSpc>
-                <a:spcPct val="102000"/>
+                <a:spcPct val="100000"/>
               </a:lnSpc>
               <a:buNone/>
             </a:pPr>
             <a:r>
-              <a:rPr lang="en-US" sz="375" dirty="0">
+              <a:rPr lang="en-US" sz="350" dirty="0">
                 <a:solidFill>
                   <a:srgbClr val="202124"/>
                 </a:solidFill>
@@ -25927,24 +26007,24 @@
               </a:rPr>
               <a:t>agent route</a:t>
             </a:r>
-            <a:endParaRPr lang="en-US" sz="410" dirty="0"/>
-          </a:p>
-        </p:txBody>
-      </p:sp>
-      <p:sp>
-        <p:nvSpPr>
-          <p:cNvPr id="231" name="Shape 209"/>
-          <p:cNvSpPr/>
-          <p:nvPr/>
-        </p:nvSpPr>
-        <p:spPr>
-          <a:xfrm>
-            <a:off x="3888029" y="1144829"/>
-            <a:ext cx="370332" cy="138989"/>
+            <a:endParaRPr lang="en-US" sz="385" dirty="0"/>
+          </a:p>
+        </p:txBody>
+      </p:sp>
+      <p:sp>
+        <p:nvSpPr>
+          <p:cNvPr id="235" name="Shape 213"/>
+          <p:cNvSpPr/>
+          <p:nvPr/>
+        </p:nvSpPr>
+        <p:spPr>
+          <a:xfrm>
+            <a:off x="3888029" y="1163117"/>
+            <a:ext cx="345643" cy="103327"/>
           </a:xfrm>
           <a:prstGeom prst="roundRect">
             <a:avLst>
-              <a:gd name="adj" fmla="val 32895"/>
+              <a:gd name="adj" fmla="val 39823"/>
             </a:avLst>
           </a:prstGeom>
           <a:solidFill>
@@ -25960,14 +26040,14 @@
       </p:sp>
       <p:sp>
         <p:nvSpPr>
-          <p:cNvPr id="232" name="Text 210"/>
-          <p:cNvSpPr/>
-          <p:nvPr/>
-        </p:nvSpPr>
-        <p:spPr>
-          <a:xfrm>
-            <a:off x="3908146" y="1153973"/>
-            <a:ext cx="330098" cy="120701"/>
+          <p:cNvPr id="236" name="Text 214"/>
+          <p:cNvSpPr/>
+          <p:nvPr/>
+        </p:nvSpPr>
+        <p:spPr>
+          <a:xfrm>
+            <a:off x="3906317" y="1168603"/>
+            <a:ext cx="309067" cy="92354"/>
           </a:xfrm>
           <a:prstGeom prst="rect">
             <a:avLst/>
@@ -25981,12 +26061,12 @@
           <a:p>
             <a:pPr algn="ctr" indent="0" marL="0">
               <a:lnSpc>
-                <a:spcPct val="102000"/>
+                <a:spcPct val="100000"/>
               </a:lnSpc>
               <a:buNone/>
             </a:pPr>
             <a:r>
-              <a:rPr lang="en-US" sz="410" b="1" dirty="0">
+              <a:rPr lang="en-US" sz="385" b="1" dirty="0">
                 <a:solidFill>
                   <a:srgbClr val="202124"/>
                 </a:solidFill>
@@ -25996,24 +26076,24 @@
               </a:rPr>
               <a:t>Response</a:t>
             </a:r>
-            <a:endParaRPr lang="en-US" sz="410" dirty="0"/>
-          </a:p>
-        </p:txBody>
-      </p:sp>
-      <p:sp>
-        <p:nvSpPr>
-          <p:cNvPr id="233" name="Shape 211"/>
-          <p:cNvSpPr/>
-          <p:nvPr/>
-        </p:nvSpPr>
-        <p:spPr>
-          <a:xfrm>
-            <a:off x="3888029" y="2723083"/>
-            <a:ext cx="370332" cy="138989"/>
+            <a:endParaRPr lang="en-US" sz="385" dirty="0"/>
+          </a:p>
+        </p:txBody>
+      </p:sp>
+      <p:sp>
+        <p:nvSpPr>
+          <p:cNvPr id="237" name="Shape 215"/>
+          <p:cNvSpPr/>
+          <p:nvPr/>
+        </p:nvSpPr>
+        <p:spPr>
+          <a:xfrm>
+            <a:off x="3888029" y="2740457"/>
+            <a:ext cx="345643" cy="103327"/>
           </a:xfrm>
           <a:prstGeom prst="roundRect">
             <a:avLst>
-              <a:gd name="adj" fmla="val 32895"/>
+              <a:gd name="adj" fmla="val 39823"/>
             </a:avLst>
           </a:prstGeom>
           <a:solidFill>
@@ -26029,14 +26109,14 @@
       </p:sp>
       <p:sp>
         <p:nvSpPr>
-          <p:cNvPr id="234" name="Text 212"/>
-          <p:cNvSpPr/>
-          <p:nvPr/>
-        </p:nvSpPr>
-        <p:spPr>
-          <a:xfrm>
-            <a:off x="3908146" y="2732227"/>
-            <a:ext cx="330098" cy="120701"/>
+          <p:cNvPr id="238" name="Text 216"/>
+          <p:cNvSpPr/>
+          <p:nvPr/>
+        </p:nvSpPr>
+        <p:spPr>
+          <a:xfrm>
+            <a:off x="3906317" y="2745943"/>
+            <a:ext cx="309067" cy="92354"/>
           </a:xfrm>
           <a:prstGeom prst="rect">
             <a:avLst/>
@@ -26050,12 +26130,12 @@
           <a:p>
             <a:pPr algn="ctr" indent="0" marL="0">
               <a:lnSpc>
-                <a:spcPct val="102000"/>
+                <a:spcPct val="100000"/>
               </a:lnSpc>
               <a:buNone/>
             </a:pPr>
             <a:r>
-              <a:rPr lang="en-US" sz="410" b="1" dirty="0">
+              <a:rPr lang="en-US" sz="385" b="1" dirty="0">
                 <a:solidFill>
                   <a:srgbClr val="202124"/>
                 </a:solidFill>
@@ -26065,24 +26145,24 @@
               </a:rPr>
               <a:t>Response</a:t>
             </a:r>
-            <a:endParaRPr lang="en-US" sz="410" dirty="0"/>
-          </a:p>
-        </p:txBody>
-      </p:sp>
-      <p:sp>
-        <p:nvSpPr>
-          <p:cNvPr id="235" name="Shape 213"/>
-          <p:cNvSpPr/>
-          <p:nvPr/>
-        </p:nvSpPr>
-        <p:spPr>
-          <a:xfrm>
-            <a:off x="3144622" y="1144829"/>
-            <a:ext cx="342900" cy="138989"/>
+            <a:endParaRPr lang="en-US" sz="385" dirty="0"/>
+          </a:p>
+        </p:txBody>
+      </p:sp>
+      <p:sp>
+        <p:nvSpPr>
+          <p:cNvPr id="239" name="Shape 217"/>
+          <p:cNvSpPr/>
+          <p:nvPr/>
+        </p:nvSpPr>
+        <p:spPr>
+          <a:xfrm>
+            <a:off x="3167482" y="1163117"/>
+            <a:ext cx="320040" cy="103327"/>
           </a:xfrm>
           <a:prstGeom prst="roundRect">
             <a:avLst>
-              <a:gd name="adj" fmla="val 32895"/>
+              <a:gd name="adj" fmla="val 39823"/>
             </a:avLst>
           </a:prstGeom>
           <a:solidFill>
@@ -26098,14 +26178,14 @@
       </p:sp>
       <p:sp>
         <p:nvSpPr>
-          <p:cNvPr id="236" name="Text 214"/>
-          <p:cNvSpPr/>
-          <p:nvPr/>
-        </p:nvSpPr>
-        <p:spPr>
-          <a:xfrm>
-            <a:off x="3164738" y="1153973"/>
-            <a:ext cx="302666" cy="120701"/>
+          <p:cNvPr id="240" name="Text 218"/>
+          <p:cNvSpPr/>
+          <p:nvPr/>
+        </p:nvSpPr>
+        <p:spPr>
+          <a:xfrm>
+            <a:off x="3185770" y="1168603"/>
+            <a:ext cx="283464" cy="92354"/>
           </a:xfrm>
           <a:prstGeom prst="rect">
             <a:avLst/>
@@ -26119,12 +26199,12 @@
           <a:p>
             <a:pPr algn="ctr" indent="0" marL="0">
               <a:lnSpc>
-                <a:spcPct val="102000"/>
+                <a:spcPct val="100000"/>
               </a:lnSpc>
               <a:buNone/>
             </a:pPr>
             <a:r>
-              <a:rPr lang="en-US" sz="410" b="1" dirty="0">
+              <a:rPr lang="en-US" sz="385" b="1" dirty="0">
                 <a:solidFill>
                   <a:srgbClr val="202124"/>
                 </a:solidFill>
@@ -26134,24 +26214,24 @@
               </a:rPr>
               <a:t>Request</a:t>
             </a:r>
-            <a:endParaRPr lang="en-US" sz="410" dirty="0"/>
-          </a:p>
-        </p:txBody>
-      </p:sp>
-      <p:sp>
-        <p:nvSpPr>
-          <p:cNvPr id="237" name="Shape 215"/>
-          <p:cNvSpPr/>
-          <p:nvPr/>
-        </p:nvSpPr>
-        <p:spPr>
-          <a:xfrm>
-            <a:off x="3144622" y="2723083"/>
-            <a:ext cx="342900" cy="138989"/>
+            <a:endParaRPr lang="en-US" sz="385" dirty="0"/>
+          </a:p>
+        </p:txBody>
+      </p:sp>
+      <p:sp>
+        <p:nvSpPr>
+          <p:cNvPr id="241" name="Shape 219"/>
+          <p:cNvSpPr/>
+          <p:nvPr/>
+        </p:nvSpPr>
+        <p:spPr>
+          <a:xfrm>
+            <a:off x="3167482" y="2740457"/>
+            <a:ext cx="320040" cy="103327"/>
           </a:xfrm>
           <a:prstGeom prst="roundRect">
             <a:avLst>
-              <a:gd name="adj" fmla="val 32895"/>
+              <a:gd name="adj" fmla="val 39823"/>
             </a:avLst>
           </a:prstGeom>
           <a:solidFill>
@@ -26167,14 +26247,14 @@
       </p:sp>
       <p:sp>
         <p:nvSpPr>
-          <p:cNvPr id="238" name="Text 216"/>
-          <p:cNvSpPr/>
-          <p:nvPr/>
-        </p:nvSpPr>
-        <p:spPr>
-          <a:xfrm>
-            <a:off x="3164738" y="2732227"/>
-            <a:ext cx="302666" cy="120701"/>
+          <p:cNvPr id="242" name="Text 220"/>
+          <p:cNvSpPr/>
+          <p:nvPr/>
+        </p:nvSpPr>
+        <p:spPr>
+          <a:xfrm>
+            <a:off x="3185770" y="2745943"/>
+            <a:ext cx="283464" cy="92354"/>
           </a:xfrm>
           <a:prstGeom prst="rect">
             <a:avLst/>
@@ -26188,12 +26268,12 @@
           <a:p>
             <a:pPr algn="ctr" indent="0" marL="0">
               <a:lnSpc>
-                <a:spcPct val="102000"/>
+                <a:spcPct val="100000"/>
               </a:lnSpc>
               <a:buNone/>
             </a:pPr>
             <a:r>
-              <a:rPr lang="en-US" sz="410" b="1" dirty="0">
+              <a:rPr lang="en-US" sz="385" b="1" dirty="0">
                 <a:solidFill>
                   <a:srgbClr val="202124"/>
                 </a:solidFill>
@@ -26203,13 +26283,13 @@
               </a:rPr>
               <a:t>Request</a:t>
             </a:r>
-            <a:endParaRPr lang="en-US" sz="410" dirty="0"/>
-          </a:p>
-        </p:txBody>
-      </p:sp>
-      <p:sp>
-        <p:nvSpPr>
-          <p:cNvPr id="239" name="Text 217"/>
+            <a:endParaRPr lang="en-US" sz="385" dirty="0"/>
+          </a:p>
+        </p:txBody>
+      </p:sp>
+      <p:sp>
+        <p:nvSpPr>
+          <p:cNvPr id="243" name="Text 221"/>
           <p:cNvSpPr/>
           <p:nvPr/>
         </p:nvSpPr>
